--- a/slides/ACCU-Separation-of-Concerns-at-Zero-Cost.pptx
+++ b/slides/ACCU-Separation-of-Concerns-at-Zero-Cost.pptx
@@ -10562,7 +10562,7 @@
       </p:sp>
       <p:sp>
         <p:nvSpPr>
-          <p:cNvPr id="5" name="TextBox 4"/>
+          <p:cNvPr id="5" name="code:tags"/>
           <p:cNvSpPr txBox="1"/>
           <p:nvPr/>
         </p:nvSpPr>
@@ -11681,7 +11681,7 @@
       </p:sp>
       <p:sp>
         <p:nvSpPr>
-          <p:cNvPr id="5" name="TextBox 4"/>
+          <p:cNvPr id="5" name="code:pointmass"/>
           <p:cNvSpPr txBox="1"/>
           <p:nvPr/>
         </p:nvSpPr>
@@ -14580,7 +14580,7 @@
       </p:sp>
       <p:sp>
         <p:nvSpPr>
-          <p:cNvPr id="5" name="TextBox 4"/>
+          <p:cNvPr id="5" name="code:spring"/>
           <p:cNvSpPr txBox="1"/>
           <p:nvPr/>
         </p:nvSpPr>
@@ -17308,7 +17308,7 @@
       </p:sp>
       <p:sp>
         <p:nvSpPr>
-          <p:cNvPr id="5" name="TextBox 4"/>
+          <p:cNvPr id="5" name="code:energy"/>
           <p:cNvSpPr txBox="1"/>
           <p:nvPr/>
         </p:nvSpPr>
@@ -20056,7 +20056,7 @@
       </p:sp>
       <p:sp>
         <p:nvSpPr>
-          <p:cNvPr id="5" name="TextBox 4"/>
+          <p:cNvPr id="5" name="code:wiring"/>
           <p:cNvSpPr txBox="1"/>
           <p:nvPr/>
         </p:nvSpPr>
@@ -23439,7 +23439,7 @@
       </p:sp>
       <p:sp>
         <p:nvSpPr>
-          <p:cNvPr id="5" name="TextBox 4"/>
+          <p:cNvPr id="5" name="code:registry"/>
           <p:cNvSpPr txBox="1"/>
           <p:nvPr/>
         </p:nvSpPr>
@@ -25441,7 +25441,7 @@
       </p:sp>
       <p:sp>
         <p:nvSpPr>
-          <p:cNvPr id="5" name="TextBox 4"/>
+          <p:cNvPr id="5" name="code:concepts"/>
           <p:cNvSpPr txBox="1"/>
           <p:nvPr/>
         </p:nvSpPr>
@@ -31989,7 +31989,7 @@
       </p:sp>
       <p:sp>
         <p:nvSpPr>
-          <p:cNvPr id="5" name="TextBox 4"/>
+          <p:cNvPr id="5" name="code:autodiff"/>
           <p:cNvSpPr txBox="1"/>
           <p:nvPr/>
         </p:nvSpPr>

--- a/slides/ACCU-Separation-of-Concerns-at-Zero-Cost.pptx
+++ b/slides/ACCU-Separation-of-Concerns-at-Zero-Cost.pptx
@@ -10573,7 +10573,7 @@
             <a:r>
               <a:rPr sz="1250">
                 <a:solidFill>
-                  <a:srgbClr val="D4D4D4"/>
+                  <a:srgbClr val="4EC9B0"/>
                 </a:solidFill>
                 <a:latin typeface="Consolas"/>
               </a:rPr>
@@ -10742,7 +10742,7 @@
             <a:r>
               <a:rPr sz="1250">
                 <a:solidFill>
-                  <a:srgbClr val="D4D4D4"/>
+                  <a:srgbClr val="4EC9B0"/>
                 </a:solidFill>
                 <a:latin typeface="Consolas"/>
               </a:rPr>
@@ -11004,7 +11004,7 @@
             <a:r>
               <a:rPr sz="1250">
                 <a:solidFill>
-                  <a:srgbClr val="D4D4D4"/>
+                  <a:srgbClr val="4EC9B0"/>
                 </a:solidFill>
                 <a:latin typeface="Consolas"/>
               </a:rPr>
@@ -11227,7 +11227,7 @@
             <a:r>
               <a:rPr sz="1250">
                 <a:solidFill>
-                  <a:srgbClr val="D4D4D4"/>
+                  <a:srgbClr val="4EC9B0"/>
                 </a:solidFill>
                 <a:latin typeface="Consolas"/>
               </a:rPr>
@@ -12092,7 +12092,7 @@
             <a:r>
               <a:rPr sz="1250">
                 <a:solidFill>
-                  <a:srgbClr val="D4D4D4"/>
+                  <a:srgbClr val="4EC9B0"/>
                 </a:solidFill>
                 <a:latin typeface="Consolas"/>
               </a:rPr>
@@ -12261,7 +12261,7 @@
             <a:r>
               <a:rPr sz="1250">
                 <a:solidFill>
-                  <a:srgbClr val="D4D4D4"/>
+                  <a:srgbClr val="4EC9B0"/>
                 </a:solidFill>
                 <a:latin typeface="Consolas"/>
               </a:rPr>
@@ -12635,7 +12635,7 @@
             <a:r>
               <a:rPr sz="1250">
                 <a:solidFill>
-                  <a:srgbClr val="D4D4D4"/>
+                  <a:srgbClr val="4EC9B0"/>
                 </a:solidFill>
                 <a:latin typeface="Consolas"/>
               </a:rPr>
@@ -12804,7 +12804,7 @@
             <a:r>
               <a:rPr sz="1250">
                 <a:solidFill>
-                  <a:srgbClr val="D4D4D4"/>
+                  <a:srgbClr val="4EC9B0"/>
                 </a:solidFill>
                 <a:latin typeface="Consolas"/>
               </a:rPr>
@@ -13393,7 +13393,7 @@
             <a:r>
               <a:rPr sz="1250">
                 <a:solidFill>
-                  <a:srgbClr val="D4D4D4"/>
+                  <a:srgbClr val="4EC9B0"/>
                 </a:solidFill>
                 <a:latin typeface="Consolas"/>
               </a:rPr>
@@ -13562,7 +13562,7 @@
             <a:r>
               <a:rPr sz="1250">
                 <a:solidFill>
-                  <a:srgbClr val="D4D4D4"/>
+                  <a:srgbClr val="4EC9B0"/>
                 </a:solidFill>
                 <a:latin typeface="Consolas"/>
               </a:rPr>
@@ -13932,7 +13932,7 @@
             <a:r>
               <a:rPr sz="1250">
                 <a:solidFill>
-                  <a:srgbClr val="D4D4D4"/>
+                  <a:srgbClr val="4EC9B0"/>
                 </a:solidFill>
                 <a:latin typeface="Consolas"/>
               </a:rPr>
@@ -14101,7 +14101,7 @@
             <a:r>
               <a:rPr sz="1250">
                 <a:solidFill>
-                  <a:srgbClr val="D4D4D4"/>
+                  <a:srgbClr val="4EC9B0"/>
                 </a:solidFill>
                 <a:latin typeface="Consolas"/>
               </a:rPr>
@@ -15144,7 +15144,7 @@
             <a:r>
               <a:rPr sz="1250">
                 <a:solidFill>
-                  <a:srgbClr val="D4D4D4"/>
+                  <a:srgbClr val="4EC9B0"/>
                 </a:solidFill>
                 <a:latin typeface="Consolas"/>
               </a:rPr>
@@ -15313,7 +15313,7 @@
             <a:r>
               <a:rPr sz="1250">
                 <a:solidFill>
-                  <a:srgbClr val="D4D4D4"/>
+                  <a:srgbClr val="4EC9B0"/>
                 </a:solidFill>
                 <a:latin typeface="Consolas"/>
               </a:rPr>
@@ -15500,7 +15500,7 @@
             <a:r>
               <a:rPr sz="1250">
                 <a:solidFill>
-                  <a:srgbClr val="D4D4D4"/>
+                  <a:srgbClr val="4EC9B0"/>
                 </a:solidFill>
                 <a:latin typeface="Consolas"/>
               </a:rPr>
@@ -15916,7 +15916,7 @@
             <a:r>
               <a:rPr sz="1300">
                 <a:solidFill>
-                  <a:srgbClr val="D4D4D4"/>
+                  <a:srgbClr val="4EC9B0"/>
                 </a:solidFill>
                 <a:latin typeface="Consolas"/>
               </a:rPr>
@@ -16085,7 +16085,7 @@
             <a:r>
               <a:rPr sz="1300">
                 <a:solidFill>
-                  <a:srgbClr val="D4D4D4"/>
+                  <a:srgbClr val="4EC9B0"/>
                 </a:solidFill>
                 <a:latin typeface="Consolas"/>
               </a:rPr>
@@ -16340,7 +16340,7 @@
             <a:r>
               <a:rPr sz="1300">
                 <a:solidFill>
-                  <a:srgbClr val="D4D4D4"/>
+                  <a:srgbClr val="4EC9B0"/>
                 </a:solidFill>
                 <a:latin typeface="Consolas"/>
               </a:rPr>
@@ -16509,7 +16509,7 @@
             <a:r>
               <a:rPr sz="1300">
                 <a:solidFill>
-                  <a:srgbClr val="D4D4D4"/>
+                  <a:srgbClr val="4EC9B0"/>
                 </a:solidFill>
                 <a:latin typeface="Consolas"/>
               </a:rPr>
@@ -16705,7 +16705,7 @@
             <a:r>
               <a:rPr sz="1300">
                 <a:solidFill>
-                  <a:srgbClr val="D4D4D4"/>
+                  <a:srgbClr val="4EC9B0"/>
                 </a:solidFill>
                 <a:latin typeface="Consolas"/>
               </a:rPr>
@@ -16901,7 +16901,7 @@
             <a:r>
               <a:rPr sz="1300">
                 <a:solidFill>
-                  <a:srgbClr val="D4D4D4"/>
+                  <a:srgbClr val="4EC9B0"/>
                 </a:solidFill>
                 <a:latin typeface="Consolas"/>
               </a:rPr>
@@ -17097,7 +17097,7 @@
             <a:r>
               <a:rPr sz="1300">
                 <a:solidFill>
-                  <a:srgbClr val="D4D4D4"/>
+                  <a:srgbClr val="4EC9B0"/>
                 </a:solidFill>
                 <a:latin typeface="Consolas"/>
               </a:rPr>
@@ -17293,7 +17293,7 @@
             <a:r>
               <a:rPr sz="1300">
                 <a:solidFill>
-                  <a:srgbClr val="D4D4D4"/>
+                  <a:srgbClr val="4EC9B0"/>
                 </a:solidFill>
                 <a:latin typeface="Consolas"/>
               </a:rPr>
@@ -17489,7 +17489,7 @@
             <a:r>
               <a:rPr sz="1300">
                 <a:solidFill>
-                  <a:srgbClr val="D4D4D4"/>
+                  <a:srgbClr val="4EC9B0"/>
                 </a:solidFill>
                 <a:latin typeface="Consolas"/>
               </a:rPr>
@@ -18744,7 +18744,7 @@
             <a:r>
               <a:rPr sz="1400">
                 <a:solidFill>
-                  <a:srgbClr val="D4D4D4"/>
+                  <a:srgbClr val="4EC9B0"/>
                 </a:solidFill>
                 <a:latin typeface="Consolas"/>
               </a:rPr>
@@ -18922,7 +18922,7 @@
             <a:r>
               <a:rPr sz="1400">
                 <a:solidFill>
-                  <a:srgbClr val="D4D4D4"/>
+                  <a:srgbClr val="4EC9B0"/>
                 </a:solidFill>
                 <a:latin typeface="Consolas"/>
               </a:rPr>
@@ -19100,7 +19100,7 @@
             <a:r>
               <a:rPr sz="1400">
                 <a:solidFill>
-                  <a:srgbClr val="D4D4D4"/>
+                  <a:srgbClr val="4EC9B0"/>
                 </a:solidFill>
                 <a:latin typeface="Consolas"/>
               </a:rPr>
@@ -19251,7 +19251,7 @@
             <a:r>
               <a:rPr sz="1400">
                 <a:solidFill>
-                  <a:srgbClr val="D4D4D4"/>
+                  <a:srgbClr val="4EC9B0"/>
                 </a:solidFill>
                 <a:latin typeface="Consolas"/>
               </a:rPr>
@@ -19557,7 +19557,7 @@
             <a:r>
               <a:rPr sz="1400">
                 <a:solidFill>
-                  <a:srgbClr val="D4D4D4"/>
+                  <a:srgbClr val="4EC9B0"/>
                 </a:solidFill>
                 <a:latin typeface="Consolas"/>
               </a:rPr>
@@ -20113,7 +20113,7 @@
             <a:r>
               <a:rPr sz="1400">
                 <a:solidFill>
-                  <a:srgbClr val="D4D4D4"/>
+                  <a:srgbClr val="4EC9B0"/>
                 </a:solidFill>
                 <a:latin typeface="Consolas"/>
               </a:rPr>
@@ -21702,7 +21702,7 @@
             <a:r>
               <a:rPr sz="1300">
                 <a:solidFill>
-                  <a:srgbClr val="D4D4D4"/>
+                  <a:srgbClr val="4EC9B0"/>
                 </a:solidFill>
                 <a:latin typeface="Consolas"/>
               </a:rPr>
@@ -21747,7 +21747,7 @@
             <a:r>
               <a:rPr sz="1300">
                 <a:solidFill>
-                  <a:srgbClr val="D4D4D4"/>
+                  <a:srgbClr val="4EC9B0"/>
                 </a:solidFill>
                 <a:latin typeface="Consolas"/>
               </a:rPr>
@@ -21896,7 +21896,7 @@
             <a:r>
               <a:rPr sz="1300">
                 <a:solidFill>
-                  <a:srgbClr val="D4D4D4"/>
+                  <a:srgbClr val="4EC9B0"/>
                 </a:solidFill>
                 <a:latin typeface="Consolas"/>
               </a:rPr>
@@ -22024,7 +22024,7 @@
             <a:r>
               <a:rPr sz="1300">
                 <a:solidFill>
-                  <a:srgbClr val="D4D4D4"/>
+                  <a:srgbClr val="4EC9B0"/>
                 </a:solidFill>
                 <a:latin typeface="Consolas"/>
               </a:rPr>
@@ -22042,7 +22042,7 @@
             <a:r>
               <a:rPr sz="1300">
                 <a:solidFill>
-                  <a:srgbClr val="D4D4D4"/>
+                  <a:srgbClr val="4EC9B0"/>
                 </a:solidFill>
                 <a:latin typeface="Consolas"/>
               </a:rPr>
@@ -22506,7 +22506,7 @@
             <a:r>
               <a:rPr sz="1300">
                 <a:solidFill>
-                  <a:srgbClr val="D4D4D4"/>
+                  <a:srgbClr val="4EC9B0"/>
                 </a:solidFill>
                 <a:latin typeface="Consolas"/>
               </a:rPr>
@@ -22524,7 +22524,7 @@
             <a:r>
               <a:rPr sz="1300">
                 <a:solidFill>
-                  <a:srgbClr val="D4D4D4"/>
+                  <a:srgbClr val="4EC9B0"/>
                 </a:solidFill>
                 <a:latin typeface="Consolas"/>
               </a:rPr>
@@ -23011,7 +23011,7 @@
             <a:r>
               <a:rPr sz="1300">
                 <a:solidFill>
-                  <a:srgbClr val="D4D4D4"/>
+                  <a:srgbClr val="4EC9B0"/>
                 </a:solidFill>
                 <a:latin typeface="Consolas"/>
               </a:rPr>
@@ -23144,7 +23144,7 @@
             <a:r>
               <a:rPr sz="1300">
                 <a:solidFill>
-                  <a:srgbClr val="D4D4D4"/>
+                  <a:srgbClr val="4EC9B0"/>
                 </a:solidFill>
                 <a:latin typeface="Consolas"/>
               </a:rPr>
@@ -24200,7 +24200,7 @@
             <a:r>
               <a:rPr sz="1400">
                 <a:solidFill>
-                  <a:srgbClr val="D4D4D4"/>
+                  <a:srgbClr val="4EC9B0"/>
                 </a:solidFill>
                 <a:latin typeface="Consolas"/>
               </a:rPr>
@@ -24545,7 +24545,7 @@
             <a:r>
               <a:rPr sz="1400">
                 <a:solidFill>
-                  <a:srgbClr val="D4D4D4"/>
+                  <a:srgbClr val="4EC9B0"/>
                 </a:solidFill>
                 <a:latin typeface="Consolas"/>
               </a:rPr>
@@ -24617,7 +24617,7 @@
             <a:r>
               <a:rPr sz="1400">
                 <a:solidFill>
-                  <a:srgbClr val="D4D4D4"/>
+                  <a:srgbClr val="4EC9B0"/>
                 </a:solidFill>
                 <a:latin typeface="Consolas"/>
               </a:rPr>
@@ -24635,7 +24635,7 @@
             <a:r>
               <a:rPr sz="1400">
                 <a:solidFill>
-                  <a:srgbClr val="D4D4D4"/>
+                  <a:srgbClr val="4EC9B0"/>
                 </a:solidFill>
                 <a:latin typeface="Consolas"/>
               </a:rPr>
@@ -24921,7 +24921,7 @@
             <a:r>
               <a:rPr sz="1400">
                 <a:solidFill>
-                  <a:srgbClr val="D4D4D4"/>
+                  <a:srgbClr val="4EC9B0"/>
                 </a:solidFill>
                 <a:latin typeface="Consolas"/>
               </a:rPr>
@@ -25036,7 +25036,7 @@
             <a:r>
               <a:rPr sz="1400">
                 <a:solidFill>
-                  <a:srgbClr val="D4D4D4"/>
+                  <a:srgbClr val="4EC9B0"/>
                 </a:solidFill>
                 <a:latin typeface="Consolas"/>
               </a:rPr>

--- a/slides/ACCU-Separation-of-Concerns-at-Zero-Cost.pptx
+++ b/slides/ACCU-Separation-of-Concerns-at-Zero-Cost.pptx
@@ -11502,7 +11502,7 @@
             <a:r>
               <a:rPr sz="1250" b="1">
                 <a:solidFill>
-                  <a:srgbClr val="F2C744"/>
+                  <a:srgbClr val="D4D4D4"/>
                 </a:solidFill>
                 <a:latin typeface="Consolas"/>
               </a:rPr>
@@ -11511,7 +11511,7 @@
             <a:r>
               <a:rPr sz="1250" b="1">
                 <a:solidFill>
-                  <a:srgbClr val="F2C744"/>
+                  <a:srgbClr val="D4D4D4"/>
                 </a:solidFill>
                 <a:latin typeface="Consolas"/>
               </a:rPr>
@@ -11520,7 +11520,7 @@
             <a:r>
               <a:rPr sz="1250" b="1">
                 <a:solidFill>
-                  <a:srgbClr val="F2C744"/>
+                  <a:srgbClr val="D4D4D4"/>
                 </a:solidFill>
                 <a:latin typeface="Consolas"/>
               </a:rPr>
@@ -11529,7 +11529,7 @@
             <a:r>
               <a:rPr sz="1250" b="1">
                 <a:solidFill>
-                  <a:srgbClr val="F2C744"/>
+                  <a:srgbClr val="D4D4D4"/>
                 </a:solidFill>
                 <a:latin typeface="Consolas"/>
               </a:rPr>
@@ -11538,7 +11538,7 @@
             <a:r>
               <a:rPr sz="1250" b="1">
                 <a:solidFill>
-                  <a:srgbClr val="F2C744"/>
+                  <a:srgbClr val="D4D4D4"/>
                 </a:solidFill>
                 <a:latin typeface="Consolas"/>
               </a:rPr>
@@ -11547,7 +11547,7 @@
             <a:r>
               <a:rPr sz="1250" b="1">
                 <a:solidFill>
-                  <a:srgbClr val="F2C744"/>
+                  <a:srgbClr val="D4D4D4"/>
                 </a:solidFill>
                 <a:latin typeface="Consolas"/>
               </a:rPr>
@@ -11556,7 +11556,7 @@
             <a:r>
               <a:rPr sz="1250" b="1">
                 <a:solidFill>
-                  <a:srgbClr val="F2C744"/>
+                  <a:srgbClr val="D4D4D4"/>
                 </a:solidFill>
                 <a:latin typeface="Consolas"/>
               </a:rPr>
@@ -11565,7 +11565,7 @@
             <a:r>
               <a:rPr sz="1250" b="1">
                 <a:solidFill>
-                  <a:srgbClr val="F2C744"/>
+                  <a:srgbClr val="D4D4D4"/>
                 </a:solidFill>
                 <a:latin typeface="Consolas"/>
               </a:rPr>
@@ -11574,7 +11574,7 @@
             <a:r>
               <a:rPr sz="1250" b="1">
                 <a:solidFill>
-                  <a:srgbClr val="F2C744"/>
+                  <a:srgbClr val="D4D4D4"/>
                 </a:solidFill>
                 <a:latin typeface="Consolas"/>
               </a:rPr>
@@ -11583,7 +11583,7 @@
             <a:r>
               <a:rPr sz="1250" b="1">
                 <a:solidFill>
-                  <a:srgbClr val="F2C744"/>
+                  <a:srgbClr val="569CD6"/>
                 </a:solidFill>
                 <a:latin typeface="Consolas"/>
               </a:rPr>
@@ -11592,7 +11592,7 @@
             <a:r>
               <a:rPr sz="1250" b="1">
                 <a:solidFill>
-                  <a:srgbClr val="F2C744"/>
+                  <a:srgbClr val="D4D4D4"/>
                 </a:solidFill>
                 <a:latin typeface="Consolas"/>
               </a:rPr>
@@ -11601,7 +11601,7 @@
             <a:r>
               <a:rPr sz="1250" b="1">
                 <a:solidFill>
-                  <a:srgbClr val="F2C744"/>
+                  <a:srgbClr val="4EC9B0"/>
                 </a:solidFill>
                 <a:latin typeface="Consolas"/>
               </a:rPr>
@@ -11610,7 +11610,7 @@
             <a:r>
               <a:rPr sz="1250" b="1">
                 <a:solidFill>
-                  <a:srgbClr val="F2C744"/>
+                  <a:srgbClr val="D4D4D4"/>
                 </a:solidFill>
                 <a:latin typeface="Consolas"/>
               </a:rPr>
@@ -11619,7 +11619,7 @@
             <a:r>
               <a:rPr sz="1250" b="1">
                 <a:solidFill>
-                  <a:srgbClr val="F2C744"/>
+                  <a:srgbClr val="D4D4D4"/>
                 </a:solidFill>
                 <a:latin typeface="Consolas"/>
               </a:rPr>
@@ -11628,7 +11628,7 @@
             <a:r>
               <a:rPr sz="1250" b="1">
                 <a:solidFill>
-                  <a:srgbClr val="F2C744"/>
+                  <a:srgbClr val="4EC9B0"/>
                 </a:solidFill>
                 <a:latin typeface="Consolas"/>
               </a:rPr>
@@ -11637,7 +11637,7 @@
             <a:r>
               <a:rPr sz="1250" b="1">
                 <a:solidFill>
-                  <a:srgbClr val="F2C744"/>
+                  <a:srgbClr val="D4D4D4"/>
                 </a:solidFill>
                 <a:latin typeface="Consolas"/>
               </a:rPr>
@@ -11646,7 +11646,7 @@
             <a:r>
               <a:rPr sz="1250" b="1">
                 <a:solidFill>
-                  <a:srgbClr val="F2C744"/>
+                  <a:srgbClr val="D4D4D4"/>
                 </a:solidFill>
                 <a:latin typeface="Consolas"/>
               </a:rPr>
@@ -11655,7 +11655,7 @@
             <a:r>
               <a:rPr sz="1250" b="1">
                 <a:solidFill>
-                  <a:srgbClr val="F2C744"/>
+                  <a:srgbClr val="D4D4D4"/>
                 </a:solidFill>
                 <a:latin typeface="Consolas"/>
               </a:rPr>
@@ -11664,7 +11664,7 @@
             <a:r>
               <a:rPr sz="1250" b="1">
                 <a:solidFill>
-                  <a:srgbClr val="F2C744"/>
+                  <a:srgbClr val="D4D4D4"/>
                 </a:solidFill>
                 <a:latin typeface="Consolas"/>
               </a:rPr>
@@ -11673,7 +11673,7 @@
             <a:r>
               <a:rPr sz="1250" b="1">
                 <a:solidFill>
-                  <a:srgbClr val="F2C744"/>
+                  <a:srgbClr val="D4D4D4"/>
                 </a:solidFill>
                 <a:latin typeface="Consolas"/>
               </a:rPr>
@@ -11682,7 +11682,7 @@
             <a:r>
               <a:rPr sz="1250" b="1">
                 <a:solidFill>
-                  <a:srgbClr val="F2C744"/>
+                  <a:srgbClr val="D4D4D4"/>
                 </a:solidFill>
                 <a:latin typeface="Consolas"/>
               </a:rPr>
@@ -11691,7 +11691,7 @@
             <a:r>
               <a:rPr sz="1250" b="1">
                 <a:solidFill>
-                  <a:srgbClr val="F2C744"/>
+                  <a:srgbClr val="D4D4D4"/>
                 </a:solidFill>
                 <a:latin typeface="Consolas"/>
               </a:rPr>
@@ -11700,7 +11700,7 @@
             <a:r>
               <a:rPr sz="1250" b="1">
                 <a:solidFill>
-                  <a:srgbClr val="F2C744"/>
+                  <a:srgbClr val="D4D4D4"/>
                 </a:solidFill>
                 <a:latin typeface="Consolas"/>
               </a:rPr>
@@ -14189,7 +14189,7 @@
             <a:r>
               <a:rPr sz="1250" b="1">
                 <a:solidFill>
-                  <a:srgbClr val="F2C744"/>
+                  <a:srgbClr val="D4D4D4"/>
                 </a:solidFill>
                 <a:latin typeface="Consolas"/>
               </a:rPr>
@@ -14198,7 +14198,7 @@
             <a:r>
               <a:rPr sz="1250" b="1">
                 <a:solidFill>
-                  <a:srgbClr val="F2C744"/>
+                  <a:srgbClr val="D4D4D4"/>
                 </a:solidFill>
                 <a:latin typeface="Consolas"/>
               </a:rPr>
@@ -14207,7 +14207,7 @@
             <a:r>
               <a:rPr sz="1250" b="1">
                 <a:solidFill>
-                  <a:srgbClr val="F2C744"/>
+                  <a:srgbClr val="D4D4D4"/>
                 </a:solidFill>
                 <a:latin typeface="Consolas"/>
               </a:rPr>
@@ -14216,7 +14216,7 @@
             <a:r>
               <a:rPr sz="1250" b="1">
                 <a:solidFill>
-                  <a:srgbClr val="F2C744"/>
+                  <a:srgbClr val="D4D4D4"/>
                 </a:solidFill>
                 <a:latin typeface="Consolas"/>
               </a:rPr>
@@ -14225,7 +14225,7 @@
             <a:r>
               <a:rPr sz="1250" b="1">
                 <a:solidFill>
-                  <a:srgbClr val="F2C744"/>
+                  <a:srgbClr val="D4D4D4"/>
                 </a:solidFill>
                 <a:latin typeface="Consolas"/>
               </a:rPr>
@@ -14234,7 +14234,7 @@
             <a:r>
               <a:rPr sz="1250" b="1">
                 <a:solidFill>
-                  <a:srgbClr val="F2C744"/>
+                  <a:srgbClr val="D4D4D4"/>
                 </a:solidFill>
                 <a:latin typeface="Consolas"/>
               </a:rPr>
@@ -14243,7 +14243,7 @@
             <a:r>
               <a:rPr sz="1250" b="1">
                 <a:solidFill>
-                  <a:srgbClr val="F2C744"/>
+                  <a:srgbClr val="D4D4D4"/>
                 </a:solidFill>
                 <a:latin typeface="Consolas"/>
               </a:rPr>
@@ -14252,7 +14252,7 @@
             <a:r>
               <a:rPr sz="1250" b="1">
                 <a:solidFill>
-                  <a:srgbClr val="F2C744"/>
+                  <a:srgbClr val="D4D4D4"/>
                 </a:solidFill>
                 <a:latin typeface="Consolas"/>
               </a:rPr>
@@ -14261,7 +14261,7 @@
             <a:r>
               <a:rPr sz="1250" b="1">
                 <a:solidFill>
-                  <a:srgbClr val="F2C744"/>
+                  <a:srgbClr val="D4D4D4"/>
                 </a:solidFill>
                 <a:latin typeface="Consolas"/>
               </a:rPr>
@@ -14270,7 +14270,7 @@
             <a:r>
               <a:rPr sz="1250" b="1">
                 <a:solidFill>
-                  <a:srgbClr val="F2C744"/>
+                  <a:srgbClr val="569CD6"/>
                 </a:solidFill>
                 <a:latin typeface="Consolas"/>
               </a:rPr>
@@ -14279,7 +14279,7 @@
             <a:r>
               <a:rPr sz="1250" b="1">
                 <a:solidFill>
-                  <a:srgbClr val="F2C744"/>
+                  <a:srgbClr val="D4D4D4"/>
                 </a:solidFill>
                 <a:latin typeface="Consolas"/>
               </a:rPr>
@@ -14288,7 +14288,7 @@
             <a:r>
               <a:rPr sz="1250" b="1">
                 <a:solidFill>
-                  <a:srgbClr val="F2C744"/>
+                  <a:srgbClr val="4EC9B0"/>
                 </a:solidFill>
                 <a:latin typeface="Consolas"/>
               </a:rPr>
@@ -14297,7 +14297,7 @@
             <a:r>
               <a:rPr sz="1250" b="1">
                 <a:solidFill>
-                  <a:srgbClr val="F2C744"/>
+                  <a:srgbClr val="D4D4D4"/>
                 </a:solidFill>
                 <a:latin typeface="Consolas"/>
               </a:rPr>
@@ -14306,7 +14306,7 @@
             <a:r>
               <a:rPr sz="1250" b="1">
                 <a:solidFill>
-                  <a:srgbClr val="F2C744"/>
+                  <a:srgbClr val="D4D4D4"/>
                 </a:solidFill>
                 <a:latin typeface="Consolas"/>
               </a:rPr>
@@ -14315,7 +14315,7 @@
             <a:r>
               <a:rPr sz="1250" b="1">
                 <a:solidFill>
-                  <a:srgbClr val="F2C744"/>
+                  <a:srgbClr val="4EC9B0"/>
                 </a:solidFill>
                 <a:latin typeface="Consolas"/>
               </a:rPr>
@@ -14324,7 +14324,7 @@
             <a:r>
               <a:rPr sz="1250" b="1">
                 <a:solidFill>
-                  <a:srgbClr val="F2C744"/>
+                  <a:srgbClr val="D4D4D4"/>
                 </a:solidFill>
                 <a:latin typeface="Consolas"/>
               </a:rPr>
@@ -14333,7 +14333,7 @@
             <a:r>
               <a:rPr sz="1250" b="1">
                 <a:solidFill>
-                  <a:srgbClr val="F2C744"/>
+                  <a:srgbClr val="D4D4D4"/>
                 </a:solidFill>
                 <a:latin typeface="Consolas"/>
               </a:rPr>
@@ -14342,7 +14342,7 @@
             <a:r>
               <a:rPr sz="1250" b="1">
                 <a:solidFill>
-                  <a:srgbClr val="F2C744"/>
+                  <a:srgbClr val="D4D4D4"/>
                 </a:solidFill>
                 <a:latin typeface="Consolas"/>
               </a:rPr>
@@ -14351,7 +14351,7 @@
             <a:r>
               <a:rPr sz="1250" b="1">
                 <a:solidFill>
-                  <a:srgbClr val="F2C744"/>
+                  <a:srgbClr val="D4D4D4"/>
                 </a:solidFill>
                 <a:latin typeface="Consolas"/>
               </a:rPr>
@@ -14360,7 +14360,7 @@
             <a:r>
               <a:rPr sz="1250" b="1">
                 <a:solidFill>
-                  <a:srgbClr val="F2C744"/>
+                  <a:srgbClr val="D4D4D4"/>
                 </a:solidFill>
                 <a:latin typeface="Consolas"/>
               </a:rPr>
@@ -14369,7 +14369,7 @@
             <a:r>
               <a:rPr sz="1250" b="1">
                 <a:solidFill>
-                  <a:srgbClr val="F2C744"/>
+                  <a:srgbClr val="D4D4D4"/>
                 </a:solidFill>
                 <a:latin typeface="Consolas"/>
               </a:rPr>
@@ -14378,7 +14378,7 @@
             <a:r>
               <a:rPr sz="1250" b="1">
                 <a:solidFill>
-                  <a:srgbClr val="F2C744"/>
+                  <a:srgbClr val="D4D4D4"/>
                 </a:solidFill>
                 <a:latin typeface="Consolas"/>
               </a:rPr>
@@ -14387,7 +14387,7 @@
             <a:r>
               <a:rPr sz="1250" b="1">
                 <a:solidFill>
-                  <a:srgbClr val="F2C744"/>
+                  <a:srgbClr val="D4D4D4"/>
                 </a:solidFill>
                 <a:latin typeface="Consolas"/>
               </a:rPr>
@@ -14403,7 +14403,7 @@
             <a:r>
               <a:rPr sz="1250" b="1">
                 <a:solidFill>
-                  <a:srgbClr val="F2C744"/>
+                  <a:srgbClr val="D4D4D4"/>
                 </a:solidFill>
                 <a:latin typeface="Consolas"/>
               </a:rPr>
@@ -14412,7 +14412,7 @@
             <a:r>
               <a:rPr sz="1250" b="1">
                 <a:solidFill>
-                  <a:srgbClr val="F2C744"/>
+                  <a:srgbClr val="D4D4D4"/>
                 </a:solidFill>
                 <a:latin typeface="Consolas"/>
               </a:rPr>
@@ -14421,7 +14421,7 @@
             <a:r>
               <a:rPr sz="1250" b="1">
                 <a:solidFill>
-                  <a:srgbClr val="F2C744"/>
+                  <a:srgbClr val="D4D4D4"/>
                 </a:solidFill>
                 <a:latin typeface="Consolas"/>
               </a:rPr>
@@ -14430,7 +14430,7 @@
             <a:r>
               <a:rPr sz="1250" b="1">
                 <a:solidFill>
-                  <a:srgbClr val="F2C744"/>
+                  <a:srgbClr val="D4D4D4"/>
                 </a:solidFill>
                 <a:latin typeface="Consolas"/>
               </a:rPr>
@@ -14439,7 +14439,7 @@
             <a:r>
               <a:rPr sz="1250" b="1">
                 <a:solidFill>
-                  <a:srgbClr val="F2C744"/>
+                  <a:srgbClr val="D4D4D4"/>
                 </a:solidFill>
                 <a:latin typeface="Consolas"/>
               </a:rPr>
@@ -14448,7 +14448,7 @@
             <a:r>
               <a:rPr sz="1250" b="1">
                 <a:solidFill>
-                  <a:srgbClr val="F2C744"/>
+                  <a:srgbClr val="D4D4D4"/>
                 </a:solidFill>
                 <a:latin typeface="Consolas"/>
               </a:rPr>
@@ -14457,7 +14457,7 @@
             <a:r>
               <a:rPr sz="1250" b="1">
                 <a:solidFill>
-                  <a:srgbClr val="F2C744"/>
+                  <a:srgbClr val="D4D4D4"/>
                 </a:solidFill>
                 <a:latin typeface="Consolas"/>
               </a:rPr>
@@ -14466,7 +14466,7 @@
             <a:r>
               <a:rPr sz="1250" b="1">
                 <a:solidFill>
-                  <a:srgbClr val="F2C744"/>
+                  <a:srgbClr val="D4D4D4"/>
                 </a:solidFill>
                 <a:latin typeface="Consolas"/>
               </a:rPr>
@@ -14475,7 +14475,7 @@
             <a:r>
               <a:rPr sz="1250" b="1">
                 <a:solidFill>
-                  <a:srgbClr val="F2C744"/>
+                  <a:srgbClr val="D4D4D4"/>
                 </a:solidFill>
                 <a:latin typeface="Consolas"/>
               </a:rPr>
@@ -14484,7 +14484,7 @@
             <a:r>
               <a:rPr sz="1250" b="1">
                 <a:solidFill>
-                  <a:srgbClr val="F2C744"/>
+                  <a:srgbClr val="569CD6"/>
                 </a:solidFill>
                 <a:latin typeface="Consolas"/>
               </a:rPr>
@@ -14493,7 +14493,7 @@
             <a:r>
               <a:rPr sz="1250" b="1">
                 <a:solidFill>
-                  <a:srgbClr val="F2C744"/>
+                  <a:srgbClr val="D4D4D4"/>
                 </a:solidFill>
                 <a:latin typeface="Consolas"/>
               </a:rPr>
@@ -14502,7 +14502,7 @@
             <a:r>
               <a:rPr sz="1250" b="1">
                 <a:solidFill>
-                  <a:srgbClr val="F2C744"/>
+                  <a:srgbClr val="4EC9B0"/>
                 </a:solidFill>
                 <a:latin typeface="Consolas"/>
               </a:rPr>
@@ -14511,7 +14511,7 @@
             <a:r>
               <a:rPr sz="1250" b="1">
                 <a:solidFill>
-                  <a:srgbClr val="F2C744"/>
+                  <a:srgbClr val="D4D4D4"/>
                 </a:solidFill>
                 <a:latin typeface="Consolas"/>
               </a:rPr>
@@ -14520,7 +14520,7 @@
             <a:r>
               <a:rPr sz="1250" b="1">
                 <a:solidFill>
-                  <a:srgbClr val="F2C744"/>
+                  <a:srgbClr val="D4D4D4"/>
                 </a:solidFill>
                 <a:latin typeface="Consolas"/>
               </a:rPr>
@@ -14529,7 +14529,7 @@
             <a:r>
               <a:rPr sz="1250" b="1">
                 <a:solidFill>
-                  <a:srgbClr val="F2C744"/>
+                  <a:srgbClr val="4EC9B0"/>
                 </a:solidFill>
                 <a:latin typeface="Consolas"/>
               </a:rPr>
@@ -14538,7 +14538,7 @@
             <a:r>
               <a:rPr sz="1250" b="1">
                 <a:solidFill>
-                  <a:srgbClr val="F2C744"/>
+                  <a:srgbClr val="D4D4D4"/>
                 </a:solidFill>
                 <a:latin typeface="Consolas"/>
               </a:rPr>
@@ -14547,7 +14547,7 @@
             <a:r>
               <a:rPr sz="1250" b="1">
                 <a:solidFill>
-                  <a:srgbClr val="F2C744"/>
+                  <a:srgbClr val="D4D4D4"/>
                 </a:solidFill>
                 <a:latin typeface="Consolas"/>
               </a:rPr>
@@ -14556,7 +14556,7 @@
             <a:r>
               <a:rPr sz="1250" b="1">
                 <a:solidFill>
-                  <a:srgbClr val="F2C744"/>
+                  <a:srgbClr val="D4D4D4"/>
                 </a:solidFill>
                 <a:latin typeface="Consolas"/>
               </a:rPr>
@@ -14565,7 +14565,7 @@
             <a:r>
               <a:rPr sz="1250" b="1">
                 <a:solidFill>
-                  <a:srgbClr val="F2C744"/>
+                  <a:srgbClr val="D4D4D4"/>
                 </a:solidFill>
                 <a:latin typeface="Consolas"/>
               </a:rPr>
@@ -14574,7 +14574,7 @@
             <a:r>
               <a:rPr sz="1250" b="1">
                 <a:solidFill>
-                  <a:srgbClr val="F2C744"/>
+                  <a:srgbClr val="D4D4D4"/>
                 </a:solidFill>
                 <a:latin typeface="Consolas"/>
               </a:rPr>
@@ -14583,7 +14583,7 @@
             <a:r>
               <a:rPr sz="1250" b="1">
                 <a:solidFill>
-                  <a:srgbClr val="F2C744"/>
+                  <a:srgbClr val="D4D4D4"/>
                 </a:solidFill>
                 <a:latin typeface="Consolas"/>
               </a:rPr>
@@ -14592,7 +14592,7 @@
             <a:r>
               <a:rPr sz="1250" b="1">
                 <a:solidFill>
-                  <a:srgbClr val="F2C744"/>
+                  <a:srgbClr val="D4D4D4"/>
                 </a:solidFill>
                 <a:latin typeface="Consolas"/>
               </a:rPr>
@@ -14601,7 +14601,7 @@
             <a:r>
               <a:rPr sz="1250" b="1">
                 <a:solidFill>
-                  <a:srgbClr val="F2C744"/>
+                  <a:srgbClr val="D4D4D4"/>
                 </a:solidFill>
                 <a:latin typeface="Consolas"/>
               </a:rPr>
@@ -19350,7 +19350,7 @@
             <a:r>
               <a:rPr sz="1400" b="1">
                 <a:solidFill>
-                  <a:srgbClr val="F2C744"/>
+                  <a:srgbClr val="6A9955"/>
                 </a:solidFill>
                 <a:latin typeface="Consolas"/>
               </a:rPr>
@@ -19366,7 +19366,7 @@
             <a:r>
               <a:rPr sz="1400" b="1">
                 <a:solidFill>
-                  <a:srgbClr val="F2C744"/>
+                  <a:srgbClr val="569CD6"/>
                 </a:solidFill>
                 <a:latin typeface="Consolas"/>
               </a:rPr>
@@ -19375,7 +19375,7 @@
             <a:r>
               <a:rPr sz="1400" b="1">
                 <a:solidFill>
-                  <a:srgbClr val="F2C744"/>
+                  <a:srgbClr val="D4D4D4"/>
                 </a:solidFill>
                 <a:latin typeface="Consolas"/>
               </a:rPr>
@@ -19384,7 +19384,7 @@
             <a:r>
               <a:rPr sz="1400" b="1">
                 <a:solidFill>
-                  <a:srgbClr val="F2C744"/>
+                  <a:srgbClr val="569CD6"/>
                 </a:solidFill>
                 <a:latin typeface="Consolas"/>
               </a:rPr>
@@ -19393,7 +19393,7 @@
             <a:r>
               <a:rPr sz="1400" b="1">
                 <a:solidFill>
-                  <a:srgbClr val="F2C744"/>
+                  <a:srgbClr val="D4D4D4"/>
                 </a:solidFill>
                 <a:latin typeface="Consolas"/>
               </a:rPr>
@@ -19402,7 +19402,7 @@
             <a:r>
               <a:rPr sz="1400" b="1">
                 <a:solidFill>
-                  <a:srgbClr val="F2C744"/>
+                  <a:srgbClr val="D4D4D4"/>
                 </a:solidFill>
                 <a:latin typeface="Consolas"/>
               </a:rPr>
@@ -19411,7 +19411,7 @@
             <a:r>
               <a:rPr sz="1400" b="1">
                 <a:solidFill>
-                  <a:srgbClr val="F2C744"/>
+                  <a:srgbClr val="D4D4D4"/>
                 </a:solidFill>
                 <a:latin typeface="Consolas"/>
               </a:rPr>
@@ -19420,7 +19420,7 @@
             <a:r>
               <a:rPr sz="1400" b="1">
                 <a:solidFill>
-                  <a:srgbClr val="F2C744"/>
+                  <a:srgbClr val="D4D4D4"/>
                 </a:solidFill>
                 <a:latin typeface="Consolas"/>
               </a:rPr>
@@ -19429,7 +19429,7 @@
             <a:r>
               <a:rPr sz="1400" b="1">
                 <a:solidFill>
-                  <a:srgbClr val="F2C744"/>
+                  <a:srgbClr val="D4D4D4"/>
                 </a:solidFill>
                 <a:latin typeface="Consolas"/>
               </a:rPr>
@@ -19438,7 +19438,7 @@
             <a:r>
               <a:rPr sz="1400" b="1">
                 <a:solidFill>
-                  <a:srgbClr val="F2C744"/>
+                  <a:srgbClr val="D4D4D4"/>
                 </a:solidFill>
                 <a:latin typeface="Consolas"/>
               </a:rPr>
@@ -19447,7 +19447,7 @@
             <a:r>
               <a:rPr sz="1400" b="1">
                 <a:solidFill>
-                  <a:srgbClr val="F2C744"/>
+                  <a:srgbClr val="D4D4D4"/>
                 </a:solidFill>
                 <a:latin typeface="Consolas"/>
               </a:rPr>
@@ -19456,7 +19456,7 @@
             <a:r>
               <a:rPr sz="1400" b="1">
                 <a:solidFill>
-                  <a:srgbClr val="F2C744"/>
+                  <a:srgbClr val="D4D4D4"/>
                 </a:solidFill>
                 <a:latin typeface="Consolas"/>
               </a:rPr>
@@ -19465,7 +19465,7 @@
             <a:r>
               <a:rPr sz="1400" b="1">
                 <a:solidFill>
-                  <a:srgbClr val="F2C744"/>
+                  <a:srgbClr val="D4D4D4"/>
                 </a:solidFill>
                 <a:latin typeface="Consolas"/>
               </a:rPr>
@@ -19474,7 +19474,7 @@
             <a:r>
               <a:rPr sz="1400" b="1">
                 <a:solidFill>
-                  <a:srgbClr val="F2C744"/>
+                  <a:srgbClr val="D4D4D4"/>
                 </a:solidFill>
                 <a:latin typeface="Consolas"/>
               </a:rPr>
@@ -19483,7 +19483,7 @@
             <a:r>
               <a:rPr sz="1400" b="1">
                 <a:solidFill>
-                  <a:srgbClr val="F2C744"/>
+                  <a:srgbClr val="4EC9B0"/>
                 </a:solidFill>
                 <a:latin typeface="Consolas"/>
               </a:rPr>
@@ -19492,7 +19492,7 @@
             <a:r>
               <a:rPr sz="1400" b="1">
                 <a:solidFill>
-                  <a:srgbClr val="F2C744"/>
+                  <a:srgbClr val="D4D4D4"/>
                 </a:solidFill>
                 <a:latin typeface="Consolas"/>
               </a:rPr>
@@ -19501,7 +19501,7 @@
             <a:r>
               <a:rPr sz="1400" b="1">
                 <a:solidFill>
-                  <a:srgbClr val="F2C744"/>
+                  <a:srgbClr val="D4D4D4"/>
                 </a:solidFill>
                 <a:latin typeface="Consolas"/>
               </a:rPr>
@@ -19510,7 +19510,7 @@
             <a:r>
               <a:rPr sz="1400" b="1">
                 <a:solidFill>
-                  <a:srgbClr val="F2C744"/>
+                  <a:srgbClr val="D4D4D4"/>
                 </a:solidFill>
                 <a:latin typeface="Consolas"/>
               </a:rPr>
@@ -19519,7 +19519,7 @@
             <a:r>
               <a:rPr sz="1400" b="1">
                 <a:solidFill>
-                  <a:srgbClr val="F2C744"/>
+                  <a:srgbClr val="D4D4D4"/>
                 </a:solidFill>
                 <a:latin typeface="Consolas"/>
               </a:rPr>
@@ -19528,7 +19528,7 @@
             <a:r>
               <a:rPr sz="1400" b="1">
                 <a:solidFill>
-                  <a:srgbClr val="F2C744"/>
+                  <a:srgbClr val="D4D4D4"/>
                 </a:solidFill>
                 <a:latin typeface="Consolas"/>
               </a:rPr>
@@ -22182,7 +22182,7 @@
             <a:r>
               <a:rPr sz="1300" b="1">
                 <a:solidFill>
-                  <a:srgbClr val="F2C744"/>
+                  <a:srgbClr val="D4D4D4"/>
                 </a:solidFill>
                 <a:latin typeface="Consolas"/>
               </a:rPr>
@@ -22191,7 +22191,7 @@
             <a:r>
               <a:rPr sz="1300" b="1">
                 <a:solidFill>
-                  <a:srgbClr val="F2C744"/>
+                  <a:srgbClr val="569CD6"/>
                 </a:solidFill>
                 <a:latin typeface="Consolas"/>
               </a:rPr>
@@ -22200,7 +22200,7 @@
             <a:r>
               <a:rPr sz="1300" b="1">
                 <a:solidFill>
-                  <a:srgbClr val="F2C744"/>
+                  <a:srgbClr val="D4D4D4"/>
                 </a:solidFill>
                 <a:latin typeface="Consolas"/>
               </a:rPr>
@@ -22209,7 +22209,7 @@
             <a:r>
               <a:rPr sz="1300" b="1">
                 <a:solidFill>
-                  <a:srgbClr val="F2C744"/>
+                  <a:srgbClr val="D4D4D4"/>
                 </a:solidFill>
                 <a:latin typeface="Consolas"/>
               </a:rPr>
@@ -22218,7 +22218,7 @@
             <a:r>
               <a:rPr sz="1300" b="1">
                 <a:solidFill>
-                  <a:srgbClr val="F2C744"/>
+                  <a:srgbClr val="4EC9B0"/>
                 </a:solidFill>
                 <a:latin typeface="Consolas"/>
               </a:rPr>
@@ -22227,7 +22227,7 @@
             <a:r>
               <a:rPr sz="1300" b="1">
                 <a:solidFill>
-                  <a:srgbClr val="F2C744"/>
+                  <a:srgbClr val="D4D4D4"/>
                 </a:solidFill>
                 <a:latin typeface="Consolas"/>
               </a:rPr>
@@ -22236,7 +22236,7 @@
             <a:r>
               <a:rPr sz="1300" b="1">
                 <a:solidFill>
-                  <a:srgbClr val="F2C744"/>
+                  <a:srgbClr val="4EC9B0"/>
                 </a:solidFill>
                 <a:latin typeface="Consolas"/>
               </a:rPr>
@@ -22245,7 +22245,7 @@
             <a:r>
               <a:rPr sz="1300" b="1">
                 <a:solidFill>
-                  <a:srgbClr val="F2C744"/>
+                  <a:srgbClr val="D4D4D4"/>
                 </a:solidFill>
                 <a:latin typeface="Consolas"/>
               </a:rPr>
@@ -22254,7 +22254,7 @@
             <a:r>
               <a:rPr sz="1300" b="1">
                 <a:solidFill>
-                  <a:srgbClr val="F2C744"/>
+                  <a:srgbClr val="D4D4D4"/>
                 </a:solidFill>
                 <a:latin typeface="Consolas"/>
               </a:rPr>
@@ -22263,7 +22263,7 @@
             <a:r>
               <a:rPr sz="1300" b="1">
                 <a:solidFill>
-                  <a:srgbClr val="F2C744"/>
+                  <a:srgbClr val="4EC9B0"/>
                 </a:solidFill>
                 <a:latin typeface="Consolas"/>
               </a:rPr>
@@ -22272,7 +22272,7 @@
             <a:r>
               <a:rPr sz="1300" b="1">
                 <a:solidFill>
-                  <a:srgbClr val="F2C744"/>
+                  <a:srgbClr val="D4D4D4"/>
                 </a:solidFill>
                 <a:latin typeface="Consolas"/>
               </a:rPr>
@@ -22281,7 +22281,7 @@
             <a:r>
               <a:rPr sz="1300" b="1">
                 <a:solidFill>
-                  <a:srgbClr val="F2C744"/>
+                  <a:srgbClr val="D4D4D4"/>
                 </a:solidFill>
                 <a:latin typeface="Consolas"/>
               </a:rPr>
@@ -22290,7 +22290,7 @@
             <a:r>
               <a:rPr sz="1300" b="1">
                 <a:solidFill>
-                  <a:srgbClr val="F2C744"/>
+                  <a:srgbClr val="D4D4D4"/>
                 </a:solidFill>
                 <a:latin typeface="Consolas"/>
               </a:rPr>
@@ -22299,7 +22299,7 @@
             <a:r>
               <a:rPr sz="1300" b="1">
                 <a:solidFill>
-                  <a:srgbClr val="F2C744"/>
+                  <a:srgbClr val="D4D4D4"/>
                 </a:solidFill>
                 <a:latin typeface="Consolas"/>
               </a:rPr>
@@ -22308,7 +22308,7 @@
             <a:r>
               <a:rPr sz="1300" b="1">
                 <a:solidFill>
-                  <a:srgbClr val="F2C744"/>
+                  <a:srgbClr val="D4D4D4"/>
                 </a:solidFill>
                 <a:latin typeface="Consolas"/>
               </a:rPr>
@@ -22317,7 +22317,7 @@
             <a:r>
               <a:rPr sz="1300" b="1">
                 <a:solidFill>
-                  <a:srgbClr val="F2C744"/>
+                  <a:srgbClr val="4EC9B0"/>
                 </a:solidFill>
                 <a:latin typeface="Consolas"/>
               </a:rPr>
@@ -22326,7 +22326,7 @@
             <a:r>
               <a:rPr sz="1300" b="1">
                 <a:solidFill>
-                  <a:srgbClr val="F2C744"/>
+                  <a:srgbClr val="D4D4D4"/>
                 </a:solidFill>
                 <a:latin typeface="Consolas"/>
               </a:rPr>
@@ -22335,7 +22335,7 @@
             <a:r>
               <a:rPr sz="1300" b="1">
                 <a:solidFill>
-                  <a:srgbClr val="F2C744"/>
+                  <a:srgbClr val="D4D4D4"/>
                 </a:solidFill>
                 <a:latin typeface="Consolas"/>
               </a:rPr>
@@ -22344,7 +22344,7 @@
             <a:r>
               <a:rPr sz="1300" b="1">
                 <a:solidFill>
-                  <a:srgbClr val="F2C744"/>
+                  <a:srgbClr val="D4D4D4"/>
                 </a:solidFill>
                 <a:latin typeface="Consolas"/>
               </a:rPr>
@@ -22353,7 +22353,7 @@
             <a:r>
               <a:rPr sz="1300" b="1">
                 <a:solidFill>
-                  <a:srgbClr val="F2C744"/>
+                  <a:srgbClr val="D4D4D4"/>
                 </a:solidFill>
                 <a:latin typeface="Consolas"/>
               </a:rPr>
@@ -22362,7 +22362,7 @@
             <a:r>
               <a:rPr sz="1300" b="1">
                 <a:solidFill>
-                  <a:srgbClr val="F2C744"/>
+                  <a:srgbClr val="D4D4D4"/>
                 </a:solidFill>
                 <a:latin typeface="Consolas"/>
               </a:rPr>
@@ -22371,7 +22371,7 @@
             <a:r>
               <a:rPr sz="1300" b="1">
                 <a:solidFill>
-                  <a:srgbClr val="F2C744"/>
+                  <a:srgbClr val="D4D4D4"/>
                 </a:solidFill>
                 <a:latin typeface="Consolas"/>
               </a:rPr>
@@ -22380,7 +22380,7 @@
             <a:r>
               <a:rPr sz="1300" b="1">
                 <a:solidFill>
-                  <a:srgbClr val="F2C744"/>
+                  <a:srgbClr val="D4D4D4"/>
                 </a:solidFill>
                 <a:latin typeface="Consolas"/>
               </a:rPr>
@@ -22389,7 +22389,7 @@
             <a:r>
               <a:rPr sz="1300" b="1">
                 <a:solidFill>
-                  <a:srgbClr val="F2C744"/>
+                  <a:srgbClr val="D4D4D4"/>
                 </a:solidFill>
                 <a:latin typeface="Consolas"/>
               </a:rPr>
@@ -22398,7 +22398,7 @@
             <a:r>
               <a:rPr sz="1300" b="1">
                 <a:solidFill>
-                  <a:srgbClr val="F2C744"/>
+                  <a:srgbClr val="D4D4D4"/>
                 </a:solidFill>
                 <a:latin typeface="Consolas"/>
               </a:rPr>
@@ -22407,7 +22407,7 @@
             <a:r>
               <a:rPr sz="1300" b="1">
                 <a:solidFill>
-                  <a:srgbClr val="F2C744"/>
+                  <a:srgbClr val="D4D4D4"/>
                 </a:solidFill>
                 <a:latin typeface="Consolas"/>
               </a:rPr>
@@ -22745,7 +22745,7 @@
             <a:r>
               <a:rPr sz="1300" b="1">
                 <a:solidFill>
-                  <a:srgbClr val="F2C744"/>
+                  <a:srgbClr val="D4D4D4"/>
                 </a:solidFill>
                 <a:latin typeface="Consolas"/>
               </a:rPr>
@@ -22754,7 +22754,7 @@
             <a:r>
               <a:rPr sz="1300" b="1">
                 <a:solidFill>
-                  <a:srgbClr val="F2C744"/>
+                  <a:srgbClr val="569CD6"/>
                 </a:solidFill>
                 <a:latin typeface="Consolas"/>
               </a:rPr>
@@ -22763,7 +22763,7 @@
             <a:r>
               <a:rPr sz="1300" b="1">
                 <a:solidFill>
-                  <a:srgbClr val="F2C744"/>
+                  <a:srgbClr val="D4D4D4"/>
                 </a:solidFill>
                 <a:latin typeface="Consolas"/>
               </a:rPr>
@@ -22772,7 +22772,7 @@
             <a:r>
               <a:rPr sz="1300" b="1">
                 <a:solidFill>
-                  <a:srgbClr val="F2C744"/>
+                  <a:srgbClr val="D4D4D4"/>
                 </a:solidFill>
                 <a:latin typeface="Consolas"/>
               </a:rPr>
@@ -22781,7 +22781,7 @@
             <a:r>
               <a:rPr sz="1300" b="1">
                 <a:solidFill>
-                  <a:srgbClr val="F2C744"/>
+                  <a:srgbClr val="D4D4D4"/>
                 </a:solidFill>
                 <a:latin typeface="Consolas"/>
               </a:rPr>
@@ -22790,7 +22790,7 @@
             <a:r>
               <a:rPr sz="1300" b="1">
                 <a:solidFill>
-                  <a:srgbClr val="F2C744"/>
+                  <a:srgbClr val="4EC9B0"/>
                 </a:solidFill>
                 <a:latin typeface="Consolas"/>
               </a:rPr>
@@ -22799,7 +22799,7 @@
             <a:r>
               <a:rPr sz="1300" b="1">
                 <a:solidFill>
-                  <a:srgbClr val="F2C744"/>
+                  <a:srgbClr val="D4D4D4"/>
                 </a:solidFill>
                 <a:latin typeface="Consolas"/>
               </a:rPr>
@@ -22808,7 +22808,7 @@
             <a:r>
               <a:rPr sz="1300" b="1">
                 <a:solidFill>
-                  <a:srgbClr val="F2C744"/>
+                  <a:srgbClr val="D4D4D4"/>
                 </a:solidFill>
                 <a:latin typeface="Consolas"/>
               </a:rPr>
@@ -22817,7 +22817,7 @@
             <a:r>
               <a:rPr sz="1300" b="1">
                 <a:solidFill>
-                  <a:srgbClr val="F2C744"/>
+                  <a:srgbClr val="D4D4D4"/>
                 </a:solidFill>
                 <a:latin typeface="Consolas"/>
               </a:rPr>
@@ -22826,7 +22826,7 @@
             <a:r>
               <a:rPr sz="1300" b="1">
                 <a:solidFill>
-                  <a:srgbClr val="F2C744"/>
+                  <a:srgbClr val="D4D4D4"/>
                 </a:solidFill>
                 <a:latin typeface="Consolas"/>
               </a:rPr>
@@ -22842,7 +22842,7 @@
             <a:r>
               <a:rPr sz="1300" b="1">
                 <a:solidFill>
-                  <a:srgbClr val="F2C744"/>
+                  <a:srgbClr val="D4D4D4"/>
                 </a:solidFill>
                 <a:latin typeface="Consolas"/>
               </a:rPr>
@@ -22851,7 +22851,7 @@
             <a:r>
               <a:rPr sz="1300" b="1">
                 <a:solidFill>
-                  <a:srgbClr val="F2C744"/>
+                  <a:srgbClr val="CE9178"/>
                 </a:solidFill>
                 <a:latin typeface="Consolas"/>
               </a:rPr>
@@ -22860,7 +22860,7 @@
             <a:r>
               <a:rPr sz="1300" b="1">
                 <a:solidFill>
-                  <a:srgbClr val="F2C744"/>
+                  <a:srgbClr val="CE9178"/>
                 </a:solidFill>
                 <a:latin typeface="Consolas"/>
               </a:rPr>
@@ -22869,7 +22869,7 @@
             <a:r>
               <a:rPr sz="1300" b="1">
                 <a:solidFill>
-                  <a:srgbClr val="F2C744"/>
+                  <a:srgbClr val="CE9178"/>
                 </a:solidFill>
                 <a:latin typeface="Consolas"/>
               </a:rPr>
@@ -22878,7 +22878,7 @@
             <a:r>
               <a:rPr sz="1300" b="1">
                 <a:solidFill>
-                  <a:srgbClr val="F2C744"/>
+                  <a:srgbClr val="D4D4D4"/>
                 </a:solidFill>
                 <a:latin typeface="Consolas"/>
               </a:rPr>
@@ -22887,7 +22887,7 @@
             <a:r>
               <a:rPr sz="1300" b="1">
                 <a:solidFill>
-                  <a:srgbClr val="F2C744"/>
+                  <a:srgbClr val="D4D4D4"/>
                 </a:solidFill>
                 <a:latin typeface="Consolas"/>
               </a:rPr>
@@ -29670,7 +29670,7 @@
             <a:r>
               <a:rPr sz="1400" b="1">
                 <a:solidFill>
-                  <a:srgbClr val="F2C744"/>
+                  <a:srgbClr val="569CD6"/>
                 </a:solidFill>
                 <a:latin typeface="Consolas"/>
               </a:rPr>
@@ -29679,7 +29679,7 @@
             <a:r>
               <a:rPr sz="1400" b="1">
                 <a:solidFill>
-                  <a:srgbClr val="F2C744"/>
+                  <a:srgbClr val="D4D4D4"/>
                 </a:solidFill>
                 <a:latin typeface="Consolas"/>
               </a:rPr>
@@ -29688,7 +29688,7 @@
             <a:r>
               <a:rPr sz="1400" b="1">
                 <a:solidFill>
-                  <a:srgbClr val="F2C744"/>
+                  <a:srgbClr val="D4D4D4"/>
                 </a:solidFill>
                 <a:latin typeface="Consolas"/>
               </a:rPr>
@@ -29697,7 +29697,7 @@
             <a:r>
               <a:rPr sz="1400" b="1">
                 <a:solidFill>
-                  <a:srgbClr val="F2C744"/>
+                  <a:srgbClr val="D4D4D4"/>
                 </a:solidFill>
                 <a:latin typeface="Consolas"/>
               </a:rPr>
@@ -29706,7 +29706,7 @@
             <a:r>
               <a:rPr sz="1400" b="1">
                 <a:solidFill>
-                  <a:srgbClr val="F2C744"/>
+                  <a:srgbClr val="D4D4D4"/>
                 </a:solidFill>
                 <a:latin typeface="Consolas"/>
               </a:rPr>
@@ -29715,7 +29715,7 @@
             <a:r>
               <a:rPr sz="1400" b="1">
                 <a:solidFill>
-                  <a:srgbClr val="F2C744"/>
+                  <a:srgbClr val="D4D4D4"/>
                 </a:solidFill>
                 <a:latin typeface="Consolas"/>
               </a:rPr>
@@ -29724,7 +29724,7 @@
             <a:r>
               <a:rPr sz="1400" b="1">
                 <a:solidFill>
-                  <a:srgbClr val="F2C744"/>
+                  <a:srgbClr val="4EC9B0"/>
                 </a:solidFill>
                 <a:latin typeface="Consolas"/>
               </a:rPr>
@@ -29733,7 +29733,7 @@
             <a:r>
               <a:rPr sz="1400" b="1">
                 <a:solidFill>
-                  <a:srgbClr val="F2C744"/>
+                  <a:srgbClr val="D4D4D4"/>
                 </a:solidFill>
                 <a:latin typeface="Consolas"/>
               </a:rPr>
@@ -29742,7 +29742,7 @@
             <a:r>
               <a:rPr sz="1400" b="1">
                 <a:solidFill>
-                  <a:srgbClr val="F2C744"/>
+                  <a:srgbClr val="4EC9B0"/>
                 </a:solidFill>
                 <a:latin typeface="Consolas"/>
               </a:rPr>
@@ -29751,7 +29751,7 @@
             <a:r>
               <a:rPr sz="1400" b="1">
                 <a:solidFill>
-                  <a:srgbClr val="F2C744"/>
+                  <a:srgbClr val="D4D4D4"/>
                 </a:solidFill>
                 <a:latin typeface="Consolas"/>
               </a:rPr>
@@ -29760,7 +29760,7 @@
             <a:r>
               <a:rPr sz="1400" b="1">
                 <a:solidFill>
-                  <a:srgbClr val="F2C744"/>
+                  <a:srgbClr val="D4D4D4"/>
                 </a:solidFill>
                 <a:latin typeface="Consolas"/>
               </a:rPr>
@@ -29769,7 +29769,7 @@
             <a:r>
               <a:rPr sz="1400" b="1">
                 <a:solidFill>
-                  <a:srgbClr val="F2C744"/>
+                  <a:srgbClr val="B5CEA8"/>
                 </a:solidFill>
                 <a:latin typeface="Consolas"/>
               </a:rPr>
@@ -29778,7 +29778,7 @@
             <a:r>
               <a:rPr sz="1400" b="1">
                 <a:solidFill>
-                  <a:srgbClr val="F2C744"/>
+                  <a:srgbClr val="D4D4D4"/>
                 </a:solidFill>
                 <a:latin typeface="Consolas"/>
               </a:rPr>
@@ -29787,7 +29787,7 @@
             <a:r>
               <a:rPr sz="1400" b="1">
                 <a:solidFill>
-                  <a:srgbClr val="F2C744"/>
+                  <a:srgbClr val="D4D4D4"/>
                 </a:solidFill>
                 <a:latin typeface="Consolas"/>
               </a:rPr>
@@ -29796,7 +29796,7 @@
             <a:r>
               <a:rPr sz="1400" b="1">
                 <a:solidFill>
-                  <a:srgbClr val="F2C744"/>
+                  <a:srgbClr val="D4D4D4"/>
                 </a:solidFill>
                 <a:latin typeface="Consolas"/>
               </a:rPr>
@@ -29805,7 +29805,7 @@
             <a:r>
               <a:rPr sz="1400" b="1">
                 <a:solidFill>
-                  <a:srgbClr val="F2C744"/>
+                  <a:srgbClr val="6A9955"/>
                 </a:solidFill>
                 <a:latin typeface="Consolas"/>
               </a:rPr>
@@ -29821,7 +29821,7 @@
             <a:r>
               <a:rPr sz="1400" b="1">
                 <a:solidFill>
-                  <a:srgbClr val="F2C744"/>
+                  <a:srgbClr val="569CD6"/>
                 </a:solidFill>
                 <a:latin typeface="Consolas"/>
               </a:rPr>
@@ -29830,7 +29830,7 @@
             <a:r>
               <a:rPr sz="1400" b="1">
                 <a:solidFill>
-                  <a:srgbClr val="F2C744"/>
+                  <a:srgbClr val="D4D4D4"/>
                 </a:solidFill>
                 <a:latin typeface="Consolas"/>
               </a:rPr>
@@ -29839,7 +29839,7 @@
             <a:r>
               <a:rPr sz="1400" b="1">
                 <a:solidFill>
-                  <a:srgbClr val="F2C744"/>
+                  <a:srgbClr val="D4D4D4"/>
                 </a:solidFill>
                 <a:latin typeface="Consolas"/>
               </a:rPr>
@@ -29848,7 +29848,7 @@
             <a:r>
               <a:rPr sz="1400" b="1">
                 <a:solidFill>
-                  <a:srgbClr val="F2C744"/>
+                  <a:srgbClr val="D4D4D4"/>
                 </a:solidFill>
                 <a:latin typeface="Consolas"/>
               </a:rPr>
@@ -29857,7 +29857,7 @@
             <a:r>
               <a:rPr sz="1400" b="1">
                 <a:solidFill>
-                  <a:srgbClr val="F2C744"/>
+                  <a:srgbClr val="D4D4D4"/>
                 </a:solidFill>
                 <a:latin typeface="Consolas"/>
               </a:rPr>
@@ -29866,7 +29866,7 @@
             <a:r>
               <a:rPr sz="1400" b="1">
                 <a:solidFill>
-                  <a:srgbClr val="F2C744"/>
+                  <a:srgbClr val="D4D4D4"/>
                 </a:solidFill>
                 <a:latin typeface="Consolas"/>
               </a:rPr>
@@ -29875,7 +29875,7 @@
             <a:r>
               <a:rPr sz="1400" b="1">
                 <a:solidFill>
-                  <a:srgbClr val="F2C744"/>
+                  <a:srgbClr val="D4D4D4"/>
                 </a:solidFill>
                 <a:latin typeface="Consolas"/>
               </a:rPr>
@@ -29884,7 +29884,7 @@
             <a:r>
               <a:rPr sz="1400" b="1">
                 <a:solidFill>
-                  <a:srgbClr val="F2C744"/>
+                  <a:srgbClr val="D4D4D4"/>
                 </a:solidFill>
                 <a:latin typeface="Consolas"/>
               </a:rPr>
@@ -29893,7 +29893,7 @@
             <a:r>
               <a:rPr sz="1400" b="1">
                 <a:solidFill>
-                  <a:srgbClr val="F2C744"/>
+                  <a:srgbClr val="D4D4D4"/>
                 </a:solidFill>
                 <a:latin typeface="Consolas"/>
               </a:rPr>
@@ -29902,7 +29902,7 @@
             <a:r>
               <a:rPr sz="1400" b="1">
                 <a:solidFill>
-                  <a:srgbClr val="F2C744"/>
+                  <a:srgbClr val="D4D4D4"/>
                 </a:solidFill>
                 <a:latin typeface="Consolas"/>
               </a:rPr>
@@ -29911,7 +29911,7 @@
             <a:r>
               <a:rPr sz="1400" b="1">
                 <a:solidFill>
-                  <a:srgbClr val="F2C744"/>
+                  <a:srgbClr val="D4D4D4"/>
                 </a:solidFill>
                 <a:latin typeface="Consolas"/>
               </a:rPr>
@@ -29920,7 +29920,7 @@
             <a:r>
               <a:rPr sz="1400" b="1">
                 <a:solidFill>
-                  <a:srgbClr val="F2C744"/>
+                  <a:srgbClr val="D4D4D4"/>
                 </a:solidFill>
                 <a:latin typeface="Consolas"/>
               </a:rPr>
@@ -29929,7 +29929,7 @@
             <a:r>
               <a:rPr sz="1400" b="1">
                 <a:solidFill>
-                  <a:srgbClr val="F2C744"/>
+                  <a:srgbClr val="D4D4D4"/>
                 </a:solidFill>
                 <a:latin typeface="Consolas"/>
               </a:rPr>
@@ -29938,7 +29938,7 @@
             <a:r>
               <a:rPr sz="1400" b="1">
                 <a:solidFill>
-                  <a:srgbClr val="F2C744"/>
+                  <a:srgbClr val="D4D4D4"/>
                 </a:solidFill>
                 <a:latin typeface="Consolas"/>
               </a:rPr>
@@ -29947,7 +29947,7 @@
             <a:r>
               <a:rPr sz="1400" b="1">
                 <a:solidFill>
-                  <a:srgbClr val="F2C744"/>
+                  <a:srgbClr val="D4D4D4"/>
                 </a:solidFill>
                 <a:latin typeface="Consolas"/>
               </a:rPr>
@@ -29956,7 +29956,7 @@
             <a:r>
               <a:rPr sz="1400" b="1">
                 <a:solidFill>
-                  <a:srgbClr val="F2C744"/>
+                  <a:srgbClr val="D4D4D4"/>
                 </a:solidFill>
                 <a:latin typeface="Consolas"/>
               </a:rPr>
@@ -29965,7 +29965,7 @@
             <a:r>
               <a:rPr sz="1400" b="1">
                 <a:solidFill>
-                  <a:srgbClr val="F2C744"/>
+                  <a:srgbClr val="D4D4D4"/>
                 </a:solidFill>
                 <a:latin typeface="Consolas"/>
               </a:rPr>

--- a/slides/ACCU-Separation-of-Concerns-at-Zero-Cost.pptx
+++ b/slides/ACCU-Separation-of-Concerns-at-Zero-Cost.pptx
@@ -6114,7 +6114,7 @@
           <a:noFill/>
         </p:spPr>
         <p:txBody>
-          <a:bodyPr wrap="square">
+          <a:bodyPr wrap="none">
             <a:spAutoFit/>
           </a:bodyPr>
           <a:lstStyle/>
@@ -6125,7 +6125,7 @@
               </a:spcAft>
             </a:pPr>
             <a:r>
-              <a:rPr sz="2000" dirty="0">
+              <a:rPr sz="2000">
                 <a:solidFill>
                   <a:srgbClr val="569CD6"/>
                 </a:solidFill>
@@ -6134,16 +6134,16 @@
               <a:t>struct</a:t>
             </a:r>
             <a:r>
-              <a:rPr sz="2000" dirty="0">
-                <a:solidFill>
-                  <a:srgbClr val="D4D4D4"/>
-                </a:solidFill>
-                <a:latin typeface="Consolas"/>
-              </a:rPr>
-              <a:t> </a:t>
-            </a:r>
-            <a:r>
-              <a:rPr sz="2000" dirty="0">
+              <a:rPr sz="2000">
+                <a:solidFill>
+                  <a:srgbClr val="D4D4D4"/>
+                </a:solidFill>
+                <a:latin typeface="Consolas"/>
+              </a:rPr>
+              <a:t> </a:t>
+            </a:r>
+            <a:r>
+              <a:rPr sz="2000">
                 <a:solidFill>
                   <a:srgbClr val="4EC9B0"/>
                 </a:solidFill>
@@ -6152,13 +6152,22 @@
               <a:t>Component</a:t>
             </a:r>
             <a:r>
-              <a:rPr sz="2000" dirty="0">
-                <a:solidFill>
-                  <a:srgbClr val="D4D4D4"/>
-                </a:solidFill>
-                <a:latin typeface="Consolas"/>
-              </a:rPr>
-              <a:t> {</a:t>
+              <a:rPr sz="2000">
+                <a:solidFill>
+                  <a:srgbClr val="D4D4D4"/>
+                </a:solidFill>
+                <a:latin typeface="Consolas"/>
+              </a:rPr>
+              <a:t> </a:t>
+            </a:r>
+            <a:r>
+              <a:rPr sz="2000">
+                <a:solidFill>
+                  <a:srgbClr val="D4D4D4"/>
+                </a:solidFill>
+                <a:latin typeface="Consolas"/>
+              </a:rPr>
+              <a:t>{</a:t>
             </a:r>
           </a:p>
           <a:p>
@@ -6168,7 +6177,7 @@
               </a:spcAft>
             </a:pPr>
             <a:r>
-              <a:rPr sz="2000" dirty="0">
+              <a:rPr sz="2000">
                 <a:solidFill>
                   <a:srgbClr val="D4D4D4"/>
                 </a:solidFill>
@@ -6177,7 +6186,7 @@
               <a:t>    </a:t>
             </a:r>
             <a:r>
-              <a:rPr sz="2000" dirty="0">
+              <a:rPr sz="2000">
                 <a:solidFill>
                   <a:srgbClr val="569CD6"/>
                 </a:solidFill>
@@ -6186,16 +6195,16 @@
               <a:t>virtual</a:t>
             </a:r>
             <a:r>
-              <a:rPr sz="2000" dirty="0">
-                <a:solidFill>
-                  <a:srgbClr val="D4D4D4"/>
-                </a:solidFill>
-                <a:latin typeface="Consolas"/>
-              </a:rPr>
-              <a:t> </a:t>
-            </a:r>
-            <a:r>
-              <a:rPr sz="2000" dirty="0">
+              <a:rPr sz="2000">
+                <a:solidFill>
+                  <a:srgbClr val="D4D4D4"/>
+                </a:solidFill>
+                <a:latin typeface="Consolas"/>
+              </a:rPr>
+              <a:t> </a:t>
+            </a:r>
+            <a:r>
+              <a:rPr sz="2000">
                 <a:solidFill>
                   <a:srgbClr val="4EC9B0"/>
                 </a:solidFill>
@@ -6204,25 +6213,25 @@
               <a:t>void</a:t>
             </a:r>
             <a:r>
-              <a:rPr sz="2000" dirty="0">
-                <a:solidFill>
-                  <a:srgbClr val="D4D4D4"/>
-                </a:solidFill>
-                <a:latin typeface="Consolas"/>
-              </a:rPr>
-              <a:t> </a:t>
-            </a:r>
-            <a:r>
-              <a:rPr sz="2000" dirty="0" err="1">
-                <a:solidFill>
-                  <a:srgbClr val="DCDCAA"/>
+              <a:rPr sz="2000">
+                <a:solidFill>
+                  <a:srgbClr val="D4D4D4"/>
+                </a:solidFill>
+                <a:latin typeface="Consolas"/>
+              </a:rPr>
+              <a:t> </a:t>
+            </a:r>
+            <a:r>
+              <a:rPr sz="2000">
+                <a:solidFill>
+                  <a:srgbClr val="D4D4D4"/>
                 </a:solidFill>
                 <a:latin typeface="Consolas"/>
               </a:rPr>
               <a:t>computeDerivatives</a:t>
             </a:r>
             <a:r>
-              <a:rPr sz="2000" dirty="0">
+              <a:rPr sz="2000">
                 <a:solidFill>
                   <a:srgbClr val="D4D4D4"/>
                 </a:solidFill>
@@ -6231,7 +6240,7 @@
               <a:t>(</a:t>
             </a:r>
             <a:r>
-              <a:rPr sz="2000" dirty="0">
+              <a:rPr sz="2000">
                 <a:solidFill>
                   <a:srgbClr val="4EC9B0"/>
                 </a:solidFill>
@@ -6240,13 +6249,31 @@
               <a:t>double</a:t>
             </a:r>
             <a:r>
-              <a:rPr sz="2000" dirty="0">
-                <a:solidFill>
-                  <a:srgbClr val="D4D4D4"/>
-                </a:solidFill>
-                <a:latin typeface="Consolas"/>
-              </a:rPr>
-              <a:t> t,</a:t>
+              <a:rPr sz="2000">
+                <a:solidFill>
+                  <a:srgbClr val="D4D4D4"/>
+                </a:solidFill>
+                <a:latin typeface="Consolas"/>
+              </a:rPr>
+              <a:t> </a:t>
+            </a:r>
+            <a:r>
+              <a:rPr sz="2000">
+                <a:solidFill>
+                  <a:srgbClr val="D4D4D4"/>
+                </a:solidFill>
+                <a:latin typeface="Consolas"/>
+              </a:rPr>
+              <a:t>t</a:t>
+            </a:r>
+            <a:r>
+              <a:rPr sz="2000">
+                <a:solidFill>
+                  <a:srgbClr val="D4D4D4"/>
+                </a:solidFill>
+                <a:latin typeface="Consolas"/>
+              </a:rPr>
+              <a:t>,</a:t>
             </a:r>
           </a:p>
           <a:p>
@@ -6256,7 +6283,7 @@
               </a:spcAft>
             </a:pPr>
             <a:r>
-              <a:rPr sz="2000" dirty="0">
+              <a:rPr sz="2000">
                 <a:solidFill>
                   <a:srgbClr val="D4D4D4"/>
                 </a:solidFill>
@@ -6265,7 +6292,7 @@
               <a:t>                                    </a:t>
             </a:r>
             <a:r>
-              <a:rPr sz="2000" dirty="0">
+              <a:rPr sz="2000">
                 <a:solidFill>
                   <a:srgbClr val="569CD6"/>
                 </a:solidFill>
@@ -6274,16 +6301,16 @@
               <a:t>const</a:t>
             </a:r>
             <a:r>
-              <a:rPr sz="2000" dirty="0">
-                <a:solidFill>
-                  <a:srgbClr val="D4D4D4"/>
-                </a:solidFill>
-                <a:latin typeface="Consolas"/>
-              </a:rPr>
-              <a:t> </a:t>
-            </a:r>
-            <a:r>
-              <a:rPr sz="2000" dirty="0">
+              <a:rPr sz="2000">
+                <a:solidFill>
+                  <a:srgbClr val="D4D4D4"/>
+                </a:solidFill>
+                <a:latin typeface="Consolas"/>
+              </a:rPr>
+              <a:t> </a:t>
+            </a:r>
+            <a:r>
+              <a:rPr sz="2000">
                 <a:solidFill>
                   <a:srgbClr val="4EC9B0"/>
                 </a:solidFill>
@@ -6292,13 +6319,40 @@
               <a:t>double</a:t>
             </a:r>
             <a:r>
-              <a:rPr sz="2000" dirty="0">
-                <a:solidFill>
-                  <a:srgbClr val="D4D4D4"/>
-                </a:solidFill>
-                <a:latin typeface="Consolas"/>
-              </a:rPr>
-              <a:t>* state,</a:t>
+              <a:rPr sz="2000">
+                <a:solidFill>
+                  <a:srgbClr val="D4D4D4"/>
+                </a:solidFill>
+                <a:latin typeface="Consolas"/>
+              </a:rPr>
+              <a:t>*</a:t>
+            </a:r>
+            <a:r>
+              <a:rPr sz="2000">
+                <a:solidFill>
+                  <a:srgbClr val="D4D4D4"/>
+                </a:solidFill>
+                <a:latin typeface="Consolas"/>
+              </a:rPr>
+              <a:t> </a:t>
+            </a:r>
+            <a:r>
+              <a:rPr sz="2000">
+                <a:solidFill>
+                  <a:srgbClr val="D4D4D4"/>
+                </a:solidFill>
+                <a:latin typeface="Consolas"/>
+              </a:rPr>
+              <a:t>state</a:t>
+            </a:r>
+            <a:r>
+              <a:rPr sz="2000">
+                <a:solidFill>
+                  <a:srgbClr val="D4D4D4"/>
+                </a:solidFill>
+                <a:latin typeface="Consolas"/>
+              </a:rPr>
+              <a:t>,</a:t>
             </a:r>
           </a:p>
           <a:p>
@@ -6308,7 +6362,7 @@
               </a:spcAft>
             </a:pPr>
             <a:r>
-              <a:rPr sz="2000" dirty="0">
+              <a:rPr sz="2000">
                 <a:solidFill>
                   <a:srgbClr val="D4D4D4"/>
                 </a:solidFill>
@@ -6317,7 +6371,7 @@
               <a:t>                                    </a:t>
             </a:r>
             <a:r>
-              <a:rPr sz="2000" dirty="0">
+              <a:rPr sz="2000">
                 <a:solidFill>
                   <a:srgbClr val="4EC9B0"/>
                 </a:solidFill>
@@ -6326,16 +6380,25 @@
               <a:t>double</a:t>
             </a:r>
             <a:r>
-              <a:rPr sz="2000" dirty="0">
-                <a:solidFill>
-                  <a:srgbClr val="D4D4D4"/>
-                </a:solidFill>
-                <a:latin typeface="Consolas"/>
-              </a:rPr>
-              <a:t>* </a:t>
-            </a:r>
-            <a:r>
-              <a:rPr sz="2000" dirty="0" err="1">
+              <a:rPr sz="2000">
+                <a:solidFill>
+                  <a:srgbClr val="D4D4D4"/>
+                </a:solidFill>
+                <a:latin typeface="Consolas"/>
+              </a:rPr>
+              <a:t>*</a:t>
+            </a:r>
+            <a:r>
+              <a:rPr sz="2000">
+                <a:solidFill>
+                  <a:srgbClr val="D4D4D4"/>
+                </a:solidFill>
+                <a:latin typeface="Consolas"/>
+              </a:rPr>
+              <a:t> </a:t>
+            </a:r>
+            <a:r>
+              <a:rPr sz="2000">
                 <a:solidFill>
                   <a:srgbClr val="D4D4D4"/>
                 </a:solidFill>
@@ -6344,16 +6407,43 @@
               <a:t>dydt</a:t>
             </a:r>
             <a:r>
-              <a:rPr sz="2000" dirty="0">
-                <a:solidFill>
-                  <a:srgbClr val="D4D4D4"/>
-                </a:solidFill>
-                <a:latin typeface="Consolas"/>
-              </a:rPr>
-              <a:t>) = </a:t>
-            </a:r>
-            <a:r>
-              <a:rPr sz="2000" dirty="0">
+              <a:rPr sz="2000">
+                <a:solidFill>
+                  <a:srgbClr val="D4D4D4"/>
+                </a:solidFill>
+                <a:latin typeface="Consolas"/>
+              </a:rPr>
+              <a:t>)</a:t>
+            </a:r>
+            <a:r>
+              <a:rPr sz="2000">
+                <a:solidFill>
+                  <a:srgbClr val="D4D4D4"/>
+                </a:solidFill>
+                <a:latin typeface="Consolas"/>
+              </a:rPr>
+              <a:t> </a:t>
+            </a:r>
+            <a:r>
+              <a:rPr sz="2000">
+                <a:solidFill>
+                  <a:srgbClr val="D4D4D4"/>
+                </a:solidFill>
+                <a:latin typeface="Consolas"/>
+              </a:rPr>
+              <a:t>=</a:t>
+            </a:r>
+            <a:r>
+              <a:rPr sz="2000">
+                <a:solidFill>
+                  <a:srgbClr val="D4D4D4"/>
+                </a:solidFill>
+                <a:latin typeface="Consolas"/>
+              </a:rPr>
+              <a:t> </a:t>
+            </a:r>
+            <a:r>
+              <a:rPr sz="2000">
                 <a:solidFill>
                   <a:srgbClr val="B5CEA8"/>
                 </a:solidFill>
@@ -6362,7 +6452,7 @@
               <a:t>0</a:t>
             </a:r>
             <a:r>
-              <a:rPr sz="2000" dirty="0">
+              <a:rPr sz="2000">
                 <a:solidFill>
                   <a:srgbClr val="D4D4D4"/>
                 </a:solidFill>
@@ -6378,31 +6468,220 @@
               </a:spcAft>
             </a:pPr>
             <a:r>
-              <a:rPr sz="2000" b="1" dirty="0">
-                <a:solidFill>
-                  <a:srgbClr val="F2C744"/>
-                </a:solidFill>
-                <a:latin typeface="Consolas"/>
-              </a:rPr>
-              <a:t>    virtual double </a:t>
-            </a:r>
-            <a:r>
-              <a:rPr sz="2000" b="1" dirty="0" err="1">
-                <a:solidFill>
-                  <a:srgbClr val="F2C744"/>
+              <a:rPr sz="2000" b="1">
+                <a:solidFill>
+                  <a:srgbClr val="D4D4D4"/>
+                </a:solidFill>
+                <a:latin typeface="Consolas"/>
+              </a:rPr>
+              <a:t>    </a:t>
+            </a:r>
+            <a:r>
+              <a:rPr sz="2000" b="1">
+                <a:solidFill>
+                  <a:srgbClr val="569CD6"/>
+                </a:solidFill>
+                <a:latin typeface="Consolas"/>
+              </a:rPr>
+              <a:t>virtual</a:t>
+            </a:r>
+            <a:r>
+              <a:rPr sz="2000" b="1">
+                <a:solidFill>
+                  <a:srgbClr val="D4D4D4"/>
+                </a:solidFill>
+                <a:latin typeface="Consolas"/>
+              </a:rPr>
+              <a:t> </a:t>
+            </a:r>
+            <a:r>
+              <a:rPr sz="2000" b="1">
+                <a:solidFill>
+                  <a:srgbClr val="4EC9B0"/>
+                </a:solidFill>
+                <a:latin typeface="Consolas"/>
+              </a:rPr>
+              <a:t>double</a:t>
+            </a:r>
+            <a:r>
+              <a:rPr sz="2000" b="1">
+                <a:solidFill>
+                  <a:srgbClr val="D4D4D4"/>
+                </a:solidFill>
+                <a:latin typeface="Consolas"/>
+              </a:rPr>
+              <a:t> </a:t>
+            </a:r>
+            <a:r>
+              <a:rPr sz="2000" b="1">
+                <a:solidFill>
+                  <a:srgbClr val="D4D4D4"/>
                 </a:solidFill>
                 <a:latin typeface="Consolas"/>
               </a:rPr>
               <a:t>getOutput</a:t>
             </a:r>
             <a:r>
-              <a:rPr sz="2000" b="1" dirty="0">
-                <a:solidFill>
-                  <a:srgbClr val="F2C744"/>
-                </a:solidFill>
-                <a:latin typeface="Consolas"/>
-              </a:rPr>
-              <a:t>(const std::string&amp; name) = 0;  // !!</a:t>
+              <a:rPr sz="2000" b="1">
+                <a:solidFill>
+                  <a:srgbClr val="D4D4D4"/>
+                </a:solidFill>
+                <a:latin typeface="Consolas"/>
+              </a:rPr>
+              <a:t>(</a:t>
+            </a:r>
+            <a:r>
+              <a:rPr sz="2000" b="1">
+                <a:solidFill>
+                  <a:srgbClr val="569CD6"/>
+                </a:solidFill>
+                <a:latin typeface="Consolas"/>
+              </a:rPr>
+              <a:t>const</a:t>
+            </a:r>
+            <a:r>
+              <a:rPr sz="2000" b="1">
+                <a:solidFill>
+                  <a:srgbClr val="D4D4D4"/>
+                </a:solidFill>
+                <a:latin typeface="Consolas"/>
+              </a:rPr>
+              <a:t> </a:t>
+            </a:r>
+            <a:r>
+              <a:rPr sz="2000" b="1">
+                <a:solidFill>
+                  <a:srgbClr val="D4D4D4"/>
+                </a:solidFill>
+                <a:latin typeface="Consolas"/>
+              </a:rPr>
+              <a:t>std</a:t>
+            </a:r>
+            <a:r>
+              <a:rPr sz="2000" b="1">
+                <a:solidFill>
+                  <a:srgbClr val="D4D4D4"/>
+                </a:solidFill>
+                <a:latin typeface="Consolas"/>
+              </a:rPr>
+              <a:t>:</a:t>
+            </a:r>
+            <a:r>
+              <a:rPr sz="2000" b="1">
+                <a:solidFill>
+                  <a:srgbClr val="D4D4D4"/>
+                </a:solidFill>
+                <a:latin typeface="Consolas"/>
+              </a:rPr>
+              <a:t>:</a:t>
+            </a:r>
+            <a:r>
+              <a:rPr sz="2000" b="1">
+                <a:solidFill>
+                  <a:srgbClr val="D4D4D4"/>
+                </a:solidFill>
+                <a:latin typeface="Consolas"/>
+              </a:rPr>
+              <a:t>string</a:t>
+            </a:r>
+            <a:r>
+              <a:rPr sz="2000" b="1">
+                <a:solidFill>
+                  <a:srgbClr val="D4D4D4"/>
+                </a:solidFill>
+                <a:latin typeface="Consolas"/>
+              </a:rPr>
+              <a:t>&amp;</a:t>
+            </a:r>
+            <a:r>
+              <a:rPr sz="2000" b="1">
+                <a:solidFill>
+                  <a:srgbClr val="D4D4D4"/>
+                </a:solidFill>
+                <a:latin typeface="Consolas"/>
+              </a:rPr>
+              <a:t> </a:t>
+            </a:r>
+            <a:r>
+              <a:rPr sz="2000" b="1">
+                <a:solidFill>
+                  <a:srgbClr val="D4D4D4"/>
+                </a:solidFill>
+                <a:latin typeface="Consolas"/>
+              </a:rPr>
+              <a:t>name</a:t>
+            </a:r>
+            <a:r>
+              <a:rPr sz="2000" b="1">
+                <a:solidFill>
+                  <a:srgbClr val="D4D4D4"/>
+                </a:solidFill>
+                <a:latin typeface="Consolas"/>
+              </a:rPr>
+              <a:t>)</a:t>
+            </a:r>
+            <a:r>
+              <a:rPr sz="2000" b="1">
+                <a:solidFill>
+                  <a:srgbClr val="D4D4D4"/>
+                </a:solidFill>
+                <a:latin typeface="Consolas"/>
+              </a:rPr>
+              <a:t> </a:t>
+            </a:r>
+            <a:r>
+              <a:rPr sz="2000" b="1">
+                <a:solidFill>
+                  <a:srgbClr val="D4D4D4"/>
+                </a:solidFill>
+                <a:latin typeface="Consolas"/>
+              </a:rPr>
+              <a:t>=</a:t>
+            </a:r>
+            <a:r>
+              <a:rPr sz="2000" b="1">
+                <a:solidFill>
+                  <a:srgbClr val="D4D4D4"/>
+                </a:solidFill>
+                <a:latin typeface="Consolas"/>
+              </a:rPr>
+              <a:t> </a:t>
+            </a:r>
+            <a:r>
+              <a:rPr sz="2000" b="1">
+                <a:solidFill>
+                  <a:srgbClr val="B5CEA8"/>
+                </a:solidFill>
+                <a:latin typeface="Consolas"/>
+              </a:rPr>
+              <a:t>0</a:t>
+            </a:r>
+            <a:r>
+              <a:rPr sz="2000" b="1">
+                <a:solidFill>
+                  <a:srgbClr val="D4D4D4"/>
+                </a:solidFill>
+                <a:latin typeface="Consolas"/>
+              </a:rPr>
+              <a:t>;</a:t>
+            </a:r>
+            <a:r>
+              <a:rPr sz="2000" b="1">
+                <a:solidFill>
+                  <a:srgbClr val="D4D4D4"/>
+                </a:solidFill>
+                <a:latin typeface="Consolas"/>
+              </a:rPr>
+              <a:t>  </a:t>
+            </a:r>
+            <a:r>
+              <a:rPr sz="2000" b="1">
+                <a:solidFill>
+                  <a:srgbClr val="6A9955"/>
+                </a:solidFill>
+                <a:latin typeface="Consolas"/>
+              </a:rPr>
+              <a:t>// !!</a:t>
             </a:r>
           </a:p>
           <a:p>
@@ -6412,7 +6691,7 @@
               </a:spcAft>
             </a:pPr>
             <a:r>
-              <a:rPr sz="2000" dirty="0">
+              <a:rPr sz="2000">
                 <a:solidFill>
                   <a:srgbClr val="D4D4D4"/>
                 </a:solidFill>
@@ -6421,7 +6700,7 @@
               <a:t>    </a:t>
             </a:r>
             <a:r>
-              <a:rPr sz="2000" dirty="0">
+              <a:rPr sz="2000">
                 <a:solidFill>
                   <a:srgbClr val="569CD6"/>
                 </a:solidFill>
@@ -6430,16 +6709,79 @@
               <a:t>virtual</a:t>
             </a:r>
             <a:r>
-              <a:rPr sz="2000" dirty="0">
-                <a:solidFill>
-                  <a:srgbClr val="D4D4D4"/>
-                </a:solidFill>
-                <a:latin typeface="Consolas"/>
-              </a:rPr>
-              <a:t> ~Component() = </a:t>
-            </a:r>
-            <a:r>
-              <a:rPr sz="2000" dirty="0">
+              <a:rPr sz="2000">
+                <a:solidFill>
+                  <a:srgbClr val="D4D4D4"/>
+                </a:solidFill>
+                <a:latin typeface="Consolas"/>
+              </a:rPr>
+              <a:t> </a:t>
+            </a:r>
+            <a:r>
+              <a:rPr sz="2000">
+                <a:solidFill>
+                  <a:srgbClr val="D4D4D4"/>
+                </a:solidFill>
+                <a:latin typeface="Consolas"/>
+              </a:rPr>
+              <a:t>~</a:t>
+            </a:r>
+            <a:r>
+              <a:rPr sz="2000">
+                <a:solidFill>
+                  <a:srgbClr val="4EC9B0"/>
+                </a:solidFill>
+                <a:latin typeface="Consolas"/>
+              </a:rPr>
+              <a:t>Component</a:t>
+            </a:r>
+            <a:r>
+              <a:rPr sz="2000">
+                <a:solidFill>
+                  <a:srgbClr val="D4D4D4"/>
+                </a:solidFill>
+                <a:latin typeface="Consolas"/>
+              </a:rPr>
+              <a:t>(</a:t>
+            </a:r>
+            <a:r>
+              <a:rPr sz="2000">
+                <a:solidFill>
+                  <a:srgbClr val="D4D4D4"/>
+                </a:solidFill>
+                <a:latin typeface="Consolas"/>
+              </a:rPr>
+              <a:t>)</a:t>
+            </a:r>
+            <a:r>
+              <a:rPr sz="2000">
+                <a:solidFill>
+                  <a:srgbClr val="D4D4D4"/>
+                </a:solidFill>
+                <a:latin typeface="Consolas"/>
+              </a:rPr>
+              <a:t> </a:t>
+            </a:r>
+            <a:r>
+              <a:rPr sz="2000">
+                <a:solidFill>
+                  <a:srgbClr val="D4D4D4"/>
+                </a:solidFill>
+                <a:latin typeface="Consolas"/>
+              </a:rPr>
+              <a:t>=</a:t>
+            </a:r>
+            <a:r>
+              <a:rPr sz="2000">
+                <a:solidFill>
+                  <a:srgbClr val="D4D4D4"/>
+                </a:solidFill>
+                <a:latin typeface="Consolas"/>
+              </a:rPr>
+              <a:t> </a:t>
+            </a:r>
+            <a:r>
+              <a:rPr sz="2000">
                 <a:solidFill>
                   <a:srgbClr val="569CD6"/>
                 </a:solidFill>
@@ -6448,7 +6790,7 @@
               <a:t>default</a:t>
             </a:r>
             <a:r>
-              <a:rPr sz="2000" dirty="0">
+              <a:rPr sz="2000">
                 <a:solidFill>
                   <a:srgbClr val="D4D4D4"/>
                 </a:solidFill>
@@ -6464,13 +6806,22 @@
               </a:spcAft>
             </a:pPr>
             <a:r>
-              <a:rPr sz="2000" dirty="0">
-                <a:solidFill>
-                  <a:srgbClr val="D4D4D4"/>
-                </a:solidFill>
-                <a:latin typeface="Consolas"/>
-              </a:rPr>
-              <a:t>};</a:t>
+              <a:rPr sz="2000">
+                <a:solidFill>
+                  <a:srgbClr val="D4D4D4"/>
+                </a:solidFill>
+                <a:latin typeface="Consolas"/>
+              </a:rPr>
+              <a:t>}</a:t>
+            </a:r>
+            <a:r>
+              <a:rPr sz="2000">
+                <a:solidFill>
+                  <a:srgbClr val="D4D4D4"/>
+                </a:solidFill>
+                <a:latin typeface="Consolas"/>
+              </a:rPr>
+              <a:t>;</a:t>
             </a:r>
           </a:p>
           <a:p>
@@ -6480,7 +6831,10 @@
               </a:spcAft>
             </a:pPr>
             <a:r>
-              <a:rPr sz="2000" dirty="0">
+              <a:rPr sz="2000">
+                <a:solidFill>
+                  <a:srgbClr val="D4D4D4"/>
+                </a:solidFill>
                 <a:latin typeface="Consolas"/>
               </a:rPr>
               <a:t> </a:t>
@@ -6493,16 +6847,79 @@
               </a:spcAft>
             </a:pPr>
             <a:r>
-              <a:rPr sz="2000" dirty="0">
-                <a:solidFill>
-                  <a:srgbClr val="D4D4D4"/>
-                </a:solidFill>
-                <a:latin typeface="Consolas"/>
-              </a:rPr>
-              <a:t>std::vector&lt;std::</a:t>
-            </a:r>
-            <a:r>
-              <a:rPr sz="2000" dirty="0" err="1">
+              <a:rPr sz="2000">
+                <a:solidFill>
+                  <a:srgbClr val="D4D4D4"/>
+                </a:solidFill>
+                <a:latin typeface="Consolas"/>
+              </a:rPr>
+              <a:t>std</a:t>
+            </a:r>
+            <a:r>
+              <a:rPr sz="2000">
+                <a:solidFill>
+                  <a:srgbClr val="D4D4D4"/>
+                </a:solidFill>
+                <a:latin typeface="Consolas"/>
+              </a:rPr>
+              <a:t>:</a:t>
+            </a:r>
+            <a:r>
+              <a:rPr sz="2000">
+                <a:solidFill>
+                  <a:srgbClr val="D4D4D4"/>
+                </a:solidFill>
+                <a:latin typeface="Consolas"/>
+              </a:rPr>
+              <a:t>:</a:t>
+            </a:r>
+            <a:r>
+              <a:rPr sz="2000">
+                <a:solidFill>
+                  <a:srgbClr val="D4D4D4"/>
+                </a:solidFill>
+                <a:latin typeface="Consolas"/>
+              </a:rPr>
+              <a:t>vector</a:t>
+            </a:r>
+            <a:r>
+              <a:rPr sz="2000">
+                <a:solidFill>
+                  <a:srgbClr val="D4D4D4"/>
+                </a:solidFill>
+                <a:latin typeface="Consolas"/>
+              </a:rPr>
+              <a:t>&lt;</a:t>
+            </a:r>
+            <a:r>
+              <a:rPr sz="2000">
+                <a:solidFill>
+                  <a:srgbClr val="D4D4D4"/>
+                </a:solidFill>
+                <a:latin typeface="Consolas"/>
+              </a:rPr>
+              <a:t>std</a:t>
+            </a:r>
+            <a:r>
+              <a:rPr sz="2000">
+                <a:solidFill>
+                  <a:srgbClr val="D4D4D4"/>
+                </a:solidFill>
+                <a:latin typeface="Consolas"/>
+              </a:rPr>
+              <a:t>:</a:t>
+            </a:r>
+            <a:r>
+              <a:rPr sz="2000">
+                <a:solidFill>
+                  <a:srgbClr val="D4D4D4"/>
+                </a:solidFill>
+                <a:latin typeface="Consolas"/>
+              </a:rPr>
+              <a:t>:</a:t>
+            </a:r>
+            <a:r>
+              <a:rPr sz="2000">
                 <a:solidFill>
                   <a:srgbClr val="D4D4D4"/>
                 </a:solidFill>
@@ -6511,13 +6928,67 @@
               <a:t>unique_ptr</a:t>
             </a:r>
             <a:r>
-              <a:rPr sz="2000" dirty="0">
-                <a:solidFill>
-                  <a:srgbClr val="D4D4D4"/>
-                </a:solidFill>
-                <a:latin typeface="Consolas"/>
-              </a:rPr>
-              <a:t>&lt;Component&gt;&gt; components;</a:t>
+              <a:rPr sz="2000">
+                <a:solidFill>
+                  <a:srgbClr val="D4D4D4"/>
+                </a:solidFill>
+                <a:latin typeface="Consolas"/>
+              </a:rPr>
+              <a:t>&lt;</a:t>
+            </a:r>
+            <a:r>
+              <a:rPr sz="2000">
+                <a:solidFill>
+                  <a:srgbClr val="4EC9B0"/>
+                </a:solidFill>
+                <a:latin typeface="Consolas"/>
+              </a:rPr>
+              <a:t>Component</a:t>
+            </a:r>
+            <a:r>
+              <a:rPr sz="2000">
+                <a:solidFill>
+                  <a:srgbClr val="D4D4D4"/>
+                </a:solidFill>
+                <a:latin typeface="Consolas"/>
+              </a:rPr>
+              <a:t>&gt;</a:t>
+            </a:r>
+            <a:r>
+              <a:rPr sz="2000">
+                <a:solidFill>
+                  <a:srgbClr val="D4D4D4"/>
+                </a:solidFill>
+                <a:latin typeface="Consolas"/>
+              </a:rPr>
+              <a:t>&gt;</a:t>
+            </a:r>
+            <a:r>
+              <a:rPr sz="2000">
+                <a:solidFill>
+                  <a:srgbClr val="D4D4D4"/>
+                </a:solidFill>
+                <a:latin typeface="Consolas"/>
+              </a:rPr>
+              <a:t> </a:t>
+            </a:r>
+            <a:r>
+              <a:rPr sz="2000">
+                <a:solidFill>
+                  <a:srgbClr val="D4D4D4"/>
+                </a:solidFill>
+                <a:latin typeface="Consolas"/>
+              </a:rPr>
+              <a:t>components</a:t>
+            </a:r>
+            <a:r>
+              <a:rPr sz="2000">
+                <a:solidFill>
+                  <a:srgbClr val="D4D4D4"/>
+                </a:solidFill>
+                <a:latin typeface="Consolas"/>
+              </a:rPr>
+              <a:t>;</a:t>
             </a:r>
           </a:p>
           <a:p>
@@ -6527,13 +6998,130 @@
               </a:spcAft>
             </a:pPr>
             <a:r>
-              <a:rPr sz="2000" b="1" dirty="0">
-                <a:solidFill>
-                  <a:srgbClr val="F2C744"/>
-                </a:solidFill>
-                <a:latin typeface="Consolas"/>
-              </a:rPr>
-              <a:t>for (auto&amp; c : components)              // innermost loop of RK4,</a:t>
+              <a:rPr sz="2000" b="1">
+                <a:solidFill>
+                  <a:srgbClr val="569CD6"/>
+                </a:solidFill>
+                <a:latin typeface="Consolas"/>
+              </a:rPr>
+              <a:t>for</a:t>
+            </a:r>
+            <a:r>
+              <a:rPr sz="2000" b="1">
+                <a:solidFill>
+                  <a:srgbClr val="D4D4D4"/>
+                </a:solidFill>
+                <a:latin typeface="Consolas"/>
+              </a:rPr>
+              <a:t> </a:t>
+            </a:r>
+            <a:r>
+              <a:rPr sz="2000" b="1">
+                <a:solidFill>
+                  <a:srgbClr val="D4D4D4"/>
+                </a:solidFill>
+                <a:latin typeface="Consolas"/>
+              </a:rPr>
+              <a:t>(</a:t>
+            </a:r>
+            <a:r>
+              <a:rPr sz="2000" b="1">
+                <a:solidFill>
+                  <a:srgbClr val="569CD6"/>
+                </a:solidFill>
+                <a:latin typeface="Consolas"/>
+              </a:rPr>
+              <a:t>auto</a:t>
+            </a:r>
+            <a:r>
+              <a:rPr sz="2000" b="1">
+                <a:solidFill>
+                  <a:srgbClr val="D4D4D4"/>
+                </a:solidFill>
+                <a:latin typeface="Consolas"/>
+              </a:rPr>
+              <a:t>&amp;</a:t>
+            </a:r>
+            <a:r>
+              <a:rPr sz="2000" b="1">
+                <a:solidFill>
+                  <a:srgbClr val="D4D4D4"/>
+                </a:solidFill>
+                <a:latin typeface="Consolas"/>
+              </a:rPr>
+              <a:t> </a:t>
+            </a:r>
+            <a:r>
+              <a:rPr sz="2000" b="1">
+                <a:solidFill>
+                  <a:srgbClr val="D4D4D4"/>
+                </a:solidFill>
+                <a:latin typeface="Consolas"/>
+              </a:rPr>
+              <a:t>c</a:t>
+            </a:r>
+            <a:r>
+              <a:rPr sz="2000" b="1">
+                <a:solidFill>
+                  <a:srgbClr val="D4D4D4"/>
+                </a:solidFill>
+                <a:latin typeface="Consolas"/>
+              </a:rPr>
+              <a:t> </a:t>
+            </a:r>
+            <a:r>
+              <a:rPr sz="2000" b="1">
+                <a:solidFill>
+                  <a:srgbClr val="D4D4D4"/>
+                </a:solidFill>
+                <a:latin typeface="Consolas"/>
+              </a:rPr>
+              <a:t>:</a:t>
+            </a:r>
+            <a:r>
+              <a:rPr sz="2000" b="1">
+                <a:solidFill>
+                  <a:srgbClr val="D4D4D4"/>
+                </a:solidFill>
+                <a:latin typeface="Consolas"/>
+              </a:rPr>
+              <a:t> </a:t>
+            </a:r>
+            <a:r>
+              <a:rPr sz="2000" b="1">
+                <a:solidFill>
+                  <a:srgbClr val="D4D4D4"/>
+                </a:solidFill>
+                <a:latin typeface="Consolas"/>
+              </a:rPr>
+              <a:t>components</a:t>
+            </a:r>
+            <a:r>
+              <a:rPr sz="2000" b="1">
+                <a:solidFill>
+                  <a:srgbClr val="D4D4D4"/>
+                </a:solidFill>
+                <a:latin typeface="Consolas"/>
+              </a:rPr>
+              <a:t>)</a:t>
+            </a:r>
+            <a:r>
+              <a:rPr sz="2000" b="1">
+                <a:solidFill>
+                  <a:srgbClr val="D4D4D4"/>
+                </a:solidFill>
+                <a:latin typeface="Consolas"/>
+              </a:rPr>
+              <a:t>              </a:t>
+            </a:r>
+            <a:r>
+              <a:rPr sz="2000" b="1">
+                <a:solidFill>
+                  <a:srgbClr val="6A9955"/>
+                </a:solidFill>
+                <a:latin typeface="Consolas"/>
+              </a:rPr>
+              <a:t>// innermost loop of RK4,</a:t>
             </a:r>
           </a:p>
           <a:p>
@@ -6543,49 +7131,157 @@
               </a:spcAft>
             </a:pPr>
             <a:r>
-              <a:rPr sz="2000" b="1" dirty="0">
-                <a:solidFill>
-                  <a:srgbClr val="F2C744"/>
-                </a:solidFill>
-                <a:latin typeface="Consolas"/>
-              </a:rPr>
-              <a:t>    c-&gt;</a:t>
-            </a:r>
-            <a:r>
-              <a:rPr sz="2000" b="1" dirty="0" err="1">
-                <a:solidFill>
-                  <a:srgbClr val="F2C744"/>
+              <a:rPr sz="2000" b="1">
+                <a:solidFill>
+                  <a:srgbClr val="D4D4D4"/>
+                </a:solidFill>
+                <a:latin typeface="Consolas"/>
+              </a:rPr>
+              <a:t>    </a:t>
+            </a:r>
+            <a:r>
+              <a:rPr sz="2000" b="1">
+                <a:solidFill>
+                  <a:srgbClr val="D4D4D4"/>
+                </a:solidFill>
+                <a:latin typeface="Consolas"/>
+              </a:rPr>
+              <a:t>c</a:t>
+            </a:r>
+            <a:r>
+              <a:rPr sz="2000" b="1">
+                <a:solidFill>
+                  <a:srgbClr val="D4D4D4"/>
+                </a:solidFill>
+                <a:latin typeface="Consolas"/>
+              </a:rPr>
+              <a:t>-</a:t>
+            </a:r>
+            <a:r>
+              <a:rPr sz="2000" b="1">
+                <a:solidFill>
+                  <a:srgbClr val="D4D4D4"/>
+                </a:solidFill>
+                <a:latin typeface="Consolas"/>
+              </a:rPr>
+              <a:t>&gt;</a:t>
+            </a:r>
+            <a:r>
+              <a:rPr sz="2000" b="1">
+                <a:solidFill>
+                  <a:srgbClr val="D4D4D4"/>
                 </a:solidFill>
                 <a:latin typeface="Consolas"/>
               </a:rPr>
               <a:t>computeDerivatives</a:t>
             </a:r>
             <a:r>
-              <a:rPr sz="2000" b="1" dirty="0">
-                <a:solidFill>
-                  <a:srgbClr val="F2C744"/>
-                </a:solidFill>
-                <a:latin typeface="Consolas"/>
-              </a:rPr>
-              <a:t>(t, y, </a:t>
-            </a:r>
-            <a:r>
-              <a:rPr sz="2000" b="1" dirty="0" err="1">
-                <a:solidFill>
-                  <a:srgbClr val="F2C744"/>
+              <a:rPr sz="2000" b="1">
+                <a:solidFill>
+                  <a:srgbClr val="D4D4D4"/>
+                </a:solidFill>
+                <a:latin typeface="Consolas"/>
+              </a:rPr>
+              <a:t>(</a:t>
+            </a:r>
+            <a:r>
+              <a:rPr sz="2000" b="1">
+                <a:solidFill>
+                  <a:srgbClr val="D4D4D4"/>
+                </a:solidFill>
+                <a:latin typeface="Consolas"/>
+              </a:rPr>
+              <a:t>t</a:t>
+            </a:r>
+            <a:r>
+              <a:rPr sz="2000" b="1">
+                <a:solidFill>
+                  <a:srgbClr val="D4D4D4"/>
+                </a:solidFill>
+                <a:latin typeface="Consolas"/>
+              </a:rPr>
+              <a:t>,</a:t>
+            </a:r>
+            <a:r>
+              <a:rPr sz="2000" b="1">
+                <a:solidFill>
+                  <a:srgbClr val="D4D4D4"/>
+                </a:solidFill>
+                <a:latin typeface="Consolas"/>
+              </a:rPr>
+              <a:t> </a:t>
+            </a:r>
+            <a:r>
+              <a:rPr sz="2000" b="1">
+                <a:solidFill>
+                  <a:srgbClr val="D4D4D4"/>
+                </a:solidFill>
+                <a:latin typeface="Consolas"/>
+              </a:rPr>
+              <a:t>y</a:t>
+            </a:r>
+            <a:r>
+              <a:rPr sz="2000" b="1">
+                <a:solidFill>
+                  <a:srgbClr val="D4D4D4"/>
+                </a:solidFill>
+                <a:latin typeface="Consolas"/>
+              </a:rPr>
+              <a:t>,</a:t>
+            </a:r>
+            <a:r>
+              <a:rPr sz="2000" b="1">
+                <a:solidFill>
+                  <a:srgbClr val="D4D4D4"/>
+                </a:solidFill>
+                <a:latin typeface="Consolas"/>
+              </a:rPr>
+              <a:t> </a:t>
+            </a:r>
+            <a:r>
+              <a:rPr sz="2000" b="1">
+                <a:solidFill>
+                  <a:srgbClr val="D4D4D4"/>
                 </a:solidFill>
                 <a:latin typeface="Consolas"/>
               </a:rPr>
               <a:t>dydt</a:t>
             </a:r>
             <a:r>
-              <a:rPr sz="2000" b="1" dirty="0">
-                <a:solidFill>
-                  <a:srgbClr val="F2C744"/>
-                </a:solidFill>
-                <a:latin typeface="Consolas"/>
-              </a:rPr>
-              <a:t>);  // 4x per step, 1000s of steps</a:t>
+              <a:rPr sz="2000" b="1">
+                <a:solidFill>
+                  <a:srgbClr val="D4D4D4"/>
+                </a:solidFill>
+                <a:latin typeface="Consolas"/>
+              </a:rPr>
+              <a:t>)</a:t>
+            </a:r>
+            <a:r>
+              <a:rPr sz="2000" b="1">
+                <a:solidFill>
+                  <a:srgbClr val="D4D4D4"/>
+                </a:solidFill>
+                <a:latin typeface="Consolas"/>
+              </a:rPr>
+              <a:t>;</a:t>
+            </a:r>
+            <a:r>
+              <a:rPr sz="2000" b="1">
+                <a:solidFill>
+                  <a:srgbClr val="D4D4D4"/>
+                </a:solidFill>
+                <a:latin typeface="Consolas"/>
+              </a:rPr>
+              <a:t>  </a:t>
+            </a:r>
+            <a:r>
+              <a:rPr sz="2000" b="1">
+                <a:solidFill>
+                  <a:srgbClr val="6A9955"/>
+                </a:solidFill>
+                <a:latin typeface="Consolas"/>
+              </a:rPr>
+              <a:t>// 4x per step, 1000s of steps</a:t>
             </a:r>
           </a:p>
         </p:txBody>
@@ -21116,7 +21812,7 @@
             <a:r>
               <a:rPr sz="1500">
                 <a:solidFill>
-                  <a:srgbClr val="DCDCAA"/>
+                  <a:srgbClr val="D4D4D4"/>
                 </a:solidFill>
                 <a:latin typeface="Consolas"/>
               </a:rPr>
@@ -21129,7 +21825,97 @@
                 </a:solidFill>
                 <a:latin typeface="Consolas"/>
               </a:rPr>
-              <a:t>(                    T compute(mass1::Position,</a:t>
+              <a:t>(</a:t>
+            </a:r>
+            <a:r>
+              <a:rPr sz="1500">
+                <a:solidFill>
+                  <a:srgbClr val="D4D4D4"/>
+                </a:solidFill>
+                <a:latin typeface="Consolas"/>
+              </a:rPr>
+              <a:t>                    </a:t>
+            </a:r>
+            <a:r>
+              <a:rPr sz="1500">
+                <a:solidFill>
+                  <a:srgbClr val="D4D4D4"/>
+                </a:solidFill>
+                <a:latin typeface="Consolas"/>
+              </a:rPr>
+              <a:t>T</a:t>
+            </a:r>
+            <a:r>
+              <a:rPr sz="1500">
+                <a:solidFill>
+                  <a:srgbClr val="D4D4D4"/>
+                </a:solidFill>
+                <a:latin typeface="Consolas"/>
+              </a:rPr>
+              <a:t> </a:t>
+            </a:r>
+            <a:r>
+              <a:rPr sz="1500">
+                <a:solidFill>
+                  <a:srgbClr val="D4D4D4"/>
+                </a:solidFill>
+                <a:latin typeface="Consolas"/>
+              </a:rPr>
+              <a:t>compute</a:t>
+            </a:r>
+            <a:r>
+              <a:rPr sz="1500">
+                <a:solidFill>
+                  <a:srgbClr val="D4D4D4"/>
+                </a:solidFill>
+                <a:latin typeface="Consolas"/>
+              </a:rPr>
+              <a:t>(</a:t>
+            </a:r>
+            <a:r>
+              <a:rPr sz="1500">
+                <a:solidFill>
+                  <a:srgbClr val="D4D4D4"/>
+                </a:solidFill>
+                <a:latin typeface="Consolas"/>
+              </a:rPr>
+              <a:t>mass1</a:t>
+            </a:r>
+            <a:r>
+              <a:rPr sz="1500">
+                <a:solidFill>
+                  <a:srgbClr val="D4D4D4"/>
+                </a:solidFill>
+                <a:latin typeface="Consolas"/>
+              </a:rPr>
+              <a:t>:</a:t>
+            </a:r>
+            <a:r>
+              <a:rPr sz="1500">
+                <a:solidFill>
+                  <a:srgbClr val="D4D4D4"/>
+                </a:solidFill>
+                <a:latin typeface="Consolas"/>
+              </a:rPr>
+              <a:t>:</a:t>
+            </a:r>
+            <a:r>
+              <a:rPr sz="1500">
+                <a:solidFill>
+                  <a:srgbClr val="4EC9B0"/>
+                </a:solidFill>
+                <a:latin typeface="Consolas"/>
+              </a:rPr>
+              <a:t>Position</a:t>
+            </a:r>
+            <a:r>
+              <a:rPr sz="1500">
+                <a:solidFill>
+                  <a:srgbClr val="D4D4D4"/>
+                </a:solidFill>
+                <a:latin typeface="Consolas"/>
+              </a:rPr>
+              <a:t>,</a:t>
             </a:r>
           </a:p>
           <a:p>
@@ -21163,11 +21949,146 @@
                 </a:solidFill>
                 <a:latin typeface="Consolas"/>
               </a:rPr>
-              <a:t> std::string&amp; name);            std::span&lt;</a:t>
+              <a:t> </a:t>
             </a:r>
             <a:r>
               <a:rPr sz="1500">
                 <a:solidFill>
+                  <a:srgbClr val="D4D4D4"/>
+                </a:solidFill>
+                <a:latin typeface="Consolas"/>
+              </a:rPr>
+              <a:t>std</a:t>
+            </a:r>
+            <a:r>
+              <a:rPr sz="1500">
+                <a:solidFill>
+                  <a:srgbClr val="D4D4D4"/>
+                </a:solidFill>
+                <a:latin typeface="Consolas"/>
+              </a:rPr>
+              <a:t>:</a:t>
+            </a:r>
+            <a:r>
+              <a:rPr sz="1500">
+                <a:solidFill>
+                  <a:srgbClr val="D4D4D4"/>
+                </a:solidFill>
+                <a:latin typeface="Consolas"/>
+              </a:rPr>
+              <a:t>:</a:t>
+            </a:r>
+            <a:r>
+              <a:rPr sz="1500">
+                <a:solidFill>
+                  <a:srgbClr val="D4D4D4"/>
+                </a:solidFill>
+                <a:latin typeface="Consolas"/>
+              </a:rPr>
+              <a:t>string</a:t>
+            </a:r>
+            <a:r>
+              <a:rPr sz="1500">
+                <a:solidFill>
+                  <a:srgbClr val="D4D4D4"/>
+                </a:solidFill>
+                <a:latin typeface="Consolas"/>
+              </a:rPr>
+              <a:t>&amp;</a:t>
+            </a:r>
+            <a:r>
+              <a:rPr sz="1500">
+                <a:solidFill>
+                  <a:srgbClr val="D4D4D4"/>
+                </a:solidFill>
+                <a:latin typeface="Consolas"/>
+              </a:rPr>
+              <a:t> </a:t>
+            </a:r>
+            <a:r>
+              <a:rPr sz="1500">
+                <a:solidFill>
+                  <a:srgbClr val="D4D4D4"/>
+                </a:solidFill>
+                <a:latin typeface="Consolas"/>
+              </a:rPr>
+              <a:t>name</a:t>
+            </a:r>
+            <a:r>
+              <a:rPr sz="1500">
+                <a:solidFill>
+                  <a:srgbClr val="D4D4D4"/>
+                </a:solidFill>
+                <a:latin typeface="Consolas"/>
+              </a:rPr>
+              <a:t>)</a:t>
+            </a:r>
+            <a:r>
+              <a:rPr sz="1500">
+                <a:solidFill>
+                  <a:srgbClr val="D4D4D4"/>
+                </a:solidFill>
+                <a:latin typeface="Consolas"/>
+              </a:rPr>
+              <a:t>;</a:t>
+            </a:r>
+            <a:r>
+              <a:rPr sz="1500">
+                <a:solidFill>
+                  <a:srgbClr val="D4D4D4"/>
+                </a:solidFill>
+                <a:latin typeface="Consolas"/>
+              </a:rPr>
+              <a:t>            </a:t>
+            </a:r>
+            <a:r>
+              <a:rPr sz="1500">
+                <a:solidFill>
+                  <a:srgbClr val="D4D4D4"/>
+                </a:solidFill>
+                <a:latin typeface="Consolas"/>
+              </a:rPr>
+              <a:t>std</a:t>
+            </a:r>
+            <a:r>
+              <a:rPr sz="1500">
+                <a:solidFill>
+                  <a:srgbClr val="D4D4D4"/>
+                </a:solidFill>
+                <a:latin typeface="Consolas"/>
+              </a:rPr>
+              <a:t>:</a:t>
+            </a:r>
+            <a:r>
+              <a:rPr sz="1500">
+                <a:solidFill>
+                  <a:srgbClr val="D4D4D4"/>
+                </a:solidFill>
+                <a:latin typeface="Consolas"/>
+              </a:rPr>
+              <a:t>:</a:t>
+            </a:r>
+            <a:r>
+              <a:rPr sz="1500">
+                <a:solidFill>
+                  <a:srgbClr val="D4D4D4"/>
+                </a:solidFill>
+                <a:latin typeface="Consolas"/>
+              </a:rPr>
+              <a:t>span</a:t>
+            </a:r>
+            <a:r>
+              <a:rPr sz="1500">
+                <a:solidFill>
+                  <a:srgbClr val="D4D4D4"/>
+                </a:solidFill>
+                <a:latin typeface="Consolas"/>
+              </a:rPr>
+              <a:t>&lt;</a:t>
+            </a:r>
+            <a:r>
+              <a:rPr sz="1500">
+                <a:solidFill>
                   <a:srgbClr val="569CD6"/>
                 </a:solidFill>
                 <a:latin typeface="Consolas"/>
@@ -21181,7 +22102,61 @@
                 </a:solidFill>
                 <a:latin typeface="Consolas"/>
               </a:rPr>
-              <a:t> T&gt; state) </a:t>
+              <a:t> </a:t>
+            </a:r>
+            <a:r>
+              <a:rPr sz="1500">
+                <a:solidFill>
+                  <a:srgbClr val="D4D4D4"/>
+                </a:solidFill>
+                <a:latin typeface="Consolas"/>
+              </a:rPr>
+              <a:t>T</a:t>
+            </a:r>
+            <a:r>
+              <a:rPr sz="1500">
+                <a:solidFill>
+                  <a:srgbClr val="D4D4D4"/>
+                </a:solidFill>
+                <a:latin typeface="Consolas"/>
+              </a:rPr>
+              <a:t>&gt;</a:t>
+            </a:r>
+            <a:r>
+              <a:rPr sz="1500">
+                <a:solidFill>
+                  <a:srgbClr val="D4D4D4"/>
+                </a:solidFill>
+                <a:latin typeface="Consolas"/>
+              </a:rPr>
+              <a:t> </a:t>
+            </a:r>
+            <a:r>
+              <a:rPr sz="1500">
+                <a:solidFill>
+                  <a:srgbClr val="D4D4D4"/>
+                </a:solidFill>
+                <a:latin typeface="Consolas"/>
+              </a:rPr>
+              <a:t>state</a:t>
+            </a:r>
+            <a:r>
+              <a:rPr sz="1500">
+                <a:solidFill>
+                  <a:srgbClr val="D4D4D4"/>
+                </a:solidFill>
+                <a:latin typeface="Consolas"/>
+              </a:rPr>
+              <a:t>)</a:t>
+            </a:r>
+            <a:r>
+              <a:rPr sz="1500">
+                <a:solidFill>
+                  <a:srgbClr val="D4D4D4"/>
+                </a:solidFill>
+                <a:latin typeface="Consolas"/>
+              </a:rPr>
+              <a:t> </a:t>
             </a:r>
             <a:r>
               <a:rPr sz="1500">
@@ -21210,6 +22185,9 @@
             </a:pPr>
             <a:r>
               <a:rPr sz="1500">
+                <a:solidFill>
+                  <a:srgbClr val="D4D4D4"/>
+                </a:solidFill>
                 <a:latin typeface="Consolas"/>
               </a:rPr>
               <a:t> </a:t>
@@ -34609,7 +35587,7 @@
           <a:noFill/>
         </p:spPr>
         <p:txBody>
-          <a:bodyPr wrap="square">
+          <a:bodyPr wrap="none">
             <a:spAutoFit/>
           </a:bodyPr>
           <a:lstStyle/>
@@ -34620,7 +35598,7 @@
               </a:spcAft>
             </a:pPr>
             <a:r>
-              <a:rPr dirty="0">
+              <a:rPr sz="1300">
                 <a:solidFill>
                   <a:srgbClr val="6A9955"/>
                 </a:solidFill>
@@ -34636,7 +35614,7 @@
               </a:spcAft>
             </a:pPr>
             <a:r>
-              <a:rPr dirty="0">
+              <a:rPr sz="1300">
                 <a:solidFill>
                   <a:srgbClr val="4EC9B0"/>
                 </a:solidFill>
@@ -34645,25 +35623,25 @@
               <a:t>void</a:t>
             </a:r>
             <a:r>
-              <a:rPr dirty="0">
-                <a:solidFill>
-                  <a:srgbClr val="D4D4D4"/>
-                </a:solidFill>
-                <a:latin typeface="Consolas"/>
-              </a:rPr>
-              <a:t> </a:t>
-            </a:r>
-            <a:r>
-              <a:rPr dirty="0" err="1">
-                <a:solidFill>
-                  <a:srgbClr val="DCDCAA"/>
+              <a:rPr sz="1300">
+                <a:solidFill>
+                  <a:srgbClr val="D4D4D4"/>
+                </a:solidFill>
+                <a:latin typeface="Consolas"/>
+              </a:rPr>
+              <a:t> </a:t>
+            </a:r>
+            <a:r>
+              <a:rPr sz="1300">
+                <a:solidFill>
+                  <a:srgbClr val="D4D4D4"/>
                 </a:solidFill>
                 <a:latin typeface="Consolas"/>
               </a:rPr>
               <a:t>derivs</a:t>
             </a:r>
             <a:r>
-              <a:rPr dirty="0">
+              <a:rPr sz="1300">
                 <a:solidFill>
                   <a:srgbClr val="D4D4D4"/>
                 </a:solidFill>
@@ -34672,7 +35650,7 @@
               <a:t>(</a:t>
             </a:r>
             <a:r>
-              <a:rPr dirty="0">
+              <a:rPr sz="1300">
                 <a:solidFill>
                   <a:srgbClr val="4EC9B0"/>
                 </a:solidFill>
@@ -34681,16 +35659,43 @@
               <a:t>double</a:t>
             </a:r>
             <a:r>
-              <a:rPr dirty="0">
-                <a:solidFill>
-                  <a:srgbClr val="D4D4D4"/>
-                </a:solidFill>
-                <a:latin typeface="Consolas"/>
-              </a:rPr>
-              <a:t> t, </a:t>
-            </a:r>
-            <a:r>
-              <a:rPr dirty="0">
+              <a:rPr sz="1300">
+                <a:solidFill>
+                  <a:srgbClr val="D4D4D4"/>
+                </a:solidFill>
+                <a:latin typeface="Consolas"/>
+              </a:rPr>
+              <a:t> </a:t>
+            </a:r>
+            <a:r>
+              <a:rPr sz="1300">
+                <a:solidFill>
+                  <a:srgbClr val="D4D4D4"/>
+                </a:solidFill>
+                <a:latin typeface="Consolas"/>
+              </a:rPr>
+              <a:t>t</a:t>
+            </a:r>
+            <a:r>
+              <a:rPr sz="1300">
+                <a:solidFill>
+                  <a:srgbClr val="D4D4D4"/>
+                </a:solidFill>
+                <a:latin typeface="Consolas"/>
+              </a:rPr>
+              <a:t>,</a:t>
+            </a:r>
+            <a:r>
+              <a:rPr sz="1300">
+                <a:solidFill>
+                  <a:srgbClr val="D4D4D4"/>
+                </a:solidFill>
+                <a:latin typeface="Consolas"/>
+              </a:rPr>
+              <a:t> </a:t>
+            </a:r>
+            <a:r>
+              <a:rPr sz="1300">
                 <a:solidFill>
                   <a:srgbClr val="569CD6"/>
                 </a:solidFill>
@@ -34699,16 +35704,16 @@
               <a:t>const</a:t>
             </a:r>
             <a:r>
-              <a:rPr dirty="0">
-                <a:solidFill>
-                  <a:srgbClr val="D4D4D4"/>
-                </a:solidFill>
-                <a:latin typeface="Consolas"/>
-              </a:rPr>
-              <a:t> </a:t>
-            </a:r>
-            <a:r>
-              <a:rPr dirty="0">
+              <a:rPr sz="1300">
+                <a:solidFill>
+                  <a:srgbClr val="D4D4D4"/>
+                </a:solidFill>
+                <a:latin typeface="Consolas"/>
+              </a:rPr>
+              <a:t> </a:t>
+            </a:r>
+            <a:r>
+              <a:rPr sz="1300">
                 <a:solidFill>
                   <a:srgbClr val="4EC9B0"/>
                 </a:solidFill>
@@ -34717,16 +35722,52 @@
               <a:t>double</a:t>
             </a:r>
             <a:r>
-              <a:rPr dirty="0">
-                <a:solidFill>
-                  <a:srgbClr val="D4D4D4"/>
-                </a:solidFill>
-                <a:latin typeface="Consolas"/>
-              </a:rPr>
-              <a:t>* y, </a:t>
-            </a:r>
-            <a:r>
-              <a:rPr dirty="0">
+              <a:rPr sz="1300">
+                <a:solidFill>
+                  <a:srgbClr val="D4D4D4"/>
+                </a:solidFill>
+                <a:latin typeface="Consolas"/>
+              </a:rPr>
+              <a:t>*</a:t>
+            </a:r>
+            <a:r>
+              <a:rPr sz="1300">
+                <a:solidFill>
+                  <a:srgbClr val="D4D4D4"/>
+                </a:solidFill>
+                <a:latin typeface="Consolas"/>
+              </a:rPr>
+              <a:t> </a:t>
+            </a:r>
+            <a:r>
+              <a:rPr sz="1300">
+                <a:solidFill>
+                  <a:srgbClr val="D4D4D4"/>
+                </a:solidFill>
+                <a:latin typeface="Consolas"/>
+              </a:rPr>
+              <a:t>y</a:t>
+            </a:r>
+            <a:r>
+              <a:rPr sz="1300">
+                <a:solidFill>
+                  <a:srgbClr val="D4D4D4"/>
+                </a:solidFill>
+                <a:latin typeface="Consolas"/>
+              </a:rPr>
+              <a:t>,</a:t>
+            </a:r>
+            <a:r>
+              <a:rPr sz="1300">
+                <a:solidFill>
+                  <a:srgbClr val="D4D4D4"/>
+                </a:solidFill>
+                <a:latin typeface="Consolas"/>
+              </a:rPr>
+              <a:t> </a:t>
+            </a:r>
+            <a:r>
+              <a:rPr sz="1300">
                 <a:solidFill>
                   <a:srgbClr val="4EC9B0"/>
                 </a:solidFill>
@@ -34735,16 +35776,25 @@
               <a:t>double</a:t>
             </a:r>
             <a:r>
-              <a:rPr dirty="0">
-                <a:solidFill>
-                  <a:srgbClr val="D4D4D4"/>
-                </a:solidFill>
-                <a:latin typeface="Consolas"/>
-              </a:rPr>
-              <a:t>* </a:t>
-            </a:r>
-            <a:r>
-              <a:rPr dirty="0" err="1">
+              <a:rPr sz="1300">
+                <a:solidFill>
+                  <a:srgbClr val="D4D4D4"/>
+                </a:solidFill>
+                <a:latin typeface="Consolas"/>
+              </a:rPr>
+              <a:t>*</a:t>
+            </a:r>
+            <a:r>
+              <a:rPr sz="1300">
+                <a:solidFill>
+                  <a:srgbClr val="D4D4D4"/>
+                </a:solidFill>
+                <a:latin typeface="Consolas"/>
+              </a:rPr>
+              <a:t> </a:t>
+            </a:r>
+            <a:r>
+              <a:rPr sz="1300">
                 <a:solidFill>
                   <a:srgbClr val="D4D4D4"/>
                 </a:solidFill>
@@ -34753,13 +35803,31 @@
               <a:t>dydt</a:t>
             </a:r>
             <a:r>
-              <a:rPr dirty="0">
-                <a:solidFill>
-                  <a:srgbClr val="D4D4D4"/>
-                </a:solidFill>
-                <a:latin typeface="Consolas"/>
-              </a:rPr>
-              <a:t>) {</a:t>
+              <a:rPr sz="1300">
+                <a:solidFill>
+                  <a:srgbClr val="D4D4D4"/>
+                </a:solidFill>
+                <a:latin typeface="Consolas"/>
+              </a:rPr>
+              <a:t>)</a:t>
+            </a:r>
+            <a:r>
+              <a:rPr sz="1300">
+                <a:solidFill>
+                  <a:srgbClr val="D4D4D4"/>
+                </a:solidFill>
+                <a:latin typeface="Consolas"/>
+              </a:rPr>
+              <a:t> </a:t>
+            </a:r>
+            <a:r>
+              <a:rPr sz="1300">
+                <a:solidFill>
+                  <a:srgbClr val="D4D4D4"/>
+                </a:solidFill>
+                <a:latin typeface="Consolas"/>
+              </a:rPr>
+              <a:t>{</a:t>
             </a:r>
           </a:p>
           <a:p>
@@ -34769,7 +35837,7 @@
               </a:spcAft>
             </a:pPr>
             <a:r>
-              <a:rPr dirty="0">
+              <a:rPr sz="1300">
                 <a:solidFill>
                   <a:srgbClr val="D4D4D4"/>
                 </a:solidFill>
@@ -34778,7 +35846,7 @@
               <a:t>    </a:t>
             </a:r>
             <a:r>
-              <a:rPr dirty="0">
+              <a:rPr sz="1300">
                 <a:solidFill>
                   <a:srgbClr val="6A9955"/>
                 </a:solidFill>
@@ -34794,7 +35862,7 @@
               </a:spcAft>
             </a:pPr>
             <a:r>
-              <a:rPr dirty="0">
+              <a:rPr sz="1300">
                 <a:solidFill>
                   <a:srgbClr val="D4D4D4"/>
                 </a:solidFill>
@@ -34803,7 +35871,7 @@
               <a:t>    </a:t>
             </a:r>
             <a:r>
-              <a:rPr dirty="0">
+              <a:rPr sz="1300">
                 <a:solidFill>
                   <a:srgbClr val="4EC9B0"/>
                 </a:solidFill>
@@ -34812,16 +35880,52 @@
               <a:t>double</a:t>
             </a:r>
             <a:r>
-              <a:rPr dirty="0">
-                <a:solidFill>
-                  <a:srgbClr val="D4D4D4"/>
-                </a:solidFill>
-                <a:latin typeface="Consolas"/>
-              </a:rPr>
-              <a:t> rho = </a:t>
-            </a:r>
-            <a:r>
-              <a:rPr dirty="0">
+              <a:rPr sz="1300">
+                <a:solidFill>
+                  <a:srgbClr val="D4D4D4"/>
+                </a:solidFill>
+                <a:latin typeface="Consolas"/>
+              </a:rPr>
+              <a:t> </a:t>
+            </a:r>
+            <a:r>
+              <a:rPr sz="1300">
+                <a:solidFill>
+                  <a:srgbClr val="D4D4D4"/>
+                </a:solidFill>
+                <a:latin typeface="Consolas"/>
+              </a:rPr>
+              <a:t>rho</a:t>
+            </a:r>
+            <a:r>
+              <a:rPr sz="1300">
+                <a:solidFill>
+                  <a:srgbClr val="D4D4D4"/>
+                </a:solidFill>
+                <a:latin typeface="Consolas"/>
+              </a:rPr>
+              <a:t> </a:t>
+            </a:r>
+            <a:r>
+              <a:rPr sz="1300">
+                <a:solidFill>
+                  <a:srgbClr val="D4D4D4"/>
+                </a:solidFill>
+                <a:latin typeface="Consolas"/>
+              </a:rPr>
+              <a:t>=</a:t>
+            </a:r>
+            <a:r>
+              <a:rPr sz="1300">
+                <a:solidFill>
+                  <a:srgbClr val="D4D4D4"/>
+                </a:solidFill>
+                <a:latin typeface="Consolas"/>
+              </a:rPr>
+              <a:t> </a:t>
+            </a:r>
+            <a:r>
+              <a:rPr sz="1300">
                 <a:solidFill>
                   <a:srgbClr val="B5CEA8"/>
                 </a:solidFill>
@@ -34830,16 +35934,79 @@
               <a:t>1.225</a:t>
             </a:r>
             <a:r>
-              <a:rPr dirty="0">
-                <a:solidFill>
-                  <a:srgbClr val="D4D4D4"/>
-                </a:solidFill>
-                <a:latin typeface="Consolas"/>
-              </a:rPr>
-              <a:t> * exp(-y[</a:t>
-            </a:r>
-            <a:r>
-              <a:rPr dirty="0">
+              <a:rPr sz="1300">
+                <a:solidFill>
+                  <a:srgbClr val="D4D4D4"/>
+                </a:solidFill>
+                <a:latin typeface="Consolas"/>
+              </a:rPr>
+              <a:t> </a:t>
+            </a:r>
+            <a:r>
+              <a:rPr sz="1300">
+                <a:solidFill>
+                  <a:srgbClr val="D4D4D4"/>
+                </a:solidFill>
+                <a:latin typeface="Consolas"/>
+              </a:rPr>
+              <a:t>*</a:t>
+            </a:r>
+            <a:r>
+              <a:rPr sz="1300">
+                <a:solidFill>
+                  <a:srgbClr val="D4D4D4"/>
+                </a:solidFill>
+                <a:latin typeface="Consolas"/>
+              </a:rPr>
+              <a:t> </a:t>
+            </a:r>
+            <a:r>
+              <a:rPr sz="1300">
+                <a:solidFill>
+                  <a:srgbClr val="D4D4D4"/>
+                </a:solidFill>
+                <a:latin typeface="Consolas"/>
+              </a:rPr>
+              <a:t>exp</a:t>
+            </a:r>
+            <a:r>
+              <a:rPr sz="1300">
+                <a:solidFill>
+                  <a:srgbClr val="D4D4D4"/>
+                </a:solidFill>
+                <a:latin typeface="Consolas"/>
+              </a:rPr>
+              <a:t>(</a:t>
+            </a:r>
+            <a:r>
+              <a:rPr sz="1300">
+                <a:solidFill>
+                  <a:srgbClr val="D4D4D4"/>
+                </a:solidFill>
+                <a:latin typeface="Consolas"/>
+              </a:rPr>
+              <a:t>-</a:t>
+            </a:r>
+            <a:r>
+              <a:rPr sz="1300">
+                <a:solidFill>
+                  <a:srgbClr val="D4D4D4"/>
+                </a:solidFill>
+                <a:latin typeface="Consolas"/>
+              </a:rPr>
+              <a:t>y</a:t>
+            </a:r>
+            <a:r>
+              <a:rPr sz="1300">
+                <a:solidFill>
+                  <a:srgbClr val="D4D4D4"/>
+                </a:solidFill>
+                <a:latin typeface="Consolas"/>
+              </a:rPr>
+              <a:t>[</a:t>
+            </a:r>
+            <a:r>
+              <a:rPr sz="1300">
                 <a:solidFill>
                   <a:srgbClr val="B5CEA8"/>
                 </a:solidFill>
@@ -34848,16 +36015,43 @@
               <a:t>2</a:t>
             </a:r>
             <a:r>
-              <a:rPr dirty="0">
-                <a:solidFill>
-                  <a:srgbClr val="D4D4D4"/>
-                </a:solidFill>
-                <a:latin typeface="Consolas"/>
-              </a:rPr>
-              <a:t>] / </a:t>
-            </a:r>
-            <a:r>
-              <a:rPr dirty="0">
+              <a:rPr sz="1300">
+                <a:solidFill>
+                  <a:srgbClr val="D4D4D4"/>
+                </a:solidFill>
+                <a:latin typeface="Consolas"/>
+              </a:rPr>
+              <a:t>]</a:t>
+            </a:r>
+            <a:r>
+              <a:rPr sz="1300">
+                <a:solidFill>
+                  <a:srgbClr val="D4D4D4"/>
+                </a:solidFill>
+                <a:latin typeface="Consolas"/>
+              </a:rPr>
+              <a:t> </a:t>
+            </a:r>
+            <a:r>
+              <a:rPr sz="1300">
+                <a:solidFill>
+                  <a:srgbClr val="D4D4D4"/>
+                </a:solidFill>
+                <a:latin typeface="Consolas"/>
+              </a:rPr>
+              <a:t>/</a:t>
+            </a:r>
+            <a:r>
+              <a:rPr sz="1300">
+                <a:solidFill>
+                  <a:srgbClr val="D4D4D4"/>
+                </a:solidFill>
+                <a:latin typeface="Consolas"/>
+              </a:rPr>
+              <a:t> </a:t>
+            </a:r>
+            <a:r>
+              <a:rPr sz="1300">
                 <a:solidFill>
                   <a:srgbClr val="B5CEA8"/>
                 </a:solidFill>
@@ -34866,16 +36060,34 @@
               <a:t>8500.0</a:t>
             </a:r>
             <a:r>
-              <a:rPr dirty="0">
-                <a:solidFill>
-                  <a:srgbClr val="D4D4D4"/>
-                </a:solidFill>
-                <a:latin typeface="Consolas"/>
-              </a:rPr>
-              <a:t>);            </a:t>
-            </a:r>
-            <a:r>
-              <a:rPr dirty="0">
+              <a:rPr sz="1300">
+                <a:solidFill>
+                  <a:srgbClr val="D4D4D4"/>
+                </a:solidFill>
+                <a:latin typeface="Consolas"/>
+              </a:rPr>
+              <a:t>)</a:t>
+            </a:r>
+            <a:r>
+              <a:rPr sz="1300">
+                <a:solidFill>
+                  <a:srgbClr val="D4D4D4"/>
+                </a:solidFill>
+                <a:latin typeface="Consolas"/>
+              </a:rPr>
+              <a:t>;</a:t>
+            </a:r>
+            <a:r>
+              <a:rPr sz="1300">
+                <a:solidFill>
+                  <a:srgbClr val="D4D4D4"/>
+                </a:solidFill>
+                <a:latin typeface="Consolas"/>
+              </a:rPr>
+              <a:t>            </a:t>
+            </a:r>
+            <a:r>
+              <a:rPr sz="1300">
                 <a:solidFill>
                   <a:srgbClr val="6A9955"/>
                 </a:solidFill>
@@ -34891,7 +36103,7 @@
               </a:spcAft>
             </a:pPr>
             <a:r>
-              <a:rPr dirty="0">
+              <a:rPr sz="1300">
                 <a:solidFill>
                   <a:srgbClr val="D4D4D4"/>
                 </a:solidFill>
@@ -34900,7 +36112,7 @@
               <a:t>    </a:t>
             </a:r>
             <a:r>
-              <a:rPr dirty="0">
+              <a:rPr sz="1300">
                 <a:solidFill>
                   <a:srgbClr val="4EC9B0"/>
                 </a:solidFill>
@@ -34909,16 +36121,70 @@
               <a:t>double</a:t>
             </a:r>
             <a:r>
-              <a:rPr dirty="0">
-                <a:solidFill>
-                  <a:srgbClr val="D4D4D4"/>
-                </a:solidFill>
-                <a:latin typeface="Consolas"/>
-              </a:rPr>
-              <a:t> v2  = y[</a:t>
-            </a:r>
-            <a:r>
-              <a:rPr dirty="0">
+              <a:rPr sz="1300">
+                <a:solidFill>
+                  <a:srgbClr val="D4D4D4"/>
+                </a:solidFill>
+                <a:latin typeface="Consolas"/>
+              </a:rPr>
+              <a:t> </a:t>
+            </a:r>
+            <a:r>
+              <a:rPr sz="1300">
+                <a:solidFill>
+                  <a:srgbClr val="D4D4D4"/>
+                </a:solidFill>
+                <a:latin typeface="Consolas"/>
+              </a:rPr>
+              <a:t>v2</a:t>
+            </a:r>
+            <a:r>
+              <a:rPr sz="1300">
+                <a:solidFill>
+                  <a:srgbClr val="D4D4D4"/>
+                </a:solidFill>
+                <a:latin typeface="Consolas"/>
+              </a:rPr>
+              <a:t>  </a:t>
+            </a:r>
+            <a:r>
+              <a:rPr sz="1300">
+                <a:solidFill>
+                  <a:srgbClr val="D4D4D4"/>
+                </a:solidFill>
+                <a:latin typeface="Consolas"/>
+              </a:rPr>
+              <a:t>=</a:t>
+            </a:r>
+            <a:r>
+              <a:rPr sz="1300">
+                <a:solidFill>
+                  <a:srgbClr val="D4D4D4"/>
+                </a:solidFill>
+                <a:latin typeface="Consolas"/>
+              </a:rPr>
+              <a:t> </a:t>
+            </a:r>
+            <a:r>
+              <a:rPr sz="1300">
+                <a:solidFill>
+                  <a:srgbClr val="D4D4D4"/>
+                </a:solidFill>
+                <a:latin typeface="Consolas"/>
+              </a:rPr>
+              <a:t>y</a:t>
+            </a:r>
+            <a:r>
+              <a:rPr sz="1300">
+                <a:solidFill>
+                  <a:srgbClr val="D4D4D4"/>
+                </a:solidFill>
+                <a:latin typeface="Consolas"/>
+              </a:rPr>
+              <a:t>[</a:t>
+            </a:r>
+            <a:r>
+              <a:rPr sz="1300">
                 <a:solidFill>
                   <a:srgbClr val="B5CEA8"/>
                 </a:solidFill>
@@ -34927,16 +36193,43 @@
               <a:t>3</a:t>
             </a:r>
             <a:r>
-              <a:rPr dirty="0">
-                <a:solidFill>
-                  <a:srgbClr val="D4D4D4"/>
-                </a:solidFill>
-                <a:latin typeface="Consolas"/>
-              </a:rPr>
-              <a:t>]*y[</a:t>
-            </a:r>
-            <a:r>
-              <a:rPr dirty="0">
+              <a:rPr sz="1300">
+                <a:solidFill>
+                  <a:srgbClr val="D4D4D4"/>
+                </a:solidFill>
+                <a:latin typeface="Consolas"/>
+              </a:rPr>
+              <a:t>]</a:t>
+            </a:r>
+            <a:r>
+              <a:rPr sz="1300">
+                <a:solidFill>
+                  <a:srgbClr val="D4D4D4"/>
+                </a:solidFill>
+                <a:latin typeface="Consolas"/>
+              </a:rPr>
+              <a:t>*</a:t>
+            </a:r>
+            <a:r>
+              <a:rPr sz="1300">
+                <a:solidFill>
+                  <a:srgbClr val="D4D4D4"/>
+                </a:solidFill>
+                <a:latin typeface="Consolas"/>
+              </a:rPr>
+              <a:t>y</a:t>
+            </a:r>
+            <a:r>
+              <a:rPr sz="1300">
+                <a:solidFill>
+                  <a:srgbClr val="D4D4D4"/>
+                </a:solidFill>
+                <a:latin typeface="Consolas"/>
+              </a:rPr>
+              <a:t>[</a:t>
+            </a:r>
+            <a:r>
+              <a:rPr sz="1300">
                 <a:solidFill>
                   <a:srgbClr val="B5CEA8"/>
                 </a:solidFill>
@@ -34945,16 +36238,61 @@
               <a:t>3</a:t>
             </a:r>
             <a:r>
-              <a:rPr dirty="0">
-                <a:solidFill>
-                  <a:srgbClr val="D4D4D4"/>
-                </a:solidFill>
-                <a:latin typeface="Consolas"/>
-              </a:rPr>
-              <a:t>] + y[</a:t>
-            </a:r>
-            <a:r>
-              <a:rPr dirty="0">
+              <a:rPr sz="1300">
+                <a:solidFill>
+                  <a:srgbClr val="D4D4D4"/>
+                </a:solidFill>
+                <a:latin typeface="Consolas"/>
+              </a:rPr>
+              <a:t>]</a:t>
+            </a:r>
+            <a:r>
+              <a:rPr sz="1300">
+                <a:solidFill>
+                  <a:srgbClr val="D4D4D4"/>
+                </a:solidFill>
+                <a:latin typeface="Consolas"/>
+              </a:rPr>
+              <a:t> </a:t>
+            </a:r>
+            <a:r>
+              <a:rPr sz="1300">
+                <a:solidFill>
+                  <a:srgbClr val="D4D4D4"/>
+                </a:solidFill>
+                <a:latin typeface="Consolas"/>
+              </a:rPr>
+              <a:t>+</a:t>
+            </a:r>
+            <a:r>
+              <a:rPr sz="1300">
+                <a:solidFill>
+                  <a:srgbClr val="D4D4D4"/>
+                </a:solidFill>
+                <a:latin typeface="Consolas"/>
+              </a:rPr>
+              <a:t> </a:t>
+            </a:r>
+            <a:r>
+              <a:rPr sz="1300">
+                <a:solidFill>
+                  <a:srgbClr val="D4D4D4"/>
+                </a:solidFill>
+                <a:latin typeface="Consolas"/>
+              </a:rPr>
+              <a:t>y</a:t>
+            </a:r>
+            <a:r>
+              <a:rPr sz="1300">
+                <a:solidFill>
+                  <a:srgbClr val="D4D4D4"/>
+                </a:solidFill>
+                <a:latin typeface="Consolas"/>
+              </a:rPr>
+              <a:t>[</a:t>
+            </a:r>
+            <a:r>
+              <a:rPr sz="1300">
                 <a:solidFill>
                   <a:srgbClr val="B5CEA8"/>
                 </a:solidFill>
@@ -34963,16 +36301,43 @@
               <a:t>4</a:t>
             </a:r>
             <a:r>
-              <a:rPr dirty="0">
-                <a:solidFill>
-                  <a:srgbClr val="D4D4D4"/>
-                </a:solidFill>
-                <a:latin typeface="Consolas"/>
-              </a:rPr>
-              <a:t>]*y[</a:t>
-            </a:r>
-            <a:r>
-              <a:rPr dirty="0">
+              <a:rPr sz="1300">
+                <a:solidFill>
+                  <a:srgbClr val="D4D4D4"/>
+                </a:solidFill>
+                <a:latin typeface="Consolas"/>
+              </a:rPr>
+              <a:t>]</a:t>
+            </a:r>
+            <a:r>
+              <a:rPr sz="1300">
+                <a:solidFill>
+                  <a:srgbClr val="D4D4D4"/>
+                </a:solidFill>
+                <a:latin typeface="Consolas"/>
+              </a:rPr>
+              <a:t>*</a:t>
+            </a:r>
+            <a:r>
+              <a:rPr sz="1300">
+                <a:solidFill>
+                  <a:srgbClr val="D4D4D4"/>
+                </a:solidFill>
+                <a:latin typeface="Consolas"/>
+              </a:rPr>
+              <a:t>y</a:t>
+            </a:r>
+            <a:r>
+              <a:rPr sz="1300">
+                <a:solidFill>
+                  <a:srgbClr val="D4D4D4"/>
+                </a:solidFill>
+                <a:latin typeface="Consolas"/>
+              </a:rPr>
+              <a:t>[</a:t>
+            </a:r>
+            <a:r>
+              <a:rPr sz="1300">
                 <a:solidFill>
                   <a:srgbClr val="B5CEA8"/>
                 </a:solidFill>
@@ -34981,16 +36346,61 @@
               <a:t>4</a:t>
             </a:r>
             <a:r>
-              <a:rPr dirty="0">
-                <a:solidFill>
-                  <a:srgbClr val="D4D4D4"/>
-                </a:solidFill>
-                <a:latin typeface="Consolas"/>
-              </a:rPr>
-              <a:t>] + y[</a:t>
-            </a:r>
-            <a:r>
-              <a:rPr dirty="0">
+              <a:rPr sz="1300">
+                <a:solidFill>
+                  <a:srgbClr val="D4D4D4"/>
+                </a:solidFill>
+                <a:latin typeface="Consolas"/>
+              </a:rPr>
+              <a:t>]</a:t>
+            </a:r>
+            <a:r>
+              <a:rPr sz="1300">
+                <a:solidFill>
+                  <a:srgbClr val="D4D4D4"/>
+                </a:solidFill>
+                <a:latin typeface="Consolas"/>
+              </a:rPr>
+              <a:t> </a:t>
+            </a:r>
+            <a:r>
+              <a:rPr sz="1300">
+                <a:solidFill>
+                  <a:srgbClr val="D4D4D4"/>
+                </a:solidFill>
+                <a:latin typeface="Consolas"/>
+              </a:rPr>
+              <a:t>+</a:t>
+            </a:r>
+            <a:r>
+              <a:rPr sz="1300">
+                <a:solidFill>
+                  <a:srgbClr val="D4D4D4"/>
+                </a:solidFill>
+                <a:latin typeface="Consolas"/>
+              </a:rPr>
+              <a:t> </a:t>
+            </a:r>
+            <a:r>
+              <a:rPr sz="1300">
+                <a:solidFill>
+                  <a:srgbClr val="D4D4D4"/>
+                </a:solidFill>
+                <a:latin typeface="Consolas"/>
+              </a:rPr>
+              <a:t>y</a:t>
+            </a:r>
+            <a:r>
+              <a:rPr sz="1300">
+                <a:solidFill>
+                  <a:srgbClr val="D4D4D4"/>
+                </a:solidFill>
+                <a:latin typeface="Consolas"/>
+              </a:rPr>
+              <a:t>[</a:t>
+            </a:r>
+            <a:r>
+              <a:rPr sz="1300">
                 <a:solidFill>
                   <a:srgbClr val="B5CEA8"/>
                 </a:solidFill>
@@ -34999,16 +36409,43 @@
               <a:t>5</a:t>
             </a:r>
             <a:r>
-              <a:rPr dirty="0">
-                <a:solidFill>
-                  <a:srgbClr val="D4D4D4"/>
-                </a:solidFill>
-                <a:latin typeface="Consolas"/>
-              </a:rPr>
-              <a:t>]*y[</a:t>
-            </a:r>
-            <a:r>
-              <a:rPr dirty="0">
+              <a:rPr sz="1300">
+                <a:solidFill>
+                  <a:srgbClr val="D4D4D4"/>
+                </a:solidFill>
+                <a:latin typeface="Consolas"/>
+              </a:rPr>
+              <a:t>]</a:t>
+            </a:r>
+            <a:r>
+              <a:rPr sz="1300">
+                <a:solidFill>
+                  <a:srgbClr val="D4D4D4"/>
+                </a:solidFill>
+                <a:latin typeface="Consolas"/>
+              </a:rPr>
+              <a:t>*</a:t>
+            </a:r>
+            <a:r>
+              <a:rPr sz="1300">
+                <a:solidFill>
+                  <a:srgbClr val="D4D4D4"/>
+                </a:solidFill>
+                <a:latin typeface="Consolas"/>
+              </a:rPr>
+              <a:t>y</a:t>
+            </a:r>
+            <a:r>
+              <a:rPr sz="1300">
+                <a:solidFill>
+                  <a:srgbClr val="D4D4D4"/>
+                </a:solidFill>
+                <a:latin typeface="Consolas"/>
+              </a:rPr>
+              <a:t>[</a:t>
+            </a:r>
+            <a:r>
+              <a:rPr sz="1300">
                 <a:solidFill>
                   <a:srgbClr val="B5CEA8"/>
                 </a:solidFill>
@@ -35017,13 +36454,22 @@
               <a:t>5</a:t>
             </a:r>
             <a:r>
-              <a:rPr dirty="0">
-                <a:solidFill>
-                  <a:srgbClr val="D4D4D4"/>
-                </a:solidFill>
-                <a:latin typeface="Consolas"/>
-              </a:rPr>
-              <a:t>];</a:t>
+              <a:rPr sz="1300">
+                <a:solidFill>
+                  <a:srgbClr val="D4D4D4"/>
+                </a:solidFill>
+                <a:latin typeface="Consolas"/>
+              </a:rPr>
+              <a:t>]</a:t>
+            </a:r>
+            <a:r>
+              <a:rPr sz="1300">
+                <a:solidFill>
+                  <a:srgbClr val="D4D4D4"/>
+                </a:solidFill>
+                <a:latin typeface="Consolas"/>
+              </a:rPr>
+              <a:t>;</a:t>
             </a:r>
           </a:p>
           <a:p>
@@ -35033,7 +36479,7 @@
               </a:spcAft>
             </a:pPr>
             <a:r>
-              <a:rPr dirty="0">
+              <a:rPr sz="1300">
                 <a:solidFill>
                   <a:srgbClr val="D4D4D4"/>
                 </a:solidFill>
@@ -35042,7 +36488,7 @@
               <a:t>    </a:t>
             </a:r>
             <a:r>
-              <a:rPr dirty="0">
+              <a:rPr sz="1300">
                 <a:solidFill>
                   <a:srgbClr val="4EC9B0"/>
                 </a:solidFill>
@@ -35051,34 +36497,52 @@
               <a:t>double</a:t>
             </a:r>
             <a:r>
-              <a:rPr dirty="0">
-                <a:solidFill>
-                  <a:srgbClr val="D4D4D4"/>
-                </a:solidFill>
-                <a:latin typeface="Consolas"/>
-              </a:rPr>
-              <a:t> </a:t>
-            </a:r>
-            <a:r>
-              <a:rPr dirty="0" err="1">
-                <a:solidFill>
-                  <a:srgbClr val="D4D4D4"/>
+              <a:rPr sz="1300">
+                <a:solidFill>
+                  <a:srgbClr val="D4D4D4"/>
+                </a:solidFill>
+                <a:latin typeface="Consolas"/>
+              </a:rPr>
+              <a:t> </a:t>
+            </a:r>
+            <a:r>
+              <a:rPr sz="1300">
+                <a:solidFill>
+                  <a:srgbClr val="4EC9B0"/>
                 </a:solidFill>
                 <a:latin typeface="Consolas"/>
               </a:rPr>
               <a:t>Fd</a:t>
             </a:r>
             <a:r>
-              <a:rPr dirty="0">
-                <a:solidFill>
-                  <a:srgbClr val="D4D4D4"/>
-                </a:solidFill>
-                <a:latin typeface="Consolas"/>
-              </a:rPr>
-              <a:t>  = </a:t>
-            </a:r>
-            <a:r>
-              <a:rPr dirty="0">
+              <a:rPr sz="1300">
+                <a:solidFill>
+                  <a:srgbClr val="D4D4D4"/>
+                </a:solidFill>
+                <a:latin typeface="Consolas"/>
+              </a:rPr>
+              <a:t>  </a:t>
+            </a:r>
+            <a:r>
+              <a:rPr sz="1300">
+                <a:solidFill>
+                  <a:srgbClr val="D4D4D4"/>
+                </a:solidFill>
+                <a:latin typeface="Consolas"/>
+              </a:rPr>
+              <a:t>=</a:t>
+            </a:r>
+            <a:r>
+              <a:rPr sz="1300">
+                <a:solidFill>
+                  <a:srgbClr val="D4D4D4"/>
+                </a:solidFill>
+                <a:latin typeface="Consolas"/>
+              </a:rPr>
+              <a:t> </a:t>
+            </a:r>
+            <a:r>
+              <a:rPr sz="1300">
                 <a:solidFill>
                   <a:srgbClr val="B5CEA8"/>
                 </a:solidFill>
@@ -35087,16 +36551,169 @@
               <a:t>0.5</a:t>
             </a:r>
             <a:r>
-              <a:rPr dirty="0">
-                <a:solidFill>
-                  <a:srgbClr val="D4D4D4"/>
-                </a:solidFill>
-                <a:latin typeface="Consolas"/>
-              </a:rPr>
-              <a:t> * rho * v2 * CD * AREA;             </a:t>
-            </a:r>
-            <a:r>
-              <a:rPr dirty="0">
+              <a:rPr sz="1300">
+                <a:solidFill>
+                  <a:srgbClr val="D4D4D4"/>
+                </a:solidFill>
+                <a:latin typeface="Consolas"/>
+              </a:rPr>
+              <a:t> </a:t>
+            </a:r>
+            <a:r>
+              <a:rPr sz="1300">
+                <a:solidFill>
+                  <a:srgbClr val="D4D4D4"/>
+                </a:solidFill>
+                <a:latin typeface="Consolas"/>
+              </a:rPr>
+              <a:t>*</a:t>
+            </a:r>
+            <a:r>
+              <a:rPr sz="1300">
+                <a:solidFill>
+                  <a:srgbClr val="D4D4D4"/>
+                </a:solidFill>
+                <a:latin typeface="Consolas"/>
+              </a:rPr>
+              <a:t> </a:t>
+            </a:r>
+            <a:r>
+              <a:rPr sz="1300">
+                <a:solidFill>
+                  <a:srgbClr val="D4D4D4"/>
+                </a:solidFill>
+                <a:latin typeface="Consolas"/>
+              </a:rPr>
+              <a:t>rho</a:t>
+            </a:r>
+            <a:r>
+              <a:rPr sz="1300">
+                <a:solidFill>
+                  <a:srgbClr val="D4D4D4"/>
+                </a:solidFill>
+                <a:latin typeface="Consolas"/>
+              </a:rPr>
+              <a:t> </a:t>
+            </a:r>
+            <a:r>
+              <a:rPr sz="1300">
+                <a:solidFill>
+                  <a:srgbClr val="D4D4D4"/>
+                </a:solidFill>
+                <a:latin typeface="Consolas"/>
+              </a:rPr>
+              <a:t>*</a:t>
+            </a:r>
+            <a:r>
+              <a:rPr sz="1300">
+                <a:solidFill>
+                  <a:srgbClr val="D4D4D4"/>
+                </a:solidFill>
+                <a:latin typeface="Consolas"/>
+              </a:rPr>
+              <a:t> </a:t>
+            </a:r>
+            <a:r>
+              <a:rPr sz="1300">
+                <a:solidFill>
+                  <a:srgbClr val="D4D4D4"/>
+                </a:solidFill>
+                <a:latin typeface="Consolas"/>
+              </a:rPr>
+              <a:t>v2</a:t>
+            </a:r>
+            <a:r>
+              <a:rPr sz="1300">
+                <a:solidFill>
+                  <a:srgbClr val="D4D4D4"/>
+                </a:solidFill>
+                <a:latin typeface="Consolas"/>
+              </a:rPr>
+              <a:t> </a:t>
+            </a:r>
+            <a:r>
+              <a:rPr sz="1300">
+                <a:solidFill>
+                  <a:srgbClr val="D4D4D4"/>
+                </a:solidFill>
+                <a:latin typeface="Consolas"/>
+              </a:rPr>
+              <a:t>*</a:t>
+            </a:r>
+            <a:r>
+              <a:rPr sz="1300">
+                <a:solidFill>
+                  <a:srgbClr val="D4D4D4"/>
+                </a:solidFill>
+                <a:latin typeface="Consolas"/>
+              </a:rPr>
+              <a:t> </a:t>
+            </a:r>
+            <a:r>
+              <a:rPr sz="1300">
+                <a:solidFill>
+                  <a:srgbClr val="D4D4D4"/>
+                </a:solidFill>
+                <a:latin typeface="Consolas"/>
+              </a:rPr>
+              <a:t>CD</a:t>
+            </a:r>
+            <a:r>
+              <a:rPr sz="1300">
+                <a:solidFill>
+                  <a:srgbClr val="D4D4D4"/>
+                </a:solidFill>
+                <a:latin typeface="Consolas"/>
+              </a:rPr>
+              <a:t> </a:t>
+            </a:r>
+            <a:r>
+              <a:rPr sz="1300">
+                <a:solidFill>
+                  <a:srgbClr val="D4D4D4"/>
+                </a:solidFill>
+                <a:latin typeface="Consolas"/>
+              </a:rPr>
+              <a:t>*</a:t>
+            </a:r>
+            <a:r>
+              <a:rPr sz="1300">
+                <a:solidFill>
+                  <a:srgbClr val="D4D4D4"/>
+                </a:solidFill>
+                <a:latin typeface="Consolas"/>
+              </a:rPr>
+              <a:t> </a:t>
+            </a:r>
+            <a:r>
+              <a:rPr sz="1300">
+                <a:solidFill>
+                  <a:srgbClr val="D4D4D4"/>
+                </a:solidFill>
+                <a:latin typeface="Consolas"/>
+              </a:rPr>
+              <a:t>AREA</a:t>
+            </a:r>
+            <a:r>
+              <a:rPr sz="1300">
+                <a:solidFill>
+                  <a:srgbClr val="D4D4D4"/>
+                </a:solidFill>
+                <a:latin typeface="Consolas"/>
+              </a:rPr>
+              <a:t>;</a:t>
+            </a:r>
+            <a:r>
+              <a:rPr sz="1300">
+                <a:solidFill>
+                  <a:srgbClr val="D4D4D4"/>
+                </a:solidFill>
+                <a:latin typeface="Consolas"/>
+              </a:rPr>
+              <a:t>             </a:t>
+            </a:r>
+            <a:r>
+              <a:rPr sz="1300">
                 <a:solidFill>
                   <a:srgbClr val="6A9955"/>
                 </a:solidFill>
@@ -35112,7 +36729,7 @@
               </a:spcAft>
             </a:pPr>
             <a:r>
-              <a:rPr dirty="0">
+              <a:rPr sz="1300">
                 <a:solidFill>
                   <a:srgbClr val="D4D4D4"/>
                 </a:solidFill>
@@ -35121,7 +36738,7 @@
               <a:t>    </a:t>
             </a:r>
             <a:r>
-              <a:rPr dirty="0">
+              <a:rPr sz="1300">
                 <a:solidFill>
                   <a:srgbClr val="4EC9B0"/>
                 </a:solidFill>
@@ -35130,16 +36747,52 @@
               <a:t>double</a:t>
             </a:r>
             <a:r>
-              <a:rPr dirty="0">
-                <a:solidFill>
-                  <a:srgbClr val="D4D4D4"/>
-                </a:solidFill>
-                <a:latin typeface="Consolas"/>
-              </a:rPr>
-              <a:t> Ft  = </a:t>
-            </a:r>
-            <a:r>
-              <a:rPr dirty="0" err="1">
+              <a:rPr sz="1300">
+                <a:solidFill>
+                  <a:srgbClr val="D4D4D4"/>
+                </a:solidFill>
+                <a:latin typeface="Consolas"/>
+              </a:rPr>
+              <a:t> </a:t>
+            </a:r>
+            <a:r>
+              <a:rPr sz="1300">
+                <a:solidFill>
+                  <a:srgbClr val="4EC9B0"/>
+                </a:solidFill>
+                <a:latin typeface="Consolas"/>
+              </a:rPr>
+              <a:t>Ft</a:t>
+            </a:r>
+            <a:r>
+              <a:rPr sz="1300">
+                <a:solidFill>
+                  <a:srgbClr val="D4D4D4"/>
+                </a:solidFill>
+                <a:latin typeface="Consolas"/>
+              </a:rPr>
+              <a:t>  </a:t>
+            </a:r>
+            <a:r>
+              <a:rPr sz="1300">
+                <a:solidFill>
+                  <a:srgbClr val="D4D4D4"/>
+                </a:solidFill>
+                <a:latin typeface="Consolas"/>
+              </a:rPr>
+              <a:t>=</a:t>
+            </a:r>
+            <a:r>
+              <a:rPr sz="1300">
+                <a:solidFill>
+                  <a:srgbClr val="D4D4D4"/>
+                </a:solidFill>
+                <a:latin typeface="Consolas"/>
+              </a:rPr>
+              <a:t> </a:t>
+            </a:r>
+            <a:r>
+              <a:rPr sz="1300">
                 <a:solidFill>
                   <a:srgbClr val="D4D4D4"/>
                 </a:solidFill>
@@ -35148,16 +36801,52 @@
               <a:t>thrust_table_lookup</a:t>
             </a:r>
             <a:r>
-              <a:rPr dirty="0">
-                <a:solidFill>
-                  <a:srgbClr val="D4D4D4"/>
-                </a:solidFill>
-                <a:latin typeface="Consolas"/>
-              </a:rPr>
-              <a:t>(t);                 </a:t>
-            </a:r>
-            <a:r>
-              <a:rPr dirty="0">
+              <a:rPr sz="1300">
+                <a:solidFill>
+                  <a:srgbClr val="D4D4D4"/>
+                </a:solidFill>
+                <a:latin typeface="Consolas"/>
+              </a:rPr>
+              <a:t>(</a:t>
+            </a:r>
+            <a:r>
+              <a:rPr sz="1300">
+                <a:solidFill>
+                  <a:srgbClr val="D4D4D4"/>
+                </a:solidFill>
+                <a:latin typeface="Consolas"/>
+              </a:rPr>
+              <a:t>t</a:t>
+            </a:r>
+            <a:r>
+              <a:rPr sz="1300">
+                <a:solidFill>
+                  <a:srgbClr val="D4D4D4"/>
+                </a:solidFill>
+                <a:latin typeface="Consolas"/>
+              </a:rPr>
+              <a:t>)</a:t>
+            </a:r>
+            <a:r>
+              <a:rPr sz="1300">
+                <a:solidFill>
+                  <a:srgbClr val="D4D4D4"/>
+                </a:solidFill>
+                <a:latin typeface="Consolas"/>
+              </a:rPr>
+              <a:t>;</a:t>
+            </a:r>
+            <a:r>
+              <a:rPr sz="1300">
+                <a:solidFill>
+                  <a:srgbClr val="D4D4D4"/>
+                </a:solidFill>
+                <a:latin typeface="Consolas"/>
+              </a:rPr>
+              <a:t>                 </a:t>
+            </a:r>
+            <a:r>
+              <a:rPr sz="1300">
                 <a:solidFill>
                   <a:srgbClr val="6A9955"/>
                 </a:solidFill>
@@ -35173,7 +36862,7 @@
               </a:spcAft>
             </a:pPr>
             <a:r>
-              <a:rPr dirty="0">
+              <a:rPr sz="1300">
                 <a:solidFill>
                   <a:srgbClr val="D4D4D4"/>
                 </a:solidFill>
@@ -35182,7 +36871,7 @@
               <a:t>    </a:t>
             </a:r>
             <a:r>
-              <a:rPr dirty="0" err="1">
+              <a:rPr sz="1300">
                 <a:solidFill>
                   <a:srgbClr val="D4D4D4"/>
                 </a:solidFill>
@@ -35191,7 +36880,7 @@
               <a:t>dydt</a:t>
             </a:r>
             <a:r>
-              <a:rPr dirty="0">
+              <a:rPr sz="1300">
                 <a:solidFill>
                   <a:srgbClr val="D4D4D4"/>
                 </a:solidFill>
@@ -35200,7 +36889,7 @@
               <a:t>[</a:t>
             </a:r>
             <a:r>
-              <a:rPr dirty="0">
+              <a:rPr sz="1300">
                 <a:solidFill>
                   <a:srgbClr val="B5CEA8"/>
                 </a:solidFill>
@@ -35209,25 +36898,142 @@
               <a:t>3</a:t>
             </a:r>
             <a:r>
-              <a:rPr dirty="0">
-                <a:solidFill>
-                  <a:srgbClr val="D4D4D4"/>
-                </a:solidFill>
-                <a:latin typeface="Consolas"/>
-              </a:rPr>
-              <a:t>] = (Ft*ax(y) - </a:t>
-            </a:r>
-            <a:r>
-              <a:rPr dirty="0" err="1">
-                <a:solidFill>
-                  <a:srgbClr val="D4D4D4"/>
+              <a:rPr sz="1300">
+                <a:solidFill>
+                  <a:srgbClr val="D4D4D4"/>
+                </a:solidFill>
+                <a:latin typeface="Consolas"/>
+              </a:rPr>
+              <a:t>]</a:t>
+            </a:r>
+            <a:r>
+              <a:rPr sz="1300">
+                <a:solidFill>
+                  <a:srgbClr val="D4D4D4"/>
+                </a:solidFill>
+                <a:latin typeface="Consolas"/>
+              </a:rPr>
+              <a:t> </a:t>
+            </a:r>
+            <a:r>
+              <a:rPr sz="1300">
+                <a:solidFill>
+                  <a:srgbClr val="D4D4D4"/>
+                </a:solidFill>
+                <a:latin typeface="Consolas"/>
+              </a:rPr>
+              <a:t>=</a:t>
+            </a:r>
+            <a:r>
+              <a:rPr sz="1300">
+                <a:solidFill>
+                  <a:srgbClr val="D4D4D4"/>
+                </a:solidFill>
+                <a:latin typeface="Consolas"/>
+              </a:rPr>
+              <a:t> </a:t>
+            </a:r>
+            <a:r>
+              <a:rPr sz="1300">
+                <a:solidFill>
+                  <a:srgbClr val="D4D4D4"/>
+                </a:solidFill>
+                <a:latin typeface="Consolas"/>
+              </a:rPr>
+              <a:t>(</a:t>
+            </a:r>
+            <a:r>
+              <a:rPr sz="1300">
+                <a:solidFill>
+                  <a:srgbClr val="4EC9B0"/>
+                </a:solidFill>
+                <a:latin typeface="Consolas"/>
+              </a:rPr>
+              <a:t>Ft</a:t>
+            </a:r>
+            <a:r>
+              <a:rPr sz="1300">
+                <a:solidFill>
+                  <a:srgbClr val="D4D4D4"/>
+                </a:solidFill>
+                <a:latin typeface="Consolas"/>
+              </a:rPr>
+              <a:t>*</a:t>
+            </a:r>
+            <a:r>
+              <a:rPr sz="1300">
+                <a:solidFill>
+                  <a:srgbClr val="D4D4D4"/>
+                </a:solidFill>
+                <a:latin typeface="Consolas"/>
+              </a:rPr>
+              <a:t>ax</a:t>
+            </a:r>
+            <a:r>
+              <a:rPr sz="1300">
+                <a:solidFill>
+                  <a:srgbClr val="D4D4D4"/>
+                </a:solidFill>
+                <a:latin typeface="Consolas"/>
+              </a:rPr>
+              <a:t>(</a:t>
+            </a:r>
+            <a:r>
+              <a:rPr sz="1300">
+                <a:solidFill>
+                  <a:srgbClr val="D4D4D4"/>
+                </a:solidFill>
+                <a:latin typeface="Consolas"/>
+              </a:rPr>
+              <a:t>y</a:t>
+            </a:r>
+            <a:r>
+              <a:rPr sz="1300">
+                <a:solidFill>
+                  <a:srgbClr val="D4D4D4"/>
+                </a:solidFill>
+                <a:latin typeface="Consolas"/>
+              </a:rPr>
+              <a:t>)</a:t>
+            </a:r>
+            <a:r>
+              <a:rPr sz="1300">
+                <a:solidFill>
+                  <a:srgbClr val="D4D4D4"/>
+                </a:solidFill>
+                <a:latin typeface="Consolas"/>
+              </a:rPr>
+              <a:t> </a:t>
+            </a:r>
+            <a:r>
+              <a:rPr sz="1300">
+                <a:solidFill>
+                  <a:srgbClr val="D4D4D4"/>
+                </a:solidFill>
+                <a:latin typeface="Consolas"/>
+              </a:rPr>
+              <a:t>-</a:t>
+            </a:r>
+            <a:r>
+              <a:rPr sz="1300">
+                <a:solidFill>
+                  <a:srgbClr val="D4D4D4"/>
+                </a:solidFill>
+                <a:latin typeface="Consolas"/>
+              </a:rPr>
+              <a:t> </a:t>
+            </a:r>
+            <a:r>
+              <a:rPr sz="1300">
+                <a:solidFill>
+                  <a:srgbClr val="4EC9B0"/>
                 </a:solidFill>
                 <a:latin typeface="Consolas"/>
               </a:rPr>
               <a:t>Fd</a:t>
             </a:r>
             <a:r>
-              <a:rPr dirty="0">
+              <a:rPr sz="1300">
                 <a:solidFill>
                   <a:srgbClr val="D4D4D4"/>
                 </a:solidFill>
@@ -35236,7 +37042,7 @@
               <a:t>*</a:t>
             </a:r>
             <a:r>
-              <a:rPr dirty="0" err="1">
+              <a:rPr sz="1300">
                 <a:solidFill>
                   <a:srgbClr val="D4D4D4"/>
                 </a:solidFill>
@@ -35245,16 +37051,88 @@
               <a:t>vx_hat</a:t>
             </a:r>
             <a:r>
-              <a:rPr dirty="0">
-                <a:solidFill>
-                  <a:srgbClr val="D4D4D4"/>
-                </a:solidFill>
-                <a:latin typeface="Consolas"/>
-              </a:rPr>
-              <a:t>(y)) / y[</a:t>
-            </a:r>
-            <a:r>
-              <a:rPr dirty="0">
+              <a:rPr sz="1300">
+                <a:solidFill>
+                  <a:srgbClr val="D4D4D4"/>
+                </a:solidFill>
+                <a:latin typeface="Consolas"/>
+              </a:rPr>
+              <a:t>(</a:t>
+            </a:r>
+            <a:r>
+              <a:rPr sz="1300">
+                <a:solidFill>
+                  <a:srgbClr val="D4D4D4"/>
+                </a:solidFill>
+                <a:latin typeface="Consolas"/>
+              </a:rPr>
+              <a:t>y</a:t>
+            </a:r>
+            <a:r>
+              <a:rPr sz="1300">
+                <a:solidFill>
+                  <a:srgbClr val="D4D4D4"/>
+                </a:solidFill>
+                <a:latin typeface="Consolas"/>
+              </a:rPr>
+              <a:t>)</a:t>
+            </a:r>
+            <a:r>
+              <a:rPr sz="1300">
+                <a:solidFill>
+                  <a:srgbClr val="D4D4D4"/>
+                </a:solidFill>
+                <a:latin typeface="Consolas"/>
+              </a:rPr>
+              <a:t>)</a:t>
+            </a:r>
+            <a:r>
+              <a:rPr sz="1300">
+                <a:solidFill>
+                  <a:srgbClr val="D4D4D4"/>
+                </a:solidFill>
+                <a:latin typeface="Consolas"/>
+              </a:rPr>
+              <a:t> </a:t>
+            </a:r>
+            <a:r>
+              <a:rPr sz="1300">
+                <a:solidFill>
+                  <a:srgbClr val="D4D4D4"/>
+                </a:solidFill>
+                <a:latin typeface="Consolas"/>
+              </a:rPr>
+              <a:t>/</a:t>
+            </a:r>
+            <a:r>
+              <a:rPr sz="1300">
+                <a:solidFill>
+                  <a:srgbClr val="D4D4D4"/>
+                </a:solidFill>
+                <a:latin typeface="Consolas"/>
+              </a:rPr>
+              <a:t> </a:t>
+            </a:r>
+            <a:r>
+              <a:rPr sz="1300">
+                <a:solidFill>
+                  <a:srgbClr val="D4D4D4"/>
+                </a:solidFill>
+                <a:latin typeface="Consolas"/>
+              </a:rPr>
+              <a:t>y</a:t>
+            </a:r>
+            <a:r>
+              <a:rPr sz="1300">
+                <a:solidFill>
+                  <a:srgbClr val="D4D4D4"/>
+                </a:solidFill>
+                <a:latin typeface="Consolas"/>
+              </a:rPr>
+              <a:t>[</a:t>
+            </a:r>
+            <a:r>
+              <a:rPr sz="1300">
                 <a:solidFill>
                   <a:srgbClr val="B5CEA8"/>
                 </a:solidFill>
@@ -35263,16 +37141,34 @@
               <a:t>13</a:t>
             </a:r>
             <a:r>
-              <a:rPr dirty="0">
-                <a:solidFill>
-                  <a:srgbClr val="D4D4D4"/>
-                </a:solidFill>
-                <a:latin typeface="Consolas"/>
-              </a:rPr>
-              <a:t>];         </a:t>
-            </a:r>
-            <a:r>
-              <a:rPr dirty="0">
+              <a:rPr sz="1300">
+                <a:solidFill>
+                  <a:srgbClr val="D4D4D4"/>
+                </a:solidFill>
+                <a:latin typeface="Consolas"/>
+              </a:rPr>
+              <a:t>]</a:t>
+            </a:r>
+            <a:r>
+              <a:rPr sz="1300">
+                <a:solidFill>
+                  <a:srgbClr val="D4D4D4"/>
+                </a:solidFill>
+                <a:latin typeface="Consolas"/>
+              </a:rPr>
+              <a:t>;</a:t>
+            </a:r>
+            <a:r>
+              <a:rPr sz="1300">
+                <a:solidFill>
+                  <a:srgbClr val="D4D4D4"/>
+                </a:solidFill>
+                <a:latin typeface="Consolas"/>
+              </a:rPr>
+              <a:t>         </a:t>
+            </a:r>
+            <a:r>
+              <a:rPr sz="1300">
                 <a:solidFill>
                   <a:srgbClr val="6A9955"/>
                 </a:solidFill>
@@ -35288,7 +37184,7 @@
               </a:spcAft>
             </a:pPr>
             <a:r>
-              <a:rPr dirty="0">
+              <a:rPr sz="1300">
                 <a:solidFill>
                   <a:srgbClr val="D4D4D4"/>
                 </a:solidFill>
@@ -35297,7 +37193,7 @@
               <a:t>    </a:t>
             </a:r>
             <a:r>
-              <a:rPr dirty="0">
+              <a:rPr sz="1300">
                 <a:solidFill>
                   <a:srgbClr val="6A9955"/>
                 </a:solidFill>
@@ -35313,7 +37209,7 @@
               </a:spcAft>
             </a:pPr>
             <a:r>
-              <a:rPr sz="1300" dirty="0">
+              <a:rPr sz="1300">
                 <a:solidFill>
                   <a:srgbClr val="D4D4D4"/>
                 </a:solidFill>

--- a/slides/ACCU-Separation-of-Concerns-at-Zero-Cost.pptx
+++ b/slides/ACCU-Separation-of-Concerns-at-Zero-Cost.pptx
@@ -32,6 +32,7 @@
     <p:sldId id="277" r:id="rId23"/>
     <p:sldId id="278" r:id="rId24"/>
     <p:sldId id="279" r:id="rId25"/>
+    <p:sldId id="296" r:id="rId45"/>
     <p:sldId id="280" r:id="rId26"/>
     <p:sldId id="281" r:id="rId27"/>
     <p:sldId id="282" r:id="rId28"/>
@@ -21088,7 +21089,7 @@
                 </a:solidFill>
                 <a:latin typeface="Segoe UI"/>
               </a:rPr>
-              <a:t>HOW IT WORKS 1/4</a:t>
+              <a:t>HOW IT WORKS 1/5</a:t>
             </a:r>
           </a:p>
         </p:txBody>
@@ -21927,7 +21928,7 @@
                 </a:solidFill>
                 <a:latin typeface="Segoe UI"/>
               </a:rPr>
-              <a:t>HOW IT WORKS 2/4</a:t>
+              <a:t>HOW IT WORKS 2/5</a:t>
             </a:r>
           </a:p>
         </p:txBody>
@@ -23839,7 +23840,7 @@
                 </a:solidFill>
                 <a:latin typeface="Segoe UI"/>
               </a:rPr>
-              <a:t>HOW IT WORKS 3/4</a:t>
+              <a:t>HOW IT WORKS 4/5</a:t>
             </a:r>
           </a:p>
         </p:txBody>
@@ -25632,7 +25633,7 @@
                 </a:solidFill>
                 <a:latin typeface="Segoe UI"/>
               </a:rPr>
-              <a:t>25</a:t>
+              <a:t>26</a:t>
             </a:r>
           </a:p>
         </p:txBody>
@@ -25699,7 +25700,7 @@
                 </a:solidFill>
                 <a:latin typeface="Segoe UI"/>
               </a:rPr>
-              <a:t>HOW IT WORKS 4/4</a:t>
+              <a:t>HOW IT WORKS 5/5</a:t>
             </a:r>
           </a:p>
         </p:txBody>
@@ -26018,7 +26019,7 @@
                 </a:solidFill>
                 <a:latin typeface="Segoe UI"/>
               </a:rPr>
-              <a:t>26</a:t>
+              <a:t>27</a:t>
             </a:r>
           </a:p>
         </p:txBody>
@@ -26301,7 +26302,7 @@
                 </a:solidFill>
                 <a:latin typeface="Segoe UI"/>
               </a:rPr>
-              <a:t>27</a:t>
+              <a:t>28</a:t>
             </a:r>
           </a:p>
         </p:txBody>
@@ -27286,7 +27287,7 @@
                 </a:solidFill>
                 <a:latin typeface="Segoe UI"/>
               </a:rPr>
-              <a:t>28</a:t>
+              <a:t>29</a:t>
             </a:r>
           </a:p>
         </p:txBody>
@@ -27618,7 +27619,7 @@
                 </a:solidFill>
                 <a:latin typeface="Segoe UI"/>
               </a:rPr>
-              <a:t>29</a:t>
+              <a:t>30</a:t>
             </a:r>
           </a:p>
         </p:txBody>
@@ -28513,7 +28514,7 @@
                 </a:solidFill>
                 <a:latin typeface="Segoe UI"/>
               </a:rPr>
-              <a:t>30</a:t>
+              <a:t>31</a:t>
             </a:r>
           </a:p>
         </p:txBody>
@@ -28796,7 +28797,7 @@
                 </a:solidFill>
                 <a:latin typeface="Segoe UI"/>
               </a:rPr>
-              <a:t>31</a:t>
+              <a:t>32</a:t>
             </a:r>
           </a:p>
         </p:txBody>
@@ -29686,7 +29687,7 @@
                 </a:solidFill>
                 <a:latin typeface="Segoe UI"/>
               </a:rPr>
-              <a:t>32</a:t>
+              <a:t>33</a:t>
             </a:r>
           </a:p>
         </p:txBody>
@@ -30947,7 +30948,7 @@
                 </a:solidFill>
                 <a:latin typeface="Segoe UI"/>
               </a:rPr>
-              <a:t>33</a:t>
+              <a:t>34</a:t>
             </a:r>
           </a:p>
         </p:txBody>
@@ -31267,7 +31268,7 @@
                 </a:solidFill>
                 <a:latin typeface="Segoe UI"/>
               </a:rPr>
-              <a:t>34</a:t>
+              <a:t>35</a:t>
             </a:r>
           </a:p>
         </p:txBody>
@@ -31568,7 +31569,7 @@
                 </a:solidFill>
                 <a:latin typeface="Segoe UI"/>
               </a:rPr>
-              <a:t>35</a:t>
+              <a:t>36</a:t>
             </a:r>
           </a:p>
         </p:txBody>
@@ -31961,7 +31962,7 @@
                 </a:solidFill>
                 <a:latin typeface="Segoe UI"/>
               </a:rPr>
-              <a:t>36</a:t>
+              <a:t>37</a:t>
             </a:r>
           </a:p>
         </p:txBody>
@@ -32318,7 +32319,7 @@
                 </a:solidFill>
                 <a:latin typeface="Segoe UI"/>
               </a:rPr>
-              <a:t>37</a:t>
+              <a:t>38</a:t>
             </a:r>
           </a:p>
         </p:txBody>
@@ -32669,7 +32670,1339 @@
                 </a:solidFill>
                 <a:latin typeface="Segoe UI"/>
               </a:rPr>
-              <a:t>38</a:t>
+              <a:t>39</a:t>
+            </a:r>
+          </a:p>
+        </p:txBody>
+      </p:sp>
+    </p:spTree>
+  </p:cSld>
+  <p:clrMapOvr>
+    <a:masterClrMapping/>
+  </p:clrMapOvr>
+</p:sld>
+</file>
+
+<file path=ppt/slides/slide39.xml><?xml version="1.0" encoding="utf-8"?>
+<p:sld xmlns:a="http://schemas.openxmlformats.org/drawingml/2006/main" xmlns:p="http://schemas.openxmlformats.org/presentationml/2006/main" xmlns:r="http://schemas.openxmlformats.org/officeDocument/2006/relationships">
+  <p:cSld>
+    <p:bg>
+      <p:bgPr>
+        <a:solidFill>
+          <a:srgbClr val="0B1F33"/>
+        </a:solidFill>
+        <a:effectLst/>
+      </p:bgPr>
+    </p:bg>
+    <p:spTree>
+      <p:nvGrpSpPr>
+        <p:cNvPr id="1" name=""/>
+        <p:cNvGrpSpPr/>
+        <p:nvPr/>
+      </p:nvGrpSpPr>
+      <p:grpSpPr/>
+      <p:sp>
+        <p:nvSpPr>
+          <p:cNvPr id="2" name="TextBox 1"/>
+          <p:cNvSpPr txBox="1"/>
+          <p:nvPr/>
+        </p:nvSpPr>
+        <p:spPr>
+          <a:xfrm>
+            <a:off x="502920" y="384048"/>
+            <a:ext cx="11155680" cy="292608"/>
+          </a:xfrm>
+          <a:prstGeom prst="rect">
+            <a:avLst/>
+          </a:prstGeom>
+          <a:noFill/>
+        </p:spPr>
+        <p:txBody>
+          <a:bodyPr wrap="none">
+            <a:spAutoFit/>
+          </a:bodyPr>
+          <a:lstStyle/>
+          <a:p>
+            <a:r>
+              <a:rPr sz="1300" b="1">
+                <a:solidFill>
+                  <a:srgbClr val="F2C744"/>
+                </a:solidFill>
+                <a:latin typeface="Segoe UI"/>
+              </a:rPr>
+              <a:t>HOW IT WORKS 3/5</a:t>
+            </a:r>
+          </a:p>
+        </p:txBody>
+      </p:sp>
+      <p:sp>
+        <p:nvSpPr>
+          <p:cNvPr id="3" name="TextBox 2"/>
+          <p:cNvSpPr txBox="1"/>
+          <p:nvPr/>
+        </p:nvSpPr>
+        <p:spPr>
+          <a:xfrm>
+            <a:off x="457200" y="694944"/>
+            <a:ext cx="8111516" cy="569387"/>
+          </a:xfrm>
+          <a:prstGeom prst="rect">
+            <a:avLst/>
+          </a:prstGeom>
+          <a:noFill/>
+        </p:spPr>
+        <p:txBody>
+          <a:bodyPr wrap="none">
+            <a:spAutoFit/>
+          </a:bodyPr>
+          <a:lstStyle/>
+          <a:p>
+            <a:r>
+              <a:rPr sz="3100" b="1" dirty="0">
+                <a:solidFill>
+                  <a:srgbClr val="FFFFFF"/>
+                </a:solidFill>
+                <a:latin typeface="Segoe UI"/>
+              </a:rPr>
+              <a:t>compute vs query: provide vs ask</a:t>
+            </a:r>
+          </a:p>
+        </p:txBody>
+      </p:sp>
+      <p:sp>
+        <p:nvSpPr>
+          <p:cNvPr id="4" name="Rounded Rectangle 3"/>
+          <p:cNvSpPr/>
+          <p:nvPr/>
+        </p:nvSpPr>
+        <p:spPr>
+          <a:xfrm>
+            <a:off x="548640" y="1463040"/>
+            <a:ext cx="11338560" cy="3342132"/>
+          </a:xfrm>
+          <a:prstGeom prst="roundRect">
+            <a:avLst>
+              <a:gd name="adj" fmla="val 3500"/>
+            </a:avLst>
+          </a:prstGeom>
+          <a:solidFill>
+            <a:srgbClr val="081626"/>
+          </a:solidFill>
+          <a:ln w="12700">
+            <a:solidFill>
+              <a:srgbClr val="1E3A55"/>
+            </a:solidFill>
+          </a:ln>
+          <a:effectLst/>
+        </p:spPr>
+        <p:style>
+          <a:lnRef idx="1">
+            <a:schemeClr val="accent1"/>
+          </a:lnRef>
+          <a:fillRef idx="3">
+            <a:schemeClr val="accent1"/>
+          </a:fillRef>
+          <a:effectRef idx="2">
+            <a:schemeClr val="accent1"/>
+          </a:effectRef>
+          <a:fontRef idx="minor">
+            <a:schemeClr val="lt1"/>
+          </a:fontRef>
+        </p:style>
+        <p:txBody>
+          <a:bodyPr rtlCol="0" anchor="ctr"/>
+          <a:lstStyle/>
+          <a:p>
+            <a:pPr algn="ctr"/>
+            <a:endParaRPr/>
+          </a:p>
+        </p:txBody>
+      </p:sp>
+      <p:sp>
+        <p:nvSpPr>
+          <p:cNvPr id="5" name="code:query"/>
+          <p:cNvSpPr txBox="1"/>
+          <p:nvPr/>
+        </p:nvSpPr>
+        <p:spPr>
+          <a:xfrm>
+            <a:off x="731520" y="1645920"/>
+            <a:ext cx="10972800" cy="2976372"/>
+          </a:xfrm>
+          <a:prstGeom prst="rect">
+            <a:avLst/>
+          </a:prstGeom>
+          <a:noFill/>
+        </p:spPr>
+        <p:txBody>
+          <a:bodyPr wrap="none">
+            <a:spAutoFit/>
+          </a:bodyPr>
+          <a:lstStyle/>
+          <a:p>
+            <a:pPr>
+              <a:spcAft>
+                <a:spcPts val="100"/>
+              </a:spcAft>
+            </a:pPr>
+            <a:r>
+              <a:rPr sz="1600">
+                <a:solidFill>
+                  <a:srgbClr val="6A9955"/>
+                </a:solidFill>
+                <a:latin typeface="Consolas"/>
+              </a:rPr>
+              <a:t>// a component PROVIDES a quantity (one overload per tag):</a:t>
+            </a:r>
+          </a:p>
+          <a:p>
+            <a:pPr>
+              <a:spcAft>
+                <a:spcPts val="100"/>
+              </a:spcAft>
+            </a:pPr>
+            <a:r>
+              <a:rPr sz="1600">
+                <a:solidFill>
+                  <a:srgbClr val="D4D4D4"/>
+                </a:solidFill>
+                <a:latin typeface="Consolas"/>
+              </a:rPr>
+              <a:t>T</a:t>
+            </a:r>
+            <a:r>
+              <a:rPr sz="1600">
+                <a:solidFill>
+                  <a:srgbClr val="D4D4D4"/>
+                </a:solidFill>
+                <a:latin typeface="Consolas"/>
+              </a:rPr>
+              <a:t> </a:t>
+            </a:r>
+            <a:r>
+              <a:rPr sz="1600">
+                <a:solidFill>
+                  <a:srgbClr val="D4D4D4"/>
+                </a:solidFill>
+                <a:latin typeface="Consolas"/>
+              </a:rPr>
+              <a:t>compute</a:t>
+            </a:r>
+            <a:r>
+              <a:rPr sz="1600">
+                <a:solidFill>
+                  <a:srgbClr val="D4D4D4"/>
+                </a:solidFill>
+                <a:latin typeface="Consolas"/>
+              </a:rPr>
+              <a:t>(</a:t>
+            </a:r>
+            <a:r>
+              <a:rPr sz="1600">
+                <a:solidFill>
+                  <a:srgbClr val="D4D4D4"/>
+                </a:solidFill>
+                <a:latin typeface="Consolas"/>
+              </a:rPr>
+              <a:t>mass1</a:t>
+            </a:r>
+            <a:r>
+              <a:rPr sz="1600">
+                <a:solidFill>
+                  <a:srgbClr val="D4D4D4"/>
+                </a:solidFill>
+                <a:latin typeface="Consolas"/>
+              </a:rPr>
+              <a:t>:</a:t>
+            </a:r>
+            <a:r>
+              <a:rPr sz="1600">
+                <a:solidFill>
+                  <a:srgbClr val="D4D4D4"/>
+                </a:solidFill>
+                <a:latin typeface="Consolas"/>
+              </a:rPr>
+              <a:t>:</a:t>
+            </a:r>
+            <a:r>
+              <a:rPr sz="1600">
+                <a:solidFill>
+                  <a:srgbClr val="4EC9B0"/>
+                </a:solidFill>
+                <a:latin typeface="Consolas"/>
+              </a:rPr>
+              <a:t>Force</a:t>
+            </a:r>
+            <a:r>
+              <a:rPr sz="1600">
+                <a:solidFill>
+                  <a:srgbClr val="D4D4D4"/>
+                </a:solidFill>
+                <a:latin typeface="Consolas"/>
+              </a:rPr>
+              <a:t>,</a:t>
+            </a:r>
+            <a:r>
+              <a:rPr sz="1600">
+                <a:solidFill>
+                  <a:srgbClr val="D4D4D4"/>
+                </a:solidFill>
+                <a:latin typeface="Consolas"/>
+              </a:rPr>
+              <a:t> </a:t>
+            </a:r>
+            <a:r>
+              <a:rPr sz="1600">
+                <a:solidFill>
+                  <a:srgbClr val="D4D4D4"/>
+                </a:solidFill>
+                <a:latin typeface="Consolas"/>
+              </a:rPr>
+              <a:t>std</a:t>
+            </a:r>
+            <a:r>
+              <a:rPr sz="1600">
+                <a:solidFill>
+                  <a:srgbClr val="D4D4D4"/>
+                </a:solidFill>
+                <a:latin typeface="Consolas"/>
+              </a:rPr>
+              <a:t>:</a:t>
+            </a:r>
+            <a:r>
+              <a:rPr sz="1600">
+                <a:solidFill>
+                  <a:srgbClr val="D4D4D4"/>
+                </a:solidFill>
+                <a:latin typeface="Consolas"/>
+              </a:rPr>
+              <a:t>:</a:t>
+            </a:r>
+            <a:r>
+              <a:rPr sz="1600">
+                <a:solidFill>
+                  <a:srgbClr val="D4D4D4"/>
+                </a:solidFill>
+                <a:latin typeface="Consolas"/>
+              </a:rPr>
+              <a:t>span</a:t>
+            </a:r>
+            <a:r>
+              <a:rPr sz="1600">
+                <a:solidFill>
+                  <a:srgbClr val="D4D4D4"/>
+                </a:solidFill>
+                <a:latin typeface="Consolas"/>
+              </a:rPr>
+              <a:t>&lt;</a:t>
+            </a:r>
+            <a:r>
+              <a:rPr sz="1600">
+                <a:solidFill>
+                  <a:srgbClr val="569CD6"/>
+                </a:solidFill>
+                <a:latin typeface="Consolas"/>
+              </a:rPr>
+              <a:t>const</a:t>
+            </a:r>
+            <a:r>
+              <a:rPr sz="1600">
+                <a:solidFill>
+                  <a:srgbClr val="D4D4D4"/>
+                </a:solidFill>
+                <a:latin typeface="Consolas"/>
+              </a:rPr>
+              <a:t> </a:t>
+            </a:r>
+            <a:r>
+              <a:rPr sz="1600">
+                <a:solidFill>
+                  <a:srgbClr val="D4D4D4"/>
+                </a:solidFill>
+                <a:latin typeface="Consolas"/>
+              </a:rPr>
+              <a:t>T</a:t>
+            </a:r>
+            <a:r>
+              <a:rPr sz="1600">
+                <a:solidFill>
+                  <a:srgbClr val="D4D4D4"/>
+                </a:solidFill>
+                <a:latin typeface="Consolas"/>
+              </a:rPr>
+              <a:t>&gt;</a:t>
+            </a:r>
+            <a:r>
+              <a:rPr sz="1600">
+                <a:solidFill>
+                  <a:srgbClr val="D4D4D4"/>
+                </a:solidFill>
+                <a:latin typeface="Consolas"/>
+              </a:rPr>
+              <a:t> </a:t>
+            </a:r>
+            <a:r>
+              <a:rPr sz="1600">
+                <a:solidFill>
+                  <a:srgbClr val="D4D4D4"/>
+                </a:solidFill>
+                <a:latin typeface="Consolas"/>
+              </a:rPr>
+              <a:t>s</a:t>
+            </a:r>
+            <a:r>
+              <a:rPr sz="1600">
+                <a:solidFill>
+                  <a:srgbClr val="D4D4D4"/>
+                </a:solidFill>
+                <a:latin typeface="Consolas"/>
+              </a:rPr>
+              <a:t>,</a:t>
+            </a:r>
+            <a:r>
+              <a:rPr sz="1600">
+                <a:solidFill>
+                  <a:srgbClr val="D4D4D4"/>
+                </a:solidFill>
+                <a:latin typeface="Consolas"/>
+              </a:rPr>
+              <a:t> </a:t>
+            </a:r>
+            <a:r>
+              <a:rPr sz="1600">
+                <a:solidFill>
+                  <a:srgbClr val="569CD6"/>
+                </a:solidFill>
+                <a:latin typeface="Consolas"/>
+              </a:rPr>
+              <a:t>const</a:t>
+            </a:r>
+            <a:r>
+              <a:rPr sz="1600">
+                <a:solidFill>
+                  <a:srgbClr val="D4D4D4"/>
+                </a:solidFill>
+                <a:latin typeface="Consolas"/>
+              </a:rPr>
+              <a:t> </a:t>
+            </a:r>
+            <a:r>
+              <a:rPr sz="1600">
+                <a:solidFill>
+                  <a:srgbClr val="4EC9B0"/>
+                </a:solidFill>
+                <a:latin typeface="Consolas"/>
+              </a:rPr>
+              <a:t>Registry</a:t>
+            </a:r>
+            <a:r>
+              <a:rPr sz="1600">
+                <a:solidFill>
+                  <a:srgbClr val="D4D4D4"/>
+                </a:solidFill>
+                <a:latin typeface="Consolas"/>
+              </a:rPr>
+              <a:t>&amp;</a:t>
+            </a:r>
+            <a:r>
+              <a:rPr sz="1600">
+                <a:solidFill>
+                  <a:srgbClr val="D4D4D4"/>
+                </a:solidFill>
+                <a:latin typeface="Consolas"/>
+              </a:rPr>
+              <a:t>)</a:t>
+            </a:r>
+            <a:r>
+              <a:rPr sz="1600">
+                <a:solidFill>
+                  <a:srgbClr val="D4D4D4"/>
+                </a:solidFill>
+                <a:latin typeface="Consolas"/>
+              </a:rPr>
+              <a:t> </a:t>
+            </a:r>
+            <a:r>
+              <a:rPr sz="1600">
+                <a:solidFill>
+                  <a:srgbClr val="569CD6"/>
+                </a:solidFill>
+                <a:latin typeface="Consolas"/>
+              </a:rPr>
+              <a:t>const</a:t>
+            </a:r>
+            <a:r>
+              <a:rPr sz="1600">
+                <a:solidFill>
+                  <a:srgbClr val="D4D4D4"/>
+                </a:solidFill>
+                <a:latin typeface="Consolas"/>
+              </a:rPr>
+              <a:t>;</a:t>
+            </a:r>
+          </a:p>
+          <a:p>
+            <a:pPr>
+              <a:spcAft>
+                <a:spcPts val="100"/>
+              </a:spcAft>
+            </a:pPr>
+            <a:r>
+              <a:rPr sz="1600">
+                <a:latin typeface="Consolas"/>
+              </a:rPr>
+              <a:t> </a:t>
+            </a:r>
+          </a:p>
+          <a:p>
+            <a:pPr>
+              <a:spcAft>
+                <a:spcPts val="100"/>
+              </a:spcAft>
+            </a:pPr>
+            <a:r>
+              <a:rPr sz="1600">
+                <a:solidFill>
+                  <a:srgbClr val="6A9955"/>
+                </a:solidFill>
+                <a:latin typeface="Consolas"/>
+              </a:rPr>
+              <a:t>// anyone ASKS for one, by tag — component or driver:</a:t>
+            </a:r>
+          </a:p>
+          <a:p>
+            <a:pPr>
+              <a:spcAft>
+                <a:spcPts val="100"/>
+              </a:spcAft>
+            </a:pPr>
+            <a:r>
+              <a:rPr sz="1600" b="1">
+                <a:solidFill>
+                  <a:srgbClr val="D4D4D4"/>
+                </a:solidFill>
+                <a:latin typeface="Consolas"/>
+              </a:rPr>
+              <a:t>T</a:t>
+            </a:r>
+            <a:r>
+              <a:rPr sz="1600" b="1">
+                <a:solidFill>
+                  <a:srgbClr val="D4D4D4"/>
+                </a:solidFill>
+                <a:latin typeface="Consolas"/>
+              </a:rPr>
+              <a:t> </a:t>
+            </a:r>
+            <a:r>
+              <a:rPr sz="1600" b="1">
+                <a:solidFill>
+                  <a:srgbClr val="D4D4D4"/>
+                </a:solidFill>
+                <a:latin typeface="Consolas"/>
+              </a:rPr>
+              <a:t>f</a:t>
+            </a:r>
+            <a:r>
+              <a:rPr sz="1600" b="1">
+                <a:solidFill>
+                  <a:srgbClr val="D4D4D4"/>
+                </a:solidFill>
+                <a:latin typeface="Consolas"/>
+              </a:rPr>
+              <a:t> </a:t>
+            </a:r>
+            <a:r>
+              <a:rPr sz="1600" b="1">
+                <a:solidFill>
+                  <a:srgbClr val="D4D4D4"/>
+                </a:solidFill>
+                <a:latin typeface="Consolas"/>
+              </a:rPr>
+              <a:t>=</a:t>
+            </a:r>
+            <a:r>
+              <a:rPr sz="1600" b="1">
+                <a:solidFill>
+                  <a:srgbClr val="D4D4D4"/>
+                </a:solidFill>
+                <a:latin typeface="Consolas"/>
+              </a:rPr>
+              <a:t> </a:t>
+            </a:r>
+            <a:r>
+              <a:rPr sz="1600" b="1">
+                <a:solidFill>
+                  <a:srgbClr val="D4D4D4"/>
+                </a:solidFill>
+                <a:latin typeface="Consolas"/>
+              </a:rPr>
+              <a:t>query</a:t>
+            </a:r>
+            <a:r>
+              <a:rPr sz="1600" b="1">
+                <a:solidFill>
+                  <a:srgbClr val="D4D4D4"/>
+                </a:solidFill>
+                <a:latin typeface="Consolas"/>
+              </a:rPr>
+              <a:t>&lt;</a:t>
+            </a:r>
+            <a:r>
+              <a:rPr sz="1600" b="1">
+                <a:solidFill>
+                  <a:srgbClr val="D4D4D4"/>
+                </a:solidFill>
+                <a:latin typeface="Consolas"/>
+              </a:rPr>
+              <a:t>mass1</a:t>
+            </a:r>
+            <a:r>
+              <a:rPr sz="1600" b="1">
+                <a:solidFill>
+                  <a:srgbClr val="D4D4D4"/>
+                </a:solidFill>
+                <a:latin typeface="Consolas"/>
+              </a:rPr>
+              <a:t>:</a:t>
+            </a:r>
+            <a:r>
+              <a:rPr sz="1600" b="1">
+                <a:solidFill>
+                  <a:srgbClr val="D4D4D4"/>
+                </a:solidFill>
+                <a:latin typeface="Consolas"/>
+              </a:rPr>
+              <a:t>:</a:t>
+            </a:r>
+            <a:r>
+              <a:rPr sz="1600" b="1">
+                <a:solidFill>
+                  <a:srgbClr val="4EC9B0"/>
+                </a:solidFill>
+                <a:latin typeface="Consolas"/>
+              </a:rPr>
+              <a:t>Force</a:t>
+            </a:r>
+            <a:r>
+              <a:rPr sz="1600" b="1">
+                <a:solidFill>
+                  <a:srgbClr val="D4D4D4"/>
+                </a:solidFill>
+                <a:latin typeface="Consolas"/>
+              </a:rPr>
+              <a:t>&gt;</a:t>
+            </a:r>
+            <a:r>
+              <a:rPr sz="1600" b="1">
+                <a:solidFill>
+                  <a:srgbClr val="D4D4D4"/>
+                </a:solidFill>
+                <a:latin typeface="Consolas"/>
+              </a:rPr>
+              <a:t>(</a:t>
+            </a:r>
+            <a:r>
+              <a:rPr sz="1600" b="1">
+                <a:solidFill>
+                  <a:srgbClr val="D4D4D4"/>
+                </a:solidFill>
+                <a:latin typeface="Consolas"/>
+              </a:rPr>
+              <a:t>registry</a:t>
+            </a:r>
+            <a:r>
+              <a:rPr sz="1600" b="1">
+                <a:solidFill>
+                  <a:srgbClr val="D4D4D4"/>
+                </a:solidFill>
+                <a:latin typeface="Consolas"/>
+              </a:rPr>
+              <a:t>,</a:t>
+            </a:r>
+            <a:r>
+              <a:rPr sz="1600" b="1">
+                <a:solidFill>
+                  <a:srgbClr val="D4D4D4"/>
+                </a:solidFill>
+                <a:latin typeface="Consolas"/>
+              </a:rPr>
+              <a:t> </a:t>
+            </a:r>
+            <a:r>
+              <a:rPr sz="1600" b="1">
+                <a:solidFill>
+                  <a:srgbClr val="D4D4D4"/>
+                </a:solidFill>
+                <a:latin typeface="Consolas"/>
+              </a:rPr>
+              <a:t>state</a:t>
+            </a:r>
+            <a:r>
+              <a:rPr sz="1600" b="1">
+                <a:solidFill>
+                  <a:srgbClr val="D4D4D4"/>
+                </a:solidFill>
+                <a:latin typeface="Consolas"/>
+              </a:rPr>
+              <a:t>)</a:t>
+            </a:r>
+            <a:r>
+              <a:rPr sz="1600" b="1">
+                <a:solidFill>
+                  <a:srgbClr val="D4D4D4"/>
+                </a:solidFill>
+                <a:latin typeface="Consolas"/>
+              </a:rPr>
+              <a:t>;</a:t>
+            </a:r>
+          </a:p>
+          <a:p>
+            <a:pPr>
+              <a:spcAft>
+                <a:spcPts val="100"/>
+              </a:spcAft>
+            </a:pPr>
+            <a:r>
+              <a:rPr sz="1600">
+                <a:latin typeface="Consolas"/>
+              </a:rPr>
+              <a:t> </a:t>
+            </a:r>
+          </a:p>
+          <a:p>
+            <a:pPr>
+              <a:spcAft>
+                <a:spcPts val="100"/>
+              </a:spcAft>
+            </a:pPr>
+            <a:r>
+              <a:rPr sz="1600">
+                <a:solidFill>
+                  <a:srgbClr val="6A9955"/>
+                </a:solidFill>
+                <a:latin typeface="Consolas"/>
+              </a:rPr>
+              <a:t>// query is just the registry call with friendlier syntax:</a:t>
+            </a:r>
+          </a:p>
+          <a:p>
+            <a:pPr>
+              <a:spcAft>
+                <a:spcPts val="100"/>
+              </a:spcAft>
+            </a:pPr>
+            <a:r>
+              <a:rPr sz="1600">
+                <a:solidFill>
+                  <a:srgbClr val="569CD6"/>
+                </a:solidFill>
+                <a:latin typeface="Consolas"/>
+              </a:rPr>
+              <a:t>template</a:t>
+            </a:r>
+            <a:r>
+              <a:rPr sz="1600">
+                <a:solidFill>
+                  <a:srgbClr val="D4D4D4"/>
+                </a:solidFill>
+                <a:latin typeface="Consolas"/>
+              </a:rPr>
+              <a:t>&lt;</a:t>
+            </a:r>
+            <a:r>
+              <a:rPr sz="1600">
+                <a:solidFill>
+                  <a:srgbClr val="4EC9B0"/>
+                </a:solidFill>
+                <a:latin typeface="Consolas"/>
+              </a:rPr>
+              <a:t>StateTagConcept</a:t>
+            </a:r>
+            <a:r>
+              <a:rPr sz="1600">
+                <a:solidFill>
+                  <a:srgbClr val="D4D4D4"/>
+                </a:solidFill>
+                <a:latin typeface="Consolas"/>
+              </a:rPr>
+              <a:t> </a:t>
+            </a:r>
+            <a:r>
+              <a:rPr sz="1600">
+                <a:solidFill>
+                  <a:srgbClr val="4EC9B0"/>
+                </a:solidFill>
+                <a:latin typeface="Consolas"/>
+              </a:rPr>
+              <a:t>Tag</a:t>
+            </a:r>
+            <a:r>
+              <a:rPr sz="1600">
+                <a:solidFill>
+                  <a:srgbClr val="D4D4D4"/>
+                </a:solidFill>
+                <a:latin typeface="Consolas"/>
+              </a:rPr>
+              <a:t>,</a:t>
+            </a:r>
+            <a:r>
+              <a:rPr sz="1600">
+                <a:solidFill>
+                  <a:srgbClr val="D4D4D4"/>
+                </a:solidFill>
+                <a:latin typeface="Consolas"/>
+              </a:rPr>
+              <a:t> </a:t>
+            </a:r>
+            <a:r>
+              <a:rPr sz="1600">
+                <a:solidFill>
+                  <a:srgbClr val="569CD6"/>
+                </a:solidFill>
+                <a:latin typeface="Consolas"/>
+              </a:rPr>
+              <a:t>typename</a:t>
+            </a:r>
+            <a:r>
+              <a:rPr sz="1600">
+                <a:solidFill>
+                  <a:srgbClr val="D4D4D4"/>
+                </a:solidFill>
+                <a:latin typeface="Consolas"/>
+              </a:rPr>
+              <a:t> </a:t>
+            </a:r>
+            <a:r>
+              <a:rPr sz="1600">
+                <a:solidFill>
+                  <a:srgbClr val="4EC9B0"/>
+                </a:solidFill>
+                <a:latin typeface="Consolas"/>
+              </a:rPr>
+              <a:t>Registry</a:t>
+            </a:r>
+            <a:r>
+              <a:rPr sz="1600">
+                <a:solidFill>
+                  <a:srgbClr val="D4D4D4"/>
+                </a:solidFill>
+                <a:latin typeface="Consolas"/>
+              </a:rPr>
+              <a:t>,</a:t>
+            </a:r>
+            <a:r>
+              <a:rPr sz="1600">
+                <a:solidFill>
+                  <a:srgbClr val="D4D4D4"/>
+                </a:solidFill>
+                <a:latin typeface="Consolas"/>
+              </a:rPr>
+              <a:t> </a:t>
+            </a:r>
+            <a:r>
+              <a:rPr sz="1600">
+                <a:solidFill>
+                  <a:srgbClr val="569CD6"/>
+                </a:solidFill>
+                <a:latin typeface="Consolas"/>
+              </a:rPr>
+              <a:t>typename</a:t>
+            </a:r>
+            <a:r>
+              <a:rPr sz="1600">
+                <a:solidFill>
+                  <a:srgbClr val="D4D4D4"/>
+                </a:solidFill>
+                <a:latin typeface="Consolas"/>
+              </a:rPr>
+              <a:t> </a:t>
+            </a:r>
+            <a:r>
+              <a:rPr sz="1600">
+                <a:solidFill>
+                  <a:srgbClr val="4EC9B0"/>
+                </a:solidFill>
+                <a:latin typeface="Consolas"/>
+              </a:rPr>
+              <a:t>T</a:t>
+            </a:r>
+            <a:r>
+              <a:rPr sz="1600">
+                <a:solidFill>
+                  <a:srgbClr val="D4D4D4"/>
+                </a:solidFill>
+                <a:latin typeface="Consolas"/>
+              </a:rPr>
+              <a:t>&gt;</a:t>
+            </a:r>
+          </a:p>
+          <a:p>
+            <a:pPr>
+              <a:spcAft>
+                <a:spcPts val="100"/>
+              </a:spcAft>
+            </a:pPr>
+            <a:r>
+              <a:rPr sz="1600">
+                <a:solidFill>
+                  <a:srgbClr val="569CD6"/>
+                </a:solidFill>
+                <a:latin typeface="Consolas"/>
+              </a:rPr>
+              <a:t>auto</a:t>
+            </a:r>
+            <a:r>
+              <a:rPr sz="1600">
+                <a:solidFill>
+                  <a:srgbClr val="D4D4D4"/>
+                </a:solidFill>
+                <a:latin typeface="Consolas"/>
+              </a:rPr>
+              <a:t> </a:t>
+            </a:r>
+            <a:r>
+              <a:rPr sz="1600">
+                <a:solidFill>
+                  <a:srgbClr val="D4D4D4"/>
+                </a:solidFill>
+                <a:latin typeface="Consolas"/>
+              </a:rPr>
+              <a:t>query</a:t>
+            </a:r>
+            <a:r>
+              <a:rPr sz="1600">
+                <a:solidFill>
+                  <a:srgbClr val="D4D4D4"/>
+                </a:solidFill>
+                <a:latin typeface="Consolas"/>
+              </a:rPr>
+              <a:t>(</a:t>
+            </a:r>
+            <a:r>
+              <a:rPr sz="1600">
+                <a:solidFill>
+                  <a:srgbClr val="569CD6"/>
+                </a:solidFill>
+                <a:latin typeface="Consolas"/>
+              </a:rPr>
+              <a:t>const</a:t>
+            </a:r>
+            <a:r>
+              <a:rPr sz="1600">
+                <a:solidFill>
+                  <a:srgbClr val="D4D4D4"/>
+                </a:solidFill>
+                <a:latin typeface="Consolas"/>
+              </a:rPr>
+              <a:t> </a:t>
+            </a:r>
+            <a:r>
+              <a:rPr sz="1600">
+                <a:solidFill>
+                  <a:srgbClr val="4EC9B0"/>
+                </a:solidFill>
+                <a:latin typeface="Consolas"/>
+              </a:rPr>
+              <a:t>Registry</a:t>
+            </a:r>
+            <a:r>
+              <a:rPr sz="1600">
+                <a:solidFill>
+                  <a:srgbClr val="D4D4D4"/>
+                </a:solidFill>
+                <a:latin typeface="Consolas"/>
+              </a:rPr>
+              <a:t>&amp;</a:t>
+            </a:r>
+            <a:r>
+              <a:rPr sz="1600">
+                <a:solidFill>
+                  <a:srgbClr val="D4D4D4"/>
+                </a:solidFill>
+                <a:latin typeface="Consolas"/>
+              </a:rPr>
+              <a:t> </a:t>
+            </a:r>
+            <a:r>
+              <a:rPr sz="1600">
+                <a:solidFill>
+                  <a:srgbClr val="D4D4D4"/>
+                </a:solidFill>
+                <a:latin typeface="Consolas"/>
+              </a:rPr>
+              <a:t>reg</a:t>
+            </a:r>
+            <a:r>
+              <a:rPr sz="1600">
+                <a:solidFill>
+                  <a:srgbClr val="D4D4D4"/>
+                </a:solidFill>
+                <a:latin typeface="Consolas"/>
+              </a:rPr>
+              <a:t>,</a:t>
+            </a:r>
+            <a:r>
+              <a:rPr sz="1600">
+                <a:solidFill>
+                  <a:srgbClr val="D4D4D4"/>
+                </a:solidFill>
+                <a:latin typeface="Consolas"/>
+              </a:rPr>
+              <a:t> </a:t>
+            </a:r>
+            <a:r>
+              <a:rPr sz="1600">
+                <a:solidFill>
+                  <a:srgbClr val="D4D4D4"/>
+                </a:solidFill>
+                <a:latin typeface="Consolas"/>
+              </a:rPr>
+              <a:t>std</a:t>
+            </a:r>
+            <a:r>
+              <a:rPr sz="1600">
+                <a:solidFill>
+                  <a:srgbClr val="D4D4D4"/>
+                </a:solidFill>
+                <a:latin typeface="Consolas"/>
+              </a:rPr>
+              <a:t>:</a:t>
+            </a:r>
+            <a:r>
+              <a:rPr sz="1600">
+                <a:solidFill>
+                  <a:srgbClr val="D4D4D4"/>
+                </a:solidFill>
+                <a:latin typeface="Consolas"/>
+              </a:rPr>
+              <a:t>:</a:t>
+            </a:r>
+            <a:r>
+              <a:rPr sz="1600">
+                <a:solidFill>
+                  <a:srgbClr val="D4D4D4"/>
+                </a:solidFill>
+                <a:latin typeface="Consolas"/>
+              </a:rPr>
+              <a:t>span</a:t>
+            </a:r>
+            <a:r>
+              <a:rPr sz="1600">
+                <a:solidFill>
+                  <a:srgbClr val="D4D4D4"/>
+                </a:solidFill>
+                <a:latin typeface="Consolas"/>
+              </a:rPr>
+              <a:t>&lt;</a:t>
+            </a:r>
+            <a:r>
+              <a:rPr sz="1600">
+                <a:solidFill>
+                  <a:srgbClr val="569CD6"/>
+                </a:solidFill>
+                <a:latin typeface="Consolas"/>
+              </a:rPr>
+              <a:t>const</a:t>
+            </a:r>
+            <a:r>
+              <a:rPr sz="1600">
+                <a:solidFill>
+                  <a:srgbClr val="D4D4D4"/>
+                </a:solidFill>
+                <a:latin typeface="Consolas"/>
+              </a:rPr>
+              <a:t> </a:t>
+            </a:r>
+            <a:r>
+              <a:rPr sz="1600">
+                <a:solidFill>
+                  <a:srgbClr val="D4D4D4"/>
+                </a:solidFill>
+                <a:latin typeface="Consolas"/>
+              </a:rPr>
+              <a:t>T</a:t>
+            </a:r>
+            <a:r>
+              <a:rPr sz="1600">
+                <a:solidFill>
+                  <a:srgbClr val="D4D4D4"/>
+                </a:solidFill>
+                <a:latin typeface="Consolas"/>
+              </a:rPr>
+              <a:t>&gt;</a:t>
+            </a:r>
+            <a:r>
+              <a:rPr sz="1600">
+                <a:solidFill>
+                  <a:srgbClr val="D4D4D4"/>
+                </a:solidFill>
+                <a:latin typeface="Consolas"/>
+              </a:rPr>
+              <a:t> </a:t>
+            </a:r>
+            <a:r>
+              <a:rPr sz="1600">
+                <a:solidFill>
+                  <a:srgbClr val="D4D4D4"/>
+                </a:solidFill>
+                <a:latin typeface="Consolas"/>
+              </a:rPr>
+              <a:t>s</a:t>
+            </a:r>
+            <a:r>
+              <a:rPr sz="1600">
+                <a:solidFill>
+                  <a:srgbClr val="D4D4D4"/>
+                </a:solidFill>
+                <a:latin typeface="Consolas"/>
+              </a:rPr>
+              <a:t>)</a:t>
+            </a:r>
+            <a:r>
+              <a:rPr sz="1600">
+                <a:solidFill>
+                  <a:srgbClr val="D4D4D4"/>
+                </a:solidFill>
+                <a:latin typeface="Consolas"/>
+              </a:rPr>
+              <a:t> </a:t>
+            </a:r>
+            <a:r>
+              <a:rPr sz="1600">
+                <a:solidFill>
+                  <a:srgbClr val="D4D4D4"/>
+                </a:solidFill>
+                <a:latin typeface="Consolas"/>
+              </a:rPr>
+              <a:t>{</a:t>
+            </a:r>
+          </a:p>
+          <a:p>
+            <a:pPr>
+              <a:spcAft>
+                <a:spcPts val="100"/>
+              </a:spcAft>
+            </a:pPr>
+            <a:r>
+              <a:rPr sz="1600" b="1">
+                <a:solidFill>
+                  <a:srgbClr val="D4D4D4"/>
+                </a:solidFill>
+                <a:latin typeface="Consolas"/>
+              </a:rPr>
+              <a:t>    </a:t>
+            </a:r>
+            <a:r>
+              <a:rPr sz="1600" b="1">
+                <a:solidFill>
+                  <a:srgbClr val="569CD6"/>
+                </a:solidFill>
+                <a:latin typeface="Consolas"/>
+              </a:rPr>
+              <a:t>return</a:t>
+            </a:r>
+            <a:r>
+              <a:rPr sz="1600" b="1">
+                <a:solidFill>
+                  <a:srgbClr val="D4D4D4"/>
+                </a:solidFill>
+                <a:latin typeface="Consolas"/>
+              </a:rPr>
+              <a:t> </a:t>
+            </a:r>
+            <a:r>
+              <a:rPr sz="1600" b="1">
+                <a:solidFill>
+                  <a:srgbClr val="D4D4D4"/>
+                </a:solidFill>
+                <a:latin typeface="Consolas"/>
+              </a:rPr>
+              <a:t>reg</a:t>
+            </a:r>
+            <a:r>
+              <a:rPr sz="1600" b="1">
+                <a:solidFill>
+                  <a:srgbClr val="D4D4D4"/>
+                </a:solidFill>
+                <a:latin typeface="Consolas"/>
+              </a:rPr>
+              <a:t>.</a:t>
+            </a:r>
+            <a:r>
+              <a:rPr sz="1600" b="1">
+                <a:solidFill>
+                  <a:srgbClr val="D4D4D4"/>
+                </a:solidFill>
+                <a:latin typeface="Consolas"/>
+              </a:rPr>
+              <a:t>computeFunction</a:t>
+            </a:r>
+            <a:r>
+              <a:rPr sz="1600" b="1">
+                <a:solidFill>
+                  <a:srgbClr val="D4D4D4"/>
+                </a:solidFill>
+                <a:latin typeface="Consolas"/>
+              </a:rPr>
+              <a:t>&lt;</a:t>
+            </a:r>
+            <a:r>
+              <a:rPr sz="1600" b="1">
+                <a:solidFill>
+                  <a:srgbClr val="4EC9B0"/>
+                </a:solidFill>
+                <a:latin typeface="Consolas"/>
+              </a:rPr>
+              <a:t>Tag</a:t>
+            </a:r>
+            <a:r>
+              <a:rPr sz="1600" b="1">
+                <a:solidFill>
+                  <a:srgbClr val="D4D4D4"/>
+                </a:solidFill>
+                <a:latin typeface="Consolas"/>
+              </a:rPr>
+              <a:t>&gt;</a:t>
+            </a:r>
+            <a:r>
+              <a:rPr sz="1600" b="1">
+                <a:solidFill>
+                  <a:srgbClr val="D4D4D4"/>
+                </a:solidFill>
+                <a:latin typeface="Consolas"/>
+              </a:rPr>
+              <a:t>(</a:t>
+            </a:r>
+            <a:r>
+              <a:rPr sz="1600" b="1">
+                <a:solidFill>
+                  <a:srgbClr val="D4D4D4"/>
+                </a:solidFill>
+                <a:latin typeface="Consolas"/>
+              </a:rPr>
+              <a:t>s</a:t>
+            </a:r>
+            <a:r>
+              <a:rPr sz="1600" b="1">
+                <a:solidFill>
+                  <a:srgbClr val="D4D4D4"/>
+                </a:solidFill>
+                <a:latin typeface="Consolas"/>
+              </a:rPr>
+              <a:t>)</a:t>
+            </a:r>
+            <a:r>
+              <a:rPr sz="1600" b="1">
+                <a:solidFill>
+                  <a:srgbClr val="D4D4D4"/>
+                </a:solidFill>
+                <a:latin typeface="Consolas"/>
+              </a:rPr>
+              <a:t>;</a:t>
+            </a:r>
+            <a:r>
+              <a:rPr sz="1600" b="1">
+                <a:solidFill>
+                  <a:srgbClr val="D4D4D4"/>
+                </a:solidFill>
+                <a:latin typeface="Consolas"/>
+              </a:rPr>
+              <a:t>   </a:t>
+            </a:r>
+            <a:r>
+              <a:rPr sz="1600" b="1">
+                <a:solidFill>
+                  <a:srgbClr val="6A9955"/>
+                </a:solidFill>
+                <a:latin typeface="Consolas"/>
+              </a:rPr>
+              <a:t>// find provider -&gt; provider.compute(...)</a:t>
+            </a:r>
+          </a:p>
+          <a:p>
+            <a:pPr>
+              <a:spcAft>
+                <a:spcPts val="100"/>
+              </a:spcAft>
+            </a:pPr>
+            <a:r>
+              <a:rPr sz="1600">
+                <a:solidFill>
+                  <a:srgbClr val="D4D4D4"/>
+                </a:solidFill>
+                <a:latin typeface="Consolas"/>
+              </a:rPr>
+              <a:t>}</a:t>
+            </a:r>
+          </a:p>
+        </p:txBody>
+      </p:sp>
+      <p:sp>
+        <p:nvSpPr>
+          <p:cNvPr id="7" name="TextBox 6"/>
+          <p:cNvSpPr txBox="1"/>
+          <p:nvPr/>
+        </p:nvSpPr>
+        <p:spPr>
+          <a:xfrm>
+            <a:off x="411480" y="6446520"/>
+            <a:ext cx="10058400" cy="320040"/>
+          </a:xfrm>
+          <a:prstGeom prst="rect">
+            <a:avLst/>
+          </a:prstGeom>
+          <a:noFill/>
+        </p:spPr>
+        <p:txBody>
+          <a:bodyPr wrap="none">
+            <a:spAutoFit/>
+          </a:bodyPr>
+          <a:lstStyle/>
+          <a:p>
+            <a:r>
+              <a:rPr sz="1000">
+                <a:solidFill>
+                  <a:srgbClr val="8CA3B8"/>
+                </a:solidFill>
+                <a:latin typeface="Segoe UI"/>
+              </a:rPr>
+              <a:t>Separation of Concerns at Zero Cost — ACCU on Sea 2026</a:t>
+            </a:r>
+          </a:p>
+        </p:txBody>
+      </p:sp>
+      <p:sp>
+        <p:nvSpPr>
+          <p:cNvPr id="8" name="TextBox 7"/>
+          <p:cNvSpPr txBox="1"/>
+          <p:nvPr/>
+        </p:nvSpPr>
+        <p:spPr>
+          <a:xfrm>
+            <a:off x="11384280" y="6446520"/>
+            <a:ext cx="548640" cy="320040"/>
+          </a:xfrm>
+          <a:prstGeom prst="rect">
+            <a:avLst/>
+          </a:prstGeom>
+          <a:noFill/>
+        </p:spPr>
+        <p:txBody>
+          <a:bodyPr wrap="none">
+            <a:spAutoFit/>
+          </a:bodyPr>
+          <a:lstStyle/>
+          <a:p>
+            <a:pPr algn="r"/>
+            <a:r>
+              <a:rPr sz="1000">
+                <a:solidFill>
+                  <a:srgbClr val="8CA3B8"/>
+                </a:solidFill>
+                <a:latin typeface="Segoe UI"/>
+              </a:rPr>
+              <a:t>25</a:t>
             </a:r>
           </a:p>
         </p:txBody>

--- a/slides/ACCU-Separation-of-Concerns-at-Zero-Cost.pptx
+++ b/slides/ACCU-Separation-of-Concerns-at-Zero-Cost.pptx
@@ -13910,7 +13910,7 @@
                 </a:solidFill>
                 <a:latin typeface="Segoe UI"/>
               </a:rPr>
-              <a:t>sopot</a:t>
+              <a:t>accu-on-sea-2026-modular-physics</a:t>
             </a:r>
             <a:endParaRPr lang="en-US" sz="2200" b="0" noProof="0" dirty="0">
               <a:solidFill>

--- a/slides/ACCU-Separation-of-Concerns-at-Zero-Cost.pptx
+++ b/slides/ACCU-Separation-of-Concerns-at-Zero-Cost.pptx
@@ -19882,8 +19882,8 @@
         </p:nvSpPr>
         <p:spPr>
           <a:xfrm>
-            <a:off x="548640" y="1463040"/>
-            <a:ext cx="6035040" cy="3794760"/>
+            <a:off x="548640" y="1371600"/>
+            <a:ext cx="11338560" cy="4123943"/>
           </a:xfrm>
           <a:prstGeom prst="roundRect">
             <a:avLst>
@@ -19931,8 +19931,8 @@
         </p:nvSpPr>
         <p:spPr>
           <a:xfrm>
-            <a:off x="713232" y="1627632"/>
-            <a:ext cx="5705856" cy="3465576"/>
+            <a:off x="731520" y="1554480"/>
+            <a:ext cx="10972800" cy="3758183"/>
           </a:xfrm>
           <a:prstGeom prst="rect">
             <a:avLst/>
@@ -19951,7 +19951,7 @@
               </a:spcAft>
             </a:pPr>
             <a:r>
-              <a:rPr sz="1250">
+              <a:rPr sz="1600">
                 <a:solidFill>
                   <a:srgbClr val="DCDCAA"/>
                 </a:solidFill>
@@ -19960,7 +19960,7 @@
               <a:t>energy_sopot</a:t>
             </a:r>
             <a:r>
-              <a:rPr sz="1250">
+              <a:rPr sz="1600">
                 <a:solidFill>
                   <a:srgbClr val="D4D4D4"/>
                 </a:solidFill>
@@ -19969,7 +19969,7 @@
               <a:t>(span&lt;const double&gt;):     </a:t>
             </a:r>
             <a:r>
-              <a:rPr sz="1250">
+              <a:rPr sz="1600">
                 <a:solidFill>
                   <a:srgbClr val="6A9955"/>
                 </a:solidFill>
@@ -19985,7 +19985,7 @@
               </a:spcAft>
             </a:pPr>
             <a:r>
-              <a:rPr sz="1250">
+              <a:rPr sz="1600">
                 <a:solidFill>
                   <a:srgbClr val="D4D4D4"/>
                 </a:solidFill>
@@ -19994,7 +19994,7 @@
               <a:t>    </a:t>
             </a:r>
             <a:r>
-              <a:rPr sz="1250">
+              <a:rPr sz="1600">
                 <a:solidFill>
                   <a:srgbClr val="DCDCAA"/>
                 </a:solidFill>
@@ -20003,7 +20003,7 @@
               <a:t>mov</a:t>
             </a:r>
             <a:r>
-              <a:rPr sz="1250">
+              <a:rPr sz="1600">
                 <a:solidFill>
                   <a:srgbClr val="D4D4D4"/>
                 </a:solidFill>
@@ -20012,7 +20012,7 @@
               <a:t>   r10, [sys+</a:t>
             </a:r>
             <a:r>
-              <a:rPr sz="1250">
+              <a:rPr sz="1600">
                 <a:solidFill>
                   <a:srgbClr val="B5CEA8"/>
                 </a:solidFill>
@@ -20021,7 +20021,7 @@
               <a:t>272</a:t>
             </a:r>
             <a:r>
-              <a:rPr sz="1250">
+              <a:rPr sz="1600">
                 <a:solidFill>
                   <a:srgbClr val="D4D4D4"/>
                 </a:solidFill>
@@ -20037,7 +20037,7 @@
               </a:spcAft>
             </a:pPr>
             <a:r>
-              <a:rPr sz="1250">
+              <a:rPr sz="1600">
                 <a:solidFill>
                   <a:srgbClr val="D4D4D4"/>
                 </a:solidFill>
@@ -20046,7 +20046,7 @@
               <a:t>    </a:t>
             </a:r>
             <a:r>
-              <a:rPr sz="1250">
+              <a:rPr sz="1600">
                 <a:solidFill>
                   <a:srgbClr val="DCDCAA"/>
                 </a:solidFill>
@@ -20055,7 +20055,7 @@
               <a:t>movsd</a:t>
             </a:r>
             <a:r>
-              <a:rPr sz="1250">
+              <a:rPr sz="1600">
                 <a:solidFill>
                   <a:srgbClr val="D4D4D4"/>
                 </a:solidFill>
@@ -20064,7 +20064,7 @@
               <a:t> xmm1, [.LC0]        </a:t>
             </a:r>
             <a:r>
-              <a:rPr sz="1250">
+              <a:rPr sz="1600">
                 <a:solidFill>
                   <a:srgbClr val="6A9955"/>
                 </a:solidFill>
@@ -20080,7 +20080,7 @@
               </a:spcAft>
             </a:pPr>
             <a:r>
-              <a:rPr sz="1250">
+              <a:rPr sz="1600">
                 <a:solidFill>
                   <a:srgbClr val="D4D4D4"/>
                 </a:solidFill>
@@ -20089,7 +20089,7 @@
               <a:t>    </a:t>
             </a:r>
             <a:r>
-              <a:rPr sz="1250">
+              <a:rPr sz="1600">
                 <a:solidFill>
                   <a:srgbClr val="DCDCAA"/>
                 </a:solidFill>
@@ -20098,7 +20098,7 @@
               <a:t>mov</a:t>
             </a:r>
             <a:r>
-              <a:rPr sz="1250">
+              <a:rPr sz="1600">
                 <a:solidFill>
                   <a:srgbClr val="D4D4D4"/>
                 </a:solidFill>
@@ -20114,7 +20114,7 @@
               </a:spcAft>
             </a:pPr>
             <a:r>
-              <a:rPr sz="1250">
+              <a:rPr sz="1600">
                 <a:solidFill>
                   <a:srgbClr val="D4D4D4"/>
                 </a:solidFill>
@@ -20123,7 +20123,7 @@
               <a:t>    </a:t>
             </a:r>
             <a:r>
-              <a:rPr sz="1250">
+              <a:rPr sz="1600">
                 <a:solidFill>
                   <a:srgbClr val="DCDCAA"/>
                 </a:solidFill>
@@ -20132,7 +20132,7 @@
               <a:t>movsd</a:t>
             </a:r>
             <a:r>
-              <a:rPr sz="1250">
+              <a:rPr sz="1600">
                 <a:solidFill>
                   <a:srgbClr val="D4D4D4"/>
                 </a:solidFill>
@@ -20141,7 +20141,7 @@
               <a:t> xmm0, [r10+</a:t>
             </a:r>
             <a:r>
-              <a:rPr sz="1250">
+              <a:rPr sz="1600">
                 <a:solidFill>
                   <a:srgbClr val="B5CEA8"/>
                 </a:solidFill>
@@ -20150,7 +20150,7 @@
               <a:t>8</a:t>
             </a:r>
             <a:r>
-              <a:rPr sz="1250">
+              <a:rPr sz="1600">
                 <a:solidFill>
                   <a:srgbClr val="D4D4D4"/>
                 </a:solidFill>
@@ -20159,7 +20159,7 @@
               <a:t>]       </a:t>
             </a:r>
             <a:r>
-              <a:rPr sz="1250">
+              <a:rPr sz="1600">
                 <a:solidFill>
                   <a:srgbClr val="6A9955"/>
                 </a:solidFill>
@@ -20175,7 +20175,7 @@
               </a:spcAft>
             </a:pPr>
             <a:r>
-              <a:rPr sz="1250">
+              <a:rPr sz="1600">
                 <a:solidFill>
                   <a:srgbClr val="D4D4D4"/>
                 </a:solidFill>
@@ -20184,7 +20184,7 @@
               <a:t>    </a:t>
             </a:r>
             <a:r>
-              <a:rPr sz="1250">
+              <a:rPr sz="1600">
                 <a:solidFill>
                   <a:srgbClr val="DCDCAA"/>
                 </a:solidFill>
@@ -20193,7 +20193,7 @@
               <a:t>movsd</a:t>
             </a:r>
             <a:r>
-              <a:rPr sz="1250">
+              <a:rPr sz="1600">
                 <a:solidFill>
                   <a:srgbClr val="D4D4D4"/>
                 </a:solidFill>
@@ -20202,7 +20202,7 @@
               <a:t> xmm3, [rax+rcx*</a:t>
             </a:r>
             <a:r>
-              <a:rPr sz="1250">
+              <a:rPr sz="1600">
                 <a:solidFill>
                   <a:srgbClr val="B5CEA8"/>
                 </a:solidFill>
@@ -20211,7 +20211,7 @@
               <a:t>8</a:t>
             </a:r>
             <a:r>
-              <a:rPr sz="1250">
+              <a:rPr sz="1600">
                 <a:solidFill>
                   <a:srgbClr val="D4D4D4"/>
                 </a:solidFill>
@@ -20220,7 +20220,7 @@
               <a:t>]   </a:t>
             </a:r>
             <a:r>
-              <a:rPr sz="1250">
+              <a:rPr sz="1600">
                 <a:solidFill>
                   <a:srgbClr val="6A9955"/>
                 </a:solidFill>
@@ -20236,7 +20236,7 @@
               </a:spcAft>
             </a:pPr>
             <a:r>
-              <a:rPr sz="1250">
+              <a:rPr sz="1600">
                 <a:solidFill>
                   <a:srgbClr val="D4D4D4"/>
                 </a:solidFill>
@@ -20245,7 +20245,7 @@
               <a:t>    </a:t>
             </a:r>
             <a:r>
-              <a:rPr sz="1250">
+              <a:rPr sz="1600">
                 <a:solidFill>
                   <a:srgbClr val="DCDCAA"/>
                 </a:solidFill>
@@ -20254,7 +20254,7 @@
               <a:t>mulsd</a:t>
             </a:r>
             <a:r>
-              <a:rPr sz="1250">
+              <a:rPr sz="1600">
                 <a:solidFill>
                   <a:srgbClr val="D4D4D4"/>
                 </a:solidFill>
@@ -20270,7 +20270,7 @@
               </a:spcAft>
             </a:pPr>
             <a:r>
-              <a:rPr sz="1250">
+              <a:rPr sz="1600">
                 <a:solidFill>
                   <a:srgbClr val="D4D4D4"/>
                 </a:solidFill>
@@ -20279,7 +20279,7 @@
               <a:t>    </a:t>
             </a:r>
             <a:r>
-              <a:rPr sz="1250">
+              <a:rPr sz="1600">
                 <a:solidFill>
                   <a:srgbClr val="DCDCAA"/>
                 </a:solidFill>
@@ -20288,7 +20288,7 @@
               <a:t>mulsd</a:t>
             </a:r>
             <a:r>
-              <a:rPr sz="1250">
+              <a:rPr sz="1600">
                 <a:solidFill>
                   <a:srgbClr val="D4D4D4"/>
                 </a:solidFill>
@@ -20297,7 +20297,7 @@
               <a:t> xmm0, xmm3          </a:t>
             </a:r>
             <a:r>
-              <a:rPr sz="1250">
+              <a:rPr sz="1600">
                 <a:solidFill>
                   <a:srgbClr val="6A9955"/>
                 </a:solidFill>
@@ -20313,7 +20313,7 @@
               </a:spcAft>
             </a:pPr>
             <a:r>
-              <a:rPr sz="1250">
+              <a:rPr sz="1600">
                 <a:solidFill>
                   <a:srgbClr val="D4D4D4"/>
                 </a:solidFill>
@@ -20322,7 +20322,7 @@
               <a:t>    </a:t>
             </a:r>
             <a:r>
-              <a:rPr sz="1250">
+              <a:rPr sz="1600">
                 <a:solidFill>
                   <a:srgbClr val="DCDCAA"/>
                 </a:solidFill>
@@ -20331,7 +20331,7 @@
               <a:t>mulsd</a:t>
             </a:r>
             <a:r>
-              <a:rPr sz="1250">
+              <a:rPr sz="1600">
                 <a:solidFill>
                   <a:srgbClr val="D4D4D4"/>
                 </a:solidFill>
@@ -20340,7 +20340,7 @@
               <a:t> xmm0, xmm3          </a:t>
             </a:r>
             <a:r>
-              <a:rPr sz="1250">
+              <a:rPr sz="1600">
                 <a:solidFill>
                   <a:srgbClr val="6A9955"/>
                 </a:solidFill>
@@ -20356,7 +20356,7 @@
               </a:spcAft>
             </a:pPr>
             <a:r>
-              <a:rPr sz="1250">
+              <a:rPr sz="1600">
                 <a:solidFill>
                   <a:srgbClr val="D4D4D4"/>
                 </a:solidFill>
@@ -20365,7 +20365,7 @@
               <a:t>    </a:t>
             </a:r>
             <a:r>
-              <a:rPr sz="1250">
+              <a:rPr sz="1600">
                 <a:solidFill>
                   <a:srgbClr val="DCDCAA"/>
                 </a:solidFill>
@@ -20374,7 +20374,7 @@
               <a:t>subsd</a:t>
             </a:r>
             <a:r>
-              <a:rPr sz="1250">
+              <a:rPr sz="1600">
                 <a:solidFill>
                   <a:srgbClr val="D4D4D4"/>
                 </a:solidFill>
@@ -20383,7 +20383,7 @@
               <a:t> xmm2, [r8+</a:t>
             </a:r>
             <a:r>
-              <a:rPr sz="1250">
+              <a:rPr sz="1600">
                 <a:solidFill>
                   <a:srgbClr val="B5CEA8"/>
                 </a:solidFill>
@@ -20392,7 +20392,7 @@
               <a:t>16</a:t>
             </a:r>
             <a:r>
-              <a:rPr sz="1250">
+              <a:rPr sz="1600">
                 <a:solidFill>
                   <a:srgbClr val="D4D4D4"/>
                 </a:solidFill>
@@ -20401,7 +20401,7 @@
               <a:t>]       </a:t>
             </a:r>
             <a:r>
-              <a:rPr sz="1250">
+              <a:rPr sz="1600">
                 <a:solidFill>
                   <a:srgbClr val="6A9955"/>
                 </a:solidFill>
@@ -20417,7 +20417,7 @@
               </a:spcAft>
             </a:pPr>
             <a:r>
-              <a:rPr sz="1250">
+              <a:rPr sz="1600">
                 <a:solidFill>
                   <a:srgbClr val="D4D4D4"/>
                 </a:solidFill>
@@ -20426,7 +20426,7 @@
               <a:t>    </a:t>
             </a:r>
             <a:r>
-              <a:rPr sz="1250">
+              <a:rPr sz="1600">
                 <a:solidFill>
                   <a:srgbClr val="DCDCAA"/>
                 </a:solidFill>
@@ -20435,7 +20435,7 @@
               <a:t>mulsd</a:t>
             </a:r>
             <a:r>
-              <a:rPr sz="1250">
+              <a:rPr sz="1600">
                 <a:solidFill>
                   <a:srgbClr val="D4D4D4"/>
                 </a:solidFill>
@@ -20444,7 +20444,7 @@
               <a:t> xmm1, xmm2          </a:t>
             </a:r>
             <a:r>
-              <a:rPr sz="1250">
+              <a:rPr sz="1600">
                 <a:solidFill>
                   <a:srgbClr val="6A9955"/>
                 </a:solidFill>
@@ -20460,7 +20460,7 @@
               </a:spcAft>
             </a:pPr>
             <a:r>
-              <a:rPr sz="1250">
+              <a:rPr sz="1600">
                 <a:solidFill>
                   <a:srgbClr val="D4D4D4"/>
                 </a:solidFill>
@@ -20469,7 +20469,7 @@
               <a:t>    </a:t>
             </a:r>
             <a:r>
-              <a:rPr sz="1250">
+              <a:rPr sz="1600">
                 <a:solidFill>
                   <a:srgbClr val="DCDCAA"/>
                 </a:solidFill>
@@ -20478,7 +20478,7 @@
               <a:t>addsd</a:t>
             </a:r>
             <a:r>
-              <a:rPr sz="1250">
+              <a:rPr sz="1600">
                 <a:solidFill>
                   <a:srgbClr val="D4D4D4"/>
                 </a:solidFill>
@@ -20494,7 +20494,7 @@
               </a:spcAft>
             </a:pPr>
             <a:r>
-              <a:rPr sz="1250">
+              <a:rPr sz="1600">
                 <a:solidFill>
                   <a:srgbClr val="D4D4D4"/>
                 </a:solidFill>
@@ -20503,7 +20503,7 @@
               <a:t>    </a:t>
             </a:r>
             <a:r>
-              <a:rPr sz="1250">
+              <a:rPr sz="1600">
                 <a:solidFill>
                   <a:srgbClr val="DCDCAA"/>
                 </a:solidFill>
@@ -20512,7 +20512,7 @@
               <a:t>addsd</a:t>
             </a:r>
             <a:r>
-              <a:rPr sz="1250">
+              <a:rPr sz="1600">
                 <a:solidFill>
                   <a:srgbClr val="D4D4D4"/>
                 </a:solidFill>
@@ -20521,7 +20521,7 @@
               <a:t> xmm0, xmm1          </a:t>
             </a:r>
             <a:r>
-              <a:rPr sz="1250">
+              <a:rPr sz="1600">
                 <a:solidFill>
                   <a:srgbClr val="6A9955"/>
                 </a:solidFill>
@@ -20537,7 +20537,7 @@
               </a:spcAft>
             </a:pPr>
             <a:r>
-              <a:rPr sz="1250">
+              <a:rPr sz="1600">
                 <a:solidFill>
                   <a:srgbClr val="D4D4D4"/>
                 </a:solidFill>
@@ -20546,7 +20546,7 @@
               <a:t>    </a:t>
             </a:r>
             <a:r>
-              <a:rPr sz="1250">
+              <a:rPr sz="1600">
                 <a:solidFill>
                   <a:srgbClr val="DCDCAA"/>
                 </a:solidFill>
@@ -20559,14 +20559,14 @@
       </p:sp>
       <p:sp>
         <p:nvSpPr>
-          <p:cNvPr id="6" name="TextBox 5"/>
+          <p:cNvPr id="7" name="TextBox 6"/>
           <p:cNvSpPr txBox="1"/>
           <p:nvPr/>
         </p:nvSpPr>
         <p:spPr>
           <a:xfrm>
-            <a:off x="6858000" y="1828800"/>
-            <a:ext cx="4937760" cy="4572000"/>
+            <a:off x="411480" y="6446520"/>
+            <a:ext cx="10058400" cy="320040"/>
           </a:xfrm>
           <a:prstGeom prst="rect">
             <a:avLst/>
@@ -20574,131 +20574,33 @@
           <a:noFill/>
         </p:spPr>
         <p:txBody>
-          <a:bodyPr wrap="square">
+          <a:bodyPr wrap="none">
             <a:spAutoFit/>
           </a:bodyPr>
           <a:lstStyle/>
           <a:p>
-            <a:pPr>
-              <a:spcAft>
-                <a:spcPts val="800"/>
-              </a:spcAft>
-            </a:pPr>
-            <a:r>
-              <a:rPr sz="1800">
-                <a:solidFill>
-                  <a:srgbClr val="35C4E8"/>
-                </a:solidFill>
-                <a:latin typeface="Segoe UI"/>
-              </a:rPr>
-              <a:t>•  </a:t>
-            </a:r>
-            <a:r>
-              <a:rPr sz="1800" b="1">
-                <a:solidFill>
-                  <a:srgbClr val="7EE08A"/>
-                </a:solidFill>
-                <a:latin typeface="Segoe UI"/>
-              </a:rPr>
-              <a:t>0 call   0 jmp   0 vtable</a:t>
-            </a:r>
-          </a:p>
-          <a:p>
-            <a:pPr>
-              <a:spcAft>
-                <a:spcPts val="800"/>
-              </a:spcAft>
-            </a:pPr>
-            <a:r>
-              <a:rPr sz="1800">
-                <a:solidFill>
-                  <a:srgbClr val="35C4E8"/>
-                </a:solidFill>
-                <a:latin typeface="Segoe UI"/>
-              </a:rPr>
-              <a:t>•  </a:t>
-            </a:r>
-            <a:r>
-              <a:rPr sz="1800" b="0">
-                <a:solidFill>
-                  <a:srgbClr val="D8E2EC"/>
-                </a:solidFill>
-                <a:latin typeface="Segoe UI"/>
-              </a:rPr>
-              <a:t>Straight-line floating point — identical shape to the hand-written formula</a:t>
-            </a:r>
-          </a:p>
-          <a:p>
-            <a:pPr>
-              <a:spcAft>
-                <a:spcPts val="800"/>
-              </a:spcAft>
-            </a:pPr>
-            <a:r>
-              <a:rPr sz="1800">
-                <a:solidFill>
-                  <a:srgbClr val="35C4E8"/>
-                </a:solidFill>
-                <a:latin typeface="Segoe UI"/>
-              </a:rPr>
-              <a:t>•  </a:t>
-            </a:r>
-            <a:r>
-              <a:rPr sz="1800" b="0">
-                <a:solidFill>
-                  <a:srgbClr val="D8E2EC"/>
-                </a:solidFill>
-                <a:latin typeface="Segoe UI"/>
-              </a:rPr>
-              <a:t>Only difference: the monolith constant-folds m and k; the framework reads them as parameters</a:t>
-            </a:r>
-          </a:p>
-          <a:p>
-            <a:pPr>
-              <a:spcAft>
-                <a:spcPts val="800"/>
-              </a:spcAft>
-            </a:pPr>
-            <a:r>
-              <a:rPr sz="1800">
-                <a:solidFill>
-                  <a:srgbClr val="35C4E8"/>
-                </a:solidFill>
-                <a:latin typeface="Segoe UI"/>
-              </a:rPr>
-              <a:t>•  </a:t>
-            </a:r>
-            <a:r>
-              <a:rPr sz="1800" b="0">
-                <a:solidFill>
-                  <a:srgbClr val="D8E2EC"/>
-                </a:solidFill>
-                <a:latin typeface="Segoe UI"/>
-              </a:rPr>
-              <a:t>Registry, tags, concepts: </a:t>
-            </a:r>
-            <a:r>
-              <a:rPr sz="1800" b="1">
-                <a:solidFill>
-                  <a:srgbClr val="F2C744"/>
-                </a:solidFill>
-                <a:latin typeface="Segoe UI"/>
-              </a:rPr>
-              <a:t>zero instructions</a:t>
-            </a:r>
-          </a:p>
-        </p:txBody>
-      </p:sp>
-      <p:sp>
-        <p:nvSpPr>
-          <p:cNvPr id="7" name="TextBox 6"/>
+            <a:r>
+              <a:rPr sz="1000">
+                <a:solidFill>
+                  <a:srgbClr val="8CA3B8"/>
+                </a:solidFill>
+                <a:latin typeface="Segoe UI"/>
+              </a:rPr>
+              <a:t>Separation of Concerns at Zero Cost — ACCU on Sea 2026</a:t>
+            </a:r>
+          </a:p>
+        </p:txBody>
+      </p:sp>
+      <p:sp>
+        <p:nvSpPr>
+          <p:cNvPr id="8" name="TextBox 7"/>
           <p:cNvSpPr txBox="1"/>
           <p:nvPr/>
         </p:nvSpPr>
         <p:spPr>
           <a:xfrm>
-            <a:off x="411480" y="6446520"/>
-            <a:ext cx="10058400" cy="320040"/>
+            <a:off x="11384280" y="6446520"/>
+            <a:ext cx="548640" cy="320040"/>
           </a:xfrm>
           <a:prstGeom prst="rect">
             <a:avLst/>
@@ -20711,6 +20613,7 @@
           </a:bodyPr>
           <a:lstStyle/>
           <a:p>
+            <a:pPr algn="r"/>
             <a:r>
               <a:rPr sz="1000">
                 <a:solidFill>
@@ -20718,21 +20621,21 @@
                 </a:solidFill>
                 <a:latin typeface="Segoe UI"/>
               </a:rPr>
-              <a:t>Separation of Concerns at Zero Cost — ACCU on Sea 2026</a:t>
-            </a:r>
-          </a:p>
-        </p:txBody>
-      </p:sp>
-      <p:sp>
-        <p:nvSpPr>
-          <p:cNvPr id="8" name="TextBox 7"/>
+              <a:t>29</a:t>
+            </a:r>
+          </a:p>
+        </p:txBody>
+      </p:sp>
+      <p:sp>
+        <p:nvSpPr>
+          <p:cNvPr id="9" name="asm takeaway"/>
           <p:cNvSpPr txBox="1"/>
           <p:nvPr/>
         </p:nvSpPr>
         <p:spPr>
           <a:xfrm>
-            <a:off x="11384280" y="6446520"/>
-            <a:ext cx="548640" cy="320040"/>
+            <a:off x="731520" y="5678423"/>
+            <a:ext cx="10972800" cy="548640"/>
           </a:xfrm>
           <a:prstGeom prst="rect">
             <a:avLst/>
@@ -20745,15 +20648,14 @@
           </a:bodyPr>
           <a:lstStyle/>
           <a:p>
-            <a:pPr algn="r"/>
-            <a:r>
-              <a:rPr sz="1000">
-                <a:solidFill>
-                  <a:srgbClr val="8CA3B8"/>
-                </a:solidFill>
-                <a:latin typeface="Segoe UI"/>
-              </a:rPr>
-              <a:t>29</a:t>
+            <a:r>
+              <a:rPr sz="1900" i="1">
+                <a:solidFill>
+                  <a:srgbClr val="7EE08A"/>
+                </a:solidFill>
+                <a:latin typeface="Segoe UI"/>
+              </a:rPr>
+              <a:t>0 calls · 0 jumps · 0 vtables — straight-line FP, the same shape as the hand-written formula.</a:t>
             </a:r>
           </a:p>
         </p:txBody>
@@ -21465,49 +21367,22 @@
           <a:lstStyle/>
           <a:p>
             <a:r>
-              <a:rPr lang="pl-PL" sz="2000" dirty="0">
+              <a:rPr sz="4000" b="1">
+                <a:solidFill>
+                  <a:srgbClr val="7EE08A"/>
+                </a:solidFill>
+                <a:latin typeface="Segoe UI"/>
+              </a:rPr>
+              <a:t>1000×</a:t>
+            </a:r>
+            <a:r>
+              <a:rPr sz="2000" b="0">
                 <a:solidFill>
                   <a:srgbClr val="D8E2EC"/>
                 </a:solidFill>
                 <a:latin typeface="Segoe UI"/>
               </a:rPr>
-              <a:t>1000 x </a:t>
-            </a:r>
-            <a:r>
-              <a:rPr lang="pl-PL" sz="2000" dirty="0" err="1">
-                <a:solidFill>
-                  <a:srgbClr val="D8E2EC"/>
-                </a:solidFill>
-                <a:latin typeface="Segoe UI"/>
-              </a:rPr>
-              <a:t>faster</a:t>
-            </a:r>
-            <a:r>
-              <a:rPr lang="pl-PL" sz="2000" dirty="0">
-                <a:solidFill>
-                  <a:srgbClr val="D8E2EC"/>
-                </a:solidFill>
-                <a:latin typeface="Segoe UI"/>
-              </a:rPr>
-              <a:t> </a:t>
-            </a:r>
-            <a:r>
-              <a:rPr lang="pl-PL" sz="2000" dirty="0" err="1">
-                <a:solidFill>
-                  <a:srgbClr val="D8E2EC"/>
-                </a:solidFill>
-                <a:latin typeface="Segoe UI"/>
-              </a:rPr>
-              <a:t>than</a:t>
-            </a:r>
-            <a:r>
-              <a:rPr lang="pl-PL" sz="2000" dirty="0">
-                <a:solidFill>
-                  <a:srgbClr val="D8E2EC"/>
-                </a:solidFill>
-                <a:latin typeface="Segoe UI"/>
-              </a:rPr>
-              <a:t> OO C# version</a:t>
+              <a:t>   faster than an equivalent OO C# version</a:t>
             </a:r>
             <a:endParaRPr sz="2000" dirty="0">
               <a:solidFill>

--- a/slides/ACCU-Separation-of-Concerns-at-Zero-Cost.pptx
+++ b/slides/ACCU-Separation-of-Concerns-at-Zero-Cost.pptx
@@ -37,6 +37,7 @@
     <p:sldId id="281" r:id="rId28"/>
     <p:sldId id="282" r:id="rId29"/>
     <p:sldId id="283" r:id="rId30"/>
+    <p:sldId id="297" r:id="rId46"/>
     <p:sldId id="284" r:id="rId31"/>
     <p:sldId id="285" r:id="rId32"/>
     <p:sldId id="286" r:id="rId33"/>
@@ -21166,7 +21167,7 @@
 </file>
 
 <file path=ppt/slides/slide30.xml><?xml version="1.0" encoding="utf-8"?>
-<p:sld xmlns:a="http://schemas.openxmlformats.org/drawingml/2006/main" xmlns:r="http://schemas.openxmlformats.org/officeDocument/2006/relationships" xmlns:p="http://schemas.openxmlformats.org/presentationml/2006/main">
+<p:sld xmlns:a="http://schemas.openxmlformats.org/drawingml/2006/main" xmlns:p="http://schemas.openxmlformats.org/presentationml/2006/main" xmlns:r="http://schemas.openxmlformats.org/officeDocument/2006/relationships">
   <p:cSld>
     <p:bg>
       <p:bgPr>
@@ -21182,14 +21183,7 @@
         <p:cNvGrpSpPr/>
         <p:nvPr/>
       </p:nvGrpSpPr>
-      <p:grpSpPr>
-        <a:xfrm>
-          <a:off x="0" y="0"/>
-          <a:ext cx="0" cy="0"/>
-          <a:chOff x="0" y="0"/>
-          <a:chExt cx="0" cy="0"/>
-        </a:xfrm>
-      </p:grpSpPr>
+      <p:grpSpPr/>
       <p:sp>
         <p:nvSpPr>
           <p:cNvPr id="2" name="TextBox 1"/>
@@ -21219,7 +21213,7 @@
                 </a:solidFill>
                 <a:latin typeface="Segoe UI"/>
               </a:rPr>
-              <a:t>MEASURED, NOT ESTIMATED</a:t>
+              <a:t>G++ 14 -O2, REAL OUTPUT</a:t>
             </a:r>
           </a:p>
         </p:txBody>
@@ -21253,21 +21247,70 @@
                 </a:solidFill>
                 <a:latin typeface="Segoe UI"/>
               </a:rPr>
-              <a:t>Numbers</a:t>
-            </a:r>
-          </a:p>
-        </p:txBody>
-      </p:sp>
-      <p:sp>
-        <p:nvSpPr>
-          <p:cNvPr id="4" name="TextBox 3"/>
+              <a:t>…and the derivative? Same story.</a:t>
+            </a:r>
+          </a:p>
+        </p:txBody>
+      </p:sp>
+      <p:sp>
+        <p:nvSpPr>
+          <p:cNvPr id="4" name="Rounded Rectangle 3"/>
+          <p:cNvSpPr/>
+          <p:nvPr/>
+        </p:nvSpPr>
+        <p:spPr>
+          <a:xfrm>
+            <a:off x="548640" y="1280160"/>
+            <a:ext cx="11338560" cy="4425696"/>
+          </a:xfrm>
+          <a:prstGeom prst="roundRect">
+            <a:avLst>
+              <a:gd name="adj" fmla="val 3500"/>
+            </a:avLst>
+          </a:prstGeom>
+          <a:solidFill>
+            <a:srgbClr val="081626"/>
+          </a:solidFill>
+          <a:ln w="12700">
+            <a:solidFill>
+              <a:srgbClr val="1E3A55"/>
+            </a:solidFill>
+          </a:ln>
+          <a:effectLst/>
+        </p:spPr>
+        <p:style>
+          <a:lnRef idx="1">
+            <a:schemeClr val="accent1"/>
+          </a:lnRef>
+          <a:fillRef idx="3">
+            <a:schemeClr val="accent1"/>
+          </a:fillRef>
+          <a:effectRef idx="2">
+            <a:schemeClr val="accent1"/>
+          </a:effectRef>
+          <a:fontRef idx="minor">
+            <a:schemeClr val="lt1"/>
+          </a:fontRef>
+        </p:style>
+        <p:txBody>
+          <a:bodyPr rtlCol="0" anchor="ctr"/>
+          <a:lstStyle/>
+          <a:p>
+            <a:pPr algn="ctr"/>
+            <a:endParaRPr/>
+          </a:p>
+        </p:txBody>
+      </p:sp>
+      <p:sp>
+        <p:nvSpPr>
+          <p:cNvPr id="5" name="TextBox 4"/>
           <p:cNvSpPr txBox="1"/>
           <p:nvPr/>
         </p:nvSpPr>
         <p:spPr>
           <a:xfrm>
-            <a:off x="914400" y="1828800"/>
-            <a:ext cx="10515600" cy="1188720"/>
+            <a:off x="731520" y="1463040"/>
+            <a:ext cx="10972800" cy="4059936"/>
           </a:xfrm>
           <a:prstGeom prst="rect">
             <a:avLst/>
@@ -21280,37 +21323,390 @@
           </a:bodyPr>
           <a:lstStyle/>
           <a:p>
-            <a:r>
-              <a:rPr sz="4000" b="1">
-                <a:solidFill>
-                  <a:srgbClr val="35C4E8"/>
-                </a:solidFill>
-                <a:latin typeface="Segoe UI"/>
-              </a:rPr>
-              <a:t>~1 ns</a:t>
-            </a:r>
-            <a:r>
-              <a:rPr sz="2000">
-                <a:solidFill>
-                  <a:srgbClr val="D8E2EC"/>
-                </a:solidFill>
-                <a:latin typeface="Segoe UI"/>
-              </a:rPr>
-              <a:t>   per state-function query — fully inlined</a:t>
-            </a:r>
-          </a:p>
-        </p:txBody>
-      </p:sp>
-      <p:sp>
-        <p:nvSpPr>
-          <p:cNvPr id="5" name="TextBox 4"/>
+            <a:pPr>
+              <a:spcAft>
+                <a:spcPts val="100"/>
+              </a:spcAft>
+            </a:pPr>
+            <a:r>
+              <a:rPr sz="1600">
+                <a:solidFill>
+                  <a:srgbClr val="D4D4D4"/>
+                </a:solidFill>
+                <a:latin typeface="Consolas"/>
+              </a:rPr>
+              <a:t>mass1_derivative(...):            </a:t>
+            </a:r>
+            <a:r>
+              <a:rPr sz="1600">
+                <a:solidFill>
+                  <a:srgbClr val="6A9955"/>
+                </a:solidFill>
+                <a:latin typeface="Consolas"/>
+              </a:rPr>
+              <a:t>; returns { dx/dt , dv/dt }</a:t>
+            </a:r>
+          </a:p>
+          <a:p>
+            <a:pPr>
+              <a:spcAft>
+                <a:spcPts val="100"/>
+              </a:spcAft>
+            </a:pPr>
+            <a:r>
+              <a:rPr sz="1600">
+                <a:solidFill>
+                  <a:srgbClr val="D4D4D4"/>
+                </a:solidFill>
+                <a:latin typeface="Consolas"/>
+              </a:rPr>
+              <a:t>    mov   r9,  [sys+112]          </a:t>
+            </a:r>
+            <a:r>
+              <a:rPr sz="1600">
+                <a:solidFill>
+                  <a:srgbClr val="6A9955"/>
+                </a:solidFill>
+                <a:latin typeface="Consolas"/>
+              </a:rPr>
+              <a:t>; spring component</a:t>
+            </a:r>
+          </a:p>
+          <a:p>
+            <a:pPr>
+              <a:spcAft>
+                <a:spcPts val="100"/>
+              </a:spcAft>
+            </a:pPr>
+            <a:r>
+              <a:rPr sz="1600">
+                <a:solidFill>
+                  <a:srgbClr val="D4D4D4"/>
+                </a:solidFill>
+                <a:latin typeface="Consolas"/>
+              </a:rPr>
+              <a:t>    mov   r10, [sys+128]          </a:t>
+            </a:r>
+            <a:r>
+              <a:rPr sz="1600">
+                <a:solidFill>
+                  <a:srgbClr val="6A9955"/>
+                </a:solidFill>
+                <a:latin typeface="Consolas"/>
+              </a:rPr>
+              <a:t>; mass1 component</a:t>
+            </a:r>
+          </a:p>
+          <a:p>
+            <a:pPr>
+              <a:spcAft>
+                <a:spcPts val="100"/>
+              </a:spcAft>
+            </a:pPr>
+            <a:r>
+              <a:rPr sz="1600">
+                <a:solidFill>
+                  <a:srgbClr val="D4D4D4"/>
+                </a:solidFill>
+                <a:latin typeface="Consolas"/>
+              </a:rPr>
+              <a:t>    movsd xmm2, [r9+8]            </a:t>
+            </a:r>
+            <a:r>
+              <a:rPr sz="1600">
+                <a:solidFill>
+                  <a:srgbClr val="6A9955"/>
+                </a:solidFill>
+                <a:latin typeface="Consolas"/>
+              </a:rPr>
+              <a:t>; stiffness k, negated -&gt; -k</a:t>
+            </a:r>
+          </a:p>
+          <a:p>
+            <a:pPr>
+              <a:spcAft>
+                <a:spcPts val="100"/>
+              </a:spcAft>
+            </a:pPr>
+            <a:r>
+              <a:rPr sz="1600">
+                <a:solidFill>
+                  <a:srgbClr val="D4D4D4"/>
+                </a:solidFill>
+                <a:latin typeface="Consolas"/>
+              </a:rPr>
+              <a:t>    xorpd xmm2, [.LC0]</a:t>
+            </a:r>
+          </a:p>
+          <a:p>
+            <a:pPr>
+              <a:spcAft>
+                <a:spcPts val="100"/>
+              </a:spcAft>
+            </a:pPr>
+            <a:r>
+              <a:rPr sz="1600">
+                <a:solidFill>
+                  <a:srgbClr val="D4D4D4"/>
+                </a:solidFill>
+                <a:latin typeface="Consolas"/>
+              </a:rPr>
+              <a:t>    movsd xmm0, [r8+rcx*8]        </a:t>
+            </a:r>
+            <a:r>
+              <a:rPr sz="1600">
+                <a:solidFill>
+                  <a:srgbClr val="6A9955"/>
+                </a:solidFill>
+                <a:latin typeface="Consolas"/>
+              </a:rPr>
+              <a:t>; x1</a:t>
+            </a:r>
+          </a:p>
+          <a:p>
+            <a:pPr>
+              <a:spcAft>
+                <a:spcPts val="100"/>
+              </a:spcAft>
+            </a:pPr>
+            <a:r>
+              <a:rPr sz="1600">
+                <a:solidFill>
+                  <a:srgbClr val="D4D4D4"/>
+                </a:solidFill>
+                <a:latin typeface="Consolas"/>
+              </a:rPr>
+              <a:t>    subsd xmm0, [r8+rdx*8]        </a:t>
+            </a:r>
+            <a:r>
+              <a:rPr sz="1600">
+                <a:solidFill>
+                  <a:srgbClr val="6A9955"/>
+                </a:solidFill>
+                <a:latin typeface="Consolas"/>
+              </a:rPr>
+              <a:t>;   - x2</a:t>
+            </a:r>
+          </a:p>
+          <a:p>
+            <a:pPr>
+              <a:spcAft>
+                <a:spcPts val="100"/>
+              </a:spcAft>
+            </a:pPr>
+            <a:r>
+              <a:rPr sz="1600">
+                <a:solidFill>
+                  <a:srgbClr val="D4D4D4"/>
+                </a:solidFill>
+                <a:latin typeface="Consolas"/>
+              </a:rPr>
+              <a:t>    subsd xmm0, [r9+16]           </a:t>
+            </a:r>
+            <a:r>
+              <a:rPr sz="1600">
+                <a:solidFill>
+                  <a:srgbClr val="6A9955"/>
+                </a:solidFill>
+                <a:latin typeface="Consolas"/>
+              </a:rPr>
+              <a:t>;   - L0       -&gt; extension</a:t>
+            </a:r>
+          </a:p>
+          <a:p>
+            <a:pPr>
+              <a:spcAft>
+                <a:spcPts val="100"/>
+              </a:spcAft>
+            </a:pPr>
+            <a:r>
+              <a:rPr sz="1600">
+                <a:solidFill>
+                  <a:srgbClr val="D4D4D4"/>
+                </a:solidFill>
+                <a:latin typeface="Consolas"/>
+              </a:rPr>
+              <a:t>    movsd xmm1, [r8+rcx*8]        </a:t>
+            </a:r>
+            <a:r>
+              <a:rPr sz="1600">
+                <a:solidFill>
+                  <a:srgbClr val="6A9955"/>
+                </a:solidFill>
+                <a:latin typeface="Consolas"/>
+              </a:rPr>
+              <a:t>; v1           (= dx/dt)</a:t>
+            </a:r>
+          </a:p>
+          <a:p>
+            <a:pPr>
+              <a:spcAft>
+                <a:spcPts val="100"/>
+              </a:spcAft>
+            </a:pPr>
+            <a:r>
+              <a:rPr sz="1600">
+                <a:solidFill>
+                  <a:srgbClr val="D4D4D4"/>
+                </a:solidFill>
+                <a:latin typeface="Consolas"/>
+              </a:rPr>
+              <a:t>    mulsd xmm0, xmm2              </a:t>
+            </a:r>
+            <a:r>
+              <a:rPr sz="1600">
+                <a:solidFill>
+                  <a:srgbClr val="6A9955"/>
+                </a:solidFill>
+                <a:latin typeface="Consolas"/>
+              </a:rPr>
+              <a:t>; -k * extension   (spring force)</a:t>
+            </a:r>
+          </a:p>
+          <a:p>
+            <a:pPr>
+              <a:spcAft>
+                <a:spcPts val="100"/>
+              </a:spcAft>
+            </a:pPr>
+            <a:r>
+              <a:rPr sz="1600">
+                <a:solidFill>
+                  <a:srgbClr val="D4D4D4"/>
+                </a:solidFill>
+                <a:latin typeface="Consolas"/>
+              </a:rPr>
+              <a:t>    comisd xmm3, 0               </a:t>
+            </a:r>
+            <a:r>
+              <a:rPr sz="1600">
+                <a:solidFill>
+                  <a:srgbClr val="6A9955"/>
+                </a:solidFill>
+                <a:latin typeface="Consolas"/>
+              </a:rPr>
+              <a:t>; if (damping &gt; 0)  - c == 0, so</a:t>
+            </a:r>
+          </a:p>
+          <a:p>
+            <a:pPr>
+              <a:spcAft>
+                <a:spcPts val="100"/>
+              </a:spcAft>
+            </a:pPr>
+            <a:r>
+              <a:rPr sz="1600">
+                <a:solidFill>
+                  <a:srgbClr val="D4D4D4"/>
+                </a:solidFill>
+                <a:latin typeface="Consolas"/>
+              </a:rPr>
+              <a:t>    jbe   .Lskip                 </a:t>
+            </a:r>
+            <a:r>
+              <a:rPr sz="1600">
+                <a:solidFill>
+                  <a:srgbClr val="6A9955"/>
+                </a:solidFill>
+                <a:latin typeface="Consolas"/>
+              </a:rPr>
+              <a:t>;   the branch is skipped</a:t>
+            </a:r>
+          </a:p>
+          <a:p>
+            <a:pPr>
+              <a:spcAft>
+                <a:spcPts val="100"/>
+              </a:spcAft>
+            </a:pPr>
+            <a:r>
+              <a:rPr sz="1600">
+                <a:solidFill>
+                  <a:srgbClr val="D4D4D4"/>
+                </a:solidFill>
+                <a:latin typeface="Consolas"/>
+              </a:rPr>
+              <a:t>    divsd xmm0, [r10+8]          </a:t>
+            </a:r>
+            <a:r>
+              <a:rPr sz="1600">
+                <a:solidFill>
+                  <a:srgbClr val="6A9955"/>
+                </a:solidFill>
+                <a:latin typeface="Consolas"/>
+              </a:rPr>
+              <a:t>; force / m1   (= dv/dt)</a:t>
+            </a:r>
+          </a:p>
+          <a:p>
+            <a:pPr>
+              <a:spcAft>
+                <a:spcPts val="100"/>
+              </a:spcAft>
+            </a:pPr>
+            <a:r>
+              <a:rPr sz="1600">
+                <a:solidFill>
+                  <a:srgbClr val="D4D4D4"/>
+                </a:solidFill>
+                <a:latin typeface="Consolas"/>
+              </a:rPr>
+              <a:t>    unpcklpd xmm1, xmm0          </a:t>
+            </a:r>
+            <a:r>
+              <a:rPr sz="1600">
+                <a:solidFill>
+                  <a:srgbClr val="6A9955"/>
+                </a:solidFill>
+                <a:latin typeface="Consolas"/>
+              </a:rPr>
+              <a:t>; pack { v1, a1 }</a:t>
+            </a:r>
+          </a:p>
+          <a:p>
+            <a:pPr>
+              <a:spcAft>
+                <a:spcPts val="100"/>
+              </a:spcAft>
+            </a:pPr>
+            <a:r>
+              <a:rPr sz="1600">
+                <a:solidFill>
+                  <a:srgbClr val="D4D4D4"/>
+                </a:solidFill>
+                <a:latin typeface="Consolas"/>
+              </a:rPr>
+              <a:t>    movups [rax], xmm1</a:t>
+            </a:r>
+          </a:p>
+          <a:p>
+            <a:pPr>
+              <a:spcAft>
+                <a:spcPts val="100"/>
+              </a:spcAft>
+            </a:pPr>
+            <a:r>
+              <a:rPr sz="1600">
+                <a:solidFill>
+                  <a:srgbClr val="D4D4D4"/>
+                </a:solidFill>
+                <a:latin typeface="Consolas"/>
+              </a:rPr>
+              <a:t>    ret</a:t>
+            </a:r>
+          </a:p>
+        </p:txBody>
+      </p:sp>
+      <p:sp>
+        <p:nvSpPr>
+          <p:cNvPr id="7" name="TextBox 6"/>
           <p:cNvSpPr txBox="1"/>
           <p:nvPr/>
         </p:nvSpPr>
         <p:spPr>
           <a:xfrm>
-            <a:off x="914400" y="3154680"/>
-            <a:ext cx="10515600" cy="1188720"/>
+            <a:off x="411480" y="6446520"/>
+            <a:ext cx="10058400" cy="320040"/>
           </a:xfrm>
           <a:prstGeom prst="rect">
             <a:avLst/>
@@ -21324,36 +21720,27 @@
           <a:lstStyle/>
           <a:p>
             <a:r>
-              <a:rPr sz="4000" b="1">
-                <a:solidFill>
-                  <a:srgbClr val="F2C744"/>
-                </a:solidFill>
-                <a:latin typeface="Segoe UI"/>
-              </a:rPr>
-              <a:t>16.7 ms</a:t>
-            </a:r>
-            <a:r>
-              <a:rPr sz="2000">
-                <a:solidFill>
-                  <a:srgbClr val="D8E2EC"/>
-                </a:solidFill>
-                <a:latin typeface="Segoe UI"/>
-              </a:rPr>
-              <a:t>   20 001 RK4 steps of the 4-component oscillator (laptop, -O2)</a:t>
-            </a:r>
-          </a:p>
-        </p:txBody>
-      </p:sp>
-      <p:sp>
-        <p:nvSpPr>
-          <p:cNvPr id="6" name="TextBox 5"/>
+              <a:rPr sz="1000">
+                <a:solidFill>
+                  <a:srgbClr val="8CA3B8"/>
+                </a:solidFill>
+                <a:latin typeface="Segoe UI"/>
+              </a:rPr>
+              <a:t>Separation of Concerns at Zero Cost — ACCU on Sea 2026</a:t>
+            </a:r>
+          </a:p>
+        </p:txBody>
+      </p:sp>
+      <p:sp>
+        <p:nvSpPr>
+          <p:cNvPr id="8" name="TextBox 7"/>
           <p:cNvSpPr txBox="1"/>
           <p:nvPr/>
         </p:nvSpPr>
         <p:spPr>
           <a:xfrm>
-            <a:off x="914400" y="4480560"/>
-            <a:ext cx="3927550" cy="400110"/>
+            <a:off x="11384280" y="6446520"/>
+            <a:ext cx="548640" cy="320040"/>
           </a:xfrm>
           <a:prstGeom prst="rect">
             <a:avLst/>
@@ -21366,43 +21753,29 @@
           </a:bodyPr>
           <a:lstStyle/>
           <a:p>
-            <a:r>
-              <a:rPr sz="4000" b="1">
-                <a:solidFill>
-                  <a:srgbClr val="7EE08A"/>
-                </a:solidFill>
-                <a:latin typeface="Segoe UI"/>
-              </a:rPr>
-              <a:t>1000×</a:t>
-            </a:r>
-            <a:r>
-              <a:rPr sz="2000" b="0">
-                <a:solidFill>
-                  <a:srgbClr val="D8E2EC"/>
-                </a:solidFill>
-                <a:latin typeface="Segoe UI"/>
-              </a:rPr>
-              <a:t>   faster than an equivalent OO C# version</a:t>
-            </a:r>
-            <a:endParaRPr sz="2000" dirty="0">
-              <a:solidFill>
-                <a:srgbClr val="D8E2EC"/>
-              </a:solidFill>
-              <a:latin typeface="Segoe UI"/>
-            </a:endParaRPr>
-          </a:p>
-        </p:txBody>
-      </p:sp>
-      <p:sp>
-        <p:nvSpPr>
-          <p:cNvPr id="7" name="TextBox 6"/>
+            <a:pPr algn="r"/>
+            <a:r>
+              <a:rPr sz="1000">
+                <a:solidFill>
+                  <a:srgbClr val="8CA3B8"/>
+                </a:solidFill>
+                <a:latin typeface="Segoe UI"/>
+              </a:rPr>
+              <a:t>30</a:t>
+            </a:r>
+          </a:p>
+        </p:txBody>
+      </p:sp>
+      <p:sp>
+        <p:nvSpPr>
+          <p:cNvPr id="9" name="asm takeaway"/>
           <p:cNvSpPr txBox="1"/>
           <p:nvPr/>
         </p:nvSpPr>
         <p:spPr>
           <a:xfrm>
-            <a:off x="411480" y="6446520"/>
-            <a:ext cx="10058400" cy="320040"/>
+            <a:off x="731520" y="5833872"/>
+            <a:ext cx="11155680" cy="548640"/>
           </a:xfrm>
           <a:prstGeom prst="rect">
             <a:avLst/>
@@ -21416,48 +21789,13 @@
           <a:lstStyle/>
           <a:p>
             <a:r>
-              <a:rPr sz="1000">
-                <a:solidFill>
-                  <a:srgbClr val="8CA3B8"/>
-                </a:solidFill>
-                <a:latin typeface="Segoe UI"/>
-              </a:rPr>
-              <a:t>Separation of Concerns at Zero Cost — ACCU on Sea 2026</a:t>
-            </a:r>
-          </a:p>
-        </p:txBody>
-      </p:sp>
-      <p:sp>
-        <p:nvSpPr>
-          <p:cNvPr id="8" name="TextBox 7"/>
-          <p:cNvSpPr txBox="1"/>
-          <p:nvPr/>
-        </p:nvSpPr>
-        <p:spPr>
-          <a:xfrm>
-            <a:off x="11384280" y="6446520"/>
-            <a:ext cx="548640" cy="320040"/>
-          </a:xfrm>
-          <a:prstGeom prst="rect">
-            <a:avLst/>
-          </a:prstGeom>
-          <a:noFill/>
-        </p:spPr>
-        <p:txBody>
-          <a:bodyPr wrap="none">
-            <a:spAutoFit/>
-          </a:bodyPr>
-          <a:lstStyle/>
-          <a:p>
-            <a:pPr algn="r"/>
-            <a:r>
-              <a:rPr sz="1000">
-                <a:solidFill>
-                  <a:srgbClr val="8CA3B8"/>
-                </a:solidFill>
-                <a:latin typeface="Segoe UI"/>
-              </a:rPr>
-              <a:t>30</a:t>
+              <a:rPr sz="1900" i="1">
+                <a:solidFill>
+                  <a:srgbClr val="7EE08A"/>
+                </a:solidFill>
+                <a:latin typeface="Segoe UI"/>
+              </a:rPr>
+              <a:t>the whole query chain — spring force, then ÷ mass — is ~15 instructions, no calls.</a:t>
             </a:r>
           </a:p>
         </p:txBody>
@@ -21524,7 +21862,7 @@
                 </a:solidFill>
                 <a:latin typeface="Segoe UI"/>
               </a:rPr>
-              <a:t>FROM THE HANDWRITTEN PLAN</a:t>
+              <a:t>MEASURED, NOT ESTIMATED</a:t>
             </a:r>
           </a:p>
         </p:txBody>
@@ -21558,7 +21896,7 @@
                 </a:solidFill>
                 <a:latin typeface="Segoe UI"/>
               </a:rPr>
-              <a:t>Why C++20 — and not C++26?</a:t>
+              <a:t>Numbers</a:t>
             </a:r>
           </a:p>
         </p:txBody>
@@ -21571,8 +21909,8 @@
         </p:nvSpPr>
         <p:spPr>
           <a:xfrm>
-            <a:off x="548640" y="1737360"/>
-            <a:ext cx="11064240" cy="4572000"/>
+            <a:off x="914400" y="1828800"/>
+            <a:ext cx="10515600" cy="1188720"/>
           </a:xfrm>
           <a:prstGeom prst="rect">
             <a:avLst/>
@@ -21580,213 +21918,28 @@
           <a:noFill/>
         </p:spPr>
         <p:txBody>
-          <a:bodyPr wrap="square">
+          <a:bodyPr wrap="none">
             <a:spAutoFit/>
           </a:bodyPr>
           <a:lstStyle/>
           <a:p>
-            <a:pPr>
-              <a:spcAft>
-                <a:spcPts val="800"/>
-              </a:spcAft>
-            </a:pPr>
-            <a:r>
-              <a:rPr sz="2100">
+            <a:r>
+              <a:rPr sz="4000" b="1">
                 <a:solidFill>
                   <a:srgbClr val="35C4E8"/>
                 </a:solidFill>
                 <a:latin typeface="Segoe UI"/>
               </a:rPr>
-              <a:t>•  </a:t>
-            </a:r>
-            <a:r>
-              <a:rPr sz="2100" b="1">
-                <a:solidFill>
-                  <a:srgbClr val="FFFFFF"/>
-                </a:solidFill>
-                <a:latin typeface="Segoe UI"/>
-              </a:rPr>
-              <a:t>Everything here needs only C++20:</a:t>
-            </a:r>
-          </a:p>
-          <a:p>
-            <a:pPr lvl="1">
-              <a:spcBef>
-                <a:spcPts val="0"/>
-              </a:spcBef>
-              <a:spcAft>
-                <a:spcPts val="800"/>
-              </a:spcAft>
-            </a:pPr>
-            <a:r>
-              <a:rPr sz="1900">
-                <a:solidFill>
-                  <a:srgbClr val="8CA3B8"/>
-                </a:solidFill>
-                <a:latin typeface="Segoe UI"/>
-              </a:rPr>
-              <a:t>–  </a:t>
-            </a:r>
-            <a:r>
-              <a:rPr sz="1900" b="0">
+              <a:t>~1 ns</a:t>
+            </a:r>
+            <a:r>
+              <a:rPr sz="2000">
                 <a:solidFill>
                   <a:srgbClr val="D8E2EC"/>
                 </a:solidFill>
                 <a:latin typeface="Segoe UI"/>
               </a:rPr>
-              <a:t>concepts (the diagnostics!), fold expressions, std::span, CTAD</a:t>
-            </a:r>
-          </a:p>
-          <a:p>
-            <a:pPr>
-              <a:spcAft>
-                <a:spcPts val="800"/>
-              </a:spcAft>
-            </a:pPr>
-            <a:r>
-              <a:rPr sz="2100">
-                <a:solidFill>
-                  <a:srgbClr val="35C4E8"/>
-                </a:solidFill>
-                <a:latin typeface="Segoe UI"/>
-              </a:rPr>
-              <a:t>•  </a:t>
-            </a:r>
-            <a:r>
-              <a:rPr sz="2100" b="1">
-                <a:solidFill>
-                  <a:srgbClr val="FFFFFF"/>
-                </a:solidFill>
-                <a:latin typeface="Segoe UI"/>
-              </a:rPr>
-              <a:t>C++26 reflection (P2996) would remove the remaining boilerplate:</a:t>
-            </a:r>
-          </a:p>
-          <a:p>
-            <a:pPr lvl="1">
-              <a:spcBef>
-                <a:spcPts val="0"/>
-              </a:spcBef>
-              <a:spcAft>
-                <a:spcPts val="800"/>
-              </a:spcAft>
-            </a:pPr>
-            <a:r>
-              <a:rPr sz="1900">
-                <a:solidFill>
-                  <a:srgbClr val="8CA3B8"/>
-                </a:solidFill>
-                <a:latin typeface="Segoe UI"/>
-              </a:rPr>
-              <a:t>–  </a:t>
-            </a:r>
-            <a:r>
-              <a:rPr sz="1900" b="0">
-                <a:solidFill>
-                  <a:srgbClr val="D8E2EC"/>
-                </a:solidFill>
-                <a:latin typeface="Segoe UI"/>
-              </a:rPr>
-              <a:t>tag declarations and compute() registration could be generated</a:t>
-            </a:r>
-          </a:p>
-          <a:p>
-            <a:pPr lvl="1">
-              <a:spcBef>
-                <a:spcPts val="0"/>
-              </a:spcBef>
-              <a:spcAft>
-                <a:spcPts val="800"/>
-              </a:spcAft>
-            </a:pPr>
-            <a:r>
-              <a:rPr sz="1900">
-                <a:solidFill>
-                  <a:srgbClr val="8CA3B8"/>
-                </a:solidFill>
-                <a:latin typeface="Segoe UI"/>
-              </a:rPr>
-              <a:t>–  </a:t>
-            </a:r>
-            <a:r>
-              <a:rPr sz="1900" b="0">
-                <a:solidFill>
-                  <a:srgbClr val="D8E2EC"/>
-                </a:solidFill>
-                <a:latin typeface="Segoe UI"/>
-              </a:rPr>
-              <a:t>we have working experiments in the repo: </a:t>
-            </a:r>
-            <a:r>
-              <a:rPr sz="1900" b="0">
-                <a:solidFill>
-                  <a:srgbClr val="35C4E8"/>
-                </a:solidFill>
-                <a:latin typeface="Segoe UI"/>
-              </a:rPr>
-              <a:t>reflect/</a:t>
-            </a:r>
-          </a:p>
-          <a:p>
-            <a:pPr>
-              <a:spcAft>
-                <a:spcPts val="800"/>
-              </a:spcAft>
-            </a:pPr>
-            <a:r>
-              <a:rPr sz="2100">
-                <a:solidFill>
-                  <a:srgbClr val="35C4E8"/>
-                </a:solidFill>
-                <a:latin typeface="Segoe UI"/>
-              </a:rPr>
-              <a:t>•  </a:t>
-            </a:r>
-            <a:r>
-              <a:rPr sz="2100" b="0">
-                <a:solidFill>
-                  <a:srgbClr val="FFFFFF"/>
-                </a:solidFill>
-                <a:latin typeface="Segoe UI"/>
-              </a:rPr>
-              <a:t>But flight software ships on the toolchain you have, </a:t>
-            </a:r>
-            <a:r>
-              <a:rPr sz="2100" b="1">
-                <a:solidFill>
-                  <a:srgbClr val="F2C744"/>
-                </a:solidFill>
-                <a:latin typeface="Segoe UI"/>
-              </a:rPr>
-              <a:t>not the one you want</a:t>
-            </a:r>
-          </a:p>
-          <a:p>
-            <a:pPr lvl="1">
-              <a:spcBef>
-                <a:spcPts val="0"/>
-              </a:spcBef>
-              <a:spcAft>
-                <a:spcPts val="800"/>
-              </a:spcAft>
-            </a:pPr>
-            <a:r>
-              <a:rPr sz="1900">
-                <a:solidFill>
-                  <a:srgbClr val="8CA3B8"/>
-                </a:solidFill>
-                <a:latin typeface="Segoe UI"/>
-              </a:rPr>
-              <a:t>–  </a:t>
-            </a:r>
-            <a:r>
-              <a:rPr sz="1900" b="0">
-                <a:solidFill>
-                  <a:srgbClr val="D8E2EC"/>
-                </a:solidFill>
-                <a:latin typeface="Segoe UI"/>
-              </a:rPr>
-              <a:t>embedded / cross targets lag years behind; certification lags more</a:t>
+              <a:t>   per state-function query — fully inlined</a:t>
             </a:r>
           </a:p>
         </p:txBody>
@@ -21799,8 +21952,8 @@
         </p:nvSpPr>
         <p:spPr>
           <a:xfrm>
-            <a:off x="411480" y="6446520"/>
-            <a:ext cx="10058400" cy="320040"/>
+            <a:off x="914400" y="3154680"/>
+            <a:ext cx="10515600" cy="1188720"/>
           </a:xfrm>
           <a:prstGeom prst="rect">
             <a:avLst/>
@@ -21814,6 +21967,98 @@
           <a:lstStyle/>
           <a:p>
             <a:r>
+              <a:rPr sz="4000" b="1">
+                <a:solidFill>
+                  <a:srgbClr val="F2C744"/>
+                </a:solidFill>
+                <a:latin typeface="Segoe UI"/>
+              </a:rPr>
+              <a:t>16.7 ms</a:t>
+            </a:r>
+            <a:r>
+              <a:rPr sz="2000">
+                <a:solidFill>
+                  <a:srgbClr val="D8E2EC"/>
+                </a:solidFill>
+                <a:latin typeface="Segoe UI"/>
+              </a:rPr>
+              <a:t>   20 001 RK4 steps of the 4-component oscillator (laptop, -O2)</a:t>
+            </a:r>
+          </a:p>
+        </p:txBody>
+      </p:sp>
+      <p:sp>
+        <p:nvSpPr>
+          <p:cNvPr id="6" name="TextBox 5"/>
+          <p:cNvSpPr txBox="1"/>
+          <p:nvPr/>
+        </p:nvSpPr>
+        <p:spPr>
+          <a:xfrm>
+            <a:off x="914400" y="4480560"/>
+            <a:ext cx="3927550" cy="400110"/>
+          </a:xfrm>
+          <a:prstGeom prst="rect">
+            <a:avLst/>
+          </a:prstGeom>
+          <a:noFill/>
+        </p:spPr>
+        <p:txBody>
+          <a:bodyPr wrap="none">
+            <a:spAutoFit/>
+          </a:bodyPr>
+          <a:lstStyle/>
+          <a:p>
+            <a:r>
+              <a:rPr sz="4000" b="1">
+                <a:solidFill>
+                  <a:srgbClr val="7EE08A"/>
+                </a:solidFill>
+                <a:latin typeface="Segoe UI"/>
+              </a:rPr>
+              <a:t>1000×</a:t>
+            </a:r>
+            <a:r>
+              <a:rPr sz="2000" b="0">
+                <a:solidFill>
+                  <a:srgbClr val="D8E2EC"/>
+                </a:solidFill>
+                <a:latin typeface="Segoe UI"/>
+              </a:rPr>
+              <a:t>   faster than an equivalent OO C# version</a:t>
+            </a:r>
+            <a:endParaRPr sz="2000" dirty="0">
+              <a:solidFill>
+                <a:srgbClr val="D8E2EC"/>
+              </a:solidFill>
+              <a:latin typeface="Segoe UI"/>
+            </a:endParaRPr>
+          </a:p>
+        </p:txBody>
+      </p:sp>
+      <p:sp>
+        <p:nvSpPr>
+          <p:cNvPr id="7" name="TextBox 6"/>
+          <p:cNvSpPr txBox="1"/>
+          <p:nvPr/>
+        </p:nvSpPr>
+        <p:spPr>
+          <a:xfrm>
+            <a:off x="411480" y="6446520"/>
+            <a:ext cx="10058400" cy="320040"/>
+          </a:xfrm>
+          <a:prstGeom prst="rect">
+            <a:avLst/>
+          </a:prstGeom>
+          <a:noFill/>
+        </p:spPr>
+        <p:txBody>
+          <a:bodyPr wrap="none">
+            <a:spAutoFit/>
+          </a:bodyPr>
+          <a:lstStyle/>
+          <a:p>
+            <a:r>
               <a:rPr sz="1000">
                 <a:solidFill>
                   <a:srgbClr val="8CA3B8"/>
@@ -21827,7 +22072,7 @@
       </p:sp>
       <p:sp>
         <p:nvSpPr>
-          <p:cNvPr id="6" name="TextBox 5"/>
+          <p:cNvPr id="8" name="TextBox 7"/>
           <p:cNvSpPr txBox="1"/>
           <p:nvPr/>
         </p:nvSpPr>
@@ -21901,8 +22146,8 @@
         </p:nvSpPr>
         <p:spPr>
           <a:xfrm>
-            <a:off x="640080" y="1463040"/>
-            <a:ext cx="3291840" cy="3108960"/>
+            <a:off x="502920" y="384048"/>
+            <a:ext cx="11155680" cy="292608"/>
           </a:xfrm>
           <a:prstGeom prst="rect">
             <a:avLst/>
@@ -21916,13 +22161,13 @@
           <a:lstStyle/>
           <a:p>
             <a:r>
-              <a:rPr sz="17000" b="1">
-                <a:solidFill>
-                  <a:srgbClr val="14324E"/>
-                </a:solidFill>
-                <a:latin typeface="Segoe UI"/>
-              </a:rPr>
-              <a:t>07</a:t>
+              <a:rPr sz="1300" b="1">
+                <a:solidFill>
+                  <a:srgbClr val="F2C744"/>
+                </a:solidFill>
+                <a:latin typeface="Segoe UI"/>
+              </a:rPr>
+              <a:t>FROM THE HANDWRITTEN PLAN</a:t>
             </a:r>
           </a:p>
         </p:txBody>
@@ -21935,8 +22180,8 @@
         </p:nvSpPr>
         <p:spPr>
           <a:xfrm>
-            <a:off x="3749039" y="2377440"/>
-            <a:ext cx="7863840" cy="1280160"/>
+            <a:off x="457200" y="694944"/>
+            <a:ext cx="11247120" cy="777240"/>
           </a:xfrm>
           <a:prstGeom prst="rect">
             <a:avLst/>
@@ -21950,13 +22195,13 @@
           <a:lstStyle/>
           <a:p>
             <a:r>
-              <a:rPr sz="4400" b="1">
+              <a:rPr sz="3100" b="1">
                 <a:solidFill>
                   <a:srgbClr val="FFFFFF"/>
                 </a:solidFill>
                 <a:latin typeface="Segoe UI"/>
               </a:rPr>
-              <a:t>Where It Scales</a:t>
+              <a:t>Why C++20 — and not C++26?</a:t>
             </a:r>
           </a:p>
         </p:txBody>
@@ -21969,8 +22214,8 @@
         </p:nvSpPr>
         <p:spPr>
           <a:xfrm>
-            <a:off x="3794760" y="3429000"/>
-            <a:ext cx="7772400" cy="822960"/>
+            <a:off x="548640" y="1737360"/>
+            <a:ext cx="11064240" cy="4572000"/>
           </a:xfrm>
           <a:prstGeom prst="rect">
             <a:avLst/>
@@ -21978,19 +22223,213 @@
           <a:noFill/>
         </p:spPr>
         <p:txBody>
-          <a:bodyPr wrap="none">
+          <a:bodyPr wrap="square">
             <a:spAutoFit/>
           </a:bodyPr>
           <a:lstStyle/>
           <a:p>
-            <a:r>
-              <a:rPr sz="2000">
+            <a:pPr>
+              <a:spcAft>
+                <a:spcPts val="800"/>
+              </a:spcAft>
+            </a:pPr>
+            <a:r>
+              <a:rPr sz="2100">
+                <a:solidFill>
+                  <a:srgbClr val="35C4E8"/>
+                </a:solidFill>
+                <a:latin typeface="Segoe UI"/>
+              </a:rPr>
+              <a:t>•  </a:t>
+            </a:r>
+            <a:r>
+              <a:rPr sz="2100" b="1">
+                <a:solidFill>
+                  <a:srgbClr val="FFFFFF"/>
+                </a:solidFill>
+                <a:latin typeface="Segoe UI"/>
+              </a:rPr>
+              <a:t>Everything here needs only C++20:</a:t>
+            </a:r>
+          </a:p>
+          <a:p>
+            <a:pPr lvl="1">
+              <a:spcBef>
+                <a:spcPts val="0"/>
+              </a:spcBef>
+              <a:spcAft>
+                <a:spcPts val="800"/>
+              </a:spcAft>
+            </a:pPr>
+            <a:r>
+              <a:rPr sz="1900">
                 <a:solidFill>
                   <a:srgbClr val="8CA3B8"/>
                 </a:solidFill>
                 <a:latin typeface="Segoe UI"/>
               </a:rPr>
-              <a:t>From two masses to a flying vehicle</a:t>
+              <a:t>–  </a:t>
+            </a:r>
+            <a:r>
+              <a:rPr sz="1900" b="0">
+                <a:solidFill>
+                  <a:srgbClr val="D8E2EC"/>
+                </a:solidFill>
+                <a:latin typeface="Segoe UI"/>
+              </a:rPr>
+              <a:t>concepts (the diagnostics!), fold expressions, std::span, CTAD</a:t>
+            </a:r>
+          </a:p>
+          <a:p>
+            <a:pPr>
+              <a:spcAft>
+                <a:spcPts val="800"/>
+              </a:spcAft>
+            </a:pPr>
+            <a:r>
+              <a:rPr sz="2100">
+                <a:solidFill>
+                  <a:srgbClr val="35C4E8"/>
+                </a:solidFill>
+                <a:latin typeface="Segoe UI"/>
+              </a:rPr>
+              <a:t>•  </a:t>
+            </a:r>
+            <a:r>
+              <a:rPr sz="2100" b="1">
+                <a:solidFill>
+                  <a:srgbClr val="FFFFFF"/>
+                </a:solidFill>
+                <a:latin typeface="Segoe UI"/>
+              </a:rPr>
+              <a:t>C++26 reflection (P2996) would remove the remaining boilerplate:</a:t>
+            </a:r>
+          </a:p>
+          <a:p>
+            <a:pPr lvl="1">
+              <a:spcBef>
+                <a:spcPts val="0"/>
+              </a:spcBef>
+              <a:spcAft>
+                <a:spcPts val="800"/>
+              </a:spcAft>
+            </a:pPr>
+            <a:r>
+              <a:rPr sz="1900">
+                <a:solidFill>
+                  <a:srgbClr val="8CA3B8"/>
+                </a:solidFill>
+                <a:latin typeface="Segoe UI"/>
+              </a:rPr>
+              <a:t>–  </a:t>
+            </a:r>
+            <a:r>
+              <a:rPr sz="1900" b="0">
+                <a:solidFill>
+                  <a:srgbClr val="D8E2EC"/>
+                </a:solidFill>
+                <a:latin typeface="Segoe UI"/>
+              </a:rPr>
+              <a:t>tag declarations and compute() registration could be generated</a:t>
+            </a:r>
+          </a:p>
+          <a:p>
+            <a:pPr lvl="1">
+              <a:spcBef>
+                <a:spcPts val="0"/>
+              </a:spcBef>
+              <a:spcAft>
+                <a:spcPts val="800"/>
+              </a:spcAft>
+            </a:pPr>
+            <a:r>
+              <a:rPr sz="1900">
+                <a:solidFill>
+                  <a:srgbClr val="8CA3B8"/>
+                </a:solidFill>
+                <a:latin typeface="Segoe UI"/>
+              </a:rPr>
+              <a:t>–  </a:t>
+            </a:r>
+            <a:r>
+              <a:rPr sz="1900" b="0">
+                <a:solidFill>
+                  <a:srgbClr val="D8E2EC"/>
+                </a:solidFill>
+                <a:latin typeface="Segoe UI"/>
+              </a:rPr>
+              <a:t>we have working experiments in the repo: </a:t>
+            </a:r>
+            <a:r>
+              <a:rPr sz="1900" b="0">
+                <a:solidFill>
+                  <a:srgbClr val="35C4E8"/>
+                </a:solidFill>
+                <a:latin typeface="Segoe UI"/>
+              </a:rPr>
+              <a:t>reflect/</a:t>
+            </a:r>
+          </a:p>
+          <a:p>
+            <a:pPr>
+              <a:spcAft>
+                <a:spcPts val="800"/>
+              </a:spcAft>
+            </a:pPr>
+            <a:r>
+              <a:rPr sz="2100">
+                <a:solidFill>
+                  <a:srgbClr val="35C4E8"/>
+                </a:solidFill>
+                <a:latin typeface="Segoe UI"/>
+              </a:rPr>
+              <a:t>•  </a:t>
+            </a:r>
+            <a:r>
+              <a:rPr sz="2100" b="0">
+                <a:solidFill>
+                  <a:srgbClr val="FFFFFF"/>
+                </a:solidFill>
+                <a:latin typeface="Segoe UI"/>
+              </a:rPr>
+              <a:t>But flight software ships on the toolchain you have, </a:t>
+            </a:r>
+            <a:r>
+              <a:rPr sz="2100" b="1">
+                <a:solidFill>
+                  <a:srgbClr val="F2C744"/>
+                </a:solidFill>
+                <a:latin typeface="Segoe UI"/>
+              </a:rPr>
+              <a:t>not the one you want</a:t>
+            </a:r>
+          </a:p>
+          <a:p>
+            <a:pPr lvl="1">
+              <a:spcBef>
+                <a:spcPts val="0"/>
+              </a:spcBef>
+              <a:spcAft>
+                <a:spcPts val="800"/>
+              </a:spcAft>
+            </a:pPr>
+            <a:r>
+              <a:rPr sz="1900">
+                <a:solidFill>
+                  <a:srgbClr val="8CA3B8"/>
+                </a:solidFill>
+                <a:latin typeface="Segoe UI"/>
+              </a:rPr>
+              <a:t>–  </a:t>
+            </a:r>
+            <a:r>
+              <a:rPr sz="1900" b="0">
+                <a:solidFill>
+                  <a:srgbClr val="D8E2EC"/>
+                </a:solidFill>
+                <a:latin typeface="Segoe UI"/>
+              </a:rPr>
+              <a:t>embedded / cross targets lag years behind; certification lags more</a:t>
             </a:r>
           </a:p>
         </p:txBody>
@@ -22003,8 +22442,8 @@
         </p:nvSpPr>
         <p:spPr>
           <a:xfrm>
-            <a:off x="3794760" y="4206240"/>
-            <a:ext cx="3657600" cy="457200"/>
+            <a:off x="411480" y="6446520"/>
+            <a:ext cx="10058400" cy="320040"/>
           </a:xfrm>
           <a:prstGeom prst="rect">
             <a:avLst/>
@@ -22018,85 +22457,6 @@
           <a:lstStyle/>
           <a:p>
             <a:r>
-              <a:rPr sz="1500" b="1">
-                <a:solidFill>
-                  <a:srgbClr val="F2C744"/>
-                </a:solidFill>
-                <a:latin typeface="Segoe UI"/>
-              </a:rPr>
-              <a:t>≈ 7 min</a:t>
-            </a:r>
-          </a:p>
-        </p:txBody>
-      </p:sp>
-      <p:sp>
-        <p:nvSpPr>
-          <p:cNvPr id="6" name="Rectangle 5"/>
-          <p:cNvSpPr/>
-          <p:nvPr/>
-        </p:nvSpPr>
-        <p:spPr>
-          <a:xfrm>
-            <a:off x="3794760" y="2240280"/>
-            <a:ext cx="1463040" cy="50800"/>
-          </a:xfrm>
-          <a:prstGeom prst="rect">
-            <a:avLst/>
-          </a:prstGeom>
-          <a:solidFill>
-            <a:srgbClr val="F2C744"/>
-          </a:solidFill>
-          <a:ln>
-            <a:noFill/>
-          </a:ln>
-          <a:effectLst/>
-        </p:spPr>
-        <p:style>
-          <a:lnRef idx="1">
-            <a:schemeClr val="accent1"/>
-          </a:lnRef>
-          <a:fillRef idx="3">
-            <a:schemeClr val="accent1"/>
-          </a:fillRef>
-          <a:effectRef idx="2">
-            <a:schemeClr val="accent1"/>
-          </a:effectRef>
-          <a:fontRef idx="minor">
-            <a:schemeClr val="lt1"/>
-          </a:fontRef>
-        </p:style>
-        <p:txBody>
-          <a:bodyPr rtlCol="0" anchor="ctr"/>
-          <a:lstStyle/>
-          <a:p>
-            <a:pPr algn="ctr"/>
-            <a:endParaRPr/>
-          </a:p>
-        </p:txBody>
-      </p:sp>
-      <p:sp>
-        <p:nvSpPr>
-          <p:cNvPr id="7" name="TextBox 6"/>
-          <p:cNvSpPr txBox="1"/>
-          <p:nvPr/>
-        </p:nvSpPr>
-        <p:spPr>
-          <a:xfrm>
-            <a:off x="411480" y="6446520"/>
-            <a:ext cx="10058400" cy="320040"/>
-          </a:xfrm>
-          <a:prstGeom prst="rect">
-            <a:avLst/>
-          </a:prstGeom>
-          <a:noFill/>
-        </p:spPr>
-        <p:txBody>
-          <a:bodyPr wrap="none">
-            <a:spAutoFit/>
-          </a:bodyPr>
-          <a:lstStyle/>
-          <a:p>
-            <a:r>
               <a:rPr sz="1000">
                 <a:solidFill>
                   <a:srgbClr val="8CA3B8"/>
@@ -22110,7 +22470,7 @@
       </p:sp>
       <p:sp>
         <p:nvSpPr>
-          <p:cNvPr id="8" name="TextBox 7"/>
+          <p:cNvPr id="6" name="TextBox 5"/>
           <p:cNvSpPr txBox="1"/>
           <p:nvPr/>
         </p:nvSpPr>
@@ -22184,8 +22544,8 @@
         </p:nvSpPr>
         <p:spPr>
           <a:xfrm>
-            <a:off x="502920" y="384048"/>
-            <a:ext cx="11155680" cy="292608"/>
+            <a:off x="640080" y="1463040"/>
+            <a:ext cx="3291840" cy="3108960"/>
           </a:xfrm>
           <a:prstGeom prst="rect">
             <a:avLst/>
@@ -22199,13 +22559,13 @@
           <a:lstStyle/>
           <a:p>
             <a:r>
-              <a:rPr sz="1300" b="1">
-                <a:solidFill>
-                  <a:srgbClr val="F2C744"/>
-                </a:solidFill>
-                <a:latin typeface="Segoe UI"/>
-              </a:rPr>
-              <a:t>PRODUCTION, NOT PROMO</a:t>
+              <a:rPr sz="17000" b="1">
+                <a:solidFill>
+                  <a:srgbClr val="14324E"/>
+                </a:solidFill>
+                <a:latin typeface="Segoe UI"/>
+              </a:rPr>
+              <a:t>07</a:t>
             </a:r>
           </a:p>
         </p:txBody>
@@ -22218,8 +22578,8 @@
         </p:nvSpPr>
         <p:spPr>
           <a:xfrm>
-            <a:off x="457200" y="694944"/>
-            <a:ext cx="11247120" cy="777240"/>
+            <a:off x="3749039" y="2377440"/>
+            <a:ext cx="7863840" cy="1280160"/>
           </a:xfrm>
           <a:prstGeom prst="rect">
             <a:avLst/>
@@ -22233,40 +22593,104 @@
           <a:lstStyle/>
           <a:p>
             <a:r>
-              <a:rPr sz="3100" b="1">
+              <a:rPr sz="4400" b="1">
                 <a:solidFill>
                   <a:srgbClr val="FFFFFF"/>
                 </a:solidFill>
                 <a:latin typeface="Segoe UI"/>
               </a:rPr>
-              <a:t>Same pattern, real vehicle: 6-DOF rocket</a:t>
-            </a:r>
-          </a:p>
-        </p:txBody>
-      </p:sp>
-      <p:sp>
-        <p:nvSpPr>
-          <p:cNvPr id="4" name="Rounded Rectangle 3"/>
+              <a:t>Where It Scales</a:t>
+            </a:r>
+          </a:p>
+        </p:txBody>
+      </p:sp>
+      <p:sp>
+        <p:nvSpPr>
+          <p:cNvPr id="4" name="TextBox 3"/>
+          <p:cNvSpPr txBox="1"/>
+          <p:nvPr/>
+        </p:nvSpPr>
+        <p:spPr>
+          <a:xfrm>
+            <a:off x="3794760" y="3429000"/>
+            <a:ext cx="7772400" cy="822960"/>
+          </a:xfrm>
+          <a:prstGeom prst="rect">
+            <a:avLst/>
+          </a:prstGeom>
+          <a:noFill/>
+        </p:spPr>
+        <p:txBody>
+          <a:bodyPr wrap="none">
+            <a:spAutoFit/>
+          </a:bodyPr>
+          <a:lstStyle/>
+          <a:p>
+            <a:r>
+              <a:rPr sz="2000">
+                <a:solidFill>
+                  <a:srgbClr val="8CA3B8"/>
+                </a:solidFill>
+                <a:latin typeface="Segoe UI"/>
+              </a:rPr>
+              <a:t>From two masses to a flying vehicle</a:t>
+            </a:r>
+          </a:p>
+        </p:txBody>
+      </p:sp>
+      <p:sp>
+        <p:nvSpPr>
+          <p:cNvPr id="5" name="TextBox 4"/>
+          <p:cNvSpPr txBox="1"/>
+          <p:nvPr/>
+        </p:nvSpPr>
+        <p:spPr>
+          <a:xfrm>
+            <a:off x="3794760" y="4206240"/>
+            <a:ext cx="3657600" cy="457200"/>
+          </a:xfrm>
+          <a:prstGeom prst="rect">
+            <a:avLst/>
+          </a:prstGeom>
+          <a:noFill/>
+        </p:spPr>
+        <p:txBody>
+          <a:bodyPr wrap="none">
+            <a:spAutoFit/>
+          </a:bodyPr>
+          <a:lstStyle/>
+          <a:p>
+            <a:r>
+              <a:rPr sz="1500" b="1">
+                <a:solidFill>
+                  <a:srgbClr val="F2C744"/>
+                </a:solidFill>
+                <a:latin typeface="Segoe UI"/>
+              </a:rPr>
+              <a:t>≈ 7 min</a:t>
+            </a:r>
+          </a:p>
+        </p:txBody>
+      </p:sp>
+      <p:sp>
+        <p:nvSpPr>
+          <p:cNvPr id="6" name="Rectangle 5"/>
           <p:cNvSpPr/>
           <p:nvPr/>
         </p:nvSpPr>
         <p:spPr>
           <a:xfrm>
-            <a:off x="640080" y="1645920"/>
-            <a:ext cx="2926080" cy="640080"/>
-          </a:xfrm>
-          <a:prstGeom prst="roundRect">
-            <a:avLst>
-              <a:gd name="adj" fmla="val 10000"/>
-            </a:avLst>
+            <a:off x="3794760" y="2240280"/>
+            <a:ext cx="1463040" cy="50800"/>
+          </a:xfrm>
+          <a:prstGeom prst="rect">
+            <a:avLst/>
           </a:prstGeom>
           <a:solidFill>
-            <a:srgbClr val="081626"/>
+            <a:srgbClr val="F2C744"/>
           </a:solidFill>
-          <a:ln w="12700">
-            <a:solidFill>
-              <a:srgbClr val="1E3A55"/>
-            </a:solidFill>
+          <a:ln>
+            <a:noFill/>
           </a:ln>
           <a:effectLst/>
         </p:spPr>
@@ -22285,579 +22709,24 @@
           </a:fontRef>
         </p:style>
         <p:txBody>
-          <a:bodyPr wrap="square" rtlCol="0" anchor="ctr"/>
+          <a:bodyPr rtlCol="0" anchor="ctr"/>
           <a:lstStyle/>
           <a:p>
             <a:pPr algn="ctr"/>
-            <a:r>
-              <a:rPr sz="1400" b="1">
-                <a:solidFill>
-                  <a:srgbClr val="35C4E8"/>
-                </a:solidFill>
-                <a:latin typeface="Segoe UI"/>
-              </a:rPr>
-              <a:t>StandardAtmosphere</a:t>
-            </a:r>
-          </a:p>
-        </p:txBody>
-      </p:sp>
-      <p:sp>
-        <p:nvSpPr>
-          <p:cNvPr id="5" name="Rounded Rectangle 4"/>
-          <p:cNvSpPr/>
-          <p:nvPr/>
-        </p:nvSpPr>
-        <p:spPr>
-          <a:xfrm>
-            <a:off x="640080" y="2468880"/>
-            <a:ext cx="2926080" cy="640080"/>
-          </a:xfrm>
-          <a:prstGeom prst="roundRect">
-            <a:avLst>
-              <a:gd name="adj" fmla="val 10000"/>
-            </a:avLst>
-          </a:prstGeom>
-          <a:solidFill>
-            <a:srgbClr val="081626"/>
-          </a:solidFill>
-          <a:ln w="12700">
-            <a:solidFill>
-              <a:srgbClr val="1E3A55"/>
-            </a:solidFill>
-          </a:ln>
-          <a:effectLst/>
-        </p:spPr>
-        <p:style>
-          <a:lnRef idx="1">
-            <a:schemeClr val="accent1"/>
-          </a:lnRef>
-          <a:fillRef idx="3">
-            <a:schemeClr val="accent1"/>
-          </a:fillRef>
-          <a:effectRef idx="2">
-            <a:schemeClr val="accent1"/>
-          </a:effectRef>
-          <a:fontRef idx="minor">
-            <a:schemeClr val="lt1"/>
-          </a:fontRef>
-        </p:style>
-        <p:txBody>
-          <a:bodyPr wrap="square" rtlCol="0" anchor="ctr"/>
-          <a:lstStyle/>
-          <a:p>
-            <a:pPr algn="ctr"/>
-            <a:r>
-              <a:rPr sz="1400" b="1">
-                <a:solidFill>
-                  <a:srgbClr val="35C4E8"/>
-                </a:solidFill>
-                <a:latin typeface="Segoe UI"/>
-              </a:rPr>
-              <a:t>AxisymmetricAero</a:t>
-            </a:r>
-          </a:p>
-        </p:txBody>
-      </p:sp>
-      <p:sp>
-        <p:nvSpPr>
-          <p:cNvPr id="6" name="Rounded Rectangle 5"/>
-          <p:cNvSpPr/>
-          <p:nvPr/>
-        </p:nvSpPr>
-        <p:spPr>
-          <a:xfrm>
-            <a:off x="640080" y="3291840"/>
-            <a:ext cx="2926080" cy="640080"/>
-          </a:xfrm>
-          <a:prstGeom prst="roundRect">
-            <a:avLst>
-              <a:gd name="adj" fmla="val 10000"/>
-            </a:avLst>
-          </a:prstGeom>
-          <a:solidFill>
-            <a:srgbClr val="081626"/>
-          </a:solidFill>
-          <a:ln w="12700">
-            <a:solidFill>
-              <a:srgbClr val="1E3A55"/>
-            </a:solidFill>
-          </a:ln>
-          <a:effectLst/>
-        </p:spPr>
-        <p:style>
-          <a:lnRef idx="1">
-            <a:schemeClr val="accent1"/>
-          </a:lnRef>
-          <a:fillRef idx="3">
-            <a:schemeClr val="accent1"/>
-          </a:fillRef>
-          <a:effectRef idx="2">
-            <a:schemeClr val="accent1"/>
-          </a:effectRef>
-          <a:fontRef idx="minor">
-            <a:schemeClr val="lt1"/>
-          </a:fontRef>
-        </p:style>
-        <p:txBody>
-          <a:bodyPr wrap="square" rtlCol="0" anchor="ctr"/>
-          <a:lstStyle/>
-          <a:p>
-            <a:pPr algn="ctr"/>
-            <a:r>
-              <a:rPr sz="1400" b="1">
-                <a:solidFill>
-                  <a:srgbClr val="35C4E8"/>
-                </a:solidFill>
-                <a:latin typeface="Segoe UI"/>
-              </a:rPr>
-              <a:t>InterpolatedEngine</a:t>
-            </a:r>
-          </a:p>
-        </p:txBody>
-      </p:sp>
-      <p:sp>
-        <p:nvSpPr>
-          <p:cNvPr id="7" name="Rounded Rectangle 6"/>
-          <p:cNvSpPr/>
-          <p:nvPr/>
-        </p:nvSpPr>
-        <p:spPr>
-          <a:xfrm>
-            <a:off x="640080" y="4114800"/>
-            <a:ext cx="2926080" cy="640080"/>
-          </a:xfrm>
-          <a:prstGeom prst="roundRect">
-            <a:avLst>
-              <a:gd name="adj" fmla="val 10000"/>
-            </a:avLst>
-          </a:prstGeom>
-          <a:solidFill>
-            <a:srgbClr val="081626"/>
-          </a:solidFill>
-          <a:ln w="12700">
-            <a:solidFill>
-              <a:srgbClr val="1E3A55"/>
-            </a:solidFill>
-          </a:ln>
-          <a:effectLst/>
-        </p:spPr>
-        <p:style>
-          <a:lnRef idx="1">
-            <a:schemeClr val="accent1"/>
-          </a:lnRef>
-          <a:fillRef idx="3">
-            <a:schemeClr val="accent1"/>
-          </a:fillRef>
-          <a:effectRef idx="2">
-            <a:schemeClr val="accent1"/>
-          </a:effectRef>
-          <a:fontRef idx="minor">
-            <a:schemeClr val="lt1"/>
-          </a:fontRef>
-        </p:style>
-        <p:txBody>
-          <a:bodyPr wrap="square" rtlCol="0" anchor="ctr"/>
-          <a:lstStyle/>
-          <a:p>
-            <a:pPr algn="ctr"/>
-            <a:r>
-              <a:rPr sz="1400" b="1">
-                <a:solidFill>
-                  <a:srgbClr val="35C4E8"/>
-                </a:solidFill>
-                <a:latin typeface="Segoe UI"/>
-              </a:rPr>
-              <a:t>Gravity</a:t>
-            </a:r>
-          </a:p>
-        </p:txBody>
-      </p:sp>
-      <p:sp>
-        <p:nvSpPr>
-          <p:cNvPr id="8" name="Rounded Rectangle 7"/>
-          <p:cNvSpPr/>
-          <p:nvPr/>
-        </p:nvSpPr>
-        <p:spPr>
-          <a:xfrm>
-            <a:off x="4206240" y="2880360"/>
-            <a:ext cx="2926080" cy="640080"/>
-          </a:xfrm>
-          <a:prstGeom prst="roundRect">
-            <a:avLst>
-              <a:gd name="adj" fmla="val 10000"/>
-            </a:avLst>
-          </a:prstGeom>
-          <a:solidFill>
-            <a:srgbClr val="081626"/>
-          </a:solidFill>
-          <a:ln w="12700">
-            <a:solidFill>
-              <a:srgbClr val="1E3A55"/>
-            </a:solidFill>
-          </a:ln>
-          <a:effectLst/>
-        </p:spPr>
-        <p:style>
-          <a:lnRef idx="1">
-            <a:schemeClr val="accent1"/>
-          </a:lnRef>
-          <a:fillRef idx="3">
-            <a:schemeClr val="accent1"/>
-          </a:fillRef>
-          <a:effectRef idx="2">
-            <a:schemeClr val="accent1"/>
-          </a:effectRef>
-          <a:fontRef idx="minor">
-            <a:schemeClr val="lt1"/>
-          </a:fontRef>
-        </p:style>
-        <p:txBody>
-          <a:bodyPr wrap="square" rtlCol="0" anchor="ctr"/>
-          <a:lstStyle/>
-          <a:p>
-            <a:pPr algn="ctr"/>
-            <a:r>
-              <a:rPr sz="1400" b="1">
-                <a:solidFill>
-                  <a:srgbClr val="F2C744"/>
-                </a:solidFill>
-                <a:latin typeface="Segoe UI"/>
-              </a:rPr>
-              <a:t>ForceAggregator</a:t>
-            </a:r>
-          </a:p>
-        </p:txBody>
-      </p:sp>
-      <p:sp>
-        <p:nvSpPr>
-          <p:cNvPr id="9" name="Rounded Rectangle 8"/>
-          <p:cNvSpPr/>
-          <p:nvPr/>
-        </p:nvSpPr>
-        <p:spPr>
-          <a:xfrm>
-            <a:off x="7589520" y="2057400"/>
-            <a:ext cx="2926080" cy="640080"/>
-          </a:xfrm>
-          <a:prstGeom prst="roundRect">
-            <a:avLst>
-              <a:gd name="adj" fmla="val 10000"/>
-            </a:avLst>
-          </a:prstGeom>
-          <a:solidFill>
-            <a:srgbClr val="081626"/>
-          </a:solidFill>
-          <a:ln w="12700">
-            <a:solidFill>
-              <a:srgbClr val="1E3A55"/>
-            </a:solidFill>
-          </a:ln>
-          <a:effectLst/>
-        </p:spPr>
-        <p:style>
-          <a:lnRef idx="1">
-            <a:schemeClr val="accent1"/>
-          </a:lnRef>
-          <a:fillRef idx="3">
-            <a:schemeClr val="accent1"/>
-          </a:fillRef>
-          <a:effectRef idx="2">
-            <a:schemeClr val="accent1"/>
-          </a:effectRef>
-          <a:fontRef idx="minor">
-            <a:schemeClr val="lt1"/>
-          </a:fontRef>
-        </p:style>
-        <p:txBody>
-          <a:bodyPr wrap="square" rtlCol="0" anchor="ctr"/>
-          <a:lstStyle/>
-          <a:p>
-            <a:pPr algn="ctr"/>
-            <a:r>
-              <a:rPr sz="1400" b="1">
-                <a:solidFill>
-                  <a:srgbClr val="7EE08A"/>
-                </a:solidFill>
-                <a:latin typeface="Segoe UI"/>
-              </a:rPr>
-              <a:t>TranslationDynamics</a:t>
-            </a:r>
-          </a:p>
-        </p:txBody>
-      </p:sp>
-      <p:sp>
-        <p:nvSpPr>
-          <p:cNvPr id="10" name="Rounded Rectangle 9"/>
-          <p:cNvSpPr/>
-          <p:nvPr/>
-        </p:nvSpPr>
-        <p:spPr>
-          <a:xfrm>
-            <a:off x="7589520" y="2880360"/>
-            <a:ext cx="2926080" cy="640080"/>
-          </a:xfrm>
-          <a:prstGeom prst="roundRect">
-            <a:avLst>
-              <a:gd name="adj" fmla="val 10000"/>
-            </a:avLst>
-          </a:prstGeom>
-          <a:solidFill>
-            <a:srgbClr val="081626"/>
-          </a:solidFill>
-          <a:ln w="12700">
-            <a:solidFill>
-              <a:srgbClr val="1E3A55"/>
-            </a:solidFill>
-          </a:ln>
-          <a:effectLst/>
-        </p:spPr>
-        <p:style>
-          <a:lnRef idx="1">
-            <a:schemeClr val="accent1"/>
-          </a:lnRef>
-          <a:fillRef idx="3">
-            <a:schemeClr val="accent1"/>
-          </a:fillRef>
-          <a:effectRef idx="2">
-            <a:schemeClr val="accent1"/>
-          </a:effectRef>
-          <a:fontRef idx="minor">
-            <a:schemeClr val="lt1"/>
-          </a:fontRef>
-        </p:style>
-        <p:txBody>
-          <a:bodyPr wrap="square" rtlCol="0" anchor="ctr"/>
-          <a:lstStyle/>
-          <a:p>
-            <a:pPr algn="ctr"/>
-            <a:r>
-              <a:rPr sz="1400" b="1">
-                <a:solidFill>
-                  <a:srgbClr val="7EE08A"/>
-                </a:solidFill>
-                <a:latin typeface="Segoe UI"/>
-              </a:rPr>
-              <a:t>RotationDynamics</a:t>
-            </a:r>
-          </a:p>
-        </p:txBody>
-      </p:sp>
-      <p:sp>
-        <p:nvSpPr>
-          <p:cNvPr id="11" name="Rounded Rectangle 10"/>
-          <p:cNvSpPr/>
-          <p:nvPr/>
-        </p:nvSpPr>
-        <p:spPr>
-          <a:xfrm>
-            <a:off x="7589520" y="3703320"/>
-            <a:ext cx="2926080" cy="640080"/>
-          </a:xfrm>
-          <a:prstGeom prst="roundRect">
-            <a:avLst>
-              <a:gd name="adj" fmla="val 10000"/>
-            </a:avLst>
-          </a:prstGeom>
-          <a:solidFill>
-            <a:srgbClr val="081626"/>
-          </a:solidFill>
-          <a:ln w="12700">
-            <a:solidFill>
-              <a:srgbClr val="1E3A55"/>
-            </a:solidFill>
-          </a:ln>
-          <a:effectLst/>
-        </p:spPr>
-        <p:style>
-          <a:lnRef idx="1">
-            <a:schemeClr val="accent1"/>
-          </a:lnRef>
-          <a:fillRef idx="3">
-            <a:schemeClr val="accent1"/>
-          </a:fillRef>
-          <a:effectRef idx="2">
-            <a:schemeClr val="accent1"/>
-          </a:effectRef>
-          <a:fontRef idx="minor">
-            <a:schemeClr val="lt1"/>
-          </a:fontRef>
-        </p:style>
-        <p:txBody>
-          <a:bodyPr wrap="square" rtlCol="0" anchor="ctr"/>
-          <a:lstStyle/>
-          <a:p>
-            <a:pPr algn="ctr"/>
-            <a:r>
-              <a:rPr sz="1400" b="1">
-                <a:solidFill>
-                  <a:srgbClr val="7EE08A"/>
-                </a:solidFill>
-                <a:latin typeface="Segoe UI"/>
-              </a:rPr>
-              <a:t>RocketBody (mass, I)</a:t>
-            </a:r>
-          </a:p>
-        </p:txBody>
-      </p:sp>
-      <p:cxnSp>
-        <p:nvCxnSpPr>
-          <p:cNvPr id="12" name="Connector 11"/>
-          <p:cNvCxnSpPr/>
-          <p:nvPr/>
-        </p:nvCxnSpPr>
-        <p:spPr>
-          <a:xfrm>
-            <a:off x="3566160" y="2788920"/>
-            <a:ext cx="640080" cy="320040"/>
-          </a:xfrm>
-          <a:prstGeom prst="bentConnector3">
-            <a:avLst/>
-          </a:prstGeom>
-          <a:ln w="19050">
-            <a:solidFill>
-              <a:srgbClr val="8CA3B8"/>
-            </a:solidFill>
-            <a:headEnd type="none"/>
-            <a:tailEnd type="triangle"/>
-          </a:ln>
-        </p:spPr>
-        <p:style>
-          <a:lnRef idx="2">
-            <a:schemeClr val="accent1"/>
-          </a:lnRef>
-          <a:fillRef idx="0">
-            <a:schemeClr val="accent1"/>
-          </a:fillRef>
-          <a:effectRef idx="1">
-            <a:schemeClr val="accent1"/>
-          </a:effectRef>
-          <a:fontRef idx="minor">
-            <a:schemeClr val="tx1"/>
-          </a:fontRef>
-        </p:style>
-      </p:cxnSp>
-      <p:cxnSp>
-        <p:nvCxnSpPr>
-          <p:cNvPr id="13" name="Connector 12"/>
-          <p:cNvCxnSpPr/>
-          <p:nvPr/>
-        </p:nvCxnSpPr>
-        <p:spPr>
-          <a:xfrm flipV="1">
-            <a:off x="3566160" y="3291840"/>
-            <a:ext cx="640080" cy="320040"/>
-          </a:xfrm>
-          <a:prstGeom prst="bentConnector3">
-            <a:avLst/>
-          </a:prstGeom>
-          <a:ln w="19050">
-            <a:solidFill>
-              <a:srgbClr val="8CA3B8"/>
-            </a:solidFill>
-            <a:headEnd type="none"/>
-            <a:tailEnd type="triangle"/>
-          </a:ln>
-        </p:spPr>
-        <p:style>
-          <a:lnRef idx="2">
-            <a:schemeClr val="accent1"/>
-          </a:lnRef>
-          <a:fillRef idx="0">
-            <a:schemeClr val="accent1"/>
-          </a:fillRef>
-          <a:effectRef idx="1">
-            <a:schemeClr val="accent1"/>
-          </a:effectRef>
-          <a:fontRef idx="minor">
-            <a:schemeClr val="tx1"/>
-          </a:fontRef>
-        </p:style>
-      </p:cxnSp>
-      <p:cxnSp>
-        <p:nvCxnSpPr>
-          <p:cNvPr id="14" name="Connector 13"/>
-          <p:cNvCxnSpPr/>
-          <p:nvPr/>
-        </p:nvCxnSpPr>
-        <p:spPr>
-          <a:xfrm flipV="1">
-            <a:off x="7132320" y="2468880"/>
-            <a:ext cx="457200" cy="731520"/>
-          </a:xfrm>
-          <a:prstGeom prst="bentConnector3">
-            <a:avLst/>
-          </a:prstGeom>
-          <a:ln w="19050">
-            <a:solidFill>
-              <a:srgbClr val="8CA3B8"/>
-            </a:solidFill>
-            <a:headEnd type="none"/>
-            <a:tailEnd type="triangle"/>
-          </a:ln>
-        </p:spPr>
-        <p:style>
-          <a:lnRef idx="2">
-            <a:schemeClr val="accent1"/>
-          </a:lnRef>
-          <a:fillRef idx="0">
-            <a:schemeClr val="accent1"/>
-          </a:fillRef>
-          <a:effectRef idx="1">
-            <a:schemeClr val="accent1"/>
-          </a:effectRef>
-          <a:fontRef idx="minor">
-            <a:schemeClr val="tx1"/>
-          </a:fontRef>
-        </p:style>
-      </p:cxnSp>
-      <p:cxnSp>
-        <p:nvCxnSpPr>
-          <p:cNvPr id="15" name="Connector 14"/>
-          <p:cNvCxnSpPr/>
-          <p:nvPr/>
-        </p:nvCxnSpPr>
-        <p:spPr>
-          <a:xfrm>
-            <a:off x="7132320" y="3200400"/>
-            <a:ext cx="457200" cy="0"/>
-          </a:xfrm>
-          <a:prstGeom prst="bentConnector3">
-            <a:avLst/>
-          </a:prstGeom>
-          <a:ln w="19050">
-            <a:solidFill>
-              <a:srgbClr val="8CA3B8"/>
-            </a:solidFill>
-            <a:headEnd type="none"/>
-            <a:tailEnd type="triangle"/>
-          </a:ln>
-        </p:spPr>
-        <p:style>
-          <a:lnRef idx="2">
-            <a:schemeClr val="accent1"/>
-          </a:lnRef>
-          <a:fillRef idx="0">
-            <a:schemeClr val="accent1"/>
-          </a:fillRef>
-          <a:effectRef idx="1">
-            <a:schemeClr val="accent1"/>
-          </a:effectRef>
-          <a:fontRef idx="minor">
-            <a:schemeClr val="tx1"/>
-          </a:fontRef>
-        </p:style>
-      </p:cxnSp>
-      <p:sp>
-        <p:nvSpPr>
-          <p:cNvPr id="16" name="TextBox 15"/>
+            <a:endParaRPr/>
+          </a:p>
+        </p:txBody>
+      </p:sp>
+      <p:sp>
+        <p:nvSpPr>
+          <p:cNvPr id="7" name="TextBox 6"/>
           <p:cNvSpPr txBox="1"/>
           <p:nvPr/>
         </p:nvSpPr>
         <p:spPr>
           <a:xfrm>
-            <a:off x="548640" y="5120640"/>
-            <a:ext cx="11064240" cy="4572000"/>
+            <a:off x="411480" y="6446520"/>
+            <a:ext cx="10058400" cy="320040"/>
           </a:xfrm>
           <a:prstGeom prst="rect">
             <a:avLst/>
@@ -22865,122 +22734,6 @@
           <a:noFill/>
         </p:spPr>
         <p:txBody>
-          <a:bodyPr wrap="square">
-            <a:spAutoFit/>
-          </a:bodyPr>
-          <a:lstStyle/>
-          <a:p>
-            <a:pPr>
-              <a:spcAft>
-                <a:spcPts val="800"/>
-              </a:spcAft>
-            </a:pPr>
-            <a:r>
-              <a:rPr sz="1800">
-                <a:solidFill>
-                  <a:srgbClr val="35C4E8"/>
-                </a:solidFill>
-                <a:latin typeface="Segoe UI"/>
-              </a:rPr>
-              <a:t>•  </a:t>
-            </a:r>
-            <a:r>
-              <a:rPr sz="1800" b="1">
-                <a:solidFill>
-                  <a:srgbClr val="F2C744"/>
-                </a:solidFill>
-                <a:latin typeface="Segoe UI"/>
-              </a:rPr>
-              <a:t>11 components, 14 states</a:t>
-            </a:r>
-            <a:r>
-              <a:rPr sz="1800" b="0">
-                <a:solidFill>
-                  <a:srgbClr val="D8E2EC"/>
-                </a:solidFill>
-                <a:latin typeface="Segoe UI"/>
-              </a:rPr>
-              <a:t> — position, velocity, quaternion, angular rate, mass</a:t>
-            </a:r>
-          </a:p>
-          <a:p>
-            <a:pPr>
-              <a:spcAft>
-                <a:spcPts val="800"/>
-              </a:spcAft>
-            </a:pPr>
-            <a:r>
-              <a:rPr sz="1800">
-                <a:solidFill>
-                  <a:srgbClr val="35C4E8"/>
-                </a:solidFill>
-                <a:latin typeface="Segoe UI"/>
-              </a:rPr>
-              <a:t>•  </a:t>
-            </a:r>
-            <a:r>
-              <a:rPr sz="1800" b="0">
-                <a:solidFill>
-                  <a:srgbClr val="D8E2EC"/>
-                </a:solidFill>
-                <a:latin typeface="Segoe UI"/>
-              </a:rPr>
-              <a:t>Thrust vector control &amp; attitude determination: same tags-and-registry architecture</a:t>
-            </a:r>
-          </a:p>
-          <a:p>
-            <a:pPr>
-              <a:spcAft>
-                <a:spcPts val="800"/>
-              </a:spcAft>
-            </a:pPr>
-            <a:r>
-              <a:rPr sz="1800">
-                <a:solidFill>
-                  <a:srgbClr val="35C4E8"/>
-                </a:solidFill>
-                <a:latin typeface="Segoe UI"/>
-              </a:rPr>
-              <a:t>•  </a:t>
-            </a:r>
-            <a:r>
-              <a:rPr sz="1800" b="1">
-                <a:solidFill>
-                  <a:srgbClr val="FFFFFF"/>
-                </a:solidFill>
-                <a:latin typeface="Segoe UI"/>
-              </a:rPr>
-              <a:t>These patterns run in production flight software</a:t>
-            </a:r>
-            <a:r>
-              <a:rPr sz="1800" b="0">
-                <a:solidFill>
-                  <a:srgbClr val="D8E2EC"/>
-                </a:solidFill>
-                <a:latin typeface="Segoe UI"/>
-              </a:rPr>
-              <a:t> — correctness and performance both non-negotiable</a:t>
-            </a:r>
-          </a:p>
-        </p:txBody>
-      </p:sp>
-      <p:sp>
-        <p:nvSpPr>
-          <p:cNvPr id="17" name="TextBox 16"/>
-          <p:cNvSpPr txBox="1"/>
-          <p:nvPr/>
-        </p:nvSpPr>
-        <p:spPr>
-          <a:xfrm>
-            <a:off x="411480" y="6446520"/>
-            <a:ext cx="10058400" cy="320040"/>
-          </a:xfrm>
-          <a:prstGeom prst="rect">
-            <a:avLst/>
-          </a:prstGeom>
-          <a:noFill/>
-        </p:spPr>
-        <p:txBody>
           <a:bodyPr wrap="none">
             <a:spAutoFit/>
           </a:bodyPr>
@@ -23000,7 +22753,7 @@
       </p:sp>
       <p:sp>
         <p:nvSpPr>
-          <p:cNvPr id="18" name="TextBox 17"/>
+          <p:cNvPr id="8" name="TextBox 7"/>
           <p:cNvSpPr txBox="1"/>
           <p:nvPr/>
         </p:nvSpPr>
@@ -23095,7 +22848,7 @@
                 </a:solidFill>
                 <a:latin typeface="Segoe UI"/>
               </a:rPr>
-              <a:t>WE PLANTED T EVERYWHERE — PAYOFF</a:t>
+              <a:t>PRODUCTION, NOT PROMO</a:t>
             </a:r>
           </a:p>
         </p:txBody>
@@ -23129,7 +22882,7 @@
                 </a:solidFill>
                 <a:latin typeface="Segoe UI"/>
               </a:rPr>
-              <a:t>Bonus: the scalar is a template parameter</a:t>
+              <a:t>Same pattern, real vehicle: 6-DOF rocket</a:t>
             </a:r>
           </a:p>
         </p:txBody>
@@ -23142,12 +22895,12 @@
         </p:nvSpPr>
         <p:spPr>
           <a:xfrm>
-            <a:off x="548640" y="1371600"/>
-            <a:ext cx="11338560" cy="3081528"/>
+            <a:off x="640080" y="1645920"/>
+            <a:ext cx="2926080" cy="640080"/>
           </a:xfrm>
           <a:prstGeom prst="roundRect">
             <a:avLst>
-              <a:gd name="adj" fmla="val 3500"/>
+              <a:gd name="adj" fmla="val 10000"/>
             </a:avLst>
           </a:prstGeom>
           <a:solidFill>
@@ -23175,335 +22928,578 @@
           </a:fontRef>
         </p:style>
         <p:txBody>
-          <a:bodyPr rtlCol="0" anchor="ctr"/>
+          <a:bodyPr wrap="square" rtlCol="0" anchor="ctr"/>
           <a:lstStyle/>
           <a:p>
             <a:pPr algn="ctr"/>
-            <a:endParaRPr/>
-          </a:p>
-        </p:txBody>
-      </p:sp>
-      <p:sp>
-        <p:nvSpPr>
-          <p:cNvPr id="5" name="code:autodiff"/>
+            <a:r>
+              <a:rPr sz="1400" b="1">
+                <a:solidFill>
+                  <a:srgbClr val="35C4E8"/>
+                </a:solidFill>
+                <a:latin typeface="Segoe UI"/>
+              </a:rPr>
+              <a:t>StandardAtmosphere</a:t>
+            </a:r>
+          </a:p>
+        </p:txBody>
+      </p:sp>
+      <p:sp>
+        <p:nvSpPr>
+          <p:cNvPr id="5" name="Rounded Rectangle 4"/>
+          <p:cNvSpPr/>
+          <p:nvPr/>
+        </p:nvSpPr>
+        <p:spPr>
+          <a:xfrm>
+            <a:off x="640080" y="2468880"/>
+            <a:ext cx="2926080" cy="640080"/>
+          </a:xfrm>
+          <a:prstGeom prst="roundRect">
+            <a:avLst>
+              <a:gd name="adj" fmla="val 10000"/>
+            </a:avLst>
+          </a:prstGeom>
+          <a:solidFill>
+            <a:srgbClr val="081626"/>
+          </a:solidFill>
+          <a:ln w="12700">
+            <a:solidFill>
+              <a:srgbClr val="1E3A55"/>
+            </a:solidFill>
+          </a:ln>
+          <a:effectLst/>
+        </p:spPr>
+        <p:style>
+          <a:lnRef idx="1">
+            <a:schemeClr val="accent1"/>
+          </a:lnRef>
+          <a:fillRef idx="3">
+            <a:schemeClr val="accent1"/>
+          </a:fillRef>
+          <a:effectRef idx="2">
+            <a:schemeClr val="accent1"/>
+          </a:effectRef>
+          <a:fontRef idx="minor">
+            <a:schemeClr val="lt1"/>
+          </a:fontRef>
+        </p:style>
+        <p:txBody>
+          <a:bodyPr wrap="square" rtlCol="0" anchor="ctr"/>
+          <a:lstStyle/>
+          <a:p>
+            <a:pPr algn="ctr"/>
+            <a:r>
+              <a:rPr sz="1400" b="1">
+                <a:solidFill>
+                  <a:srgbClr val="35C4E8"/>
+                </a:solidFill>
+                <a:latin typeface="Segoe UI"/>
+              </a:rPr>
+              <a:t>AxisymmetricAero</a:t>
+            </a:r>
+          </a:p>
+        </p:txBody>
+      </p:sp>
+      <p:sp>
+        <p:nvSpPr>
+          <p:cNvPr id="6" name="Rounded Rectangle 5"/>
+          <p:cNvSpPr/>
+          <p:nvPr/>
+        </p:nvSpPr>
+        <p:spPr>
+          <a:xfrm>
+            <a:off x="640080" y="3291840"/>
+            <a:ext cx="2926080" cy="640080"/>
+          </a:xfrm>
+          <a:prstGeom prst="roundRect">
+            <a:avLst>
+              <a:gd name="adj" fmla="val 10000"/>
+            </a:avLst>
+          </a:prstGeom>
+          <a:solidFill>
+            <a:srgbClr val="081626"/>
+          </a:solidFill>
+          <a:ln w="12700">
+            <a:solidFill>
+              <a:srgbClr val="1E3A55"/>
+            </a:solidFill>
+          </a:ln>
+          <a:effectLst/>
+        </p:spPr>
+        <p:style>
+          <a:lnRef idx="1">
+            <a:schemeClr val="accent1"/>
+          </a:lnRef>
+          <a:fillRef idx="3">
+            <a:schemeClr val="accent1"/>
+          </a:fillRef>
+          <a:effectRef idx="2">
+            <a:schemeClr val="accent1"/>
+          </a:effectRef>
+          <a:fontRef idx="minor">
+            <a:schemeClr val="lt1"/>
+          </a:fontRef>
+        </p:style>
+        <p:txBody>
+          <a:bodyPr wrap="square" rtlCol="0" anchor="ctr"/>
+          <a:lstStyle/>
+          <a:p>
+            <a:pPr algn="ctr"/>
+            <a:r>
+              <a:rPr sz="1400" b="1">
+                <a:solidFill>
+                  <a:srgbClr val="35C4E8"/>
+                </a:solidFill>
+                <a:latin typeface="Segoe UI"/>
+              </a:rPr>
+              <a:t>InterpolatedEngine</a:t>
+            </a:r>
+          </a:p>
+        </p:txBody>
+      </p:sp>
+      <p:sp>
+        <p:nvSpPr>
+          <p:cNvPr id="7" name="Rounded Rectangle 6"/>
+          <p:cNvSpPr/>
+          <p:nvPr/>
+        </p:nvSpPr>
+        <p:spPr>
+          <a:xfrm>
+            <a:off x="640080" y="4114800"/>
+            <a:ext cx="2926080" cy="640080"/>
+          </a:xfrm>
+          <a:prstGeom prst="roundRect">
+            <a:avLst>
+              <a:gd name="adj" fmla="val 10000"/>
+            </a:avLst>
+          </a:prstGeom>
+          <a:solidFill>
+            <a:srgbClr val="081626"/>
+          </a:solidFill>
+          <a:ln w="12700">
+            <a:solidFill>
+              <a:srgbClr val="1E3A55"/>
+            </a:solidFill>
+          </a:ln>
+          <a:effectLst/>
+        </p:spPr>
+        <p:style>
+          <a:lnRef idx="1">
+            <a:schemeClr val="accent1"/>
+          </a:lnRef>
+          <a:fillRef idx="3">
+            <a:schemeClr val="accent1"/>
+          </a:fillRef>
+          <a:effectRef idx="2">
+            <a:schemeClr val="accent1"/>
+          </a:effectRef>
+          <a:fontRef idx="minor">
+            <a:schemeClr val="lt1"/>
+          </a:fontRef>
+        </p:style>
+        <p:txBody>
+          <a:bodyPr wrap="square" rtlCol="0" anchor="ctr"/>
+          <a:lstStyle/>
+          <a:p>
+            <a:pPr algn="ctr"/>
+            <a:r>
+              <a:rPr sz="1400" b="1">
+                <a:solidFill>
+                  <a:srgbClr val="35C4E8"/>
+                </a:solidFill>
+                <a:latin typeface="Segoe UI"/>
+              </a:rPr>
+              <a:t>Gravity</a:t>
+            </a:r>
+          </a:p>
+        </p:txBody>
+      </p:sp>
+      <p:sp>
+        <p:nvSpPr>
+          <p:cNvPr id="8" name="Rounded Rectangle 7"/>
+          <p:cNvSpPr/>
+          <p:nvPr/>
+        </p:nvSpPr>
+        <p:spPr>
+          <a:xfrm>
+            <a:off x="4206240" y="2880360"/>
+            <a:ext cx="2926080" cy="640080"/>
+          </a:xfrm>
+          <a:prstGeom prst="roundRect">
+            <a:avLst>
+              <a:gd name="adj" fmla="val 10000"/>
+            </a:avLst>
+          </a:prstGeom>
+          <a:solidFill>
+            <a:srgbClr val="081626"/>
+          </a:solidFill>
+          <a:ln w="12700">
+            <a:solidFill>
+              <a:srgbClr val="1E3A55"/>
+            </a:solidFill>
+          </a:ln>
+          <a:effectLst/>
+        </p:spPr>
+        <p:style>
+          <a:lnRef idx="1">
+            <a:schemeClr val="accent1"/>
+          </a:lnRef>
+          <a:fillRef idx="3">
+            <a:schemeClr val="accent1"/>
+          </a:fillRef>
+          <a:effectRef idx="2">
+            <a:schemeClr val="accent1"/>
+          </a:effectRef>
+          <a:fontRef idx="minor">
+            <a:schemeClr val="lt1"/>
+          </a:fontRef>
+        </p:style>
+        <p:txBody>
+          <a:bodyPr wrap="square" rtlCol="0" anchor="ctr"/>
+          <a:lstStyle/>
+          <a:p>
+            <a:pPr algn="ctr"/>
+            <a:r>
+              <a:rPr sz="1400" b="1">
+                <a:solidFill>
+                  <a:srgbClr val="F2C744"/>
+                </a:solidFill>
+                <a:latin typeface="Segoe UI"/>
+              </a:rPr>
+              <a:t>ForceAggregator</a:t>
+            </a:r>
+          </a:p>
+        </p:txBody>
+      </p:sp>
+      <p:sp>
+        <p:nvSpPr>
+          <p:cNvPr id="9" name="Rounded Rectangle 8"/>
+          <p:cNvSpPr/>
+          <p:nvPr/>
+        </p:nvSpPr>
+        <p:spPr>
+          <a:xfrm>
+            <a:off x="7589520" y="2057400"/>
+            <a:ext cx="2926080" cy="640080"/>
+          </a:xfrm>
+          <a:prstGeom prst="roundRect">
+            <a:avLst>
+              <a:gd name="adj" fmla="val 10000"/>
+            </a:avLst>
+          </a:prstGeom>
+          <a:solidFill>
+            <a:srgbClr val="081626"/>
+          </a:solidFill>
+          <a:ln w="12700">
+            <a:solidFill>
+              <a:srgbClr val="1E3A55"/>
+            </a:solidFill>
+          </a:ln>
+          <a:effectLst/>
+        </p:spPr>
+        <p:style>
+          <a:lnRef idx="1">
+            <a:schemeClr val="accent1"/>
+          </a:lnRef>
+          <a:fillRef idx="3">
+            <a:schemeClr val="accent1"/>
+          </a:fillRef>
+          <a:effectRef idx="2">
+            <a:schemeClr val="accent1"/>
+          </a:effectRef>
+          <a:fontRef idx="minor">
+            <a:schemeClr val="lt1"/>
+          </a:fontRef>
+        </p:style>
+        <p:txBody>
+          <a:bodyPr wrap="square" rtlCol="0" anchor="ctr"/>
+          <a:lstStyle/>
+          <a:p>
+            <a:pPr algn="ctr"/>
+            <a:r>
+              <a:rPr sz="1400" b="1">
+                <a:solidFill>
+                  <a:srgbClr val="7EE08A"/>
+                </a:solidFill>
+                <a:latin typeface="Segoe UI"/>
+              </a:rPr>
+              <a:t>TranslationDynamics</a:t>
+            </a:r>
+          </a:p>
+        </p:txBody>
+      </p:sp>
+      <p:sp>
+        <p:nvSpPr>
+          <p:cNvPr id="10" name="Rounded Rectangle 9"/>
+          <p:cNvSpPr/>
+          <p:nvPr/>
+        </p:nvSpPr>
+        <p:spPr>
+          <a:xfrm>
+            <a:off x="7589520" y="2880360"/>
+            <a:ext cx="2926080" cy="640080"/>
+          </a:xfrm>
+          <a:prstGeom prst="roundRect">
+            <a:avLst>
+              <a:gd name="adj" fmla="val 10000"/>
+            </a:avLst>
+          </a:prstGeom>
+          <a:solidFill>
+            <a:srgbClr val="081626"/>
+          </a:solidFill>
+          <a:ln w="12700">
+            <a:solidFill>
+              <a:srgbClr val="1E3A55"/>
+            </a:solidFill>
+          </a:ln>
+          <a:effectLst/>
+        </p:spPr>
+        <p:style>
+          <a:lnRef idx="1">
+            <a:schemeClr val="accent1"/>
+          </a:lnRef>
+          <a:fillRef idx="3">
+            <a:schemeClr val="accent1"/>
+          </a:fillRef>
+          <a:effectRef idx="2">
+            <a:schemeClr val="accent1"/>
+          </a:effectRef>
+          <a:fontRef idx="minor">
+            <a:schemeClr val="lt1"/>
+          </a:fontRef>
+        </p:style>
+        <p:txBody>
+          <a:bodyPr wrap="square" rtlCol="0" anchor="ctr"/>
+          <a:lstStyle/>
+          <a:p>
+            <a:pPr algn="ctr"/>
+            <a:r>
+              <a:rPr sz="1400" b="1">
+                <a:solidFill>
+                  <a:srgbClr val="7EE08A"/>
+                </a:solidFill>
+                <a:latin typeface="Segoe UI"/>
+              </a:rPr>
+              <a:t>RotationDynamics</a:t>
+            </a:r>
+          </a:p>
+        </p:txBody>
+      </p:sp>
+      <p:sp>
+        <p:nvSpPr>
+          <p:cNvPr id="11" name="Rounded Rectangle 10"/>
+          <p:cNvSpPr/>
+          <p:nvPr/>
+        </p:nvSpPr>
+        <p:spPr>
+          <a:xfrm>
+            <a:off x="7589520" y="3703320"/>
+            <a:ext cx="2926080" cy="640080"/>
+          </a:xfrm>
+          <a:prstGeom prst="roundRect">
+            <a:avLst>
+              <a:gd name="adj" fmla="val 10000"/>
+            </a:avLst>
+          </a:prstGeom>
+          <a:solidFill>
+            <a:srgbClr val="081626"/>
+          </a:solidFill>
+          <a:ln w="12700">
+            <a:solidFill>
+              <a:srgbClr val="1E3A55"/>
+            </a:solidFill>
+          </a:ln>
+          <a:effectLst/>
+        </p:spPr>
+        <p:style>
+          <a:lnRef idx="1">
+            <a:schemeClr val="accent1"/>
+          </a:lnRef>
+          <a:fillRef idx="3">
+            <a:schemeClr val="accent1"/>
+          </a:fillRef>
+          <a:effectRef idx="2">
+            <a:schemeClr val="accent1"/>
+          </a:effectRef>
+          <a:fontRef idx="minor">
+            <a:schemeClr val="lt1"/>
+          </a:fontRef>
+        </p:style>
+        <p:txBody>
+          <a:bodyPr wrap="square" rtlCol="0" anchor="ctr"/>
+          <a:lstStyle/>
+          <a:p>
+            <a:pPr algn="ctr"/>
+            <a:r>
+              <a:rPr sz="1400" b="1">
+                <a:solidFill>
+                  <a:srgbClr val="7EE08A"/>
+                </a:solidFill>
+                <a:latin typeface="Segoe UI"/>
+              </a:rPr>
+              <a:t>RocketBody (mass, I)</a:t>
+            </a:r>
+          </a:p>
+        </p:txBody>
+      </p:sp>
+      <p:cxnSp>
+        <p:nvCxnSpPr>
+          <p:cNvPr id="12" name="Connector 11"/>
+          <p:cNvCxnSpPr/>
+          <p:nvPr/>
+        </p:nvCxnSpPr>
+        <p:spPr>
+          <a:xfrm>
+            <a:off x="3566160" y="2788920"/>
+            <a:ext cx="640080" cy="320040"/>
+          </a:xfrm>
+          <a:prstGeom prst="bentConnector3">
+            <a:avLst/>
+          </a:prstGeom>
+          <a:ln w="19050">
+            <a:solidFill>
+              <a:srgbClr val="8CA3B8"/>
+            </a:solidFill>
+            <a:headEnd type="none"/>
+            <a:tailEnd type="triangle"/>
+          </a:ln>
+        </p:spPr>
+        <p:style>
+          <a:lnRef idx="2">
+            <a:schemeClr val="accent1"/>
+          </a:lnRef>
+          <a:fillRef idx="0">
+            <a:schemeClr val="accent1"/>
+          </a:fillRef>
+          <a:effectRef idx="1">
+            <a:schemeClr val="accent1"/>
+          </a:effectRef>
+          <a:fontRef idx="minor">
+            <a:schemeClr val="tx1"/>
+          </a:fontRef>
+        </p:style>
+      </p:cxnSp>
+      <p:cxnSp>
+        <p:nvCxnSpPr>
+          <p:cNvPr id="13" name="Connector 12"/>
+          <p:cNvCxnSpPr/>
+          <p:nvPr/>
+        </p:nvCxnSpPr>
+        <p:spPr>
+          <a:xfrm flipV="1">
+            <a:off x="3566160" y="3291840"/>
+            <a:ext cx="640080" cy="320040"/>
+          </a:xfrm>
+          <a:prstGeom prst="bentConnector3">
+            <a:avLst/>
+          </a:prstGeom>
+          <a:ln w="19050">
+            <a:solidFill>
+              <a:srgbClr val="8CA3B8"/>
+            </a:solidFill>
+            <a:headEnd type="none"/>
+            <a:tailEnd type="triangle"/>
+          </a:ln>
+        </p:spPr>
+        <p:style>
+          <a:lnRef idx="2">
+            <a:schemeClr val="accent1"/>
+          </a:lnRef>
+          <a:fillRef idx="0">
+            <a:schemeClr val="accent1"/>
+          </a:fillRef>
+          <a:effectRef idx="1">
+            <a:schemeClr val="accent1"/>
+          </a:effectRef>
+          <a:fontRef idx="minor">
+            <a:schemeClr val="tx1"/>
+          </a:fontRef>
+        </p:style>
+      </p:cxnSp>
+      <p:cxnSp>
+        <p:nvCxnSpPr>
+          <p:cNvPr id="14" name="Connector 13"/>
+          <p:cNvCxnSpPr/>
+          <p:nvPr/>
+        </p:nvCxnSpPr>
+        <p:spPr>
+          <a:xfrm flipV="1">
+            <a:off x="7132320" y="2468880"/>
+            <a:ext cx="457200" cy="731520"/>
+          </a:xfrm>
+          <a:prstGeom prst="bentConnector3">
+            <a:avLst/>
+          </a:prstGeom>
+          <a:ln w="19050">
+            <a:solidFill>
+              <a:srgbClr val="8CA3B8"/>
+            </a:solidFill>
+            <a:headEnd type="none"/>
+            <a:tailEnd type="triangle"/>
+          </a:ln>
+        </p:spPr>
+        <p:style>
+          <a:lnRef idx="2">
+            <a:schemeClr val="accent1"/>
+          </a:lnRef>
+          <a:fillRef idx="0">
+            <a:schemeClr val="accent1"/>
+          </a:fillRef>
+          <a:effectRef idx="1">
+            <a:schemeClr val="accent1"/>
+          </a:effectRef>
+          <a:fontRef idx="minor">
+            <a:schemeClr val="tx1"/>
+          </a:fontRef>
+        </p:style>
+      </p:cxnSp>
+      <p:cxnSp>
+        <p:nvCxnSpPr>
+          <p:cNvPr id="15" name="Connector 14"/>
+          <p:cNvCxnSpPr/>
+          <p:nvPr/>
+        </p:nvCxnSpPr>
+        <p:spPr>
+          <a:xfrm>
+            <a:off x="7132320" y="3200400"/>
+            <a:ext cx="457200" cy="0"/>
+          </a:xfrm>
+          <a:prstGeom prst="bentConnector3">
+            <a:avLst/>
+          </a:prstGeom>
+          <a:ln w="19050">
+            <a:solidFill>
+              <a:srgbClr val="8CA3B8"/>
+            </a:solidFill>
+            <a:headEnd type="none"/>
+            <a:tailEnd type="triangle"/>
+          </a:ln>
+        </p:spPr>
+        <p:style>
+          <a:lnRef idx="2">
+            <a:schemeClr val="accent1"/>
+          </a:lnRef>
+          <a:fillRef idx="0">
+            <a:schemeClr val="accent1"/>
+          </a:fillRef>
+          <a:effectRef idx="1">
+            <a:schemeClr val="accent1"/>
+          </a:effectRef>
+          <a:fontRef idx="minor">
+            <a:schemeClr val="tx1"/>
+          </a:fontRef>
+        </p:style>
+      </p:cxnSp>
+      <p:sp>
+        <p:nvSpPr>
+          <p:cNvPr id="16" name="TextBox 15"/>
           <p:cNvSpPr txBox="1"/>
           <p:nvPr/>
         </p:nvSpPr>
         <p:spPr>
           <a:xfrm>
-            <a:off x="731520" y="1554480"/>
-            <a:ext cx="10972800" cy="2715768"/>
-          </a:xfrm>
-          <a:prstGeom prst="rect">
-            <a:avLst/>
-          </a:prstGeom>
-          <a:noFill/>
-        </p:spPr>
-        <p:txBody>
-          <a:bodyPr wrap="none">
-            <a:spAutoFit/>
-          </a:bodyPr>
-          <a:lstStyle/>
-          <a:p>
-            <a:pPr>
-              <a:spcAft>
-                <a:spcPts val="100"/>
-              </a:spcAft>
-            </a:pPr>
-            <a:r>
-              <a:rPr sz="1600">
-                <a:solidFill>
-                  <a:srgbClr val="6A9955"/>
-                </a:solidFill>
-                <a:latin typeface="Consolas"/>
-              </a:rPr>
-              <a:t>// simulate:</a:t>
-            </a:r>
-          </a:p>
-          <a:p>
-            <a:pPr>
-              <a:spcAft>
-                <a:spcPts val="100"/>
-              </a:spcAft>
-            </a:pPr>
-            <a:r>
-              <a:rPr sz="1600">
-                <a:solidFill>
-                  <a:srgbClr val="569CD6"/>
-                </a:solidFill>
-                <a:latin typeface="Consolas"/>
-              </a:rPr>
-              <a:t>auto</a:t>
-            </a:r>
-            <a:r>
-              <a:rPr sz="1600">
-                <a:solidFill>
-                  <a:srgbClr val="D4D4D4"/>
-                </a:solidFill>
-                <a:latin typeface="Consolas"/>
-              </a:rPr>
-              <a:t> sim  = makeODESystem&lt;</a:t>
-            </a:r>
-            <a:r>
-              <a:rPr sz="1600">
-                <a:solidFill>
-                  <a:srgbClr val="4EC9B0"/>
-                </a:solidFill>
-                <a:latin typeface="Consolas"/>
-              </a:rPr>
-              <a:t>double</a:t>
-            </a:r>
-            <a:r>
-              <a:rPr sz="1600">
-                <a:solidFill>
-                  <a:srgbClr val="D4D4D4"/>
-                </a:solidFill>
-                <a:latin typeface="Consolas"/>
-              </a:rPr>
-              <a:t>&gt;(comps...);</a:t>
-            </a:r>
-          </a:p>
-          <a:p>
-            <a:pPr>
-              <a:spcAft>
-                <a:spcPts val="100"/>
-              </a:spcAft>
-            </a:pPr>
-            <a:r>
-              <a:rPr sz="1600">
-                <a:latin typeface="Consolas"/>
-              </a:rPr>
-              <a:t> </a:t>
-            </a:r>
-          </a:p>
-          <a:p>
-            <a:pPr>
-              <a:spcAft>
-                <a:spcPts val="100"/>
-              </a:spcAft>
-            </a:pPr>
-            <a:r>
-              <a:rPr sz="1600">
-                <a:solidFill>
-                  <a:srgbClr val="6A9955"/>
-                </a:solidFill>
-                <a:latin typeface="Consolas"/>
-              </a:rPr>
-              <a:t>// differentiate — SAME components, different scalar:</a:t>
-            </a:r>
-          </a:p>
-          <a:p>
-            <a:pPr>
-              <a:spcAft>
-                <a:spcPts val="100"/>
-              </a:spcAft>
-            </a:pPr>
-            <a:r>
-              <a:rPr sz="1600" b="1">
-                <a:solidFill>
-                  <a:srgbClr val="569CD6"/>
-                </a:solidFill>
-                <a:latin typeface="Consolas"/>
-              </a:rPr>
-              <a:t>using</a:t>
-            </a:r>
-            <a:r>
-              <a:rPr sz="1600" b="1">
-                <a:solidFill>
-                  <a:srgbClr val="D4D4D4"/>
-                </a:solidFill>
-                <a:latin typeface="Consolas"/>
-              </a:rPr>
-              <a:t> D = </a:t>
-            </a:r>
-            <a:r>
-              <a:rPr sz="1600" b="1">
-                <a:solidFill>
-                  <a:srgbClr val="4EC9B0"/>
-                </a:solidFill>
-                <a:latin typeface="Consolas"/>
-              </a:rPr>
-              <a:t>Dual</a:t>
-            </a:r>
-            <a:r>
-              <a:rPr sz="1600" b="1">
-                <a:solidFill>
-                  <a:srgbClr val="D4D4D4"/>
-                </a:solidFill>
-                <a:latin typeface="Consolas"/>
-              </a:rPr>
-              <a:t>&lt;</a:t>
-            </a:r>
-            <a:r>
-              <a:rPr sz="1600" b="1">
-                <a:solidFill>
-                  <a:srgbClr val="4EC9B0"/>
-                </a:solidFill>
-                <a:latin typeface="Consolas"/>
-              </a:rPr>
-              <a:t>double</a:t>
-            </a:r>
-            <a:r>
-              <a:rPr sz="1600" b="1">
-                <a:solidFill>
-                  <a:srgbClr val="D4D4D4"/>
-                </a:solidFill>
-                <a:latin typeface="Consolas"/>
-              </a:rPr>
-              <a:t>, </a:t>
-            </a:r>
-            <a:r>
-              <a:rPr sz="1600" b="1">
-                <a:solidFill>
-                  <a:srgbClr val="B5CEA8"/>
-                </a:solidFill>
-                <a:latin typeface="Consolas"/>
-              </a:rPr>
-              <a:t>14</a:t>
-            </a:r>
-            <a:r>
-              <a:rPr sz="1600" b="1">
-                <a:solidFill>
-                  <a:srgbClr val="D4D4D4"/>
-                </a:solidFill>
-                <a:latin typeface="Consolas"/>
-              </a:rPr>
-              <a:t>&gt;;                  </a:t>
-            </a:r>
-            <a:r>
-              <a:rPr sz="1600" b="1">
-                <a:solidFill>
-                  <a:srgbClr val="6A9955"/>
-                </a:solidFill>
-                <a:latin typeface="Consolas"/>
-              </a:rPr>
-              <a:t>// forward-mode autodiff</a:t>
-            </a:r>
-          </a:p>
-          <a:p>
-            <a:pPr>
-              <a:spcAft>
-                <a:spcPts val="100"/>
-              </a:spcAft>
-            </a:pPr>
-            <a:r>
-              <a:rPr sz="1600" b="1">
-                <a:solidFill>
-                  <a:srgbClr val="569CD6"/>
-                </a:solidFill>
-                <a:latin typeface="Consolas"/>
-              </a:rPr>
-              <a:t>auto</a:t>
-            </a:r>
-            <a:r>
-              <a:rPr sz="1600" b="1">
-                <a:solidFill>
-                  <a:srgbClr val="D4D4D4"/>
-                </a:solidFill>
-                <a:latin typeface="Consolas"/>
-              </a:rPr>
-              <a:t> grad = makeODESystem&lt;D&gt;(comps...);</a:t>
-            </a:r>
-          </a:p>
-          <a:p>
-            <a:pPr>
-              <a:spcAft>
-                <a:spcPts val="100"/>
-              </a:spcAft>
-            </a:pPr>
-            <a:r>
-              <a:rPr sz="1600">
-                <a:solidFill>
-                  <a:srgbClr val="569CD6"/>
-                </a:solidFill>
-                <a:latin typeface="Consolas"/>
-              </a:rPr>
-              <a:t>auto</a:t>
-            </a:r>
-            <a:r>
-              <a:rPr sz="1600">
-                <a:solidFill>
-                  <a:srgbClr val="D4D4D4"/>
-                </a:solidFill>
-                <a:latin typeface="Consolas"/>
-              </a:rPr>
-              <a:t> J    = computeJacobian(grad, t, state); </a:t>
-            </a:r>
-            <a:r>
-              <a:rPr sz="1600">
-                <a:solidFill>
-                  <a:srgbClr val="6A9955"/>
-                </a:solidFill>
-                <a:latin typeface="Consolas"/>
-              </a:rPr>
-              <a:t>// exact, to machine precision</a:t>
-            </a:r>
-          </a:p>
-          <a:p>
-            <a:pPr>
-              <a:spcAft>
-                <a:spcPts val="100"/>
-              </a:spcAft>
-            </a:pPr>
-            <a:r>
-              <a:rPr sz="1600">
-                <a:latin typeface="Consolas"/>
-              </a:rPr>
-              <a:t> </a:t>
-            </a:r>
-          </a:p>
-          <a:p>
-            <a:pPr>
-              <a:spcAft>
-                <a:spcPts val="100"/>
-              </a:spcAft>
-            </a:pPr>
-            <a:r>
-              <a:rPr sz="1600">
-                <a:solidFill>
-                  <a:srgbClr val="6A9955"/>
-                </a:solidFill>
-                <a:latin typeface="Consolas"/>
-              </a:rPr>
-              <a:t>// linearize -&gt; LQR gain straight from the nonlinear model</a:t>
-            </a:r>
-          </a:p>
-          <a:p>
-            <a:pPr>
-              <a:spcAft>
-                <a:spcPts val="100"/>
-              </a:spcAft>
-            </a:pPr>
-            <a:r>
-              <a:rPr sz="1600">
-                <a:solidFill>
-                  <a:srgbClr val="569CD6"/>
-                </a:solidFill>
-                <a:latin typeface="Consolas"/>
-              </a:rPr>
-              <a:t>auto</a:t>
-            </a:r>
-            <a:r>
-              <a:rPr sz="1600">
-                <a:solidFill>
-                  <a:srgbClr val="D4D4D4"/>
-                </a:solidFill>
-                <a:latin typeface="Consolas"/>
-              </a:rPr>
-              <a:t> K = lqr(J.A, J.B, Q, R);</a:t>
-            </a:r>
-          </a:p>
-        </p:txBody>
-      </p:sp>
-      <p:sp>
-        <p:nvSpPr>
-          <p:cNvPr id="6" name="TextBox 5"/>
-          <p:cNvSpPr txBox="1"/>
-          <p:nvPr/>
-        </p:nvSpPr>
-        <p:spPr>
-          <a:xfrm>
-            <a:off x="548640" y="4937760"/>
+            <a:off x="548640" y="5120640"/>
             <a:ext cx="11064240" cy="4572000"/>
           </a:xfrm>
           <a:prstGeom prst="rect">
@@ -23523,7 +23519,7 @@
               </a:spcAft>
             </a:pPr>
             <a:r>
-              <a:rPr sz="1900">
+              <a:rPr sz="1800">
                 <a:solidFill>
                   <a:srgbClr val="35C4E8"/>
                 </a:solidFill>
@@ -23532,13 +23528,22 @@
               <a:t>•  </a:t>
             </a:r>
             <a:r>
-              <a:rPr sz="1900" b="1">
+              <a:rPr sz="1800" b="1">
                 <a:solidFill>
                   <a:srgbClr val="F2C744"/>
                 </a:solidFill>
                 <a:latin typeface="Segoe UI"/>
               </a:rPr>
-              <a:t>Jacobians without hand-derived math or finite differences</a:t>
+              <a:t>11 components, 14 states</a:t>
+            </a:r>
+            <a:r>
+              <a:rPr sz="1800" b="0">
+                <a:solidFill>
+                  <a:srgbClr val="D8E2EC"/>
+                </a:solidFill>
+                <a:latin typeface="Segoe UI"/>
+              </a:rPr>
+              <a:t> — position, velocity, quaternion, angular rate, mass</a:t>
             </a:r>
           </a:p>
           <a:p>
@@ -23548,7 +23553,7 @@
               </a:spcAft>
             </a:pPr>
             <a:r>
-              <a:rPr sz="1900">
+              <a:rPr sz="1800">
                 <a:solidFill>
                   <a:srgbClr val="35C4E8"/>
                 </a:solidFill>
@@ -23557,20 +23562,54 @@
               <a:t>•  </a:t>
             </a:r>
             <a:r>
-              <a:rPr sz="1900" b="0">
+              <a:rPr sz="1800" b="0">
+                <a:solidFill>
+                  <a:srgbClr val="D8E2EC"/>
+                </a:solidFill>
+                <a:latin typeface="Segoe UI"/>
+              </a:rPr>
+              <a:t>Thrust vector control &amp; attitude determination: same tags-and-registry architecture</a:t>
+            </a:r>
+          </a:p>
+          <a:p>
+            <a:pPr>
+              <a:spcAft>
+                <a:spcPts val="800"/>
+              </a:spcAft>
+            </a:pPr>
+            <a:r>
+              <a:rPr sz="1800">
                 <a:solidFill>
                   <a:srgbClr val="35C4E8"/>
                 </a:solidFill>
                 <a:latin typeface="Segoe UI"/>
               </a:rPr>
-              <a:t>The controller you'll see in a minute was designed exactly this way</a:t>
-            </a:r>
-          </a:p>
-        </p:txBody>
-      </p:sp>
-      <p:sp>
-        <p:nvSpPr>
-          <p:cNvPr id="7" name="TextBox 6"/>
+              <a:t>•  </a:t>
+            </a:r>
+            <a:r>
+              <a:rPr sz="1800" b="1">
+                <a:solidFill>
+                  <a:srgbClr val="FFFFFF"/>
+                </a:solidFill>
+                <a:latin typeface="Segoe UI"/>
+              </a:rPr>
+              <a:t>These patterns run in production flight software</a:t>
+            </a:r>
+            <a:r>
+              <a:rPr sz="1800" b="0">
+                <a:solidFill>
+                  <a:srgbClr val="D8E2EC"/>
+                </a:solidFill>
+                <a:latin typeface="Segoe UI"/>
+              </a:rPr>
+              <a:t> — correctness and performance both non-negotiable</a:t>
+            </a:r>
+          </a:p>
+        </p:txBody>
+      </p:sp>
+      <p:sp>
+        <p:nvSpPr>
+          <p:cNvPr id="17" name="TextBox 16"/>
           <p:cNvSpPr txBox="1"/>
           <p:nvPr/>
         </p:nvSpPr>
@@ -23604,7 +23643,7 @@
       </p:sp>
       <p:sp>
         <p:nvSpPr>
-          <p:cNvPr id="8" name="TextBox 7"/>
+          <p:cNvPr id="18" name="TextBox 17"/>
           <p:cNvSpPr txBox="1"/>
           <p:nvPr/>
         </p:nvSpPr>
@@ -23699,7 +23738,7 @@
                 </a:solidFill>
                 <a:latin typeface="Segoe UI"/>
               </a:rPr>
-              <a:t>OPEN IDEAS</a:t>
+              <a:t>WE PLANTED T EVERYWHERE — PAYOFF</a:t>
             </a:r>
           </a:p>
         </p:txBody>
@@ -23733,20 +23772,381 @@
                 </a:solidFill>
                 <a:latin typeface="Segoe UI"/>
               </a:rPr>
-              <a:t>Can we go further?</a:t>
-            </a:r>
-          </a:p>
-        </p:txBody>
-      </p:sp>
-      <p:sp>
-        <p:nvSpPr>
-          <p:cNvPr id="4" name="TextBox 3"/>
+              <a:t>Bonus: the scalar is a template parameter</a:t>
+            </a:r>
+          </a:p>
+        </p:txBody>
+      </p:sp>
+      <p:sp>
+        <p:nvSpPr>
+          <p:cNvPr id="4" name="Rounded Rectangle 3"/>
+          <p:cNvSpPr/>
+          <p:nvPr/>
+        </p:nvSpPr>
+        <p:spPr>
+          <a:xfrm>
+            <a:off x="548640" y="1371600"/>
+            <a:ext cx="11338560" cy="3081528"/>
+          </a:xfrm>
+          <a:prstGeom prst="roundRect">
+            <a:avLst>
+              <a:gd name="adj" fmla="val 3500"/>
+            </a:avLst>
+          </a:prstGeom>
+          <a:solidFill>
+            <a:srgbClr val="081626"/>
+          </a:solidFill>
+          <a:ln w="12700">
+            <a:solidFill>
+              <a:srgbClr val="1E3A55"/>
+            </a:solidFill>
+          </a:ln>
+          <a:effectLst/>
+        </p:spPr>
+        <p:style>
+          <a:lnRef idx="1">
+            <a:schemeClr val="accent1"/>
+          </a:lnRef>
+          <a:fillRef idx="3">
+            <a:schemeClr val="accent1"/>
+          </a:fillRef>
+          <a:effectRef idx="2">
+            <a:schemeClr val="accent1"/>
+          </a:effectRef>
+          <a:fontRef idx="minor">
+            <a:schemeClr val="lt1"/>
+          </a:fontRef>
+        </p:style>
+        <p:txBody>
+          <a:bodyPr rtlCol="0" anchor="ctr"/>
+          <a:lstStyle/>
+          <a:p>
+            <a:pPr algn="ctr"/>
+            <a:endParaRPr/>
+          </a:p>
+        </p:txBody>
+      </p:sp>
+      <p:sp>
+        <p:nvSpPr>
+          <p:cNvPr id="5" name="code:autodiff"/>
           <p:cNvSpPr txBox="1"/>
           <p:nvPr/>
         </p:nvSpPr>
         <p:spPr>
           <a:xfrm>
-            <a:off x="548640" y="1737360"/>
+            <a:off x="731520" y="1554480"/>
+            <a:ext cx="10972800" cy="2715768"/>
+          </a:xfrm>
+          <a:prstGeom prst="rect">
+            <a:avLst/>
+          </a:prstGeom>
+          <a:noFill/>
+        </p:spPr>
+        <p:txBody>
+          <a:bodyPr wrap="none">
+            <a:spAutoFit/>
+          </a:bodyPr>
+          <a:lstStyle/>
+          <a:p>
+            <a:pPr>
+              <a:spcAft>
+                <a:spcPts val="100"/>
+              </a:spcAft>
+            </a:pPr>
+            <a:r>
+              <a:rPr sz="1600">
+                <a:solidFill>
+                  <a:srgbClr val="6A9955"/>
+                </a:solidFill>
+                <a:latin typeface="Consolas"/>
+              </a:rPr>
+              <a:t>// simulate:</a:t>
+            </a:r>
+          </a:p>
+          <a:p>
+            <a:pPr>
+              <a:spcAft>
+                <a:spcPts val="100"/>
+              </a:spcAft>
+            </a:pPr>
+            <a:r>
+              <a:rPr sz="1600">
+                <a:solidFill>
+                  <a:srgbClr val="569CD6"/>
+                </a:solidFill>
+                <a:latin typeface="Consolas"/>
+              </a:rPr>
+              <a:t>auto</a:t>
+            </a:r>
+            <a:r>
+              <a:rPr sz="1600">
+                <a:solidFill>
+                  <a:srgbClr val="D4D4D4"/>
+                </a:solidFill>
+                <a:latin typeface="Consolas"/>
+              </a:rPr>
+              <a:t> sim  = makeODESystem&lt;</a:t>
+            </a:r>
+            <a:r>
+              <a:rPr sz="1600">
+                <a:solidFill>
+                  <a:srgbClr val="4EC9B0"/>
+                </a:solidFill>
+                <a:latin typeface="Consolas"/>
+              </a:rPr>
+              <a:t>double</a:t>
+            </a:r>
+            <a:r>
+              <a:rPr sz="1600">
+                <a:solidFill>
+                  <a:srgbClr val="D4D4D4"/>
+                </a:solidFill>
+                <a:latin typeface="Consolas"/>
+              </a:rPr>
+              <a:t>&gt;(comps...);</a:t>
+            </a:r>
+          </a:p>
+          <a:p>
+            <a:pPr>
+              <a:spcAft>
+                <a:spcPts val="100"/>
+              </a:spcAft>
+            </a:pPr>
+            <a:r>
+              <a:rPr sz="1600">
+                <a:latin typeface="Consolas"/>
+              </a:rPr>
+              <a:t> </a:t>
+            </a:r>
+          </a:p>
+          <a:p>
+            <a:pPr>
+              <a:spcAft>
+                <a:spcPts val="100"/>
+              </a:spcAft>
+            </a:pPr>
+            <a:r>
+              <a:rPr sz="1600">
+                <a:solidFill>
+                  <a:srgbClr val="6A9955"/>
+                </a:solidFill>
+                <a:latin typeface="Consolas"/>
+              </a:rPr>
+              <a:t>// differentiate — SAME components, different scalar:</a:t>
+            </a:r>
+          </a:p>
+          <a:p>
+            <a:pPr>
+              <a:spcAft>
+                <a:spcPts val="100"/>
+              </a:spcAft>
+            </a:pPr>
+            <a:r>
+              <a:rPr sz="1600" b="1">
+                <a:solidFill>
+                  <a:srgbClr val="569CD6"/>
+                </a:solidFill>
+                <a:latin typeface="Consolas"/>
+              </a:rPr>
+              <a:t>using</a:t>
+            </a:r>
+            <a:r>
+              <a:rPr sz="1600" b="1">
+                <a:solidFill>
+                  <a:srgbClr val="D4D4D4"/>
+                </a:solidFill>
+                <a:latin typeface="Consolas"/>
+              </a:rPr>
+              <a:t> D = </a:t>
+            </a:r>
+            <a:r>
+              <a:rPr sz="1600" b="1">
+                <a:solidFill>
+                  <a:srgbClr val="4EC9B0"/>
+                </a:solidFill>
+                <a:latin typeface="Consolas"/>
+              </a:rPr>
+              <a:t>Dual</a:t>
+            </a:r>
+            <a:r>
+              <a:rPr sz="1600" b="1">
+                <a:solidFill>
+                  <a:srgbClr val="D4D4D4"/>
+                </a:solidFill>
+                <a:latin typeface="Consolas"/>
+              </a:rPr>
+              <a:t>&lt;</a:t>
+            </a:r>
+            <a:r>
+              <a:rPr sz="1600" b="1">
+                <a:solidFill>
+                  <a:srgbClr val="4EC9B0"/>
+                </a:solidFill>
+                <a:latin typeface="Consolas"/>
+              </a:rPr>
+              <a:t>double</a:t>
+            </a:r>
+            <a:r>
+              <a:rPr sz="1600" b="1">
+                <a:solidFill>
+                  <a:srgbClr val="D4D4D4"/>
+                </a:solidFill>
+                <a:latin typeface="Consolas"/>
+              </a:rPr>
+              <a:t>, </a:t>
+            </a:r>
+            <a:r>
+              <a:rPr sz="1600" b="1">
+                <a:solidFill>
+                  <a:srgbClr val="B5CEA8"/>
+                </a:solidFill>
+                <a:latin typeface="Consolas"/>
+              </a:rPr>
+              <a:t>14</a:t>
+            </a:r>
+            <a:r>
+              <a:rPr sz="1600" b="1">
+                <a:solidFill>
+                  <a:srgbClr val="D4D4D4"/>
+                </a:solidFill>
+                <a:latin typeface="Consolas"/>
+              </a:rPr>
+              <a:t>&gt;;                  </a:t>
+            </a:r>
+            <a:r>
+              <a:rPr sz="1600" b="1">
+                <a:solidFill>
+                  <a:srgbClr val="6A9955"/>
+                </a:solidFill>
+                <a:latin typeface="Consolas"/>
+              </a:rPr>
+              <a:t>// forward-mode autodiff</a:t>
+            </a:r>
+          </a:p>
+          <a:p>
+            <a:pPr>
+              <a:spcAft>
+                <a:spcPts val="100"/>
+              </a:spcAft>
+            </a:pPr>
+            <a:r>
+              <a:rPr sz="1600" b="1">
+                <a:solidFill>
+                  <a:srgbClr val="569CD6"/>
+                </a:solidFill>
+                <a:latin typeface="Consolas"/>
+              </a:rPr>
+              <a:t>auto</a:t>
+            </a:r>
+            <a:r>
+              <a:rPr sz="1600" b="1">
+                <a:solidFill>
+                  <a:srgbClr val="D4D4D4"/>
+                </a:solidFill>
+                <a:latin typeface="Consolas"/>
+              </a:rPr>
+              <a:t> grad = makeODESystem&lt;D&gt;(comps...);</a:t>
+            </a:r>
+          </a:p>
+          <a:p>
+            <a:pPr>
+              <a:spcAft>
+                <a:spcPts val="100"/>
+              </a:spcAft>
+            </a:pPr>
+            <a:r>
+              <a:rPr sz="1600">
+                <a:solidFill>
+                  <a:srgbClr val="569CD6"/>
+                </a:solidFill>
+                <a:latin typeface="Consolas"/>
+              </a:rPr>
+              <a:t>auto</a:t>
+            </a:r>
+            <a:r>
+              <a:rPr sz="1600">
+                <a:solidFill>
+                  <a:srgbClr val="D4D4D4"/>
+                </a:solidFill>
+                <a:latin typeface="Consolas"/>
+              </a:rPr>
+              <a:t> J    = computeJacobian(grad, t, state); </a:t>
+            </a:r>
+            <a:r>
+              <a:rPr sz="1600">
+                <a:solidFill>
+                  <a:srgbClr val="6A9955"/>
+                </a:solidFill>
+                <a:latin typeface="Consolas"/>
+              </a:rPr>
+              <a:t>// exact, to machine precision</a:t>
+            </a:r>
+          </a:p>
+          <a:p>
+            <a:pPr>
+              <a:spcAft>
+                <a:spcPts val="100"/>
+              </a:spcAft>
+            </a:pPr>
+            <a:r>
+              <a:rPr sz="1600">
+                <a:latin typeface="Consolas"/>
+              </a:rPr>
+              <a:t> </a:t>
+            </a:r>
+          </a:p>
+          <a:p>
+            <a:pPr>
+              <a:spcAft>
+                <a:spcPts val="100"/>
+              </a:spcAft>
+            </a:pPr>
+            <a:r>
+              <a:rPr sz="1600">
+                <a:solidFill>
+                  <a:srgbClr val="6A9955"/>
+                </a:solidFill>
+                <a:latin typeface="Consolas"/>
+              </a:rPr>
+              <a:t>// linearize -&gt; LQR gain straight from the nonlinear model</a:t>
+            </a:r>
+          </a:p>
+          <a:p>
+            <a:pPr>
+              <a:spcAft>
+                <a:spcPts val="100"/>
+              </a:spcAft>
+            </a:pPr>
+            <a:r>
+              <a:rPr sz="1600">
+                <a:solidFill>
+                  <a:srgbClr val="569CD6"/>
+                </a:solidFill>
+                <a:latin typeface="Consolas"/>
+              </a:rPr>
+              <a:t>auto</a:t>
+            </a:r>
+            <a:r>
+              <a:rPr sz="1600">
+                <a:solidFill>
+                  <a:srgbClr val="D4D4D4"/>
+                </a:solidFill>
+                <a:latin typeface="Consolas"/>
+              </a:rPr>
+              <a:t> K = lqr(J.A, J.B, Q, R);</a:t>
+            </a:r>
+          </a:p>
+        </p:txBody>
+      </p:sp>
+      <p:sp>
+        <p:nvSpPr>
+          <p:cNvPr id="6" name="TextBox 5"/>
+          <p:cNvSpPr txBox="1"/>
+          <p:nvPr/>
+        </p:nvSpPr>
+        <p:spPr>
+          <a:xfrm>
+            <a:off x="548640" y="4937760"/>
             <a:ext cx="11064240" cy="4572000"/>
           </a:xfrm>
           <a:prstGeom prst="rect">
@@ -23766,7 +24166,7 @@
               </a:spcAft>
             </a:pPr>
             <a:r>
-              <a:rPr sz="2200">
+              <a:rPr sz="1900">
                 <a:solidFill>
                   <a:srgbClr val="35C4E8"/>
                 </a:solidFill>
@@ -23775,22 +24175,13 @@
               <a:t>•  </a:t>
             </a:r>
             <a:r>
-              <a:rPr sz="2200" b="1">
-                <a:solidFill>
-                  <a:srgbClr val="FFFFFF"/>
-                </a:solidFill>
-                <a:latin typeface="Segoe UI"/>
-              </a:rPr>
-              <a:t>Frames as types</a:t>
-            </a:r>
-            <a:r>
-              <a:rPr sz="2200" b="0">
-                <a:solidFill>
-                  <a:srgbClr val="D8E2EC"/>
-                </a:solidFill>
-                <a:latin typeface="Segoe UI"/>
-              </a:rPr>
-              <a:t> — body vs ENU vs ECEF: mixing them up should be a compile error too</a:t>
+              <a:rPr sz="1900" b="1">
+                <a:solidFill>
+                  <a:srgbClr val="F2C744"/>
+                </a:solidFill>
+                <a:latin typeface="Segoe UI"/>
+              </a:rPr>
+              <a:t>Jacobians without hand-derived math or finite differences</a:t>
             </a:r>
           </a:p>
           <a:p>
@@ -23800,7 +24191,7 @@
               </a:spcAft>
             </a:pPr>
             <a:r>
-              <a:rPr sz="2200">
+              <a:rPr sz="1900">
                 <a:solidFill>
                   <a:srgbClr val="35C4E8"/>
                 </a:solidFill>
@@ -23809,61 +24200,27 @@
               <a:t>•  </a:t>
             </a:r>
             <a:r>
-              <a:rPr sz="2200" b="1">
-                <a:solidFill>
-                  <a:srgbClr val="FFFFFF"/>
-                </a:solidFill>
-                <a:latin typeface="Segoe UI"/>
-              </a:rPr>
-              <a:t>Physical laws as concepts</a:t>
-            </a:r>
-            <a:r>
-              <a:rPr sz="2200" b="0">
-                <a:solidFill>
-                  <a:srgbClr val="D8E2EC"/>
-                </a:solidFill>
-                <a:latin typeface="Segoe UI"/>
-              </a:rPr>
-              <a:t> — 'conserves energy', 'action-reaction pair' as checkable contracts</a:t>
-            </a:r>
-          </a:p>
-          <a:p>
-            <a:pPr>
-              <a:spcAft>
-                <a:spcPts val="800"/>
-              </a:spcAft>
-            </a:pPr>
-            <a:r>
-              <a:rPr sz="2200">
+              <a:rPr sz="1900" b="0">
                 <a:solidFill>
                   <a:srgbClr val="35C4E8"/>
                 </a:solidFill>
                 <a:latin typeface="Segoe UI"/>
               </a:rPr>
-              <a:t>•  </a:t>
-            </a:r>
-            <a:r>
-              <a:rPr sz="2200" b="0">
-                <a:solidFill>
-                  <a:srgbClr val="D8E2EC"/>
-                </a:solidFill>
-                <a:latin typeface="Segoe UI"/>
-              </a:rPr>
-              <a:t>Units in the type system — dimensional analysis at compile time</a:t>
-            </a:r>
-          </a:p>
-        </p:txBody>
-      </p:sp>
-      <p:sp>
-        <p:nvSpPr>
-          <p:cNvPr id="5" name="TextBox 4"/>
+              <a:t>The controller you'll see in a minute was designed exactly this way</a:t>
+            </a:r>
+          </a:p>
+        </p:txBody>
+      </p:sp>
+      <p:sp>
+        <p:nvSpPr>
+          <p:cNvPr id="7" name="TextBox 6"/>
           <p:cNvSpPr txBox="1"/>
           <p:nvPr/>
         </p:nvSpPr>
         <p:spPr>
           <a:xfrm>
-            <a:off x="822960" y="4206240"/>
-            <a:ext cx="10515600" cy="492443"/>
+            <a:off x="411480" y="6446520"/>
+            <a:ext cx="10058400" cy="320040"/>
           </a:xfrm>
           <a:prstGeom prst="rect">
             <a:avLst/>
@@ -23871,40 +24228,6 @@
           <a:noFill/>
         </p:spPr>
         <p:txBody>
-          <a:bodyPr wrap="square">
-            <a:spAutoFit/>
-          </a:bodyPr>
-          <a:lstStyle/>
-          <a:p>
-            <a:r>
-              <a:rPr sz="2600" b="1" dirty="0">
-                <a:solidFill>
-                  <a:srgbClr val="F2C744"/>
-                </a:solidFill>
-                <a:latin typeface="Segoe UI"/>
-              </a:rPr>
-              <a:t>The goal, all the way down:  a consistent level of abstraction</a:t>
-            </a:r>
-          </a:p>
-        </p:txBody>
-      </p:sp>
-      <p:sp>
-        <p:nvSpPr>
-          <p:cNvPr id="6" name="TextBox 5"/>
-          <p:cNvSpPr txBox="1"/>
-          <p:nvPr/>
-        </p:nvSpPr>
-        <p:spPr>
-          <a:xfrm>
-            <a:off x="411480" y="6446520"/>
-            <a:ext cx="10058400" cy="320040"/>
-          </a:xfrm>
-          <a:prstGeom prst="rect">
-            <a:avLst/>
-          </a:prstGeom>
-          <a:noFill/>
-        </p:spPr>
-        <p:txBody>
           <a:bodyPr wrap="none">
             <a:spAutoFit/>
           </a:bodyPr>
@@ -23924,7 +24247,7 @@
       </p:sp>
       <p:sp>
         <p:nvSpPr>
-          <p:cNvPr id="7" name="TextBox 6"/>
+          <p:cNvPr id="8" name="TextBox 7"/>
           <p:cNvSpPr txBox="1"/>
           <p:nvPr/>
         </p:nvSpPr>
@@ -24019,7 +24342,7 @@
                 </a:solidFill>
                 <a:latin typeface="Segoe UI"/>
               </a:rPr>
-              <a:t>A SHORT HISTORY LESSON</a:t>
+              <a:t>OPEN IDEAS</a:t>
             </a:r>
           </a:p>
         </p:txBody>
@@ -24053,78 +24376,20 @@
                 </a:solidFill>
                 <a:latin typeface="Segoe UI"/>
               </a:rPr>
-              <a:t>We've been here before</a:t>
-            </a:r>
-          </a:p>
-        </p:txBody>
-      </p:sp>
-      <p:sp>
-        <p:nvSpPr>
-          <p:cNvPr id="4" name="Rounded Rectangle 3"/>
-          <p:cNvSpPr/>
-          <p:nvPr/>
-        </p:nvSpPr>
-        <p:spPr>
-          <a:xfrm>
-            <a:off x="1097280" y="1737360"/>
-            <a:ext cx="9966960" cy="3108960"/>
-          </a:xfrm>
-          <a:prstGeom prst="roundRect">
-            <a:avLst>
-              <a:gd name="adj" fmla="val 10000"/>
-            </a:avLst>
-          </a:prstGeom>
-          <a:solidFill>
-            <a:srgbClr val="081626"/>
-          </a:solidFill>
-          <a:ln w="12700">
-            <a:solidFill>
-              <a:srgbClr val="1E3A55"/>
-            </a:solidFill>
-          </a:ln>
-          <a:effectLst/>
-        </p:spPr>
-        <p:style>
-          <a:lnRef idx="1">
-            <a:schemeClr val="accent1"/>
-          </a:lnRef>
-          <a:fillRef idx="3">
-            <a:schemeClr val="accent1"/>
-          </a:fillRef>
-          <a:effectRef idx="2">
-            <a:schemeClr val="accent1"/>
-          </a:effectRef>
-          <a:fontRef idx="minor">
-            <a:schemeClr val="lt1"/>
-          </a:fontRef>
-        </p:style>
-        <p:txBody>
-          <a:bodyPr wrap="square" rtlCol="0" anchor="ctr"/>
-          <a:lstStyle/>
-          <a:p>
-            <a:pPr algn="ctr"/>
-            <a:r>
-              <a:rPr sz="1600" b="0">
-                <a:solidFill>
-                  <a:srgbClr val="8CA3B8"/>
-                </a:solidFill>
-                <a:latin typeface="Segoe UI"/>
-              </a:rPr>
-              <a:t>[ PLACEHOLDER — scan of rocket-control code from a classic textbook
-(Zipfel / 1960s–90s Fortran, zero modularity) ]</a:t>
-            </a:r>
-          </a:p>
-        </p:txBody>
-      </p:sp>
-      <p:sp>
-        <p:nvSpPr>
-          <p:cNvPr id="5" name="TextBox 4"/>
+              <a:t>Can we go further?</a:t>
+            </a:r>
+          </a:p>
+        </p:txBody>
+      </p:sp>
+      <p:sp>
+        <p:nvSpPr>
+          <p:cNvPr id="4" name="TextBox 3"/>
           <p:cNvSpPr txBox="1"/>
           <p:nvPr/>
         </p:nvSpPr>
         <p:spPr>
           <a:xfrm>
-            <a:off x="548640" y="5120640"/>
+            <a:off x="548640" y="1737360"/>
             <a:ext cx="11064240" cy="4572000"/>
           </a:xfrm>
           <a:prstGeom prst="rect">
@@ -24144,7 +24409,7 @@
               </a:spcAft>
             </a:pPr>
             <a:r>
-              <a:rPr sz="2000">
+              <a:rPr sz="2200">
                 <a:solidFill>
                   <a:srgbClr val="35C4E8"/>
                 </a:solidFill>
@@ -24153,13 +24418,22 @@
               <a:t>•  </a:t>
             </a:r>
             <a:r>
-              <a:rPr sz="2000" b="0">
+              <a:rPr sz="2200" b="1">
+                <a:solidFill>
+                  <a:srgbClr val="FFFFFF"/>
+                </a:solidFill>
+                <a:latin typeface="Segoe UI"/>
+              </a:rPr>
+              <a:t>Frames as types</a:t>
+            </a:r>
+            <a:r>
+              <a:rPr sz="2200" b="0">
                 <a:solidFill>
                   <a:srgbClr val="D8E2EC"/>
                 </a:solidFill>
                 <a:latin typeface="Segoe UI"/>
               </a:rPr>
-              <a:t>Six decades of rocket code — the math was always modular; the code never was</a:t>
+              <a:t> — body vs ENU vs ECEF: mixing them up should be a compile error too</a:t>
             </a:r>
           </a:p>
           <a:p>
@@ -24169,7 +24443,7 @@
               </a:spcAft>
             </a:pPr>
             <a:r>
-              <a:rPr sz="2000">
+              <a:rPr sz="2200">
                 <a:solidFill>
                   <a:srgbClr val="35C4E8"/>
                 </a:solidFill>
@@ -24178,13 +24452,81 @@
               <a:t>•  </a:t>
             </a:r>
             <a:r>
-              <a:rPr sz="2000" b="1">
+              <a:rPr sz="2200" b="1">
+                <a:solidFill>
+                  <a:srgbClr val="FFFFFF"/>
+                </a:solidFill>
+                <a:latin typeface="Segoe UI"/>
+              </a:rPr>
+              <a:t>Physical laws as concepts</a:t>
+            </a:r>
+            <a:r>
+              <a:rPr sz="2200" b="0">
+                <a:solidFill>
+                  <a:srgbClr val="D8E2EC"/>
+                </a:solidFill>
+                <a:latin typeface="Segoe UI"/>
+              </a:rPr>
+              <a:t> — 'conserves energy', 'action-reaction pair' as checkable contracts</a:t>
+            </a:r>
+          </a:p>
+          <a:p>
+            <a:pPr>
+              <a:spcAft>
+                <a:spcPts val="800"/>
+              </a:spcAft>
+            </a:pPr>
+            <a:r>
+              <a:rPr sz="2200">
+                <a:solidFill>
+                  <a:srgbClr val="35C4E8"/>
+                </a:solidFill>
+                <a:latin typeface="Segoe UI"/>
+              </a:rPr>
+              <a:t>•  </a:t>
+            </a:r>
+            <a:r>
+              <a:rPr sz="2200" b="0">
+                <a:solidFill>
+                  <a:srgbClr val="D8E2EC"/>
+                </a:solidFill>
+                <a:latin typeface="Segoe UI"/>
+              </a:rPr>
+              <a:t>Units in the type system — dimensional analysis at compile time</a:t>
+            </a:r>
+          </a:p>
+        </p:txBody>
+      </p:sp>
+      <p:sp>
+        <p:nvSpPr>
+          <p:cNvPr id="5" name="TextBox 4"/>
+          <p:cNvSpPr txBox="1"/>
+          <p:nvPr/>
+        </p:nvSpPr>
+        <p:spPr>
+          <a:xfrm>
+            <a:off x="822960" y="4206240"/>
+            <a:ext cx="10515600" cy="492443"/>
+          </a:xfrm>
+          <a:prstGeom prst="rect">
+            <a:avLst/>
+          </a:prstGeom>
+          <a:noFill/>
+        </p:spPr>
+        <p:txBody>
+          <a:bodyPr wrap="square">
+            <a:spAutoFit/>
+          </a:bodyPr>
+          <a:lstStyle/>
+          <a:p>
+            <a:r>
+              <a:rPr sz="2600" b="1" dirty="0">
                 <a:solidFill>
                   <a:srgbClr val="F2C744"/>
                 </a:solidFill>
                 <a:latin typeface="Segoe UI"/>
               </a:rPr>
-              <a:t>Not because the engineers were careless — because the languages made them choose</a:t>
+              <a:t>The goal, all the way down:  a consistent level of abstraction</a:t>
             </a:r>
           </a:p>
         </p:txBody>
@@ -24320,7 +24662,7 @@
                 </a:solidFill>
                 <a:latin typeface="Segoe UI"/>
               </a:rPr>
-              <a:t>FUN EXAMPLE — LIVE</a:t>
+              <a:t>A SHORT HISTORY LESSON</a:t>
             </a:r>
           </a:p>
         </p:txBody>
@@ -24354,187 +24696,21 @@
                 </a:solidFill>
                 <a:latin typeface="Segoe UI"/>
               </a:rPr>
-              <a:t>One more thing: six pendulums on a cart</a:t>
-            </a:r>
-          </a:p>
-        </p:txBody>
-      </p:sp>
-      <p:sp>
-        <p:nvSpPr>
-          <p:cNvPr id="4" name="TextBox 3"/>
-          <p:cNvSpPr txBox="1"/>
-          <p:nvPr/>
-        </p:nvSpPr>
-        <p:spPr>
-          <a:xfrm>
-            <a:off x="548640" y="1737360"/>
-            <a:ext cx="11064240" cy="4572000"/>
-          </a:xfrm>
-          <a:prstGeom prst="rect">
-            <a:avLst/>
-          </a:prstGeom>
-          <a:noFill/>
-        </p:spPr>
-        <p:txBody>
-          <a:bodyPr wrap="square">
-            <a:spAutoFit/>
-          </a:bodyPr>
-          <a:lstStyle/>
-          <a:p>
-            <a:pPr>
-              <a:spcAft>
-                <a:spcPts val="800"/>
-              </a:spcAft>
-            </a:pPr>
-            <a:r>
-              <a:rPr sz="2200">
-                <a:solidFill>
-                  <a:srgbClr val="35C4E8"/>
-                </a:solidFill>
-                <a:latin typeface="Segoe UI"/>
-              </a:rPr>
-              <a:t>•  </a:t>
-            </a:r>
-            <a:r>
-              <a:rPr sz="2200" b="1">
-                <a:solidFill>
-                  <a:srgbClr val="F2C744"/>
-                </a:solidFill>
-                <a:latin typeface="Segoe UI"/>
-              </a:rPr>
-              <a:t>Inverted 6-pendulum chain</a:t>
-            </a:r>
-            <a:r>
-              <a:rPr sz="2200" b="0">
-                <a:solidFill>
-                  <a:srgbClr val="D8E2EC"/>
-                </a:solidFill>
-                <a:latin typeface="Segoe UI"/>
-              </a:rPr>
-              <a:t> balanced on a moving cart — LQR-stabilized</a:t>
-            </a:r>
-          </a:p>
-          <a:p>
-            <a:pPr>
-              <a:spcAft>
-                <a:spcPts val="800"/>
-              </a:spcAft>
-            </a:pPr>
-            <a:r>
-              <a:rPr sz="2200">
-                <a:solidFill>
-                  <a:srgbClr val="35C4E8"/>
-                </a:solidFill>
-                <a:latin typeface="Segoe UI"/>
-              </a:rPr>
-              <a:t>•  </a:t>
-            </a:r>
-            <a:r>
-              <a:rPr sz="2200" b="0">
-                <a:solidFill>
-                  <a:srgbClr val="D8E2EC"/>
-                </a:solidFill>
-                <a:latin typeface="Segoe UI"/>
-              </a:rPr>
-              <a:t>Built from the same components, tags and registry you just saw</a:t>
-            </a:r>
-          </a:p>
-          <a:p>
-            <a:pPr>
-              <a:spcAft>
-                <a:spcPts val="800"/>
-              </a:spcAft>
-            </a:pPr>
-            <a:r>
-              <a:rPr sz="2200">
-                <a:solidFill>
-                  <a:srgbClr val="35C4E8"/>
-                </a:solidFill>
-                <a:latin typeface="Segoe UI"/>
-              </a:rPr>
-              <a:t>•  </a:t>
-            </a:r>
-            <a:r>
-              <a:rPr sz="2200" b="0">
-                <a:solidFill>
-                  <a:srgbClr val="D8E2EC"/>
-                </a:solidFill>
-                <a:latin typeface="Segoe UI"/>
-              </a:rPr>
-              <a:t>Linearized with </a:t>
-            </a:r>
-            <a:r>
-              <a:rPr sz="2200" b="0">
-                <a:solidFill>
-                  <a:srgbClr val="35C4E8"/>
-                </a:solidFill>
-                <a:latin typeface="Segoe UI"/>
-              </a:rPr>
-              <a:t>Dual&lt;double, N&gt;</a:t>
-            </a:r>
-            <a:r>
-              <a:rPr sz="2200" b="0">
-                <a:solidFill>
-                  <a:srgbClr val="D8E2EC"/>
-                </a:solidFill>
-                <a:latin typeface="Segoe UI"/>
-              </a:rPr>
-              <a:t> — the autodiff Jacobian from two slides ago</a:t>
-            </a:r>
-          </a:p>
-          <a:p>
-            <a:pPr>
-              <a:spcAft>
-                <a:spcPts val="800"/>
-              </a:spcAft>
-            </a:pPr>
-            <a:r>
-              <a:rPr sz="2200">
-                <a:solidFill>
-                  <a:srgbClr val="35C4E8"/>
-                </a:solidFill>
-                <a:latin typeface="Segoe UI"/>
-              </a:rPr>
-              <a:t>•  </a:t>
-            </a:r>
-            <a:r>
-              <a:rPr sz="2200" b="0">
-                <a:solidFill>
-                  <a:srgbClr val="D8E2EC"/>
-                </a:solidFill>
-                <a:latin typeface="Segoe UI"/>
-              </a:rPr>
-              <a:t>Same C++20, compiled to WebAssembly, running in your browser right now:</a:t>
-            </a:r>
-          </a:p>
-          <a:p>
-            <a:pPr>
-              <a:spcAft>
-                <a:spcPts val="800"/>
-              </a:spcAft>
-            </a:pPr>
-            <a:r>
-              <a:rPr sz="2200" b="1">
-                <a:solidFill>
-                  <a:srgbClr val="35C4E8"/>
-                </a:solidFill>
-                <a:latin typeface="Segoe UI"/>
-              </a:rPr>
-              <a:t>jedrzejmichalczyk.github.io/sopot</a:t>
-            </a:r>
-          </a:p>
-        </p:txBody>
-      </p:sp>
-      <p:sp>
-        <p:nvSpPr>
-          <p:cNvPr id="5" name="Rounded Rectangle 4"/>
+              <a:t>We've been here before</a:t>
+            </a:r>
+          </a:p>
+        </p:txBody>
+      </p:sp>
+      <p:sp>
+        <p:nvSpPr>
+          <p:cNvPr id="4" name="Rounded Rectangle 3"/>
           <p:cNvSpPr/>
           <p:nvPr/>
         </p:nvSpPr>
         <p:spPr>
           <a:xfrm>
-            <a:off x="4023360" y="4846320"/>
-            <a:ext cx="4114800" cy="1005840"/>
+            <a:off x="1097280" y="1737360"/>
+            <a:ext cx="9966960" cy="3108960"/>
           </a:xfrm>
           <a:prstGeom prst="roundRect">
             <a:avLst>
@@ -24542,7 +24718,7 @@
             </a:avLst>
           </a:prstGeom>
           <a:solidFill>
-            <a:srgbClr val="F2C744"/>
+            <a:srgbClr val="081626"/>
           </a:solidFill>
           <a:ln w="12700">
             <a:solidFill>
@@ -24571,13 +24747,87 @@
           <a:p>
             <a:pPr algn="ctr"/>
             <a:r>
-              <a:rPr sz="2600" b="1">
-                <a:solidFill>
-                  <a:srgbClr val="0B1F33"/>
-                </a:solidFill>
-                <a:latin typeface="Segoe UI"/>
-              </a:rPr>
-              <a:t>▶  LIVE DEMO</a:t>
+              <a:rPr sz="1600" b="0">
+                <a:solidFill>
+                  <a:srgbClr val="8CA3B8"/>
+                </a:solidFill>
+                <a:latin typeface="Segoe UI"/>
+              </a:rPr>
+              <a:t>[ PLACEHOLDER — scan of rocket-control code from a classic textbook
+(Zipfel / 1960s–90s Fortran, zero modularity) ]</a:t>
+            </a:r>
+          </a:p>
+        </p:txBody>
+      </p:sp>
+      <p:sp>
+        <p:nvSpPr>
+          <p:cNvPr id="5" name="TextBox 4"/>
+          <p:cNvSpPr txBox="1"/>
+          <p:nvPr/>
+        </p:nvSpPr>
+        <p:spPr>
+          <a:xfrm>
+            <a:off x="548640" y="5120640"/>
+            <a:ext cx="11064240" cy="4572000"/>
+          </a:xfrm>
+          <a:prstGeom prst="rect">
+            <a:avLst/>
+          </a:prstGeom>
+          <a:noFill/>
+        </p:spPr>
+        <p:txBody>
+          <a:bodyPr wrap="square">
+            <a:spAutoFit/>
+          </a:bodyPr>
+          <a:lstStyle/>
+          <a:p>
+            <a:pPr>
+              <a:spcAft>
+                <a:spcPts val="800"/>
+              </a:spcAft>
+            </a:pPr>
+            <a:r>
+              <a:rPr sz="2000">
+                <a:solidFill>
+                  <a:srgbClr val="35C4E8"/>
+                </a:solidFill>
+                <a:latin typeface="Segoe UI"/>
+              </a:rPr>
+              <a:t>•  </a:t>
+            </a:r>
+            <a:r>
+              <a:rPr sz="2000" b="0">
+                <a:solidFill>
+                  <a:srgbClr val="D8E2EC"/>
+                </a:solidFill>
+                <a:latin typeface="Segoe UI"/>
+              </a:rPr>
+              <a:t>Six decades of rocket code — the math was always modular; the code never was</a:t>
+            </a:r>
+          </a:p>
+          <a:p>
+            <a:pPr>
+              <a:spcAft>
+                <a:spcPts val="800"/>
+              </a:spcAft>
+            </a:pPr>
+            <a:r>
+              <a:rPr sz="2000">
+                <a:solidFill>
+                  <a:srgbClr val="35C4E8"/>
+                </a:solidFill>
+                <a:latin typeface="Segoe UI"/>
+              </a:rPr>
+              <a:t>•  </a:t>
+            </a:r>
+            <a:r>
+              <a:rPr sz="2000" b="1">
+                <a:solidFill>
+                  <a:srgbClr val="F2C744"/>
+                </a:solidFill>
+                <a:latin typeface="Segoe UI"/>
+              </a:rPr>
+              <a:t>Not because the engineers were careless — because the languages made them choose</a:t>
             </a:r>
           </a:p>
         </p:txBody>
@@ -24713,7 +24963,7 @@
                 </a:solidFill>
                 <a:latin typeface="Segoe UI"/>
               </a:rPr>
-              <a:t>IF YOU REMEMBER FOUR THINGS</a:t>
+              <a:t>FUN EXAMPLE — LIVE</a:t>
             </a:r>
           </a:p>
         </p:txBody>
@@ -24747,7 +24997,7 @@
                 </a:solidFill>
                 <a:latin typeface="Segoe UI"/>
               </a:rPr>
-              <a:t>Takeaways</a:t>
+              <a:t>One more thing: six pendulums on a cart</a:t>
             </a:r>
           </a:p>
         </p:txBody>
@@ -24760,7 +25010,7 @@
         </p:nvSpPr>
         <p:spPr>
           <a:xfrm>
-            <a:off x="548640" y="1828800"/>
+            <a:off x="548640" y="1737360"/>
             <a:ext cx="11064240" cy="4572000"/>
           </a:xfrm>
           <a:prstGeom prst="rect">
@@ -24780,7 +25030,7 @@
               </a:spcAft>
             </a:pPr>
             <a:r>
-              <a:rPr sz="2300">
+              <a:rPr sz="2200">
                 <a:solidFill>
                   <a:srgbClr val="35C4E8"/>
                 </a:solidFill>
@@ -24789,22 +25039,22 @@
               <a:t>•  </a:t>
             </a:r>
             <a:r>
-              <a:rPr sz="2300" b="1">
+              <a:rPr sz="2200" b="1">
                 <a:solidFill>
                   <a:srgbClr val="F2C744"/>
                 </a:solidFill>
                 <a:latin typeface="Segoe UI"/>
               </a:rPr>
-              <a:t>Separation of concerns is achievable at zero cost</a:t>
-            </a:r>
-            <a:r>
-              <a:rPr sz="2300" b="0">
+              <a:t>Inverted 6-pendulum chain</a:t>
+            </a:r>
+            <a:r>
+              <a:rPr sz="2200" b="0">
                 <a:solidFill>
                   <a:srgbClr val="D8E2EC"/>
                 </a:solidFill>
                 <a:latin typeface="Segoe UI"/>
               </a:rPr>
-              <a:t> in C++20 — measured, not asserted</a:t>
+              <a:t> balanced on a moving cart — LQR-stabilized</a:t>
             </a:r>
           </a:p>
           <a:p>
@@ -24814,7 +25064,7 @@
               </a:spcAft>
             </a:pPr>
             <a:r>
-              <a:rPr sz="2300">
+              <a:rPr sz="2200">
                 <a:solidFill>
                   <a:srgbClr val="35C4E8"/>
                 </a:solidFill>
@@ -24823,50 +25073,13 @@
               <a:t>•  </a:t>
             </a:r>
             <a:r>
-              <a:rPr sz="2300" b="0">
+              <a:rPr sz="2200" b="0">
                 <a:solidFill>
                   <a:srgbClr val="D8E2EC"/>
                 </a:solidFill>
                 <a:latin typeface="Segoe UI"/>
               </a:rPr>
-              <a:t>The recipe is small: </a:t>
-            </a:r>
-            <a:r>
-              <a:rPr sz="2300" b="1">
-                <a:solidFill>
-                  <a:srgbClr val="35C4E8"/>
-                </a:solidFill>
-                <a:latin typeface="Segoe UI"/>
-              </a:rPr>
-              <a:t>typed tags + overloaded compute() + a constexpr registry + concepts</a:t>
-            </a:r>
-          </a:p>
-          <a:p>
-            <a:pPr lvl="1">
-              <a:spcBef>
-                <a:spcPts val="0"/>
-              </a:spcBef>
-              <a:spcAft>
-                <a:spcPts val="800"/>
-              </a:spcAft>
-            </a:pPr>
-            <a:r>
-              <a:rPr sz="2100">
-                <a:solidFill>
-                  <a:srgbClr val="8CA3B8"/>
-                </a:solidFill>
-                <a:latin typeface="Segoe UI"/>
-              </a:rPr>
-              <a:t>–  </a:t>
-            </a:r>
-            <a:r>
-              <a:rPr sz="2100" b="0">
-                <a:solidFill>
-                  <a:srgbClr val="D8E2EC"/>
-                </a:solidFill>
-                <a:latin typeface="Segoe UI"/>
-              </a:rPr>
-              <a:t>no inheritance, no virtuals, no strings, no codegen</a:t>
+              <a:t>Built from the same components, tags and registry you just saw</a:t>
             </a:r>
           </a:p>
           <a:p>
@@ -24876,7 +25089,7 @@
               </a:spcAft>
             </a:pPr>
             <a:r>
-              <a:rPr sz="2300">
+              <a:rPr sz="2200">
                 <a:solidFill>
                   <a:srgbClr val="35C4E8"/>
                 </a:solidFill>
@@ -24885,22 +25098,31 @@
               <a:t>•  </a:t>
             </a:r>
             <a:r>
-              <a:rPr sz="2300" b="1">
-                <a:solidFill>
-                  <a:srgbClr val="FFFFFF"/>
-                </a:solidFill>
-                <a:latin typeface="Segoe UI"/>
-              </a:rPr>
-              <a:t>Prefer abstractions you can verify</a:t>
-            </a:r>
-            <a:r>
-              <a:rPr sz="2300" b="0">
+              <a:rPr sz="2200" b="0">
                 <a:solidFill>
                   <a:srgbClr val="D8E2EC"/>
                 </a:solidFill>
                 <a:latin typeface="Segoe UI"/>
               </a:rPr>
-              <a:t> — conservation laws and disassembly are unit tests for architecture</a:t>
+              <a:t>Linearized with </a:t>
+            </a:r>
+            <a:r>
+              <a:rPr sz="2200" b="0">
+                <a:solidFill>
+                  <a:srgbClr val="35C4E8"/>
+                </a:solidFill>
+                <a:latin typeface="Segoe UI"/>
+              </a:rPr>
+              <a:t>Dual&lt;double, N&gt;</a:t>
+            </a:r>
+            <a:r>
+              <a:rPr sz="2200" b="0">
+                <a:solidFill>
+                  <a:srgbClr val="D8E2EC"/>
+                </a:solidFill>
+                <a:latin typeface="Segoe UI"/>
+              </a:rPr>
+              <a:t> — the autodiff Jacobian from two slides ago</a:t>
             </a:r>
           </a:p>
           <a:p>
@@ -24910,7 +25132,7 @@
               </a:spcAft>
             </a:pPr>
             <a:r>
-              <a:rPr sz="2300">
+              <a:rPr sz="2200">
                 <a:solidFill>
                   <a:srgbClr val="35C4E8"/>
                 </a:solidFill>
@@ -24919,29 +25141,93 @@
               <a:t>•  </a:t>
             </a:r>
             <a:r>
-              <a:rPr sz="2300" b="1">
-                <a:solidFill>
-                  <a:srgbClr val="FFFFFF"/>
-                </a:solidFill>
-                <a:latin typeface="Segoe UI"/>
-              </a:rPr>
-              <a:t>Quality vs performance was the false tradeoff</a:t>
-            </a:r>
-            <a:r>
-              <a:rPr sz="2300" b="0">
+              <a:rPr sz="2200" b="0">
                 <a:solidFill>
                   <a:srgbClr val="D8E2EC"/>
                 </a:solidFill>
                 <a:latin typeface="Segoe UI"/>
               </a:rPr>
-              <a:t> — modern C++ finally lets us refuse it</a:t>
-            </a:r>
-          </a:p>
-        </p:txBody>
-      </p:sp>
-      <p:sp>
-        <p:nvSpPr>
-          <p:cNvPr id="5" name="TextBox 4"/>
+              <a:t>Same C++20, compiled to WebAssembly, running in your browser right now:</a:t>
+            </a:r>
+          </a:p>
+          <a:p>
+            <a:pPr>
+              <a:spcAft>
+                <a:spcPts val="800"/>
+              </a:spcAft>
+            </a:pPr>
+            <a:r>
+              <a:rPr sz="2200" b="1">
+                <a:solidFill>
+                  <a:srgbClr val="35C4E8"/>
+                </a:solidFill>
+                <a:latin typeface="Segoe UI"/>
+              </a:rPr>
+              <a:t>jedrzejmichalczyk.github.io/sopot</a:t>
+            </a:r>
+          </a:p>
+        </p:txBody>
+      </p:sp>
+      <p:sp>
+        <p:nvSpPr>
+          <p:cNvPr id="5" name="Rounded Rectangle 4"/>
+          <p:cNvSpPr/>
+          <p:nvPr/>
+        </p:nvSpPr>
+        <p:spPr>
+          <a:xfrm>
+            <a:off x="4023360" y="4846320"/>
+            <a:ext cx="4114800" cy="1005840"/>
+          </a:xfrm>
+          <a:prstGeom prst="roundRect">
+            <a:avLst>
+              <a:gd name="adj" fmla="val 10000"/>
+            </a:avLst>
+          </a:prstGeom>
+          <a:solidFill>
+            <a:srgbClr val="F2C744"/>
+          </a:solidFill>
+          <a:ln w="12700">
+            <a:solidFill>
+              <a:srgbClr val="1E3A55"/>
+            </a:solidFill>
+          </a:ln>
+          <a:effectLst/>
+        </p:spPr>
+        <p:style>
+          <a:lnRef idx="1">
+            <a:schemeClr val="accent1"/>
+          </a:lnRef>
+          <a:fillRef idx="3">
+            <a:schemeClr val="accent1"/>
+          </a:fillRef>
+          <a:effectRef idx="2">
+            <a:schemeClr val="accent1"/>
+          </a:effectRef>
+          <a:fontRef idx="minor">
+            <a:schemeClr val="lt1"/>
+          </a:fontRef>
+        </p:style>
+        <p:txBody>
+          <a:bodyPr wrap="square" rtlCol="0" anchor="ctr"/>
+          <a:lstStyle/>
+          <a:p>
+            <a:pPr algn="ctr"/>
+            <a:r>
+              <a:rPr sz="2600" b="1">
+                <a:solidFill>
+                  <a:srgbClr val="0B1F33"/>
+                </a:solidFill>
+                <a:latin typeface="Segoe UI"/>
+              </a:rPr>
+              <a:t>▶  LIVE DEMO</a:t>
+            </a:r>
+          </a:p>
+        </p:txBody>
+      </p:sp>
+      <p:sp>
+        <p:nvSpPr>
+          <p:cNvPr id="6" name="TextBox 5"/>
           <p:cNvSpPr txBox="1"/>
           <p:nvPr/>
         </p:nvSpPr>
@@ -24975,7 +25261,7 @@
       </p:sp>
       <p:sp>
         <p:nvSpPr>
-          <p:cNvPr id="6" name="TextBox 5"/>
+          <p:cNvPr id="7" name="TextBox 6"/>
           <p:cNvSpPr txBox="1"/>
           <p:nvPr/>
         </p:nvSpPr>
@@ -25049,8 +25335,8 @@
         </p:nvSpPr>
         <p:spPr>
           <a:xfrm>
-            <a:off x="822960" y="1463040"/>
-            <a:ext cx="10515600" cy="1371600"/>
+            <a:off x="502920" y="384048"/>
+            <a:ext cx="11155680" cy="292608"/>
           </a:xfrm>
           <a:prstGeom prst="rect">
             <a:avLst/>
@@ -25064,13 +25350,13 @@
           <a:lstStyle/>
           <a:p>
             <a:r>
-              <a:rPr sz="4800" b="1">
-                <a:solidFill>
-                  <a:srgbClr val="FFFFFF"/>
-                </a:solidFill>
-                <a:latin typeface="Segoe UI"/>
-              </a:rPr>
-              <a:t>Thank you!  Questions?</a:t>
+              <a:rPr sz="1300" b="1">
+                <a:solidFill>
+                  <a:srgbClr val="F2C744"/>
+                </a:solidFill>
+                <a:latin typeface="Segoe UI"/>
+              </a:rPr>
+              <a:t>IF YOU REMEMBER FOUR THINGS</a:t>
             </a:r>
           </a:p>
         </p:txBody>
@@ -25083,8 +25369,42 @@
         </p:nvSpPr>
         <p:spPr>
           <a:xfrm>
-            <a:off x="548640" y="3108960"/>
-            <a:ext cx="11064240" cy="1405513"/>
+            <a:off x="457200" y="694944"/>
+            <a:ext cx="11247120" cy="777240"/>
+          </a:xfrm>
+          <a:prstGeom prst="rect">
+            <a:avLst/>
+          </a:prstGeom>
+          <a:noFill/>
+        </p:spPr>
+        <p:txBody>
+          <a:bodyPr wrap="none">
+            <a:spAutoFit/>
+          </a:bodyPr>
+          <a:lstStyle/>
+          <a:p>
+            <a:r>
+              <a:rPr sz="3100" b="1">
+                <a:solidFill>
+                  <a:srgbClr val="FFFFFF"/>
+                </a:solidFill>
+                <a:latin typeface="Segoe UI"/>
+              </a:rPr>
+              <a:t>Takeaways</a:t>
+            </a:r>
+          </a:p>
+        </p:txBody>
+      </p:sp>
+      <p:sp>
+        <p:nvSpPr>
+          <p:cNvPr id="4" name="TextBox 3"/>
+          <p:cNvSpPr txBox="1"/>
+          <p:nvPr/>
+        </p:nvSpPr>
+        <p:spPr>
+          <a:xfrm>
+            <a:off x="548640" y="1828800"/>
+            <a:ext cx="11064240" cy="4572000"/>
           </a:xfrm>
           <a:prstGeom prst="rect">
             <a:avLst/>
@@ -25103,7 +25423,7 @@
               </a:spcAft>
             </a:pPr>
             <a:r>
-              <a:rPr sz="2400" dirty="0">
+              <a:rPr sz="2300">
                 <a:solidFill>
                   <a:srgbClr val="35C4E8"/>
                 </a:solidFill>
@@ -25112,56 +25432,23 @@
               <a:t>•  </a:t>
             </a:r>
             <a:r>
-              <a:rPr sz="2400" b="0" dirty="0">
-                <a:solidFill>
-                  <a:srgbClr val="8CA3B8"/>
-                </a:solidFill>
-                <a:latin typeface="Segoe UI"/>
-              </a:rPr>
-              <a:t>Code &amp; slides:  </a:t>
-            </a:r>
-            <a:r>
-              <a:rPr sz="2400" b="1" dirty="0">
-                <a:solidFill>
-                  <a:srgbClr val="35C4E8"/>
-                </a:solidFill>
-                <a:latin typeface="Segoe UI"/>
-              </a:rPr>
-              <a:t>github.com/</a:t>
-            </a:r>
-            <a:r>
-              <a:rPr sz="2400" b="1" dirty="0" err="1">
-                <a:solidFill>
-                  <a:srgbClr val="35C4E8"/>
-                </a:solidFill>
-                <a:latin typeface="Segoe UI"/>
-              </a:rPr>
-              <a:t>jedrzejmichalczyk</a:t>
-            </a:r>
-            <a:r>
-              <a:rPr sz="2400" b="1" dirty="0">
-                <a:solidFill>
-                  <a:srgbClr val="35C4E8"/>
-                </a:solidFill>
-                <a:latin typeface="Segoe UI"/>
-              </a:rPr>
-              <a:t>/</a:t>
-            </a:r>
-            <a:r>
-              <a:rPr sz="2400" b="1" dirty="0" err="1">
-                <a:solidFill>
-                  <a:srgbClr val="35C4E8"/>
-                </a:solidFill>
-                <a:latin typeface="Segoe UI"/>
-              </a:rPr>
-              <a:t>sopot</a:t>
-            </a:r>
-            <a:endParaRPr sz="2400" b="1" dirty="0">
-              <a:solidFill>
-                <a:srgbClr val="35C4E8"/>
-              </a:solidFill>
-              <a:latin typeface="Segoe UI"/>
-            </a:endParaRPr>
+              <a:rPr sz="2300" b="1">
+                <a:solidFill>
+                  <a:srgbClr val="F2C744"/>
+                </a:solidFill>
+                <a:latin typeface="Segoe UI"/>
+              </a:rPr>
+              <a:t>Separation of concerns is achievable at zero cost</a:t>
+            </a:r>
+            <a:r>
+              <a:rPr sz="2300" b="0">
+                <a:solidFill>
+                  <a:srgbClr val="D8E2EC"/>
+                </a:solidFill>
+                <a:latin typeface="Segoe UI"/>
+              </a:rPr>
+              <a:t> in C++20 — measured, not asserted</a:t>
+            </a:r>
           </a:p>
           <a:p>
             <a:pPr>
@@ -25170,7 +25457,7 @@
               </a:spcAft>
             </a:pPr>
             <a:r>
-              <a:rPr sz="2400" dirty="0">
+              <a:rPr sz="2300">
                 <a:solidFill>
                   <a:srgbClr val="35C4E8"/>
                 </a:solidFill>
@@ -25179,38 +25466,51 @@
               <a:t>•  </a:t>
             </a:r>
             <a:r>
-              <a:rPr sz="2400" b="0" dirty="0">
+              <a:rPr sz="2300" b="0">
+                <a:solidFill>
+                  <a:srgbClr val="D8E2EC"/>
+                </a:solidFill>
+                <a:latin typeface="Segoe UI"/>
+              </a:rPr>
+              <a:t>The recipe is small: </a:t>
+            </a:r>
+            <a:r>
+              <a:rPr sz="2300" b="1">
+                <a:solidFill>
+                  <a:srgbClr val="35C4E8"/>
+                </a:solidFill>
+                <a:latin typeface="Segoe UI"/>
+              </a:rPr>
+              <a:t>typed tags + overloaded compute() + a constexpr registry + concepts</a:t>
+            </a:r>
+          </a:p>
+          <a:p>
+            <a:pPr lvl="1">
+              <a:spcBef>
+                <a:spcPts val="0"/>
+              </a:spcBef>
+              <a:spcAft>
+                <a:spcPts val="800"/>
+              </a:spcAft>
+            </a:pPr>
+            <a:r>
+              <a:rPr sz="2100">
                 <a:solidFill>
                   <a:srgbClr val="8CA3B8"/>
                 </a:solidFill>
                 <a:latin typeface="Segoe UI"/>
               </a:rPr>
-              <a:t>Live demo:  </a:t>
-            </a:r>
-            <a:r>
-              <a:rPr sz="2400" b="1" dirty="0">
-                <a:solidFill>
-                  <a:srgbClr val="35C4E8"/>
-                </a:solidFill>
-                <a:latin typeface="Segoe UI"/>
-              </a:rPr>
-              <a:t>jedrzejmichalczyk.github.io/</a:t>
-            </a:r>
-            <a:r>
-              <a:rPr sz="2400" b="1" dirty="0" err="1">
-                <a:solidFill>
-                  <a:srgbClr val="35C4E8"/>
-                </a:solidFill>
-                <a:latin typeface="Segoe UI"/>
-              </a:rPr>
-              <a:t>sopot</a:t>
-            </a:r>
-            <a:endParaRPr sz="2400" b="1" dirty="0">
-              <a:solidFill>
-                <a:srgbClr val="35C4E8"/>
-              </a:solidFill>
-              <a:latin typeface="Segoe UI"/>
-            </a:endParaRPr>
+              <a:t>–  </a:t>
+            </a:r>
+            <a:r>
+              <a:rPr sz="2100" b="0">
+                <a:solidFill>
+                  <a:srgbClr val="D8E2EC"/>
+                </a:solidFill>
+                <a:latin typeface="Segoe UI"/>
+              </a:rPr>
+              <a:t>no inheritance, no virtuals, no strings, no codegen</a:t>
+            </a:r>
           </a:p>
           <a:p>
             <a:pPr>
@@ -25219,7 +25519,7 @@
               </a:spcAft>
             </a:pPr>
             <a:r>
-              <a:rPr sz="2400" dirty="0">
+              <a:rPr sz="2300">
                 <a:solidFill>
                   <a:srgbClr val="35C4E8"/>
                 </a:solidFill>
@@ -25228,71 +25528,63 @@
               <a:t>•  </a:t>
             </a:r>
             <a:r>
-              <a:rPr sz="2400" b="0" dirty="0">
-                <a:solidFill>
-                  <a:srgbClr val="8CA3B8"/>
-                </a:solidFill>
-                <a:latin typeface="Segoe UI"/>
-              </a:rPr>
-              <a:t>Email:  </a:t>
-            </a:r>
-            <a:r>
-              <a:rPr sz="2400" b="1" dirty="0" err="1">
-                <a:solidFill>
-                  <a:srgbClr val="F2C744"/>
-                </a:solidFill>
-                <a:latin typeface="Segoe UI"/>
-              </a:rPr>
-              <a:t>jedrzej.michalczyk</a:t>
-            </a:r>
-            <a:r>
-              <a:rPr sz="2400" b="1" dirty="0">
-                <a:solidFill>
-                  <a:srgbClr val="F2C744"/>
-                </a:solidFill>
-                <a:latin typeface="Segoe UI"/>
-              </a:rPr>
-              <a:t>@</a:t>
-            </a:r>
-            <a:r>
-              <a:rPr lang="pl-PL" sz="2400" b="1" dirty="0" err="1">
-                <a:solidFill>
-                  <a:srgbClr val="F2C744"/>
-                </a:solidFill>
-                <a:latin typeface="Segoe UI"/>
-              </a:rPr>
-              <a:t>gmail</a:t>
-            </a:r>
-            <a:r>
-              <a:rPr sz="2400" b="1" dirty="0">
-                <a:solidFill>
-                  <a:srgbClr val="F2C744"/>
-                </a:solidFill>
-                <a:latin typeface="Segoe UI"/>
-              </a:rPr>
-              <a:t>.</a:t>
-            </a:r>
-            <a:r>
-              <a:rPr lang="pl-PL" sz="2400" b="1" dirty="0">
-                <a:solidFill>
-                  <a:srgbClr val="F2C744"/>
-                </a:solidFill>
-                <a:latin typeface="Segoe UI"/>
-              </a:rPr>
-              <a:t>com</a:t>
-            </a:r>
-            <a:endParaRPr sz="2400" b="1" dirty="0">
-              <a:solidFill>
-                <a:srgbClr val="F2C744"/>
-              </a:solidFill>
-              <a:latin typeface="Segoe UI"/>
-            </a:endParaRPr>
-          </a:p>
-        </p:txBody>
-      </p:sp>
-      <p:sp>
-        <p:nvSpPr>
-          <p:cNvPr id="4" name="TextBox 3"/>
+              <a:rPr sz="2300" b="1">
+                <a:solidFill>
+                  <a:srgbClr val="FFFFFF"/>
+                </a:solidFill>
+                <a:latin typeface="Segoe UI"/>
+              </a:rPr>
+              <a:t>Prefer abstractions you can verify</a:t>
+            </a:r>
+            <a:r>
+              <a:rPr sz="2300" b="0">
+                <a:solidFill>
+                  <a:srgbClr val="D8E2EC"/>
+                </a:solidFill>
+                <a:latin typeface="Segoe UI"/>
+              </a:rPr>
+              <a:t> — conservation laws and disassembly are unit tests for architecture</a:t>
+            </a:r>
+          </a:p>
+          <a:p>
+            <a:pPr>
+              <a:spcAft>
+                <a:spcPts val="800"/>
+              </a:spcAft>
+            </a:pPr>
+            <a:r>
+              <a:rPr sz="2300">
+                <a:solidFill>
+                  <a:srgbClr val="35C4E8"/>
+                </a:solidFill>
+                <a:latin typeface="Segoe UI"/>
+              </a:rPr>
+              <a:t>•  </a:t>
+            </a:r>
+            <a:r>
+              <a:rPr sz="2300" b="1">
+                <a:solidFill>
+                  <a:srgbClr val="FFFFFF"/>
+                </a:solidFill>
+                <a:latin typeface="Segoe UI"/>
+              </a:rPr>
+              <a:t>Quality vs performance was the false tradeoff</a:t>
+            </a:r>
+            <a:r>
+              <a:rPr sz="2300" b="0">
+                <a:solidFill>
+                  <a:srgbClr val="D8E2EC"/>
+                </a:solidFill>
+                <a:latin typeface="Segoe UI"/>
+              </a:rPr>
+              <a:t> — modern C++ finally lets us refuse it</a:t>
+            </a:r>
+          </a:p>
+        </p:txBody>
+      </p:sp>
+      <p:sp>
+        <p:nvSpPr>
+          <p:cNvPr id="5" name="TextBox 4"/>
           <p:cNvSpPr txBox="1"/>
           <p:nvPr/>
         </p:nvSpPr>
@@ -25326,7 +25618,7 @@
       </p:sp>
       <p:sp>
         <p:nvSpPr>
-          <p:cNvPr id="5" name="TextBox 4"/>
+          <p:cNvPr id="6" name="TextBox 5"/>
           <p:cNvSpPr txBox="1"/>
           <p:nvPr/>
         </p:nvSpPr>
@@ -26079,6 +26371,357 @@
         <p14:creationId xmlns:p14="http://schemas.microsoft.com/office/powerpoint/2010/main" val="793379126"/>
       </p:ext>
     </p:extLst>
+  </p:cSld>
+  <p:clrMapOvr>
+    <a:masterClrMapping/>
+  </p:clrMapOvr>
+</p:sld>
+</file>
+
+<file path=ppt/slides/slide40.xml><?xml version="1.0" encoding="utf-8"?>
+<p:sld xmlns:a="http://schemas.openxmlformats.org/drawingml/2006/main" xmlns:r="http://schemas.openxmlformats.org/officeDocument/2006/relationships" xmlns:p="http://schemas.openxmlformats.org/presentationml/2006/main">
+  <p:cSld>
+    <p:bg>
+      <p:bgPr>
+        <a:solidFill>
+          <a:srgbClr val="0B1F33"/>
+        </a:solidFill>
+        <a:effectLst/>
+      </p:bgPr>
+    </p:bg>
+    <p:spTree>
+      <p:nvGrpSpPr>
+        <p:cNvPr id="1" name=""/>
+        <p:cNvGrpSpPr/>
+        <p:nvPr/>
+      </p:nvGrpSpPr>
+      <p:grpSpPr>
+        <a:xfrm>
+          <a:off x="0" y="0"/>
+          <a:ext cx="0" cy="0"/>
+          <a:chOff x="0" y="0"/>
+          <a:chExt cx="0" cy="0"/>
+        </a:xfrm>
+      </p:grpSpPr>
+      <p:sp>
+        <p:nvSpPr>
+          <p:cNvPr id="2" name="TextBox 1"/>
+          <p:cNvSpPr txBox="1"/>
+          <p:nvPr/>
+        </p:nvSpPr>
+        <p:spPr>
+          <a:xfrm>
+            <a:off x="822960" y="1463040"/>
+            <a:ext cx="10515600" cy="1371600"/>
+          </a:xfrm>
+          <a:prstGeom prst="rect">
+            <a:avLst/>
+          </a:prstGeom>
+          <a:noFill/>
+        </p:spPr>
+        <p:txBody>
+          <a:bodyPr wrap="none">
+            <a:spAutoFit/>
+          </a:bodyPr>
+          <a:lstStyle/>
+          <a:p>
+            <a:r>
+              <a:rPr sz="4800" b="1">
+                <a:solidFill>
+                  <a:srgbClr val="FFFFFF"/>
+                </a:solidFill>
+                <a:latin typeface="Segoe UI"/>
+              </a:rPr>
+              <a:t>Thank you!  Questions?</a:t>
+            </a:r>
+          </a:p>
+        </p:txBody>
+      </p:sp>
+      <p:sp>
+        <p:nvSpPr>
+          <p:cNvPr id="3" name="TextBox 2"/>
+          <p:cNvSpPr txBox="1"/>
+          <p:nvPr/>
+        </p:nvSpPr>
+        <p:spPr>
+          <a:xfrm>
+            <a:off x="548640" y="3108960"/>
+            <a:ext cx="11064240" cy="1405513"/>
+          </a:xfrm>
+          <a:prstGeom prst="rect">
+            <a:avLst/>
+          </a:prstGeom>
+          <a:noFill/>
+        </p:spPr>
+        <p:txBody>
+          <a:bodyPr wrap="square">
+            <a:spAutoFit/>
+          </a:bodyPr>
+          <a:lstStyle/>
+          <a:p>
+            <a:pPr>
+              <a:spcAft>
+                <a:spcPts val="800"/>
+              </a:spcAft>
+            </a:pPr>
+            <a:r>
+              <a:rPr sz="2400" dirty="0">
+                <a:solidFill>
+                  <a:srgbClr val="35C4E8"/>
+                </a:solidFill>
+                <a:latin typeface="Segoe UI"/>
+              </a:rPr>
+              <a:t>•  </a:t>
+            </a:r>
+            <a:r>
+              <a:rPr sz="2400" b="0" dirty="0">
+                <a:solidFill>
+                  <a:srgbClr val="8CA3B8"/>
+                </a:solidFill>
+                <a:latin typeface="Segoe UI"/>
+              </a:rPr>
+              <a:t>Code &amp; slides:  </a:t>
+            </a:r>
+            <a:r>
+              <a:rPr sz="2400" b="1" dirty="0">
+                <a:solidFill>
+                  <a:srgbClr val="35C4E8"/>
+                </a:solidFill>
+                <a:latin typeface="Segoe UI"/>
+              </a:rPr>
+              <a:t>github.com/</a:t>
+            </a:r>
+            <a:r>
+              <a:rPr sz="2400" b="1" dirty="0" err="1">
+                <a:solidFill>
+                  <a:srgbClr val="35C4E8"/>
+                </a:solidFill>
+                <a:latin typeface="Segoe UI"/>
+              </a:rPr>
+              <a:t>jedrzejmichalczyk</a:t>
+            </a:r>
+            <a:r>
+              <a:rPr sz="2400" b="1" dirty="0">
+                <a:solidFill>
+                  <a:srgbClr val="35C4E8"/>
+                </a:solidFill>
+                <a:latin typeface="Segoe UI"/>
+              </a:rPr>
+              <a:t>/</a:t>
+            </a:r>
+            <a:r>
+              <a:rPr sz="2400" b="1" dirty="0" err="1">
+                <a:solidFill>
+                  <a:srgbClr val="35C4E8"/>
+                </a:solidFill>
+                <a:latin typeface="Segoe UI"/>
+              </a:rPr>
+              <a:t>sopot</a:t>
+            </a:r>
+            <a:endParaRPr sz="2400" b="1" dirty="0">
+              <a:solidFill>
+                <a:srgbClr val="35C4E8"/>
+              </a:solidFill>
+              <a:latin typeface="Segoe UI"/>
+            </a:endParaRPr>
+          </a:p>
+          <a:p>
+            <a:pPr>
+              <a:spcAft>
+                <a:spcPts val="800"/>
+              </a:spcAft>
+            </a:pPr>
+            <a:r>
+              <a:rPr sz="2400" dirty="0">
+                <a:solidFill>
+                  <a:srgbClr val="35C4E8"/>
+                </a:solidFill>
+                <a:latin typeface="Segoe UI"/>
+              </a:rPr>
+              <a:t>•  </a:t>
+            </a:r>
+            <a:r>
+              <a:rPr sz="2400" b="0" dirty="0">
+                <a:solidFill>
+                  <a:srgbClr val="8CA3B8"/>
+                </a:solidFill>
+                <a:latin typeface="Segoe UI"/>
+              </a:rPr>
+              <a:t>Live demo:  </a:t>
+            </a:r>
+            <a:r>
+              <a:rPr sz="2400" b="1" dirty="0">
+                <a:solidFill>
+                  <a:srgbClr val="35C4E8"/>
+                </a:solidFill>
+                <a:latin typeface="Segoe UI"/>
+              </a:rPr>
+              <a:t>jedrzejmichalczyk.github.io/</a:t>
+            </a:r>
+            <a:r>
+              <a:rPr sz="2400" b="1" dirty="0" err="1">
+                <a:solidFill>
+                  <a:srgbClr val="35C4E8"/>
+                </a:solidFill>
+                <a:latin typeface="Segoe UI"/>
+              </a:rPr>
+              <a:t>sopot</a:t>
+            </a:r>
+            <a:endParaRPr sz="2400" b="1" dirty="0">
+              <a:solidFill>
+                <a:srgbClr val="35C4E8"/>
+              </a:solidFill>
+              <a:latin typeface="Segoe UI"/>
+            </a:endParaRPr>
+          </a:p>
+          <a:p>
+            <a:pPr>
+              <a:spcAft>
+                <a:spcPts val="800"/>
+              </a:spcAft>
+            </a:pPr>
+            <a:r>
+              <a:rPr sz="2400" dirty="0">
+                <a:solidFill>
+                  <a:srgbClr val="35C4E8"/>
+                </a:solidFill>
+                <a:latin typeface="Segoe UI"/>
+              </a:rPr>
+              <a:t>•  </a:t>
+            </a:r>
+            <a:r>
+              <a:rPr sz="2400" b="0" dirty="0">
+                <a:solidFill>
+                  <a:srgbClr val="8CA3B8"/>
+                </a:solidFill>
+                <a:latin typeface="Segoe UI"/>
+              </a:rPr>
+              <a:t>Email:  </a:t>
+            </a:r>
+            <a:r>
+              <a:rPr sz="2400" b="1" dirty="0" err="1">
+                <a:solidFill>
+                  <a:srgbClr val="F2C744"/>
+                </a:solidFill>
+                <a:latin typeface="Segoe UI"/>
+              </a:rPr>
+              <a:t>jedrzej.michalczyk</a:t>
+            </a:r>
+            <a:r>
+              <a:rPr sz="2400" b="1" dirty="0">
+                <a:solidFill>
+                  <a:srgbClr val="F2C744"/>
+                </a:solidFill>
+                <a:latin typeface="Segoe UI"/>
+              </a:rPr>
+              <a:t>@</a:t>
+            </a:r>
+            <a:r>
+              <a:rPr lang="pl-PL" sz="2400" b="1" dirty="0" err="1">
+                <a:solidFill>
+                  <a:srgbClr val="F2C744"/>
+                </a:solidFill>
+                <a:latin typeface="Segoe UI"/>
+              </a:rPr>
+              <a:t>gmail</a:t>
+            </a:r>
+            <a:r>
+              <a:rPr sz="2400" b="1" dirty="0">
+                <a:solidFill>
+                  <a:srgbClr val="F2C744"/>
+                </a:solidFill>
+                <a:latin typeface="Segoe UI"/>
+              </a:rPr>
+              <a:t>.</a:t>
+            </a:r>
+            <a:r>
+              <a:rPr lang="pl-PL" sz="2400" b="1" dirty="0">
+                <a:solidFill>
+                  <a:srgbClr val="F2C744"/>
+                </a:solidFill>
+                <a:latin typeface="Segoe UI"/>
+              </a:rPr>
+              <a:t>com</a:t>
+            </a:r>
+            <a:endParaRPr sz="2400" b="1" dirty="0">
+              <a:solidFill>
+                <a:srgbClr val="F2C744"/>
+              </a:solidFill>
+              <a:latin typeface="Segoe UI"/>
+            </a:endParaRPr>
+          </a:p>
+        </p:txBody>
+      </p:sp>
+      <p:sp>
+        <p:nvSpPr>
+          <p:cNvPr id="4" name="TextBox 3"/>
+          <p:cNvSpPr txBox="1"/>
+          <p:nvPr/>
+        </p:nvSpPr>
+        <p:spPr>
+          <a:xfrm>
+            <a:off x="411480" y="6446520"/>
+            <a:ext cx="10058400" cy="320040"/>
+          </a:xfrm>
+          <a:prstGeom prst="rect">
+            <a:avLst/>
+          </a:prstGeom>
+          <a:noFill/>
+        </p:spPr>
+        <p:txBody>
+          <a:bodyPr wrap="none">
+            <a:spAutoFit/>
+          </a:bodyPr>
+          <a:lstStyle/>
+          <a:p>
+            <a:r>
+              <a:rPr sz="1000">
+                <a:solidFill>
+                  <a:srgbClr val="8CA3B8"/>
+                </a:solidFill>
+                <a:latin typeface="Segoe UI"/>
+              </a:rPr>
+              <a:t>Separation of Concerns at Zero Cost — ACCU on Sea 2026</a:t>
+            </a:r>
+          </a:p>
+        </p:txBody>
+      </p:sp>
+      <p:sp>
+        <p:nvSpPr>
+          <p:cNvPr id="5" name="TextBox 4"/>
+          <p:cNvSpPr txBox="1"/>
+          <p:nvPr/>
+        </p:nvSpPr>
+        <p:spPr>
+          <a:xfrm>
+            <a:off x="11384280" y="6446520"/>
+            <a:ext cx="548640" cy="320040"/>
+          </a:xfrm>
+          <a:prstGeom prst="rect">
+            <a:avLst/>
+          </a:prstGeom>
+          <a:noFill/>
+        </p:spPr>
+        <p:txBody>
+          <a:bodyPr wrap="none">
+            <a:spAutoFit/>
+          </a:bodyPr>
+          <a:lstStyle/>
+          <a:p>
+            <a:pPr algn="r"/>
+            <a:r>
+              <a:rPr sz="1000">
+                <a:solidFill>
+                  <a:srgbClr val="8CA3B8"/>
+                </a:solidFill>
+                <a:latin typeface="Segoe UI"/>
+              </a:rPr>
+              <a:t>40</a:t>
+            </a:r>
+          </a:p>
+        </p:txBody>
+      </p:sp>
+    </p:spTree>
   </p:cSld>
   <p:clrMapOvr>
     <a:masterClrMapping/>

--- a/slides/ACCU-Separation-of-Concerns-at-Zero-Cost.pptx
+++ b/slides/ACCU-Separation-of-Concerns-at-Zero-Cost.pptx
@@ -45,6 +45,7 @@
     <p:sldId id="288" r:id="rId35"/>
     <p:sldId id="289" r:id="rId36"/>
     <p:sldId id="290" r:id="rId37"/>
+    <p:sldId id="298" r:id="rId47"/>
     <p:sldId id="291" r:id="rId38"/>
     <p:sldId id="292" r:id="rId39"/>
     <p:sldId id="293" r:id="rId40"/>
@@ -24709,8 +24710,8 @@
         </p:nvSpPr>
         <p:spPr>
           <a:xfrm>
-            <a:off x="1097280" y="1737360"/>
-            <a:ext cx="9966960" cy="3108960"/>
+            <a:off x="548640" y="1554480"/>
+            <a:ext cx="11338560" cy="3017520"/>
           </a:xfrm>
           <a:prstGeom prst="roundRect">
             <a:avLst>
@@ -24746,16 +24747,6 @@
           <a:lstStyle/>
           <a:p>
             <a:pPr algn="ctr"/>
-            <a:r>
-              <a:rPr sz="1600" b="0">
-                <a:solidFill>
-                  <a:srgbClr val="8CA3B8"/>
-                </a:solidFill>
-                <a:latin typeface="Segoe UI"/>
-              </a:rPr>
-              <a:t>[ PLACEHOLDER — scan of rocket-control code from a classic textbook
-(Zipfel / 1960s–90s Fortran, zero modularity) ]</a:t>
-            </a:r>
           </a:p>
         </p:txBody>
       </p:sp>
@@ -24901,6 +24892,1476 @@
           </a:p>
         </p:txBody>
       </p:sp>
+      <p:sp>
+        <p:nvSpPr>
+          <p:cNvPr id="8" name="zarchan setup"/>
+          <p:cNvSpPr txBox="1"/>
+          <p:nvPr/>
+        </p:nvSpPr>
+        <p:spPr>
+          <a:xfrm>
+            <a:off x="777240" y="1691640"/>
+            <a:ext cx="10881360" cy="2743200"/>
+          </a:xfrm>
+          <a:prstGeom prst="rect">
+            <a:avLst/>
+          </a:prstGeom>
+          <a:noFill/>
+        </p:spPr>
+        <p:txBody>
+          <a:bodyPr wrap="none">
+            <a:spAutoFit/>
+          </a:bodyPr>
+          <a:lstStyle/>
+          <a:p>
+            <a:pPr>
+              <a:spcAft>
+                <a:spcPts val="100"/>
+              </a:spcAft>
+            </a:pPr>
+            <a:r>
+              <a:rPr sz="1600">
+                <a:solidFill>
+                  <a:srgbClr val="D4D4D4"/>
+                </a:solidFill>
+                <a:latin typeface="Consolas"/>
+              </a:rPr>
+              <a:t>XISP1</a:t>
+            </a:r>
+            <a:r>
+              <a:rPr sz="1600">
+                <a:solidFill>
+                  <a:srgbClr val="D4D4D4"/>
+                </a:solidFill>
+                <a:latin typeface="Consolas"/>
+              </a:rPr>
+              <a:t>=</a:t>
+            </a:r>
+            <a:r>
+              <a:rPr sz="1600">
+                <a:solidFill>
+                  <a:srgbClr val="B5CEA8"/>
+                </a:solidFill>
+                <a:latin typeface="Consolas"/>
+              </a:rPr>
+              <a:t>250.</a:t>
+            </a:r>
+            <a:r>
+              <a:rPr sz="1600">
+                <a:solidFill>
+                  <a:srgbClr val="D4D4D4"/>
+                </a:solidFill>
+                <a:latin typeface="Consolas"/>
+              </a:rPr>
+              <a:t>;</a:t>
+            </a:r>
+            <a:r>
+              <a:rPr sz="1600">
+                <a:solidFill>
+                  <a:srgbClr val="D4D4D4"/>
+                </a:solidFill>
+                <a:latin typeface="Consolas"/>
+              </a:rPr>
+              <a:t>  </a:t>
+            </a:r>
+            <a:r>
+              <a:rPr sz="1600">
+                <a:solidFill>
+                  <a:srgbClr val="D4D4D4"/>
+                </a:solidFill>
+                <a:latin typeface="Consolas"/>
+              </a:rPr>
+              <a:t>XISP2</a:t>
+            </a:r>
+            <a:r>
+              <a:rPr sz="1600">
+                <a:solidFill>
+                  <a:srgbClr val="D4D4D4"/>
+                </a:solidFill>
+                <a:latin typeface="Consolas"/>
+              </a:rPr>
+              <a:t>=</a:t>
+            </a:r>
+            <a:r>
+              <a:rPr sz="1600">
+                <a:solidFill>
+                  <a:srgbClr val="B5CEA8"/>
+                </a:solidFill>
+                <a:latin typeface="Consolas"/>
+              </a:rPr>
+              <a:t>250.</a:t>
+            </a:r>
+            <a:r>
+              <a:rPr sz="1600">
+                <a:solidFill>
+                  <a:srgbClr val="D4D4D4"/>
+                </a:solidFill>
+                <a:latin typeface="Consolas"/>
+              </a:rPr>
+              <a:t>;</a:t>
+            </a:r>
+            <a:r>
+              <a:rPr sz="1600">
+                <a:solidFill>
+                  <a:srgbClr val="D4D4D4"/>
+                </a:solidFill>
+                <a:latin typeface="Consolas"/>
+              </a:rPr>
+              <a:t>  </a:t>
+            </a:r>
+            <a:r>
+              <a:rPr sz="1600">
+                <a:solidFill>
+                  <a:srgbClr val="D4D4D4"/>
+                </a:solidFill>
+                <a:latin typeface="Consolas"/>
+              </a:rPr>
+              <a:t>XMF1</a:t>
+            </a:r>
+            <a:r>
+              <a:rPr sz="1600">
+                <a:solidFill>
+                  <a:srgbClr val="D4D4D4"/>
+                </a:solidFill>
+                <a:latin typeface="Consolas"/>
+              </a:rPr>
+              <a:t>=</a:t>
+            </a:r>
+            <a:r>
+              <a:rPr sz="1600">
+                <a:solidFill>
+                  <a:srgbClr val="B5CEA8"/>
+                </a:solidFill>
+                <a:latin typeface="Consolas"/>
+              </a:rPr>
+              <a:t>.85</a:t>
+            </a:r>
+            <a:r>
+              <a:rPr sz="1600">
+                <a:solidFill>
+                  <a:srgbClr val="D4D4D4"/>
+                </a:solidFill>
+                <a:latin typeface="Consolas"/>
+              </a:rPr>
+              <a:t>;</a:t>
+            </a:r>
+            <a:r>
+              <a:rPr sz="1600">
+                <a:solidFill>
+                  <a:srgbClr val="D4D4D4"/>
+                </a:solidFill>
+                <a:latin typeface="Consolas"/>
+              </a:rPr>
+              <a:t>  </a:t>
+            </a:r>
+            <a:r>
+              <a:rPr sz="1600">
+                <a:solidFill>
+                  <a:srgbClr val="D4D4D4"/>
+                </a:solidFill>
+                <a:latin typeface="Consolas"/>
+              </a:rPr>
+              <a:t>XMF2</a:t>
+            </a:r>
+            <a:r>
+              <a:rPr sz="1600">
+                <a:solidFill>
+                  <a:srgbClr val="D4D4D4"/>
+                </a:solidFill>
+                <a:latin typeface="Consolas"/>
+              </a:rPr>
+              <a:t>=</a:t>
+            </a:r>
+            <a:r>
+              <a:rPr sz="1600">
+                <a:solidFill>
+                  <a:srgbClr val="B5CEA8"/>
+                </a:solidFill>
+                <a:latin typeface="Consolas"/>
+              </a:rPr>
+              <a:t>.85</a:t>
+            </a:r>
+            <a:r>
+              <a:rPr sz="1600">
+                <a:solidFill>
+                  <a:srgbClr val="D4D4D4"/>
+                </a:solidFill>
+                <a:latin typeface="Consolas"/>
+              </a:rPr>
+              <a:t>;</a:t>
+            </a:r>
+          </a:p>
+          <a:p>
+            <a:pPr>
+              <a:spcAft>
+                <a:spcPts val="100"/>
+              </a:spcAft>
+            </a:pPr>
+            <a:r>
+              <a:rPr sz="1600">
+                <a:solidFill>
+                  <a:srgbClr val="D4D4D4"/>
+                </a:solidFill>
+                <a:latin typeface="Consolas"/>
+              </a:rPr>
+              <a:t>WPAY</a:t>
+            </a:r>
+            <a:r>
+              <a:rPr sz="1600">
+                <a:solidFill>
+                  <a:srgbClr val="D4D4D4"/>
+                </a:solidFill>
+                <a:latin typeface="Consolas"/>
+              </a:rPr>
+              <a:t>=</a:t>
+            </a:r>
+            <a:r>
+              <a:rPr sz="1600">
+                <a:solidFill>
+                  <a:srgbClr val="B5CEA8"/>
+                </a:solidFill>
+                <a:latin typeface="Consolas"/>
+              </a:rPr>
+              <a:t>100.</a:t>
+            </a:r>
+            <a:r>
+              <a:rPr sz="1600">
+                <a:solidFill>
+                  <a:srgbClr val="D4D4D4"/>
+                </a:solidFill>
+                <a:latin typeface="Consolas"/>
+              </a:rPr>
+              <a:t>;</a:t>
+            </a:r>
+            <a:r>
+              <a:rPr sz="1600">
+                <a:solidFill>
+                  <a:srgbClr val="D4D4D4"/>
+                </a:solidFill>
+                <a:latin typeface="Consolas"/>
+              </a:rPr>
+              <a:t>   </a:t>
+            </a:r>
+            <a:r>
+              <a:rPr sz="1600">
+                <a:solidFill>
+                  <a:srgbClr val="D4D4D4"/>
+                </a:solidFill>
+                <a:latin typeface="Consolas"/>
+              </a:rPr>
+              <a:t>DELV</a:t>
+            </a:r>
+            <a:r>
+              <a:rPr sz="1600">
+                <a:solidFill>
+                  <a:srgbClr val="D4D4D4"/>
+                </a:solidFill>
+                <a:latin typeface="Consolas"/>
+              </a:rPr>
+              <a:t>=</a:t>
+            </a:r>
+            <a:r>
+              <a:rPr sz="1600">
+                <a:solidFill>
+                  <a:srgbClr val="B5CEA8"/>
+                </a:solidFill>
+                <a:latin typeface="Consolas"/>
+              </a:rPr>
+              <a:t>20000.</a:t>
+            </a:r>
+            <a:r>
+              <a:rPr sz="1600">
+                <a:solidFill>
+                  <a:srgbClr val="D4D4D4"/>
+                </a:solidFill>
+                <a:latin typeface="Consolas"/>
+              </a:rPr>
+              <a:t>;</a:t>
+            </a:r>
+          </a:p>
+          <a:p>
+            <a:pPr>
+              <a:spcAft>
+                <a:spcPts val="100"/>
+              </a:spcAft>
+            </a:pPr>
+            <a:r>
+              <a:rPr sz="1600">
+                <a:solidFill>
+                  <a:srgbClr val="D4D4D4"/>
+                </a:solidFill>
+                <a:latin typeface="Consolas"/>
+              </a:rPr>
+              <a:t>DELV1</a:t>
+            </a:r>
+            <a:r>
+              <a:rPr sz="1600">
+                <a:solidFill>
+                  <a:srgbClr val="D4D4D4"/>
+                </a:solidFill>
+                <a:latin typeface="Consolas"/>
+              </a:rPr>
+              <a:t>=</a:t>
+            </a:r>
+            <a:r>
+              <a:rPr sz="1600">
+                <a:solidFill>
+                  <a:srgbClr val="B5CEA8"/>
+                </a:solidFill>
+                <a:latin typeface="Consolas"/>
+              </a:rPr>
+              <a:t>.3333</a:t>
+            </a:r>
+            <a:r>
+              <a:rPr sz="1600">
+                <a:solidFill>
+                  <a:srgbClr val="D4D4D4"/>
+                </a:solidFill>
+                <a:latin typeface="Consolas"/>
+              </a:rPr>
+              <a:t>*</a:t>
+            </a:r>
+            <a:r>
+              <a:rPr sz="1600">
+                <a:solidFill>
+                  <a:srgbClr val="D4D4D4"/>
+                </a:solidFill>
+                <a:latin typeface="Consolas"/>
+              </a:rPr>
+              <a:t>DELV</a:t>
+            </a:r>
+            <a:r>
+              <a:rPr sz="1600">
+                <a:solidFill>
+                  <a:srgbClr val="D4D4D4"/>
+                </a:solidFill>
+                <a:latin typeface="Consolas"/>
+              </a:rPr>
+              <a:t>;</a:t>
+            </a:r>
+            <a:r>
+              <a:rPr sz="1600">
+                <a:solidFill>
+                  <a:srgbClr val="D4D4D4"/>
+                </a:solidFill>
+                <a:latin typeface="Consolas"/>
+              </a:rPr>
+              <a:t>   </a:t>
+            </a:r>
+            <a:r>
+              <a:rPr sz="1600">
+                <a:solidFill>
+                  <a:srgbClr val="D4D4D4"/>
+                </a:solidFill>
+                <a:latin typeface="Consolas"/>
+              </a:rPr>
+              <a:t>DELV2</a:t>
+            </a:r>
+            <a:r>
+              <a:rPr sz="1600">
+                <a:solidFill>
+                  <a:srgbClr val="D4D4D4"/>
+                </a:solidFill>
+                <a:latin typeface="Consolas"/>
+              </a:rPr>
+              <a:t>=</a:t>
+            </a:r>
+            <a:r>
+              <a:rPr sz="1600">
+                <a:solidFill>
+                  <a:srgbClr val="B5CEA8"/>
+                </a:solidFill>
+                <a:latin typeface="Consolas"/>
+              </a:rPr>
+              <a:t>.6667</a:t>
+            </a:r>
+            <a:r>
+              <a:rPr sz="1600">
+                <a:solidFill>
+                  <a:srgbClr val="D4D4D4"/>
+                </a:solidFill>
+                <a:latin typeface="Consolas"/>
+              </a:rPr>
+              <a:t>*</a:t>
+            </a:r>
+            <a:r>
+              <a:rPr sz="1600">
+                <a:solidFill>
+                  <a:srgbClr val="D4D4D4"/>
+                </a:solidFill>
+                <a:latin typeface="Consolas"/>
+              </a:rPr>
+              <a:t>DELV</a:t>
+            </a:r>
+            <a:r>
+              <a:rPr sz="1600">
+                <a:solidFill>
+                  <a:srgbClr val="D4D4D4"/>
+                </a:solidFill>
+                <a:latin typeface="Consolas"/>
+              </a:rPr>
+              <a:t>;</a:t>
+            </a:r>
+          </a:p>
+          <a:p>
+            <a:pPr>
+              <a:spcAft>
+                <a:spcPts val="100"/>
+              </a:spcAft>
+            </a:pPr>
+            <a:r>
+              <a:rPr sz="1600">
+                <a:solidFill>
+                  <a:srgbClr val="D4D4D4"/>
+                </a:solidFill>
+                <a:latin typeface="Consolas"/>
+              </a:rPr>
+              <a:t>AMAX1</a:t>
+            </a:r>
+            <a:r>
+              <a:rPr sz="1600">
+                <a:solidFill>
+                  <a:srgbClr val="D4D4D4"/>
+                </a:solidFill>
+                <a:latin typeface="Consolas"/>
+              </a:rPr>
+              <a:t>=</a:t>
+            </a:r>
+            <a:r>
+              <a:rPr sz="1600">
+                <a:solidFill>
+                  <a:srgbClr val="B5CEA8"/>
+                </a:solidFill>
+                <a:latin typeface="Consolas"/>
+              </a:rPr>
+              <a:t>10.</a:t>
+            </a:r>
+            <a:r>
+              <a:rPr sz="1600">
+                <a:solidFill>
+                  <a:srgbClr val="D4D4D4"/>
+                </a:solidFill>
+                <a:latin typeface="Consolas"/>
+              </a:rPr>
+              <a:t>;</a:t>
+            </a:r>
+            <a:r>
+              <a:rPr sz="1600">
+                <a:solidFill>
+                  <a:srgbClr val="D4D4D4"/>
+                </a:solidFill>
+                <a:latin typeface="Consolas"/>
+              </a:rPr>
+              <a:t>   </a:t>
+            </a:r>
+            <a:r>
+              <a:rPr sz="1600">
+                <a:solidFill>
+                  <a:srgbClr val="D4D4D4"/>
+                </a:solidFill>
+                <a:latin typeface="Consolas"/>
+              </a:rPr>
+              <a:t>AMAX2</a:t>
+            </a:r>
+            <a:r>
+              <a:rPr sz="1600">
+                <a:solidFill>
+                  <a:srgbClr val="D4D4D4"/>
+                </a:solidFill>
+                <a:latin typeface="Consolas"/>
+              </a:rPr>
+              <a:t>=</a:t>
+            </a:r>
+            <a:r>
+              <a:rPr sz="1600">
+                <a:solidFill>
+                  <a:srgbClr val="B5CEA8"/>
+                </a:solidFill>
+                <a:latin typeface="Consolas"/>
+              </a:rPr>
+              <a:t>10.</a:t>
+            </a:r>
+            <a:r>
+              <a:rPr sz="1600">
+                <a:solidFill>
+                  <a:srgbClr val="D4D4D4"/>
+                </a:solidFill>
+                <a:latin typeface="Consolas"/>
+              </a:rPr>
+              <a:t>;</a:t>
+            </a:r>
+            <a:r>
+              <a:rPr sz="1600">
+                <a:solidFill>
+                  <a:srgbClr val="D4D4D4"/>
+                </a:solidFill>
+                <a:latin typeface="Consolas"/>
+              </a:rPr>
+              <a:t>   </a:t>
+            </a:r>
+            <a:r>
+              <a:rPr sz="1600">
+                <a:solidFill>
+                  <a:srgbClr val="D4D4D4"/>
+                </a:solidFill>
+                <a:latin typeface="Consolas"/>
+              </a:rPr>
+              <a:t>GAMDEG</a:t>
+            </a:r>
+            <a:r>
+              <a:rPr sz="1600">
+                <a:solidFill>
+                  <a:srgbClr val="D4D4D4"/>
+                </a:solidFill>
+                <a:latin typeface="Consolas"/>
+              </a:rPr>
+              <a:t>=</a:t>
+            </a:r>
+            <a:r>
+              <a:rPr sz="1600">
+                <a:solidFill>
+                  <a:srgbClr val="B5CEA8"/>
+                </a:solidFill>
+                <a:latin typeface="Consolas"/>
+              </a:rPr>
+              <a:t>85.</a:t>
+            </a:r>
+            <a:r>
+              <a:rPr sz="1600">
+                <a:solidFill>
+                  <a:srgbClr val="D4D4D4"/>
+                </a:solidFill>
+                <a:latin typeface="Consolas"/>
+              </a:rPr>
+              <a:t>;</a:t>
+            </a:r>
+          </a:p>
+          <a:p>
+            <a:pPr>
+              <a:spcAft>
+                <a:spcPts val="100"/>
+              </a:spcAft>
+            </a:pPr>
+            <a:r>
+              <a:rPr sz="1600">
+                <a:solidFill>
+                  <a:srgbClr val="D4D4D4"/>
+                </a:solidFill>
+                <a:latin typeface="Consolas"/>
+              </a:rPr>
+              <a:t>TOP2</a:t>
+            </a:r>
+            <a:r>
+              <a:rPr sz="1600">
+                <a:solidFill>
+                  <a:srgbClr val="D4D4D4"/>
+                </a:solidFill>
+                <a:latin typeface="Consolas"/>
+              </a:rPr>
+              <a:t>=</a:t>
+            </a:r>
+            <a:r>
+              <a:rPr sz="1600">
+                <a:solidFill>
+                  <a:srgbClr val="D4D4D4"/>
+                </a:solidFill>
+                <a:latin typeface="Consolas"/>
+              </a:rPr>
+              <a:t>WPAY</a:t>
+            </a:r>
+            <a:r>
+              <a:rPr sz="1600">
+                <a:solidFill>
+                  <a:srgbClr val="D4D4D4"/>
+                </a:solidFill>
+                <a:latin typeface="Consolas"/>
+              </a:rPr>
+              <a:t>*</a:t>
+            </a:r>
+            <a:r>
+              <a:rPr sz="1600">
+                <a:solidFill>
+                  <a:srgbClr val="D4D4D4"/>
+                </a:solidFill>
+                <a:latin typeface="Consolas"/>
+              </a:rPr>
+              <a:t>(</a:t>
+            </a:r>
+            <a:r>
+              <a:rPr sz="1600">
+                <a:solidFill>
+                  <a:srgbClr val="4EC9B0"/>
+                </a:solidFill>
+                <a:latin typeface="Consolas"/>
+              </a:rPr>
+              <a:t>exp</a:t>
+            </a:r>
+            <a:r>
+              <a:rPr sz="1600">
+                <a:solidFill>
+                  <a:srgbClr val="D4D4D4"/>
+                </a:solidFill>
+                <a:latin typeface="Consolas"/>
+              </a:rPr>
+              <a:t>(</a:t>
+            </a:r>
+            <a:r>
+              <a:rPr sz="1600">
+                <a:solidFill>
+                  <a:srgbClr val="D4D4D4"/>
+                </a:solidFill>
+                <a:latin typeface="Consolas"/>
+              </a:rPr>
+              <a:t>DELV2</a:t>
+            </a:r>
+            <a:r>
+              <a:rPr sz="1600">
+                <a:solidFill>
+                  <a:srgbClr val="D4D4D4"/>
+                </a:solidFill>
+                <a:latin typeface="Consolas"/>
+              </a:rPr>
+              <a:t>/</a:t>
+            </a:r>
+            <a:r>
+              <a:rPr sz="1600">
+                <a:solidFill>
+                  <a:srgbClr val="D4D4D4"/>
+                </a:solidFill>
+                <a:latin typeface="Consolas"/>
+              </a:rPr>
+              <a:t>(</a:t>
+            </a:r>
+            <a:r>
+              <a:rPr sz="1600">
+                <a:solidFill>
+                  <a:srgbClr val="D4D4D4"/>
+                </a:solidFill>
+                <a:latin typeface="Consolas"/>
+              </a:rPr>
+              <a:t>XISP2</a:t>
+            </a:r>
+            <a:r>
+              <a:rPr sz="1600">
+                <a:solidFill>
+                  <a:srgbClr val="D4D4D4"/>
+                </a:solidFill>
+                <a:latin typeface="Consolas"/>
+              </a:rPr>
+              <a:t>*</a:t>
+            </a:r>
+            <a:r>
+              <a:rPr sz="1600">
+                <a:solidFill>
+                  <a:srgbClr val="B5CEA8"/>
+                </a:solidFill>
+                <a:latin typeface="Consolas"/>
+              </a:rPr>
+              <a:t>32.2</a:t>
+            </a:r>
+            <a:r>
+              <a:rPr sz="1600">
+                <a:solidFill>
+                  <a:srgbClr val="D4D4D4"/>
+                </a:solidFill>
+                <a:latin typeface="Consolas"/>
+              </a:rPr>
+              <a:t>)</a:t>
+            </a:r>
+            <a:r>
+              <a:rPr sz="1600">
+                <a:solidFill>
+                  <a:srgbClr val="D4D4D4"/>
+                </a:solidFill>
+                <a:latin typeface="Consolas"/>
+              </a:rPr>
+              <a:t>)</a:t>
+            </a:r>
+            <a:r>
+              <a:rPr sz="1600">
+                <a:solidFill>
+                  <a:srgbClr val="D4D4D4"/>
+                </a:solidFill>
+                <a:latin typeface="Consolas"/>
+              </a:rPr>
+              <a:t>-</a:t>
+            </a:r>
+            <a:r>
+              <a:rPr sz="1600">
+                <a:solidFill>
+                  <a:srgbClr val="B5CEA8"/>
+                </a:solidFill>
+                <a:latin typeface="Consolas"/>
+              </a:rPr>
+              <a:t>1.</a:t>
+            </a:r>
+            <a:r>
+              <a:rPr sz="1600">
+                <a:solidFill>
+                  <a:srgbClr val="D4D4D4"/>
+                </a:solidFill>
+                <a:latin typeface="Consolas"/>
+              </a:rPr>
+              <a:t>)</a:t>
+            </a:r>
+            <a:r>
+              <a:rPr sz="1600">
+                <a:solidFill>
+                  <a:srgbClr val="D4D4D4"/>
+                </a:solidFill>
+                <a:latin typeface="Consolas"/>
+              </a:rPr>
+              <a:t>;</a:t>
+            </a:r>
+          </a:p>
+          <a:p>
+            <a:pPr>
+              <a:spcAft>
+                <a:spcPts val="100"/>
+              </a:spcAft>
+            </a:pPr>
+            <a:r>
+              <a:rPr sz="1600">
+                <a:solidFill>
+                  <a:srgbClr val="D4D4D4"/>
+                </a:solidFill>
+                <a:latin typeface="Consolas"/>
+              </a:rPr>
+              <a:t>BOT2</a:t>
+            </a:r>
+            <a:r>
+              <a:rPr sz="1600">
+                <a:solidFill>
+                  <a:srgbClr val="D4D4D4"/>
+                </a:solidFill>
+                <a:latin typeface="Consolas"/>
+              </a:rPr>
+              <a:t>=</a:t>
+            </a:r>
+            <a:r>
+              <a:rPr sz="1600">
+                <a:solidFill>
+                  <a:srgbClr val="B5CEA8"/>
+                </a:solidFill>
+                <a:latin typeface="Consolas"/>
+              </a:rPr>
+              <a:t>1</a:t>
+            </a:r>
+            <a:r>
+              <a:rPr sz="1600">
+                <a:solidFill>
+                  <a:srgbClr val="D4D4D4"/>
+                </a:solidFill>
+                <a:latin typeface="Consolas"/>
+              </a:rPr>
+              <a:t>/</a:t>
+            </a:r>
+            <a:r>
+              <a:rPr sz="1600">
+                <a:solidFill>
+                  <a:srgbClr val="D4D4D4"/>
+                </a:solidFill>
+                <a:latin typeface="Consolas"/>
+              </a:rPr>
+              <a:t>XMF2</a:t>
+            </a:r>
+            <a:r>
+              <a:rPr sz="1600">
+                <a:solidFill>
+                  <a:srgbClr val="D4D4D4"/>
+                </a:solidFill>
+                <a:latin typeface="Consolas"/>
+              </a:rPr>
+              <a:t>-</a:t>
+            </a:r>
+            <a:r>
+              <a:rPr sz="1600">
+                <a:solidFill>
+                  <a:srgbClr val="D4D4D4"/>
+                </a:solidFill>
+                <a:latin typeface="Consolas"/>
+              </a:rPr>
+              <a:t>(</a:t>
+            </a:r>
+            <a:r>
+              <a:rPr sz="1600">
+                <a:solidFill>
+                  <a:srgbClr val="D4D4D4"/>
+                </a:solidFill>
+                <a:latin typeface="Consolas"/>
+              </a:rPr>
+              <a:t>(</a:t>
+            </a:r>
+            <a:r>
+              <a:rPr sz="1600">
+                <a:solidFill>
+                  <a:srgbClr val="B5CEA8"/>
+                </a:solidFill>
+                <a:latin typeface="Consolas"/>
+              </a:rPr>
+              <a:t>1</a:t>
+            </a:r>
+            <a:r>
+              <a:rPr sz="1600">
+                <a:solidFill>
+                  <a:srgbClr val="D4D4D4"/>
+                </a:solidFill>
+                <a:latin typeface="Consolas"/>
+              </a:rPr>
+              <a:t>.</a:t>
+            </a:r>
+            <a:r>
+              <a:rPr sz="1600">
+                <a:solidFill>
+                  <a:srgbClr val="D4D4D4"/>
+                </a:solidFill>
+                <a:latin typeface="Consolas"/>
+              </a:rPr>
+              <a:t>-</a:t>
+            </a:r>
+            <a:r>
+              <a:rPr sz="1600">
+                <a:solidFill>
+                  <a:srgbClr val="D4D4D4"/>
+                </a:solidFill>
+                <a:latin typeface="Consolas"/>
+              </a:rPr>
+              <a:t>XMF2</a:t>
+            </a:r>
+            <a:r>
+              <a:rPr sz="1600">
+                <a:solidFill>
+                  <a:srgbClr val="D4D4D4"/>
+                </a:solidFill>
+                <a:latin typeface="Consolas"/>
+              </a:rPr>
+              <a:t>)</a:t>
+            </a:r>
+            <a:r>
+              <a:rPr sz="1600">
+                <a:solidFill>
+                  <a:srgbClr val="D4D4D4"/>
+                </a:solidFill>
+                <a:latin typeface="Consolas"/>
+              </a:rPr>
+              <a:t>/</a:t>
+            </a:r>
+            <a:r>
+              <a:rPr sz="1600">
+                <a:solidFill>
+                  <a:srgbClr val="D4D4D4"/>
+                </a:solidFill>
+                <a:latin typeface="Consolas"/>
+              </a:rPr>
+              <a:t>XMF2</a:t>
+            </a:r>
+            <a:r>
+              <a:rPr sz="1600">
+                <a:solidFill>
+                  <a:srgbClr val="D4D4D4"/>
+                </a:solidFill>
+                <a:latin typeface="Consolas"/>
+              </a:rPr>
+              <a:t>)</a:t>
+            </a:r>
+            <a:r>
+              <a:rPr sz="1600">
+                <a:solidFill>
+                  <a:srgbClr val="D4D4D4"/>
+                </a:solidFill>
+                <a:latin typeface="Consolas"/>
+              </a:rPr>
+              <a:t>*</a:t>
+            </a:r>
+            <a:r>
+              <a:rPr sz="1600">
+                <a:solidFill>
+                  <a:srgbClr val="4EC9B0"/>
+                </a:solidFill>
+                <a:latin typeface="Consolas"/>
+              </a:rPr>
+              <a:t>exp</a:t>
+            </a:r>
+            <a:r>
+              <a:rPr sz="1600">
+                <a:solidFill>
+                  <a:srgbClr val="D4D4D4"/>
+                </a:solidFill>
+                <a:latin typeface="Consolas"/>
+              </a:rPr>
+              <a:t>(</a:t>
+            </a:r>
+            <a:r>
+              <a:rPr sz="1600">
+                <a:solidFill>
+                  <a:srgbClr val="D4D4D4"/>
+                </a:solidFill>
+                <a:latin typeface="Consolas"/>
+              </a:rPr>
+              <a:t>DELV2</a:t>
+            </a:r>
+            <a:r>
+              <a:rPr sz="1600">
+                <a:solidFill>
+                  <a:srgbClr val="D4D4D4"/>
+                </a:solidFill>
+                <a:latin typeface="Consolas"/>
+              </a:rPr>
+              <a:t>/</a:t>
+            </a:r>
+            <a:r>
+              <a:rPr sz="1600">
+                <a:solidFill>
+                  <a:srgbClr val="D4D4D4"/>
+                </a:solidFill>
+                <a:latin typeface="Consolas"/>
+              </a:rPr>
+              <a:t>(</a:t>
+            </a:r>
+            <a:r>
+              <a:rPr sz="1600">
+                <a:solidFill>
+                  <a:srgbClr val="D4D4D4"/>
+                </a:solidFill>
+                <a:latin typeface="Consolas"/>
+              </a:rPr>
+              <a:t>XISP2</a:t>
+            </a:r>
+            <a:r>
+              <a:rPr sz="1600">
+                <a:solidFill>
+                  <a:srgbClr val="D4D4D4"/>
+                </a:solidFill>
+                <a:latin typeface="Consolas"/>
+              </a:rPr>
+              <a:t>*</a:t>
+            </a:r>
+            <a:r>
+              <a:rPr sz="1600">
+                <a:solidFill>
+                  <a:srgbClr val="B5CEA8"/>
+                </a:solidFill>
+                <a:latin typeface="Consolas"/>
+              </a:rPr>
+              <a:t>32.2</a:t>
+            </a:r>
+            <a:r>
+              <a:rPr sz="1600">
+                <a:solidFill>
+                  <a:srgbClr val="D4D4D4"/>
+                </a:solidFill>
+                <a:latin typeface="Consolas"/>
+              </a:rPr>
+              <a:t>)</a:t>
+            </a:r>
+            <a:r>
+              <a:rPr sz="1600">
+                <a:solidFill>
+                  <a:srgbClr val="D4D4D4"/>
+                </a:solidFill>
+                <a:latin typeface="Consolas"/>
+              </a:rPr>
+              <a:t>)</a:t>
+            </a:r>
+            <a:r>
+              <a:rPr sz="1600">
+                <a:solidFill>
+                  <a:srgbClr val="D4D4D4"/>
+                </a:solidFill>
+                <a:latin typeface="Consolas"/>
+              </a:rPr>
+              <a:t>;</a:t>
+            </a:r>
+          </a:p>
+          <a:p>
+            <a:pPr>
+              <a:spcAft>
+                <a:spcPts val="100"/>
+              </a:spcAft>
+            </a:pPr>
+            <a:r>
+              <a:rPr sz="1600">
+                <a:solidFill>
+                  <a:srgbClr val="D4D4D4"/>
+                </a:solidFill>
+                <a:latin typeface="Consolas"/>
+              </a:rPr>
+              <a:t>WP2</a:t>
+            </a:r>
+            <a:r>
+              <a:rPr sz="1600">
+                <a:solidFill>
+                  <a:srgbClr val="D4D4D4"/>
+                </a:solidFill>
+                <a:latin typeface="Consolas"/>
+              </a:rPr>
+              <a:t>=</a:t>
+            </a:r>
+            <a:r>
+              <a:rPr sz="1600">
+                <a:solidFill>
+                  <a:srgbClr val="D4D4D4"/>
+                </a:solidFill>
+                <a:latin typeface="Consolas"/>
+              </a:rPr>
+              <a:t>TOP2</a:t>
+            </a:r>
+            <a:r>
+              <a:rPr sz="1600">
+                <a:solidFill>
+                  <a:srgbClr val="D4D4D4"/>
+                </a:solidFill>
+                <a:latin typeface="Consolas"/>
+              </a:rPr>
+              <a:t>/</a:t>
+            </a:r>
+            <a:r>
+              <a:rPr sz="1600">
+                <a:solidFill>
+                  <a:srgbClr val="D4D4D4"/>
+                </a:solidFill>
+                <a:latin typeface="Consolas"/>
+              </a:rPr>
+              <a:t>BOT2</a:t>
+            </a:r>
+            <a:r>
+              <a:rPr sz="1600">
+                <a:solidFill>
+                  <a:srgbClr val="D4D4D4"/>
+                </a:solidFill>
+                <a:latin typeface="Consolas"/>
+              </a:rPr>
+              <a:t>;</a:t>
+            </a:r>
+            <a:r>
+              <a:rPr sz="1600">
+                <a:solidFill>
+                  <a:srgbClr val="D4D4D4"/>
+                </a:solidFill>
+                <a:latin typeface="Consolas"/>
+              </a:rPr>
+              <a:t>   </a:t>
+            </a:r>
+            <a:r>
+              <a:rPr sz="1600">
+                <a:solidFill>
+                  <a:srgbClr val="D4D4D4"/>
+                </a:solidFill>
+                <a:latin typeface="Consolas"/>
+              </a:rPr>
+              <a:t>WS2</a:t>
+            </a:r>
+            <a:r>
+              <a:rPr sz="1600">
+                <a:solidFill>
+                  <a:srgbClr val="D4D4D4"/>
+                </a:solidFill>
+                <a:latin typeface="Consolas"/>
+              </a:rPr>
+              <a:t>=</a:t>
+            </a:r>
+            <a:r>
+              <a:rPr sz="1600">
+                <a:solidFill>
+                  <a:srgbClr val="D4D4D4"/>
+                </a:solidFill>
+                <a:latin typeface="Consolas"/>
+              </a:rPr>
+              <a:t>WP2</a:t>
+            </a:r>
+            <a:r>
+              <a:rPr sz="1600">
+                <a:solidFill>
+                  <a:srgbClr val="D4D4D4"/>
+                </a:solidFill>
+                <a:latin typeface="Consolas"/>
+              </a:rPr>
+              <a:t>*</a:t>
+            </a:r>
+            <a:r>
+              <a:rPr sz="1600">
+                <a:solidFill>
+                  <a:srgbClr val="D4D4D4"/>
+                </a:solidFill>
+                <a:latin typeface="Consolas"/>
+              </a:rPr>
+              <a:t>(</a:t>
+            </a:r>
+            <a:r>
+              <a:rPr sz="1600">
+                <a:solidFill>
+                  <a:srgbClr val="B5CEA8"/>
+                </a:solidFill>
+                <a:latin typeface="Consolas"/>
+              </a:rPr>
+              <a:t>1</a:t>
+            </a:r>
+            <a:r>
+              <a:rPr sz="1600">
+                <a:solidFill>
+                  <a:srgbClr val="D4D4D4"/>
+                </a:solidFill>
+                <a:latin typeface="Consolas"/>
+              </a:rPr>
+              <a:t>-</a:t>
+            </a:r>
+            <a:r>
+              <a:rPr sz="1600">
+                <a:solidFill>
+                  <a:srgbClr val="D4D4D4"/>
+                </a:solidFill>
+                <a:latin typeface="Consolas"/>
+              </a:rPr>
+              <a:t>XMF2</a:t>
+            </a:r>
+            <a:r>
+              <a:rPr sz="1600">
+                <a:solidFill>
+                  <a:srgbClr val="D4D4D4"/>
+                </a:solidFill>
+                <a:latin typeface="Consolas"/>
+              </a:rPr>
+              <a:t>)</a:t>
+            </a:r>
+            <a:r>
+              <a:rPr sz="1600">
+                <a:solidFill>
+                  <a:srgbClr val="D4D4D4"/>
+                </a:solidFill>
+                <a:latin typeface="Consolas"/>
+              </a:rPr>
+              <a:t>/</a:t>
+            </a:r>
+            <a:r>
+              <a:rPr sz="1600">
+                <a:solidFill>
+                  <a:srgbClr val="D4D4D4"/>
+                </a:solidFill>
+                <a:latin typeface="Consolas"/>
+              </a:rPr>
+              <a:t>XMF2</a:t>
+            </a:r>
+            <a:r>
+              <a:rPr sz="1600">
+                <a:solidFill>
+                  <a:srgbClr val="D4D4D4"/>
+                </a:solidFill>
+                <a:latin typeface="Consolas"/>
+              </a:rPr>
+              <a:t>;</a:t>
+            </a:r>
+            <a:r>
+              <a:rPr sz="1600">
+                <a:solidFill>
+                  <a:srgbClr val="D4D4D4"/>
+                </a:solidFill>
+                <a:latin typeface="Consolas"/>
+              </a:rPr>
+              <a:t>   </a:t>
+            </a:r>
+            <a:r>
+              <a:rPr sz="1600">
+                <a:solidFill>
+                  <a:srgbClr val="D4D4D4"/>
+                </a:solidFill>
+                <a:latin typeface="Consolas"/>
+              </a:rPr>
+              <a:t>WTOT2</a:t>
+            </a:r>
+            <a:r>
+              <a:rPr sz="1600">
+                <a:solidFill>
+                  <a:srgbClr val="D4D4D4"/>
+                </a:solidFill>
+                <a:latin typeface="Consolas"/>
+              </a:rPr>
+              <a:t>=</a:t>
+            </a:r>
+            <a:r>
+              <a:rPr sz="1600">
+                <a:solidFill>
+                  <a:srgbClr val="D4D4D4"/>
+                </a:solidFill>
+                <a:latin typeface="Consolas"/>
+              </a:rPr>
+              <a:t>WP2</a:t>
+            </a:r>
+            <a:r>
+              <a:rPr sz="1600">
+                <a:solidFill>
+                  <a:srgbClr val="D4D4D4"/>
+                </a:solidFill>
+                <a:latin typeface="Consolas"/>
+              </a:rPr>
+              <a:t>+</a:t>
+            </a:r>
+            <a:r>
+              <a:rPr sz="1600">
+                <a:solidFill>
+                  <a:srgbClr val="D4D4D4"/>
+                </a:solidFill>
+                <a:latin typeface="Consolas"/>
+              </a:rPr>
+              <a:t>WS2</a:t>
+            </a:r>
+            <a:r>
+              <a:rPr sz="1600">
+                <a:solidFill>
+                  <a:srgbClr val="D4D4D4"/>
+                </a:solidFill>
+                <a:latin typeface="Consolas"/>
+              </a:rPr>
+              <a:t>+</a:t>
+            </a:r>
+            <a:r>
+              <a:rPr sz="1600">
+                <a:solidFill>
+                  <a:srgbClr val="D4D4D4"/>
+                </a:solidFill>
+                <a:latin typeface="Consolas"/>
+              </a:rPr>
+              <a:t>WPAY</a:t>
+            </a:r>
+            <a:r>
+              <a:rPr sz="1600">
+                <a:solidFill>
+                  <a:srgbClr val="D4D4D4"/>
+                </a:solidFill>
+                <a:latin typeface="Consolas"/>
+              </a:rPr>
+              <a:t>;</a:t>
+            </a:r>
+          </a:p>
+          <a:p>
+            <a:pPr>
+              <a:spcAft>
+                <a:spcPts val="100"/>
+              </a:spcAft>
+            </a:pPr>
+            <a:r>
+              <a:rPr sz="1600">
+                <a:solidFill>
+                  <a:srgbClr val="D4D4D4"/>
+                </a:solidFill>
+                <a:latin typeface="Consolas"/>
+              </a:rPr>
+              <a:t>TRST2</a:t>
+            </a:r>
+            <a:r>
+              <a:rPr sz="1600">
+                <a:solidFill>
+                  <a:srgbClr val="D4D4D4"/>
+                </a:solidFill>
+                <a:latin typeface="Consolas"/>
+              </a:rPr>
+              <a:t>=</a:t>
+            </a:r>
+            <a:r>
+              <a:rPr sz="1600">
+                <a:solidFill>
+                  <a:srgbClr val="D4D4D4"/>
+                </a:solidFill>
+                <a:latin typeface="Consolas"/>
+              </a:rPr>
+              <a:t>AMAX2</a:t>
+            </a:r>
+            <a:r>
+              <a:rPr sz="1600">
+                <a:solidFill>
+                  <a:srgbClr val="D4D4D4"/>
+                </a:solidFill>
+                <a:latin typeface="Consolas"/>
+              </a:rPr>
+              <a:t>*</a:t>
+            </a:r>
+            <a:r>
+              <a:rPr sz="1600">
+                <a:solidFill>
+                  <a:srgbClr val="D4D4D4"/>
+                </a:solidFill>
+                <a:latin typeface="Consolas"/>
+              </a:rPr>
+              <a:t>(</a:t>
+            </a:r>
+            <a:r>
+              <a:rPr sz="1600">
+                <a:solidFill>
+                  <a:srgbClr val="D4D4D4"/>
+                </a:solidFill>
+                <a:latin typeface="Consolas"/>
+              </a:rPr>
+              <a:t>WPAY</a:t>
+            </a:r>
+            <a:r>
+              <a:rPr sz="1600">
+                <a:solidFill>
+                  <a:srgbClr val="D4D4D4"/>
+                </a:solidFill>
+                <a:latin typeface="Consolas"/>
+              </a:rPr>
+              <a:t>+</a:t>
+            </a:r>
+            <a:r>
+              <a:rPr sz="1600">
+                <a:solidFill>
+                  <a:srgbClr val="D4D4D4"/>
+                </a:solidFill>
+                <a:latin typeface="Consolas"/>
+              </a:rPr>
+              <a:t>WS2</a:t>
+            </a:r>
+            <a:r>
+              <a:rPr sz="1600">
+                <a:solidFill>
+                  <a:srgbClr val="D4D4D4"/>
+                </a:solidFill>
+                <a:latin typeface="Consolas"/>
+              </a:rPr>
+              <a:t>)</a:t>
+            </a:r>
+            <a:r>
+              <a:rPr sz="1600">
+                <a:solidFill>
+                  <a:srgbClr val="D4D4D4"/>
+                </a:solidFill>
+                <a:latin typeface="Consolas"/>
+              </a:rPr>
+              <a:t>;</a:t>
+            </a:r>
+            <a:r>
+              <a:rPr sz="1600">
+                <a:solidFill>
+                  <a:srgbClr val="D4D4D4"/>
+                </a:solidFill>
+                <a:latin typeface="Consolas"/>
+              </a:rPr>
+              <a:t>   </a:t>
+            </a:r>
+            <a:r>
+              <a:rPr sz="1600">
+                <a:solidFill>
+                  <a:srgbClr val="D4D4D4"/>
+                </a:solidFill>
+                <a:latin typeface="Consolas"/>
+              </a:rPr>
+              <a:t>TB2</a:t>
+            </a:r>
+            <a:r>
+              <a:rPr sz="1600">
+                <a:solidFill>
+                  <a:srgbClr val="D4D4D4"/>
+                </a:solidFill>
+                <a:latin typeface="Consolas"/>
+              </a:rPr>
+              <a:t>=</a:t>
+            </a:r>
+            <a:r>
+              <a:rPr sz="1600">
+                <a:solidFill>
+                  <a:srgbClr val="D4D4D4"/>
+                </a:solidFill>
+                <a:latin typeface="Consolas"/>
+              </a:rPr>
+              <a:t>XISP2</a:t>
+            </a:r>
+            <a:r>
+              <a:rPr sz="1600">
+                <a:solidFill>
+                  <a:srgbClr val="D4D4D4"/>
+                </a:solidFill>
+                <a:latin typeface="Consolas"/>
+              </a:rPr>
+              <a:t>*</a:t>
+            </a:r>
+            <a:r>
+              <a:rPr sz="1600">
+                <a:solidFill>
+                  <a:srgbClr val="D4D4D4"/>
+                </a:solidFill>
+                <a:latin typeface="Consolas"/>
+              </a:rPr>
+              <a:t>WP2</a:t>
+            </a:r>
+            <a:r>
+              <a:rPr sz="1600">
+                <a:solidFill>
+                  <a:srgbClr val="D4D4D4"/>
+                </a:solidFill>
+                <a:latin typeface="Consolas"/>
+              </a:rPr>
+              <a:t>/</a:t>
+            </a:r>
+            <a:r>
+              <a:rPr sz="1600">
+                <a:solidFill>
+                  <a:srgbClr val="D4D4D4"/>
+                </a:solidFill>
+                <a:latin typeface="Consolas"/>
+              </a:rPr>
+              <a:t>TRST2</a:t>
+            </a:r>
+            <a:r>
+              <a:rPr sz="1600">
+                <a:solidFill>
+                  <a:srgbClr val="D4D4D4"/>
+                </a:solidFill>
+                <a:latin typeface="Consolas"/>
+              </a:rPr>
+              <a:t>;</a:t>
+            </a:r>
+          </a:p>
+          <a:p>
+            <a:pPr>
+              <a:spcAft>
+                <a:spcPts val="100"/>
+              </a:spcAft>
+            </a:pPr>
+            <a:r>
+              <a:rPr sz="1600">
+                <a:solidFill>
+                  <a:srgbClr val="6A9955"/>
+                </a:solidFill>
+                <a:latin typeface="Consolas"/>
+              </a:rPr>
+              <a:t>% ... then TOP1,BOT1,WP1,WS1,WTOT,TRST1,TB1 -- same again for stage 1</a:t>
+            </a:r>
+          </a:p>
+        </p:txBody>
+      </p:sp>
+      <p:sp>
+        <p:nvSpPr>
+          <p:cNvPr id="9" name="TextBox 8"/>
+          <p:cNvSpPr txBox="1"/>
+          <p:nvPr/>
+        </p:nvSpPr>
+        <p:spPr>
+          <a:xfrm>
+            <a:off x="777240" y="4617720"/>
+            <a:ext cx="10972800" cy="274320"/>
+          </a:xfrm>
+          <a:prstGeom prst="rect">
+            <a:avLst/>
+          </a:prstGeom>
+          <a:noFill/>
+        </p:spPr>
+        <p:txBody>
+          <a:bodyPr wrap="none">
+            <a:spAutoFit/>
+          </a:bodyPr>
+          <a:lstStyle/>
+          <a:p>
+            <a:r>
+              <a:rPr sz="1200" i="1">
+                <a:solidFill>
+                  <a:srgbClr val="8CA3B8"/>
+                </a:solidFill>
+                <a:latin typeface="Segoe UI"/>
+              </a:rPr>
+              <a:t>Zarchan, Tactical &amp; Strategic Missile Guidance, 6th ed. (MATLAB) — gravity-turn booster sim</a:t>
+            </a:r>
+          </a:p>
+        </p:txBody>
+      </p:sp>
     </p:spTree>
   </p:cSld>
   <p:clrMapOvr>
@@ -24910,6 +26371,1828 @@
 </file>
 
 <file path=ppt/slides/slide38.xml><?xml version="1.0" encoding="utf-8"?>
+<p:sld xmlns:a="http://schemas.openxmlformats.org/drawingml/2006/main" xmlns:p="http://schemas.openxmlformats.org/presentationml/2006/main" xmlns:r="http://schemas.openxmlformats.org/officeDocument/2006/relationships">
+  <p:cSld>
+    <p:bg>
+      <p:bgPr>
+        <a:solidFill>
+          <a:srgbClr val="0B1F33"/>
+        </a:solidFill>
+        <a:effectLst/>
+      </p:bgPr>
+    </p:bg>
+    <p:spTree>
+      <p:nvGrpSpPr>
+        <p:cNvPr id="1" name=""/>
+        <p:cNvGrpSpPr/>
+        <p:nvPr/>
+      </p:nvGrpSpPr>
+      <p:grpSpPr/>
+      <p:sp>
+        <p:nvSpPr>
+          <p:cNvPr id="2" name="TextBox 1"/>
+          <p:cNvSpPr txBox="1"/>
+          <p:nvPr/>
+        </p:nvSpPr>
+        <p:spPr>
+          <a:xfrm>
+            <a:off x="502920" y="384048"/>
+            <a:ext cx="11155680" cy="292608"/>
+          </a:xfrm>
+          <a:prstGeom prst="rect">
+            <a:avLst/>
+          </a:prstGeom>
+          <a:noFill/>
+        </p:spPr>
+        <p:txBody>
+          <a:bodyPr wrap="none">
+            <a:spAutoFit/>
+          </a:bodyPr>
+          <a:lstStyle/>
+          <a:p>
+            <a:r>
+              <a:rPr sz="1300" b="1">
+                <a:solidFill>
+                  <a:srgbClr val="F2C744"/>
+                </a:solidFill>
+                <a:latin typeface="Segoe UI"/>
+              </a:rPr>
+              <a:t>A SHORT HISTORY LESSON</a:t>
+            </a:r>
+          </a:p>
+        </p:txBody>
+      </p:sp>
+      <p:sp>
+        <p:nvSpPr>
+          <p:cNvPr id="3" name="TextBox 2"/>
+          <p:cNvSpPr txBox="1"/>
+          <p:nvPr/>
+        </p:nvSpPr>
+        <p:spPr>
+          <a:xfrm>
+            <a:off x="457200" y="694944"/>
+            <a:ext cx="11247120" cy="777240"/>
+          </a:xfrm>
+          <a:prstGeom prst="rect">
+            <a:avLst/>
+          </a:prstGeom>
+          <a:noFill/>
+        </p:spPr>
+        <p:txBody>
+          <a:bodyPr wrap="none">
+            <a:spAutoFit/>
+          </a:bodyPr>
+          <a:lstStyle/>
+          <a:p>
+            <a:r>
+              <a:rPr sz="3100" b="1">
+                <a:solidFill>
+                  <a:srgbClr val="FFFFFF"/>
+                </a:solidFill>
+                <a:latin typeface="Segoe UI"/>
+              </a:rPr>
+              <a:t>One loop, every variable global</a:t>
+            </a:r>
+          </a:p>
+        </p:txBody>
+      </p:sp>
+      <p:sp>
+        <p:nvSpPr>
+          <p:cNvPr id="4" name="Rounded Rectangle 3"/>
+          <p:cNvSpPr/>
+          <p:nvPr/>
+        </p:nvSpPr>
+        <p:spPr>
+          <a:xfrm>
+            <a:off x="548640" y="1463040"/>
+            <a:ext cx="11338560" cy="3767328"/>
+          </a:xfrm>
+          <a:prstGeom prst="roundRect">
+            <a:avLst>
+              <a:gd name="adj" fmla="val 10000"/>
+            </a:avLst>
+          </a:prstGeom>
+          <a:solidFill>
+            <a:srgbClr val="081626"/>
+          </a:solidFill>
+          <a:ln w="12700">
+            <a:solidFill>
+              <a:srgbClr val="1E3A55"/>
+            </a:solidFill>
+          </a:ln>
+          <a:effectLst/>
+        </p:spPr>
+        <p:style>
+          <a:lnRef idx="1">
+            <a:schemeClr val="accent1"/>
+          </a:lnRef>
+          <a:fillRef idx="3">
+            <a:schemeClr val="accent1"/>
+          </a:fillRef>
+          <a:effectRef idx="2">
+            <a:schemeClr val="accent1"/>
+          </a:effectRef>
+          <a:fontRef idx="minor">
+            <a:schemeClr val="lt1"/>
+          </a:fontRef>
+        </p:style>
+        <p:txBody>
+          <a:bodyPr wrap="square" rtlCol="0" anchor="ctr"/>
+          <a:lstStyle/>
+          <a:p>
+            <a:pPr algn="ctr"/>
+          </a:p>
+        </p:txBody>
+      </p:sp>
+      <p:sp>
+        <p:nvSpPr>
+          <p:cNvPr id="6" name="TextBox 5"/>
+          <p:cNvSpPr txBox="1"/>
+          <p:nvPr/>
+        </p:nvSpPr>
+        <p:spPr>
+          <a:xfrm>
+            <a:off x="411480" y="6446520"/>
+            <a:ext cx="10058400" cy="320040"/>
+          </a:xfrm>
+          <a:prstGeom prst="rect">
+            <a:avLst/>
+          </a:prstGeom>
+          <a:noFill/>
+        </p:spPr>
+        <p:txBody>
+          <a:bodyPr wrap="none">
+            <a:spAutoFit/>
+          </a:bodyPr>
+          <a:lstStyle/>
+          <a:p>
+            <a:r>
+              <a:rPr sz="1000">
+                <a:solidFill>
+                  <a:srgbClr val="8CA3B8"/>
+                </a:solidFill>
+                <a:latin typeface="Segoe UI"/>
+              </a:rPr>
+              <a:t>Separation of Concerns at Zero Cost — ACCU on Sea 2026</a:t>
+            </a:r>
+          </a:p>
+        </p:txBody>
+      </p:sp>
+      <p:sp>
+        <p:nvSpPr>
+          <p:cNvPr id="7" name="TextBox 6"/>
+          <p:cNvSpPr txBox="1"/>
+          <p:nvPr/>
+        </p:nvSpPr>
+        <p:spPr>
+          <a:xfrm>
+            <a:off x="11384280" y="6446520"/>
+            <a:ext cx="548640" cy="320040"/>
+          </a:xfrm>
+          <a:prstGeom prst="rect">
+            <a:avLst/>
+          </a:prstGeom>
+          <a:noFill/>
+        </p:spPr>
+        <p:txBody>
+          <a:bodyPr wrap="none">
+            <a:spAutoFit/>
+          </a:bodyPr>
+          <a:lstStyle/>
+          <a:p>
+            <a:pPr algn="r"/>
+            <a:r>
+              <a:rPr sz="1000">
+                <a:solidFill>
+                  <a:srgbClr val="8CA3B8"/>
+                </a:solidFill>
+                <a:latin typeface="Segoe UI"/>
+              </a:rPr>
+              <a:t>38</a:t>
+            </a:r>
+          </a:p>
+        </p:txBody>
+      </p:sp>
+      <p:sp>
+        <p:nvSpPr>
+          <p:cNvPr id="8" name="zarchan loop"/>
+          <p:cNvSpPr txBox="1"/>
+          <p:nvPr/>
+        </p:nvSpPr>
+        <p:spPr>
+          <a:xfrm>
+            <a:off x="777240" y="1600200"/>
+            <a:ext cx="10881360" cy="3566160"/>
+          </a:xfrm>
+          <a:prstGeom prst="rect">
+            <a:avLst/>
+          </a:prstGeom>
+          <a:noFill/>
+        </p:spPr>
+        <p:txBody>
+          <a:bodyPr wrap="none">
+            <a:spAutoFit/>
+          </a:bodyPr>
+          <a:lstStyle/>
+          <a:p>
+            <a:pPr>
+              <a:spcAft>
+                <a:spcPts val="100"/>
+              </a:spcAft>
+            </a:pPr>
+            <a:r>
+              <a:rPr sz="1600">
+                <a:solidFill>
+                  <a:srgbClr val="569CD6"/>
+                </a:solidFill>
+                <a:latin typeface="Consolas"/>
+              </a:rPr>
+              <a:t>while</a:t>
+            </a:r>
+            <a:r>
+              <a:rPr sz="1600">
+                <a:solidFill>
+                  <a:srgbClr val="D4D4D4"/>
+                </a:solidFill>
+                <a:latin typeface="Consolas"/>
+              </a:rPr>
+              <a:t> </a:t>
+            </a:r>
+            <a:r>
+              <a:rPr sz="1600">
+                <a:solidFill>
+                  <a:srgbClr val="D4D4D4"/>
+                </a:solidFill>
+                <a:latin typeface="Consolas"/>
+              </a:rPr>
+              <a:t>~</a:t>
+            </a:r>
+            <a:r>
+              <a:rPr sz="1600">
+                <a:solidFill>
+                  <a:srgbClr val="D4D4D4"/>
+                </a:solidFill>
+                <a:latin typeface="Consolas"/>
+              </a:rPr>
+              <a:t>(</a:t>
+            </a:r>
+            <a:r>
+              <a:rPr sz="1600">
+                <a:solidFill>
+                  <a:srgbClr val="D4D4D4"/>
+                </a:solidFill>
+                <a:latin typeface="Consolas"/>
+              </a:rPr>
+              <a:t>ALT</a:t>
+            </a:r>
+            <a:r>
+              <a:rPr sz="1600">
+                <a:solidFill>
+                  <a:srgbClr val="D4D4D4"/>
+                </a:solidFill>
+                <a:latin typeface="Consolas"/>
+              </a:rPr>
+              <a:t>&lt;</a:t>
+            </a:r>
+            <a:r>
+              <a:rPr sz="1600">
+                <a:solidFill>
+                  <a:srgbClr val="B5CEA8"/>
+                </a:solidFill>
+                <a:latin typeface="Consolas"/>
+              </a:rPr>
+              <a:t>0</a:t>
+            </a:r>
+            <a:r>
+              <a:rPr sz="1600">
+                <a:solidFill>
+                  <a:srgbClr val="D4D4D4"/>
+                </a:solidFill>
+                <a:latin typeface="Consolas"/>
+              </a:rPr>
+              <a:t> </a:t>
+            </a:r>
+            <a:r>
+              <a:rPr sz="1600">
+                <a:solidFill>
+                  <a:srgbClr val="D4D4D4"/>
+                </a:solidFill>
+                <a:latin typeface="Consolas"/>
+              </a:rPr>
+              <a:t>&amp;</a:t>
+            </a:r>
+            <a:r>
+              <a:rPr sz="1600">
+                <a:solidFill>
+                  <a:srgbClr val="D4D4D4"/>
+                </a:solidFill>
+                <a:latin typeface="Consolas"/>
+              </a:rPr>
+              <a:t> </a:t>
+            </a:r>
+            <a:r>
+              <a:rPr sz="1600">
+                <a:solidFill>
+                  <a:srgbClr val="D4D4D4"/>
+                </a:solidFill>
+                <a:latin typeface="Consolas"/>
+              </a:rPr>
+              <a:t>T</a:t>
+            </a:r>
+            <a:r>
+              <a:rPr sz="1600">
+                <a:solidFill>
+                  <a:srgbClr val="D4D4D4"/>
+                </a:solidFill>
+                <a:latin typeface="Consolas"/>
+              </a:rPr>
+              <a:t>&gt;</a:t>
+            </a:r>
+            <a:r>
+              <a:rPr sz="1600">
+                <a:solidFill>
+                  <a:srgbClr val="B5CEA8"/>
+                </a:solidFill>
+                <a:latin typeface="Consolas"/>
+              </a:rPr>
+              <a:t>10</a:t>
+            </a:r>
+            <a:r>
+              <a:rPr sz="1600">
+                <a:solidFill>
+                  <a:srgbClr val="D4D4D4"/>
+                </a:solidFill>
+                <a:latin typeface="Consolas"/>
+              </a:rPr>
+              <a:t>)</a:t>
+            </a:r>
+          </a:p>
+          <a:p>
+            <a:pPr>
+              <a:spcAft>
+                <a:spcPts val="100"/>
+              </a:spcAft>
+            </a:pPr>
+            <a:r>
+              <a:rPr sz="1600">
+                <a:solidFill>
+                  <a:srgbClr val="D4D4D4"/>
+                </a:solidFill>
+                <a:latin typeface="Consolas"/>
+              </a:rPr>
+              <a:t>    </a:t>
+            </a:r>
+            <a:r>
+              <a:rPr sz="1600">
+                <a:solidFill>
+                  <a:srgbClr val="569CD6"/>
+                </a:solidFill>
+                <a:latin typeface="Consolas"/>
+              </a:rPr>
+              <a:t>if</a:t>
+            </a:r>
+            <a:r>
+              <a:rPr sz="1600">
+                <a:solidFill>
+                  <a:srgbClr val="D4D4D4"/>
+                </a:solidFill>
+                <a:latin typeface="Consolas"/>
+              </a:rPr>
+              <a:t> </a:t>
+            </a:r>
+            <a:r>
+              <a:rPr sz="1600">
+                <a:solidFill>
+                  <a:srgbClr val="D4D4D4"/>
+                </a:solidFill>
+                <a:latin typeface="Consolas"/>
+              </a:rPr>
+              <a:t>T</a:t>
+            </a:r>
+            <a:r>
+              <a:rPr sz="1600">
+                <a:solidFill>
+                  <a:srgbClr val="D4D4D4"/>
+                </a:solidFill>
+                <a:latin typeface="Consolas"/>
+              </a:rPr>
+              <a:t>&lt;</a:t>
+            </a:r>
+            <a:r>
+              <a:rPr sz="1600">
+                <a:solidFill>
+                  <a:srgbClr val="D4D4D4"/>
+                </a:solidFill>
+                <a:latin typeface="Consolas"/>
+              </a:rPr>
+              <a:t>TB1</a:t>
+            </a:r>
+          </a:p>
+          <a:p>
+            <a:pPr>
+              <a:spcAft>
+                <a:spcPts val="100"/>
+              </a:spcAft>
+            </a:pPr>
+            <a:r>
+              <a:rPr sz="1600">
+                <a:solidFill>
+                  <a:srgbClr val="D4D4D4"/>
+                </a:solidFill>
+                <a:latin typeface="Consolas"/>
+              </a:rPr>
+              <a:t>        </a:t>
+            </a:r>
+            <a:r>
+              <a:rPr sz="1600">
+                <a:solidFill>
+                  <a:srgbClr val="D4D4D4"/>
+                </a:solidFill>
+                <a:latin typeface="Consolas"/>
+              </a:rPr>
+              <a:t>WGT</a:t>
+            </a:r>
+            <a:r>
+              <a:rPr sz="1600">
+                <a:solidFill>
+                  <a:srgbClr val="D4D4D4"/>
+                </a:solidFill>
+                <a:latin typeface="Consolas"/>
+              </a:rPr>
+              <a:t>=</a:t>
+            </a:r>
+            <a:r>
+              <a:rPr sz="1600">
+                <a:solidFill>
+                  <a:srgbClr val="D4D4D4"/>
+                </a:solidFill>
+                <a:latin typeface="Consolas"/>
+              </a:rPr>
+              <a:t>-</a:t>
+            </a:r>
+            <a:r>
+              <a:rPr sz="1600">
+                <a:solidFill>
+                  <a:srgbClr val="D4D4D4"/>
+                </a:solidFill>
+                <a:latin typeface="Consolas"/>
+              </a:rPr>
+              <a:t>WP1</a:t>
+            </a:r>
+            <a:r>
+              <a:rPr sz="1600">
+                <a:solidFill>
+                  <a:srgbClr val="D4D4D4"/>
+                </a:solidFill>
+                <a:latin typeface="Consolas"/>
+              </a:rPr>
+              <a:t>*</a:t>
+            </a:r>
+            <a:r>
+              <a:rPr sz="1600">
+                <a:solidFill>
+                  <a:srgbClr val="D4D4D4"/>
+                </a:solidFill>
+                <a:latin typeface="Consolas"/>
+              </a:rPr>
+              <a:t>T</a:t>
+            </a:r>
+            <a:r>
+              <a:rPr sz="1600">
+                <a:solidFill>
+                  <a:srgbClr val="D4D4D4"/>
+                </a:solidFill>
+                <a:latin typeface="Consolas"/>
+              </a:rPr>
+              <a:t>/</a:t>
+            </a:r>
+            <a:r>
+              <a:rPr sz="1600">
+                <a:solidFill>
+                  <a:srgbClr val="D4D4D4"/>
+                </a:solidFill>
+                <a:latin typeface="Consolas"/>
+              </a:rPr>
+              <a:t>TB1</a:t>
+            </a:r>
+            <a:r>
+              <a:rPr sz="1600">
+                <a:solidFill>
+                  <a:srgbClr val="D4D4D4"/>
+                </a:solidFill>
+                <a:latin typeface="Consolas"/>
+              </a:rPr>
+              <a:t>+</a:t>
+            </a:r>
+            <a:r>
+              <a:rPr sz="1600">
+                <a:solidFill>
+                  <a:srgbClr val="D4D4D4"/>
+                </a:solidFill>
+                <a:latin typeface="Consolas"/>
+              </a:rPr>
+              <a:t>WTOT</a:t>
+            </a:r>
+            <a:r>
+              <a:rPr sz="1600">
+                <a:solidFill>
+                  <a:srgbClr val="D4D4D4"/>
+                </a:solidFill>
+                <a:latin typeface="Consolas"/>
+              </a:rPr>
+              <a:t>;</a:t>
+            </a:r>
+            <a:r>
+              <a:rPr sz="1600">
+                <a:solidFill>
+                  <a:srgbClr val="D4D4D4"/>
+                </a:solidFill>
+                <a:latin typeface="Consolas"/>
+              </a:rPr>
+              <a:t>   </a:t>
+            </a:r>
+            <a:r>
+              <a:rPr sz="1600">
+                <a:solidFill>
+                  <a:srgbClr val="D4D4D4"/>
+                </a:solidFill>
+                <a:latin typeface="Consolas"/>
+              </a:rPr>
+              <a:t>TRST</a:t>
+            </a:r>
+            <a:r>
+              <a:rPr sz="1600">
+                <a:solidFill>
+                  <a:srgbClr val="D4D4D4"/>
+                </a:solidFill>
+                <a:latin typeface="Consolas"/>
+              </a:rPr>
+              <a:t>=</a:t>
+            </a:r>
+            <a:r>
+              <a:rPr sz="1600">
+                <a:solidFill>
+                  <a:srgbClr val="D4D4D4"/>
+                </a:solidFill>
+                <a:latin typeface="Consolas"/>
+              </a:rPr>
+              <a:t>TRST1</a:t>
+            </a:r>
+            <a:r>
+              <a:rPr sz="1600">
+                <a:solidFill>
+                  <a:srgbClr val="D4D4D4"/>
+                </a:solidFill>
+                <a:latin typeface="Consolas"/>
+              </a:rPr>
+              <a:t>;</a:t>
+            </a:r>
+          </a:p>
+          <a:p>
+            <a:pPr>
+              <a:spcAft>
+                <a:spcPts val="100"/>
+              </a:spcAft>
+            </a:pPr>
+            <a:r>
+              <a:rPr sz="1600">
+                <a:solidFill>
+                  <a:srgbClr val="D4D4D4"/>
+                </a:solidFill>
+                <a:latin typeface="Consolas"/>
+              </a:rPr>
+              <a:t>    </a:t>
+            </a:r>
+            <a:r>
+              <a:rPr sz="1600">
+                <a:solidFill>
+                  <a:srgbClr val="569CD6"/>
+                </a:solidFill>
+                <a:latin typeface="Consolas"/>
+              </a:rPr>
+              <a:t>elseif</a:t>
+            </a:r>
+            <a:r>
+              <a:rPr sz="1600">
+                <a:solidFill>
+                  <a:srgbClr val="D4D4D4"/>
+                </a:solidFill>
+                <a:latin typeface="Consolas"/>
+              </a:rPr>
+              <a:t> </a:t>
+            </a:r>
+            <a:r>
+              <a:rPr sz="1600">
+                <a:solidFill>
+                  <a:srgbClr val="D4D4D4"/>
+                </a:solidFill>
+                <a:latin typeface="Consolas"/>
+              </a:rPr>
+              <a:t>T</a:t>
+            </a:r>
+            <a:r>
+              <a:rPr sz="1600">
+                <a:solidFill>
+                  <a:srgbClr val="D4D4D4"/>
+                </a:solidFill>
+                <a:latin typeface="Consolas"/>
+              </a:rPr>
+              <a:t>&lt;</a:t>
+            </a:r>
+            <a:r>
+              <a:rPr sz="1600">
+                <a:solidFill>
+                  <a:srgbClr val="D4D4D4"/>
+                </a:solidFill>
+                <a:latin typeface="Consolas"/>
+              </a:rPr>
+              <a:t>(</a:t>
+            </a:r>
+            <a:r>
+              <a:rPr sz="1600">
+                <a:solidFill>
+                  <a:srgbClr val="D4D4D4"/>
+                </a:solidFill>
+                <a:latin typeface="Consolas"/>
+              </a:rPr>
+              <a:t>TB1</a:t>
+            </a:r>
+            <a:r>
+              <a:rPr sz="1600">
+                <a:solidFill>
+                  <a:srgbClr val="D4D4D4"/>
+                </a:solidFill>
+                <a:latin typeface="Consolas"/>
+              </a:rPr>
+              <a:t>+</a:t>
+            </a:r>
+            <a:r>
+              <a:rPr sz="1600">
+                <a:solidFill>
+                  <a:srgbClr val="D4D4D4"/>
+                </a:solidFill>
+                <a:latin typeface="Consolas"/>
+              </a:rPr>
+              <a:t>TB2</a:t>
+            </a:r>
+            <a:r>
+              <a:rPr sz="1600">
+                <a:solidFill>
+                  <a:srgbClr val="D4D4D4"/>
+                </a:solidFill>
+                <a:latin typeface="Consolas"/>
+              </a:rPr>
+              <a:t>)</a:t>
+            </a:r>
+          </a:p>
+          <a:p>
+            <a:pPr>
+              <a:spcAft>
+                <a:spcPts val="100"/>
+              </a:spcAft>
+            </a:pPr>
+            <a:r>
+              <a:rPr sz="1600">
+                <a:solidFill>
+                  <a:srgbClr val="D4D4D4"/>
+                </a:solidFill>
+                <a:latin typeface="Consolas"/>
+              </a:rPr>
+              <a:t>        </a:t>
+            </a:r>
+            <a:r>
+              <a:rPr sz="1600">
+                <a:solidFill>
+                  <a:srgbClr val="D4D4D4"/>
+                </a:solidFill>
+                <a:latin typeface="Consolas"/>
+              </a:rPr>
+              <a:t>WGT</a:t>
+            </a:r>
+            <a:r>
+              <a:rPr sz="1600">
+                <a:solidFill>
+                  <a:srgbClr val="D4D4D4"/>
+                </a:solidFill>
+                <a:latin typeface="Consolas"/>
+              </a:rPr>
+              <a:t>=</a:t>
+            </a:r>
+            <a:r>
+              <a:rPr sz="1600">
+                <a:solidFill>
+                  <a:srgbClr val="D4D4D4"/>
+                </a:solidFill>
+                <a:latin typeface="Consolas"/>
+              </a:rPr>
+              <a:t>-</a:t>
+            </a:r>
+            <a:r>
+              <a:rPr sz="1600">
+                <a:solidFill>
+                  <a:srgbClr val="D4D4D4"/>
+                </a:solidFill>
+                <a:latin typeface="Consolas"/>
+              </a:rPr>
+              <a:t>WP2</a:t>
+            </a:r>
+            <a:r>
+              <a:rPr sz="1600">
+                <a:solidFill>
+                  <a:srgbClr val="D4D4D4"/>
+                </a:solidFill>
+                <a:latin typeface="Consolas"/>
+              </a:rPr>
+              <a:t>*</a:t>
+            </a:r>
+            <a:r>
+              <a:rPr sz="1600">
+                <a:solidFill>
+                  <a:srgbClr val="D4D4D4"/>
+                </a:solidFill>
+                <a:latin typeface="Consolas"/>
+              </a:rPr>
+              <a:t>T</a:t>
+            </a:r>
+            <a:r>
+              <a:rPr sz="1600">
+                <a:solidFill>
+                  <a:srgbClr val="D4D4D4"/>
+                </a:solidFill>
+                <a:latin typeface="Consolas"/>
+              </a:rPr>
+              <a:t>/</a:t>
+            </a:r>
+            <a:r>
+              <a:rPr sz="1600">
+                <a:solidFill>
+                  <a:srgbClr val="D4D4D4"/>
+                </a:solidFill>
+                <a:latin typeface="Consolas"/>
+              </a:rPr>
+              <a:t>TB2</a:t>
+            </a:r>
+            <a:r>
+              <a:rPr sz="1600">
+                <a:solidFill>
+                  <a:srgbClr val="D4D4D4"/>
+                </a:solidFill>
+                <a:latin typeface="Consolas"/>
+              </a:rPr>
+              <a:t>+</a:t>
+            </a:r>
+            <a:r>
+              <a:rPr sz="1600">
+                <a:solidFill>
+                  <a:srgbClr val="D4D4D4"/>
+                </a:solidFill>
+                <a:latin typeface="Consolas"/>
+              </a:rPr>
+              <a:t>WTOT2</a:t>
+            </a:r>
+            <a:r>
+              <a:rPr sz="1600">
+                <a:solidFill>
+                  <a:srgbClr val="D4D4D4"/>
+                </a:solidFill>
+                <a:latin typeface="Consolas"/>
+              </a:rPr>
+              <a:t>+</a:t>
+            </a:r>
+            <a:r>
+              <a:rPr sz="1600">
+                <a:solidFill>
+                  <a:srgbClr val="D4D4D4"/>
+                </a:solidFill>
+                <a:latin typeface="Consolas"/>
+              </a:rPr>
+              <a:t>WP2</a:t>
+            </a:r>
+            <a:r>
+              <a:rPr sz="1600">
+                <a:solidFill>
+                  <a:srgbClr val="D4D4D4"/>
+                </a:solidFill>
+                <a:latin typeface="Consolas"/>
+              </a:rPr>
+              <a:t>*</a:t>
+            </a:r>
+            <a:r>
+              <a:rPr sz="1600">
+                <a:solidFill>
+                  <a:srgbClr val="D4D4D4"/>
+                </a:solidFill>
+                <a:latin typeface="Consolas"/>
+              </a:rPr>
+              <a:t>TB1</a:t>
+            </a:r>
+            <a:r>
+              <a:rPr sz="1600">
+                <a:solidFill>
+                  <a:srgbClr val="D4D4D4"/>
+                </a:solidFill>
+                <a:latin typeface="Consolas"/>
+              </a:rPr>
+              <a:t>/</a:t>
+            </a:r>
+            <a:r>
+              <a:rPr sz="1600">
+                <a:solidFill>
+                  <a:srgbClr val="D4D4D4"/>
+                </a:solidFill>
+                <a:latin typeface="Consolas"/>
+              </a:rPr>
+              <a:t>TB2</a:t>
+            </a:r>
+            <a:r>
+              <a:rPr sz="1600">
+                <a:solidFill>
+                  <a:srgbClr val="D4D4D4"/>
+                </a:solidFill>
+                <a:latin typeface="Consolas"/>
+              </a:rPr>
+              <a:t>;</a:t>
+            </a:r>
+            <a:r>
+              <a:rPr sz="1600">
+                <a:solidFill>
+                  <a:srgbClr val="D4D4D4"/>
+                </a:solidFill>
+                <a:latin typeface="Consolas"/>
+              </a:rPr>
+              <a:t>   </a:t>
+            </a:r>
+            <a:r>
+              <a:rPr sz="1600">
+                <a:solidFill>
+                  <a:srgbClr val="D4D4D4"/>
+                </a:solidFill>
+                <a:latin typeface="Consolas"/>
+              </a:rPr>
+              <a:t>TRST</a:t>
+            </a:r>
+            <a:r>
+              <a:rPr sz="1600">
+                <a:solidFill>
+                  <a:srgbClr val="D4D4D4"/>
+                </a:solidFill>
+                <a:latin typeface="Consolas"/>
+              </a:rPr>
+              <a:t>=</a:t>
+            </a:r>
+            <a:r>
+              <a:rPr sz="1600">
+                <a:solidFill>
+                  <a:srgbClr val="D4D4D4"/>
+                </a:solidFill>
+                <a:latin typeface="Consolas"/>
+              </a:rPr>
+              <a:t>TRST2</a:t>
+            </a:r>
+            <a:r>
+              <a:rPr sz="1600">
+                <a:solidFill>
+                  <a:srgbClr val="D4D4D4"/>
+                </a:solidFill>
+                <a:latin typeface="Consolas"/>
+              </a:rPr>
+              <a:t>;</a:t>
+            </a:r>
+          </a:p>
+          <a:p>
+            <a:pPr>
+              <a:spcAft>
+                <a:spcPts val="100"/>
+              </a:spcAft>
+            </a:pPr>
+            <a:r>
+              <a:rPr sz="1600">
+                <a:solidFill>
+                  <a:srgbClr val="D4D4D4"/>
+                </a:solidFill>
+                <a:latin typeface="Consolas"/>
+              </a:rPr>
+              <a:t>    </a:t>
+            </a:r>
+            <a:r>
+              <a:rPr sz="1600">
+                <a:solidFill>
+                  <a:srgbClr val="569CD6"/>
+                </a:solidFill>
+                <a:latin typeface="Consolas"/>
+              </a:rPr>
+              <a:t>else</a:t>
+            </a:r>
+          </a:p>
+          <a:p>
+            <a:pPr>
+              <a:spcAft>
+                <a:spcPts val="100"/>
+              </a:spcAft>
+            </a:pPr>
+            <a:r>
+              <a:rPr sz="1600">
+                <a:solidFill>
+                  <a:srgbClr val="D4D4D4"/>
+                </a:solidFill>
+                <a:latin typeface="Consolas"/>
+              </a:rPr>
+              <a:t>        </a:t>
+            </a:r>
+            <a:r>
+              <a:rPr sz="1600">
+                <a:solidFill>
+                  <a:srgbClr val="D4D4D4"/>
+                </a:solidFill>
+                <a:latin typeface="Consolas"/>
+              </a:rPr>
+              <a:t>WGT</a:t>
+            </a:r>
+            <a:r>
+              <a:rPr sz="1600">
+                <a:solidFill>
+                  <a:srgbClr val="D4D4D4"/>
+                </a:solidFill>
+                <a:latin typeface="Consolas"/>
+              </a:rPr>
+              <a:t>=</a:t>
+            </a:r>
+            <a:r>
+              <a:rPr sz="1600">
+                <a:solidFill>
+                  <a:srgbClr val="D4D4D4"/>
+                </a:solidFill>
+                <a:latin typeface="Consolas"/>
+              </a:rPr>
+              <a:t>WPAY</a:t>
+            </a:r>
+            <a:r>
+              <a:rPr sz="1600">
+                <a:solidFill>
+                  <a:srgbClr val="D4D4D4"/>
+                </a:solidFill>
+                <a:latin typeface="Consolas"/>
+              </a:rPr>
+              <a:t>;</a:t>
+            </a:r>
+            <a:r>
+              <a:rPr sz="1600">
+                <a:solidFill>
+                  <a:srgbClr val="D4D4D4"/>
+                </a:solidFill>
+                <a:latin typeface="Consolas"/>
+              </a:rPr>
+              <a:t>   </a:t>
+            </a:r>
+            <a:r>
+              <a:rPr sz="1600">
+                <a:solidFill>
+                  <a:srgbClr val="D4D4D4"/>
+                </a:solidFill>
+                <a:latin typeface="Consolas"/>
+              </a:rPr>
+              <a:t>TRST</a:t>
+            </a:r>
+            <a:r>
+              <a:rPr sz="1600">
+                <a:solidFill>
+                  <a:srgbClr val="D4D4D4"/>
+                </a:solidFill>
+                <a:latin typeface="Consolas"/>
+              </a:rPr>
+              <a:t>=</a:t>
+            </a:r>
+            <a:r>
+              <a:rPr sz="1600">
+                <a:solidFill>
+                  <a:srgbClr val="B5CEA8"/>
+                </a:solidFill>
+                <a:latin typeface="Consolas"/>
+              </a:rPr>
+              <a:t>0.</a:t>
+            </a:r>
+            <a:r>
+              <a:rPr sz="1600">
+                <a:solidFill>
+                  <a:srgbClr val="D4D4D4"/>
+                </a:solidFill>
+                <a:latin typeface="Consolas"/>
+              </a:rPr>
+              <a:t>;</a:t>
+            </a:r>
+          </a:p>
+          <a:p>
+            <a:pPr>
+              <a:spcAft>
+                <a:spcPts val="100"/>
+              </a:spcAft>
+            </a:pPr>
+            <a:r>
+              <a:rPr sz="1600">
+                <a:solidFill>
+                  <a:srgbClr val="D4D4D4"/>
+                </a:solidFill>
+                <a:latin typeface="Consolas"/>
+              </a:rPr>
+              <a:t>    </a:t>
+            </a:r>
+            <a:r>
+              <a:rPr sz="1600">
+                <a:solidFill>
+                  <a:srgbClr val="569CD6"/>
+                </a:solidFill>
+                <a:latin typeface="Consolas"/>
+              </a:rPr>
+              <a:t>end</a:t>
+            </a:r>
+          </a:p>
+          <a:p>
+            <a:pPr>
+              <a:spcAft>
+                <a:spcPts val="100"/>
+              </a:spcAft>
+            </a:pPr>
+            <a:r>
+              <a:rPr sz="1600">
+                <a:solidFill>
+                  <a:srgbClr val="D4D4D4"/>
+                </a:solidFill>
+                <a:latin typeface="Consolas"/>
+              </a:rPr>
+              <a:t>    </a:t>
+            </a:r>
+            <a:r>
+              <a:rPr sz="1600">
+                <a:solidFill>
+                  <a:srgbClr val="D4D4D4"/>
+                </a:solidFill>
+                <a:latin typeface="Consolas"/>
+              </a:rPr>
+              <a:t>AT</a:t>
+            </a:r>
+            <a:r>
+              <a:rPr sz="1600">
+                <a:solidFill>
+                  <a:srgbClr val="D4D4D4"/>
+                </a:solidFill>
+                <a:latin typeface="Consolas"/>
+              </a:rPr>
+              <a:t>=</a:t>
+            </a:r>
+            <a:r>
+              <a:rPr sz="1600">
+                <a:solidFill>
+                  <a:srgbClr val="B5CEA8"/>
+                </a:solidFill>
+                <a:latin typeface="Consolas"/>
+              </a:rPr>
+              <a:t>32.2</a:t>
+            </a:r>
+            <a:r>
+              <a:rPr sz="1600">
+                <a:solidFill>
+                  <a:srgbClr val="D4D4D4"/>
+                </a:solidFill>
+                <a:latin typeface="Consolas"/>
+              </a:rPr>
+              <a:t>*</a:t>
+            </a:r>
+            <a:r>
+              <a:rPr sz="1600">
+                <a:solidFill>
+                  <a:srgbClr val="D4D4D4"/>
+                </a:solidFill>
+                <a:latin typeface="Consolas"/>
+              </a:rPr>
+              <a:t>TRST</a:t>
+            </a:r>
+            <a:r>
+              <a:rPr sz="1600">
+                <a:solidFill>
+                  <a:srgbClr val="D4D4D4"/>
+                </a:solidFill>
+                <a:latin typeface="Consolas"/>
+              </a:rPr>
+              <a:t>/</a:t>
+            </a:r>
+            <a:r>
+              <a:rPr sz="1600">
+                <a:solidFill>
+                  <a:srgbClr val="D4D4D4"/>
+                </a:solidFill>
+                <a:latin typeface="Consolas"/>
+              </a:rPr>
+              <a:t>WGT</a:t>
+            </a:r>
+            <a:r>
+              <a:rPr sz="1600">
+                <a:solidFill>
+                  <a:srgbClr val="D4D4D4"/>
+                </a:solidFill>
+                <a:latin typeface="Consolas"/>
+              </a:rPr>
+              <a:t>;</a:t>
+            </a:r>
+            <a:r>
+              <a:rPr sz="1600">
+                <a:solidFill>
+                  <a:srgbClr val="D4D4D4"/>
+                </a:solidFill>
+                <a:latin typeface="Consolas"/>
+              </a:rPr>
+              <a:t>   </a:t>
+            </a:r>
+            <a:r>
+              <a:rPr sz="1600">
+                <a:solidFill>
+                  <a:srgbClr val="D4D4D4"/>
+                </a:solidFill>
+                <a:latin typeface="Consolas"/>
+              </a:rPr>
+              <a:t>VEL</a:t>
+            </a:r>
+            <a:r>
+              <a:rPr sz="1600">
+                <a:solidFill>
+                  <a:srgbClr val="D4D4D4"/>
+                </a:solidFill>
+                <a:latin typeface="Consolas"/>
+              </a:rPr>
+              <a:t>=</a:t>
+            </a:r>
+            <a:r>
+              <a:rPr sz="1600">
+                <a:solidFill>
+                  <a:srgbClr val="4EC9B0"/>
+                </a:solidFill>
+                <a:latin typeface="Consolas"/>
+              </a:rPr>
+              <a:t>sqrt</a:t>
+            </a:r>
+            <a:r>
+              <a:rPr sz="1600">
+                <a:solidFill>
+                  <a:srgbClr val="D4D4D4"/>
+                </a:solidFill>
+                <a:latin typeface="Consolas"/>
+              </a:rPr>
+              <a:t>(</a:t>
+            </a:r>
+            <a:r>
+              <a:rPr sz="1600">
+                <a:solidFill>
+                  <a:srgbClr val="D4D4D4"/>
+                </a:solidFill>
+                <a:latin typeface="Consolas"/>
+              </a:rPr>
+              <a:t>X1</a:t>
+            </a:r>
+            <a:r>
+              <a:rPr sz="1600">
+                <a:solidFill>
+                  <a:srgbClr val="D4D4D4"/>
+                </a:solidFill>
+                <a:latin typeface="Consolas"/>
+              </a:rPr>
+              <a:t>^</a:t>
+            </a:r>
+            <a:r>
+              <a:rPr sz="1600">
+                <a:solidFill>
+                  <a:srgbClr val="B5CEA8"/>
+                </a:solidFill>
+                <a:latin typeface="Consolas"/>
+              </a:rPr>
+              <a:t>2</a:t>
+            </a:r>
+            <a:r>
+              <a:rPr sz="1600">
+                <a:solidFill>
+                  <a:srgbClr val="D4D4D4"/>
+                </a:solidFill>
+                <a:latin typeface="Consolas"/>
+              </a:rPr>
+              <a:t>+</a:t>
+            </a:r>
+            <a:r>
+              <a:rPr sz="1600">
+                <a:solidFill>
+                  <a:srgbClr val="D4D4D4"/>
+                </a:solidFill>
+                <a:latin typeface="Consolas"/>
+              </a:rPr>
+              <a:t>Y1</a:t>
+            </a:r>
+            <a:r>
+              <a:rPr sz="1600">
+                <a:solidFill>
+                  <a:srgbClr val="D4D4D4"/>
+                </a:solidFill>
+                <a:latin typeface="Consolas"/>
+              </a:rPr>
+              <a:t>^</a:t>
+            </a:r>
+            <a:r>
+              <a:rPr sz="1600">
+                <a:solidFill>
+                  <a:srgbClr val="B5CEA8"/>
+                </a:solidFill>
+                <a:latin typeface="Consolas"/>
+              </a:rPr>
+              <a:t>2</a:t>
+            </a:r>
+            <a:r>
+              <a:rPr sz="1600">
+                <a:solidFill>
+                  <a:srgbClr val="D4D4D4"/>
+                </a:solidFill>
+                <a:latin typeface="Consolas"/>
+              </a:rPr>
+              <a:t>)</a:t>
+            </a:r>
+            <a:r>
+              <a:rPr sz="1600">
+                <a:solidFill>
+                  <a:srgbClr val="D4D4D4"/>
+                </a:solidFill>
+                <a:latin typeface="Consolas"/>
+              </a:rPr>
+              <a:t>;</a:t>
+            </a:r>
+          </a:p>
+          <a:p>
+            <a:pPr>
+              <a:spcAft>
+                <a:spcPts val="100"/>
+              </a:spcAft>
+            </a:pPr>
+            <a:r>
+              <a:rPr sz="1600">
+                <a:solidFill>
+                  <a:srgbClr val="D4D4D4"/>
+                </a:solidFill>
+                <a:latin typeface="Consolas"/>
+              </a:rPr>
+              <a:t>    </a:t>
+            </a:r>
+            <a:r>
+              <a:rPr sz="1600">
+                <a:solidFill>
+                  <a:srgbClr val="D4D4D4"/>
+                </a:solidFill>
+                <a:latin typeface="Consolas"/>
+              </a:rPr>
+              <a:t>TEMBOT</a:t>
+            </a:r>
+            <a:r>
+              <a:rPr sz="1600">
+                <a:solidFill>
+                  <a:srgbClr val="D4D4D4"/>
+                </a:solidFill>
+                <a:latin typeface="Consolas"/>
+              </a:rPr>
+              <a:t>=</a:t>
+            </a:r>
+            <a:r>
+              <a:rPr sz="1600">
+                <a:solidFill>
+                  <a:srgbClr val="D4D4D4"/>
+                </a:solidFill>
+                <a:latin typeface="Consolas"/>
+              </a:rPr>
+              <a:t>(</a:t>
+            </a:r>
+            <a:r>
+              <a:rPr sz="1600">
+                <a:solidFill>
+                  <a:srgbClr val="D4D4D4"/>
+                </a:solidFill>
+                <a:latin typeface="Consolas"/>
+              </a:rPr>
+              <a:t>X</a:t>
+            </a:r>
+            <a:r>
+              <a:rPr sz="1600">
+                <a:solidFill>
+                  <a:srgbClr val="D4D4D4"/>
+                </a:solidFill>
+                <a:latin typeface="Consolas"/>
+              </a:rPr>
+              <a:t>^</a:t>
+            </a:r>
+            <a:r>
+              <a:rPr sz="1600">
+                <a:solidFill>
+                  <a:srgbClr val="B5CEA8"/>
+                </a:solidFill>
+                <a:latin typeface="Consolas"/>
+              </a:rPr>
+              <a:t>2</a:t>
+            </a:r>
+            <a:r>
+              <a:rPr sz="1600">
+                <a:solidFill>
+                  <a:srgbClr val="D4D4D4"/>
+                </a:solidFill>
+                <a:latin typeface="Consolas"/>
+              </a:rPr>
+              <a:t>+</a:t>
+            </a:r>
+            <a:r>
+              <a:rPr sz="1600">
+                <a:solidFill>
+                  <a:srgbClr val="D4D4D4"/>
+                </a:solidFill>
+                <a:latin typeface="Consolas"/>
+              </a:rPr>
+              <a:t>Y</a:t>
+            </a:r>
+            <a:r>
+              <a:rPr sz="1600">
+                <a:solidFill>
+                  <a:srgbClr val="D4D4D4"/>
+                </a:solidFill>
+                <a:latin typeface="Consolas"/>
+              </a:rPr>
+              <a:t>^</a:t>
+            </a:r>
+            <a:r>
+              <a:rPr sz="1600">
+                <a:solidFill>
+                  <a:srgbClr val="B5CEA8"/>
+                </a:solidFill>
+                <a:latin typeface="Consolas"/>
+              </a:rPr>
+              <a:t>2</a:t>
+            </a:r>
+            <a:r>
+              <a:rPr sz="1600">
+                <a:solidFill>
+                  <a:srgbClr val="D4D4D4"/>
+                </a:solidFill>
+                <a:latin typeface="Consolas"/>
+              </a:rPr>
+              <a:t>)</a:t>
+            </a:r>
+            <a:r>
+              <a:rPr sz="1600">
+                <a:solidFill>
+                  <a:srgbClr val="D4D4D4"/>
+                </a:solidFill>
+                <a:latin typeface="Consolas"/>
+              </a:rPr>
+              <a:t>^</a:t>
+            </a:r>
+            <a:r>
+              <a:rPr sz="1600">
+                <a:solidFill>
+                  <a:srgbClr val="B5CEA8"/>
+                </a:solidFill>
+                <a:latin typeface="Consolas"/>
+              </a:rPr>
+              <a:t>1.5</a:t>
+            </a:r>
+            <a:r>
+              <a:rPr sz="1600">
+                <a:solidFill>
+                  <a:srgbClr val="D4D4D4"/>
+                </a:solidFill>
+                <a:latin typeface="Consolas"/>
+              </a:rPr>
+              <a:t>;</a:t>
+            </a:r>
+          </a:p>
+          <a:p>
+            <a:pPr>
+              <a:spcAft>
+                <a:spcPts val="100"/>
+              </a:spcAft>
+            </a:pPr>
+            <a:r>
+              <a:rPr sz="1600">
+                <a:solidFill>
+                  <a:srgbClr val="D4D4D4"/>
+                </a:solidFill>
+                <a:latin typeface="Consolas"/>
+              </a:rPr>
+              <a:t>    </a:t>
+            </a:r>
+            <a:r>
+              <a:rPr sz="1600">
+                <a:solidFill>
+                  <a:srgbClr val="D4D4D4"/>
+                </a:solidFill>
+                <a:latin typeface="Consolas"/>
+              </a:rPr>
+              <a:t>X1D</a:t>
+            </a:r>
+            <a:r>
+              <a:rPr sz="1600">
+                <a:solidFill>
+                  <a:srgbClr val="D4D4D4"/>
+                </a:solidFill>
+                <a:latin typeface="Consolas"/>
+              </a:rPr>
+              <a:t>=</a:t>
+            </a:r>
+            <a:r>
+              <a:rPr sz="1600">
+                <a:solidFill>
+                  <a:srgbClr val="D4D4D4"/>
+                </a:solidFill>
+                <a:latin typeface="Consolas"/>
+              </a:rPr>
+              <a:t>-</a:t>
+            </a:r>
+            <a:r>
+              <a:rPr sz="1600">
+                <a:solidFill>
+                  <a:srgbClr val="D4D4D4"/>
+                </a:solidFill>
+                <a:latin typeface="Consolas"/>
+              </a:rPr>
+              <a:t>GM</a:t>
+            </a:r>
+            <a:r>
+              <a:rPr sz="1600">
+                <a:solidFill>
+                  <a:srgbClr val="D4D4D4"/>
+                </a:solidFill>
+                <a:latin typeface="Consolas"/>
+              </a:rPr>
+              <a:t>*</a:t>
+            </a:r>
+            <a:r>
+              <a:rPr sz="1600">
+                <a:solidFill>
+                  <a:srgbClr val="D4D4D4"/>
+                </a:solidFill>
+                <a:latin typeface="Consolas"/>
+              </a:rPr>
+              <a:t>X</a:t>
+            </a:r>
+            <a:r>
+              <a:rPr sz="1600">
+                <a:solidFill>
+                  <a:srgbClr val="D4D4D4"/>
+                </a:solidFill>
+                <a:latin typeface="Consolas"/>
+              </a:rPr>
+              <a:t>/</a:t>
+            </a:r>
+            <a:r>
+              <a:rPr sz="1600">
+                <a:solidFill>
+                  <a:srgbClr val="D4D4D4"/>
+                </a:solidFill>
+                <a:latin typeface="Consolas"/>
+              </a:rPr>
+              <a:t>TEMBOT</a:t>
+            </a:r>
+            <a:r>
+              <a:rPr sz="1600">
+                <a:solidFill>
+                  <a:srgbClr val="D4D4D4"/>
+                </a:solidFill>
+                <a:latin typeface="Consolas"/>
+              </a:rPr>
+              <a:t>+</a:t>
+            </a:r>
+            <a:r>
+              <a:rPr sz="1600">
+                <a:solidFill>
+                  <a:srgbClr val="D4D4D4"/>
+                </a:solidFill>
+                <a:latin typeface="Consolas"/>
+              </a:rPr>
+              <a:t>AT</a:t>
+            </a:r>
+            <a:r>
+              <a:rPr sz="1600">
+                <a:solidFill>
+                  <a:srgbClr val="D4D4D4"/>
+                </a:solidFill>
+                <a:latin typeface="Consolas"/>
+              </a:rPr>
+              <a:t>*</a:t>
+            </a:r>
+            <a:r>
+              <a:rPr sz="1600">
+                <a:solidFill>
+                  <a:srgbClr val="D4D4D4"/>
+                </a:solidFill>
+                <a:latin typeface="Consolas"/>
+              </a:rPr>
+              <a:t>X1</a:t>
+            </a:r>
+            <a:r>
+              <a:rPr sz="1600">
+                <a:solidFill>
+                  <a:srgbClr val="D4D4D4"/>
+                </a:solidFill>
+                <a:latin typeface="Consolas"/>
+              </a:rPr>
+              <a:t>/</a:t>
+            </a:r>
+            <a:r>
+              <a:rPr sz="1600">
+                <a:solidFill>
+                  <a:srgbClr val="D4D4D4"/>
+                </a:solidFill>
+                <a:latin typeface="Consolas"/>
+              </a:rPr>
+              <a:t>VEL</a:t>
+            </a:r>
+            <a:r>
+              <a:rPr sz="1600">
+                <a:solidFill>
+                  <a:srgbClr val="D4D4D4"/>
+                </a:solidFill>
+                <a:latin typeface="Consolas"/>
+              </a:rPr>
+              <a:t>;</a:t>
+            </a:r>
+          </a:p>
+          <a:p>
+            <a:pPr>
+              <a:spcAft>
+                <a:spcPts val="100"/>
+              </a:spcAft>
+            </a:pPr>
+            <a:r>
+              <a:rPr sz="1600">
+                <a:solidFill>
+                  <a:srgbClr val="D4D4D4"/>
+                </a:solidFill>
+                <a:latin typeface="Consolas"/>
+              </a:rPr>
+              <a:t>    </a:t>
+            </a:r>
+            <a:r>
+              <a:rPr sz="1600">
+                <a:solidFill>
+                  <a:srgbClr val="D4D4D4"/>
+                </a:solidFill>
+                <a:latin typeface="Consolas"/>
+              </a:rPr>
+              <a:t>Y1D</a:t>
+            </a:r>
+            <a:r>
+              <a:rPr sz="1600">
+                <a:solidFill>
+                  <a:srgbClr val="D4D4D4"/>
+                </a:solidFill>
+                <a:latin typeface="Consolas"/>
+              </a:rPr>
+              <a:t>=</a:t>
+            </a:r>
+            <a:r>
+              <a:rPr sz="1600">
+                <a:solidFill>
+                  <a:srgbClr val="D4D4D4"/>
+                </a:solidFill>
+                <a:latin typeface="Consolas"/>
+              </a:rPr>
+              <a:t>-</a:t>
+            </a:r>
+            <a:r>
+              <a:rPr sz="1600">
+                <a:solidFill>
+                  <a:srgbClr val="D4D4D4"/>
+                </a:solidFill>
+                <a:latin typeface="Consolas"/>
+              </a:rPr>
+              <a:t>GM</a:t>
+            </a:r>
+            <a:r>
+              <a:rPr sz="1600">
+                <a:solidFill>
+                  <a:srgbClr val="D4D4D4"/>
+                </a:solidFill>
+                <a:latin typeface="Consolas"/>
+              </a:rPr>
+              <a:t>*</a:t>
+            </a:r>
+            <a:r>
+              <a:rPr sz="1600">
+                <a:solidFill>
+                  <a:srgbClr val="D4D4D4"/>
+                </a:solidFill>
+                <a:latin typeface="Consolas"/>
+              </a:rPr>
+              <a:t>Y</a:t>
+            </a:r>
+            <a:r>
+              <a:rPr sz="1600">
+                <a:solidFill>
+                  <a:srgbClr val="D4D4D4"/>
+                </a:solidFill>
+                <a:latin typeface="Consolas"/>
+              </a:rPr>
+              <a:t>/</a:t>
+            </a:r>
+            <a:r>
+              <a:rPr sz="1600">
+                <a:solidFill>
+                  <a:srgbClr val="D4D4D4"/>
+                </a:solidFill>
+                <a:latin typeface="Consolas"/>
+              </a:rPr>
+              <a:t>TEMBOT</a:t>
+            </a:r>
+            <a:r>
+              <a:rPr sz="1600">
+                <a:solidFill>
+                  <a:srgbClr val="D4D4D4"/>
+                </a:solidFill>
+                <a:latin typeface="Consolas"/>
+              </a:rPr>
+              <a:t>+</a:t>
+            </a:r>
+            <a:r>
+              <a:rPr sz="1600">
+                <a:solidFill>
+                  <a:srgbClr val="D4D4D4"/>
+                </a:solidFill>
+                <a:latin typeface="Consolas"/>
+              </a:rPr>
+              <a:t>AT</a:t>
+            </a:r>
+            <a:r>
+              <a:rPr sz="1600">
+                <a:solidFill>
+                  <a:srgbClr val="D4D4D4"/>
+                </a:solidFill>
+                <a:latin typeface="Consolas"/>
+              </a:rPr>
+              <a:t>*</a:t>
+            </a:r>
+            <a:r>
+              <a:rPr sz="1600">
+                <a:solidFill>
+                  <a:srgbClr val="D4D4D4"/>
+                </a:solidFill>
+                <a:latin typeface="Consolas"/>
+              </a:rPr>
+              <a:t>Y1</a:t>
+            </a:r>
+            <a:r>
+              <a:rPr sz="1600">
+                <a:solidFill>
+                  <a:srgbClr val="D4D4D4"/>
+                </a:solidFill>
+                <a:latin typeface="Consolas"/>
+              </a:rPr>
+              <a:t>/</a:t>
+            </a:r>
+            <a:r>
+              <a:rPr sz="1600">
+                <a:solidFill>
+                  <a:srgbClr val="D4D4D4"/>
+                </a:solidFill>
+                <a:latin typeface="Consolas"/>
+              </a:rPr>
+              <a:t>VEL</a:t>
+            </a:r>
+            <a:r>
+              <a:rPr sz="1600">
+                <a:solidFill>
+                  <a:srgbClr val="D4D4D4"/>
+                </a:solidFill>
+                <a:latin typeface="Consolas"/>
+              </a:rPr>
+              <a:t>;</a:t>
+            </a:r>
+          </a:p>
+          <a:p>
+            <a:pPr>
+              <a:spcAft>
+                <a:spcPts val="100"/>
+              </a:spcAft>
+            </a:pPr>
+            <a:r>
+              <a:rPr sz="1600">
+                <a:solidFill>
+                  <a:srgbClr val="D4D4D4"/>
+                </a:solidFill>
+                <a:latin typeface="Consolas"/>
+              </a:rPr>
+              <a:t>    </a:t>
+            </a:r>
+            <a:r>
+              <a:rPr sz="1600">
+                <a:solidFill>
+                  <a:srgbClr val="569CD6"/>
+                </a:solidFill>
+                <a:latin typeface="Consolas"/>
+              </a:rPr>
+              <a:t>...</a:t>
+            </a:r>
+            <a:r>
+              <a:rPr sz="1600">
+                <a:solidFill>
+                  <a:srgbClr val="6A9955"/>
+                </a:solidFill>
+                <a:latin typeface="Consolas"/>
+              </a:rPr>
+              <a:t>                          % + Euler step, range/altitude bookkeeping</a:t>
+            </a:r>
+          </a:p>
+          <a:p>
+            <a:pPr>
+              <a:spcAft>
+                <a:spcPts val="100"/>
+              </a:spcAft>
+            </a:pPr>
+            <a:r>
+              <a:rPr sz="1600">
+                <a:solidFill>
+                  <a:srgbClr val="569CD6"/>
+                </a:solidFill>
+                <a:latin typeface="Consolas"/>
+              </a:rPr>
+              <a:t>end</a:t>
+            </a:r>
+          </a:p>
+        </p:txBody>
+      </p:sp>
+      <p:sp>
+        <p:nvSpPr>
+          <p:cNvPr id="9" name="TextBox 8"/>
+          <p:cNvSpPr txBox="1"/>
+          <p:nvPr/>
+        </p:nvSpPr>
+        <p:spPr>
+          <a:xfrm>
+            <a:off x="777240" y="5340096"/>
+            <a:ext cx="10972800" cy="274320"/>
+          </a:xfrm>
+          <a:prstGeom prst="rect">
+            <a:avLst/>
+          </a:prstGeom>
+          <a:noFill/>
+        </p:spPr>
+        <p:txBody>
+          <a:bodyPr wrap="none">
+            <a:spAutoFit/>
+          </a:bodyPr>
+          <a:lstStyle/>
+          <a:p>
+            <a:r>
+              <a:rPr sz="1200" i="1">
+                <a:solidFill>
+                  <a:srgbClr val="8CA3B8"/>
+                </a:solidFill>
+                <a:latin typeface="Segoe UI"/>
+              </a:rPr>
+              <a:t>Zarchan, Tactical &amp; Strategic Missile Guidance, 6th ed. (MATLAB) — gravity-turn booster sim</a:t>
+            </a:r>
+          </a:p>
+        </p:txBody>
+      </p:sp>
+      <p:sp>
+        <p:nvSpPr>
+          <p:cNvPr id="10" name="TextBox 9"/>
+          <p:cNvSpPr txBox="1"/>
+          <p:nvPr/>
+        </p:nvSpPr>
+        <p:spPr>
+          <a:xfrm>
+            <a:off x="777240" y="5669280"/>
+            <a:ext cx="10972800" cy="457200"/>
+          </a:xfrm>
+          <a:prstGeom prst="rect">
+            <a:avLst/>
+          </a:prstGeom>
+          <a:noFill/>
+        </p:spPr>
+        <p:txBody>
+          <a:bodyPr wrap="none">
+            <a:spAutoFit/>
+          </a:bodyPr>
+          <a:lstStyle/>
+          <a:p>
+            <a:r>
+              <a:rPr sz="1900" i="1">
+                <a:solidFill>
+                  <a:srgbClr val="7EE08A"/>
+                </a:solidFill>
+                <a:latin typeface="Segoe UI"/>
+              </a:rPr>
+              <a:t>One scope. Every name global. Physics, staging, and the integrator all tangled together.</a:t>
+            </a:r>
+          </a:p>
+        </p:txBody>
+      </p:sp>
+    </p:spTree>
+  </p:cSld>
+  <p:clrMapOvr>
+    <a:masterClrMapping/>
+  </p:clrMapOvr>
+</p:sld>
+</file>
+
+<file path=ppt/slides/slide39.xml><?xml version="1.0" encoding="utf-8"?>
 <p:sld xmlns:a="http://schemas.openxmlformats.org/drawingml/2006/main" xmlns:r="http://schemas.openxmlformats.org/officeDocument/2006/relationships" xmlns:p="http://schemas.openxmlformats.org/presentationml/2006/main">
   <p:cSld>
     <p:bg>
@@ -25262,363 +28545,6 @@
       <p:sp>
         <p:nvSpPr>
           <p:cNvPr id="7" name="TextBox 6"/>
-          <p:cNvSpPr txBox="1"/>
-          <p:nvPr/>
-        </p:nvSpPr>
-        <p:spPr>
-          <a:xfrm>
-            <a:off x="11384280" y="6446520"/>
-            <a:ext cx="548640" cy="320040"/>
-          </a:xfrm>
-          <a:prstGeom prst="rect">
-            <a:avLst/>
-          </a:prstGeom>
-          <a:noFill/>
-        </p:spPr>
-        <p:txBody>
-          <a:bodyPr wrap="none">
-            <a:spAutoFit/>
-          </a:bodyPr>
-          <a:lstStyle/>
-          <a:p>
-            <a:pPr algn="r"/>
-            <a:r>
-              <a:rPr sz="1000">
-                <a:solidFill>
-                  <a:srgbClr val="8CA3B8"/>
-                </a:solidFill>
-                <a:latin typeface="Segoe UI"/>
-              </a:rPr>
-              <a:t>38</a:t>
-            </a:r>
-          </a:p>
-        </p:txBody>
-      </p:sp>
-    </p:spTree>
-  </p:cSld>
-  <p:clrMapOvr>
-    <a:masterClrMapping/>
-  </p:clrMapOvr>
-</p:sld>
-</file>
-
-<file path=ppt/slides/slide39.xml><?xml version="1.0" encoding="utf-8"?>
-<p:sld xmlns:a="http://schemas.openxmlformats.org/drawingml/2006/main" xmlns:r="http://schemas.openxmlformats.org/officeDocument/2006/relationships" xmlns:p="http://schemas.openxmlformats.org/presentationml/2006/main">
-  <p:cSld>
-    <p:bg>
-      <p:bgPr>
-        <a:solidFill>
-          <a:srgbClr val="0B1F33"/>
-        </a:solidFill>
-        <a:effectLst/>
-      </p:bgPr>
-    </p:bg>
-    <p:spTree>
-      <p:nvGrpSpPr>
-        <p:cNvPr id="1" name=""/>
-        <p:cNvGrpSpPr/>
-        <p:nvPr/>
-      </p:nvGrpSpPr>
-      <p:grpSpPr>
-        <a:xfrm>
-          <a:off x="0" y="0"/>
-          <a:ext cx="0" cy="0"/>
-          <a:chOff x="0" y="0"/>
-          <a:chExt cx="0" cy="0"/>
-        </a:xfrm>
-      </p:grpSpPr>
-      <p:sp>
-        <p:nvSpPr>
-          <p:cNvPr id="2" name="TextBox 1"/>
-          <p:cNvSpPr txBox="1"/>
-          <p:nvPr/>
-        </p:nvSpPr>
-        <p:spPr>
-          <a:xfrm>
-            <a:off x="502920" y="384048"/>
-            <a:ext cx="11155680" cy="292608"/>
-          </a:xfrm>
-          <a:prstGeom prst="rect">
-            <a:avLst/>
-          </a:prstGeom>
-          <a:noFill/>
-        </p:spPr>
-        <p:txBody>
-          <a:bodyPr wrap="none">
-            <a:spAutoFit/>
-          </a:bodyPr>
-          <a:lstStyle/>
-          <a:p>
-            <a:r>
-              <a:rPr sz="1300" b="1">
-                <a:solidFill>
-                  <a:srgbClr val="F2C744"/>
-                </a:solidFill>
-                <a:latin typeface="Segoe UI"/>
-              </a:rPr>
-              <a:t>IF YOU REMEMBER FOUR THINGS</a:t>
-            </a:r>
-          </a:p>
-        </p:txBody>
-      </p:sp>
-      <p:sp>
-        <p:nvSpPr>
-          <p:cNvPr id="3" name="TextBox 2"/>
-          <p:cNvSpPr txBox="1"/>
-          <p:nvPr/>
-        </p:nvSpPr>
-        <p:spPr>
-          <a:xfrm>
-            <a:off x="457200" y="694944"/>
-            <a:ext cx="11247120" cy="777240"/>
-          </a:xfrm>
-          <a:prstGeom prst="rect">
-            <a:avLst/>
-          </a:prstGeom>
-          <a:noFill/>
-        </p:spPr>
-        <p:txBody>
-          <a:bodyPr wrap="none">
-            <a:spAutoFit/>
-          </a:bodyPr>
-          <a:lstStyle/>
-          <a:p>
-            <a:r>
-              <a:rPr sz="3100" b="1">
-                <a:solidFill>
-                  <a:srgbClr val="FFFFFF"/>
-                </a:solidFill>
-                <a:latin typeface="Segoe UI"/>
-              </a:rPr>
-              <a:t>Takeaways</a:t>
-            </a:r>
-          </a:p>
-        </p:txBody>
-      </p:sp>
-      <p:sp>
-        <p:nvSpPr>
-          <p:cNvPr id="4" name="TextBox 3"/>
-          <p:cNvSpPr txBox="1"/>
-          <p:nvPr/>
-        </p:nvSpPr>
-        <p:spPr>
-          <a:xfrm>
-            <a:off x="548640" y="1828800"/>
-            <a:ext cx="11064240" cy="4572000"/>
-          </a:xfrm>
-          <a:prstGeom prst="rect">
-            <a:avLst/>
-          </a:prstGeom>
-          <a:noFill/>
-        </p:spPr>
-        <p:txBody>
-          <a:bodyPr wrap="square">
-            <a:spAutoFit/>
-          </a:bodyPr>
-          <a:lstStyle/>
-          <a:p>
-            <a:pPr>
-              <a:spcAft>
-                <a:spcPts val="800"/>
-              </a:spcAft>
-            </a:pPr>
-            <a:r>
-              <a:rPr sz="2300">
-                <a:solidFill>
-                  <a:srgbClr val="35C4E8"/>
-                </a:solidFill>
-                <a:latin typeface="Segoe UI"/>
-              </a:rPr>
-              <a:t>•  </a:t>
-            </a:r>
-            <a:r>
-              <a:rPr sz="2300" b="1">
-                <a:solidFill>
-                  <a:srgbClr val="F2C744"/>
-                </a:solidFill>
-                <a:latin typeface="Segoe UI"/>
-              </a:rPr>
-              <a:t>Separation of concerns is achievable at zero cost</a:t>
-            </a:r>
-            <a:r>
-              <a:rPr sz="2300" b="0">
-                <a:solidFill>
-                  <a:srgbClr val="D8E2EC"/>
-                </a:solidFill>
-                <a:latin typeface="Segoe UI"/>
-              </a:rPr>
-              <a:t> in C++20 — measured, not asserted</a:t>
-            </a:r>
-          </a:p>
-          <a:p>
-            <a:pPr>
-              <a:spcAft>
-                <a:spcPts val="800"/>
-              </a:spcAft>
-            </a:pPr>
-            <a:r>
-              <a:rPr sz="2300">
-                <a:solidFill>
-                  <a:srgbClr val="35C4E8"/>
-                </a:solidFill>
-                <a:latin typeface="Segoe UI"/>
-              </a:rPr>
-              <a:t>•  </a:t>
-            </a:r>
-            <a:r>
-              <a:rPr sz="2300" b="0">
-                <a:solidFill>
-                  <a:srgbClr val="D8E2EC"/>
-                </a:solidFill>
-                <a:latin typeface="Segoe UI"/>
-              </a:rPr>
-              <a:t>The recipe is small: </a:t>
-            </a:r>
-            <a:r>
-              <a:rPr sz="2300" b="1">
-                <a:solidFill>
-                  <a:srgbClr val="35C4E8"/>
-                </a:solidFill>
-                <a:latin typeface="Segoe UI"/>
-              </a:rPr>
-              <a:t>typed tags + overloaded compute() + a constexpr registry + concepts</a:t>
-            </a:r>
-          </a:p>
-          <a:p>
-            <a:pPr lvl="1">
-              <a:spcBef>
-                <a:spcPts val="0"/>
-              </a:spcBef>
-              <a:spcAft>
-                <a:spcPts val="800"/>
-              </a:spcAft>
-            </a:pPr>
-            <a:r>
-              <a:rPr sz="2100">
-                <a:solidFill>
-                  <a:srgbClr val="8CA3B8"/>
-                </a:solidFill>
-                <a:latin typeface="Segoe UI"/>
-              </a:rPr>
-              <a:t>–  </a:t>
-            </a:r>
-            <a:r>
-              <a:rPr sz="2100" b="0">
-                <a:solidFill>
-                  <a:srgbClr val="D8E2EC"/>
-                </a:solidFill>
-                <a:latin typeface="Segoe UI"/>
-              </a:rPr>
-              <a:t>no inheritance, no virtuals, no strings, no codegen</a:t>
-            </a:r>
-          </a:p>
-          <a:p>
-            <a:pPr>
-              <a:spcAft>
-                <a:spcPts val="800"/>
-              </a:spcAft>
-            </a:pPr>
-            <a:r>
-              <a:rPr sz="2300">
-                <a:solidFill>
-                  <a:srgbClr val="35C4E8"/>
-                </a:solidFill>
-                <a:latin typeface="Segoe UI"/>
-              </a:rPr>
-              <a:t>•  </a:t>
-            </a:r>
-            <a:r>
-              <a:rPr sz="2300" b="1">
-                <a:solidFill>
-                  <a:srgbClr val="FFFFFF"/>
-                </a:solidFill>
-                <a:latin typeface="Segoe UI"/>
-              </a:rPr>
-              <a:t>Prefer abstractions you can verify</a:t>
-            </a:r>
-            <a:r>
-              <a:rPr sz="2300" b="0">
-                <a:solidFill>
-                  <a:srgbClr val="D8E2EC"/>
-                </a:solidFill>
-                <a:latin typeface="Segoe UI"/>
-              </a:rPr>
-              <a:t> — conservation laws and disassembly are unit tests for architecture</a:t>
-            </a:r>
-          </a:p>
-          <a:p>
-            <a:pPr>
-              <a:spcAft>
-                <a:spcPts val="800"/>
-              </a:spcAft>
-            </a:pPr>
-            <a:r>
-              <a:rPr sz="2300">
-                <a:solidFill>
-                  <a:srgbClr val="35C4E8"/>
-                </a:solidFill>
-                <a:latin typeface="Segoe UI"/>
-              </a:rPr>
-              <a:t>•  </a:t>
-            </a:r>
-            <a:r>
-              <a:rPr sz="2300" b="1">
-                <a:solidFill>
-                  <a:srgbClr val="FFFFFF"/>
-                </a:solidFill>
-                <a:latin typeface="Segoe UI"/>
-              </a:rPr>
-              <a:t>Quality vs performance was the false tradeoff</a:t>
-            </a:r>
-            <a:r>
-              <a:rPr sz="2300" b="0">
-                <a:solidFill>
-                  <a:srgbClr val="D8E2EC"/>
-                </a:solidFill>
-                <a:latin typeface="Segoe UI"/>
-              </a:rPr>
-              <a:t> — modern C++ finally lets us refuse it</a:t>
-            </a:r>
-          </a:p>
-        </p:txBody>
-      </p:sp>
-      <p:sp>
-        <p:nvSpPr>
-          <p:cNvPr id="5" name="TextBox 4"/>
-          <p:cNvSpPr txBox="1"/>
-          <p:nvPr/>
-        </p:nvSpPr>
-        <p:spPr>
-          <a:xfrm>
-            <a:off x="411480" y="6446520"/>
-            <a:ext cx="10058400" cy="320040"/>
-          </a:xfrm>
-          <a:prstGeom prst="rect">
-            <a:avLst/>
-          </a:prstGeom>
-          <a:noFill/>
-        </p:spPr>
-        <p:txBody>
-          <a:bodyPr wrap="none">
-            <a:spAutoFit/>
-          </a:bodyPr>
-          <a:lstStyle/>
-          <a:p>
-            <a:r>
-              <a:rPr sz="1000">
-                <a:solidFill>
-                  <a:srgbClr val="8CA3B8"/>
-                </a:solidFill>
-                <a:latin typeface="Segoe UI"/>
-              </a:rPr>
-              <a:t>Separation of Concerns at Zero Cost — ACCU on Sea 2026</a:t>
-            </a:r>
-          </a:p>
-        </p:txBody>
-      </p:sp>
-      <p:sp>
-        <p:nvSpPr>
-          <p:cNvPr id="6" name="TextBox 5"/>
           <p:cNvSpPr txBox="1"/>
           <p:nvPr/>
         </p:nvSpPr>
@@ -26411,6 +29337,363 @@
         </p:nvSpPr>
         <p:spPr>
           <a:xfrm>
+            <a:off x="502920" y="384048"/>
+            <a:ext cx="11155680" cy="292608"/>
+          </a:xfrm>
+          <a:prstGeom prst="rect">
+            <a:avLst/>
+          </a:prstGeom>
+          <a:noFill/>
+        </p:spPr>
+        <p:txBody>
+          <a:bodyPr wrap="none">
+            <a:spAutoFit/>
+          </a:bodyPr>
+          <a:lstStyle/>
+          <a:p>
+            <a:r>
+              <a:rPr sz="1300" b="1">
+                <a:solidFill>
+                  <a:srgbClr val="F2C744"/>
+                </a:solidFill>
+                <a:latin typeface="Segoe UI"/>
+              </a:rPr>
+              <a:t>IF YOU REMEMBER FOUR THINGS</a:t>
+            </a:r>
+          </a:p>
+        </p:txBody>
+      </p:sp>
+      <p:sp>
+        <p:nvSpPr>
+          <p:cNvPr id="3" name="TextBox 2"/>
+          <p:cNvSpPr txBox="1"/>
+          <p:nvPr/>
+        </p:nvSpPr>
+        <p:spPr>
+          <a:xfrm>
+            <a:off x="457200" y="694944"/>
+            <a:ext cx="11247120" cy="777240"/>
+          </a:xfrm>
+          <a:prstGeom prst="rect">
+            <a:avLst/>
+          </a:prstGeom>
+          <a:noFill/>
+        </p:spPr>
+        <p:txBody>
+          <a:bodyPr wrap="none">
+            <a:spAutoFit/>
+          </a:bodyPr>
+          <a:lstStyle/>
+          <a:p>
+            <a:r>
+              <a:rPr sz="3100" b="1">
+                <a:solidFill>
+                  <a:srgbClr val="FFFFFF"/>
+                </a:solidFill>
+                <a:latin typeface="Segoe UI"/>
+              </a:rPr>
+              <a:t>Takeaways</a:t>
+            </a:r>
+          </a:p>
+        </p:txBody>
+      </p:sp>
+      <p:sp>
+        <p:nvSpPr>
+          <p:cNvPr id="4" name="TextBox 3"/>
+          <p:cNvSpPr txBox="1"/>
+          <p:nvPr/>
+        </p:nvSpPr>
+        <p:spPr>
+          <a:xfrm>
+            <a:off x="548640" y="1828800"/>
+            <a:ext cx="11064240" cy="4572000"/>
+          </a:xfrm>
+          <a:prstGeom prst="rect">
+            <a:avLst/>
+          </a:prstGeom>
+          <a:noFill/>
+        </p:spPr>
+        <p:txBody>
+          <a:bodyPr wrap="square">
+            <a:spAutoFit/>
+          </a:bodyPr>
+          <a:lstStyle/>
+          <a:p>
+            <a:pPr>
+              <a:spcAft>
+                <a:spcPts val="800"/>
+              </a:spcAft>
+            </a:pPr>
+            <a:r>
+              <a:rPr sz="2300">
+                <a:solidFill>
+                  <a:srgbClr val="35C4E8"/>
+                </a:solidFill>
+                <a:latin typeface="Segoe UI"/>
+              </a:rPr>
+              <a:t>•  </a:t>
+            </a:r>
+            <a:r>
+              <a:rPr sz="2300" b="1">
+                <a:solidFill>
+                  <a:srgbClr val="F2C744"/>
+                </a:solidFill>
+                <a:latin typeface="Segoe UI"/>
+              </a:rPr>
+              <a:t>Separation of concerns is achievable at zero cost</a:t>
+            </a:r>
+            <a:r>
+              <a:rPr sz="2300" b="0">
+                <a:solidFill>
+                  <a:srgbClr val="D8E2EC"/>
+                </a:solidFill>
+                <a:latin typeface="Segoe UI"/>
+              </a:rPr>
+              <a:t> in C++20 — measured, not asserted</a:t>
+            </a:r>
+          </a:p>
+          <a:p>
+            <a:pPr>
+              <a:spcAft>
+                <a:spcPts val="800"/>
+              </a:spcAft>
+            </a:pPr>
+            <a:r>
+              <a:rPr sz="2300">
+                <a:solidFill>
+                  <a:srgbClr val="35C4E8"/>
+                </a:solidFill>
+                <a:latin typeface="Segoe UI"/>
+              </a:rPr>
+              <a:t>•  </a:t>
+            </a:r>
+            <a:r>
+              <a:rPr sz="2300" b="0">
+                <a:solidFill>
+                  <a:srgbClr val="D8E2EC"/>
+                </a:solidFill>
+                <a:latin typeface="Segoe UI"/>
+              </a:rPr>
+              <a:t>The recipe is small: </a:t>
+            </a:r>
+            <a:r>
+              <a:rPr sz="2300" b="1">
+                <a:solidFill>
+                  <a:srgbClr val="35C4E8"/>
+                </a:solidFill>
+                <a:latin typeface="Segoe UI"/>
+              </a:rPr>
+              <a:t>typed tags + overloaded compute() + a constexpr registry + concepts</a:t>
+            </a:r>
+          </a:p>
+          <a:p>
+            <a:pPr lvl="1">
+              <a:spcBef>
+                <a:spcPts val="0"/>
+              </a:spcBef>
+              <a:spcAft>
+                <a:spcPts val="800"/>
+              </a:spcAft>
+            </a:pPr>
+            <a:r>
+              <a:rPr sz="2100">
+                <a:solidFill>
+                  <a:srgbClr val="8CA3B8"/>
+                </a:solidFill>
+                <a:latin typeface="Segoe UI"/>
+              </a:rPr>
+              <a:t>–  </a:t>
+            </a:r>
+            <a:r>
+              <a:rPr sz="2100" b="0">
+                <a:solidFill>
+                  <a:srgbClr val="D8E2EC"/>
+                </a:solidFill>
+                <a:latin typeface="Segoe UI"/>
+              </a:rPr>
+              <a:t>no inheritance, no virtuals, no strings, no codegen</a:t>
+            </a:r>
+          </a:p>
+          <a:p>
+            <a:pPr>
+              <a:spcAft>
+                <a:spcPts val="800"/>
+              </a:spcAft>
+            </a:pPr>
+            <a:r>
+              <a:rPr sz="2300">
+                <a:solidFill>
+                  <a:srgbClr val="35C4E8"/>
+                </a:solidFill>
+                <a:latin typeface="Segoe UI"/>
+              </a:rPr>
+              <a:t>•  </a:t>
+            </a:r>
+            <a:r>
+              <a:rPr sz="2300" b="1">
+                <a:solidFill>
+                  <a:srgbClr val="FFFFFF"/>
+                </a:solidFill>
+                <a:latin typeface="Segoe UI"/>
+              </a:rPr>
+              <a:t>Prefer abstractions you can verify</a:t>
+            </a:r>
+            <a:r>
+              <a:rPr sz="2300" b="0">
+                <a:solidFill>
+                  <a:srgbClr val="D8E2EC"/>
+                </a:solidFill>
+                <a:latin typeface="Segoe UI"/>
+              </a:rPr>
+              <a:t> — conservation laws and disassembly are unit tests for architecture</a:t>
+            </a:r>
+          </a:p>
+          <a:p>
+            <a:pPr>
+              <a:spcAft>
+                <a:spcPts val="800"/>
+              </a:spcAft>
+            </a:pPr>
+            <a:r>
+              <a:rPr sz="2300">
+                <a:solidFill>
+                  <a:srgbClr val="35C4E8"/>
+                </a:solidFill>
+                <a:latin typeface="Segoe UI"/>
+              </a:rPr>
+              <a:t>•  </a:t>
+            </a:r>
+            <a:r>
+              <a:rPr sz="2300" b="1">
+                <a:solidFill>
+                  <a:srgbClr val="FFFFFF"/>
+                </a:solidFill>
+                <a:latin typeface="Segoe UI"/>
+              </a:rPr>
+              <a:t>Quality vs performance was the false tradeoff</a:t>
+            </a:r>
+            <a:r>
+              <a:rPr sz="2300" b="0">
+                <a:solidFill>
+                  <a:srgbClr val="D8E2EC"/>
+                </a:solidFill>
+                <a:latin typeface="Segoe UI"/>
+              </a:rPr>
+              <a:t> — modern C++ finally lets us refuse it</a:t>
+            </a:r>
+          </a:p>
+        </p:txBody>
+      </p:sp>
+      <p:sp>
+        <p:nvSpPr>
+          <p:cNvPr id="5" name="TextBox 4"/>
+          <p:cNvSpPr txBox="1"/>
+          <p:nvPr/>
+        </p:nvSpPr>
+        <p:spPr>
+          <a:xfrm>
+            <a:off x="411480" y="6446520"/>
+            <a:ext cx="10058400" cy="320040"/>
+          </a:xfrm>
+          <a:prstGeom prst="rect">
+            <a:avLst/>
+          </a:prstGeom>
+          <a:noFill/>
+        </p:spPr>
+        <p:txBody>
+          <a:bodyPr wrap="none">
+            <a:spAutoFit/>
+          </a:bodyPr>
+          <a:lstStyle/>
+          <a:p>
+            <a:r>
+              <a:rPr sz="1000">
+                <a:solidFill>
+                  <a:srgbClr val="8CA3B8"/>
+                </a:solidFill>
+                <a:latin typeface="Segoe UI"/>
+              </a:rPr>
+              <a:t>Separation of Concerns at Zero Cost — ACCU on Sea 2026</a:t>
+            </a:r>
+          </a:p>
+        </p:txBody>
+      </p:sp>
+      <p:sp>
+        <p:nvSpPr>
+          <p:cNvPr id="6" name="TextBox 5"/>
+          <p:cNvSpPr txBox="1"/>
+          <p:nvPr/>
+        </p:nvSpPr>
+        <p:spPr>
+          <a:xfrm>
+            <a:off x="11384280" y="6446520"/>
+            <a:ext cx="548640" cy="320040"/>
+          </a:xfrm>
+          <a:prstGeom prst="rect">
+            <a:avLst/>
+          </a:prstGeom>
+          <a:noFill/>
+        </p:spPr>
+        <p:txBody>
+          <a:bodyPr wrap="none">
+            <a:spAutoFit/>
+          </a:bodyPr>
+          <a:lstStyle/>
+          <a:p>
+            <a:pPr algn="r"/>
+            <a:r>
+              <a:rPr sz="1000">
+                <a:solidFill>
+                  <a:srgbClr val="8CA3B8"/>
+                </a:solidFill>
+                <a:latin typeface="Segoe UI"/>
+              </a:rPr>
+              <a:t>40</a:t>
+            </a:r>
+          </a:p>
+        </p:txBody>
+      </p:sp>
+    </p:spTree>
+  </p:cSld>
+  <p:clrMapOvr>
+    <a:masterClrMapping/>
+  </p:clrMapOvr>
+</p:sld>
+</file>
+
+<file path=ppt/slides/slide41.xml><?xml version="1.0" encoding="utf-8"?>
+<p:sld xmlns:a="http://schemas.openxmlformats.org/drawingml/2006/main" xmlns:r="http://schemas.openxmlformats.org/officeDocument/2006/relationships" xmlns:p="http://schemas.openxmlformats.org/presentationml/2006/main">
+  <p:cSld>
+    <p:bg>
+      <p:bgPr>
+        <a:solidFill>
+          <a:srgbClr val="0B1F33"/>
+        </a:solidFill>
+        <a:effectLst/>
+      </p:bgPr>
+    </p:bg>
+    <p:spTree>
+      <p:nvGrpSpPr>
+        <p:cNvPr id="1" name=""/>
+        <p:cNvGrpSpPr/>
+        <p:nvPr/>
+      </p:nvGrpSpPr>
+      <p:grpSpPr>
+        <a:xfrm>
+          <a:off x="0" y="0"/>
+          <a:ext cx="0" cy="0"/>
+          <a:chOff x="0" y="0"/>
+          <a:chExt cx="0" cy="0"/>
+        </a:xfrm>
+      </p:grpSpPr>
+      <p:sp>
+        <p:nvSpPr>
+          <p:cNvPr id="2" name="TextBox 1"/>
+          <p:cNvSpPr txBox="1"/>
+          <p:nvPr/>
+        </p:nvSpPr>
+        <p:spPr>
+          <a:xfrm>
             <a:off x="822960" y="1463040"/>
             <a:ext cx="10515600" cy="1371600"/>
           </a:xfrm>
@@ -26716,7 +29999,7 @@
                 </a:solidFill>
                 <a:latin typeface="Segoe UI"/>
               </a:rPr>
-              <a:t>40</a:t>
+              <a:t>41</a:t>
             </a:r>
           </a:p>
         </p:txBody>

--- a/slides/ACCU-Separation-of-Concerns-at-Zero-Cost.pptx
+++ b/slides/ACCU-Separation-of-Concerns-at-Zero-Cost.pptx
@@ -46,6 +46,7 @@
     <p:sldId id="289" r:id="rId36"/>
     <p:sldId id="290" r:id="rId37"/>
     <p:sldId id="298" r:id="rId47"/>
+    <p:sldId id="299" r:id="rId48"/>
     <p:sldId id="291" r:id="rId38"/>
     <p:sldId id="292" r:id="rId39"/>
     <p:sldId id="293" r:id="rId40"/>
@@ -28572,7 +28573,7 @@
                 </a:solidFill>
                 <a:latin typeface="Segoe UI"/>
               </a:rPr>
-              <a:t>39</a:t>
+              <a:t>40</a:t>
             </a:r>
           </a:p>
         </p:txBody>
@@ -29648,7 +29649,7 @@
                 </a:solidFill>
                 <a:latin typeface="Segoe UI"/>
               </a:rPr>
-              <a:t>40</a:t>
+              <a:t>41</a:t>
             </a:r>
           </a:p>
         </p:txBody>
@@ -29999,7 +30000,1777 @@
                 </a:solidFill>
                 <a:latin typeface="Segoe UI"/>
               </a:rPr>
-              <a:t>41</a:t>
+              <a:t>42</a:t>
+            </a:r>
+          </a:p>
+        </p:txBody>
+      </p:sp>
+    </p:spTree>
+  </p:cSld>
+  <p:clrMapOvr>
+    <a:masterClrMapping/>
+  </p:clrMapOvr>
+</p:sld>
+</file>
+
+<file path=ppt/slides/slide42.xml><?xml version="1.0" encoding="utf-8"?>
+<p:sld xmlns:a="http://schemas.openxmlformats.org/drawingml/2006/main" xmlns:p="http://schemas.openxmlformats.org/presentationml/2006/main" xmlns:r="http://schemas.openxmlformats.org/officeDocument/2006/relationships">
+  <p:cSld>
+    <p:bg>
+      <p:bgPr>
+        <a:solidFill>
+          <a:srgbClr val="0B1F33"/>
+        </a:solidFill>
+        <a:effectLst/>
+      </p:bgPr>
+    </p:bg>
+    <p:spTree>
+      <p:nvGrpSpPr>
+        <p:cNvPr id="1" name=""/>
+        <p:cNvGrpSpPr/>
+        <p:nvPr/>
+      </p:nvGrpSpPr>
+      <p:grpSpPr/>
+      <p:sp>
+        <p:nvSpPr>
+          <p:cNvPr id="2" name="TextBox 1"/>
+          <p:cNvSpPr txBox="1"/>
+          <p:nvPr/>
+        </p:nvSpPr>
+        <p:spPr>
+          <a:xfrm>
+            <a:off x="502920" y="384048"/>
+            <a:ext cx="11155680" cy="292608"/>
+          </a:xfrm>
+          <a:prstGeom prst="rect">
+            <a:avLst/>
+          </a:prstGeom>
+          <a:noFill/>
+        </p:spPr>
+        <p:txBody>
+          <a:bodyPr wrap="none">
+            <a:spAutoFit/>
+          </a:bodyPr>
+          <a:lstStyle/>
+          <a:p>
+            <a:r>
+              <a:rPr sz="1300" b="1">
+                <a:solidFill>
+                  <a:srgbClr val="F2C744"/>
+                </a:solidFill>
+                <a:latin typeface="Segoe UI"/>
+              </a:rPr>
+              <a:t>A SHORT HISTORY LESSON</a:t>
+            </a:r>
+          </a:p>
+        </p:txBody>
+      </p:sp>
+      <p:sp>
+        <p:nvSpPr>
+          <p:cNvPr id="3" name="TextBox 2"/>
+          <p:cNvSpPr txBox="1"/>
+          <p:nvPr/>
+        </p:nvSpPr>
+        <p:spPr>
+          <a:xfrm>
+            <a:off x="457200" y="694944"/>
+            <a:ext cx="11247120" cy="777240"/>
+          </a:xfrm>
+          <a:prstGeom prst="rect">
+            <a:avLst/>
+          </a:prstGeom>
+          <a:noFill/>
+        </p:spPr>
+        <p:txBody>
+          <a:bodyPr wrap="none">
+            <a:spAutoFit/>
+          </a:bodyPr>
+          <a:lstStyle/>
+          <a:p>
+            <a:r>
+              <a:rPr sz="3100" b="1">
+                <a:solidFill>
+                  <a:srgbClr val="FFFFFF"/>
+                </a:solidFill>
+                <a:latin typeface="Segoe UI"/>
+              </a:rPr>
+              <a:t>Same script — even the plotting and file I/O</a:t>
+            </a:r>
+          </a:p>
+        </p:txBody>
+      </p:sp>
+      <p:sp>
+        <p:nvSpPr>
+          <p:cNvPr id="4" name="Rounded Rectangle 3"/>
+          <p:cNvSpPr/>
+          <p:nvPr/>
+        </p:nvSpPr>
+        <p:spPr>
+          <a:xfrm>
+            <a:off x="548640" y="1463040"/>
+            <a:ext cx="11338560" cy="3520440"/>
+          </a:xfrm>
+          <a:prstGeom prst="roundRect">
+            <a:avLst>
+              <a:gd name="adj" fmla="val 10000"/>
+            </a:avLst>
+          </a:prstGeom>
+          <a:solidFill>
+            <a:srgbClr val="081626"/>
+          </a:solidFill>
+          <a:ln w="12700">
+            <a:solidFill>
+              <a:srgbClr val="1E3A55"/>
+            </a:solidFill>
+          </a:ln>
+          <a:effectLst/>
+        </p:spPr>
+        <p:style>
+          <a:lnRef idx="1">
+            <a:schemeClr val="accent1"/>
+          </a:lnRef>
+          <a:fillRef idx="3">
+            <a:schemeClr val="accent1"/>
+          </a:fillRef>
+          <a:effectRef idx="2">
+            <a:schemeClr val="accent1"/>
+          </a:effectRef>
+          <a:fontRef idx="minor">
+            <a:schemeClr val="lt1"/>
+          </a:fontRef>
+        </p:style>
+        <p:txBody>
+          <a:bodyPr wrap="square" rtlCol="0" anchor="ctr"/>
+          <a:lstStyle/>
+          <a:p>
+            <a:pPr algn="ctr"/>
+          </a:p>
+        </p:txBody>
+      </p:sp>
+      <p:sp>
+        <p:nvSpPr>
+          <p:cNvPr id="6" name="TextBox 5"/>
+          <p:cNvSpPr txBox="1"/>
+          <p:nvPr/>
+        </p:nvSpPr>
+        <p:spPr>
+          <a:xfrm>
+            <a:off x="411480" y="6446520"/>
+            <a:ext cx="10058400" cy="320040"/>
+          </a:xfrm>
+          <a:prstGeom prst="rect">
+            <a:avLst/>
+          </a:prstGeom>
+          <a:noFill/>
+        </p:spPr>
+        <p:txBody>
+          <a:bodyPr wrap="none">
+            <a:spAutoFit/>
+          </a:bodyPr>
+          <a:lstStyle/>
+          <a:p>
+            <a:r>
+              <a:rPr sz="1000">
+                <a:solidFill>
+                  <a:srgbClr val="8CA3B8"/>
+                </a:solidFill>
+                <a:latin typeface="Segoe UI"/>
+              </a:rPr>
+              <a:t>Separation of Concerns at Zero Cost — ACCU on Sea 2026</a:t>
+            </a:r>
+          </a:p>
+        </p:txBody>
+      </p:sp>
+      <p:sp>
+        <p:nvSpPr>
+          <p:cNvPr id="7" name="TextBox 6"/>
+          <p:cNvSpPr txBox="1"/>
+          <p:nvPr/>
+        </p:nvSpPr>
+        <p:spPr>
+          <a:xfrm>
+            <a:off x="11384280" y="6446520"/>
+            <a:ext cx="548640" cy="320040"/>
+          </a:xfrm>
+          <a:prstGeom prst="rect">
+            <a:avLst/>
+          </a:prstGeom>
+          <a:noFill/>
+        </p:spPr>
+        <p:txBody>
+          <a:bodyPr wrap="none">
+            <a:spAutoFit/>
+          </a:bodyPr>
+          <a:lstStyle/>
+          <a:p>
+            <a:pPr algn="r"/>
+            <a:r>
+              <a:rPr sz="1000">
+                <a:solidFill>
+                  <a:srgbClr val="8CA3B8"/>
+                </a:solidFill>
+                <a:latin typeface="Segoe UI"/>
+              </a:rPr>
+              <a:t>39</a:t>
+            </a:r>
+          </a:p>
+        </p:txBody>
+      </p:sp>
+      <p:sp>
+        <p:nvSpPr>
+          <p:cNvPr id="8" name="zarchan tail"/>
+          <p:cNvSpPr txBox="1"/>
+          <p:nvPr/>
+        </p:nvSpPr>
+        <p:spPr>
+          <a:xfrm>
+            <a:off x="777240" y="1600200"/>
+            <a:ext cx="10881360" cy="3319272"/>
+          </a:xfrm>
+          <a:prstGeom prst="rect">
+            <a:avLst/>
+          </a:prstGeom>
+          <a:noFill/>
+        </p:spPr>
+        <p:txBody>
+          <a:bodyPr wrap="none">
+            <a:spAutoFit/>
+          </a:bodyPr>
+          <a:lstStyle/>
+          <a:p>
+            <a:pPr>
+              <a:spcAft>
+                <a:spcPts val="100"/>
+              </a:spcAft>
+            </a:pPr>
+            <a:r>
+              <a:rPr sz="1600">
+                <a:solidFill>
+                  <a:srgbClr val="D4D4D4"/>
+                </a:solidFill>
+                <a:latin typeface="Consolas"/>
+              </a:rPr>
+              <a:t>    </a:t>
+            </a:r>
+            <a:r>
+              <a:rPr sz="1600">
+                <a:solidFill>
+                  <a:srgbClr val="569CD6"/>
+                </a:solidFill>
+                <a:latin typeface="Consolas"/>
+              </a:rPr>
+              <a:t>if</a:t>
+            </a:r>
+            <a:r>
+              <a:rPr sz="1600">
+                <a:solidFill>
+                  <a:srgbClr val="D4D4D4"/>
+                </a:solidFill>
+                <a:latin typeface="Consolas"/>
+              </a:rPr>
+              <a:t> </a:t>
+            </a:r>
+            <a:r>
+              <a:rPr sz="1600">
+                <a:solidFill>
+                  <a:srgbClr val="D4D4D4"/>
+                </a:solidFill>
+                <a:latin typeface="Consolas"/>
+              </a:rPr>
+              <a:t>S</a:t>
+            </a:r>
+            <a:r>
+              <a:rPr sz="1600">
+                <a:solidFill>
+                  <a:srgbClr val="D4D4D4"/>
+                </a:solidFill>
+                <a:latin typeface="Consolas"/>
+              </a:rPr>
+              <a:t>&gt;=</a:t>
+            </a:r>
+            <a:r>
+              <a:rPr sz="1600">
+                <a:solidFill>
+                  <a:srgbClr val="B5CEA8"/>
+                </a:solidFill>
+                <a:latin typeface="Consolas"/>
+              </a:rPr>
+              <a:t>9.99999</a:t>
+            </a:r>
+          </a:p>
+          <a:p>
+            <a:pPr>
+              <a:spcAft>
+                <a:spcPts val="100"/>
+              </a:spcAft>
+            </a:pPr>
+            <a:r>
+              <a:rPr sz="1600">
+                <a:solidFill>
+                  <a:srgbClr val="D4D4D4"/>
+                </a:solidFill>
+                <a:latin typeface="Consolas"/>
+              </a:rPr>
+              <a:t>        </a:t>
+            </a:r>
+            <a:r>
+              <a:rPr sz="1600">
+                <a:solidFill>
+                  <a:srgbClr val="D4D4D4"/>
+                </a:solidFill>
+                <a:latin typeface="Consolas"/>
+              </a:rPr>
+              <a:t>R</a:t>
+            </a:r>
+            <a:r>
+              <a:rPr sz="1600">
+                <a:solidFill>
+                  <a:srgbClr val="D4D4D4"/>
+                </a:solidFill>
+                <a:latin typeface="Consolas"/>
+              </a:rPr>
+              <a:t>=</a:t>
+            </a:r>
+            <a:r>
+              <a:rPr sz="1600">
+                <a:solidFill>
+                  <a:srgbClr val="4EC9B0"/>
+                </a:solidFill>
+                <a:latin typeface="Consolas"/>
+              </a:rPr>
+              <a:t>sqrt</a:t>
+            </a:r>
+            <a:r>
+              <a:rPr sz="1600">
+                <a:solidFill>
+                  <a:srgbClr val="D4D4D4"/>
+                </a:solidFill>
+                <a:latin typeface="Consolas"/>
+              </a:rPr>
+              <a:t>(</a:t>
+            </a:r>
+            <a:r>
+              <a:rPr sz="1600">
+                <a:solidFill>
+                  <a:srgbClr val="D4D4D4"/>
+                </a:solidFill>
+                <a:latin typeface="Consolas"/>
+              </a:rPr>
+              <a:t>X</a:t>
+            </a:r>
+            <a:r>
+              <a:rPr sz="1600">
+                <a:solidFill>
+                  <a:srgbClr val="D4D4D4"/>
+                </a:solidFill>
+                <a:latin typeface="Consolas"/>
+              </a:rPr>
+              <a:t>^</a:t>
+            </a:r>
+            <a:r>
+              <a:rPr sz="1600">
+                <a:solidFill>
+                  <a:srgbClr val="B5CEA8"/>
+                </a:solidFill>
+                <a:latin typeface="Consolas"/>
+              </a:rPr>
+              <a:t>2</a:t>
+            </a:r>
+            <a:r>
+              <a:rPr sz="1600">
+                <a:solidFill>
+                  <a:srgbClr val="D4D4D4"/>
+                </a:solidFill>
+                <a:latin typeface="Consolas"/>
+              </a:rPr>
+              <a:t>+</a:t>
+            </a:r>
+            <a:r>
+              <a:rPr sz="1600">
+                <a:solidFill>
+                  <a:srgbClr val="D4D4D4"/>
+                </a:solidFill>
+                <a:latin typeface="Consolas"/>
+              </a:rPr>
+              <a:t>Y</a:t>
+            </a:r>
+            <a:r>
+              <a:rPr sz="1600">
+                <a:solidFill>
+                  <a:srgbClr val="D4D4D4"/>
+                </a:solidFill>
+                <a:latin typeface="Consolas"/>
+              </a:rPr>
+              <a:t>^</a:t>
+            </a:r>
+            <a:r>
+              <a:rPr sz="1600">
+                <a:solidFill>
+                  <a:srgbClr val="B5CEA8"/>
+                </a:solidFill>
+                <a:latin typeface="Consolas"/>
+              </a:rPr>
+              <a:t>2</a:t>
+            </a:r>
+            <a:r>
+              <a:rPr sz="1600">
+                <a:solidFill>
+                  <a:srgbClr val="D4D4D4"/>
+                </a:solidFill>
+                <a:latin typeface="Consolas"/>
+              </a:rPr>
+              <a:t>)</a:t>
+            </a:r>
+            <a:r>
+              <a:rPr sz="1600">
+                <a:solidFill>
+                  <a:srgbClr val="D4D4D4"/>
+                </a:solidFill>
+                <a:latin typeface="Consolas"/>
+              </a:rPr>
+              <a:t>;</a:t>
+            </a:r>
+            <a:r>
+              <a:rPr sz="1600">
+                <a:solidFill>
+                  <a:srgbClr val="D4D4D4"/>
+                </a:solidFill>
+                <a:latin typeface="Consolas"/>
+              </a:rPr>
+              <a:t>   </a:t>
+            </a:r>
+            <a:r>
+              <a:rPr sz="1600">
+                <a:solidFill>
+                  <a:srgbClr val="D4D4D4"/>
+                </a:solidFill>
+                <a:latin typeface="Consolas"/>
+              </a:rPr>
+              <a:t>RF</a:t>
+            </a:r>
+            <a:r>
+              <a:rPr sz="1600">
+                <a:solidFill>
+                  <a:srgbClr val="D4D4D4"/>
+                </a:solidFill>
+                <a:latin typeface="Consolas"/>
+              </a:rPr>
+              <a:t>=</a:t>
+            </a:r>
+            <a:r>
+              <a:rPr sz="1600">
+                <a:solidFill>
+                  <a:srgbClr val="4EC9B0"/>
+                </a:solidFill>
+                <a:latin typeface="Consolas"/>
+              </a:rPr>
+              <a:t>sqrt</a:t>
+            </a:r>
+            <a:r>
+              <a:rPr sz="1600">
+                <a:solidFill>
+                  <a:srgbClr val="D4D4D4"/>
+                </a:solidFill>
+                <a:latin typeface="Consolas"/>
+              </a:rPr>
+              <a:t>(</a:t>
+            </a:r>
+            <a:r>
+              <a:rPr sz="1600">
+                <a:solidFill>
+                  <a:srgbClr val="D4D4D4"/>
+                </a:solidFill>
+                <a:latin typeface="Consolas"/>
+              </a:rPr>
+              <a:t>XFIRST</a:t>
+            </a:r>
+            <a:r>
+              <a:rPr sz="1600">
+                <a:solidFill>
+                  <a:srgbClr val="D4D4D4"/>
+                </a:solidFill>
+                <a:latin typeface="Consolas"/>
+              </a:rPr>
+              <a:t>^</a:t>
+            </a:r>
+            <a:r>
+              <a:rPr sz="1600">
+                <a:solidFill>
+                  <a:srgbClr val="B5CEA8"/>
+                </a:solidFill>
+                <a:latin typeface="Consolas"/>
+              </a:rPr>
+              <a:t>2</a:t>
+            </a:r>
+            <a:r>
+              <a:rPr sz="1600">
+                <a:solidFill>
+                  <a:srgbClr val="D4D4D4"/>
+                </a:solidFill>
+                <a:latin typeface="Consolas"/>
+              </a:rPr>
+              <a:t>+</a:t>
+            </a:r>
+            <a:r>
+              <a:rPr sz="1600">
+                <a:solidFill>
+                  <a:srgbClr val="D4D4D4"/>
+                </a:solidFill>
+                <a:latin typeface="Consolas"/>
+              </a:rPr>
+              <a:t>YFIRST</a:t>
+            </a:r>
+            <a:r>
+              <a:rPr sz="1600">
+                <a:solidFill>
+                  <a:srgbClr val="D4D4D4"/>
+                </a:solidFill>
+                <a:latin typeface="Consolas"/>
+              </a:rPr>
+              <a:t>^</a:t>
+            </a:r>
+            <a:r>
+              <a:rPr sz="1600">
+                <a:solidFill>
+                  <a:srgbClr val="B5CEA8"/>
+                </a:solidFill>
+                <a:latin typeface="Consolas"/>
+              </a:rPr>
+              <a:t>2</a:t>
+            </a:r>
+            <a:r>
+              <a:rPr sz="1600">
+                <a:solidFill>
+                  <a:srgbClr val="D4D4D4"/>
+                </a:solidFill>
+                <a:latin typeface="Consolas"/>
+              </a:rPr>
+              <a:t>)</a:t>
+            </a:r>
+            <a:r>
+              <a:rPr sz="1600">
+                <a:solidFill>
+                  <a:srgbClr val="D4D4D4"/>
+                </a:solidFill>
+                <a:latin typeface="Consolas"/>
+              </a:rPr>
+              <a:t>;</a:t>
+            </a:r>
+          </a:p>
+          <a:p>
+            <a:pPr>
+              <a:spcAft>
+                <a:spcPts val="100"/>
+              </a:spcAft>
+            </a:pPr>
+            <a:r>
+              <a:rPr sz="1600">
+                <a:solidFill>
+                  <a:srgbClr val="D4D4D4"/>
+                </a:solidFill>
+                <a:latin typeface="Consolas"/>
+              </a:rPr>
+              <a:t>        </a:t>
+            </a:r>
+            <a:r>
+              <a:rPr sz="1600">
+                <a:solidFill>
+                  <a:srgbClr val="D4D4D4"/>
+                </a:solidFill>
+                <a:latin typeface="Consolas"/>
+              </a:rPr>
+              <a:t>BETA</a:t>
+            </a:r>
+            <a:r>
+              <a:rPr sz="1600">
+                <a:solidFill>
+                  <a:srgbClr val="D4D4D4"/>
+                </a:solidFill>
+                <a:latin typeface="Consolas"/>
+              </a:rPr>
+              <a:t>=</a:t>
+            </a:r>
+            <a:r>
+              <a:rPr sz="1600">
+                <a:solidFill>
+                  <a:srgbClr val="4EC9B0"/>
+                </a:solidFill>
+                <a:latin typeface="Consolas"/>
+              </a:rPr>
+              <a:t>acos</a:t>
+            </a:r>
+            <a:r>
+              <a:rPr sz="1600">
+                <a:solidFill>
+                  <a:srgbClr val="D4D4D4"/>
+                </a:solidFill>
+                <a:latin typeface="Consolas"/>
+              </a:rPr>
+              <a:t>(</a:t>
+            </a:r>
+            <a:r>
+              <a:rPr sz="1600">
+                <a:solidFill>
+                  <a:srgbClr val="D4D4D4"/>
+                </a:solidFill>
+                <a:latin typeface="Consolas"/>
+              </a:rPr>
+              <a:t>(</a:t>
+            </a:r>
+            <a:r>
+              <a:rPr sz="1600">
+                <a:solidFill>
+                  <a:srgbClr val="D4D4D4"/>
+                </a:solidFill>
+                <a:latin typeface="Consolas"/>
+              </a:rPr>
+              <a:t>X</a:t>
+            </a:r>
+            <a:r>
+              <a:rPr sz="1600">
+                <a:solidFill>
+                  <a:srgbClr val="D4D4D4"/>
+                </a:solidFill>
+                <a:latin typeface="Consolas"/>
+              </a:rPr>
+              <a:t>*</a:t>
+            </a:r>
+            <a:r>
+              <a:rPr sz="1600">
+                <a:solidFill>
+                  <a:srgbClr val="D4D4D4"/>
+                </a:solidFill>
+                <a:latin typeface="Consolas"/>
+              </a:rPr>
+              <a:t>XFIRST</a:t>
+            </a:r>
+            <a:r>
+              <a:rPr sz="1600">
+                <a:solidFill>
+                  <a:srgbClr val="D4D4D4"/>
+                </a:solidFill>
+                <a:latin typeface="Consolas"/>
+              </a:rPr>
+              <a:t>+</a:t>
+            </a:r>
+            <a:r>
+              <a:rPr sz="1600">
+                <a:solidFill>
+                  <a:srgbClr val="D4D4D4"/>
+                </a:solidFill>
+                <a:latin typeface="Consolas"/>
+              </a:rPr>
+              <a:t>Y</a:t>
+            </a:r>
+            <a:r>
+              <a:rPr sz="1600">
+                <a:solidFill>
+                  <a:srgbClr val="D4D4D4"/>
+                </a:solidFill>
+                <a:latin typeface="Consolas"/>
+              </a:rPr>
+              <a:t>*</a:t>
+            </a:r>
+            <a:r>
+              <a:rPr sz="1600">
+                <a:solidFill>
+                  <a:srgbClr val="D4D4D4"/>
+                </a:solidFill>
+                <a:latin typeface="Consolas"/>
+              </a:rPr>
+              <a:t>YFIRST</a:t>
+            </a:r>
+            <a:r>
+              <a:rPr sz="1600">
+                <a:solidFill>
+                  <a:srgbClr val="D4D4D4"/>
+                </a:solidFill>
+                <a:latin typeface="Consolas"/>
+              </a:rPr>
+              <a:t>)</a:t>
+            </a:r>
+            <a:r>
+              <a:rPr sz="1600">
+                <a:solidFill>
+                  <a:srgbClr val="D4D4D4"/>
+                </a:solidFill>
+                <a:latin typeface="Consolas"/>
+              </a:rPr>
+              <a:t>/</a:t>
+            </a:r>
+            <a:r>
+              <a:rPr sz="1600">
+                <a:solidFill>
+                  <a:srgbClr val="D4D4D4"/>
+                </a:solidFill>
+                <a:latin typeface="Consolas"/>
+              </a:rPr>
+              <a:t>(</a:t>
+            </a:r>
+            <a:r>
+              <a:rPr sz="1600">
+                <a:solidFill>
+                  <a:srgbClr val="D4D4D4"/>
+                </a:solidFill>
+                <a:latin typeface="Consolas"/>
+              </a:rPr>
+              <a:t>R</a:t>
+            </a:r>
+            <a:r>
+              <a:rPr sz="1600">
+                <a:solidFill>
+                  <a:srgbClr val="D4D4D4"/>
+                </a:solidFill>
+                <a:latin typeface="Consolas"/>
+              </a:rPr>
+              <a:t>*</a:t>
+            </a:r>
+            <a:r>
+              <a:rPr sz="1600">
+                <a:solidFill>
+                  <a:srgbClr val="D4D4D4"/>
+                </a:solidFill>
+                <a:latin typeface="Consolas"/>
+              </a:rPr>
+              <a:t>RF</a:t>
+            </a:r>
+            <a:r>
+              <a:rPr sz="1600">
+                <a:solidFill>
+                  <a:srgbClr val="D4D4D4"/>
+                </a:solidFill>
+                <a:latin typeface="Consolas"/>
+              </a:rPr>
+              <a:t>)</a:t>
+            </a:r>
+            <a:r>
+              <a:rPr sz="1600">
+                <a:solidFill>
+                  <a:srgbClr val="D4D4D4"/>
+                </a:solidFill>
+                <a:latin typeface="Consolas"/>
+              </a:rPr>
+              <a:t>)</a:t>
+            </a:r>
+            <a:r>
+              <a:rPr sz="1600">
+                <a:solidFill>
+                  <a:srgbClr val="D4D4D4"/>
+                </a:solidFill>
+                <a:latin typeface="Consolas"/>
+              </a:rPr>
+              <a:t>;</a:t>
+            </a:r>
+          </a:p>
+          <a:p>
+            <a:pPr>
+              <a:spcAft>
+                <a:spcPts val="100"/>
+              </a:spcAft>
+            </a:pPr>
+            <a:r>
+              <a:rPr sz="1600">
+                <a:solidFill>
+                  <a:srgbClr val="D4D4D4"/>
+                </a:solidFill>
+                <a:latin typeface="Consolas"/>
+              </a:rPr>
+              <a:t>        </a:t>
+            </a:r>
+            <a:r>
+              <a:rPr sz="1600">
+                <a:solidFill>
+                  <a:srgbClr val="D4D4D4"/>
+                </a:solidFill>
+                <a:latin typeface="Consolas"/>
+              </a:rPr>
+              <a:t>DISTNM</a:t>
+            </a:r>
+            <a:r>
+              <a:rPr sz="1600">
+                <a:solidFill>
+                  <a:srgbClr val="D4D4D4"/>
+                </a:solidFill>
+                <a:latin typeface="Consolas"/>
+              </a:rPr>
+              <a:t>=</a:t>
+            </a:r>
+            <a:r>
+              <a:rPr sz="1600">
+                <a:solidFill>
+                  <a:srgbClr val="D4D4D4"/>
+                </a:solidFill>
+                <a:latin typeface="Consolas"/>
+              </a:rPr>
+              <a:t>A</a:t>
+            </a:r>
+            <a:r>
+              <a:rPr sz="1600">
+                <a:solidFill>
+                  <a:srgbClr val="D4D4D4"/>
+                </a:solidFill>
+                <a:latin typeface="Consolas"/>
+              </a:rPr>
+              <a:t>*</a:t>
+            </a:r>
+            <a:r>
+              <a:rPr sz="1600">
+                <a:solidFill>
+                  <a:srgbClr val="D4D4D4"/>
+                </a:solidFill>
+                <a:latin typeface="Consolas"/>
+              </a:rPr>
+              <a:t>BETA</a:t>
+            </a:r>
+            <a:r>
+              <a:rPr sz="1600">
+                <a:solidFill>
+                  <a:srgbClr val="D4D4D4"/>
+                </a:solidFill>
+                <a:latin typeface="Consolas"/>
+              </a:rPr>
+              <a:t>/</a:t>
+            </a:r>
+            <a:r>
+              <a:rPr sz="1600">
+                <a:solidFill>
+                  <a:srgbClr val="B5CEA8"/>
+                </a:solidFill>
+                <a:latin typeface="Consolas"/>
+              </a:rPr>
+              <a:t>6076.</a:t>
+            </a:r>
+            <a:r>
+              <a:rPr sz="1600">
+                <a:solidFill>
+                  <a:srgbClr val="D4D4D4"/>
+                </a:solidFill>
+                <a:latin typeface="Consolas"/>
+              </a:rPr>
+              <a:t>;</a:t>
+            </a:r>
+            <a:r>
+              <a:rPr sz="1600">
+                <a:solidFill>
+                  <a:srgbClr val="D4D4D4"/>
+                </a:solidFill>
+                <a:latin typeface="Consolas"/>
+              </a:rPr>
+              <a:t>   </a:t>
+            </a:r>
+            <a:r>
+              <a:rPr sz="1600">
+                <a:solidFill>
+                  <a:srgbClr val="D4D4D4"/>
+                </a:solidFill>
+                <a:latin typeface="Consolas"/>
+              </a:rPr>
+              <a:t>ALTNM</a:t>
+            </a:r>
+            <a:r>
+              <a:rPr sz="1600">
+                <a:solidFill>
+                  <a:srgbClr val="D4D4D4"/>
+                </a:solidFill>
+                <a:latin typeface="Consolas"/>
+              </a:rPr>
+              <a:t>=</a:t>
+            </a:r>
+            <a:r>
+              <a:rPr sz="1600">
+                <a:solidFill>
+                  <a:srgbClr val="D4D4D4"/>
+                </a:solidFill>
+                <a:latin typeface="Consolas"/>
+              </a:rPr>
+              <a:t>(</a:t>
+            </a:r>
+            <a:r>
+              <a:rPr sz="1600">
+                <a:solidFill>
+                  <a:srgbClr val="4EC9B0"/>
+                </a:solidFill>
+                <a:latin typeface="Consolas"/>
+              </a:rPr>
+              <a:t>sqrt</a:t>
+            </a:r>
+            <a:r>
+              <a:rPr sz="1600">
+                <a:solidFill>
+                  <a:srgbClr val="D4D4D4"/>
+                </a:solidFill>
+                <a:latin typeface="Consolas"/>
+              </a:rPr>
+              <a:t>(</a:t>
+            </a:r>
+            <a:r>
+              <a:rPr sz="1600">
+                <a:solidFill>
+                  <a:srgbClr val="D4D4D4"/>
+                </a:solidFill>
+                <a:latin typeface="Consolas"/>
+              </a:rPr>
+              <a:t>X</a:t>
+            </a:r>
+            <a:r>
+              <a:rPr sz="1600">
+                <a:solidFill>
+                  <a:srgbClr val="D4D4D4"/>
+                </a:solidFill>
+                <a:latin typeface="Consolas"/>
+              </a:rPr>
+              <a:t>^</a:t>
+            </a:r>
+            <a:r>
+              <a:rPr sz="1600">
+                <a:solidFill>
+                  <a:srgbClr val="B5CEA8"/>
+                </a:solidFill>
+                <a:latin typeface="Consolas"/>
+              </a:rPr>
+              <a:t>2</a:t>
+            </a:r>
+            <a:r>
+              <a:rPr sz="1600">
+                <a:solidFill>
+                  <a:srgbClr val="D4D4D4"/>
+                </a:solidFill>
+                <a:latin typeface="Consolas"/>
+              </a:rPr>
+              <a:t>+</a:t>
+            </a:r>
+            <a:r>
+              <a:rPr sz="1600">
+                <a:solidFill>
+                  <a:srgbClr val="D4D4D4"/>
+                </a:solidFill>
+                <a:latin typeface="Consolas"/>
+              </a:rPr>
+              <a:t>Y</a:t>
+            </a:r>
+            <a:r>
+              <a:rPr sz="1600">
+                <a:solidFill>
+                  <a:srgbClr val="D4D4D4"/>
+                </a:solidFill>
+                <a:latin typeface="Consolas"/>
+              </a:rPr>
+              <a:t>^</a:t>
+            </a:r>
+            <a:r>
+              <a:rPr sz="1600">
+                <a:solidFill>
+                  <a:srgbClr val="B5CEA8"/>
+                </a:solidFill>
+                <a:latin typeface="Consolas"/>
+              </a:rPr>
+              <a:t>2</a:t>
+            </a:r>
+            <a:r>
+              <a:rPr sz="1600">
+                <a:solidFill>
+                  <a:srgbClr val="D4D4D4"/>
+                </a:solidFill>
+                <a:latin typeface="Consolas"/>
+              </a:rPr>
+              <a:t>)</a:t>
+            </a:r>
+            <a:r>
+              <a:rPr sz="1600">
+                <a:solidFill>
+                  <a:srgbClr val="D4D4D4"/>
+                </a:solidFill>
+                <a:latin typeface="Consolas"/>
+              </a:rPr>
+              <a:t>-</a:t>
+            </a:r>
+            <a:r>
+              <a:rPr sz="1600">
+                <a:solidFill>
+                  <a:srgbClr val="D4D4D4"/>
+                </a:solidFill>
+                <a:latin typeface="Consolas"/>
+              </a:rPr>
+              <a:t>A</a:t>
+            </a:r>
+            <a:r>
+              <a:rPr sz="1600">
+                <a:solidFill>
+                  <a:srgbClr val="D4D4D4"/>
+                </a:solidFill>
+                <a:latin typeface="Consolas"/>
+              </a:rPr>
+              <a:t>)</a:t>
+            </a:r>
+            <a:r>
+              <a:rPr sz="1600">
+                <a:solidFill>
+                  <a:srgbClr val="D4D4D4"/>
+                </a:solidFill>
+                <a:latin typeface="Consolas"/>
+              </a:rPr>
+              <a:t>/</a:t>
+            </a:r>
+            <a:r>
+              <a:rPr sz="1600">
+                <a:solidFill>
+                  <a:srgbClr val="B5CEA8"/>
+                </a:solidFill>
+                <a:latin typeface="Consolas"/>
+              </a:rPr>
+              <a:t>6076.</a:t>
+            </a:r>
+            <a:r>
+              <a:rPr sz="1600">
+                <a:solidFill>
+                  <a:srgbClr val="D4D4D4"/>
+                </a:solidFill>
+                <a:latin typeface="Consolas"/>
+              </a:rPr>
+              <a:t>;</a:t>
+            </a:r>
+          </a:p>
+          <a:p>
+            <a:pPr>
+              <a:spcAft>
+                <a:spcPts val="100"/>
+              </a:spcAft>
+            </a:pPr>
+            <a:r>
+              <a:rPr sz="1600">
+                <a:solidFill>
+                  <a:srgbClr val="D4D4D4"/>
+                </a:solidFill>
+                <a:latin typeface="Consolas"/>
+              </a:rPr>
+              <a:t>        </a:t>
+            </a:r>
+            <a:r>
+              <a:rPr sz="1600">
+                <a:solidFill>
+                  <a:srgbClr val="4EC9B0"/>
+                </a:solidFill>
+                <a:latin typeface="Consolas"/>
+              </a:rPr>
+              <a:t>count</a:t>
+            </a:r>
+            <a:r>
+              <a:rPr sz="1600">
+                <a:solidFill>
+                  <a:srgbClr val="D4D4D4"/>
+                </a:solidFill>
+                <a:latin typeface="Consolas"/>
+              </a:rPr>
+              <a:t>=</a:t>
+            </a:r>
+            <a:r>
+              <a:rPr sz="1600">
+                <a:solidFill>
+                  <a:srgbClr val="4EC9B0"/>
+                </a:solidFill>
+                <a:latin typeface="Consolas"/>
+              </a:rPr>
+              <a:t>count</a:t>
+            </a:r>
+            <a:r>
+              <a:rPr sz="1600">
+                <a:solidFill>
+                  <a:srgbClr val="D4D4D4"/>
+                </a:solidFill>
+                <a:latin typeface="Consolas"/>
+              </a:rPr>
+              <a:t>+</a:t>
+            </a:r>
+            <a:r>
+              <a:rPr sz="1600">
+                <a:solidFill>
+                  <a:srgbClr val="B5CEA8"/>
+                </a:solidFill>
+                <a:latin typeface="Consolas"/>
+              </a:rPr>
+              <a:t>1</a:t>
+            </a:r>
+            <a:r>
+              <a:rPr sz="1600">
+                <a:solidFill>
+                  <a:srgbClr val="D4D4D4"/>
+                </a:solidFill>
+                <a:latin typeface="Consolas"/>
+              </a:rPr>
+              <a:t>;</a:t>
+            </a:r>
+          </a:p>
+          <a:p>
+            <a:pPr>
+              <a:spcAft>
+                <a:spcPts val="100"/>
+              </a:spcAft>
+            </a:pPr>
+            <a:r>
+              <a:rPr sz="1600">
+                <a:solidFill>
+                  <a:srgbClr val="D4D4D4"/>
+                </a:solidFill>
+                <a:latin typeface="Consolas"/>
+              </a:rPr>
+              <a:t>        </a:t>
+            </a:r>
+            <a:r>
+              <a:rPr sz="1600">
+                <a:solidFill>
+                  <a:srgbClr val="D4D4D4"/>
+                </a:solidFill>
+                <a:latin typeface="Consolas"/>
+              </a:rPr>
+              <a:t>ArrayT</a:t>
+            </a:r>
+            <a:r>
+              <a:rPr sz="1600">
+                <a:solidFill>
+                  <a:srgbClr val="D4D4D4"/>
+                </a:solidFill>
+                <a:latin typeface="Consolas"/>
+              </a:rPr>
+              <a:t>(</a:t>
+            </a:r>
+            <a:r>
+              <a:rPr sz="1600">
+                <a:solidFill>
+                  <a:srgbClr val="4EC9B0"/>
+                </a:solidFill>
+                <a:latin typeface="Consolas"/>
+              </a:rPr>
+              <a:t>count</a:t>
+            </a:r>
+            <a:r>
+              <a:rPr sz="1600">
+                <a:solidFill>
+                  <a:srgbClr val="D4D4D4"/>
+                </a:solidFill>
+                <a:latin typeface="Consolas"/>
+              </a:rPr>
+              <a:t>)</a:t>
+            </a:r>
+            <a:r>
+              <a:rPr sz="1600">
+                <a:solidFill>
+                  <a:srgbClr val="D4D4D4"/>
+                </a:solidFill>
+                <a:latin typeface="Consolas"/>
+              </a:rPr>
+              <a:t>=</a:t>
+            </a:r>
+            <a:r>
+              <a:rPr sz="1600">
+                <a:solidFill>
+                  <a:srgbClr val="D4D4D4"/>
+                </a:solidFill>
+                <a:latin typeface="Consolas"/>
+              </a:rPr>
+              <a:t>T</a:t>
+            </a:r>
+            <a:r>
+              <a:rPr sz="1600">
+                <a:solidFill>
+                  <a:srgbClr val="D4D4D4"/>
+                </a:solidFill>
+                <a:latin typeface="Consolas"/>
+              </a:rPr>
+              <a:t>;</a:t>
+            </a:r>
+            <a:r>
+              <a:rPr sz="1600">
+                <a:solidFill>
+                  <a:srgbClr val="D4D4D4"/>
+                </a:solidFill>
+                <a:latin typeface="Consolas"/>
+              </a:rPr>
+              <a:t>  </a:t>
+            </a:r>
+            <a:r>
+              <a:rPr sz="1600">
+                <a:solidFill>
+                  <a:srgbClr val="D4D4D4"/>
+                </a:solidFill>
+                <a:latin typeface="Consolas"/>
+              </a:rPr>
+              <a:t>ArrayDISTNM</a:t>
+            </a:r>
+            <a:r>
+              <a:rPr sz="1600">
+                <a:solidFill>
+                  <a:srgbClr val="D4D4D4"/>
+                </a:solidFill>
+                <a:latin typeface="Consolas"/>
+              </a:rPr>
+              <a:t>(</a:t>
+            </a:r>
+            <a:r>
+              <a:rPr sz="1600">
+                <a:solidFill>
+                  <a:srgbClr val="4EC9B0"/>
+                </a:solidFill>
+                <a:latin typeface="Consolas"/>
+              </a:rPr>
+              <a:t>count</a:t>
+            </a:r>
+            <a:r>
+              <a:rPr sz="1600">
+                <a:solidFill>
+                  <a:srgbClr val="D4D4D4"/>
+                </a:solidFill>
+                <a:latin typeface="Consolas"/>
+              </a:rPr>
+              <a:t>)</a:t>
+            </a:r>
+            <a:r>
+              <a:rPr sz="1600">
+                <a:solidFill>
+                  <a:srgbClr val="D4D4D4"/>
+                </a:solidFill>
+                <a:latin typeface="Consolas"/>
+              </a:rPr>
+              <a:t>=</a:t>
+            </a:r>
+            <a:r>
+              <a:rPr sz="1600">
+                <a:solidFill>
+                  <a:srgbClr val="D4D4D4"/>
+                </a:solidFill>
+                <a:latin typeface="Consolas"/>
+              </a:rPr>
+              <a:t>DISTNM</a:t>
+            </a:r>
+            <a:r>
+              <a:rPr sz="1600">
+                <a:solidFill>
+                  <a:srgbClr val="D4D4D4"/>
+                </a:solidFill>
+                <a:latin typeface="Consolas"/>
+              </a:rPr>
+              <a:t>;</a:t>
+            </a:r>
+            <a:r>
+              <a:rPr sz="1600">
+                <a:solidFill>
+                  <a:srgbClr val="D4D4D4"/>
+                </a:solidFill>
+                <a:latin typeface="Consolas"/>
+              </a:rPr>
+              <a:t>  </a:t>
+            </a:r>
+            <a:r>
+              <a:rPr sz="1600">
+                <a:solidFill>
+                  <a:srgbClr val="D4D4D4"/>
+                </a:solidFill>
+                <a:latin typeface="Consolas"/>
+              </a:rPr>
+              <a:t>ArrayALTNM</a:t>
+            </a:r>
+            <a:r>
+              <a:rPr sz="1600">
+                <a:solidFill>
+                  <a:srgbClr val="D4D4D4"/>
+                </a:solidFill>
+                <a:latin typeface="Consolas"/>
+              </a:rPr>
+              <a:t>(</a:t>
+            </a:r>
+            <a:r>
+              <a:rPr sz="1600">
+                <a:solidFill>
+                  <a:srgbClr val="4EC9B0"/>
+                </a:solidFill>
+                <a:latin typeface="Consolas"/>
+              </a:rPr>
+              <a:t>count</a:t>
+            </a:r>
+            <a:r>
+              <a:rPr sz="1600">
+                <a:solidFill>
+                  <a:srgbClr val="D4D4D4"/>
+                </a:solidFill>
+                <a:latin typeface="Consolas"/>
+              </a:rPr>
+              <a:t>)</a:t>
+            </a:r>
+            <a:r>
+              <a:rPr sz="1600">
+                <a:solidFill>
+                  <a:srgbClr val="D4D4D4"/>
+                </a:solidFill>
+                <a:latin typeface="Consolas"/>
+              </a:rPr>
+              <a:t>=</a:t>
+            </a:r>
+            <a:r>
+              <a:rPr sz="1600">
+                <a:solidFill>
+                  <a:srgbClr val="D4D4D4"/>
+                </a:solidFill>
+                <a:latin typeface="Consolas"/>
+              </a:rPr>
+              <a:t>ALTNM</a:t>
+            </a:r>
+            <a:r>
+              <a:rPr sz="1600">
+                <a:solidFill>
+                  <a:srgbClr val="D4D4D4"/>
+                </a:solidFill>
+                <a:latin typeface="Consolas"/>
+              </a:rPr>
+              <a:t>;</a:t>
+            </a:r>
+          </a:p>
+          <a:p>
+            <a:pPr>
+              <a:spcAft>
+                <a:spcPts val="100"/>
+              </a:spcAft>
+            </a:pPr>
+            <a:r>
+              <a:rPr sz="1600">
+                <a:solidFill>
+                  <a:srgbClr val="D4D4D4"/>
+                </a:solidFill>
+                <a:latin typeface="Consolas"/>
+              </a:rPr>
+              <a:t>    </a:t>
+            </a:r>
+            <a:r>
+              <a:rPr sz="1600">
+                <a:solidFill>
+                  <a:srgbClr val="569CD6"/>
+                </a:solidFill>
+                <a:latin typeface="Consolas"/>
+              </a:rPr>
+              <a:t>end</a:t>
+            </a:r>
+          </a:p>
+          <a:p>
+            <a:pPr>
+              <a:spcAft>
+                <a:spcPts val="100"/>
+              </a:spcAft>
+            </a:pPr>
+            <a:r>
+              <a:rPr sz="1600">
+                <a:solidFill>
+                  <a:srgbClr val="569CD6"/>
+                </a:solidFill>
+                <a:latin typeface="Consolas"/>
+              </a:rPr>
+              <a:t>end</a:t>
+            </a:r>
+          </a:p>
+          <a:p>
+            <a:pPr>
+              <a:spcAft>
+                <a:spcPts val="100"/>
+              </a:spcAft>
+            </a:pPr>
+            <a:r>
+              <a:rPr sz="1600">
+                <a:solidFill>
+                  <a:srgbClr val="4EC9B0"/>
+                </a:solidFill>
+                <a:latin typeface="Consolas"/>
+              </a:rPr>
+              <a:t>figure</a:t>
+            </a:r>
+          </a:p>
+          <a:p>
+            <a:pPr>
+              <a:spcAft>
+                <a:spcPts val="100"/>
+              </a:spcAft>
+            </a:pPr>
+            <a:r>
+              <a:rPr sz="1600">
+                <a:solidFill>
+                  <a:srgbClr val="4EC9B0"/>
+                </a:solidFill>
+                <a:latin typeface="Consolas"/>
+              </a:rPr>
+              <a:t>plot</a:t>
+            </a:r>
+            <a:r>
+              <a:rPr sz="1600">
+                <a:solidFill>
+                  <a:srgbClr val="D4D4D4"/>
+                </a:solidFill>
+                <a:latin typeface="Consolas"/>
+              </a:rPr>
+              <a:t>(</a:t>
+            </a:r>
+            <a:r>
+              <a:rPr sz="1600">
+                <a:solidFill>
+                  <a:srgbClr val="D4D4D4"/>
+                </a:solidFill>
+                <a:latin typeface="Consolas"/>
+              </a:rPr>
+              <a:t>ArrayDISTNM</a:t>
+            </a:r>
+            <a:r>
+              <a:rPr sz="1600">
+                <a:solidFill>
+                  <a:srgbClr val="D4D4D4"/>
+                </a:solidFill>
+                <a:latin typeface="Consolas"/>
+              </a:rPr>
+              <a:t>,</a:t>
+            </a:r>
+            <a:r>
+              <a:rPr sz="1600">
+                <a:solidFill>
+                  <a:srgbClr val="D4D4D4"/>
+                </a:solidFill>
+                <a:latin typeface="Consolas"/>
+              </a:rPr>
+              <a:t>ArrayALTNM</a:t>
+            </a:r>
+            <a:r>
+              <a:rPr sz="1600">
+                <a:solidFill>
+                  <a:srgbClr val="D4D4D4"/>
+                </a:solidFill>
+                <a:latin typeface="Consolas"/>
+              </a:rPr>
+              <a:t>)</a:t>
+            </a:r>
+            <a:r>
+              <a:rPr sz="1600">
+                <a:solidFill>
+                  <a:srgbClr val="D4D4D4"/>
+                </a:solidFill>
+                <a:latin typeface="Consolas"/>
+              </a:rPr>
+              <a:t>,</a:t>
+            </a:r>
+            <a:r>
+              <a:rPr sz="1600">
+                <a:solidFill>
+                  <a:srgbClr val="4EC9B0"/>
+                </a:solidFill>
+                <a:latin typeface="Consolas"/>
+              </a:rPr>
+              <a:t>grid</a:t>
+            </a:r>
+          </a:p>
+          <a:p>
+            <a:pPr>
+              <a:spcAft>
+                <a:spcPts val="100"/>
+              </a:spcAft>
+            </a:pPr>
+            <a:r>
+              <a:rPr sz="1600">
+                <a:solidFill>
+                  <a:srgbClr val="4EC9B0"/>
+                </a:solidFill>
+                <a:latin typeface="Consolas"/>
+              </a:rPr>
+              <a:t>xlabel</a:t>
+            </a:r>
+            <a:r>
+              <a:rPr sz="1600">
+                <a:solidFill>
+                  <a:srgbClr val="D4D4D4"/>
+                </a:solidFill>
+                <a:latin typeface="Consolas"/>
+              </a:rPr>
+              <a:t>(</a:t>
+            </a:r>
+            <a:r>
+              <a:rPr sz="1600">
+                <a:solidFill>
+                  <a:srgbClr val="CE9178"/>
+                </a:solidFill>
+                <a:latin typeface="Consolas"/>
+              </a:rPr>
+              <a:t>'</a:t>
+            </a:r>
+            <a:r>
+              <a:rPr sz="1600">
+                <a:solidFill>
+                  <a:srgbClr val="CE9178"/>
+                </a:solidFill>
+                <a:latin typeface="Consolas"/>
+              </a:rPr>
+              <a:t>Downrange (Nmi)'</a:t>
+            </a:r>
+            <a:r>
+              <a:rPr sz="1600">
+                <a:solidFill>
+                  <a:srgbClr val="D4D4D4"/>
+                </a:solidFill>
+                <a:latin typeface="Consolas"/>
+              </a:rPr>
+              <a:t>)</a:t>
+            </a:r>
+            <a:r>
+              <a:rPr sz="1600">
+                <a:solidFill>
+                  <a:srgbClr val="D4D4D4"/>
+                </a:solidFill>
+                <a:latin typeface="Consolas"/>
+              </a:rPr>
+              <a:t>;</a:t>
+            </a:r>
+            <a:r>
+              <a:rPr sz="1600">
+                <a:solidFill>
+                  <a:srgbClr val="D4D4D4"/>
+                </a:solidFill>
+                <a:latin typeface="Consolas"/>
+              </a:rPr>
+              <a:t>   </a:t>
+            </a:r>
+            <a:r>
+              <a:rPr sz="1600">
+                <a:solidFill>
+                  <a:srgbClr val="4EC9B0"/>
+                </a:solidFill>
+                <a:latin typeface="Consolas"/>
+              </a:rPr>
+              <a:t>ylabel</a:t>
+            </a:r>
+            <a:r>
+              <a:rPr sz="1600">
+                <a:solidFill>
+                  <a:srgbClr val="D4D4D4"/>
+                </a:solidFill>
+                <a:latin typeface="Consolas"/>
+              </a:rPr>
+              <a:t>(</a:t>
+            </a:r>
+            <a:r>
+              <a:rPr sz="1600">
+                <a:solidFill>
+                  <a:srgbClr val="CE9178"/>
+                </a:solidFill>
+                <a:latin typeface="Consolas"/>
+              </a:rPr>
+              <a:t>'</a:t>
+            </a:r>
+            <a:r>
+              <a:rPr sz="1600">
+                <a:solidFill>
+                  <a:srgbClr val="CE9178"/>
+                </a:solidFill>
+                <a:latin typeface="Consolas"/>
+              </a:rPr>
+              <a:t>Altitude (Nmi)'</a:t>
+            </a:r>
+            <a:r>
+              <a:rPr sz="1600">
+                <a:solidFill>
+                  <a:srgbClr val="D4D4D4"/>
+                </a:solidFill>
+                <a:latin typeface="Consolas"/>
+              </a:rPr>
+              <a:t>)</a:t>
+            </a:r>
+            <a:r>
+              <a:rPr sz="1600">
+                <a:solidFill>
+                  <a:srgbClr val="D4D4D4"/>
+                </a:solidFill>
+                <a:latin typeface="Consolas"/>
+              </a:rPr>
+              <a:t>;</a:t>
+            </a:r>
+          </a:p>
+          <a:p>
+            <a:pPr>
+              <a:spcAft>
+                <a:spcPts val="100"/>
+              </a:spcAft>
+            </a:pPr>
+            <a:r>
+              <a:rPr sz="1600">
+                <a:solidFill>
+                  <a:srgbClr val="D4D4D4"/>
+                </a:solidFill>
+                <a:latin typeface="Consolas"/>
+              </a:rPr>
+              <a:t>save</a:t>
+            </a:r>
+            <a:r>
+              <a:rPr sz="1600">
+                <a:solidFill>
+                  <a:srgbClr val="D4D4D4"/>
+                </a:solidFill>
+                <a:latin typeface="Consolas"/>
+              </a:rPr>
+              <a:t> </a:t>
+            </a:r>
+            <a:r>
+              <a:rPr sz="1600">
+                <a:solidFill>
+                  <a:srgbClr val="CE9178"/>
+                </a:solidFill>
+                <a:latin typeface="Consolas"/>
+              </a:rPr>
+              <a:t>datfil</a:t>
+            </a:r>
+            <a:r>
+              <a:rPr sz="1600">
+                <a:solidFill>
+                  <a:srgbClr val="D4D4D4"/>
+                </a:solidFill>
+                <a:latin typeface="Consolas"/>
+              </a:rPr>
+              <a:t> </a:t>
+            </a:r>
+            <a:r>
+              <a:rPr sz="1600">
+                <a:solidFill>
+                  <a:srgbClr val="CE9178"/>
+                </a:solidFill>
+                <a:latin typeface="Consolas"/>
+              </a:rPr>
+              <a:t>output</a:t>
+            </a:r>
+            <a:r>
+              <a:rPr sz="1600">
+                <a:solidFill>
+                  <a:srgbClr val="D4D4D4"/>
+                </a:solidFill>
+                <a:latin typeface="Consolas"/>
+              </a:rPr>
+              <a:t> </a:t>
+            </a:r>
+            <a:r>
+              <a:rPr sz="1600">
+                <a:solidFill>
+                  <a:srgbClr val="D4D4D4"/>
+                </a:solidFill>
+                <a:latin typeface="Consolas"/>
+              </a:rPr>
+              <a:t>/</a:t>
+            </a:r>
+            <a:r>
+              <a:rPr sz="1600">
+                <a:solidFill>
+                  <a:srgbClr val="4EC9B0"/>
+                </a:solidFill>
+                <a:latin typeface="Consolas"/>
+              </a:rPr>
+              <a:t>ascii</a:t>
+            </a:r>
+          </a:p>
+          <a:p>
+            <a:pPr>
+              <a:spcAft>
+                <a:spcPts val="100"/>
+              </a:spcAft>
+            </a:pPr>
+            <a:r>
+              <a:rPr sz="1600">
+                <a:solidFill>
+                  <a:srgbClr val="4EC9B0"/>
+                </a:solidFill>
+                <a:latin typeface="Consolas"/>
+              </a:rPr>
+              <a:t>disp</a:t>
+            </a:r>
+            <a:r>
+              <a:rPr sz="1600">
+                <a:solidFill>
+                  <a:srgbClr val="D4D4D4"/>
+                </a:solidFill>
+                <a:latin typeface="Consolas"/>
+              </a:rPr>
+              <a:t> </a:t>
+            </a:r>
+            <a:r>
+              <a:rPr sz="1600">
+                <a:solidFill>
+                  <a:srgbClr val="CE9178"/>
+                </a:solidFill>
+                <a:latin typeface="Consolas"/>
+              </a:rPr>
+              <a:t>'</a:t>
+            </a:r>
+            <a:r>
+              <a:rPr sz="1600">
+                <a:solidFill>
+                  <a:srgbClr val="CE9178"/>
+                </a:solidFill>
+                <a:latin typeface="Consolas"/>
+              </a:rPr>
+              <a:t>simulation finished'</a:t>
+            </a:r>
+          </a:p>
+        </p:txBody>
+      </p:sp>
+      <p:sp>
+        <p:nvSpPr>
+          <p:cNvPr id="9" name="TextBox 8"/>
+          <p:cNvSpPr txBox="1"/>
+          <p:nvPr/>
+        </p:nvSpPr>
+        <p:spPr>
+          <a:xfrm>
+            <a:off x="777240" y="5093208"/>
+            <a:ext cx="10972800" cy="274320"/>
+          </a:xfrm>
+          <a:prstGeom prst="rect">
+            <a:avLst/>
+          </a:prstGeom>
+          <a:noFill/>
+        </p:spPr>
+        <p:txBody>
+          <a:bodyPr wrap="none">
+            <a:spAutoFit/>
+          </a:bodyPr>
+          <a:lstStyle/>
+          <a:p>
+            <a:r>
+              <a:rPr sz="1200" i="1">
+                <a:solidFill>
+                  <a:srgbClr val="8CA3B8"/>
+                </a:solidFill>
+                <a:latin typeface="Segoe UI"/>
+              </a:rPr>
+              <a:t>Zarchan, Tactical &amp; Strategic Missile Guidance, 6th ed. (MATLAB) — gravity-turn booster sim</a:t>
+            </a:r>
+          </a:p>
+        </p:txBody>
+      </p:sp>
+      <p:sp>
+        <p:nvSpPr>
+          <p:cNvPr id="10" name="TextBox 9"/>
+          <p:cNvSpPr txBox="1"/>
+          <p:nvPr/>
+        </p:nvSpPr>
+        <p:spPr>
+          <a:xfrm>
+            <a:off x="777240" y="5422392"/>
+            <a:ext cx="10972800" cy="457200"/>
+          </a:xfrm>
+          <a:prstGeom prst="rect">
+            <a:avLst/>
+          </a:prstGeom>
+          <a:noFill/>
+        </p:spPr>
+        <p:txBody>
+          <a:bodyPr wrap="none">
+            <a:spAutoFit/>
+          </a:bodyPr>
+          <a:lstStyle/>
+          <a:p>
+            <a:r>
+              <a:rPr sz="1900" i="1">
+                <a:solidFill>
+                  <a:srgbClr val="7EE08A"/>
+                </a:solidFill>
+                <a:latin typeface="Segoe UI"/>
+              </a:rPr>
+              <a:t>No boundary between simulation, analysis, and I/O — every concern in one scope.</a:t>
             </a:r>
           </a:p>
         </p:txBody>

--- a/slides/ACCU-Separation-of-Concerns-at-Zero-Cost.pptx
+++ b/slides/ACCU-Separation-of-Concerns-at-Zero-Cost.pptx
@@ -7617,63 +7617,6 @@
           </a:p>
         </p:txBody>
       </p:sp>
-      <p:sp>
-        <p:nvSpPr>
-          <p:cNvPr id="6" name="Rounded Rectangle 5"/>
-          <p:cNvSpPr/>
-          <p:nvPr/>
-        </p:nvSpPr>
-        <p:spPr>
-          <a:xfrm>
-            <a:off x="4572000" y="1860083"/>
-            <a:ext cx="3017520" cy="822960"/>
-          </a:xfrm>
-          <a:prstGeom prst="roundRect">
-            <a:avLst>
-              <a:gd name="adj" fmla="val 10000"/>
-            </a:avLst>
-          </a:prstGeom>
-          <a:solidFill>
-            <a:srgbClr val="081626"/>
-          </a:solidFill>
-          <a:ln w="12700">
-            <a:solidFill>
-              <a:srgbClr val="1E3A55"/>
-            </a:solidFill>
-          </a:ln>
-          <a:effectLst/>
-        </p:spPr>
-        <p:style>
-          <a:lnRef idx="1">
-            <a:schemeClr val="accent1"/>
-          </a:lnRef>
-          <a:fillRef idx="3">
-            <a:schemeClr val="accent1"/>
-          </a:fillRef>
-          <a:effectRef idx="2">
-            <a:schemeClr val="accent1"/>
-          </a:effectRef>
-          <a:fontRef idx="minor">
-            <a:schemeClr val="lt1"/>
-          </a:fontRef>
-        </p:style>
-        <p:txBody>
-          <a:bodyPr wrap="square" rtlCol="0" anchor="ctr"/>
-          <a:lstStyle/>
-          <a:p>
-            <a:pPr algn="ctr"/>
-            <a:r>
-              <a:rPr sz="1600" b="1">
-                <a:solidFill>
-                  <a:srgbClr val="FFFFFF"/>
-                </a:solidFill>
-                <a:latin typeface="Segoe UI"/>
-              </a:rPr>
-              <a:t>Spring  k, L0</a:t>
-            </a:r>
-          </a:p>
-        </p:txBody>
-      </p:sp>
       <p:cxnSp>
         <p:nvCxnSpPr>
           <p:cNvPr id="7" name="Connector 6"/>
@@ -7886,6 +7829,112 @@
           </a:p>
         </p:txBody>
       </p:sp>
+      <p:sp>
+        <p:nvSpPr>
+          <p:cNvPr id="204" name="Spring13"/>
+          <p:cNvSpPr/>
+          <p:nvPr/>
+        </p:nvSpPr>
+        <p:spPr>
+          <a:xfrm>
+            <a:off x="4572000" y="2084831"/>
+            <a:ext cx="3017520" cy="402336"/>
+          </a:xfrm>
+          <a:custGeom>
+            <a:avLst/>
+            <a:gdLst/>
+            <a:ahLst/>
+            <a:cxnLst/>
+            <a:rect l="0" t="0" r="0" b="0"/>
+            <a:pathLst>
+              <a:path w="2082800" h="406400" fill="none">
+                <a:moveTo>
+                  <a:pt x="0" y="203200"/>
+                </a:moveTo>
+                <a:lnTo>
+                  <a:pt x="152400" y="203200"/>
+                </a:lnTo>
+                <a:lnTo>
+                  <a:pt x="374650" y="25400"/>
+                </a:lnTo>
+                <a:lnTo>
+                  <a:pt x="596900" y="381000"/>
+                </a:lnTo>
+                <a:lnTo>
+                  <a:pt x="819150" y="25400"/>
+                </a:lnTo>
+                <a:lnTo>
+                  <a:pt x="1041400" y="381000"/>
+                </a:lnTo>
+                <a:lnTo>
+                  <a:pt x="1263650" y="25400"/>
+                </a:lnTo>
+                <a:lnTo>
+                  <a:pt x="1485900" y="381000"/>
+                </a:lnTo>
+                <a:lnTo>
+                  <a:pt x="1708150" y="25400"/>
+                </a:lnTo>
+                <a:lnTo>
+                  <a:pt x="1930400" y="203200"/>
+                </a:lnTo>
+                <a:lnTo>
+                  <a:pt x="2082800" y="203200"/>
+                </a:lnTo>
+              </a:path>
+            </a:pathLst>
+          </a:custGeom>
+          <a:noFill/>
+          <a:ln w="28575" cap="rnd">
+            <a:solidFill>
+              <a:srgbClr val="D8E2EC"/>
+            </a:solidFill>
+            <a:round/>
+          </a:ln>
+        </p:spPr>
+        <p:txBody>
+          <a:bodyPr/>
+          <a:lstStyle/>
+          <a:p>
+            <a:endParaRPr/>
+          </a:p>
+        </p:txBody>
+      </p:sp>
+      <p:sp>
+        <p:nvSpPr>
+          <p:cNvPr id="205" name="spring label"/>
+          <p:cNvSpPr txBox="1"/>
+          <p:nvPr/>
+        </p:nvSpPr>
+        <p:spPr>
+          <a:xfrm>
+            <a:off x="4572000" y="1481328"/>
+            <a:ext cx="3017520" cy="365760"/>
+          </a:xfrm>
+          <a:prstGeom prst="rect">
+            <a:avLst/>
+          </a:prstGeom>
+          <a:noFill/>
+        </p:spPr>
+        <p:txBody>
+          <a:bodyPr wrap="none">
+            <a:spAutoFit/>
+          </a:bodyPr>
+          <a:lstStyle/>
+          <a:p>
+            <a:pPr algn="ctr"/>
+            <a:r>
+              <a:rPr sz="1600" b="1">
+                <a:solidFill>
+                  <a:srgbClr val="FFFFFF"/>
+                </a:solidFill>
+                <a:latin typeface="Segoe UI"/>
+              </a:rPr>
+              <a:t>Spring  k, L0</a:t>
+            </a:r>
+          </a:p>
+        </p:txBody>
+      </p:sp>
     </p:spTree>
   </p:cSld>
   <p:clrMapOvr>
@@ -21333,11 +21382,29 @@
             <a:r>
               <a:rPr sz="1600">
                 <a:solidFill>
-                  <a:srgbClr val="D4D4D4"/>
-                </a:solidFill>
-                <a:latin typeface="Consolas"/>
-              </a:rPr>
-              <a:t>mass1_derivative(...):            </a:t>
+                  <a:srgbClr val="DCDCAA"/>
+                </a:solidFill>
+                <a:latin typeface="Consolas"/>
+              </a:rPr>
+              <a:t>mass1_derivative</a:t>
+            </a:r>
+            <a:r>
+              <a:rPr sz="1600">
+                <a:solidFill>
+                  <a:srgbClr val="D4D4D4"/>
+                </a:solidFill>
+                <a:latin typeface="Consolas"/>
+              </a:rPr>
+              <a:t>(...):</a:t>
+            </a:r>
+            <a:r>
+              <a:rPr sz="1600">
+                <a:solidFill>
+                  <a:srgbClr val="D4D4D4"/>
+                </a:solidFill>
+                <a:latin typeface="Consolas"/>
+              </a:rPr>
+              <a:t>            </a:t>
             </a:r>
             <a:r>
               <a:rPr sz="1600">
@@ -21362,7 +21429,106 @@
                 </a:solidFill>
                 <a:latin typeface="Consolas"/>
               </a:rPr>
-              <a:t>    mov   r9,  [sys+112]          </a:t>
+              <a:t>    </a:t>
+            </a:r>
+            <a:r>
+              <a:rPr sz="1600">
+                <a:solidFill>
+                  <a:srgbClr val="DCDCAA"/>
+                </a:solidFill>
+                <a:latin typeface="Consolas"/>
+              </a:rPr>
+              <a:t>mov</a:t>
+            </a:r>
+            <a:r>
+              <a:rPr sz="1600">
+                <a:solidFill>
+                  <a:srgbClr val="D4D4D4"/>
+                </a:solidFill>
+                <a:latin typeface="Consolas"/>
+              </a:rPr>
+              <a:t>   </a:t>
+            </a:r>
+            <a:r>
+              <a:rPr sz="1600">
+                <a:solidFill>
+                  <a:srgbClr val="D4D4D4"/>
+                </a:solidFill>
+                <a:latin typeface="Consolas"/>
+              </a:rPr>
+              <a:t>r9</a:t>
+            </a:r>
+            <a:r>
+              <a:rPr sz="1600">
+                <a:solidFill>
+                  <a:srgbClr val="D4D4D4"/>
+                </a:solidFill>
+                <a:latin typeface="Consolas"/>
+              </a:rPr>
+              <a:t>,</a:t>
+            </a:r>
+            <a:r>
+              <a:rPr sz="1600">
+                <a:solidFill>
+                  <a:srgbClr val="D4D4D4"/>
+                </a:solidFill>
+                <a:latin typeface="Consolas"/>
+              </a:rPr>
+              <a:t>  </a:t>
+            </a:r>
+            <a:r>
+              <a:rPr sz="1600">
+                <a:solidFill>
+                  <a:srgbClr val="D4D4D4"/>
+                </a:solidFill>
+                <a:latin typeface="Consolas"/>
+              </a:rPr>
+              <a:t>[</a:t>
+            </a:r>
+            <a:r>
+              <a:rPr sz="1600">
+                <a:solidFill>
+                  <a:srgbClr val="D4D4D4"/>
+                </a:solidFill>
+                <a:latin typeface="Consolas"/>
+              </a:rPr>
+              <a:t>sys</a:t>
+            </a:r>
+            <a:r>
+              <a:rPr sz="1600">
+                <a:solidFill>
+                  <a:srgbClr val="D4D4D4"/>
+                </a:solidFill>
+                <a:latin typeface="Consolas"/>
+              </a:rPr>
+              <a:t>+</a:t>
+            </a:r>
+            <a:r>
+              <a:rPr sz="1600">
+                <a:solidFill>
+                  <a:srgbClr val="B5CEA8"/>
+                </a:solidFill>
+                <a:latin typeface="Consolas"/>
+              </a:rPr>
+              <a:t>112</a:t>
+            </a:r>
+            <a:r>
+              <a:rPr sz="1600">
+                <a:solidFill>
+                  <a:srgbClr val="D4D4D4"/>
+                </a:solidFill>
+                <a:latin typeface="Consolas"/>
+              </a:rPr>
+              <a:t>]</a:t>
+            </a:r>
+            <a:r>
+              <a:rPr sz="1600">
+                <a:solidFill>
+                  <a:srgbClr val="D4D4D4"/>
+                </a:solidFill>
+                <a:latin typeface="Consolas"/>
+              </a:rPr>
+              <a:t>          </a:t>
             </a:r>
             <a:r>
               <a:rPr sz="1600">
@@ -21387,7 +21553,106 @@
                 </a:solidFill>
                 <a:latin typeface="Consolas"/>
               </a:rPr>
-              <a:t>    mov   r10, [sys+128]          </a:t>
+              <a:t>    </a:t>
+            </a:r>
+            <a:r>
+              <a:rPr sz="1600">
+                <a:solidFill>
+                  <a:srgbClr val="DCDCAA"/>
+                </a:solidFill>
+                <a:latin typeface="Consolas"/>
+              </a:rPr>
+              <a:t>mov</a:t>
+            </a:r>
+            <a:r>
+              <a:rPr sz="1600">
+                <a:solidFill>
+                  <a:srgbClr val="D4D4D4"/>
+                </a:solidFill>
+                <a:latin typeface="Consolas"/>
+              </a:rPr>
+              <a:t>   </a:t>
+            </a:r>
+            <a:r>
+              <a:rPr sz="1600">
+                <a:solidFill>
+                  <a:srgbClr val="D4D4D4"/>
+                </a:solidFill>
+                <a:latin typeface="Consolas"/>
+              </a:rPr>
+              <a:t>r10</a:t>
+            </a:r>
+            <a:r>
+              <a:rPr sz="1600">
+                <a:solidFill>
+                  <a:srgbClr val="D4D4D4"/>
+                </a:solidFill>
+                <a:latin typeface="Consolas"/>
+              </a:rPr>
+              <a:t>,</a:t>
+            </a:r>
+            <a:r>
+              <a:rPr sz="1600">
+                <a:solidFill>
+                  <a:srgbClr val="D4D4D4"/>
+                </a:solidFill>
+                <a:latin typeface="Consolas"/>
+              </a:rPr>
+              <a:t> </a:t>
+            </a:r>
+            <a:r>
+              <a:rPr sz="1600">
+                <a:solidFill>
+                  <a:srgbClr val="D4D4D4"/>
+                </a:solidFill>
+                <a:latin typeface="Consolas"/>
+              </a:rPr>
+              <a:t>[</a:t>
+            </a:r>
+            <a:r>
+              <a:rPr sz="1600">
+                <a:solidFill>
+                  <a:srgbClr val="D4D4D4"/>
+                </a:solidFill>
+                <a:latin typeface="Consolas"/>
+              </a:rPr>
+              <a:t>sys</a:t>
+            </a:r>
+            <a:r>
+              <a:rPr sz="1600">
+                <a:solidFill>
+                  <a:srgbClr val="D4D4D4"/>
+                </a:solidFill>
+                <a:latin typeface="Consolas"/>
+              </a:rPr>
+              <a:t>+</a:t>
+            </a:r>
+            <a:r>
+              <a:rPr sz="1600">
+                <a:solidFill>
+                  <a:srgbClr val="B5CEA8"/>
+                </a:solidFill>
+                <a:latin typeface="Consolas"/>
+              </a:rPr>
+              <a:t>128</a:t>
+            </a:r>
+            <a:r>
+              <a:rPr sz="1600">
+                <a:solidFill>
+                  <a:srgbClr val="D4D4D4"/>
+                </a:solidFill>
+                <a:latin typeface="Consolas"/>
+              </a:rPr>
+              <a:t>]</a:t>
+            </a:r>
+            <a:r>
+              <a:rPr sz="1600">
+                <a:solidFill>
+                  <a:srgbClr val="D4D4D4"/>
+                </a:solidFill>
+                <a:latin typeface="Consolas"/>
+              </a:rPr>
+              <a:t>          </a:t>
             </a:r>
             <a:r>
               <a:rPr sz="1600">
@@ -21412,7 +21677,106 @@
                 </a:solidFill>
                 <a:latin typeface="Consolas"/>
               </a:rPr>
-              <a:t>    movsd xmm2, [r9+8]            </a:t>
+              <a:t>    </a:t>
+            </a:r>
+            <a:r>
+              <a:rPr sz="1600">
+                <a:solidFill>
+                  <a:srgbClr val="DCDCAA"/>
+                </a:solidFill>
+                <a:latin typeface="Consolas"/>
+              </a:rPr>
+              <a:t>movsd</a:t>
+            </a:r>
+            <a:r>
+              <a:rPr sz="1600">
+                <a:solidFill>
+                  <a:srgbClr val="D4D4D4"/>
+                </a:solidFill>
+                <a:latin typeface="Consolas"/>
+              </a:rPr>
+              <a:t> </a:t>
+            </a:r>
+            <a:r>
+              <a:rPr sz="1600">
+                <a:solidFill>
+                  <a:srgbClr val="D4D4D4"/>
+                </a:solidFill>
+                <a:latin typeface="Consolas"/>
+              </a:rPr>
+              <a:t>xmm2</a:t>
+            </a:r>
+            <a:r>
+              <a:rPr sz="1600">
+                <a:solidFill>
+                  <a:srgbClr val="D4D4D4"/>
+                </a:solidFill>
+                <a:latin typeface="Consolas"/>
+              </a:rPr>
+              <a:t>,</a:t>
+            </a:r>
+            <a:r>
+              <a:rPr sz="1600">
+                <a:solidFill>
+                  <a:srgbClr val="D4D4D4"/>
+                </a:solidFill>
+                <a:latin typeface="Consolas"/>
+              </a:rPr>
+              <a:t> </a:t>
+            </a:r>
+            <a:r>
+              <a:rPr sz="1600">
+                <a:solidFill>
+                  <a:srgbClr val="D4D4D4"/>
+                </a:solidFill>
+                <a:latin typeface="Consolas"/>
+              </a:rPr>
+              <a:t>[</a:t>
+            </a:r>
+            <a:r>
+              <a:rPr sz="1600">
+                <a:solidFill>
+                  <a:srgbClr val="D4D4D4"/>
+                </a:solidFill>
+                <a:latin typeface="Consolas"/>
+              </a:rPr>
+              <a:t>r9</a:t>
+            </a:r>
+            <a:r>
+              <a:rPr sz="1600">
+                <a:solidFill>
+                  <a:srgbClr val="D4D4D4"/>
+                </a:solidFill>
+                <a:latin typeface="Consolas"/>
+              </a:rPr>
+              <a:t>+</a:t>
+            </a:r>
+            <a:r>
+              <a:rPr sz="1600">
+                <a:solidFill>
+                  <a:srgbClr val="B5CEA8"/>
+                </a:solidFill>
+                <a:latin typeface="Consolas"/>
+              </a:rPr>
+              <a:t>8</a:t>
+            </a:r>
+            <a:r>
+              <a:rPr sz="1600">
+                <a:solidFill>
+                  <a:srgbClr val="D4D4D4"/>
+                </a:solidFill>
+                <a:latin typeface="Consolas"/>
+              </a:rPr>
+              <a:t>]</a:t>
+            </a:r>
+            <a:r>
+              <a:rPr sz="1600">
+                <a:solidFill>
+                  <a:srgbClr val="D4D4D4"/>
+                </a:solidFill>
+                <a:latin typeface="Consolas"/>
+              </a:rPr>
+              <a:t>            </a:t>
             </a:r>
             <a:r>
               <a:rPr sz="1600">
@@ -21437,7 +21801,79 @@
                 </a:solidFill>
                 <a:latin typeface="Consolas"/>
               </a:rPr>
-              <a:t>    xorpd xmm2, [.LC0]</a:t>
+              <a:t>    </a:t>
+            </a:r>
+            <a:r>
+              <a:rPr sz="1600">
+                <a:solidFill>
+                  <a:srgbClr val="DCDCAA"/>
+                </a:solidFill>
+                <a:latin typeface="Consolas"/>
+              </a:rPr>
+              <a:t>xorpd</a:t>
+            </a:r>
+            <a:r>
+              <a:rPr sz="1600">
+                <a:solidFill>
+                  <a:srgbClr val="D4D4D4"/>
+                </a:solidFill>
+                <a:latin typeface="Consolas"/>
+              </a:rPr>
+              <a:t> </a:t>
+            </a:r>
+            <a:r>
+              <a:rPr sz="1600">
+                <a:solidFill>
+                  <a:srgbClr val="D4D4D4"/>
+                </a:solidFill>
+                <a:latin typeface="Consolas"/>
+              </a:rPr>
+              <a:t>xmm2</a:t>
+            </a:r>
+            <a:r>
+              <a:rPr sz="1600">
+                <a:solidFill>
+                  <a:srgbClr val="D4D4D4"/>
+                </a:solidFill>
+                <a:latin typeface="Consolas"/>
+              </a:rPr>
+              <a:t>,</a:t>
+            </a:r>
+            <a:r>
+              <a:rPr sz="1600">
+                <a:solidFill>
+                  <a:srgbClr val="D4D4D4"/>
+                </a:solidFill>
+                <a:latin typeface="Consolas"/>
+              </a:rPr>
+              <a:t> </a:t>
+            </a:r>
+            <a:r>
+              <a:rPr sz="1600">
+                <a:solidFill>
+                  <a:srgbClr val="D4D4D4"/>
+                </a:solidFill>
+                <a:latin typeface="Consolas"/>
+              </a:rPr>
+              <a:t>[.</a:t>
+            </a:r>
+            <a:r>
+              <a:rPr sz="1600">
+                <a:solidFill>
+                  <a:srgbClr val="D4D4D4"/>
+                </a:solidFill>
+                <a:latin typeface="Consolas"/>
+              </a:rPr>
+              <a:t>LC0</a:t>
+            </a:r>
+            <a:r>
+              <a:rPr sz="1600">
+                <a:solidFill>
+                  <a:srgbClr val="D4D4D4"/>
+                </a:solidFill>
+                <a:latin typeface="Consolas"/>
+              </a:rPr>
+              <a:t>]</a:t>
             </a:r>
           </a:p>
           <a:p>
@@ -21453,7 +21889,124 @@
                 </a:solidFill>
                 <a:latin typeface="Consolas"/>
               </a:rPr>
-              <a:t>    movsd xmm0, [r8+rcx*8]        </a:t>
+              <a:t>    </a:t>
+            </a:r>
+            <a:r>
+              <a:rPr sz="1600">
+                <a:solidFill>
+                  <a:srgbClr val="DCDCAA"/>
+                </a:solidFill>
+                <a:latin typeface="Consolas"/>
+              </a:rPr>
+              <a:t>movsd</a:t>
+            </a:r>
+            <a:r>
+              <a:rPr sz="1600">
+                <a:solidFill>
+                  <a:srgbClr val="D4D4D4"/>
+                </a:solidFill>
+                <a:latin typeface="Consolas"/>
+              </a:rPr>
+              <a:t> </a:t>
+            </a:r>
+            <a:r>
+              <a:rPr sz="1600">
+                <a:solidFill>
+                  <a:srgbClr val="D4D4D4"/>
+                </a:solidFill>
+                <a:latin typeface="Consolas"/>
+              </a:rPr>
+              <a:t>xmm0</a:t>
+            </a:r>
+            <a:r>
+              <a:rPr sz="1600">
+                <a:solidFill>
+                  <a:srgbClr val="D4D4D4"/>
+                </a:solidFill>
+                <a:latin typeface="Consolas"/>
+              </a:rPr>
+              <a:t>,</a:t>
+            </a:r>
+            <a:r>
+              <a:rPr sz="1600">
+                <a:solidFill>
+                  <a:srgbClr val="D4D4D4"/>
+                </a:solidFill>
+                <a:latin typeface="Consolas"/>
+              </a:rPr>
+              <a:t> </a:t>
+            </a:r>
+            <a:r>
+              <a:rPr sz="1600">
+                <a:solidFill>
+                  <a:srgbClr val="D4D4D4"/>
+                </a:solidFill>
+                <a:latin typeface="Consolas"/>
+              </a:rPr>
+              <a:t>[</a:t>
+            </a:r>
+            <a:r>
+              <a:rPr sz="1600">
+                <a:solidFill>
+                  <a:srgbClr val="D4D4D4"/>
+                </a:solidFill>
+                <a:latin typeface="Consolas"/>
+              </a:rPr>
+              <a:t>r8</a:t>
+            </a:r>
+            <a:r>
+              <a:rPr sz="1600">
+                <a:solidFill>
+                  <a:srgbClr val="D4D4D4"/>
+                </a:solidFill>
+                <a:latin typeface="Consolas"/>
+              </a:rPr>
+              <a:t>+</a:t>
+            </a:r>
+            <a:r>
+              <a:rPr sz="1600">
+                <a:solidFill>
+                  <a:srgbClr val="D4D4D4"/>
+                </a:solidFill>
+                <a:latin typeface="Consolas"/>
+              </a:rPr>
+              <a:t>rcx</a:t>
+            </a:r>
+            <a:r>
+              <a:rPr sz="1600">
+                <a:solidFill>
+                  <a:srgbClr val="D4D4D4"/>
+                </a:solidFill>
+                <a:latin typeface="Consolas"/>
+              </a:rPr>
+              <a:t>*</a:t>
+            </a:r>
+            <a:r>
+              <a:rPr sz="1600">
+                <a:solidFill>
+                  <a:srgbClr val="B5CEA8"/>
+                </a:solidFill>
+                <a:latin typeface="Consolas"/>
+              </a:rPr>
+              <a:t>8</a:t>
+            </a:r>
+            <a:r>
+              <a:rPr sz="1600">
+                <a:solidFill>
+                  <a:srgbClr val="D4D4D4"/>
+                </a:solidFill>
+                <a:latin typeface="Consolas"/>
+              </a:rPr>
+              <a:t>]</a:t>
+            </a:r>
+            <a:r>
+              <a:rPr sz="1600">
+                <a:solidFill>
+                  <a:srgbClr val="D4D4D4"/>
+                </a:solidFill>
+                <a:latin typeface="Consolas"/>
+              </a:rPr>
+              <a:t>        </a:t>
             </a:r>
             <a:r>
               <a:rPr sz="1600">
@@ -21478,7 +22031,124 @@
                 </a:solidFill>
                 <a:latin typeface="Consolas"/>
               </a:rPr>
-              <a:t>    subsd xmm0, [r8+rdx*8]        </a:t>
+              <a:t>    </a:t>
+            </a:r>
+            <a:r>
+              <a:rPr sz="1600">
+                <a:solidFill>
+                  <a:srgbClr val="DCDCAA"/>
+                </a:solidFill>
+                <a:latin typeface="Consolas"/>
+              </a:rPr>
+              <a:t>subsd</a:t>
+            </a:r>
+            <a:r>
+              <a:rPr sz="1600">
+                <a:solidFill>
+                  <a:srgbClr val="D4D4D4"/>
+                </a:solidFill>
+                <a:latin typeface="Consolas"/>
+              </a:rPr>
+              <a:t> </a:t>
+            </a:r>
+            <a:r>
+              <a:rPr sz="1600">
+                <a:solidFill>
+                  <a:srgbClr val="D4D4D4"/>
+                </a:solidFill>
+                <a:latin typeface="Consolas"/>
+              </a:rPr>
+              <a:t>xmm0</a:t>
+            </a:r>
+            <a:r>
+              <a:rPr sz="1600">
+                <a:solidFill>
+                  <a:srgbClr val="D4D4D4"/>
+                </a:solidFill>
+                <a:latin typeface="Consolas"/>
+              </a:rPr>
+              <a:t>,</a:t>
+            </a:r>
+            <a:r>
+              <a:rPr sz="1600">
+                <a:solidFill>
+                  <a:srgbClr val="D4D4D4"/>
+                </a:solidFill>
+                <a:latin typeface="Consolas"/>
+              </a:rPr>
+              <a:t> </a:t>
+            </a:r>
+            <a:r>
+              <a:rPr sz="1600">
+                <a:solidFill>
+                  <a:srgbClr val="D4D4D4"/>
+                </a:solidFill>
+                <a:latin typeface="Consolas"/>
+              </a:rPr>
+              <a:t>[</a:t>
+            </a:r>
+            <a:r>
+              <a:rPr sz="1600">
+                <a:solidFill>
+                  <a:srgbClr val="D4D4D4"/>
+                </a:solidFill>
+                <a:latin typeface="Consolas"/>
+              </a:rPr>
+              <a:t>r8</a:t>
+            </a:r>
+            <a:r>
+              <a:rPr sz="1600">
+                <a:solidFill>
+                  <a:srgbClr val="D4D4D4"/>
+                </a:solidFill>
+                <a:latin typeface="Consolas"/>
+              </a:rPr>
+              <a:t>+</a:t>
+            </a:r>
+            <a:r>
+              <a:rPr sz="1600">
+                <a:solidFill>
+                  <a:srgbClr val="D4D4D4"/>
+                </a:solidFill>
+                <a:latin typeface="Consolas"/>
+              </a:rPr>
+              <a:t>rdx</a:t>
+            </a:r>
+            <a:r>
+              <a:rPr sz="1600">
+                <a:solidFill>
+                  <a:srgbClr val="D4D4D4"/>
+                </a:solidFill>
+                <a:latin typeface="Consolas"/>
+              </a:rPr>
+              <a:t>*</a:t>
+            </a:r>
+            <a:r>
+              <a:rPr sz="1600">
+                <a:solidFill>
+                  <a:srgbClr val="B5CEA8"/>
+                </a:solidFill>
+                <a:latin typeface="Consolas"/>
+              </a:rPr>
+              <a:t>8</a:t>
+            </a:r>
+            <a:r>
+              <a:rPr sz="1600">
+                <a:solidFill>
+                  <a:srgbClr val="D4D4D4"/>
+                </a:solidFill>
+                <a:latin typeface="Consolas"/>
+              </a:rPr>
+              <a:t>]</a:t>
+            </a:r>
+            <a:r>
+              <a:rPr sz="1600">
+                <a:solidFill>
+                  <a:srgbClr val="D4D4D4"/>
+                </a:solidFill>
+                <a:latin typeface="Consolas"/>
+              </a:rPr>
+              <a:t>        </a:t>
             </a:r>
             <a:r>
               <a:rPr sz="1600">
@@ -21503,7 +22173,106 @@
                 </a:solidFill>
                 <a:latin typeface="Consolas"/>
               </a:rPr>
-              <a:t>    subsd xmm0, [r9+16]           </a:t>
+              <a:t>    </a:t>
+            </a:r>
+            <a:r>
+              <a:rPr sz="1600">
+                <a:solidFill>
+                  <a:srgbClr val="DCDCAA"/>
+                </a:solidFill>
+                <a:latin typeface="Consolas"/>
+              </a:rPr>
+              <a:t>subsd</a:t>
+            </a:r>
+            <a:r>
+              <a:rPr sz="1600">
+                <a:solidFill>
+                  <a:srgbClr val="D4D4D4"/>
+                </a:solidFill>
+                <a:latin typeface="Consolas"/>
+              </a:rPr>
+              <a:t> </a:t>
+            </a:r>
+            <a:r>
+              <a:rPr sz="1600">
+                <a:solidFill>
+                  <a:srgbClr val="D4D4D4"/>
+                </a:solidFill>
+                <a:latin typeface="Consolas"/>
+              </a:rPr>
+              <a:t>xmm0</a:t>
+            </a:r>
+            <a:r>
+              <a:rPr sz="1600">
+                <a:solidFill>
+                  <a:srgbClr val="D4D4D4"/>
+                </a:solidFill>
+                <a:latin typeface="Consolas"/>
+              </a:rPr>
+              <a:t>,</a:t>
+            </a:r>
+            <a:r>
+              <a:rPr sz="1600">
+                <a:solidFill>
+                  <a:srgbClr val="D4D4D4"/>
+                </a:solidFill>
+                <a:latin typeface="Consolas"/>
+              </a:rPr>
+              <a:t> </a:t>
+            </a:r>
+            <a:r>
+              <a:rPr sz="1600">
+                <a:solidFill>
+                  <a:srgbClr val="D4D4D4"/>
+                </a:solidFill>
+                <a:latin typeface="Consolas"/>
+              </a:rPr>
+              <a:t>[</a:t>
+            </a:r>
+            <a:r>
+              <a:rPr sz="1600">
+                <a:solidFill>
+                  <a:srgbClr val="D4D4D4"/>
+                </a:solidFill>
+                <a:latin typeface="Consolas"/>
+              </a:rPr>
+              <a:t>r9</a:t>
+            </a:r>
+            <a:r>
+              <a:rPr sz="1600">
+                <a:solidFill>
+                  <a:srgbClr val="D4D4D4"/>
+                </a:solidFill>
+                <a:latin typeface="Consolas"/>
+              </a:rPr>
+              <a:t>+</a:t>
+            </a:r>
+            <a:r>
+              <a:rPr sz="1600">
+                <a:solidFill>
+                  <a:srgbClr val="B5CEA8"/>
+                </a:solidFill>
+                <a:latin typeface="Consolas"/>
+              </a:rPr>
+              <a:t>16</a:t>
+            </a:r>
+            <a:r>
+              <a:rPr sz="1600">
+                <a:solidFill>
+                  <a:srgbClr val="D4D4D4"/>
+                </a:solidFill>
+                <a:latin typeface="Consolas"/>
+              </a:rPr>
+              <a:t>]</a:t>
+            </a:r>
+            <a:r>
+              <a:rPr sz="1600">
+                <a:solidFill>
+                  <a:srgbClr val="D4D4D4"/>
+                </a:solidFill>
+                <a:latin typeface="Consolas"/>
+              </a:rPr>
+              <a:t>           </a:t>
             </a:r>
             <a:r>
               <a:rPr sz="1600">
@@ -21528,7 +22297,124 @@
                 </a:solidFill>
                 <a:latin typeface="Consolas"/>
               </a:rPr>
-              <a:t>    movsd xmm1, [r8+rcx*8]        </a:t>
+              <a:t>    </a:t>
+            </a:r>
+            <a:r>
+              <a:rPr sz="1600">
+                <a:solidFill>
+                  <a:srgbClr val="DCDCAA"/>
+                </a:solidFill>
+                <a:latin typeface="Consolas"/>
+              </a:rPr>
+              <a:t>movsd</a:t>
+            </a:r>
+            <a:r>
+              <a:rPr sz="1600">
+                <a:solidFill>
+                  <a:srgbClr val="D4D4D4"/>
+                </a:solidFill>
+                <a:latin typeface="Consolas"/>
+              </a:rPr>
+              <a:t> </a:t>
+            </a:r>
+            <a:r>
+              <a:rPr sz="1600">
+                <a:solidFill>
+                  <a:srgbClr val="D4D4D4"/>
+                </a:solidFill>
+                <a:latin typeface="Consolas"/>
+              </a:rPr>
+              <a:t>xmm1</a:t>
+            </a:r>
+            <a:r>
+              <a:rPr sz="1600">
+                <a:solidFill>
+                  <a:srgbClr val="D4D4D4"/>
+                </a:solidFill>
+                <a:latin typeface="Consolas"/>
+              </a:rPr>
+              <a:t>,</a:t>
+            </a:r>
+            <a:r>
+              <a:rPr sz="1600">
+                <a:solidFill>
+                  <a:srgbClr val="D4D4D4"/>
+                </a:solidFill>
+                <a:latin typeface="Consolas"/>
+              </a:rPr>
+              <a:t> </a:t>
+            </a:r>
+            <a:r>
+              <a:rPr sz="1600">
+                <a:solidFill>
+                  <a:srgbClr val="D4D4D4"/>
+                </a:solidFill>
+                <a:latin typeface="Consolas"/>
+              </a:rPr>
+              <a:t>[</a:t>
+            </a:r>
+            <a:r>
+              <a:rPr sz="1600">
+                <a:solidFill>
+                  <a:srgbClr val="D4D4D4"/>
+                </a:solidFill>
+                <a:latin typeface="Consolas"/>
+              </a:rPr>
+              <a:t>r8</a:t>
+            </a:r>
+            <a:r>
+              <a:rPr sz="1600">
+                <a:solidFill>
+                  <a:srgbClr val="D4D4D4"/>
+                </a:solidFill>
+                <a:latin typeface="Consolas"/>
+              </a:rPr>
+              <a:t>+</a:t>
+            </a:r>
+            <a:r>
+              <a:rPr sz="1600">
+                <a:solidFill>
+                  <a:srgbClr val="D4D4D4"/>
+                </a:solidFill>
+                <a:latin typeface="Consolas"/>
+              </a:rPr>
+              <a:t>rcx</a:t>
+            </a:r>
+            <a:r>
+              <a:rPr sz="1600">
+                <a:solidFill>
+                  <a:srgbClr val="D4D4D4"/>
+                </a:solidFill>
+                <a:latin typeface="Consolas"/>
+              </a:rPr>
+              <a:t>*</a:t>
+            </a:r>
+            <a:r>
+              <a:rPr sz="1600">
+                <a:solidFill>
+                  <a:srgbClr val="B5CEA8"/>
+                </a:solidFill>
+                <a:latin typeface="Consolas"/>
+              </a:rPr>
+              <a:t>8</a:t>
+            </a:r>
+            <a:r>
+              <a:rPr sz="1600">
+                <a:solidFill>
+                  <a:srgbClr val="D4D4D4"/>
+                </a:solidFill>
+                <a:latin typeface="Consolas"/>
+              </a:rPr>
+              <a:t>]</a:t>
+            </a:r>
+            <a:r>
+              <a:rPr sz="1600">
+                <a:solidFill>
+                  <a:srgbClr val="D4D4D4"/>
+                </a:solidFill>
+                <a:latin typeface="Consolas"/>
+              </a:rPr>
+              <a:t>        </a:t>
             </a:r>
             <a:r>
               <a:rPr sz="1600">
@@ -21553,7 +22439,70 @@
                 </a:solidFill>
                 <a:latin typeface="Consolas"/>
               </a:rPr>
-              <a:t>    mulsd xmm0, xmm2              </a:t>
+              <a:t>    </a:t>
+            </a:r>
+            <a:r>
+              <a:rPr sz="1600">
+                <a:solidFill>
+                  <a:srgbClr val="DCDCAA"/>
+                </a:solidFill>
+                <a:latin typeface="Consolas"/>
+              </a:rPr>
+              <a:t>mulsd</a:t>
+            </a:r>
+            <a:r>
+              <a:rPr sz="1600">
+                <a:solidFill>
+                  <a:srgbClr val="D4D4D4"/>
+                </a:solidFill>
+                <a:latin typeface="Consolas"/>
+              </a:rPr>
+              <a:t> </a:t>
+            </a:r>
+            <a:r>
+              <a:rPr sz="1600">
+                <a:solidFill>
+                  <a:srgbClr val="D4D4D4"/>
+                </a:solidFill>
+                <a:latin typeface="Consolas"/>
+              </a:rPr>
+              <a:t>xmm0</a:t>
+            </a:r>
+            <a:r>
+              <a:rPr sz="1600">
+                <a:solidFill>
+                  <a:srgbClr val="D4D4D4"/>
+                </a:solidFill>
+                <a:latin typeface="Consolas"/>
+              </a:rPr>
+              <a:t>,</a:t>
+            </a:r>
+            <a:r>
+              <a:rPr sz="1600">
+                <a:solidFill>
+                  <a:srgbClr val="D4D4D4"/>
+                </a:solidFill>
+                <a:latin typeface="Consolas"/>
+              </a:rPr>
+              <a:t> </a:t>
+            </a:r>
+            <a:r>
+              <a:rPr sz="1600">
+                <a:solidFill>
+                  <a:srgbClr val="D4D4D4"/>
+                </a:solidFill>
+                <a:latin typeface="Consolas"/>
+              </a:rPr>
+              <a:t>xmm2</a:t>
+            </a:r>
+            <a:r>
+              <a:rPr sz="1600">
+                <a:solidFill>
+                  <a:srgbClr val="D4D4D4"/>
+                </a:solidFill>
+                <a:latin typeface="Consolas"/>
+              </a:rPr>
+              <a:t>              </a:t>
             </a:r>
             <a:r>
               <a:rPr sz="1600">
@@ -21578,7 +22527,70 @@
                 </a:solidFill>
                 <a:latin typeface="Consolas"/>
               </a:rPr>
-              <a:t>    comisd xmm3, 0               </a:t>
+              <a:t>    </a:t>
+            </a:r>
+            <a:r>
+              <a:rPr sz="1600">
+                <a:solidFill>
+                  <a:srgbClr val="DCDCAA"/>
+                </a:solidFill>
+                <a:latin typeface="Consolas"/>
+              </a:rPr>
+              <a:t>comisd</a:t>
+            </a:r>
+            <a:r>
+              <a:rPr sz="1600">
+                <a:solidFill>
+                  <a:srgbClr val="D4D4D4"/>
+                </a:solidFill>
+                <a:latin typeface="Consolas"/>
+              </a:rPr>
+              <a:t> </a:t>
+            </a:r>
+            <a:r>
+              <a:rPr sz="1600">
+                <a:solidFill>
+                  <a:srgbClr val="D4D4D4"/>
+                </a:solidFill>
+                <a:latin typeface="Consolas"/>
+              </a:rPr>
+              <a:t>xmm3</a:t>
+            </a:r>
+            <a:r>
+              <a:rPr sz="1600">
+                <a:solidFill>
+                  <a:srgbClr val="D4D4D4"/>
+                </a:solidFill>
+                <a:latin typeface="Consolas"/>
+              </a:rPr>
+              <a:t>,</a:t>
+            </a:r>
+            <a:r>
+              <a:rPr sz="1600">
+                <a:solidFill>
+                  <a:srgbClr val="D4D4D4"/>
+                </a:solidFill>
+                <a:latin typeface="Consolas"/>
+              </a:rPr>
+              <a:t> </a:t>
+            </a:r>
+            <a:r>
+              <a:rPr sz="1600">
+                <a:solidFill>
+                  <a:srgbClr val="B5CEA8"/>
+                </a:solidFill>
+                <a:latin typeface="Consolas"/>
+              </a:rPr>
+              <a:t>0</a:t>
+            </a:r>
+            <a:r>
+              <a:rPr sz="1600">
+                <a:solidFill>
+                  <a:srgbClr val="D4D4D4"/>
+                </a:solidFill>
+                <a:latin typeface="Consolas"/>
+              </a:rPr>
+              <a:t>               </a:t>
             </a:r>
             <a:r>
               <a:rPr sz="1600">
@@ -21603,7 +22615,43 @@
                 </a:solidFill>
                 <a:latin typeface="Consolas"/>
               </a:rPr>
-              <a:t>    jbe   .Lskip                 </a:t>
+              <a:t>    </a:t>
+            </a:r>
+            <a:r>
+              <a:rPr sz="1600">
+                <a:solidFill>
+                  <a:srgbClr val="DCDCAA"/>
+                </a:solidFill>
+                <a:latin typeface="Consolas"/>
+              </a:rPr>
+              <a:t>jbe</a:t>
+            </a:r>
+            <a:r>
+              <a:rPr sz="1600">
+                <a:solidFill>
+                  <a:srgbClr val="D4D4D4"/>
+                </a:solidFill>
+                <a:latin typeface="Consolas"/>
+              </a:rPr>
+              <a:t>   </a:t>
+            </a:r>
+            <a:r>
+              <a:rPr sz="1600">
+                <a:solidFill>
+                  <a:srgbClr val="D4D4D4"/>
+                </a:solidFill>
+                <a:latin typeface="Consolas"/>
+              </a:rPr>
+              <a:t>.Lskip</a:t>
+            </a:r>
+            <a:r>
+              <a:rPr sz="1600">
+                <a:solidFill>
+                  <a:srgbClr val="D4D4D4"/>
+                </a:solidFill>
+                <a:latin typeface="Consolas"/>
+              </a:rPr>
+              <a:t>                 </a:t>
             </a:r>
             <a:r>
               <a:rPr sz="1600">
@@ -21628,7 +22676,106 @@
                 </a:solidFill>
                 <a:latin typeface="Consolas"/>
               </a:rPr>
-              <a:t>    divsd xmm0, [r10+8]          </a:t>
+              <a:t>    </a:t>
+            </a:r>
+            <a:r>
+              <a:rPr sz="1600">
+                <a:solidFill>
+                  <a:srgbClr val="DCDCAA"/>
+                </a:solidFill>
+                <a:latin typeface="Consolas"/>
+              </a:rPr>
+              <a:t>divsd</a:t>
+            </a:r>
+            <a:r>
+              <a:rPr sz="1600">
+                <a:solidFill>
+                  <a:srgbClr val="D4D4D4"/>
+                </a:solidFill>
+                <a:latin typeface="Consolas"/>
+              </a:rPr>
+              <a:t> </a:t>
+            </a:r>
+            <a:r>
+              <a:rPr sz="1600">
+                <a:solidFill>
+                  <a:srgbClr val="D4D4D4"/>
+                </a:solidFill>
+                <a:latin typeface="Consolas"/>
+              </a:rPr>
+              <a:t>xmm0</a:t>
+            </a:r>
+            <a:r>
+              <a:rPr sz="1600">
+                <a:solidFill>
+                  <a:srgbClr val="D4D4D4"/>
+                </a:solidFill>
+                <a:latin typeface="Consolas"/>
+              </a:rPr>
+              <a:t>,</a:t>
+            </a:r>
+            <a:r>
+              <a:rPr sz="1600">
+                <a:solidFill>
+                  <a:srgbClr val="D4D4D4"/>
+                </a:solidFill>
+                <a:latin typeface="Consolas"/>
+              </a:rPr>
+              <a:t> </a:t>
+            </a:r>
+            <a:r>
+              <a:rPr sz="1600">
+                <a:solidFill>
+                  <a:srgbClr val="D4D4D4"/>
+                </a:solidFill>
+                <a:latin typeface="Consolas"/>
+              </a:rPr>
+              <a:t>[</a:t>
+            </a:r>
+            <a:r>
+              <a:rPr sz="1600">
+                <a:solidFill>
+                  <a:srgbClr val="D4D4D4"/>
+                </a:solidFill>
+                <a:latin typeface="Consolas"/>
+              </a:rPr>
+              <a:t>r10</a:t>
+            </a:r>
+            <a:r>
+              <a:rPr sz="1600">
+                <a:solidFill>
+                  <a:srgbClr val="D4D4D4"/>
+                </a:solidFill>
+                <a:latin typeface="Consolas"/>
+              </a:rPr>
+              <a:t>+</a:t>
+            </a:r>
+            <a:r>
+              <a:rPr sz="1600">
+                <a:solidFill>
+                  <a:srgbClr val="B5CEA8"/>
+                </a:solidFill>
+                <a:latin typeface="Consolas"/>
+              </a:rPr>
+              <a:t>8</a:t>
+            </a:r>
+            <a:r>
+              <a:rPr sz="1600">
+                <a:solidFill>
+                  <a:srgbClr val="D4D4D4"/>
+                </a:solidFill>
+                <a:latin typeface="Consolas"/>
+              </a:rPr>
+              <a:t>]</a:t>
+            </a:r>
+            <a:r>
+              <a:rPr sz="1600">
+                <a:solidFill>
+                  <a:srgbClr val="D4D4D4"/>
+                </a:solidFill>
+                <a:latin typeface="Consolas"/>
+              </a:rPr>
+              <a:t>          </a:t>
             </a:r>
             <a:r>
               <a:rPr sz="1600">
@@ -21653,7 +22800,70 @@
                 </a:solidFill>
                 <a:latin typeface="Consolas"/>
               </a:rPr>
-              <a:t>    unpcklpd xmm1, xmm0          </a:t>
+              <a:t>    </a:t>
+            </a:r>
+            <a:r>
+              <a:rPr sz="1600">
+                <a:solidFill>
+                  <a:srgbClr val="DCDCAA"/>
+                </a:solidFill>
+                <a:latin typeface="Consolas"/>
+              </a:rPr>
+              <a:t>unpcklpd</a:t>
+            </a:r>
+            <a:r>
+              <a:rPr sz="1600">
+                <a:solidFill>
+                  <a:srgbClr val="D4D4D4"/>
+                </a:solidFill>
+                <a:latin typeface="Consolas"/>
+              </a:rPr>
+              <a:t> </a:t>
+            </a:r>
+            <a:r>
+              <a:rPr sz="1600">
+                <a:solidFill>
+                  <a:srgbClr val="D4D4D4"/>
+                </a:solidFill>
+                <a:latin typeface="Consolas"/>
+              </a:rPr>
+              <a:t>xmm1</a:t>
+            </a:r>
+            <a:r>
+              <a:rPr sz="1600">
+                <a:solidFill>
+                  <a:srgbClr val="D4D4D4"/>
+                </a:solidFill>
+                <a:latin typeface="Consolas"/>
+              </a:rPr>
+              <a:t>,</a:t>
+            </a:r>
+            <a:r>
+              <a:rPr sz="1600">
+                <a:solidFill>
+                  <a:srgbClr val="D4D4D4"/>
+                </a:solidFill>
+                <a:latin typeface="Consolas"/>
+              </a:rPr>
+              <a:t> </a:t>
+            </a:r>
+            <a:r>
+              <a:rPr sz="1600">
+                <a:solidFill>
+                  <a:srgbClr val="D4D4D4"/>
+                </a:solidFill>
+                <a:latin typeface="Consolas"/>
+              </a:rPr>
+              <a:t>xmm0</a:t>
+            </a:r>
+            <a:r>
+              <a:rPr sz="1600">
+                <a:solidFill>
+                  <a:srgbClr val="D4D4D4"/>
+                </a:solidFill>
+                <a:latin typeface="Consolas"/>
+              </a:rPr>
+              <a:t>          </a:t>
             </a:r>
             <a:r>
               <a:rPr sz="1600">
@@ -21678,7 +22888,70 @@
                 </a:solidFill>
                 <a:latin typeface="Consolas"/>
               </a:rPr>
-              <a:t>    movups [rax], xmm1</a:t>
+              <a:t>    </a:t>
+            </a:r>
+            <a:r>
+              <a:rPr sz="1600">
+                <a:solidFill>
+                  <a:srgbClr val="DCDCAA"/>
+                </a:solidFill>
+                <a:latin typeface="Consolas"/>
+              </a:rPr>
+              <a:t>movups</a:t>
+            </a:r>
+            <a:r>
+              <a:rPr sz="1600">
+                <a:solidFill>
+                  <a:srgbClr val="D4D4D4"/>
+                </a:solidFill>
+                <a:latin typeface="Consolas"/>
+              </a:rPr>
+              <a:t> </a:t>
+            </a:r>
+            <a:r>
+              <a:rPr sz="1600">
+                <a:solidFill>
+                  <a:srgbClr val="D4D4D4"/>
+                </a:solidFill>
+                <a:latin typeface="Consolas"/>
+              </a:rPr>
+              <a:t>[</a:t>
+            </a:r>
+            <a:r>
+              <a:rPr sz="1600">
+                <a:solidFill>
+                  <a:srgbClr val="D4D4D4"/>
+                </a:solidFill>
+                <a:latin typeface="Consolas"/>
+              </a:rPr>
+              <a:t>rax</a:t>
+            </a:r>
+            <a:r>
+              <a:rPr sz="1600">
+                <a:solidFill>
+                  <a:srgbClr val="D4D4D4"/>
+                </a:solidFill>
+                <a:latin typeface="Consolas"/>
+              </a:rPr>
+              <a:t>],</a:t>
+            </a:r>
+            <a:r>
+              <a:rPr sz="1600">
+                <a:solidFill>
+                  <a:srgbClr val="D4D4D4"/>
+                </a:solidFill>
+                <a:latin typeface="Consolas"/>
+              </a:rPr>
+              <a:t> </a:t>
+            </a:r>
+            <a:r>
+              <a:rPr sz="1600">
+                <a:solidFill>
+                  <a:srgbClr val="D4D4D4"/>
+                </a:solidFill>
+                <a:latin typeface="Consolas"/>
+              </a:rPr>
+              <a:t>xmm1</a:t>
             </a:r>
           </a:p>
           <a:p>
@@ -21694,7 +22967,16 @@
                 </a:solidFill>
                 <a:latin typeface="Consolas"/>
               </a:rPr>
-              <a:t>    ret</a:t>
+              <a:t>    </a:t>
+            </a:r>
+            <a:r>
+              <a:rPr sz="1600">
+                <a:solidFill>
+                  <a:srgbClr val="DCDCAA"/>
+                </a:solidFill>
+                <a:latin typeface="Consolas"/>
+              </a:rPr>
+              <a:t>ret</a:t>
             </a:r>
           </a:p>
         </p:txBody>
@@ -28194,7 +29476,7 @@
 </file>
 
 <file path=ppt/slides/slide39.xml><?xml version="1.0" encoding="utf-8"?>
-<p:sld xmlns:a="http://schemas.openxmlformats.org/drawingml/2006/main" xmlns:r="http://schemas.openxmlformats.org/officeDocument/2006/relationships" xmlns:p="http://schemas.openxmlformats.org/presentationml/2006/main">
+<p:sld xmlns:a="http://schemas.openxmlformats.org/drawingml/2006/main" xmlns:p="http://schemas.openxmlformats.org/presentationml/2006/main" xmlns:r="http://schemas.openxmlformats.org/officeDocument/2006/relationships">
   <p:cSld>
     <p:bg>
       <p:bgPr>
@@ -28210,14 +29492,7 @@
         <p:cNvGrpSpPr/>
         <p:nvPr/>
       </p:nvGrpSpPr>
-      <p:grpSpPr>
-        <a:xfrm>
-          <a:off x="0" y="0"/>
-          <a:ext cx="0" cy="0"/>
-          <a:chOff x="0" y="0"/>
-          <a:chExt cx="0" cy="0"/>
-        </a:xfrm>
-      </p:grpSpPr>
+      <p:grpSpPr/>
       <p:sp>
         <p:nvSpPr>
           <p:cNvPr id="2" name="TextBox 1"/>
@@ -28247,7 +29522,7 @@
                 </a:solidFill>
                 <a:latin typeface="Segoe UI"/>
               </a:rPr>
-              <a:t>FUN EXAMPLE — LIVE</a:t>
+              <a:t>A SHORT HISTORY LESSON</a:t>
             </a:r>
           </a:p>
         </p:txBody>
@@ -28281,187 +29556,21 @@
                 </a:solidFill>
                 <a:latin typeface="Segoe UI"/>
               </a:rPr>
-              <a:t>One more thing: six pendulums on a cart</a:t>
-            </a:r>
-          </a:p>
-        </p:txBody>
-      </p:sp>
-      <p:sp>
-        <p:nvSpPr>
-          <p:cNvPr id="4" name="TextBox 3"/>
-          <p:cNvSpPr txBox="1"/>
+              <a:t>Same script — even the plotting and file I/O</a:t>
+            </a:r>
+          </a:p>
+        </p:txBody>
+      </p:sp>
+      <p:sp>
+        <p:nvSpPr>
+          <p:cNvPr id="4" name="Rounded Rectangle 3"/>
+          <p:cNvSpPr/>
           <p:nvPr/>
         </p:nvSpPr>
         <p:spPr>
           <a:xfrm>
-            <a:off x="548640" y="1737360"/>
-            <a:ext cx="11064240" cy="4572000"/>
-          </a:xfrm>
-          <a:prstGeom prst="rect">
-            <a:avLst/>
-          </a:prstGeom>
-          <a:noFill/>
-        </p:spPr>
-        <p:txBody>
-          <a:bodyPr wrap="square">
-            <a:spAutoFit/>
-          </a:bodyPr>
-          <a:lstStyle/>
-          <a:p>
-            <a:pPr>
-              <a:spcAft>
-                <a:spcPts val="800"/>
-              </a:spcAft>
-            </a:pPr>
-            <a:r>
-              <a:rPr sz="2200">
-                <a:solidFill>
-                  <a:srgbClr val="35C4E8"/>
-                </a:solidFill>
-                <a:latin typeface="Segoe UI"/>
-              </a:rPr>
-              <a:t>•  </a:t>
-            </a:r>
-            <a:r>
-              <a:rPr sz="2200" b="1">
-                <a:solidFill>
-                  <a:srgbClr val="F2C744"/>
-                </a:solidFill>
-                <a:latin typeface="Segoe UI"/>
-              </a:rPr>
-              <a:t>Inverted 6-pendulum chain</a:t>
-            </a:r>
-            <a:r>
-              <a:rPr sz="2200" b="0">
-                <a:solidFill>
-                  <a:srgbClr val="D8E2EC"/>
-                </a:solidFill>
-                <a:latin typeface="Segoe UI"/>
-              </a:rPr>
-              <a:t> balanced on a moving cart — LQR-stabilized</a:t>
-            </a:r>
-          </a:p>
-          <a:p>
-            <a:pPr>
-              <a:spcAft>
-                <a:spcPts val="800"/>
-              </a:spcAft>
-            </a:pPr>
-            <a:r>
-              <a:rPr sz="2200">
-                <a:solidFill>
-                  <a:srgbClr val="35C4E8"/>
-                </a:solidFill>
-                <a:latin typeface="Segoe UI"/>
-              </a:rPr>
-              <a:t>•  </a:t>
-            </a:r>
-            <a:r>
-              <a:rPr sz="2200" b="0">
-                <a:solidFill>
-                  <a:srgbClr val="D8E2EC"/>
-                </a:solidFill>
-                <a:latin typeface="Segoe UI"/>
-              </a:rPr>
-              <a:t>Built from the same components, tags and registry you just saw</a:t>
-            </a:r>
-          </a:p>
-          <a:p>
-            <a:pPr>
-              <a:spcAft>
-                <a:spcPts val="800"/>
-              </a:spcAft>
-            </a:pPr>
-            <a:r>
-              <a:rPr sz="2200">
-                <a:solidFill>
-                  <a:srgbClr val="35C4E8"/>
-                </a:solidFill>
-                <a:latin typeface="Segoe UI"/>
-              </a:rPr>
-              <a:t>•  </a:t>
-            </a:r>
-            <a:r>
-              <a:rPr sz="2200" b="0">
-                <a:solidFill>
-                  <a:srgbClr val="D8E2EC"/>
-                </a:solidFill>
-                <a:latin typeface="Segoe UI"/>
-              </a:rPr>
-              <a:t>Linearized with </a:t>
-            </a:r>
-            <a:r>
-              <a:rPr sz="2200" b="0">
-                <a:solidFill>
-                  <a:srgbClr val="35C4E8"/>
-                </a:solidFill>
-                <a:latin typeface="Segoe UI"/>
-              </a:rPr>
-              <a:t>Dual&lt;double, N&gt;</a:t>
-            </a:r>
-            <a:r>
-              <a:rPr sz="2200" b="0">
-                <a:solidFill>
-                  <a:srgbClr val="D8E2EC"/>
-                </a:solidFill>
-                <a:latin typeface="Segoe UI"/>
-              </a:rPr>
-              <a:t> — the autodiff Jacobian from two slides ago</a:t>
-            </a:r>
-          </a:p>
-          <a:p>
-            <a:pPr>
-              <a:spcAft>
-                <a:spcPts val="800"/>
-              </a:spcAft>
-            </a:pPr>
-            <a:r>
-              <a:rPr sz="2200">
-                <a:solidFill>
-                  <a:srgbClr val="35C4E8"/>
-                </a:solidFill>
-                <a:latin typeface="Segoe UI"/>
-              </a:rPr>
-              <a:t>•  </a:t>
-            </a:r>
-            <a:r>
-              <a:rPr sz="2200" b="0">
-                <a:solidFill>
-                  <a:srgbClr val="D8E2EC"/>
-                </a:solidFill>
-                <a:latin typeface="Segoe UI"/>
-              </a:rPr>
-              <a:t>Same C++20, compiled to WebAssembly, running in your browser right now:</a:t>
-            </a:r>
-          </a:p>
-          <a:p>
-            <a:pPr>
-              <a:spcAft>
-                <a:spcPts val="800"/>
-              </a:spcAft>
-            </a:pPr>
-            <a:r>
-              <a:rPr sz="2200" b="1">
-                <a:solidFill>
-                  <a:srgbClr val="35C4E8"/>
-                </a:solidFill>
-                <a:latin typeface="Segoe UI"/>
-              </a:rPr>
-              <a:t>jedrzejmichalczyk.github.io/sopot</a:t>
-            </a:r>
-          </a:p>
-        </p:txBody>
-      </p:sp>
-      <p:sp>
-        <p:nvSpPr>
-          <p:cNvPr id="5" name="Rounded Rectangle 4"/>
-          <p:cNvSpPr/>
-          <p:nvPr/>
-        </p:nvSpPr>
-        <p:spPr>
-          <a:xfrm>
-            <a:off x="4023360" y="4846320"/>
-            <a:ext cx="4114800" cy="1005840"/>
+            <a:off x="548640" y="1463040"/>
+            <a:ext cx="11338560" cy="3520440"/>
           </a:xfrm>
           <a:prstGeom prst="roundRect">
             <a:avLst>
@@ -28469,7 +29578,7 @@
             </a:avLst>
           </a:prstGeom>
           <a:solidFill>
-            <a:srgbClr val="F2C744"/>
+            <a:srgbClr val="081626"/>
           </a:solidFill>
           <a:ln w="12700">
             <a:solidFill>
@@ -28497,15 +29606,6 @@
           <a:lstStyle/>
           <a:p>
             <a:pPr algn="ctr"/>
-            <a:r>
-              <a:rPr sz="2600" b="1">
-                <a:solidFill>
-                  <a:srgbClr val="0B1F33"/>
-                </a:solidFill>
-                <a:latin typeface="Segoe UI"/>
-              </a:rPr>
-              <a:t>▶  LIVE DEMO</a:t>
-            </a:r>
           </a:p>
         </p:txBody>
       </p:sp>
@@ -28573,7 +29673,1566 @@
                 </a:solidFill>
                 <a:latin typeface="Segoe UI"/>
               </a:rPr>
-              <a:t>40</a:t>
+              <a:t>39</a:t>
+            </a:r>
+          </a:p>
+        </p:txBody>
+      </p:sp>
+      <p:sp>
+        <p:nvSpPr>
+          <p:cNvPr id="8" name="zarchan tail"/>
+          <p:cNvSpPr txBox="1"/>
+          <p:nvPr/>
+        </p:nvSpPr>
+        <p:spPr>
+          <a:xfrm>
+            <a:off x="777240" y="1600200"/>
+            <a:ext cx="10881360" cy="3319272"/>
+          </a:xfrm>
+          <a:prstGeom prst="rect">
+            <a:avLst/>
+          </a:prstGeom>
+          <a:noFill/>
+        </p:spPr>
+        <p:txBody>
+          <a:bodyPr wrap="none">
+            <a:spAutoFit/>
+          </a:bodyPr>
+          <a:lstStyle/>
+          <a:p>
+            <a:pPr>
+              <a:spcAft>
+                <a:spcPts val="100"/>
+              </a:spcAft>
+            </a:pPr>
+            <a:r>
+              <a:rPr sz="1600">
+                <a:solidFill>
+                  <a:srgbClr val="D4D4D4"/>
+                </a:solidFill>
+                <a:latin typeface="Consolas"/>
+              </a:rPr>
+              <a:t>    </a:t>
+            </a:r>
+            <a:r>
+              <a:rPr sz="1600">
+                <a:solidFill>
+                  <a:srgbClr val="569CD6"/>
+                </a:solidFill>
+                <a:latin typeface="Consolas"/>
+              </a:rPr>
+              <a:t>if</a:t>
+            </a:r>
+            <a:r>
+              <a:rPr sz="1600">
+                <a:solidFill>
+                  <a:srgbClr val="D4D4D4"/>
+                </a:solidFill>
+                <a:latin typeface="Consolas"/>
+              </a:rPr>
+              <a:t> </a:t>
+            </a:r>
+            <a:r>
+              <a:rPr sz="1600">
+                <a:solidFill>
+                  <a:srgbClr val="D4D4D4"/>
+                </a:solidFill>
+                <a:latin typeface="Consolas"/>
+              </a:rPr>
+              <a:t>S</a:t>
+            </a:r>
+            <a:r>
+              <a:rPr sz="1600">
+                <a:solidFill>
+                  <a:srgbClr val="D4D4D4"/>
+                </a:solidFill>
+                <a:latin typeface="Consolas"/>
+              </a:rPr>
+              <a:t>&gt;=</a:t>
+            </a:r>
+            <a:r>
+              <a:rPr sz="1600">
+                <a:solidFill>
+                  <a:srgbClr val="B5CEA8"/>
+                </a:solidFill>
+                <a:latin typeface="Consolas"/>
+              </a:rPr>
+              <a:t>9.99999</a:t>
+            </a:r>
+          </a:p>
+          <a:p>
+            <a:pPr>
+              <a:spcAft>
+                <a:spcPts val="100"/>
+              </a:spcAft>
+            </a:pPr>
+            <a:r>
+              <a:rPr sz="1600">
+                <a:solidFill>
+                  <a:srgbClr val="D4D4D4"/>
+                </a:solidFill>
+                <a:latin typeface="Consolas"/>
+              </a:rPr>
+              <a:t>        </a:t>
+            </a:r>
+            <a:r>
+              <a:rPr sz="1600">
+                <a:solidFill>
+                  <a:srgbClr val="D4D4D4"/>
+                </a:solidFill>
+                <a:latin typeface="Consolas"/>
+              </a:rPr>
+              <a:t>R</a:t>
+            </a:r>
+            <a:r>
+              <a:rPr sz="1600">
+                <a:solidFill>
+                  <a:srgbClr val="D4D4D4"/>
+                </a:solidFill>
+                <a:latin typeface="Consolas"/>
+              </a:rPr>
+              <a:t>=</a:t>
+            </a:r>
+            <a:r>
+              <a:rPr sz="1600">
+                <a:solidFill>
+                  <a:srgbClr val="4EC9B0"/>
+                </a:solidFill>
+                <a:latin typeface="Consolas"/>
+              </a:rPr>
+              <a:t>sqrt</a:t>
+            </a:r>
+            <a:r>
+              <a:rPr sz="1600">
+                <a:solidFill>
+                  <a:srgbClr val="D4D4D4"/>
+                </a:solidFill>
+                <a:latin typeface="Consolas"/>
+              </a:rPr>
+              <a:t>(</a:t>
+            </a:r>
+            <a:r>
+              <a:rPr sz="1600">
+                <a:solidFill>
+                  <a:srgbClr val="D4D4D4"/>
+                </a:solidFill>
+                <a:latin typeface="Consolas"/>
+              </a:rPr>
+              <a:t>X</a:t>
+            </a:r>
+            <a:r>
+              <a:rPr sz="1600">
+                <a:solidFill>
+                  <a:srgbClr val="D4D4D4"/>
+                </a:solidFill>
+                <a:latin typeface="Consolas"/>
+              </a:rPr>
+              <a:t>^</a:t>
+            </a:r>
+            <a:r>
+              <a:rPr sz="1600">
+                <a:solidFill>
+                  <a:srgbClr val="B5CEA8"/>
+                </a:solidFill>
+                <a:latin typeface="Consolas"/>
+              </a:rPr>
+              <a:t>2</a:t>
+            </a:r>
+            <a:r>
+              <a:rPr sz="1600">
+                <a:solidFill>
+                  <a:srgbClr val="D4D4D4"/>
+                </a:solidFill>
+                <a:latin typeface="Consolas"/>
+              </a:rPr>
+              <a:t>+</a:t>
+            </a:r>
+            <a:r>
+              <a:rPr sz="1600">
+                <a:solidFill>
+                  <a:srgbClr val="D4D4D4"/>
+                </a:solidFill>
+                <a:latin typeface="Consolas"/>
+              </a:rPr>
+              <a:t>Y</a:t>
+            </a:r>
+            <a:r>
+              <a:rPr sz="1600">
+                <a:solidFill>
+                  <a:srgbClr val="D4D4D4"/>
+                </a:solidFill>
+                <a:latin typeface="Consolas"/>
+              </a:rPr>
+              <a:t>^</a:t>
+            </a:r>
+            <a:r>
+              <a:rPr sz="1600">
+                <a:solidFill>
+                  <a:srgbClr val="B5CEA8"/>
+                </a:solidFill>
+                <a:latin typeface="Consolas"/>
+              </a:rPr>
+              <a:t>2</a:t>
+            </a:r>
+            <a:r>
+              <a:rPr sz="1600">
+                <a:solidFill>
+                  <a:srgbClr val="D4D4D4"/>
+                </a:solidFill>
+                <a:latin typeface="Consolas"/>
+              </a:rPr>
+              <a:t>)</a:t>
+            </a:r>
+            <a:r>
+              <a:rPr sz="1600">
+                <a:solidFill>
+                  <a:srgbClr val="D4D4D4"/>
+                </a:solidFill>
+                <a:latin typeface="Consolas"/>
+              </a:rPr>
+              <a:t>;</a:t>
+            </a:r>
+            <a:r>
+              <a:rPr sz="1600">
+                <a:solidFill>
+                  <a:srgbClr val="D4D4D4"/>
+                </a:solidFill>
+                <a:latin typeface="Consolas"/>
+              </a:rPr>
+              <a:t>   </a:t>
+            </a:r>
+            <a:r>
+              <a:rPr sz="1600">
+                <a:solidFill>
+                  <a:srgbClr val="D4D4D4"/>
+                </a:solidFill>
+                <a:latin typeface="Consolas"/>
+              </a:rPr>
+              <a:t>RF</a:t>
+            </a:r>
+            <a:r>
+              <a:rPr sz="1600">
+                <a:solidFill>
+                  <a:srgbClr val="D4D4D4"/>
+                </a:solidFill>
+                <a:latin typeface="Consolas"/>
+              </a:rPr>
+              <a:t>=</a:t>
+            </a:r>
+            <a:r>
+              <a:rPr sz="1600">
+                <a:solidFill>
+                  <a:srgbClr val="4EC9B0"/>
+                </a:solidFill>
+                <a:latin typeface="Consolas"/>
+              </a:rPr>
+              <a:t>sqrt</a:t>
+            </a:r>
+            <a:r>
+              <a:rPr sz="1600">
+                <a:solidFill>
+                  <a:srgbClr val="D4D4D4"/>
+                </a:solidFill>
+                <a:latin typeface="Consolas"/>
+              </a:rPr>
+              <a:t>(</a:t>
+            </a:r>
+            <a:r>
+              <a:rPr sz="1600">
+                <a:solidFill>
+                  <a:srgbClr val="D4D4D4"/>
+                </a:solidFill>
+                <a:latin typeface="Consolas"/>
+              </a:rPr>
+              <a:t>XFIRST</a:t>
+            </a:r>
+            <a:r>
+              <a:rPr sz="1600">
+                <a:solidFill>
+                  <a:srgbClr val="D4D4D4"/>
+                </a:solidFill>
+                <a:latin typeface="Consolas"/>
+              </a:rPr>
+              <a:t>^</a:t>
+            </a:r>
+            <a:r>
+              <a:rPr sz="1600">
+                <a:solidFill>
+                  <a:srgbClr val="B5CEA8"/>
+                </a:solidFill>
+                <a:latin typeface="Consolas"/>
+              </a:rPr>
+              <a:t>2</a:t>
+            </a:r>
+            <a:r>
+              <a:rPr sz="1600">
+                <a:solidFill>
+                  <a:srgbClr val="D4D4D4"/>
+                </a:solidFill>
+                <a:latin typeface="Consolas"/>
+              </a:rPr>
+              <a:t>+</a:t>
+            </a:r>
+            <a:r>
+              <a:rPr sz="1600">
+                <a:solidFill>
+                  <a:srgbClr val="D4D4D4"/>
+                </a:solidFill>
+                <a:latin typeface="Consolas"/>
+              </a:rPr>
+              <a:t>YFIRST</a:t>
+            </a:r>
+            <a:r>
+              <a:rPr sz="1600">
+                <a:solidFill>
+                  <a:srgbClr val="D4D4D4"/>
+                </a:solidFill>
+                <a:latin typeface="Consolas"/>
+              </a:rPr>
+              <a:t>^</a:t>
+            </a:r>
+            <a:r>
+              <a:rPr sz="1600">
+                <a:solidFill>
+                  <a:srgbClr val="B5CEA8"/>
+                </a:solidFill>
+                <a:latin typeface="Consolas"/>
+              </a:rPr>
+              <a:t>2</a:t>
+            </a:r>
+            <a:r>
+              <a:rPr sz="1600">
+                <a:solidFill>
+                  <a:srgbClr val="D4D4D4"/>
+                </a:solidFill>
+                <a:latin typeface="Consolas"/>
+              </a:rPr>
+              <a:t>)</a:t>
+            </a:r>
+            <a:r>
+              <a:rPr sz="1600">
+                <a:solidFill>
+                  <a:srgbClr val="D4D4D4"/>
+                </a:solidFill>
+                <a:latin typeface="Consolas"/>
+              </a:rPr>
+              <a:t>;</a:t>
+            </a:r>
+          </a:p>
+          <a:p>
+            <a:pPr>
+              <a:spcAft>
+                <a:spcPts val="100"/>
+              </a:spcAft>
+            </a:pPr>
+            <a:r>
+              <a:rPr sz="1600">
+                <a:solidFill>
+                  <a:srgbClr val="D4D4D4"/>
+                </a:solidFill>
+                <a:latin typeface="Consolas"/>
+              </a:rPr>
+              <a:t>        </a:t>
+            </a:r>
+            <a:r>
+              <a:rPr sz="1600">
+                <a:solidFill>
+                  <a:srgbClr val="D4D4D4"/>
+                </a:solidFill>
+                <a:latin typeface="Consolas"/>
+              </a:rPr>
+              <a:t>BETA</a:t>
+            </a:r>
+            <a:r>
+              <a:rPr sz="1600">
+                <a:solidFill>
+                  <a:srgbClr val="D4D4D4"/>
+                </a:solidFill>
+                <a:latin typeface="Consolas"/>
+              </a:rPr>
+              <a:t>=</a:t>
+            </a:r>
+            <a:r>
+              <a:rPr sz="1600">
+                <a:solidFill>
+                  <a:srgbClr val="4EC9B0"/>
+                </a:solidFill>
+                <a:latin typeface="Consolas"/>
+              </a:rPr>
+              <a:t>acos</a:t>
+            </a:r>
+            <a:r>
+              <a:rPr sz="1600">
+                <a:solidFill>
+                  <a:srgbClr val="D4D4D4"/>
+                </a:solidFill>
+                <a:latin typeface="Consolas"/>
+              </a:rPr>
+              <a:t>(</a:t>
+            </a:r>
+            <a:r>
+              <a:rPr sz="1600">
+                <a:solidFill>
+                  <a:srgbClr val="D4D4D4"/>
+                </a:solidFill>
+                <a:latin typeface="Consolas"/>
+              </a:rPr>
+              <a:t>(</a:t>
+            </a:r>
+            <a:r>
+              <a:rPr sz="1600">
+                <a:solidFill>
+                  <a:srgbClr val="D4D4D4"/>
+                </a:solidFill>
+                <a:latin typeface="Consolas"/>
+              </a:rPr>
+              <a:t>X</a:t>
+            </a:r>
+            <a:r>
+              <a:rPr sz="1600">
+                <a:solidFill>
+                  <a:srgbClr val="D4D4D4"/>
+                </a:solidFill>
+                <a:latin typeface="Consolas"/>
+              </a:rPr>
+              <a:t>*</a:t>
+            </a:r>
+            <a:r>
+              <a:rPr sz="1600">
+                <a:solidFill>
+                  <a:srgbClr val="D4D4D4"/>
+                </a:solidFill>
+                <a:latin typeface="Consolas"/>
+              </a:rPr>
+              <a:t>XFIRST</a:t>
+            </a:r>
+            <a:r>
+              <a:rPr sz="1600">
+                <a:solidFill>
+                  <a:srgbClr val="D4D4D4"/>
+                </a:solidFill>
+                <a:latin typeface="Consolas"/>
+              </a:rPr>
+              <a:t>+</a:t>
+            </a:r>
+            <a:r>
+              <a:rPr sz="1600">
+                <a:solidFill>
+                  <a:srgbClr val="D4D4D4"/>
+                </a:solidFill>
+                <a:latin typeface="Consolas"/>
+              </a:rPr>
+              <a:t>Y</a:t>
+            </a:r>
+            <a:r>
+              <a:rPr sz="1600">
+                <a:solidFill>
+                  <a:srgbClr val="D4D4D4"/>
+                </a:solidFill>
+                <a:latin typeface="Consolas"/>
+              </a:rPr>
+              <a:t>*</a:t>
+            </a:r>
+            <a:r>
+              <a:rPr sz="1600">
+                <a:solidFill>
+                  <a:srgbClr val="D4D4D4"/>
+                </a:solidFill>
+                <a:latin typeface="Consolas"/>
+              </a:rPr>
+              <a:t>YFIRST</a:t>
+            </a:r>
+            <a:r>
+              <a:rPr sz="1600">
+                <a:solidFill>
+                  <a:srgbClr val="D4D4D4"/>
+                </a:solidFill>
+                <a:latin typeface="Consolas"/>
+              </a:rPr>
+              <a:t>)</a:t>
+            </a:r>
+            <a:r>
+              <a:rPr sz="1600">
+                <a:solidFill>
+                  <a:srgbClr val="D4D4D4"/>
+                </a:solidFill>
+                <a:latin typeface="Consolas"/>
+              </a:rPr>
+              <a:t>/</a:t>
+            </a:r>
+            <a:r>
+              <a:rPr sz="1600">
+                <a:solidFill>
+                  <a:srgbClr val="D4D4D4"/>
+                </a:solidFill>
+                <a:latin typeface="Consolas"/>
+              </a:rPr>
+              <a:t>(</a:t>
+            </a:r>
+            <a:r>
+              <a:rPr sz="1600">
+                <a:solidFill>
+                  <a:srgbClr val="D4D4D4"/>
+                </a:solidFill>
+                <a:latin typeface="Consolas"/>
+              </a:rPr>
+              <a:t>R</a:t>
+            </a:r>
+            <a:r>
+              <a:rPr sz="1600">
+                <a:solidFill>
+                  <a:srgbClr val="D4D4D4"/>
+                </a:solidFill>
+                <a:latin typeface="Consolas"/>
+              </a:rPr>
+              <a:t>*</a:t>
+            </a:r>
+            <a:r>
+              <a:rPr sz="1600">
+                <a:solidFill>
+                  <a:srgbClr val="D4D4D4"/>
+                </a:solidFill>
+                <a:latin typeface="Consolas"/>
+              </a:rPr>
+              <a:t>RF</a:t>
+            </a:r>
+            <a:r>
+              <a:rPr sz="1600">
+                <a:solidFill>
+                  <a:srgbClr val="D4D4D4"/>
+                </a:solidFill>
+                <a:latin typeface="Consolas"/>
+              </a:rPr>
+              <a:t>)</a:t>
+            </a:r>
+            <a:r>
+              <a:rPr sz="1600">
+                <a:solidFill>
+                  <a:srgbClr val="D4D4D4"/>
+                </a:solidFill>
+                <a:latin typeface="Consolas"/>
+              </a:rPr>
+              <a:t>)</a:t>
+            </a:r>
+            <a:r>
+              <a:rPr sz="1600">
+                <a:solidFill>
+                  <a:srgbClr val="D4D4D4"/>
+                </a:solidFill>
+                <a:latin typeface="Consolas"/>
+              </a:rPr>
+              <a:t>;</a:t>
+            </a:r>
+          </a:p>
+          <a:p>
+            <a:pPr>
+              <a:spcAft>
+                <a:spcPts val="100"/>
+              </a:spcAft>
+            </a:pPr>
+            <a:r>
+              <a:rPr sz="1600">
+                <a:solidFill>
+                  <a:srgbClr val="D4D4D4"/>
+                </a:solidFill>
+                <a:latin typeface="Consolas"/>
+              </a:rPr>
+              <a:t>        </a:t>
+            </a:r>
+            <a:r>
+              <a:rPr sz="1600">
+                <a:solidFill>
+                  <a:srgbClr val="D4D4D4"/>
+                </a:solidFill>
+                <a:latin typeface="Consolas"/>
+              </a:rPr>
+              <a:t>DISTNM</a:t>
+            </a:r>
+            <a:r>
+              <a:rPr sz="1600">
+                <a:solidFill>
+                  <a:srgbClr val="D4D4D4"/>
+                </a:solidFill>
+                <a:latin typeface="Consolas"/>
+              </a:rPr>
+              <a:t>=</a:t>
+            </a:r>
+            <a:r>
+              <a:rPr sz="1600">
+                <a:solidFill>
+                  <a:srgbClr val="D4D4D4"/>
+                </a:solidFill>
+                <a:latin typeface="Consolas"/>
+              </a:rPr>
+              <a:t>A</a:t>
+            </a:r>
+            <a:r>
+              <a:rPr sz="1600">
+                <a:solidFill>
+                  <a:srgbClr val="D4D4D4"/>
+                </a:solidFill>
+                <a:latin typeface="Consolas"/>
+              </a:rPr>
+              <a:t>*</a:t>
+            </a:r>
+            <a:r>
+              <a:rPr sz="1600">
+                <a:solidFill>
+                  <a:srgbClr val="D4D4D4"/>
+                </a:solidFill>
+                <a:latin typeface="Consolas"/>
+              </a:rPr>
+              <a:t>BETA</a:t>
+            </a:r>
+            <a:r>
+              <a:rPr sz="1600">
+                <a:solidFill>
+                  <a:srgbClr val="D4D4D4"/>
+                </a:solidFill>
+                <a:latin typeface="Consolas"/>
+              </a:rPr>
+              <a:t>/</a:t>
+            </a:r>
+            <a:r>
+              <a:rPr sz="1600">
+                <a:solidFill>
+                  <a:srgbClr val="B5CEA8"/>
+                </a:solidFill>
+                <a:latin typeface="Consolas"/>
+              </a:rPr>
+              <a:t>6076.</a:t>
+            </a:r>
+            <a:r>
+              <a:rPr sz="1600">
+                <a:solidFill>
+                  <a:srgbClr val="D4D4D4"/>
+                </a:solidFill>
+                <a:latin typeface="Consolas"/>
+              </a:rPr>
+              <a:t>;</a:t>
+            </a:r>
+            <a:r>
+              <a:rPr sz="1600">
+                <a:solidFill>
+                  <a:srgbClr val="D4D4D4"/>
+                </a:solidFill>
+                <a:latin typeface="Consolas"/>
+              </a:rPr>
+              <a:t>   </a:t>
+            </a:r>
+            <a:r>
+              <a:rPr sz="1600">
+                <a:solidFill>
+                  <a:srgbClr val="D4D4D4"/>
+                </a:solidFill>
+                <a:latin typeface="Consolas"/>
+              </a:rPr>
+              <a:t>ALTNM</a:t>
+            </a:r>
+            <a:r>
+              <a:rPr sz="1600">
+                <a:solidFill>
+                  <a:srgbClr val="D4D4D4"/>
+                </a:solidFill>
+                <a:latin typeface="Consolas"/>
+              </a:rPr>
+              <a:t>=</a:t>
+            </a:r>
+            <a:r>
+              <a:rPr sz="1600">
+                <a:solidFill>
+                  <a:srgbClr val="D4D4D4"/>
+                </a:solidFill>
+                <a:latin typeface="Consolas"/>
+              </a:rPr>
+              <a:t>(</a:t>
+            </a:r>
+            <a:r>
+              <a:rPr sz="1600">
+                <a:solidFill>
+                  <a:srgbClr val="4EC9B0"/>
+                </a:solidFill>
+                <a:latin typeface="Consolas"/>
+              </a:rPr>
+              <a:t>sqrt</a:t>
+            </a:r>
+            <a:r>
+              <a:rPr sz="1600">
+                <a:solidFill>
+                  <a:srgbClr val="D4D4D4"/>
+                </a:solidFill>
+                <a:latin typeface="Consolas"/>
+              </a:rPr>
+              <a:t>(</a:t>
+            </a:r>
+            <a:r>
+              <a:rPr sz="1600">
+                <a:solidFill>
+                  <a:srgbClr val="D4D4D4"/>
+                </a:solidFill>
+                <a:latin typeface="Consolas"/>
+              </a:rPr>
+              <a:t>X</a:t>
+            </a:r>
+            <a:r>
+              <a:rPr sz="1600">
+                <a:solidFill>
+                  <a:srgbClr val="D4D4D4"/>
+                </a:solidFill>
+                <a:latin typeface="Consolas"/>
+              </a:rPr>
+              <a:t>^</a:t>
+            </a:r>
+            <a:r>
+              <a:rPr sz="1600">
+                <a:solidFill>
+                  <a:srgbClr val="B5CEA8"/>
+                </a:solidFill>
+                <a:latin typeface="Consolas"/>
+              </a:rPr>
+              <a:t>2</a:t>
+            </a:r>
+            <a:r>
+              <a:rPr sz="1600">
+                <a:solidFill>
+                  <a:srgbClr val="D4D4D4"/>
+                </a:solidFill>
+                <a:latin typeface="Consolas"/>
+              </a:rPr>
+              <a:t>+</a:t>
+            </a:r>
+            <a:r>
+              <a:rPr sz="1600">
+                <a:solidFill>
+                  <a:srgbClr val="D4D4D4"/>
+                </a:solidFill>
+                <a:latin typeface="Consolas"/>
+              </a:rPr>
+              <a:t>Y</a:t>
+            </a:r>
+            <a:r>
+              <a:rPr sz="1600">
+                <a:solidFill>
+                  <a:srgbClr val="D4D4D4"/>
+                </a:solidFill>
+                <a:latin typeface="Consolas"/>
+              </a:rPr>
+              <a:t>^</a:t>
+            </a:r>
+            <a:r>
+              <a:rPr sz="1600">
+                <a:solidFill>
+                  <a:srgbClr val="B5CEA8"/>
+                </a:solidFill>
+                <a:latin typeface="Consolas"/>
+              </a:rPr>
+              <a:t>2</a:t>
+            </a:r>
+            <a:r>
+              <a:rPr sz="1600">
+                <a:solidFill>
+                  <a:srgbClr val="D4D4D4"/>
+                </a:solidFill>
+                <a:latin typeface="Consolas"/>
+              </a:rPr>
+              <a:t>)</a:t>
+            </a:r>
+            <a:r>
+              <a:rPr sz="1600">
+                <a:solidFill>
+                  <a:srgbClr val="D4D4D4"/>
+                </a:solidFill>
+                <a:latin typeface="Consolas"/>
+              </a:rPr>
+              <a:t>-</a:t>
+            </a:r>
+            <a:r>
+              <a:rPr sz="1600">
+                <a:solidFill>
+                  <a:srgbClr val="D4D4D4"/>
+                </a:solidFill>
+                <a:latin typeface="Consolas"/>
+              </a:rPr>
+              <a:t>A</a:t>
+            </a:r>
+            <a:r>
+              <a:rPr sz="1600">
+                <a:solidFill>
+                  <a:srgbClr val="D4D4D4"/>
+                </a:solidFill>
+                <a:latin typeface="Consolas"/>
+              </a:rPr>
+              <a:t>)</a:t>
+            </a:r>
+            <a:r>
+              <a:rPr sz="1600">
+                <a:solidFill>
+                  <a:srgbClr val="D4D4D4"/>
+                </a:solidFill>
+                <a:latin typeface="Consolas"/>
+              </a:rPr>
+              <a:t>/</a:t>
+            </a:r>
+            <a:r>
+              <a:rPr sz="1600">
+                <a:solidFill>
+                  <a:srgbClr val="B5CEA8"/>
+                </a:solidFill>
+                <a:latin typeface="Consolas"/>
+              </a:rPr>
+              <a:t>6076.</a:t>
+            </a:r>
+            <a:r>
+              <a:rPr sz="1600">
+                <a:solidFill>
+                  <a:srgbClr val="D4D4D4"/>
+                </a:solidFill>
+                <a:latin typeface="Consolas"/>
+              </a:rPr>
+              <a:t>;</a:t>
+            </a:r>
+          </a:p>
+          <a:p>
+            <a:pPr>
+              <a:spcAft>
+                <a:spcPts val="100"/>
+              </a:spcAft>
+            </a:pPr>
+            <a:r>
+              <a:rPr sz="1600">
+                <a:solidFill>
+                  <a:srgbClr val="D4D4D4"/>
+                </a:solidFill>
+                <a:latin typeface="Consolas"/>
+              </a:rPr>
+              <a:t>        </a:t>
+            </a:r>
+            <a:r>
+              <a:rPr sz="1600">
+                <a:solidFill>
+                  <a:srgbClr val="4EC9B0"/>
+                </a:solidFill>
+                <a:latin typeface="Consolas"/>
+              </a:rPr>
+              <a:t>count</a:t>
+            </a:r>
+            <a:r>
+              <a:rPr sz="1600">
+                <a:solidFill>
+                  <a:srgbClr val="D4D4D4"/>
+                </a:solidFill>
+                <a:latin typeface="Consolas"/>
+              </a:rPr>
+              <a:t>=</a:t>
+            </a:r>
+            <a:r>
+              <a:rPr sz="1600">
+                <a:solidFill>
+                  <a:srgbClr val="4EC9B0"/>
+                </a:solidFill>
+                <a:latin typeface="Consolas"/>
+              </a:rPr>
+              <a:t>count</a:t>
+            </a:r>
+            <a:r>
+              <a:rPr sz="1600">
+                <a:solidFill>
+                  <a:srgbClr val="D4D4D4"/>
+                </a:solidFill>
+                <a:latin typeface="Consolas"/>
+              </a:rPr>
+              <a:t>+</a:t>
+            </a:r>
+            <a:r>
+              <a:rPr sz="1600">
+                <a:solidFill>
+                  <a:srgbClr val="B5CEA8"/>
+                </a:solidFill>
+                <a:latin typeface="Consolas"/>
+              </a:rPr>
+              <a:t>1</a:t>
+            </a:r>
+            <a:r>
+              <a:rPr sz="1600">
+                <a:solidFill>
+                  <a:srgbClr val="D4D4D4"/>
+                </a:solidFill>
+                <a:latin typeface="Consolas"/>
+              </a:rPr>
+              <a:t>;</a:t>
+            </a:r>
+          </a:p>
+          <a:p>
+            <a:pPr>
+              <a:spcAft>
+                <a:spcPts val="100"/>
+              </a:spcAft>
+            </a:pPr>
+            <a:r>
+              <a:rPr sz="1600">
+                <a:solidFill>
+                  <a:srgbClr val="D4D4D4"/>
+                </a:solidFill>
+                <a:latin typeface="Consolas"/>
+              </a:rPr>
+              <a:t>        </a:t>
+            </a:r>
+            <a:r>
+              <a:rPr sz="1600">
+                <a:solidFill>
+                  <a:srgbClr val="D4D4D4"/>
+                </a:solidFill>
+                <a:latin typeface="Consolas"/>
+              </a:rPr>
+              <a:t>ArrayT</a:t>
+            </a:r>
+            <a:r>
+              <a:rPr sz="1600">
+                <a:solidFill>
+                  <a:srgbClr val="D4D4D4"/>
+                </a:solidFill>
+                <a:latin typeface="Consolas"/>
+              </a:rPr>
+              <a:t>(</a:t>
+            </a:r>
+            <a:r>
+              <a:rPr sz="1600">
+                <a:solidFill>
+                  <a:srgbClr val="4EC9B0"/>
+                </a:solidFill>
+                <a:latin typeface="Consolas"/>
+              </a:rPr>
+              <a:t>count</a:t>
+            </a:r>
+            <a:r>
+              <a:rPr sz="1600">
+                <a:solidFill>
+                  <a:srgbClr val="D4D4D4"/>
+                </a:solidFill>
+                <a:latin typeface="Consolas"/>
+              </a:rPr>
+              <a:t>)</a:t>
+            </a:r>
+            <a:r>
+              <a:rPr sz="1600">
+                <a:solidFill>
+                  <a:srgbClr val="D4D4D4"/>
+                </a:solidFill>
+                <a:latin typeface="Consolas"/>
+              </a:rPr>
+              <a:t>=</a:t>
+            </a:r>
+            <a:r>
+              <a:rPr sz="1600">
+                <a:solidFill>
+                  <a:srgbClr val="D4D4D4"/>
+                </a:solidFill>
+                <a:latin typeface="Consolas"/>
+              </a:rPr>
+              <a:t>T</a:t>
+            </a:r>
+            <a:r>
+              <a:rPr sz="1600">
+                <a:solidFill>
+                  <a:srgbClr val="D4D4D4"/>
+                </a:solidFill>
+                <a:latin typeface="Consolas"/>
+              </a:rPr>
+              <a:t>;</a:t>
+            </a:r>
+            <a:r>
+              <a:rPr sz="1600">
+                <a:solidFill>
+                  <a:srgbClr val="D4D4D4"/>
+                </a:solidFill>
+                <a:latin typeface="Consolas"/>
+              </a:rPr>
+              <a:t>  </a:t>
+            </a:r>
+            <a:r>
+              <a:rPr sz="1600">
+                <a:solidFill>
+                  <a:srgbClr val="D4D4D4"/>
+                </a:solidFill>
+                <a:latin typeface="Consolas"/>
+              </a:rPr>
+              <a:t>ArrayDISTNM</a:t>
+            </a:r>
+            <a:r>
+              <a:rPr sz="1600">
+                <a:solidFill>
+                  <a:srgbClr val="D4D4D4"/>
+                </a:solidFill>
+                <a:latin typeface="Consolas"/>
+              </a:rPr>
+              <a:t>(</a:t>
+            </a:r>
+            <a:r>
+              <a:rPr sz="1600">
+                <a:solidFill>
+                  <a:srgbClr val="4EC9B0"/>
+                </a:solidFill>
+                <a:latin typeface="Consolas"/>
+              </a:rPr>
+              <a:t>count</a:t>
+            </a:r>
+            <a:r>
+              <a:rPr sz="1600">
+                <a:solidFill>
+                  <a:srgbClr val="D4D4D4"/>
+                </a:solidFill>
+                <a:latin typeface="Consolas"/>
+              </a:rPr>
+              <a:t>)</a:t>
+            </a:r>
+            <a:r>
+              <a:rPr sz="1600">
+                <a:solidFill>
+                  <a:srgbClr val="D4D4D4"/>
+                </a:solidFill>
+                <a:latin typeface="Consolas"/>
+              </a:rPr>
+              <a:t>=</a:t>
+            </a:r>
+            <a:r>
+              <a:rPr sz="1600">
+                <a:solidFill>
+                  <a:srgbClr val="D4D4D4"/>
+                </a:solidFill>
+                <a:latin typeface="Consolas"/>
+              </a:rPr>
+              <a:t>DISTNM</a:t>
+            </a:r>
+            <a:r>
+              <a:rPr sz="1600">
+                <a:solidFill>
+                  <a:srgbClr val="D4D4D4"/>
+                </a:solidFill>
+                <a:latin typeface="Consolas"/>
+              </a:rPr>
+              <a:t>;</a:t>
+            </a:r>
+            <a:r>
+              <a:rPr sz="1600">
+                <a:solidFill>
+                  <a:srgbClr val="D4D4D4"/>
+                </a:solidFill>
+                <a:latin typeface="Consolas"/>
+              </a:rPr>
+              <a:t>  </a:t>
+            </a:r>
+            <a:r>
+              <a:rPr sz="1600">
+                <a:solidFill>
+                  <a:srgbClr val="D4D4D4"/>
+                </a:solidFill>
+                <a:latin typeface="Consolas"/>
+              </a:rPr>
+              <a:t>ArrayALTNM</a:t>
+            </a:r>
+            <a:r>
+              <a:rPr sz="1600">
+                <a:solidFill>
+                  <a:srgbClr val="D4D4D4"/>
+                </a:solidFill>
+                <a:latin typeface="Consolas"/>
+              </a:rPr>
+              <a:t>(</a:t>
+            </a:r>
+            <a:r>
+              <a:rPr sz="1600">
+                <a:solidFill>
+                  <a:srgbClr val="4EC9B0"/>
+                </a:solidFill>
+                <a:latin typeface="Consolas"/>
+              </a:rPr>
+              <a:t>count</a:t>
+            </a:r>
+            <a:r>
+              <a:rPr sz="1600">
+                <a:solidFill>
+                  <a:srgbClr val="D4D4D4"/>
+                </a:solidFill>
+                <a:latin typeface="Consolas"/>
+              </a:rPr>
+              <a:t>)</a:t>
+            </a:r>
+            <a:r>
+              <a:rPr sz="1600">
+                <a:solidFill>
+                  <a:srgbClr val="D4D4D4"/>
+                </a:solidFill>
+                <a:latin typeface="Consolas"/>
+              </a:rPr>
+              <a:t>=</a:t>
+            </a:r>
+            <a:r>
+              <a:rPr sz="1600">
+                <a:solidFill>
+                  <a:srgbClr val="D4D4D4"/>
+                </a:solidFill>
+                <a:latin typeface="Consolas"/>
+              </a:rPr>
+              <a:t>ALTNM</a:t>
+            </a:r>
+            <a:r>
+              <a:rPr sz="1600">
+                <a:solidFill>
+                  <a:srgbClr val="D4D4D4"/>
+                </a:solidFill>
+                <a:latin typeface="Consolas"/>
+              </a:rPr>
+              <a:t>;</a:t>
+            </a:r>
+          </a:p>
+          <a:p>
+            <a:pPr>
+              <a:spcAft>
+                <a:spcPts val="100"/>
+              </a:spcAft>
+            </a:pPr>
+            <a:r>
+              <a:rPr sz="1600">
+                <a:solidFill>
+                  <a:srgbClr val="D4D4D4"/>
+                </a:solidFill>
+                <a:latin typeface="Consolas"/>
+              </a:rPr>
+              <a:t>    </a:t>
+            </a:r>
+            <a:r>
+              <a:rPr sz="1600">
+                <a:solidFill>
+                  <a:srgbClr val="569CD6"/>
+                </a:solidFill>
+                <a:latin typeface="Consolas"/>
+              </a:rPr>
+              <a:t>end</a:t>
+            </a:r>
+          </a:p>
+          <a:p>
+            <a:pPr>
+              <a:spcAft>
+                <a:spcPts val="100"/>
+              </a:spcAft>
+            </a:pPr>
+            <a:r>
+              <a:rPr sz="1600">
+                <a:solidFill>
+                  <a:srgbClr val="569CD6"/>
+                </a:solidFill>
+                <a:latin typeface="Consolas"/>
+              </a:rPr>
+              <a:t>end</a:t>
+            </a:r>
+          </a:p>
+          <a:p>
+            <a:pPr>
+              <a:spcAft>
+                <a:spcPts val="100"/>
+              </a:spcAft>
+            </a:pPr>
+            <a:r>
+              <a:rPr sz="1600">
+                <a:solidFill>
+                  <a:srgbClr val="4EC9B0"/>
+                </a:solidFill>
+                <a:latin typeface="Consolas"/>
+              </a:rPr>
+              <a:t>figure</a:t>
+            </a:r>
+          </a:p>
+          <a:p>
+            <a:pPr>
+              <a:spcAft>
+                <a:spcPts val="100"/>
+              </a:spcAft>
+            </a:pPr>
+            <a:r>
+              <a:rPr sz="1600">
+                <a:solidFill>
+                  <a:srgbClr val="4EC9B0"/>
+                </a:solidFill>
+                <a:latin typeface="Consolas"/>
+              </a:rPr>
+              <a:t>plot</a:t>
+            </a:r>
+            <a:r>
+              <a:rPr sz="1600">
+                <a:solidFill>
+                  <a:srgbClr val="D4D4D4"/>
+                </a:solidFill>
+                <a:latin typeface="Consolas"/>
+              </a:rPr>
+              <a:t>(</a:t>
+            </a:r>
+            <a:r>
+              <a:rPr sz="1600">
+                <a:solidFill>
+                  <a:srgbClr val="D4D4D4"/>
+                </a:solidFill>
+                <a:latin typeface="Consolas"/>
+              </a:rPr>
+              <a:t>ArrayDISTNM</a:t>
+            </a:r>
+            <a:r>
+              <a:rPr sz="1600">
+                <a:solidFill>
+                  <a:srgbClr val="D4D4D4"/>
+                </a:solidFill>
+                <a:latin typeface="Consolas"/>
+              </a:rPr>
+              <a:t>,</a:t>
+            </a:r>
+            <a:r>
+              <a:rPr sz="1600">
+                <a:solidFill>
+                  <a:srgbClr val="D4D4D4"/>
+                </a:solidFill>
+                <a:latin typeface="Consolas"/>
+              </a:rPr>
+              <a:t>ArrayALTNM</a:t>
+            </a:r>
+            <a:r>
+              <a:rPr sz="1600">
+                <a:solidFill>
+                  <a:srgbClr val="D4D4D4"/>
+                </a:solidFill>
+                <a:latin typeface="Consolas"/>
+              </a:rPr>
+              <a:t>)</a:t>
+            </a:r>
+            <a:r>
+              <a:rPr sz="1600">
+                <a:solidFill>
+                  <a:srgbClr val="D4D4D4"/>
+                </a:solidFill>
+                <a:latin typeface="Consolas"/>
+              </a:rPr>
+              <a:t>,</a:t>
+            </a:r>
+            <a:r>
+              <a:rPr sz="1600">
+                <a:solidFill>
+                  <a:srgbClr val="4EC9B0"/>
+                </a:solidFill>
+                <a:latin typeface="Consolas"/>
+              </a:rPr>
+              <a:t>grid</a:t>
+            </a:r>
+          </a:p>
+          <a:p>
+            <a:pPr>
+              <a:spcAft>
+                <a:spcPts val="100"/>
+              </a:spcAft>
+            </a:pPr>
+            <a:r>
+              <a:rPr sz="1600">
+                <a:solidFill>
+                  <a:srgbClr val="4EC9B0"/>
+                </a:solidFill>
+                <a:latin typeface="Consolas"/>
+              </a:rPr>
+              <a:t>xlabel</a:t>
+            </a:r>
+            <a:r>
+              <a:rPr sz="1600">
+                <a:solidFill>
+                  <a:srgbClr val="D4D4D4"/>
+                </a:solidFill>
+                <a:latin typeface="Consolas"/>
+              </a:rPr>
+              <a:t>(</a:t>
+            </a:r>
+            <a:r>
+              <a:rPr sz="1600">
+                <a:solidFill>
+                  <a:srgbClr val="CE9178"/>
+                </a:solidFill>
+                <a:latin typeface="Consolas"/>
+              </a:rPr>
+              <a:t>'</a:t>
+            </a:r>
+            <a:r>
+              <a:rPr sz="1600">
+                <a:solidFill>
+                  <a:srgbClr val="CE9178"/>
+                </a:solidFill>
+                <a:latin typeface="Consolas"/>
+              </a:rPr>
+              <a:t>Downrange (Nmi)'</a:t>
+            </a:r>
+            <a:r>
+              <a:rPr sz="1600">
+                <a:solidFill>
+                  <a:srgbClr val="D4D4D4"/>
+                </a:solidFill>
+                <a:latin typeface="Consolas"/>
+              </a:rPr>
+              <a:t>)</a:t>
+            </a:r>
+            <a:r>
+              <a:rPr sz="1600">
+                <a:solidFill>
+                  <a:srgbClr val="D4D4D4"/>
+                </a:solidFill>
+                <a:latin typeface="Consolas"/>
+              </a:rPr>
+              <a:t>;</a:t>
+            </a:r>
+            <a:r>
+              <a:rPr sz="1600">
+                <a:solidFill>
+                  <a:srgbClr val="D4D4D4"/>
+                </a:solidFill>
+                <a:latin typeface="Consolas"/>
+              </a:rPr>
+              <a:t>   </a:t>
+            </a:r>
+            <a:r>
+              <a:rPr sz="1600">
+                <a:solidFill>
+                  <a:srgbClr val="4EC9B0"/>
+                </a:solidFill>
+                <a:latin typeface="Consolas"/>
+              </a:rPr>
+              <a:t>ylabel</a:t>
+            </a:r>
+            <a:r>
+              <a:rPr sz="1600">
+                <a:solidFill>
+                  <a:srgbClr val="D4D4D4"/>
+                </a:solidFill>
+                <a:latin typeface="Consolas"/>
+              </a:rPr>
+              <a:t>(</a:t>
+            </a:r>
+            <a:r>
+              <a:rPr sz="1600">
+                <a:solidFill>
+                  <a:srgbClr val="CE9178"/>
+                </a:solidFill>
+                <a:latin typeface="Consolas"/>
+              </a:rPr>
+              <a:t>'</a:t>
+            </a:r>
+            <a:r>
+              <a:rPr sz="1600">
+                <a:solidFill>
+                  <a:srgbClr val="CE9178"/>
+                </a:solidFill>
+                <a:latin typeface="Consolas"/>
+              </a:rPr>
+              <a:t>Altitude (Nmi)'</a:t>
+            </a:r>
+            <a:r>
+              <a:rPr sz="1600">
+                <a:solidFill>
+                  <a:srgbClr val="D4D4D4"/>
+                </a:solidFill>
+                <a:latin typeface="Consolas"/>
+              </a:rPr>
+              <a:t>)</a:t>
+            </a:r>
+            <a:r>
+              <a:rPr sz="1600">
+                <a:solidFill>
+                  <a:srgbClr val="D4D4D4"/>
+                </a:solidFill>
+                <a:latin typeface="Consolas"/>
+              </a:rPr>
+              <a:t>;</a:t>
+            </a:r>
+          </a:p>
+          <a:p>
+            <a:pPr>
+              <a:spcAft>
+                <a:spcPts val="100"/>
+              </a:spcAft>
+            </a:pPr>
+            <a:r>
+              <a:rPr sz="1600">
+                <a:solidFill>
+                  <a:srgbClr val="D4D4D4"/>
+                </a:solidFill>
+                <a:latin typeface="Consolas"/>
+              </a:rPr>
+              <a:t>save</a:t>
+            </a:r>
+            <a:r>
+              <a:rPr sz="1600">
+                <a:solidFill>
+                  <a:srgbClr val="D4D4D4"/>
+                </a:solidFill>
+                <a:latin typeface="Consolas"/>
+              </a:rPr>
+              <a:t> </a:t>
+            </a:r>
+            <a:r>
+              <a:rPr sz="1600">
+                <a:solidFill>
+                  <a:srgbClr val="CE9178"/>
+                </a:solidFill>
+                <a:latin typeface="Consolas"/>
+              </a:rPr>
+              <a:t>datfil</a:t>
+            </a:r>
+            <a:r>
+              <a:rPr sz="1600">
+                <a:solidFill>
+                  <a:srgbClr val="D4D4D4"/>
+                </a:solidFill>
+                <a:latin typeface="Consolas"/>
+              </a:rPr>
+              <a:t> </a:t>
+            </a:r>
+            <a:r>
+              <a:rPr sz="1600">
+                <a:solidFill>
+                  <a:srgbClr val="CE9178"/>
+                </a:solidFill>
+                <a:latin typeface="Consolas"/>
+              </a:rPr>
+              <a:t>output</a:t>
+            </a:r>
+            <a:r>
+              <a:rPr sz="1600">
+                <a:solidFill>
+                  <a:srgbClr val="D4D4D4"/>
+                </a:solidFill>
+                <a:latin typeface="Consolas"/>
+              </a:rPr>
+              <a:t> </a:t>
+            </a:r>
+            <a:r>
+              <a:rPr sz="1600">
+                <a:solidFill>
+                  <a:srgbClr val="D4D4D4"/>
+                </a:solidFill>
+                <a:latin typeface="Consolas"/>
+              </a:rPr>
+              <a:t>/</a:t>
+            </a:r>
+            <a:r>
+              <a:rPr sz="1600">
+                <a:solidFill>
+                  <a:srgbClr val="4EC9B0"/>
+                </a:solidFill>
+                <a:latin typeface="Consolas"/>
+              </a:rPr>
+              <a:t>ascii</a:t>
+            </a:r>
+          </a:p>
+          <a:p>
+            <a:pPr>
+              <a:spcAft>
+                <a:spcPts val="100"/>
+              </a:spcAft>
+            </a:pPr>
+            <a:r>
+              <a:rPr sz="1600">
+                <a:solidFill>
+                  <a:srgbClr val="4EC9B0"/>
+                </a:solidFill>
+                <a:latin typeface="Consolas"/>
+              </a:rPr>
+              <a:t>disp</a:t>
+            </a:r>
+            <a:r>
+              <a:rPr sz="1600">
+                <a:solidFill>
+                  <a:srgbClr val="D4D4D4"/>
+                </a:solidFill>
+                <a:latin typeface="Consolas"/>
+              </a:rPr>
+              <a:t> </a:t>
+            </a:r>
+            <a:r>
+              <a:rPr sz="1600">
+                <a:solidFill>
+                  <a:srgbClr val="CE9178"/>
+                </a:solidFill>
+                <a:latin typeface="Consolas"/>
+              </a:rPr>
+              <a:t>'</a:t>
+            </a:r>
+            <a:r>
+              <a:rPr sz="1600">
+                <a:solidFill>
+                  <a:srgbClr val="CE9178"/>
+                </a:solidFill>
+                <a:latin typeface="Consolas"/>
+              </a:rPr>
+              <a:t>simulation finished'</a:t>
+            </a:r>
+          </a:p>
+        </p:txBody>
+      </p:sp>
+      <p:sp>
+        <p:nvSpPr>
+          <p:cNvPr id="9" name="TextBox 8"/>
+          <p:cNvSpPr txBox="1"/>
+          <p:nvPr/>
+        </p:nvSpPr>
+        <p:spPr>
+          <a:xfrm>
+            <a:off x="777240" y="5093208"/>
+            <a:ext cx="10972800" cy="274320"/>
+          </a:xfrm>
+          <a:prstGeom prst="rect">
+            <a:avLst/>
+          </a:prstGeom>
+          <a:noFill/>
+        </p:spPr>
+        <p:txBody>
+          <a:bodyPr wrap="none">
+            <a:spAutoFit/>
+          </a:bodyPr>
+          <a:lstStyle/>
+          <a:p>
+            <a:r>
+              <a:rPr sz="1200" i="1">
+                <a:solidFill>
+                  <a:srgbClr val="8CA3B8"/>
+                </a:solidFill>
+                <a:latin typeface="Segoe UI"/>
+              </a:rPr>
+              <a:t>Zarchan, Tactical &amp; Strategic Missile Guidance, 6th ed. (MATLAB) — gravity-turn booster sim</a:t>
+            </a:r>
+          </a:p>
+        </p:txBody>
+      </p:sp>
+      <p:sp>
+        <p:nvSpPr>
+          <p:cNvPr id="10" name="TextBox 9"/>
+          <p:cNvSpPr txBox="1"/>
+          <p:nvPr/>
+        </p:nvSpPr>
+        <p:spPr>
+          <a:xfrm>
+            <a:off x="777240" y="5422392"/>
+            <a:ext cx="10972800" cy="457200"/>
+          </a:xfrm>
+          <a:prstGeom prst="rect">
+            <a:avLst/>
+          </a:prstGeom>
+          <a:noFill/>
+        </p:spPr>
+        <p:txBody>
+          <a:bodyPr wrap="none">
+            <a:spAutoFit/>
+          </a:bodyPr>
+          <a:lstStyle/>
+          <a:p>
+            <a:r>
+              <a:rPr sz="1900" i="1">
+                <a:solidFill>
+                  <a:srgbClr val="7EE08A"/>
+                </a:solidFill>
+                <a:latin typeface="Segoe UI"/>
+              </a:rPr>
+              <a:t>No boundary between simulation, analysis, and I/O — every concern in one scope.</a:t>
             </a:r>
           </a:p>
         </p:txBody>
@@ -29330,330 +31989,30 @@
           <a:chExt cx="0" cy="0"/>
         </a:xfrm>
       </p:grpSpPr>
-      <p:sp>
-        <p:nvSpPr>
-          <p:cNvPr id="2" name="TextBox 1"/>
-          <p:cNvSpPr txBox="1"/>
+      <p:pic>
+        <p:nvPicPr>
+          <p:cNvPr id="2" name="sleepy" descr="sleepy.jpg"/>
+          <p:cNvPicPr>
+            <a:picLocks noChangeAspect="1"/>
+          </p:cNvPicPr>
           <p:nvPr/>
-        </p:nvSpPr>
+        </p:nvPicPr>
+        <p:blipFill>
+          <a:blip r:embed="rId3"/>
+          <a:stretch>
+            <a:fillRect/>
+          </a:stretch>
+        </p:blipFill>
         <p:spPr>
           <a:xfrm>
-            <a:off x="502920" y="384048"/>
-            <a:ext cx="11155680" cy="292608"/>
+            <a:off x="3524097" y="0"/>
+            <a:ext cx="5143500" cy="6858000"/>
           </a:xfrm>
           <a:prstGeom prst="rect">
             <a:avLst/>
           </a:prstGeom>
-          <a:noFill/>
         </p:spPr>
-        <p:txBody>
-          <a:bodyPr wrap="none">
-            <a:spAutoFit/>
-          </a:bodyPr>
-          <a:lstStyle/>
-          <a:p>
-            <a:r>
-              <a:rPr sz="1300" b="1">
-                <a:solidFill>
-                  <a:srgbClr val="F2C744"/>
-                </a:solidFill>
-                <a:latin typeface="Segoe UI"/>
-              </a:rPr>
-              <a:t>IF YOU REMEMBER FOUR THINGS</a:t>
-            </a:r>
-          </a:p>
-        </p:txBody>
-      </p:sp>
-      <p:sp>
-        <p:nvSpPr>
-          <p:cNvPr id="3" name="TextBox 2"/>
-          <p:cNvSpPr txBox="1"/>
-          <p:nvPr/>
-        </p:nvSpPr>
-        <p:spPr>
-          <a:xfrm>
-            <a:off x="457200" y="694944"/>
-            <a:ext cx="11247120" cy="777240"/>
-          </a:xfrm>
-          <a:prstGeom prst="rect">
-            <a:avLst/>
-          </a:prstGeom>
-          <a:noFill/>
-        </p:spPr>
-        <p:txBody>
-          <a:bodyPr wrap="none">
-            <a:spAutoFit/>
-          </a:bodyPr>
-          <a:lstStyle/>
-          <a:p>
-            <a:r>
-              <a:rPr sz="3100" b="1">
-                <a:solidFill>
-                  <a:srgbClr val="FFFFFF"/>
-                </a:solidFill>
-                <a:latin typeface="Segoe UI"/>
-              </a:rPr>
-              <a:t>Takeaways</a:t>
-            </a:r>
-          </a:p>
-        </p:txBody>
-      </p:sp>
-      <p:sp>
-        <p:nvSpPr>
-          <p:cNvPr id="4" name="TextBox 3"/>
-          <p:cNvSpPr txBox="1"/>
-          <p:nvPr/>
-        </p:nvSpPr>
-        <p:spPr>
-          <a:xfrm>
-            <a:off x="548640" y="1828800"/>
-            <a:ext cx="11064240" cy="4572000"/>
-          </a:xfrm>
-          <a:prstGeom prst="rect">
-            <a:avLst/>
-          </a:prstGeom>
-          <a:noFill/>
-        </p:spPr>
-        <p:txBody>
-          <a:bodyPr wrap="square">
-            <a:spAutoFit/>
-          </a:bodyPr>
-          <a:lstStyle/>
-          <a:p>
-            <a:pPr>
-              <a:spcAft>
-                <a:spcPts val="800"/>
-              </a:spcAft>
-            </a:pPr>
-            <a:r>
-              <a:rPr sz="2300">
-                <a:solidFill>
-                  <a:srgbClr val="35C4E8"/>
-                </a:solidFill>
-                <a:latin typeface="Segoe UI"/>
-              </a:rPr>
-              <a:t>•  </a:t>
-            </a:r>
-            <a:r>
-              <a:rPr sz="2300" b="1">
-                <a:solidFill>
-                  <a:srgbClr val="F2C744"/>
-                </a:solidFill>
-                <a:latin typeface="Segoe UI"/>
-              </a:rPr>
-              <a:t>Separation of concerns is achievable at zero cost</a:t>
-            </a:r>
-            <a:r>
-              <a:rPr sz="2300" b="0">
-                <a:solidFill>
-                  <a:srgbClr val="D8E2EC"/>
-                </a:solidFill>
-                <a:latin typeface="Segoe UI"/>
-              </a:rPr>
-              <a:t> in C++20 — measured, not asserted</a:t>
-            </a:r>
-          </a:p>
-          <a:p>
-            <a:pPr>
-              <a:spcAft>
-                <a:spcPts val="800"/>
-              </a:spcAft>
-            </a:pPr>
-            <a:r>
-              <a:rPr sz="2300">
-                <a:solidFill>
-                  <a:srgbClr val="35C4E8"/>
-                </a:solidFill>
-                <a:latin typeface="Segoe UI"/>
-              </a:rPr>
-              <a:t>•  </a:t>
-            </a:r>
-            <a:r>
-              <a:rPr sz="2300" b="0">
-                <a:solidFill>
-                  <a:srgbClr val="D8E2EC"/>
-                </a:solidFill>
-                <a:latin typeface="Segoe UI"/>
-              </a:rPr>
-              <a:t>The recipe is small: </a:t>
-            </a:r>
-            <a:r>
-              <a:rPr sz="2300" b="1">
-                <a:solidFill>
-                  <a:srgbClr val="35C4E8"/>
-                </a:solidFill>
-                <a:latin typeface="Segoe UI"/>
-              </a:rPr>
-              <a:t>typed tags + overloaded compute() + a constexpr registry + concepts</a:t>
-            </a:r>
-          </a:p>
-          <a:p>
-            <a:pPr lvl="1">
-              <a:spcBef>
-                <a:spcPts val="0"/>
-              </a:spcBef>
-              <a:spcAft>
-                <a:spcPts val="800"/>
-              </a:spcAft>
-            </a:pPr>
-            <a:r>
-              <a:rPr sz="2100">
-                <a:solidFill>
-                  <a:srgbClr val="8CA3B8"/>
-                </a:solidFill>
-                <a:latin typeface="Segoe UI"/>
-              </a:rPr>
-              <a:t>–  </a:t>
-            </a:r>
-            <a:r>
-              <a:rPr sz="2100" b="0">
-                <a:solidFill>
-                  <a:srgbClr val="D8E2EC"/>
-                </a:solidFill>
-                <a:latin typeface="Segoe UI"/>
-              </a:rPr>
-              <a:t>no inheritance, no virtuals, no strings, no codegen</a:t>
-            </a:r>
-          </a:p>
-          <a:p>
-            <a:pPr>
-              <a:spcAft>
-                <a:spcPts val="800"/>
-              </a:spcAft>
-            </a:pPr>
-            <a:r>
-              <a:rPr sz="2300">
-                <a:solidFill>
-                  <a:srgbClr val="35C4E8"/>
-                </a:solidFill>
-                <a:latin typeface="Segoe UI"/>
-              </a:rPr>
-              <a:t>•  </a:t>
-            </a:r>
-            <a:r>
-              <a:rPr sz="2300" b="1">
-                <a:solidFill>
-                  <a:srgbClr val="FFFFFF"/>
-                </a:solidFill>
-                <a:latin typeface="Segoe UI"/>
-              </a:rPr>
-              <a:t>Prefer abstractions you can verify</a:t>
-            </a:r>
-            <a:r>
-              <a:rPr sz="2300" b="0">
-                <a:solidFill>
-                  <a:srgbClr val="D8E2EC"/>
-                </a:solidFill>
-                <a:latin typeface="Segoe UI"/>
-              </a:rPr>
-              <a:t> — conservation laws and disassembly are unit tests for architecture</a:t>
-            </a:r>
-          </a:p>
-          <a:p>
-            <a:pPr>
-              <a:spcAft>
-                <a:spcPts val="800"/>
-              </a:spcAft>
-            </a:pPr>
-            <a:r>
-              <a:rPr sz="2300">
-                <a:solidFill>
-                  <a:srgbClr val="35C4E8"/>
-                </a:solidFill>
-                <a:latin typeface="Segoe UI"/>
-              </a:rPr>
-              <a:t>•  </a:t>
-            </a:r>
-            <a:r>
-              <a:rPr sz="2300" b="1">
-                <a:solidFill>
-                  <a:srgbClr val="FFFFFF"/>
-                </a:solidFill>
-                <a:latin typeface="Segoe UI"/>
-              </a:rPr>
-              <a:t>Quality vs performance was the false tradeoff</a:t>
-            </a:r>
-            <a:r>
-              <a:rPr sz="2300" b="0">
-                <a:solidFill>
-                  <a:srgbClr val="D8E2EC"/>
-                </a:solidFill>
-                <a:latin typeface="Segoe UI"/>
-              </a:rPr>
-              <a:t> — modern C++ finally lets us refuse it</a:t>
-            </a:r>
-          </a:p>
-        </p:txBody>
-      </p:sp>
-      <p:sp>
-        <p:nvSpPr>
-          <p:cNvPr id="5" name="TextBox 4"/>
-          <p:cNvSpPr txBox="1"/>
-          <p:nvPr/>
-        </p:nvSpPr>
-        <p:spPr>
-          <a:xfrm>
-            <a:off x="411480" y="6446520"/>
-            <a:ext cx="10058400" cy="320040"/>
-          </a:xfrm>
-          <a:prstGeom prst="rect">
-            <a:avLst/>
-          </a:prstGeom>
-          <a:noFill/>
-        </p:spPr>
-        <p:txBody>
-          <a:bodyPr wrap="none">
-            <a:spAutoFit/>
-          </a:bodyPr>
-          <a:lstStyle/>
-          <a:p>
-            <a:r>
-              <a:rPr sz="1000">
-                <a:solidFill>
-                  <a:srgbClr val="8CA3B8"/>
-                </a:solidFill>
-                <a:latin typeface="Segoe UI"/>
-              </a:rPr>
-              <a:t>Separation of Concerns at Zero Cost — ACCU on Sea 2026</a:t>
-            </a:r>
-          </a:p>
-        </p:txBody>
-      </p:sp>
-      <p:sp>
-        <p:nvSpPr>
-          <p:cNvPr id="6" name="TextBox 5"/>
-          <p:cNvSpPr txBox="1"/>
-          <p:nvPr/>
-        </p:nvSpPr>
-        <p:spPr>
-          <a:xfrm>
-            <a:off x="11384280" y="6446520"/>
-            <a:ext cx="548640" cy="320040"/>
-          </a:xfrm>
-          <a:prstGeom prst="rect">
-            <a:avLst/>
-          </a:prstGeom>
-          <a:noFill/>
-        </p:spPr>
-        <p:txBody>
-          <a:bodyPr wrap="none">
-            <a:spAutoFit/>
-          </a:bodyPr>
-          <a:lstStyle/>
-          <a:p>
-            <a:pPr algn="r"/>
-            <a:r>
-              <a:rPr sz="1000">
-                <a:solidFill>
-                  <a:srgbClr val="8CA3B8"/>
-                </a:solidFill>
-                <a:latin typeface="Segoe UI"/>
-              </a:rPr>
-              <a:t>41</a:t>
-            </a:r>
-          </a:p>
-        </p:txBody>
-      </p:sp>
+      </p:pic>
     </p:spTree>
   </p:cSld>
   <p:clrMapOvr>
@@ -29695,8 +32054,8 @@
         </p:nvSpPr>
         <p:spPr>
           <a:xfrm>
-            <a:off x="822960" y="1463040"/>
-            <a:ext cx="10515600" cy="1371600"/>
+            <a:off x="502920" y="384048"/>
+            <a:ext cx="11155680" cy="292608"/>
           </a:xfrm>
           <a:prstGeom prst="rect">
             <a:avLst/>
@@ -29710,13 +32069,13 @@
           <a:lstStyle/>
           <a:p>
             <a:r>
-              <a:rPr sz="4800" b="1">
-                <a:solidFill>
-                  <a:srgbClr val="FFFFFF"/>
-                </a:solidFill>
-                <a:latin typeface="Segoe UI"/>
-              </a:rPr>
-              <a:t>Thank you!  Questions?</a:t>
+              <a:rPr sz="1300" b="1">
+                <a:solidFill>
+                  <a:srgbClr val="F2C744"/>
+                </a:solidFill>
+                <a:latin typeface="Segoe UI"/>
+              </a:rPr>
+              <a:t>IF YOU REMEMBER FOUR THINGS</a:t>
             </a:r>
           </a:p>
         </p:txBody>
@@ -29729,8 +32088,8 @@
         </p:nvSpPr>
         <p:spPr>
           <a:xfrm>
-            <a:off x="548640" y="3108960"/>
-            <a:ext cx="11064240" cy="1405513"/>
+            <a:off x="457200" y="694944"/>
+            <a:ext cx="11247120" cy="777240"/>
           </a:xfrm>
           <a:prstGeom prst="rect">
             <a:avLst/>
@@ -29738,6 +32097,40 @@
           <a:noFill/>
         </p:spPr>
         <p:txBody>
+          <a:bodyPr wrap="none">
+            <a:spAutoFit/>
+          </a:bodyPr>
+          <a:lstStyle/>
+          <a:p>
+            <a:r>
+              <a:rPr sz="3100" b="1">
+                <a:solidFill>
+                  <a:srgbClr val="FFFFFF"/>
+                </a:solidFill>
+                <a:latin typeface="Segoe UI"/>
+              </a:rPr>
+              <a:t>Takeaways</a:t>
+            </a:r>
+          </a:p>
+        </p:txBody>
+      </p:sp>
+      <p:sp>
+        <p:nvSpPr>
+          <p:cNvPr id="4" name="TextBox 3"/>
+          <p:cNvSpPr txBox="1"/>
+          <p:nvPr/>
+        </p:nvSpPr>
+        <p:spPr>
+          <a:xfrm>
+            <a:off x="548640" y="1828800"/>
+            <a:ext cx="11064240" cy="4572000"/>
+          </a:xfrm>
+          <a:prstGeom prst="rect">
+            <a:avLst/>
+          </a:prstGeom>
+          <a:noFill/>
+        </p:spPr>
+        <p:txBody>
           <a:bodyPr wrap="square">
             <a:spAutoFit/>
           </a:bodyPr>
@@ -29749,7 +32142,7 @@
               </a:spcAft>
             </a:pPr>
             <a:r>
-              <a:rPr sz="2400" dirty="0">
+              <a:rPr sz="2300">
                 <a:solidFill>
                   <a:srgbClr val="35C4E8"/>
                 </a:solidFill>
@@ -29758,56 +32151,23 @@
               <a:t>•  </a:t>
             </a:r>
             <a:r>
-              <a:rPr sz="2400" b="0" dirty="0">
-                <a:solidFill>
-                  <a:srgbClr val="8CA3B8"/>
-                </a:solidFill>
-                <a:latin typeface="Segoe UI"/>
-              </a:rPr>
-              <a:t>Code &amp; slides:  </a:t>
-            </a:r>
-            <a:r>
-              <a:rPr sz="2400" b="1" dirty="0">
-                <a:solidFill>
-                  <a:srgbClr val="35C4E8"/>
-                </a:solidFill>
-                <a:latin typeface="Segoe UI"/>
-              </a:rPr>
-              <a:t>github.com/</a:t>
-            </a:r>
-            <a:r>
-              <a:rPr sz="2400" b="1" dirty="0" err="1">
-                <a:solidFill>
-                  <a:srgbClr val="35C4E8"/>
-                </a:solidFill>
-                <a:latin typeface="Segoe UI"/>
-              </a:rPr>
-              <a:t>jedrzejmichalczyk</a:t>
-            </a:r>
-            <a:r>
-              <a:rPr sz="2400" b="1" dirty="0">
-                <a:solidFill>
-                  <a:srgbClr val="35C4E8"/>
-                </a:solidFill>
-                <a:latin typeface="Segoe UI"/>
-              </a:rPr>
-              <a:t>/</a:t>
-            </a:r>
-            <a:r>
-              <a:rPr sz="2400" b="1" dirty="0" err="1">
-                <a:solidFill>
-                  <a:srgbClr val="35C4E8"/>
-                </a:solidFill>
-                <a:latin typeface="Segoe UI"/>
-              </a:rPr>
-              <a:t>sopot</a:t>
-            </a:r>
-            <a:endParaRPr sz="2400" b="1" dirty="0">
-              <a:solidFill>
-                <a:srgbClr val="35C4E8"/>
-              </a:solidFill>
-              <a:latin typeface="Segoe UI"/>
-            </a:endParaRPr>
+              <a:rPr sz="2300" b="1">
+                <a:solidFill>
+                  <a:srgbClr val="F2C744"/>
+                </a:solidFill>
+                <a:latin typeface="Segoe UI"/>
+              </a:rPr>
+              <a:t>Separation of concerns is achievable at zero cost</a:t>
+            </a:r>
+            <a:r>
+              <a:rPr sz="2300" b="0">
+                <a:solidFill>
+                  <a:srgbClr val="D8E2EC"/>
+                </a:solidFill>
+                <a:latin typeface="Segoe UI"/>
+              </a:rPr>
+              <a:t> in C++20 — measured, not asserted</a:t>
+            </a:r>
           </a:p>
           <a:p>
             <a:pPr>
@@ -29816,7 +32176,7 @@
               </a:spcAft>
             </a:pPr>
             <a:r>
-              <a:rPr sz="2400" dirty="0">
+              <a:rPr sz="2300">
                 <a:solidFill>
                   <a:srgbClr val="35C4E8"/>
                 </a:solidFill>
@@ -29825,38 +32185,51 @@
               <a:t>•  </a:t>
             </a:r>
             <a:r>
-              <a:rPr sz="2400" b="0" dirty="0">
+              <a:rPr sz="2300" b="0">
+                <a:solidFill>
+                  <a:srgbClr val="D8E2EC"/>
+                </a:solidFill>
+                <a:latin typeface="Segoe UI"/>
+              </a:rPr>
+              <a:t>The recipe is small: </a:t>
+            </a:r>
+            <a:r>
+              <a:rPr sz="2300" b="1">
+                <a:solidFill>
+                  <a:srgbClr val="35C4E8"/>
+                </a:solidFill>
+                <a:latin typeface="Segoe UI"/>
+              </a:rPr>
+              <a:t>typed tags + overloaded compute() + a constexpr registry + concepts</a:t>
+            </a:r>
+          </a:p>
+          <a:p>
+            <a:pPr lvl="1">
+              <a:spcBef>
+                <a:spcPts val="0"/>
+              </a:spcBef>
+              <a:spcAft>
+                <a:spcPts val="800"/>
+              </a:spcAft>
+            </a:pPr>
+            <a:r>
+              <a:rPr sz="2100">
                 <a:solidFill>
                   <a:srgbClr val="8CA3B8"/>
                 </a:solidFill>
                 <a:latin typeface="Segoe UI"/>
               </a:rPr>
-              <a:t>Live demo:  </a:t>
-            </a:r>
-            <a:r>
-              <a:rPr sz="2400" b="1" dirty="0">
-                <a:solidFill>
-                  <a:srgbClr val="35C4E8"/>
-                </a:solidFill>
-                <a:latin typeface="Segoe UI"/>
-              </a:rPr>
-              <a:t>jedrzejmichalczyk.github.io/</a:t>
-            </a:r>
-            <a:r>
-              <a:rPr sz="2400" b="1" dirty="0" err="1">
-                <a:solidFill>
-                  <a:srgbClr val="35C4E8"/>
-                </a:solidFill>
-                <a:latin typeface="Segoe UI"/>
-              </a:rPr>
-              <a:t>sopot</a:t>
-            </a:r>
-            <a:endParaRPr sz="2400" b="1" dirty="0">
-              <a:solidFill>
-                <a:srgbClr val="35C4E8"/>
-              </a:solidFill>
-              <a:latin typeface="Segoe UI"/>
-            </a:endParaRPr>
+              <a:t>–  </a:t>
+            </a:r>
+            <a:r>
+              <a:rPr sz="2100" b="0">
+                <a:solidFill>
+                  <a:srgbClr val="D8E2EC"/>
+                </a:solidFill>
+                <a:latin typeface="Segoe UI"/>
+              </a:rPr>
+              <a:t>no inheritance, no virtuals, no strings, no codegen</a:t>
+            </a:r>
           </a:p>
           <a:p>
             <a:pPr>
@@ -29865,7 +32238,7 @@
               </a:spcAft>
             </a:pPr>
             <a:r>
-              <a:rPr sz="2400" dirty="0">
+              <a:rPr sz="2300">
                 <a:solidFill>
                   <a:srgbClr val="35C4E8"/>
                 </a:solidFill>
@@ -29874,71 +32247,63 @@
               <a:t>•  </a:t>
             </a:r>
             <a:r>
-              <a:rPr sz="2400" b="0" dirty="0">
-                <a:solidFill>
-                  <a:srgbClr val="8CA3B8"/>
-                </a:solidFill>
-                <a:latin typeface="Segoe UI"/>
-              </a:rPr>
-              <a:t>Email:  </a:t>
-            </a:r>
-            <a:r>
-              <a:rPr sz="2400" b="1" dirty="0" err="1">
-                <a:solidFill>
-                  <a:srgbClr val="F2C744"/>
-                </a:solidFill>
-                <a:latin typeface="Segoe UI"/>
-              </a:rPr>
-              <a:t>jedrzej.michalczyk</a:t>
-            </a:r>
-            <a:r>
-              <a:rPr sz="2400" b="1" dirty="0">
-                <a:solidFill>
-                  <a:srgbClr val="F2C744"/>
-                </a:solidFill>
-                <a:latin typeface="Segoe UI"/>
-              </a:rPr>
-              <a:t>@</a:t>
-            </a:r>
-            <a:r>
-              <a:rPr lang="pl-PL" sz="2400" b="1" dirty="0" err="1">
-                <a:solidFill>
-                  <a:srgbClr val="F2C744"/>
-                </a:solidFill>
-                <a:latin typeface="Segoe UI"/>
-              </a:rPr>
-              <a:t>gmail</a:t>
-            </a:r>
-            <a:r>
-              <a:rPr sz="2400" b="1" dirty="0">
-                <a:solidFill>
-                  <a:srgbClr val="F2C744"/>
-                </a:solidFill>
-                <a:latin typeface="Segoe UI"/>
-              </a:rPr>
-              <a:t>.</a:t>
-            </a:r>
-            <a:r>
-              <a:rPr lang="pl-PL" sz="2400" b="1" dirty="0">
-                <a:solidFill>
-                  <a:srgbClr val="F2C744"/>
-                </a:solidFill>
-                <a:latin typeface="Segoe UI"/>
-              </a:rPr>
-              <a:t>com</a:t>
-            </a:r>
-            <a:endParaRPr sz="2400" b="1" dirty="0">
-              <a:solidFill>
-                <a:srgbClr val="F2C744"/>
-              </a:solidFill>
-              <a:latin typeface="Segoe UI"/>
-            </a:endParaRPr>
-          </a:p>
-        </p:txBody>
-      </p:sp>
-      <p:sp>
-        <p:nvSpPr>
-          <p:cNvPr id="4" name="TextBox 3"/>
+              <a:rPr sz="2300" b="1">
+                <a:solidFill>
+                  <a:srgbClr val="FFFFFF"/>
+                </a:solidFill>
+                <a:latin typeface="Segoe UI"/>
+              </a:rPr>
+              <a:t>Prefer abstractions you can verify</a:t>
+            </a:r>
+            <a:r>
+              <a:rPr sz="2300" b="0">
+                <a:solidFill>
+                  <a:srgbClr val="D8E2EC"/>
+                </a:solidFill>
+                <a:latin typeface="Segoe UI"/>
+              </a:rPr>
+              <a:t> — conservation laws and disassembly are unit tests for architecture</a:t>
+            </a:r>
+          </a:p>
+          <a:p>
+            <a:pPr>
+              <a:spcAft>
+                <a:spcPts val="800"/>
+              </a:spcAft>
+            </a:pPr>
+            <a:r>
+              <a:rPr sz="2300">
+                <a:solidFill>
+                  <a:srgbClr val="35C4E8"/>
+                </a:solidFill>
+                <a:latin typeface="Segoe UI"/>
+              </a:rPr>
+              <a:t>•  </a:t>
+            </a:r>
+            <a:r>
+              <a:rPr sz="2300" b="1">
+                <a:solidFill>
+                  <a:srgbClr val="FFFFFF"/>
+                </a:solidFill>
+                <a:latin typeface="Segoe UI"/>
+              </a:rPr>
+              <a:t>Quality vs performance was the false tradeoff</a:t>
+            </a:r>
+            <a:r>
+              <a:rPr sz="2300" b="0">
+                <a:solidFill>
+                  <a:srgbClr val="D8E2EC"/>
+                </a:solidFill>
+                <a:latin typeface="Segoe UI"/>
+              </a:rPr>
+              <a:t> — modern C++ finally lets us refuse it</a:t>
+            </a:r>
+          </a:p>
+        </p:txBody>
+      </p:sp>
+      <p:sp>
+        <p:nvSpPr>
+          <p:cNvPr id="5" name="TextBox 4"/>
           <p:cNvSpPr txBox="1"/>
           <p:nvPr/>
         </p:nvSpPr>
@@ -29972,7 +32337,7 @@
       </p:sp>
       <p:sp>
         <p:nvSpPr>
-          <p:cNvPr id="5" name="TextBox 4"/>
+          <p:cNvPr id="6" name="TextBox 5"/>
           <p:cNvSpPr txBox="1"/>
           <p:nvPr/>
         </p:nvSpPr>
@@ -30000,7 +32365,7 @@
                 </a:solidFill>
                 <a:latin typeface="Segoe UI"/>
               </a:rPr>
-              <a:t>42</a:t>
+              <a:t>41</a:t>
             </a:r>
           </a:p>
         </p:txBody>
@@ -30014,7 +32379,7 @@
 </file>
 
 <file path=ppt/slides/slide42.xml><?xml version="1.0" encoding="utf-8"?>
-<p:sld xmlns:a="http://schemas.openxmlformats.org/drawingml/2006/main" xmlns:p="http://schemas.openxmlformats.org/presentationml/2006/main" xmlns:r="http://schemas.openxmlformats.org/officeDocument/2006/relationships">
+<p:sld xmlns:a="http://schemas.openxmlformats.org/drawingml/2006/main" xmlns:r="http://schemas.openxmlformats.org/officeDocument/2006/relationships" xmlns:p="http://schemas.openxmlformats.org/presentationml/2006/main">
   <p:cSld>
     <p:bg>
       <p:bgPr>
@@ -30030,7 +32395,14 @@
         <p:cNvGrpSpPr/>
         <p:nvPr/>
       </p:nvGrpSpPr>
-      <p:grpSpPr/>
+      <p:grpSpPr>
+        <a:xfrm>
+          <a:off x="0" y="0"/>
+          <a:ext cx="0" cy="0"/>
+          <a:chOff x="0" y="0"/>
+          <a:chExt cx="0" cy="0"/>
+        </a:xfrm>
+      </p:grpSpPr>
       <p:sp>
         <p:nvSpPr>
           <p:cNvPr id="2" name="TextBox 1"/>
@@ -30039,8 +32411,8 @@
         </p:nvSpPr>
         <p:spPr>
           <a:xfrm>
-            <a:off x="502920" y="384048"/>
-            <a:ext cx="11155680" cy="292608"/>
+            <a:off x="822960" y="1463040"/>
+            <a:ext cx="10515600" cy="1371600"/>
           </a:xfrm>
           <a:prstGeom prst="rect">
             <a:avLst/>
@@ -30054,13 +32426,13 @@
           <a:lstStyle/>
           <a:p>
             <a:r>
-              <a:rPr sz="1300" b="1">
-                <a:solidFill>
-                  <a:srgbClr val="F2C744"/>
-                </a:solidFill>
-                <a:latin typeface="Segoe UI"/>
-              </a:rPr>
-              <a:t>A SHORT HISTORY LESSON</a:t>
+              <a:rPr sz="4800" b="1">
+                <a:solidFill>
+                  <a:srgbClr val="FFFFFF"/>
+                </a:solidFill>
+                <a:latin typeface="Segoe UI"/>
+              </a:rPr>
+              <a:t>Thank you!  Questions?</a:t>
             </a:r>
           </a:p>
         </p:txBody>
@@ -30073,8 +32445,8 @@
         </p:nvSpPr>
         <p:spPr>
           <a:xfrm>
-            <a:off x="457200" y="694944"/>
-            <a:ext cx="11247120" cy="777240"/>
+            <a:off x="548640" y="3108960"/>
+            <a:ext cx="11064240" cy="1405513"/>
           </a:xfrm>
           <a:prstGeom prst="rect">
             <a:avLst/>
@@ -30082,74 +32454,207 @@
           <a:noFill/>
         </p:spPr>
         <p:txBody>
-          <a:bodyPr wrap="none">
+          <a:bodyPr wrap="square">
             <a:spAutoFit/>
           </a:bodyPr>
           <a:lstStyle/>
           <a:p>
-            <a:r>
-              <a:rPr sz="3100" b="1">
-                <a:solidFill>
-                  <a:srgbClr val="FFFFFF"/>
-                </a:solidFill>
-                <a:latin typeface="Segoe UI"/>
-              </a:rPr>
-              <a:t>Same script — even the plotting and file I/O</a:t>
-            </a:r>
-          </a:p>
-        </p:txBody>
-      </p:sp>
-      <p:sp>
-        <p:nvSpPr>
-          <p:cNvPr id="4" name="Rounded Rectangle 3"/>
-          <p:cNvSpPr/>
-          <p:nvPr/>
-        </p:nvSpPr>
-        <p:spPr>
-          <a:xfrm>
-            <a:off x="548640" y="1463040"/>
-            <a:ext cx="11338560" cy="3520440"/>
-          </a:xfrm>
-          <a:prstGeom prst="roundRect">
-            <a:avLst>
-              <a:gd name="adj" fmla="val 10000"/>
-            </a:avLst>
-          </a:prstGeom>
-          <a:solidFill>
-            <a:srgbClr val="081626"/>
-          </a:solidFill>
-          <a:ln w="12700">
-            <a:solidFill>
-              <a:srgbClr val="1E3A55"/>
-            </a:solidFill>
-          </a:ln>
-          <a:effectLst/>
-        </p:spPr>
-        <p:style>
-          <a:lnRef idx="1">
-            <a:schemeClr val="accent1"/>
-          </a:lnRef>
-          <a:fillRef idx="3">
-            <a:schemeClr val="accent1"/>
-          </a:fillRef>
-          <a:effectRef idx="2">
-            <a:schemeClr val="accent1"/>
-          </a:effectRef>
-          <a:fontRef idx="minor">
-            <a:schemeClr val="lt1"/>
-          </a:fontRef>
-        </p:style>
-        <p:txBody>
-          <a:bodyPr wrap="square" rtlCol="0" anchor="ctr"/>
-          <a:lstStyle/>
-          <a:p>
-            <a:pPr algn="ctr"/>
-          </a:p>
-        </p:txBody>
-      </p:sp>
-      <p:sp>
-        <p:nvSpPr>
-          <p:cNvPr id="6" name="TextBox 5"/>
+            <a:pPr>
+              <a:spcAft>
+                <a:spcPts val="800"/>
+              </a:spcAft>
+            </a:pPr>
+            <a:r>
+              <a:rPr sz="2400" dirty="0">
+                <a:solidFill>
+                  <a:srgbClr val="35C4E8"/>
+                </a:solidFill>
+                <a:latin typeface="Segoe UI"/>
+              </a:rPr>
+              <a:t>•  </a:t>
+            </a:r>
+            <a:r>
+              <a:rPr sz="2400" b="0" dirty="0">
+                <a:solidFill>
+                  <a:srgbClr val="8CA3B8"/>
+                </a:solidFill>
+                <a:latin typeface="Segoe UI"/>
+              </a:rPr>
+              <a:t>Code &amp; slides:  </a:t>
+            </a:r>
+            <a:r>
+              <a:rPr sz="2400" b="1" dirty="0">
+                <a:solidFill>
+                  <a:srgbClr val="35C4E8"/>
+                </a:solidFill>
+                <a:latin typeface="Segoe UI"/>
+              </a:rPr>
+              <a:t>github.com/</a:t>
+            </a:r>
+            <a:r>
+              <a:rPr sz="2400" b="1" dirty="0" err="1">
+                <a:solidFill>
+                  <a:srgbClr val="35C4E8"/>
+                </a:solidFill>
+                <a:latin typeface="Segoe UI"/>
+              </a:rPr>
+              <a:t>jedrzejmichalczyk</a:t>
+            </a:r>
+            <a:r>
+              <a:rPr sz="2400" b="1" dirty="0">
+                <a:solidFill>
+                  <a:srgbClr val="35C4E8"/>
+                </a:solidFill>
+                <a:latin typeface="Segoe UI"/>
+              </a:rPr>
+              <a:t>/</a:t>
+            </a:r>
+            <a:r>
+              <a:rPr sz="2400" b="1" dirty="0" err="1">
+                <a:solidFill>
+                  <a:srgbClr val="35C4E8"/>
+                </a:solidFill>
+                <a:latin typeface="Segoe UI"/>
+              </a:rPr>
+              <a:t>accu-on-sea-2026-modular-physics</a:t>
+            </a:r>
+            <a:endParaRPr sz="2400" b="1" dirty="0">
+              <a:solidFill>
+                <a:srgbClr val="35C4E8"/>
+              </a:solidFill>
+              <a:latin typeface="Segoe UI"/>
+            </a:endParaRPr>
+          </a:p>
+          <a:p>
+            <a:pPr>
+              <a:spcAft>
+                <a:spcPts val="800"/>
+              </a:spcAft>
+            </a:pPr>
+            <a:r>
+              <a:rPr sz="2400" dirty="0">
+                <a:solidFill>
+                  <a:srgbClr val="35C4E8"/>
+                </a:solidFill>
+                <a:latin typeface="Segoe UI"/>
+              </a:rPr>
+              <a:t>•  </a:t>
+            </a:r>
+            <a:r>
+              <a:rPr sz="2400" b="0" dirty="0">
+                <a:solidFill>
+                  <a:srgbClr val="8CA3B8"/>
+                </a:solidFill>
+                <a:latin typeface="Segoe UI"/>
+              </a:rPr>
+              <a:t>Live demo:  </a:t>
+            </a:r>
+            <a:r>
+              <a:rPr sz="2400" b="1" dirty="0">
+                <a:solidFill>
+                  <a:srgbClr val="35C4E8"/>
+                </a:solidFill>
+                <a:latin typeface="Segoe UI"/>
+              </a:rPr>
+              <a:t>jedrzejmichalczyk.github.io/</a:t>
+            </a:r>
+            <a:r>
+              <a:rPr sz="2400" b="1" dirty="0" err="1">
+                <a:solidFill>
+                  <a:srgbClr val="35C4E8"/>
+                </a:solidFill>
+                <a:latin typeface="Segoe UI"/>
+              </a:rPr>
+              <a:t>accu-on-sea-2026-modular-physics</a:t>
+            </a:r>
+            <a:endParaRPr sz="2400" b="1" dirty="0">
+              <a:solidFill>
+                <a:srgbClr val="35C4E8"/>
+              </a:solidFill>
+              <a:latin typeface="Segoe UI"/>
+            </a:endParaRPr>
+          </a:p>
+          <a:p>
+            <a:pPr>
+              <a:spcAft>
+                <a:spcPts val="800"/>
+              </a:spcAft>
+            </a:pPr>
+            <a:r>
+              <a:rPr sz="2400" dirty="0">
+                <a:solidFill>
+                  <a:srgbClr val="35C4E8"/>
+                </a:solidFill>
+                <a:latin typeface="Segoe UI"/>
+              </a:rPr>
+              <a:t>•  </a:t>
+            </a:r>
+            <a:r>
+              <a:rPr sz="2400" b="0" dirty="0">
+                <a:solidFill>
+                  <a:srgbClr val="8CA3B8"/>
+                </a:solidFill>
+                <a:latin typeface="Segoe UI"/>
+              </a:rPr>
+              <a:t>Email:  </a:t>
+            </a:r>
+            <a:r>
+              <a:rPr sz="2400" b="1" dirty="0" err="1">
+                <a:solidFill>
+                  <a:srgbClr val="F2C744"/>
+                </a:solidFill>
+                <a:latin typeface="Segoe UI"/>
+              </a:rPr>
+              <a:t>jedrzej.michalczyk</a:t>
+            </a:r>
+            <a:r>
+              <a:rPr sz="2400" b="1" dirty="0">
+                <a:solidFill>
+                  <a:srgbClr val="F2C744"/>
+                </a:solidFill>
+                <a:latin typeface="Segoe UI"/>
+              </a:rPr>
+              <a:t>@</a:t>
+            </a:r>
+            <a:r>
+              <a:rPr lang="pl-PL" sz="2400" b="1" dirty="0" err="1">
+                <a:solidFill>
+                  <a:srgbClr val="F2C744"/>
+                </a:solidFill>
+                <a:latin typeface="Segoe UI"/>
+              </a:rPr>
+              <a:t>gmail</a:t>
+            </a:r>
+            <a:r>
+              <a:rPr sz="2400" b="1" dirty="0">
+                <a:solidFill>
+                  <a:srgbClr val="F2C744"/>
+                </a:solidFill>
+                <a:latin typeface="Segoe UI"/>
+              </a:rPr>
+              <a:t>.</a:t>
+            </a:r>
+            <a:r>
+              <a:rPr lang="pl-PL" sz="2400" b="1" dirty="0">
+                <a:solidFill>
+                  <a:srgbClr val="F2C744"/>
+                </a:solidFill>
+                <a:latin typeface="Segoe UI"/>
+              </a:rPr>
+              <a:t>com</a:t>
+            </a:r>
+            <a:endParaRPr sz="2400" b="1" dirty="0">
+              <a:solidFill>
+                <a:srgbClr val="F2C744"/>
+              </a:solidFill>
+              <a:latin typeface="Segoe UI"/>
+            </a:endParaRPr>
+          </a:p>
+        </p:txBody>
+      </p:sp>
+      <p:sp>
+        <p:nvSpPr>
+          <p:cNvPr id="4" name="TextBox 3"/>
           <p:cNvSpPr txBox="1"/>
           <p:nvPr/>
         </p:nvSpPr>
@@ -30183,7 +32688,7 @@
       </p:sp>
       <p:sp>
         <p:nvSpPr>
-          <p:cNvPr id="7" name="TextBox 6"/>
+          <p:cNvPr id="5" name="TextBox 4"/>
           <p:cNvSpPr txBox="1"/>
           <p:nvPr/>
         </p:nvSpPr>
@@ -30211,1566 +32716,7 @@
                 </a:solidFill>
                 <a:latin typeface="Segoe UI"/>
               </a:rPr>
-              <a:t>39</a:t>
-            </a:r>
-          </a:p>
-        </p:txBody>
-      </p:sp>
-      <p:sp>
-        <p:nvSpPr>
-          <p:cNvPr id="8" name="zarchan tail"/>
-          <p:cNvSpPr txBox="1"/>
-          <p:nvPr/>
-        </p:nvSpPr>
-        <p:spPr>
-          <a:xfrm>
-            <a:off x="777240" y="1600200"/>
-            <a:ext cx="10881360" cy="3319272"/>
-          </a:xfrm>
-          <a:prstGeom prst="rect">
-            <a:avLst/>
-          </a:prstGeom>
-          <a:noFill/>
-        </p:spPr>
-        <p:txBody>
-          <a:bodyPr wrap="none">
-            <a:spAutoFit/>
-          </a:bodyPr>
-          <a:lstStyle/>
-          <a:p>
-            <a:pPr>
-              <a:spcAft>
-                <a:spcPts val="100"/>
-              </a:spcAft>
-            </a:pPr>
-            <a:r>
-              <a:rPr sz="1600">
-                <a:solidFill>
-                  <a:srgbClr val="D4D4D4"/>
-                </a:solidFill>
-                <a:latin typeface="Consolas"/>
-              </a:rPr>
-              <a:t>    </a:t>
-            </a:r>
-            <a:r>
-              <a:rPr sz="1600">
-                <a:solidFill>
-                  <a:srgbClr val="569CD6"/>
-                </a:solidFill>
-                <a:latin typeface="Consolas"/>
-              </a:rPr>
-              <a:t>if</a:t>
-            </a:r>
-            <a:r>
-              <a:rPr sz="1600">
-                <a:solidFill>
-                  <a:srgbClr val="D4D4D4"/>
-                </a:solidFill>
-                <a:latin typeface="Consolas"/>
-              </a:rPr>
-              <a:t> </a:t>
-            </a:r>
-            <a:r>
-              <a:rPr sz="1600">
-                <a:solidFill>
-                  <a:srgbClr val="D4D4D4"/>
-                </a:solidFill>
-                <a:latin typeface="Consolas"/>
-              </a:rPr>
-              <a:t>S</a:t>
-            </a:r>
-            <a:r>
-              <a:rPr sz="1600">
-                <a:solidFill>
-                  <a:srgbClr val="D4D4D4"/>
-                </a:solidFill>
-                <a:latin typeface="Consolas"/>
-              </a:rPr>
-              <a:t>&gt;=</a:t>
-            </a:r>
-            <a:r>
-              <a:rPr sz="1600">
-                <a:solidFill>
-                  <a:srgbClr val="B5CEA8"/>
-                </a:solidFill>
-                <a:latin typeface="Consolas"/>
-              </a:rPr>
-              <a:t>9.99999</a:t>
-            </a:r>
-          </a:p>
-          <a:p>
-            <a:pPr>
-              <a:spcAft>
-                <a:spcPts val="100"/>
-              </a:spcAft>
-            </a:pPr>
-            <a:r>
-              <a:rPr sz="1600">
-                <a:solidFill>
-                  <a:srgbClr val="D4D4D4"/>
-                </a:solidFill>
-                <a:latin typeface="Consolas"/>
-              </a:rPr>
-              <a:t>        </a:t>
-            </a:r>
-            <a:r>
-              <a:rPr sz="1600">
-                <a:solidFill>
-                  <a:srgbClr val="D4D4D4"/>
-                </a:solidFill>
-                <a:latin typeface="Consolas"/>
-              </a:rPr>
-              <a:t>R</a:t>
-            </a:r>
-            <a:r>
-              <a:rPr sz="1600">
-                <a:solidFill>
-                  <a:srgbClr val="D4D4D4"/>
-                </a:solidFill>
-                <a:latin typeface="Consolas"/>
-              </a:rPr>
-              <a:t>=</a:t>
-            </a:r>
-            <a:r>
-              <a:rPr sz="1600">
-                <a:solidFill>
-                  <a:srgbClr val="4EC9B0"/>
-                </a:solidFill>
-                <a:latin typeface="Consolas"/>
-              </a:rPr>
-              <a:t>sqrt</a:t>
-            </a:r>
-            <a:r>
-              <a:rPr sz="1600">
-                <a:solidFill>
-                  <a:srgbClr val="D4D4D4"/>
-                </a:solidFill>
-                <a:latin typeface="Consolas"/>
-              </a:rPr>
-              <a:t>(</a:t>
-            </a:r>
-            <a:r>
-              <a:rPr sz="1600">
-                <a:solidFill>
-                  <a:srgbClr val="D4D4D4"/>
-                </a:solidFill>
-                <a:latin typeface="Consolas"/>
-              </a:rPr>
-              <a:t>X</a:t>
-            </a:r>
-            <a:r>
-              <a:rPr sz="1600">
-                <a:solidFill>
-                  <a:srgbClr val="D4D4D4"/>
-                </a:solidFill>
-                <a:latin typeface="Consolas"/>
-              </a:rPr>
-              <a:t>^</a:t>
-            </a:r>
-            <a:r>
-              <a:rPr sz="1600">
-                <a:solidFill>
-                  <a:srgbClr val="B5CEA8"/>
-                </a:solidFill>
-                <a:latin typeface="Consolas"/>
-              </a:rPr>
-              <a:t>2</a:t>
-            </a:r>
-            <a:r>
-              <a:rPr sz="1600">
-                <a:solidFill>
-                  <a:srgbClr val="D4D4D4"/>
-                </a:solidFill>
-                <a:latin typeface="Consolas"/>
-              </a:rPr>
-              <a:t>+</a:t>
-            </a:r>
-            <a:r>
-              <a:rPr sz="1600">
-                <a:solidFill>
-                  <a:srgbClr val="D4D4D4"/>
-                </a:solidFill>
-                <a:latin typeface="Consolas"/>
-              </a:rPr>
-              <a:t>Y</a:t>
-            </a:r>
-            <a:r>
-              <a:rPr sz="1600">
-                <a:solidFill>
-                  <a:srgbClr val="D4D4D4"/>
-                </a:solidFill>
-                <a:latin typeface="Consolas"/>
-              </a:rPr>
-              <a:t>^</a:t>
-            </a:r>
-            <a:r>
-              <a:rPr sz="1600">
-                <a:solidFill>
-                  <a:srgbClr val="B5CEA8"/>
-                </a:solidFill>
-                <a:latin typeface="Consolas"/>
-              </a:rPr>
-              <a:t>2</a:t>
-            </a:r>
-            <a:r>
-              <a:rPr sz="1600">
-                <a:solidFill>
-                  <a:srgbClr val="D4D4D4"/>
-                </a:solidFill>
-                <a:latin typeface="Consolas"/>
-              </a:rPr>
-              <a:t>)</a:t>
-            </a:r>
-            <a:r>
-              <a:rPr sz="1600">
-                <a:solidFill>
-                  <a:srgbClr val="D4D4D4"/>
-                </a:solidFill>
-                <a:latin typeface="Consolas"/>
-              </a:rPr>
-              <a:t>;</a:t>
-            </a:r>
-            <a:r>
-              <a:rPr sz="1600">
-                <a:solidFill>
-                  <a:srgbClr val="D4D4D4"/>
-                </a:solidFill>
-                <a:latin typeface="Consolas"/>
-              </a:rPr>
-              <a:t>   </a:t>
-            </a:r>
-            <a:r>
-              <a:rPr sz="1600">
-                <a:solidFill>
-                  <a:srgbClr val="D4D4D4"/>
-                </a:solidFill>
-                <a:latin typeface="Consolas"/>
-              </a:rPr>
-              <a:t>RF</a:t>
-            </a:r>
-            <a:r>
-              <a:rPr sz="1600">
-                <a:solidFill>
-                  <a:srgbClr val="D4D4D4"/>
-                </a:solidFill>
-                <a:latin typeface="Consolas"/>
-              </a:rPr>
-              <a:t>=</a:t>
-            </a:r>
-            <a:r>
-              <a:rPr sz="1600">
-                <a:solidFill>
-                  <a:srgbClr val="4EC9B0"/>
-                </a:solidFill>
-                <a:latin typeface="Consolas"/>
-              </a:rPr>
-              <a:t>sqrt</a:t>
-            </a:r>
-            <a:r>
-              <a:rPr sz="1600">
-                <a:solidFill>
-                  <a:srgbClr val="D4D4D4"/>
-                </a:solidFill>
-                <a:latin typeface="Consolas"/>
-              </a:rPr>
-              <a:t>(</a:t>
-            </a:r>
-            <a:r>
-              <a:rPr sz="1600">
-                <a:solidFill>
-                  <a:srgbClr val="D4D4D4"/>
-                </a:solidFill>
-                <a:latin typeface="Consolas"/>
-              </a:rPr>
-              <a:t>XFIRST</a:t>
-            </a:r>
-            <a:r>
-              <a:rPr sz="1600">
-                <a:solidFill>
-                  <a:srgbClr val="D4D4D4"/>
-                </a:solidFill>
-                <a:latin typeface="Consolas"/>
-              </a:rPr>
-              <a:t>^</a:t>
-            </a:r>
-            <a:r>
-              <a:rPr sz="1600">
-                <a:solidFill>
-                  <a:srgbClr val="B5CEA8"/>
-                </a:solidFill>
-                <a:latin typeface="Consolas"/>
-              </a:rPr>
-              <a:t>2</a:t>
-            </a:r>
-            <a:r>
-              <a:rPr sz="1600">
-                <a:solidFill>
-                  <a:srgbClr val="D4D4D4"/>
-                </a:solidFill>
-                <a:latin typeface="Consolas"/>
-              </a:rPr>
-              <a:t>+</a:t>
-            </a:r>
-            <a:r>
-              <a:rPr sz="1600">
-                <a:solidFill>
-                  <a:srgbClr val="D4D4D4"/>
-                </a:solidFill>
-                <a:latin typeface="Consolas"/>
-              </a:rPr>
-              <a:t>YFIRST</a:t>
-            </a:r>
-            <a:r>
-              <a:rPr sz="1600">
-                <a:solidFill>
-                  <a:srgbClr val="D4D4D4"/>
-                </a:solidFill>
-                <a:latin typeface="Consolas"/>
-              </a:rPr>
-              <a:t>^</a:t>
-            </a:r>
-            <a:r>
-              <a:rPr sz="1600">
-                <a:solidFill>
-                  <a:srgbClr val="B5CEA8"/>
-                </a:solidFill>
-                <a:latin typeface="Consolas"/>
-              </a:rPr>
-              <a:t>2</a:t>
-            </a:r>
-            <a:r>
-              <a:rPr sz="1600">
-                <a:solidFill>
-                  <a:srgbClr val="D4D4D4"/>
-                </a:solidFill>
-                <a:latin typeface="Consolas"/>
-              </a:rPr>
-              <a:t>)</a:t>
-            </a:r>
-            <a:r>
-              <a:rPr sz="1600">
-                <a:solidFill>
-                  <a:srgbClr val="D4D4D4"/>
-                </a:solidFill>
-                <a:latin typeface="Consolas"/>
-              </a:rPr>
-              <a:t>;</a:t>
-            </a:r>
-          </a:p>
-          <a:p>
-            <a:pPr>
-              <a:spcAft>
-                <a:spcPts val="100"/>
-              </a:spcAft>
-            </a:pPr>
-            <a:r>
-              <a:rPr sz="1600">
-                <a:solidFill>
-                  <a:srgbClr val="D4D4D4"/>
-                </a:solidFill>
-                <a:latin typeface="Consolas"/>
-              </a:rPr>
-              <a:t>        </a:t>
-            </a:r>
-            <a:r>
-              <a:rPr sz="1600">
-                <a:solidFill>
-                  <a:srgbClr val="D4D4D4"/>
-                </a:solidFill>
-                <a:latin typeface="Consolas"/>
-              </a:rPr>
-              <a:t>BETA</a:t>
-            </a:r>
-            <a:r>
-              <a:rPr sz="1600">
-                <a:solidFill>
-                  <a:srgbClr val="D4D4D4"/>
-                </a:solidFill>
-                <a:latin typeface="Consolas"/>
-              </a:rPr>
-              <a:t>=</a:t>
-            </a:r>
-            <a:r>
-              <a:rPr sz="1600">
-                <a:solidFill>
-                  <a:srgbClr val="4EC9B0"/>
-                </a:solidFill>
-                <a:latin typeface="Consolas"/>
-              </a:rPr>
-              <a:t>acos</a:t>
-            </a:r>
-            <a:r>
-              <a:rPr sz="1600">
-                <a:solidFill>
-                  <a:srgbClr val="D4D4D4"/>
-                </a:solidFill>
-                <a:latin typeface="Consolas"/>
-              </a:rPr>
-              <a:t>(</a:t>
-            </a:r>
-            <a:r>
-              <a:rPr sz="1600">
-                <a:solidFill>
-                  <a:srgbClr val="D4D4D4"/>
-                </a:solidFill>
-                <a:latin typeface="Consolas"/>
-              </a:rPr>
-              <a:t>(</a:t>
-            </a:r>
-            <a:r>
-              <a:rPr sz="1600">
-                <a:solidFill>
-                  <a:srgbClr val="D4D4D4"/>
-                </a:solidFill>
-                <a:latin typeface="Consolas"/>
-              </a:rPr>
-              <a:t>X</a:t>
-            </a:r>
-            <a:r>
-              <a:rPr sz="1600">
-                <a:solidFill>
-                  <a:srgbClr val="D4D4D4"/>
-                </a:solidFill>
-                <a:latin typeface="Consolas"/>
-              </a:rPr>
-              <a:t>*</a:t>
-            </a:r>
-            <a:r>
-              <a:rPr sz="1600">
-                <a:solidFill>
-                  <a:srgbClr val="D4D4D4"/>
-                </a:solidFill>
-                <a:latin typeface="Consolas"/>
-              </a:rPr>
-              <a:t>XFIRST</a:t>
-            </a:r>
-            <a:r>
-              <a:rPr sz="1600">
-                <a:solidFill>
-                  <a:srgbClr val="D4D4D4"/>
-                </a:solidFill>
-                <a:latin typeface="Consolas"/>
-              </a:rPr>
-              <a:t>+</a:t>
-            </a:r>
-            <a:r>
-              <a:rPr sz="1600">
-                <a:solidFill>
-                  <a:srgbClr val="D4D4D4"/>
-                </a:solidFill>
-                <a:latin typeface="Consolas"/>
-              </a:rPr>
-              <a:t>Y</a:t>
-            </a:r>
-            <a:r>
-              <a:rPr sz="1600">
-                <a:solidFill>
-                  <a:srgbClr val="D4D4D4"/>
-                </a:solidFill>
-                <a:latin typeface="Consolas"/>
-              </a:rPr>
-              <a:t>*</a:t>
-            </a:r>
-            <a:r>
-              <a:rPr sz="1600">
-                <a:solidFill>
-                  <a:srgbClr val="D4D4D4"/>
-                </a:solidFill>
-                <a:latin typeface="Consolas"/>
-              </a:rPr>
-              <a:t>YFIRST</a:t>
-            </a:r>
-            <a:r>
-              <a:rPr sz="1600">
-                <a:solidFill>
-                  <a:srgbClr val="D4D4D4"/>
-                </a:solidFill>
-                <a:latin typeface="Consolas"/>
-              </a:rPr>
-              <a:t>)</a:t>
-            </a:r>
-            <a:r>
-              <a:rPr sz="1600">
-                <a:solidFill>
-                  <a:srgbClr val="D4D4D4"/>
-                </a:solidFill>
-                <a:latin typeface="Consolas"/>
-              </a:rPr>
-              <a:t>/</a:t>
-            </a:r>
-            <a:r>
-              <a:rPr sz="1600">
-                <a:solidFill>
-                  <a:srgbClr val="D4D4D4"/>
-                </a:solidFill>
-                <a:latin typeface="Consolas"/>
-              </a:rPr>
-              <a:t>(</a:t>
-            </a:r>
-            <a:r>
-              <a:rPr sz="1600">
-                <a:solidFill>
-                  <a:srgbClr val="D4D4D4"/>
-                </a:solidFill>
-                <a:latin typeface="Consolas"/>
-              </a:rPr>
-              <a:t>R</a:t>
-            </a:r>
-            <a:r>
-              <a:rPr sz="1600">
-                <a:solidFill>
-                  <a:srgbClr val="D4D4D4"/>
-                </a:solidFill>
-                <a:latin typeface="Consolas"/>
-              </a:rPr>
-              <a:t>*</a:t>
-            </a:r>
-            <a:r>
-              <a:rPr sz="1600">
-                <a:solidFill>
-                  <a:srgbClr val="D4D4D4"/>
-                </a:solidFill>
-                <a:latin typeface="Consolas"/>
-              </a:rPr>
-              <a:t>RF</a:t>
-            </a:r>
-            <a:r>
-              <a:rPr sz="1600">
-                <a:solidFill>
-                  <a:srgbClr val="D4D4D4"/>
-                </a:solidFill>
-                <a:latin typeface="Consolas"/>
-              </a:rPr>
-              <a:t>)</a:t>
-            </a:r>
-            <a:r>
-              <a:rPr sz="1600">
-                <a:solidFill>
-                  <a:srgbClr val="D4D4D4"/>
-                </a:solidFill>
-                <a:latin typeface="Consolas"/>
-              </a:rPr>
-              <a:t>)</a:t>
-            </a:r>
-            <a:r>
-              <a:rPr sz="1600">
-                <a:solidFill>
-                  <a:srgbClr val="D4D4D4"/>
-                </a:solidFill>
-                <a:latin typeface="Consolas"/>
-              </a:rPr>
-              <a:t>;</a:t>
-            </a:r>
-          </a:p>
-          <a:p>
-            <a:pPr>
-              <a:spcAft>
-                <a:spcPts val="100"/>
-              </a:spcAft>
-            </a:pPr>
-            <a:r>
-              <a:rPr sz="1600">
-                <a:solidFill>
-                  <a:srgbClr val="D4D4D4"/>
-                </a:solidFill>
-                <a:latin typeface="Consolas"/>
-              </a:rPr>
-              <a:t>        </a:t>
-            </a:r>
-            <a:r>
-              <a:rPr sz="1600">
-                <a:solidFill>
-                  <a:srgbClr val="D4D4D4"/>
-                </a:solidFill>
-                <a:latin typeface="Consolas"/>
-              </a:rPr>
-              <a:t>DISTNM</a:t>
-            </a:r>
-            <a:r>
-              <a:rPr sz="1600">
-                <a:solidFill>
-                  <a:srgbClr val="D4D4D4"/>
-                </a:solidFill>
-                <a:latin typeface="Consolas"/>
-              </a:rPr>
-              <a:t>=</a:t>
-            </a:r>
-            <a:r>
-              <a:rPr sz="1600">
-                <a:solidFill>
-                  <a:srgbClr val="D4D4D4"/>
-                </a:solidFill>
-                <a:latin typeface="Consolas"/>
-              </a:rPr>
-              <a:t>A</a:t>
-            </a:r>
-            <a:r>
-              <a:rPr sz="1600">
-                <a:solidFill>
-                  <a:srgbClr val="D4D4D4"/>
-                </a:solidFill>
-                <a:latin typeface="Consolas"/>
-              </a:rPr>
-              <a:t>*</a:t>
-            </a:r>
-            <a:r>
-              <a:rPr sz="1600">
-                <a:solidFill>
-                  <a:srgbClr val="D4D4D4"/>
-                </a:solidFill>
-                <a:latin typeface="Consolas"/>
-              </a:rPr>
-              <a:t>BETA</a:t>
-            </a:r>
-            <a:r>
-              <a:rPr sz="1600">
-                <a:solidFill>
-                  <a:srgbClr val="D4D4D4"/>
-                </a:solidFill>
-                <a:latin typeface="Consolas"/>
-              </a:rPr>
-              <a:t>/</a:t>
-            </a:r>
-            <a:r>
-              <a:rPr sz="1600">
-                <a:solidFill>
-                  <a:srgbClr val="B5CEA8"/>
-                </a:solidFill>
-                <a:latin typeface="Consolas"/>
-              </a:rPr>
-              <a:t>6076.</a:t>
-            </a:r>
-            <a:r>
-              <a:rPr sz="1600">
-                <a:solidFill>
-                  <a:srgbClr val="D4D4D4"/>
-                </a:solidFill>
-                <a:latin typeface="Consolas"/>
-              </a:rPr>
-              <a:t>;</a:t>
-            </a:r>
-            <a:r>
-              <a:rPr sz="1600">
-                <a:solidFill>
-                  <a:srgbClr val="D4D4D4"/>
-                </a:solidFill>
-                <a:latin typeface="Consolas"/>
-              </a:rPr>
-              <a:t>   </a:t>
-            </a:r>
-            <a:r>
-              <a:rPr sz="1600">
-                <a:solidFill>
-                  <a:srgbClr val="D4D4D4"/>
-                </a:solidFill>
-                <a:latin typeface="Consolas"/>
-              </a:rPr>
-              <a:t>ALTNM</a:t>
-            </a:r>
-            <a:r>
-              <a:rPr sz="1600">
-                <a:solidFill>
-                  <a:srgbClr val="D4D4D4"/>
-                </a:solidFill>
-                <a:latin typeface="Consolas"/>
-              </a:rPr>
-              <a:t>=</a:t>
-            </a:r>
-            <a:r>
-              <a:rPr sz="1600">
-                <a:solidFill>
-                  <a:srgbClr val="D4D4D4"/>
-                </a:solidFill>
-                <a:latin typeface="Consolas"/>
-              </a:rPr>
-              <a:t>(</a:t>
-            </a:r>
-            <a:r>
-              <a:rPr sz="1600">
-                <a:solidFill>
-                  <a:srgbClr val="4EC9B0"/>
-                </a:solidFill>
-                <a:latin typeface="Consolas"/>
-              </a:rPr>
-              <a:t>sqrt</a:t>
-            </a:r>
-            <a:r>
-              <a:rPr sz="1600">
-                <a:solidFill>
-                  <a:srgbClr val="D4D4D4"/>
-                </a:solidFill>
-                <a:latin typeface="Consolas"/>
-              </a:rPr>
-              <a:t>(</a:t>
-            </a:r>
-            <a:r>
-              <a:rPr sz="1600">
-                <a:solidFill>
-                  <a:srgbClr val="D4D4D4"/>
-                </a:solidFill>
-                <a:latin typeface="Consolas"/>
-              </a:rPr>
-              <a:t>X</a:t>
-            </a:r>
-            <a:r>
-              <a:rPr sz="1600">
-                <a:solidFill>
-                  <a:srgbClr val="D4D4D4"/>
-                </a:solidFill>
-                <a:latin typeface="Consolas"/>
-              </a:rPr>
-              <a:t>^</a:t>
-            </a:r>
-            <a:r>
-              <a:rPr sz="1600">
-                <a:solidFill>
-                  <a:srgbClr val="B5CEA8"/>
-                </a:solidFill>
-                <a:latin typeface="Consolas"/>
-              </a:rPr>
-              <a:t>2</a:t>
-            </a:r>
-            <a:r>
-              <a:rPr sz="1600">
-                <a:solidFill>
-                  <a:srgbClr val="D4D4D4"/>
-                </a:solidFill>
-                <a:latin typeface="Consolas"/>
-              </a:rPr>
-              <a:t>+</a:t>
-            </a:r>
-            <a:r>
-              <a:rPr sz="1600">
-                <a:solidFill>
-                  <a:srgbClr val="D4D4D4"/>
-                </a:solidFill>
-                <a:latin typeface="Consolas"/>
-              </a:rPr>
-              <a:t>Y</a:t>
-            </a:r>
-            <a:r>
-              <a:rPr sz="1600">
-                <a:solidFill>
-                  <a:srgbClr val="D4D4D4"/>
-                </a:solidFill>
-                <a:latin typeface="Consolas"/>
-              </a:rPr>
-              <a:t>^</a:t>
-            </a:r>
-            <a:r>
-              <a:rPr sz="1600">
-                <a:solidFill>
-                  <a:srgbClr val="B5CEA8"/>
-                </a:solidFill>
-                <a:latin typeface="Consolas"/>
-              </a:rPr>
-              <a:t>2</a:t>
-            </a:r>
-            <a:r>
-              <a:rPr sz="1600">
-                <a:solidFill>
-                  <a:srgbClr val="D4D4D4"/>
-                </a:solidFill>
-                <a:latin typeface="Consolas"/>
-              </a:rPr>
-              <a:t>)</a:t>
-            </a:r>
-            <a:r>
-              <a:rPr sz="1600">
-                <a:solidFill>
-                  <a:srgbClr val="D4D4D4"/>
-                </a:solidFill>
-                <a:latin typeface="Consolas"/>
-              </a:rPr>
-              <a:t>-</a:t>
-            </a:r>
-            <a:r>
-              <a:rPr sz="1600">
-                <a:solidFill>
-                  <a:srgbClr val="D4D4D4"/>
-                </a:solidFill>
-                <a:latin typeface="Consolas"/>
-              </a:rPr>
-              <a:t>A</a:t>
-            </a:r>
-            <a:r>
-              <a:rPr sz="1600">
-                <a:solidFill>
-                  <a:srgbClr val="D4D4D4"/>
-                </a:solidFill>
-                <a:latin typeface="Consolas"/>
-              </a:rPr>
-              <a:t>)</a:t>
-            </a:r>
-            <a:r>
-              <a:rPr sz="1600">
-                <a:solidFill>
-                  <a:srgbClr val="D4D4D4"/>
-                </a:solidFill>
-                <a:latin typeface="Consolas"/>
-              </a:rPr>
-              <a:t>/</a:t>
-            </a:r>
-            <a:r>
-              <a:rPr sz="1600">
-                <a:solidFill>
-                  <a:srgbClr val="B5CEA8"/>
-                </a:solidFill>
-                <a:latin typeface="Consolas"/>
-              </a:rPr>
-              <a:t>6076.</a:t>
-            </a:r>
-            <a:r>
-              <a:rPr sz="1600">
-                <a:solidFill>
-                  <a:srgbClr val="D4D4D4"/>
-                </a:solidFill>
-                <a:latin typeface="Consolas"/>
-              </a:rPr>
-              <a:t>;</a:t>
-            </a:r>
-          </a:p>
-          <a:p>
-            <a:pPr>
-              <a:spcAft>
-                <a:spcPts val="100"/>
-              </a:spcAft>
-            </a:pPr>
-            <a:r>
-              <a:rPr sz="1600">
-                <a:solidFill>
-                  <a:srgbClr val="D4D4D4"/>
-                </a:solidFill>
-                <a:latin typeface="Consolas"/>
-              </a:rPr>
-              <a:t>        </a:t>
-            </a:r>
-            <a:r>
-              <a:rPr sz="1600">
-                <a:solidFill>
-                  <a:srgbClr val="4EC9B0"/>
-                </a:solidFill>
-                <a:latin typeface="Consolas"/>
-              </a:rPr>
-              <a:t>count</a:t>
-            </a:r>
-            <a:r>
-              <a:rPr sz="1600">
-                <a:solidFill>
-                  <a:srgbClr val="D4D4D4"/>
-                </a:solidFill>
-                <a:latin typeface="Consolas"/>
-              </a:rPr>
-              <a:t>=</a:t>
-            </a:r>
-            <a:r>
-              <a:rPr sz="1600">
-                <a:solidFill>
-                  <a:srgbClr val="4EC9B0"/>
-                </a:solidFill>
-                <a:latin typeface="Consolas"/>
-              </a:rPr>
-              <a:t>count</a:t>
-            </a:r>
-            <a:r>
-              <a:rPr sz="1600">
-                <a:solidFill>
-                  <a:srgbClr val="D4D4D4"/>
-                </a:solidFill>
-                <a:latin typeface="Consolas"/>
-              </a:rPr>
-              <a:t>+</a:t>
-            </a:r>
-            <a:r>
-              <a:rPr sz="1600">
-                <a:solidFill>
-                  <a:srgbClr val="B5CEA8"/>
-                </a:solidFill>
-                <a:latin typeface="Consolas"/>
-              </a:rPr>
-              <a:t>1</a:t>
-            </a:r>
-            <a:r>
-              <a:rPr sz="1600">
-                <a:solidFill>
-                  <a:srgbClr val="D4D4D4"/>
-                </a:solidFill>
-                <a:latin typeface="Consolas"/>
-              </a:rPr>
-              <a:t>;</a:t>
-            </a:r>
-          </a:p>
-          <a:p>
-            <a:pPr>
-              <a:spcAft>
-                <a:spcPts val="100"/>
-              </a:spcAft>
-            </a:pPr>
-            <a:r>
-              <a:rPr sz="1600">
-                <a:solidFill>
-                  <a:srgbClr val="D4D4D4"/>
-                </a:solidFill>
-                <a:latin typeface="Consolas"/>
-              </a:rPr>
-              <a:t>        </a:t>
-            </a:r>
-            <a:r>
-              <a:rPr sz="1600">
-                <a:solidFill>
-                  <a:srgbClr val="D4D4D4"/>
-                </a:solidFill>
-                <a:latin typeface="Consolas"/>
-              </a:rPr>
-              <a:t>ArrayT</a:t>
-            </a:r>
-            <a:r>
-              <a:rPr sz="1600">
-                <a:solidFill>
-                  <a:srgbClr val="D4D4D4"/>
-                </a:solidFill>
-                <a:latin typeface="Consolas"/>
-              </a:rPr>
-              <a:t>(</a:t>
-            </a:r>
-            <a:r>
-              <a:rPr sz="1600">
-                <a:solidFill>
-                  <a:srgbClr val="4EC9B0"/>
-                </a:solidFill>
-                <a:latin typeface="Consolas"/>
-              </a:rPr>
-              <a:t>count</a:t>
-            </a:r>
-            <a:r>
-              <a:rPr sz="1600">
-                <a:solidFill>
-                  <a:srgbClr val="D4D4D4"/>
-                </a:solidFill>
-                <a:latin typeface="Consolas"/>
-              </a:rPr>
-              <a:t>)</a:t>
-            </a:r>
-            <a:r>
-              <a:rPr sz="1600">
-                <a:solidFill>
-                  <a:srgbClr val="D4D4D4"/>
-                </a:solidFill>
-                <a:latin typeface="Consolas"/>
-              </a:rPr>
-              <a:t>=</a:t>
-            </a:r>
-            <a:r>
-              <a:rPr sz="1600">
-                <a:solidFill>
-                  <a:srgbClr val="D4D4D4"/>
-                </a:solidFill>
-                <a:latin typeface="Consolas"/>
-              </a:rPr>
-              <a:t>T</a:t>
-            </a:r>
-            <a:r>
-              <a:rPr sz="1600">
-                <a:solidFill>
-                  <a:srgbClr val="D4D4D4"/>
-                </a:solidFill>
-                <a:latin typeface="Consolas"/>
-              </a:rPr>
-              <a:t>;</a:t>
-            </a:r>
-            <a:r>
-              <a:rPr sz="1600">
-                <a:solidFill>
-                  <a:srgbClr val="D4D4D4"/>
-                </a:solidFill>
-                <a:latin typeface="Consolas"/>
-              </a:rPr>
-              <a:t>  </a:t>
-            </a:r>
-            <a:r>
-              <a:rPr sz="1600">
-                <a:solidFill>
-                  <a:srgbClr val="D4D4D4"/>
-                </a:solidFill>
-                <a:latin typeface="Consolas"/>
-              </a:rPr>
-              <a:t>ArrayDISTNM</a:t>
-            </a:r>
-            <a:r>
-              <a:rPr sz="1600">
-                <a:solidFill>
-                  <a:srgbClr val="D4D4D4"/>
-                </a:solidFill>
-                <a:latin typeface="Consolas"/>
-              </a:rPr>
-              <a:t>(</a:t>
-            </a:r>
-            <a:r>
-              <a:rPr sz="1600">
-                <a:solidFill>
-                  <a:srgbClr val="4EC9B0"/>
-                </a:solidFill>
-                <a:latin typeface="Consolas"/>
-              </a:rPr>
-              <a:t>count</a:t>
-            </a:r>
-            <a:r>
-              <a:rPr sz="1600">
-                <a:solidFill>
-                  <a:srgbClr val="D4D4D4"/>
-                </a:solidFill>
-                <a:latin typeface="Consolas"/>
-              </a:rPr>
-              <a:t>)</a:t>
-            </a:r>
-            <a:r>
-              <a:rPr sz="1600">
-                <a:solidFill>
-                  <a:srgbClr val="D4D4D4"/>
-                </a:solidFill>
-                <a:latin typeface="Consolas"/>
-              </a:rPr>
-              <a:t>=</a:t>
-            </a:r>
-            <a:r>
-              <a:rPr sz="1600">
-                <a:solidFill>
-                  <a:srgbClr val="D4D4D4"/>
-                </a:solidFill>
-                <a:latin typeface="Consolas"/>
-              </a:rPr>
-              <a:t>DISTNM</a:t>
-            </a:r>
-            <a:r>
-              <a:rPr sz="1600">
-                <a:solidFill>
-                  <a:srgbClr val="D4D4D4"/>
-                </a:solidFill>
-                <a:latin typeface="Consolas"/>
-              </a:rPr>
-              <a:t>;</a:t>
-            </a:r>
-            <a:r>
-              <a:rPr sz="1600">
-                <a:solidFill>
-                  <a:srgbClr val="D4D4D4"/>
-                </a:solidFill>
-                <a:latin typeface="Consolas"/>
-              </a:rPr>
-              <a:t>  </a:t>
-            </a:r>
-            <a:r>
-              <a:rPr sz="1600">
-                <a:solidFill>
-                  <a:srgbClr val="D4D4D4"/>
-                </a:solidFill>
-                <a:latin typeface="Consolas"/>
-              </a:rPr>
-              <a:t>ArrayALTNM</a:t>
-            </a:r>
-            <a:r>
-              <a:rPr sz="1600">
-                <a:solidFill>
-                  <a:srgbClr val="D4D4D4"/>
-                </a:solidFill>
-                <a:latin typeface="Consolas"/>
-              </a:rPr>
-              <a:t>(</a:t>
-            </a:r>
-            <a:r>
-              <a:rPr sz="1600">
-                <a:solidFill>
-                  <a:srgbClr val="4EC9B0"/>
-                </a:solidFill>
-                <a:latin typeface="Consolas"/>
-              </a:rPr>
-              <a:t>count</a:t>
-            </a:r>
-            <a:r>
-              <a:rPr sz="1600">
-                <a:solidFill>
-                  <a:srgbClr val="D4D4D4"/>
-                </a:solidFill>
-                <a:latin typeface="Consolas"/>
-              </a:rPr>
-              <a:t>)</a:t>
-            </a:r>
-            <a:r>
-              <a:rPr sz="1600">
-                <a:solidFill>
-                  <a:srgbClr val="D4D4D4"/>
-                </a:solidFill>
-                <a:latin typeface="Consolas"/>
-              </a:rPr>
-              <a:t>=</a:t>
-            </a:r>
-            <a:r>
-              <a:rPr sz="1600">
-                <a:solidFill>
-                  <a:srgbClr val="D4D4D4"/>
-                </a:solidFill>
-                <a:latin typeface="Consolas"/>
-              </a:rPr>
-              <a:t>ALTNM</a:t>
-            </a:r>
-            <a:r>
-              <a:rPr sz="1600">
-                <a:solidFill>
-                  <a:srgbClr val="D4D4D4"/>
-                </a:solidFill>
-                <a:latin typeface="Consolas"/>
-              </a:rPr>
-              <a:t>;</a:t>
-            </a:r>
-          </a:p>
-          <a:p>
-            <a:pPr>
-              <a:spcAft>
-                <a:spcPts val="100"/>
-              </a:spcAft>
-            </a:pPr>
-            <a:r>
-              <a:rPr sz="1600">
-                <a:solidFill>
-                  <a:srgbClr val="D4D4D4"/>
-                </a:solidFill>
-                <a:latin typeface="Consolas"/>
-              </a:rPr>
-              <a:t>    </a:t>
-            </a:r>
-            <a:r>
-              <a:rPr sz="1600">
-                <a:solidFill>
-                  <a:srgbClr val="569CD6"/>
-                </a:solidFill>
-                <a:latin typeface="Consolas"/>
-              </a:rPr>
-              <a:t>end</a:t>
-            </a:r>
-          </a:p>
-          <a:p>
-            <a:pPr>
-              <a:spcAft>
-                <a:spcPts val="100"/>
-              </a:spcAft>
-            </a:pPr>
-            <a:r>
-              <a:rPr sz="1600">
-                <a:solidFill>
-                  <a:srgbClr val="569CD6"/>
-                </a:solidFill>
-                <a:latin typeface="Consolas"/>
-              </a:rPr>
-              <a:t>end</a:t>
-            </a:r>
-          </a:p>
-          <a:p>
-            <a:pPr>
-              <a:spcAft>
-                <a:spcPts val="100"/>
-              </a:spcAft>
-            </a:pPr>
-            <a:r>
-              <a:rPr sz="1600">
-                <a:solidFill>
-                  <a:srgbClr val="4EC9B0"/>
-                </a:solidFill>
-                <a:latin typeface="Consolas"/>
-              </a:rPr>
-              <a:t>figure</a:t>
-            </a:r>
-          </a:p>
-          <a:p>
-            <a:pPr>
-              <a:spcAft>
-                <a:spcPts val="100"/>
-              </a:spcAft>
-            </a:pPr>
-            <a:r>
-              <a:rPr sz="1600">
-                <a:solidFill>
-                  <a:srgbClr val="4EC9B0"/>
-                </a:solidFill>
-                <a:latin typeface="Consolas"/>
-              </a:rPr>
-              <a:t>plot</a:t>
-            </a:r>
-            <a:r>
-              <a:rPr sz="1600">
-                <a:solidFill>
-                  <a:srgbClr val="D4D4D4"/>
-                </a:solidFill>
-                <a:latin typeface="Consolas"/>
-              </a:rPr>
-              <a:t>(</a:t>
-            </a:r>
-            <a:r>
-              <a:rPr sz="1600">
-                <a:solidFill>
-                  <a:srgbClr val="D4D4D4"/>
-                </a:solidFill>
-                <a:latin typeface="Consolas"/>
-              </a:rPr>
-              <a:t>ArrayDISTNM</a:t>
-            </a:r>
-            <a:r>
-              <a:rPr sz="1600">
-                <a:solidFill>
-                  <a:srgbClr val="D4D4D4"/>
-                </a:solidFill>
-                <a:latin typeface="Consolas"/>
-              </a:rPr>
-              <a:t>,</a:t>
-            </a:r>
-            <a:r>
-              <a:rPr sz="1600">
-                <a:solidFill>
-                  <a:srgbClr val="D4D4D4"/>
-                </a:solidFill>
-                <a:latin typeface="Consolas"/>
-              </a:rPr>
-              <a:t>ArrayALTNM</a:t>
-            </a:r>
-            <a:r>
-              <a:rPr sz="1600">
-                <a:solidFill>
-                  <a:srgbClr val="D4D4D4"/>
-                </a:solidFill>
-                <a:latin typeface="Consolas"/>
-              </a:rPr>
-              <a:t>)</a:t>
-            </a:r>
-            <a:r>
-              <a:rPr sz="1600">
-                <a:solidFill>
-                  <a:srgbClr val="D4D4D4"/>
-                </a:solidFill>
-                <a:latin typeface="Consolas"/>
-              </a:rPr>
-              <a:t>,</a:t>
-            </a:r>
-            <a:r>
-              <a:rPr sz="1600">
-                <a:solidFill>
-                  <a:srgbClr val="4EC9B0"/>
-                </a:solidFill>
-                <a:latin typeface="Consolas"/>
-              </a:rPr>
-              <a:t>grid</a:t>
-            </a:r>
-          </a:p>
-          <a:p>
-            <a:pPr>
-              <a:spcAft>
-                <a:spcPts val="100"/>
-              </a:spcAft>
-            </a:pPr>
-            <a:r>
-              <a:rPr sz="1600">
-                <a:solidFill>
-                  <a:srgbClr val="4EC9B0"/>
-                </a:solidFill>
-                <a:latin typeface="Consolas"/>
-              </a:rPr>
-              <a:t>xlabel</a:t>
-            </a:r>
-            <a:r>
-              <a:rPr sz="1600">
-                <a:solidFill>
-                  <a:srgbClr val="D4D4D4"/>
-                </a:solidFill>
-                <a:latin typeface="Consolas"/>
-              </a:rPr>
-              <a:t>(</a:t>
-            </a:r>
-            <a:r>
-              <a:rPr sz="1600">
-                <a:solidFill>
-                  <a:srgbClr val="CE9178"/>
-                </a:solidFill>
-                <a:latin typeface="Consolas"/>
-              </a:rPr>
-              <a:t>'</a:t>
-            </a:r>
-            <a:r>
-              <a:rPr sz="1600">
-                <a:solidFill>
-                  <a:srgbClr val="CE9178"/>
-                </a:solidFill>
-                <a:latin typeface="Consolas"/>
-              </a:rPr>
-              <a:t>Downrange (Nmi)'</a:t>
-            </a:r>
-            <a:r>
-              <a:rPr sz="1600">
-                <a:solidFill>
-                  <a:srgbClr val="D4D4D4"/>
-                </a:solidFill>
-                <a:latin typeface="Consolas"/>
-              </a:rPr>
-              <a:t>)</a:t>
-            </a:r>
-            <a:r>
-              <a:rPr sz="1600">
-                <a:solidFill>
-                  <a:srgbClr val="D4D4D4"/>
-                </a:solidFill>
-                <a:latin typeface="Consolas"/>
-              </a:rPr>
-              <a:t>;</a:t>
-            </a:r>
-            <a:r>
-              <a:rPr sz="1600">
-                <a:solidFill>
-                  <a:srgbClr val="D4D4D4"/>
-                </a:solidFill>
-                <a:latin typeface="Consolas"/>
-              </a:rPr>
-              <a:t>   </a:t>
-            </a:r>
-            <a:r>
-              <a:rPr sz="1600">
-                <a:solidFill>
-                  <a:srgbClr val="4EC9B0"/>
-                </a:solidFill>
-                <a:latin typeface="Consolas"/>
-              </a:rPr>
-              <a:t>ylabel</a:t>
-            </a:r>
-            <a:r>
-              <a:rPr sz="1600">
-                <a:solidFill>
-                  <a:srgbClr val="D4D4D4"/>
-                </a:solidFill>
-                <a:latin typeface="Consolas"/>
-              </a:rPr>
-              <a:t>(</a:t>
-            </a:r>
-            <a:r>
-              <a:rPr sz="1600">
-                <a:solidFill>
-                  <a:srgbClr val="CE9178"/>
-                </a:solidFill>
-                <a:latin typeface="Consolas"/>
-              </a:rPr>
-              <a:t>'</a:t>
-            </a:r>
-            <a:r>
-              <a:rPr sz="1600">
-                <a:solidFill>
-                  <a:srgbClr val="CE9178"/>
-                </a:solidFill>
-                <a:latin typeface="Consolas"/>
-              </a:rPr>
-              <a:t>Altitude (Nmi)'</a:t>
-            </a:r>
-            <a:r>
-              <a:rPr sz="1600">
-                <a:solidFill>
-                  <a:srgbClr val="D4D4D4"/>
-                </a:solidFill>
-                <a:latin typeface="Consolas"/>
-              </a:rPr>
-              <a:t>)</a:t>
-            </a:r>
-            <a:r>
-              <a:rPr sz="1600">
-                <a:solidFill>
-                  <a:srgbClr val="D4D4D4"/>
-                </a:solidFill>
-                <a:latin typeface="Consolas"/>
-              </a:rPr>
-              <a:t>;</a:t>
-            </a:r>
-          </a:p>
-          <a:p>
-            <a:pPr>
-              <a:spcAft>
-                <a:spcPts val="100"/>
-              </a:spcAft>
-            </a:pPr>
-            <a:r>
-              <a:rPr sz="1600">
-                <a:solidFill>
-                  <a:srgbClr val="D4D4D4"/>
-                </a:solidFill>
-                <a:latin typeface="Consolas"/>
-              </a:rPr>
-              <a:t>save</a:t>
-            </a:r>
-            <a:r>
-              <a:rPr sz="1600">
-                <a:solidFill>
-                  <a:srgbClr val="D4D4D4"/>
-                </a:solidFill>
-                <a:latin typeface="Consolas"/>
-              </a:rPr>
-              <a:t> </a:t>
-            </a:r>
-            <a:r>
-              <a:rPr sz="1600">
-                <a:solidFill>
-                  <a:srgbClr val="CE9178"/>
-                </a:solidFill>
-                <a:latin typeface="Consolas"/>
-              </a:rPr>
-              <a:t>datfil</a:t>
-            </a:r>
-            <a:r>
-              <a:rPr sz="1600">
-                <a:solidFill>
-                  <a:srgbClr val="D4D4D4"/>
-                </a:solidFill>
-                <a:latin typeface="Consolas"/>
-              </a:rPr>
-              <a:t> </a:t>
-            </a:r>
-            <a:r>
-              <a:rPr sz="1600">
-                <a:solidFill>
-                  <a:srgbClr val="CE9178"/>
-                </a:solidFill>
-                <a:latin typeface="Consolas"/>
-              </a:rPr>
-              <a:t>output</a:t>
-            </a:r>
-            <a:r>
-              <a:rPr sz="1600">
-                <a:solidFill>
-                  <a:srgbClr val="D4D4D4"/>
-                </a:solidFill>
-                <a:latin typeface="Consolas"/>
-              </a:rPr>
-              <a:t> </a:t>
-            </a:r>
-            <a:r>
-              <a:rPr sz="1600">
-                <a:solidFill>
-                  <a:srgbClr val="D4D4D4"/>
-                </a:solidFill>
-                <a:latin typeface="Consolas"/>
-              </a:rPr>
-              <a:t>/</a:t>
-            </a:r>
-            <a:r>
-              <a:rPr sz="1600">
-                <a:solidFill>
-                  <a:srgbClr val="4EC9B0"/>
-                </a:solidFill>
-                <a:latin typeface="Consolas"/>
-              </a:rPr>
-              <a:t>ascii</a:t>
-            </a:r>
-          </a:p>
-          <a:p>
-            <a:pPr>
-              <a:spcAft>
-                <a:spcPts val="100"/>
-              </a:spcAft>
-            </a:pPr>
-            <a:r>
-              <a:rPr sz="1600">
-                <a:solidFill>
-                  <a:srgbClr val="4EC9B0"/>
-                </a:solidFill>
-                <a:latin typeface="Consolas"/>
-              </a:rPr>
-              <a:t>disp</a:t>
-            </a:r>
-            <a:r>
-              <a:rPr sz="1600">
-                <a:solidFill>
-                  <a:srgbClr val="D4D4D4"/>
-                </a:solidFill>
-                <a:latin typeface="Consolas"/>
-              </a:rPr>
-              <a:t> </a:t>
-            </a:r>
-            <a:r>
-              <a:rPr sz="1600">
-                <a:solidFill>
-                  <a:srgbClr val="CE9178"/>
-                </a:solidFill>
-                <a:latin typeface="Consolas"/>
-              </a:rPr>
-              <a:t>'</a:t>
-            </a:r>
-            <a:r>
-              <a:rPr sz="1600">
-                <a:solidFill>
-                  <a:srgbClr val="CE9178"/>
-                </a:solidFill>
-                <a:latin typeface="Consolas"/>
-              </a:rPr>
-              <a:t>simulation finished'</a:t>
-            </a:r>
-          </a:p>
-        </p:txBody>
-      </p:sp>
-      <p:sp>
-        <p:nvSpPr>
-          <p:cNvPr id="9" name="TextBox 8"/>
-          <p:cNvSpPr txBox="1"/>
-          <p:nvPr/>
-        </p:nvSpPr>
-        <p:spPr>
-          <a:xfrm>
-            <a:off x="777240" y="5093208"/>
-            <a:ext cx="10972800" cy="274320"/>
-          </a:xfrm>
-          <a:prstGeom prst="rect">
-            <a:avLst/>
-          </a:prstGeom>
-          <a:noFill/>
-        </p:spPr>
-        <p:txBody>
-          <a:bodyPr wrap="none">
-            <a:spAutoFit/>
-          </a:bodyPr>
-          <a:lstStyle/>
-          <a:p>
-            <a:r>
-              <a:rPr sz="1200" i="1">
-                <a:solidFill>
-                  <a:srgbClr val="8CA3B8"/>
-                </a:solidFill>
-                <a:latin typeface="Segoe UI"/>
-              </a:rPr>
-              <a:t>Zarchan, Tactical &amp; Strategic Missile Guidance, 6th ed. (MATLAB) — gravity-turn booster sim</a:t>
-            </a:r>
-          </a:p>
-        </p:txBody>
-      </p:sp>
-      <p:sp>
-        <p:nvSpPr>
-          <p:cNvPr id="10" name="TextBox 9"/>
-          <p:cNvSpPr txBox="1"/>
-          <p:nvPr/>
-        </p:nvSpPr>
-        <p:spPr>
-          <a:xfrm>
-            <a:off x="777240" y="5422392"/>
-            <a:ext cx="10972800" cy="457200"/>
-          </a:xfrm>
-          <a:prstGeom prst="rect">
-            <a:avLst/>
-          </a:prstGeom>
-          <a:noFill/>
-        </p:spPr>
-        <p:txBody>
-          <a:bodyPr wrap="none">
-            <a:spAutoFit/>
-          </a:bodyPr>
-          <a:lstStyle/>
-          <a:p>
-            <a:r>
-              <a:rPr sz="1900" i="1">
-                <a:solidFill>
-                  <a:srgbClr val="7EE08A"/>
-                </a:solidFill>
-                <a:latin typeface="Segoe UI"/>
-              </a:rPr>
-              <a:t>No boundary between simulation, analysis, and I/O — every concern in one scope.</a:t>
+              <a:t>42</a:t>
             </a:r>
           </a:p>
         </p:txBody>
@@ -32939,8 +33885,8 @@
         </p:nvSpPr>
         <p:spPr>
           <a:xfrm>
-            <a:off x="1188720" y="1371600"/>
-            <a:ext cx="9784080" cy="1477328"/>
+            <a:off x="457200" y="731520"/>
+            <a:ext cx="11247120" cy="914400"/>
           </a:xfrm>
           <a:prstGeom prst="rect">
             <a:avLst/>
@@ -32954,202 +33900,14 @@
           <a:lstStyle/>
           <a:p>
             <a:r>
-              <a:rPr lang="pl-PL" sz="3000" i="1" dirty="0">
+              <a:rPr sz="3100" b="1" i="0">
                 <a:solidFill>
                   <a:srgbClr val="FFFFFF"/>
                 </a:solidFill>
                 <a:latin typeface="Segoe UI"/>
               </a:rPr>
-              <a:t>General </a:t>
-            </a:r>
-            <a:r>
-              <a:rPr lang="pl-PL" sz="3000" i="1" dirty="0" err="1">
-                <a:solidFill>
-                  <a:srgbClr val="FFFFFF"/>
-                </a:solidFill>
-                <a:latin typeface="Segoe UI"/>
-              </a:rPr>
-              <a:t>good</a:t>
-            </a:r>
-            <a:r>
-              <a:rPr lang="pl-PL" sz="3000" i="1" dirty="0">
-                <a:solidFill>
-                  <a:srgbClr val="FFFFFF"/>
-                </a:solidFill>
-                <a:latin typeface="Segoe UI"/>
-              </a:rPr>
-              <a:t> idea:</a:t>
-            </a:r>
-          </a:p>
-          <a:p>
-            <a:r>
-              <a:rPr lang="pl-PL" sz="3000" i="1" dirty="0" err="1">
-                <a:solidFill>
-                  <a:srgbClr val="FFFFFF"/>
-                </a:solidFill>
-                <a:latin typeface="Segoe UI"/>
-              </a:rPr>
-              <a:t>Choose</a:t>
-            </a:r>
-            <a:r>
-              <a:rPr lang="pl-PL" sz="3000" i="1" dirty="0">
-                <a:solidFill>
-                  <a:srgbClr val="FFFFFF"/>
-                </a:solidFill>
-                <a:latin typeface="Segoe UI"/>
-              </a:rPr>
-              <a:t> </a:t>
-            </a:r>
-            <a:r>
-              <a:rPr lang="pl-PL" sz="3000" i="1" dirty="0" err="1">
-                <a:solidFill>
-                  <a:srgbClr val="FFFFFF"/>
-                </a:solidFill>
-                <a:latin typeface="Segoe UI"/>
-              </a:rPr>
-              <a:t>correct</a:t>
-            </a:r>
-            <a:r>
-              <a:rPr lang="pl-PL" sz="3000" i="1" dirty="0">
-                <a:solidFill>
-                  <a:srgbClr val="FFFFFF"/>
-                </a:solidFill>
-                <a:latin typeface="Segoe UI"/>
-              </a:rPr>
-              <a:t> </a:t>
-            </a:r>
-            <a:r>
-              <a:rPr lang="pl-PL" sz="3000" i="1" dirty="0" err="1">
-                <a:solidFill>
-                  <a:srgbClr val="FFFFFF"/>
-                </a:solidFill>
-                <a:latin typeface="Segoe UI"/>
-              </a:rPr>
-              <a:t>states</a:t>
-            </a:r>
-            <a:r>
-              <a:rPr lang="pl-PL" sz="3000" i="1" dirty="0">
-                <a:solidFill>
-                  <a:srgbClr val="FFFFFF"/>
-                </a:solidFill>
-                <a:latin typeface="Segoe UI"/>
-              </a:rPr>
-              <a:t> and </a:t>
-            </a:r>
-            <a:r>
-              <a:rPr lang="pl-PL" sz="3000" i="1" dirty="0" err="1">
-                <a:solidFill>
-                  <a:srgbClr val="FFFFFF"/>
-                </a:solidFill>
-                <a:latin typeface="Segoe UI"/>
-              </a:rPr>
-              <a:t>make</a:t>
-            </a:r>
-            <a:r>
-              <a:rPr lang="pl-PL" sz="3000" i="1" dirty="0">
-                <a:solidFill>
-                  <a:srgbClr val="FFFFFF"/>
-                </a:solidFill>
-                <a:latin typeface="Segoe UI"/>
-              </a:rPr>
-              <a:t> </a:t>
-            </a:r>
-            <a:r>
-              <a:rPr lang="pl-PL" sz="3000" i="1" dirty="0" err="1">
-                <a:solidFill>
-                  <a:srgbClr val="FFFFFF"/>
-                </a:solidFill>
-                <a:latin typeface="Segoe UI"/>
-              </a:rPr>
-              <a:t>everything</a:t>
-            </a:r>
-            <a:r>
-              <a:rPr lang="pl-PL" sz="3000" i="1" dirty="0">
-                <a:solidFill>
-                  <a:srgbClr val="FFFFFF"/>
-                </a:solidFill>
-                <a:latin typeface="Segoe UI"/>
-              </a:rPr>
-              <a:t> </a:t>
-            </a:r>
-            <a:r>
-              <a:rPr lang="pl-PL" sz="3000" i="1" dirty="0" err="1">
-                <a:solidFill>
-                  <a:srgbClr val="FFFFFF"/>
-                </a:solidFill>
-                <a:latin typeface="Segoe UI"/>
-              </a:rPr>
-              <a:t>else</a:t>
-            </a:r>
-            <a:r>
-              <a:rPr lang="pl-PL" sz="3000" i="1" dirty="0">
-                <a:solidFill>
-                  <a:srgbClr val="FFFFFF"/>
-                </a:solidFill>
-                <a:latin typeface="Segoe UI"/>
-              </a:rPr>
-              <a:t> a </a:t>
-            </a:r>
-            <a:r>
-              <a:rPr lang="pl-PL" sz="3000" i="1" dirty="0" err="1">
-                <a:solidFill>
-                  <a:srgbClr val="FFFFFF"/>
-                </a:solidFill>
-                <a:latin typeface="Segoe UI"/>
-              </a:rPr>
-              <a:t>pure</a:t>
-            </a:r>
-            <a:r>
-              <a:rPr lang="pl-PL" sz="3000" i="1" dirty="0">
-                <a:solidFill>
-                  <a:srgbClr val="FFFFFF"/>
-                </a:solidFill>
-                <a:latin typeface="Segoe UI"/>
-              </a:rPr>
-              <a:t> </a:t>
-            </a:r>
-            <a:r>
-              <a:rPr lang="pl-PL" sz="3000" i="1" dirty="0" err="1">
-                <a:solidFill>
-                  <a:srgbClr val="FFFFFF"/>
-                </a:solidFill>
-                <a:latin typeface="Segoe UI"/>
-              </a:rPr>
-              <a:t>state</a:t>
-            </a:r>
-            <a:r>
-              <a:rPr lang="pl-PL" sz="3000" i="1" dirty="0">
-                <a:solidFill>
-                  <a:srgbClr val="FFFFFF"/>
-                </a:solidFill>
-                <a:latin typeface="Segoe UI"/>
-              </a:rPr>
-              <a:t> </a:t>
-            </a:r>
-            <a:r>
-              <a:rPr lang="pl-PL" sz="3000" i="1" dirty="0" err="1">
-                <a:solidFill>
-                  <a:srgbClr val="FFFFFF"/>
-                </a:solidFill>
-                <a:latin typeface="Segoe UI"/>
-              </a:rPr>
-              <a:t>function</a:t>
-            </a:r>
-            <a:r>
-              <a:rPr lang="pl-PL" sz="3000" i="1" dirty="0">
-                <a:solidFill>
-                  <a:srgbClr val="FFFFFF"/>
-                </a:solidFill>
-                <a:latin typeface="Segoe UI"/>
-              </a:rPr>
-              <a:t>.</a:t>
-            </a:r>
-            <a:endParaRPr sz="3000" b="0" i="1" dirty="0">
-              <a:solidFill>
-                <a:srgbClr val="FFFFFF"/>
-              </a:solidFill>
-              <a:latin typeface="Segoe UI"/>
-            </a:endParaRPr>
+              <a:t>Choose the states — everything else is a state function</a:t>
+            </a:r>
           </a:p>
         </p:txBody>
       </p:sp>
@@ -33161,8 +33919,8 @@
         </p:nvSpPr>
         <p:spPr>
           <a:xfrm>
-            <a:off x="719519" y="5120640"/>
-            <a:ext cx="10722487" cy="430887"/>
+            <a:off x="548640" y="2286000"/>
+            <a:ext cx="10972800" cy="548640"/>
           </a:xfrm>
           <a:prstGeom prst="rect">
             <a:avLst/>
@@ -33177,67 +33935,13 @@
           <a:p>
             <a:pPr algn="ctr"/>
             <a:r>
-              <a:rPr sz="2200" b="1" dirty="0">
+              <a:rPr sz="2200" b="1" i="0">
                 <a:solidFill>
                   <a:srgbClr val="35C4E8"/>
                 </a:solidFill>
                 <a:latin typeface="Segoe UI"/>
               </a:rPr>
-              <a:t>SOPOT — “Obviously Physics, Obviously Templates” — </a:t>
-            </a:r>
-            <a:r>
-              <a:rPr lang="pl-PL" sz="2200" b="1" dirty="0" err="1">
-                <a:solidFill>
-                  <a:srgbClr val="35C4E8"/>
-                </a:solidFill>
-                <a:latin typeface="Segoe UI"/>
-              </a:rPr>
-              <a:t>tries</a:t>
-            </a:r>
-            <a:r>
-              <a:rPr lang="pl-PL" sz="2200" b="1" dirty="0">
-                <a:solidFill>
-                  <a:srgbClr val="35C4E8"/>
-                </a:solidFill>
-                <a:latin typeface="Segoe UI"/>
-              </a:rPr>
-              <a:t> to </a:t>
-            </a:r>
-            <a:r>
-              <a:rPr lang="pl-PL" sz="2200" b="1" dirty="0" err="1">
-                <a:solidFill>
-                  <a:srgbClr val="35C4E8"/>
-                </a:solidFill>
-                <a:latin typeface="Segoe UI"/>
-              </a:rPr>
-              <a:t>capture</a:t>
-            </a:r>
-            <a:r>
-              <a:rPr lang="pl-PL" sz="2200" b="1" dirty="0">
-                <a:solidFill>
-                  <a:srgbClr val="35C4E8"/>
-                </a:solidFill>
-                <a:latin typeface="Segoe UI"/>
-              </a:rPr>
-              <a:t> </a:t>
-            </a:r>
-            <a:r>
-              <a:rPr lang="pl-PL" sz="2200" b="1" dirty="0" err="1">
-                <a:solidFill>
-                  <a:srgbClr val="35C4E8"/>
-                </a:solidFill>
-                <a:latin typeface="Segoe UI"/>
-              </a:rPr>
-              <a:t>this</a:t>
-            </a:r>
-            <a:r>
-              <a:rPr lang="pl-PL" sz="2200" b="1" dirty="0">
-                <a:solidFill>
-                  <a:srgbClr val="35C4E8"/>
-                </a:solidFill>
-                <a:latin typeface="Segoe UI"/>
-              </a:rPr>
-              <a:t> idea</a:t>
+              <a:t>SOPOT — “Obviously Physics, Obviously Templates” — tries to capture this idea</a:t>
             </a:r>
             <a:endParaRPr sz="2200" b="1" dirty="0">
               <a:solidFill>
@@ -33313,6 +34017,40 @@
                 <a:latin typeface="Segoe UI"/>
               </a:rPr>
               <a:t>7</a:t>
+            </a:r>
+          </a:p>
+        </p:txBody>
+      </p:sp>
+      <p:sp>
+        <p:nvSpPr>
+          <p:cNvPr id="7" name="kicker"/>
+          <p:cNvSpPr txBox="1"/>
+          <p:nvPr/>
+        </p:nvSpPr>
+        <p:spPr>
+          <a:xfrm>
+            <a:off x="548640" y="365760"/>
+            <a:ext cx="11155680" cy="274320"/>
+          </a:xfrm>
+          <a:prstGeom prst="rect">
+            <a:avLst/>
+          </a:prstGeom>
+          <a:noFill/>
+        </p:spPr>
+        <p:txBody>
+          <a:bodyPr wrap="none">
+            <a:spAutoFit/>
+          </a:bodyPr>
+          <a:lstStyle/>
+          <a:p>
+            <a:r>
+              <a:rPr sz="1300" b="1" i="0">
+                <a:solidFill>
+                  <a:srgbClr val="F2C744"/>
+                </a:solidFill>
+                <a:latin typeface="Segoe UI"/>
+              </a:rPr>
+              <a:t>THE PRINCIPLE</a:t>
             </a:r>
           </a:p>
         </p:txBody>

--- a/slides/ACCU-Separation-of-Concerns-at-Zero-Cost.pptx
+++ b/slides/ACCU-Separation-of-Concerns-at-Zero-Cost.pptx
@@ -32508,55 +32508,6 @@
                 <a:latin typeface="Segoe UI"/>
               </a:rPr>
               <a:t>/</a:t>
-            </a:r>
-            <a:r>
-              <a:rPr sz="2400" b="1" dirty="0" err="1">
-                <a:solidFill>
-                  <a:srgbClr val="35C4E8"/>
-                </a:solidFill>
-                <a:latin typeface="Segoe UI"/>
-              </a:rPr>
-              <a:t>accu-on-sea-2026-modular-physics</a:t>
-            </a:r>
-            <a:endParaRPr sz="2400" b="1" dirty="0">
-              <a:solidFill>
-                <a:srgbClr val="35C4E8"/>
-              </a:solidFill>
-              <a:latin typeface="Segoe UI"/>
-            </a:endParaRPr>
-          </a:p>
-          <a:p>
-            <a:pPr>
-              <a:spcAft>
-                <a:spcPts val="800"/>
-              </a:spcAft>
-            </a:pPr>
-            <a:r>
-              <a:rPr sz="2400" dirty="0">
-                <a:solidFill>
-                  <a:srgbClr val="35C4E8"/>
-                </a:solidFill>
-                <a:latin typeface="Segoe UI"/>
-              </a:rPr>
-              <a:t>•  </a:t>
-            </a:r>
-            <a:r>
-              <a:rPr sz="2400" b="0" dirty="0">
-                <a:solidFill>
-                  <a:srgbClr val="8CA3B8"/>
-                </a:solidFill>
-                <a:latin typeface="Segoe UI"/>
-              </a:rPr>
-              <a:t>Live demo:  </a:t>
-            </a:r>
-            <a:r>
-              <a:rPr sz="2400" b="1" dirty="0">
-                <a:solidFill>
-                  <a:srgbClr val="35C4E8"/>
-                </a:solidFill>
-                <a:latin typeface="Segoe UI"/>
-              </a:rPr>
-              <a:t>jedrzejmichalczyk.github.io/</a:t>
             </a:r>
             <a:r>
               <a:rPr sz="2400" b="1" dirty="0" err="1">
